--- a/downloads/presentations/modules/exe-420.pptx
+++ b/downloads/presentations/modules/exe-420.pptx
@@ -614,7 +614,8 @@
               <a:t>Technical and Governance Deep Dive
 An AI business case should begin with a problem statement. The problem should be operational and measurable, such as delayed case review, inconsistent public response drafting, high manual data cleanup burden, or inability to search internal guidance efficiently. A vague desire to 'use AI' is not a sufficient problem statement. The business case should connect the proposed AI use to a real public health need.
 The review should compare alternatives. Options may include doing nothing, improving workflow, improving data quality, using rules-based automation, procuring a vendor product, developing an internal tool, or joining a shared service. Each option should be assessed for benefit, cost, risk, time, staffing, sustainability, and governance burden. This comparison prevents AI from becoming the default answer to every operational problem.
-Success measures should be defined before funding. Measures might include reduced processing time, improved completeness, fewer manual touches, better routing accuracy, staff satisfaction, fewer errors, improved language access, or reduced backlog. Measures should also include safety and equity indicators. A tool that saves time but increases error rates, widens disparities, or erodes public trust should not be considered successful.</a:t>
+Success measures should be defined before funding. Measures might include reduced processing time, improved completeness, fewer manual touches, better routing accuracy, staff satisfaction, fewer errors, improved language access, or reduced backlog. Measures should also include safety and equity indicators. A tool that saves time but increases error rates, widens disparities, or erodes public trust should not be considered successful.
+Application guidance: Translate this concept into clear decision rights, review steps, documentation expectations, and escalation paths before an AI-supported workflow is approved.</a:t>
             </a:r>
             <a:endParaRPr lang="en-US" dirty="0"/>
           </a:p>
@@ -704,7 +705,8 @@
               <a:rPr lang="en-US" dirty="0"/>
               <a:t>Risks, Failure Modes, and Guardrails
 One risk is hidden cost. Agencies may purchase an AI tool without funding integration, monitoring, validation, staff training, or ongoing support. A guardrail is to require total cost of ownership in every business case.
-Another risk is benefits inflation. Vendors or project champions may overstate time savings or accuracy without local evidence. A guardrail is to require pilot success criteria and benefits realization review before scaling.</a:t>
+Another risk is benefits inflation. Vendors or project champions may overstate time savings or accuracy without local evidence. A guardrail is to require pilot success criteria and benefits realization review before scaling.
+Application guidance: Identify what could go wrong, who could be affected, what safeguards are needed, and what evidence should be reviewed before use expands.</a:t>
             </a:r>
             <a:endParaRPr lang="en-US" dirty="0"/>
           </a:p>
@@ -793,7 +795,8 @@
             <a:r>
               <a:rPr lang="en-US" dirty="0"/>
               <a:t>Application to AI-Supported Workflows
-Generative AI business cases should include review time, source verification, and records considerations. Predictive analytics business cases should include validation data, subgroup testing, and monitoring costs. Agentic AI business cases should include security architecture, approval workflows, rollback, logging, and incident response. Cost and value must reflect responsible use.</a:t>
+Generative AI business cases should include review time, source verification, and records considerations. Predictive analytics business cases should include validation data, subgroup testing, and monitoring costs. Agentic AI business cases should include security architecture, approval workflows, rollback, logging, and incident response. Cost and value must reflect responsible use.
+Application guidance: Use the concept to clarify workflow changes, dependencies, staffing, procurement requirements, training needs, and implementation checkpoints.</a:t>
             </a:r>
             <a:endParaRPr lang="en-US" dirty="0"/>
           </a:p>
@@ -884,7 +887,8 @@
               <a:t>Reflection Questions
 Which current or proposed AI use case in your agency raises this leadership or governance issue most clearly?
 Who currently has authority to make decisions about this issue, and is that authority documented?
-What evidence would governance or leadership need before approving the use case?</a:t>
+What evidence would governance or leadership need before approving the use case?
+Application guidance: Connect the concept to public health purpose, responsible use, required safeguards, documentation, and the next action a department should take.</a:t>
             </a:r>
             <a:endParaRPr lang="en-US" dirty="0"/>
           </a:p>
@@ -974,7 +978,8 @@
               <a:rPr lang="en-US" dirty="0"/>
               <a:t>Reflection Questions
 Which staff, partners, or communities would be affected if this issue were handled poorly?
-What policy, process, or artifact should be created or updated after this module?</a:t>
+What policy, process, or artifact should be created or updated after this module?
+Application guidance: Connect the concept to public health purpose, responsible use, required safeguards, documentation, and the next action a department should take.</a:t>
             </a:r>
             <a:endParaRPr lang="en-US" dirty="0"/>
           </a:p>
@@ -1063,7 +1068,8 @@
             <a:r>
               <a:rPr lang="en-US" dirty="0"/>
               <a:t>Practical Exercise
-Complete an AI business case review worksheet for one proposed investment. Include problem, alternatives, expected benefits, total cost of ownership, risk, equity considerations, implementation needs, and success measures.</a:t>
+Complete an AI business case review worksheet for one proposed investment. Include problem, alternatives, expected benefits, total cost of ownership, risk, equity considerations, implementation needs, and success measures.
+Application guidance: Use the assignment to test whether you can explain the concept, apply it to a realistic public health situation, and identify what would need review before the work moves forward.</a:t>
             </a:r>
             <a:endParaRPr lang="en-US" dirty="0"/>
           </a:p>
@@ -1152,7 +1158,8 @@
             <a:r>
               <a:rPr lang="en-US" dirty="0"/>
               <a:t>Before You Begin
-Choose a real or realistic public health AI use case. Document assumptions, unresolved questions, and which agency roles would need to review the artifact before it is adopted. The exercise should produce a work product that could support governance review, leadership discussion, implementation planning, or policy development.</a:t>
+Choose a real or realistic public health AI use case. Document assumptions, unresolved questions, and which agency roles would need to review the artifact before it is adopted. The exercise should produce a work product that could support governance review, leadership discussion, implementation planning, or policy development.
+Application guidance: Connect the concept to public health purpose, responsible use, required safeguards, documentation, and the next action a department should take.</a:t>
             </a:r>
             <a:endParaRPr lang="en-US" dirty="0"/>
           </a:p>
@@ -1241,7 +1248,8 @@
             <a:r>
               <a:rPr lang="en-US" dirty="0"/>
               <a:t>Expected Artifact or Evidence
-AI business case worksheet; total cost of ownership estimate; benefits realization plan; alternatives analysis.</a:t>
+AI business case worksheet; total cost of ownership estimate; benefits realization plan; alternatives analysis.
+Application guidance: Connect the concept to public health purpose, responsible use, required safeguards, documentation, and the next action a department should take.</a:t>
             </a:r>
             <a:endParaRPr lang="en-US" dirty="0"/>
           </a:p>
@@ -1330,7 +1338,8 @@
             <a:r>
               <a:rPr lang="en-US" dirty="0"/>
               <a:t>Expected Assignment
-AI business case worksheet; total cost of ownership estimate; benefits realization plan; alternatives analysis.</a:t>
+AI business case worksheet; total cost of ownership estimate; benefits realization plan; alternatives analysis.
+Application guidance: Use the assignment to test whether you can explain the concept, apply it to a realistic public health situation, and identify what would need review before the work moves forward.</a:t>
             </a:r>
             <a:endParaRPr lang="en-US" dirty="0"/>
           </a:p>
@@ -1423,7 +1432,8 @@
 2. Which practice best supports accountable public health AI governance?
 3. When should an AI use case be escalated for leadership or governance review?
 4. What is weak evidence of completion for a leadership and governance module?
-5. What should leaders do when an AI use case has meaningful benefits but unresolved risks?</a:t>
+5. What should leaders do when an AI use case has meaningful benefits but unresolved risks?
+Application guidance: Use the assignment to test whether you can explain the concept, apply it to a realistic public health situation, and identify what would need review before the work moves forward.</a:t>
             </a:r>
             <a:endParaRPr lang="en-US" dirty="0"/>
           </a:p>
@@ -1608,7 +1618,8 @@
 NIST Generative AI Profile: https://www.nist.gov/publications/artificial-intelligence-risk-management-framework-generative-artificial-intelligence
 NIST Privacy Framework
 CDC Public Health Data Strategy and Data Modernization resources: https://www.cdc.gov/public-health-data-strategy/php/about/index.html
-WHO Ethics and Governance of Artificial Intelligence for Health: https://www.who.int/publications/i/item/9789240029200</a:t>
+WHO Ethics and Governance of Artificial Intelligence for Health: https://www.who.int/publications/i/item/9789240029200
+Application guidance: Connect the concept to public health purpose, responsible use, required safeguards, documentation, and the next action a department should take.</a:t>
             </a:r>
             <a:endParaRPr lang="en-US" dirty="0"/>
           </a:p>
@@ -1698,7 +1709,8 @@
               <a:rPr lang="en-US" dirty="0"/>
               <a:t>References and Resources
 OMB Memorandum M-24-10 on federal AI governance, risk management, and innovation, where relevant to public-sector governance models
-Agency strategic plans, procurement policies, privacy policies, cybersecurity policies, records policies, and equity plans</a:t>
+Agency strategic plans, procurement policies, privacy policies, cybersecurity policies, records policies, and equity plans
+Application guidance: Connect the concept to public health purpose, responsible use, required safeguards, documentation, and the next action a department should take.</a:t>
             </a:r>
             <a:endParaRPr lang="en-US" dirty="0"/>
           </a:p>
@@ -1977,7 +1989,8 @@
 Evaluate expected benefits in terms of public health value, workflow improvement, equity, quality, timeliness, and staff burden.
 Distinguish between a vendor demonstration and a credible business case.
 Develop business case questions for AI procurement or internal development.
-Produce an AI business case review worksheet.</a:t>
+Produce an AI business case review worksheet.
+Application guidance: Use the assignment to test whether you can explain the concept, apply it to a realistic public health situation, and identify what would need review before the work moves forward.</a:t>
             </a:r>
             <a:endParaRPr lang="en-US" dirty="0"/>
           </a:p>
@@ -2067,7 +2080,8 @@
               <a:rPr lang="en-US" dirty="0"/>
               <a:t>Module Overview
 AI investments compete with many other public health priorities. Leaders need a disciplined way to decide when AI is worth funding, what costs must be considered, and how benefits will be measured. A business case review helps agencies avoid buying tools that are impressive in demonstrations but weak in operational value, sustainability, interoperability, or public health impact.
-This module teaches leaders to evaluate AI investments across cost, value, readiness, risk, staffing, procurement, lifecycle support, and sustainability. The business case should not focus only on software price. It should include data preparation, implementation, integration, training, governance, validation, monitoring, maintenance, vendor management, cybersecurity, accessibility, and eventual replacement or retirement.</a:t>
+This module teaches leaders to evaluate AI investments across cost, value, readiness, risk, staffing, procurement, lifecycle support, and sustainability. The business case should not focus only on software price. It should include data preparation, implementation, integration, training, governance, validation, monitoring, maintenance, vendor management, cybersecurity, accessibility, and eventual replacement or retirement.
+Application guidance: Connect the concept to public health purpose, responsible use, required safeguards, documentation, and the next action a department should take.</a:t>
             </a:r>
             <a:endParaRPr lang="en-US" dirty="0"/>
           </a:p>
@@ -2156,7 +2170,8 @@
             <a:r>
               <a:rPr lang="en-US" dirty="0"/>
               <a:t>Jurisdiction and Agency Policy Note
-This national-level module is intended for training and planning purposes. It does not replace legal, privacy, procurement, civil rights, records, or agency policy review. Learners should confirm applicable requirements in their own jurisdiction and organization before implementing AI-supported workflows.</a:t>
+This national-level module is intended for training and planning purposes. It does not replace legal, privacy, procurement, civil rights, records, or agency policy review. Learners should confirm applicable requirements in their own jurisdiction and organization before implementing AI-supported workflows.
+Application guidance: Translate this concept into clear decision rights, review steps, documentation expectations, and escalation paths before an AI-supported workflow is approved.</a:t>
             </a:r>
             <a:endParaRPr lang="en-US" dirty="0"/>
           </a:p>
@@ -2246,7 +2261,8 @@
               <a:rPr lang="en-US" dirty="0"/>
               <a:t>Why This Topic Matters for Public Health AI
 Public health agencies often face short-term funding cycles and urgent operational needs. AI products may be marketed as quick solutions, but the true cost of responsible implementation is broader than subscription fees. Agencies may need to update data pipelines, configure security controls, develop validation plans, train staff, write policies, monitor performance, and manage vendor relationships.
-A strong business case also protects mission focus. AI should not be funded because it is novel. It should be funded when it addresses a meaningful public health problem, fits agency capacity, can be governed responsibly, and can produce measurable value. Business case review helps leaders compare AI investments with non-AI alternatives, such as workflow redesign, staffing changes, data quality improvements, or simpler automation.</a:t>
+A strong business case also protects mission focus. AI should not be funded because it is novel. It should be funded when it addresses a meaningful public health problem, fits agency capacity, can be governed responsibly, and can produce measurable value. Business case review helps leaders compare AI investments with non-AI alternatives, such as workflow redesign, staffing changes, data quality improvements, or simpler automation.
+Application guidance: Connect the concept to public health purpose, responsible use, required safeguards, documentation, and the next action a department should take.</a:t>
             </a:r>
             <a:endParaRPr lang="en-US" dirty="0"/>
           </a:p>
@@ -2336,7 +2352,8 @@
               <a:rPr lang="en-US" dirty="0"/>
               <a:t>Public Health Example
 A vendor offers an AI tool that promises to reduce disease investigator workload by summarizing case reports. The annual license appears affordable, but the agency must also pay for integration with the surveillance system, security review, staff training, validation, legal review, vendor support, monitoring dashboards, and staff time for governance. If those costs are not considered, leadership may underestimate the investment required.
-A business case review asks whether the tool will meaningfully reduce burden, improve timeliness, maintain quality, and fit the agency's workflow. It also asks whether a simpler approach, such as better case report templates or workflow redesign, would solve the problem at lower cost and risk. The review does not assume AI is the answer; it tests whether AI is the right answer.</a:t>
+A business case review asks whether the tool will meaningfully reduce burden, improve timeliness, maintain quality, and fit the agency's workflow. It also asks whether a simpler approach, such as better case report templates or workflow redesign, would solve the problem at lower cost and risk. The review does not assume AI is the answer; it tests whether AI is the right answer.
+Application guidance: Connect the concept to public health purpose, responsible use, required safeguards, documentation, and the next action a department should take.</a:t>
             </a:r>
             <a:endParaRPr lang="en-US" dirty="0"/>
           </a:p>
@@ -3107,8 +3124,8 @@
         </p:nvSpPr>
         <p:spPr>
           <a:xfrm>
-            <a:off x="9966960" y="6537960"/>
-            <a:ext cx="1645920" cy="201168"/>
+            <a:off x="9646920" y="6537960"/>
+            <a:ext cx="1965960" cy="201168"/>
           </a:xfrm>
           <a:prstGeom prst="rect">
             <a:avLst/>
@@ -3132,7 +3149,7 @@
                 <a:ea typeface="Aptos" pitchFamily="34" charset="-122"/>
                 <a:cs typeface="Aptos" pitchFamily="34" charset="-120"/>
               </a:rPr>
-              <a:t>Â© Paula Soper</a:t>
+              <a:t>Copyright Paula Soper</a:t>
             </a:r>
             <a:endParaRPr lang="en-US" sz="800" dirty="0"/>
           </a:p>
@@ -3179,14 +3196,257 @@
       </p:sp>
       <p:sp>
         <p:nvSpPr>
-          <p:cNvPr id="8" name="Shape 6"/>
+          <p:cNvPr id="8" name="Text 6"/>
           <p:cNvSpPr/>
           <p:nvPr/>
         </p:nvSpPr>
         <p:spPr>
           <a:xfrm>
             <a:off x="640080" y="658368"/>
-            <a:ext cx="420624" cy="420624"/>
+            <a:ext cx="10881360" cy="713232"/>
+          </a:xfrm>
+          <a:prstGeom prst="rect">
+            <a:avLst/>
+          </a:prstGeom>
+          <a:noFill/>
+          <a:ln/>
+        </p:spPr>
+        <p:txBody>
+          <a:bodyPr wrap="square" lIns="0" tIns="0" rIns="0" bIns="0" rtlCol="0" anchor="ctr">
+            <a:normAutofit/>
+          </a:bodyPr>
+          <a:lstStyle/>
+          <a:p>
+            <a:pPr indent="0" marL="0">
+              <a:buNone/>
+            </a:pPr>
+            <a:r>
+              <a:rPr lang="en-US" sz="3400" b="1" dirty="0">
+                <a:solidFill>
+                  <a:srgbClr val="003A63"/>
+                </a:solidFill>
+                <a:latin typeface="Aptos Display" pitchFamily="34" charset="0"/>
+                <a:ea typeface="Aptos Display" pitchFamily="34" charset="-122"/>
+                <a:cs typeface="Aptos Display" pitchFamily="34" charset="-120"/>
+              </a:rPr>
+              <a:t>Technical and Governance Deep Dive</a:t>
+            </a:r>
+            <a:endParaRPr lang="en-US" sz="3400" dirty="0"/>
+          </a:p>
+        </p:txBody>
+      </p:sp>
+      <p:sp>
+        <p:nvSpPr>
+          <p:cNvPr id="9" name="Text 7"/>
+          <p:cNvSpPr/>
+          <p:nvPr/>
+        </p:nvSpPr>
+        <p:spPr>
+          <a:xfrm>
+            <a:off x="868680" y="1508760"/>
+            <a:ext cx="6309360" cy="4160520"/>
+          </a:xfrm>
+          <a:prstGeom prst="rect">
+            <a:avLst/>
+          </a:prstGeom>
+          <a:noFill/>
+          <a:ln/>
+        </p:spPr>
+        <p:txBody>
+          <a:bodyPr wrap="square" lIns="635" tIns="635" rIns="635" bIns="635" rtlCol="0" anchor="t">
+            <a:normAutofit/>
+          </a:bodyPr>
+          <a:lstStyle/>
+          <a:p>
+            <a:r>
+              <a:rPr lang="en-US" sz="2100" dirty="0">
+                <a:solidFill>
+                  <a:srgbClr val="17364A"/>
+                </a:solidFill>
+                <a:latin typeface="Aptos" pitchFamily="34" charset="0"/>
+                <a:ea typeface="Aptos" pitchFamily="34" charset="-122"/>
+                <a:cs typeface="Aptos" pitchFamily="34" charset="-120"/>
+              </a:rPr>
+              <a:t>An AI business case should begin with a problem statement.</a:t>
+            </a:r>
+            <a:endParaRPr lang="en-US" sz="2100" dirty="0"/>
+          </a:p>
+          <a:p>
+            <a:r>
+              <a:rPr lang="en-US" sz="2100" dirty="0">
+                <a:solidFill>
+                  <a:srgbClr val="17364A"/>
+                </a:solidFill>
+                <a:latin typeface="Aptos" pitchFamily="34" charset="0"/>
+                <a:ea typeface="Aptos" pitchFamily="34" charset="-122"/>
+                <a:cs typeface="Aptos" pitchFamily="34" charset="-120"/>
+              </a:rPr>
+              <a:t>The problem should be operational and measurable, such as delayed case review, inconsistent public.</a:t>
+            </a:r>
+            <a:endParaRPr lang="en-US" sz="2100" dirty="0"/>
+          </a:p>
+          <a:p>
+            <a:r>
+              <a:rPr lang="en-US" sz="2100" dirty="0">
+                <a:solidFill>
+                  <a:srgbClr val="17364A"/>
+                </a:solidFill>
+                <a:latin typeface="Aptos" pitchFamily="34" charset="0"/>
+                <a:ea typeface="Aptos" pitchFamily="34" charset="-122"/>
+                <a:cs typeface="Aptos" pitchFamily="34" charset="-120"/>
+              </a:rPr>
+              <a:t>A vague desire to 'use AI' is not a sufficient problem statement.</a:t>
+            </a:r>
+            <a:endParaRPr lang="en-US" sz="2100" dirty="0"/>
+          </a:p>
+        </p:txBody>
+      </p:sp>
+      <p:sp>
+        <p:nvSpPr>
+          <p:cNvPr id="10" name="Shape 8"/>
+          <p:cNvSpPr/>
+          <p:nvPr/>
+        </p:nvSpPr>
+        <p:spPr>
+          <a:xfrm>
+            <a:off x="7635240" y="1325880"/>
+            <a:ext cx="3474720" cy="1325880"/>
+          </a:xfrm>
+          <a:prstGeom prst="roundRect">
+            <a:avLst>
+              <a:gd name="adj" fmla="val 8276"/>
+            </a:avLst>
+          </a:prstGeom>
+          <a:solidFill>
+            <a:srgbClr val="EEF8ED"/>
+          </a:solidFill>
+          <a:ln w="12700">
+            <a:solidFill>
+              <a:srgbClr val="B9D7E6"/>
+            </a:solidFill>
+            <a:prstDash val="solid"/>
+          </a:ln>
+        </p:spPr>
+      </p:sp>
+      <p:sp>
+        <p:nvSpPr>
+          <p:cNvPr id="11" name="Text 9"/>
+          <p:cNvSpPr/>
+          <p:nvPr/>
+        </p:nvSpPr>
+        <p:spPr>
+          <a:xfrm>
+            <a:off x="7799832" y="1472184"/>
+            <a:ext cx="3145536" cy="256032"/>
+          </a:xfrm>
+          <a:prstGeom prst="rect">
+            <a:avLst/>
+          </a:prstGeom>
+          <a:noFill/>
+          <a:ln/>
+        </p:spPr>
+        <p:txBody>
+          <a:bodyPr wrap="square" lIns="0" tIns="0" rIns="0" bIns="0" rtlCol="0" anchor="ctr"/>
+          <a:lstStyle/>
+          <a:p>
+            <a:pPr indent="0" marL="0">
+              <a:buNone/>
+            </a:pPr>
+            <a:r>
+              <a:rPr lang="en-US" sz="1300" b="1" dirty="0">
+                <a:solidFill>
+                  <a:srgbClr val="0068B7"/>
+                </a:solidFill>
+                <a:latin typeface="Aptos" pitchFamily="34" charset="0"/>
+                <a:ea typeface="Aptos" pitchFamily="34" charset="-122"/>
+                <a:cs typeface="Aptos" pitchFamily="34" charset="-120"/>
+              </a:rPr>
+              <a:t>Governance lens</a:t>
+            </a:r>
+            <a:endParaRPr lang="en-US" sz="1300" dirty="0"/>
+          </a:p>
+        </p:txBody>
+      </p:sp>
+      <p:sp>
+        <p:nvSpPr>
+          <p:cNvPr id="12" name="Text 10"/>
+          <p:cNvSpPr/>
+          <p:nvPr/>
+        </p:nvSpPr>
+        <p:spPr>
+          <a:xfrm>
+            <a:off x="7799832" y="1828800"/>
+            <a:ext cx="3145536" cy="685800"/>
+          </a:xfrm>
+          <a:prstGeom prst="rect">
+            <a:avLst/>
+          </a:prstGeom>
+          <a:noFill/>
+          <a:ln/>
+        </p:spPr>
+        <p:txBody>
+          <a:bodyPr wrap="square" lIns="0" tIns="0" rIns="0" bIns="0" rtlCol="0" anchor="t">
+            <a:normAutofit/>
+          </a:bodyPr>
+          <a:lstStyle/>
+          <a:p>
+            <a:pPr indent="0" marL="0">
+              <a:buNone/>
+            </a:pPr>
+            <a:r>
+              <a:rPr lang="en-US" sz="1550" dirty="0">
+                <a:solidFill>
+                  <a:srgbClr val="17364A"/>
+                </a:solidFill>
+                <a:latin typeface="Aptos" pitchFamily="34" charset="0"/>
+                <a:ea typeface="Aptos" pitchFamily="34" charset="-122"/>
+                <a:cs typeface="Aptos" pitchFamily="34" charset="-120"/>
+              </a:rPr>
+              <a:t>An AI business case should begin with a problem statement.</a:t>
+            </a:r>
+            <a:endParaRPr lang="en-US" sz="1550" dirty="0"/>
+          </a:p>
+        </p:txBody>
+      </p:sp>
+      <p:sp>
+        <p:nvSpPr>
+          <p:cNvPr id="13" name="Shape 11"/>
+          <p:cNvSpPr/>
+          <p:nvPr/>
+        </p:nvSpPr>
+        <p:spPr>
+          <a:xfrm>
+            <a:off x="7635240" y="2788920"/>
+            <a:ext cx="3474720" cy="1536192"/>
+          </a:xfrm>
+          <a:prstGeom prst="roundRect">
+            <a:avLst>
+              <a:gd name="adj" fmla="val 7143"/>
+            </a:avLst>
+          </a:prstGeom>
+          <a:solidFill>
+            <a:srgbClr val="FFFFFF">
+              <a:alpha val="88000"/>
+            </a:srgbClr>
+          </a:solidFill>
+          <a:ln w="12700">
+            <a:solidFill>
+              <a:srgbClr val="D6E8F2"/>
+            </a:solidFill>
+            <a:prstDash val="solid"/>
+          </a:ln>
+        </p:spPr>
+      </p:sp>
+      <p:sp>
+        <p:nvSpPr>
+          <p:cNvPr id="14" name="Shape 12"/>
+          <p:cNvSpPr/>
+          <p:nvPr/>
+        </p:nvSpPr>
+        <p:spPr>
+          <a:xfrm>
+            <a:off x="7891272" y="3108960"/>
+            <a:ext cx="566928" cy="566928"/>
           </a:xfrm>
           <a:prstGeom prst="ellipse">
             <a:avLst/>
@@ -3204,172 +3464,24 @@
       </p:sp>
       <p:sp>
         <p:nvSpPr>
-          <p:cNvPr id="9" name="Text 7"/>
-          <p:cNvSpPr/>
-          <p:nvPr/>
-        </p:nvSpPr>
-        <p:spPr>
-          <a:xfrm>
-            <a:off x="640080" y="731520"/>
-            <a:ext cx="420624" cy="164592"/>
-          </a:xfrm>
-          <a:prstGeom prst="rect">
-            <a:avLst/>
-          </a:prstGeom>
-          <a:noFill/>
-          <a:ln/>
-        </p:spPr>
-        <p:txBody>
-          <a:bodyPr wrap="square" lIns="0" tIns="0" rIns="0" bIns="0" rtlCol="0" anchor="ctr"/>
-          <a:lstStyle/>
-          <a:p>
-            <a:pPr algn="ctr" indent="0" marL="0">
-              <a:buNone/>
-            </a:pPr>
-            <a:r>
-              <a:rPr lang="en-US" sz="1100" b="1" dirty="0">
-                <a:solidFill>
-                  <a:srgbClr val="FFFFFF"/>
-                </a:solidFill>
-                <a:latin typeface="Aptos" pitchFamily="34" charset="0"/>
-                <a:ea typeface="Aptos" pitchFamily="34" charset="-122"/>
-                <a:cs typeface="Aptos" pitchFamily="34" charset="-120"/>
-              </a:rPr>
-              <a:t>6</a:t>
-            </a:r>
-            <a:endParaRPr lang="en-US" sz="1100" dirty="0"/>
-          </a:p>
-        </p:txBody>
-      </p:sp>
-      <p:sp>
-        <p:nvSpPr>
-          <p:cNvPr id="10" name="Text 8"/>
-          <p:cNvSpPr/>
-          <p:nvPr/>
-        </p:nvSpPr>
-        <p:spPr>
-          <a:xfrm>
-            <a:off x="640080" y="621792"/>
-            <a:ext cx="10881360" cy="713232"/>
-          </a:xfrm>
-          <a:prstGeom prst="rect">
-            <a:avLst/>
-          </a:prstGeom>
-          <a:noFill/>
-          <a:ln/>
-        </p:spPr>
-        <p:txBody>
-          <a:bodyPr wrap="square" lIns="0" tIns="0" rIns="0" bIns="0" rtlCol="0" anchor="ctr">
-            <a:normAutofit/>
-          </a:bodyPr>
-          <a:lstStyle/>
-          <a:p>
-            <a:pPr indent="0" marL="0">
-              <a:buNone/>
-            </a:pPr>
-            <a:r>
-              <a:rPr lang="en-US" sz="3400" b="1" dirty="0">
-                <a:solidFill>
-                  <a:srgbClr val="003A63"/>
-                </a:solidFill>
-                <a:latin typeface="Aptos Display" pitchFamily="34" charset="0"/>
-                <a:ea typeface="Aptos Display" pitchFamily="34" charset="-122"/>
-                <a:cs typeface="Aptos Display" pitchFamily="34" charset="-120"/>
-              </a:rPr>
-              <a:t>Technical and Governance Deep Dive</a:t>
-            </a:r>
-            <a:endParaRPr lang="en-US" sz="3400" dirty="0"/>
-          </a:p>
-        </p:txBody>
-      </p:sp>
-      <p:sp>
-        <p:nvSpPr>
-          <p:cNvPr id="11" name="Text 9"/>
-          <p:cNvSpPr/>
-          <p:nvPr/>
-        </p:nvSpPr>
-        <p:spPr>
-          <a:xfrm>
-            <a:off x="868680" y="1508760"/>
-            <a:ext cx="6537960" cy="4160520"/>
-          </a:xfrm>
-          <a:prstGeom prst="rect">
-            <a:avLst/>
-          </a:prstGeom>
-          <a:noFill/>
-          <a:ln/>
-        </p:spPr>
-        <p:txBody>
-          <a:bodyPr wrap="square" lIns="635" tIns="635" rIns="635" bIns="635" rtlCol="0" anchor="t">
-            <a:normAutofit/>
-          </a:bodyPr>
-          <a:lstStyle/>
-          <a:p>
-            <a:r>
-              <a:rPr lang="en-US" sz="2100" dirty="0">
-                <a:solidFill>
-                  <a:srgbClr val="17364A"/>
-                </a:solidFill>
-                <a:latin typeface="Aptos" pitchFamily="34" charset="0"/>
-                <a:ea typeface="Aptos" pitchFamily="34" charset="-122"/>
-                <a:cs typeface="Aptos" pitchFamily="34" charset="-120"/>
-              </a:rPr>
-              <a:t>An AI business case should begin with a problem statement.</a:t>
-            </a:r>
-            <a:endParaRPr lang="en-US" sz="2100" dirty="0"/>
-          </a:p>
-          <a:p>
-            <a:r>
-              <a:rPr lang="en-US" sz="2100" dirty="0">
-                <a:solidFill>
-                  <a:srgbClr val="17364A"/>
-                </a:solidFill>
-                <a:latin typeface="Aptos" pitchFamily="34" charset="0"/>
-                <a:ea typeface="Aptos" pitchFamily="34" charset="-122"/>
-                <a:cs typeface="Aptos" pitchFamily="34" charset="-120"/>
-              </a:rPr>
-              <a:t>The problem should be operational and measurable, such as delayed case review, inconsistent public.</a:t>
-            </a:r>
-            <a:endParaRPr lang="en-US" sz="2100" dirty="0"/>
-          </a:p>
-          <a:p>
-            <a:r>
-              <a:rPr lang="en-US" sz="2100" dirty="0">
-                <a:solidFill>
-                  <a:srgbClr val="17364A"/>
-                </a:solidFill>
-                <a:latin typeface="Aptos" pitchFamily="34" charset="0"/>
-                <a:ea typeface="Aptos" pitchFamily="34" charset="-122"/>
-                <a:cs typeface="Aptos" pitchFamily="34" charset="-120"/>
-              </a:rPr>
-              <a:t>A vague desire to 'use AI' is not a sufficient problem statement.</a:t>
-            </a:r>
-            <a:endParaRPr lang="en-US" sz="2100" dirty="0"/>
-          </a:p>
-        </p:txBody>
-      </p:sp>
-      <p:sp>
-        <p:nvSpPr>
-          <p:cNvPr id="12" name="Shape 10"/>
-          <p:cNvSpPr/>
-          <p:nvPr/>
-        </p:nvSpPr>
-        <p:spPr>
-          <a:xfrm>
-            <a:off x="7909560" y="1417320"/>
-            <a:ext cx="3154680" cy="1828800"/>
-          </a:xfrm>
-          <a:prstGeom prst="roundRect">
-            <a:avLst>
-              <a:gd name="adj" fmla="val 6000"/>
-            </a:avLst>
+          <p:cNvPr id="15" name="Shape 13"/>
+          <p:cNvSpPr/>
+          <p:nvPr/>
+        </p:nvSpPr>
+        <p:spPr>
+          <a:xfrm>
+            <a:off x="10287000" y="3108960"/>
+            <a:ext cx="566928" cy="566928"/>
+          </a:xfrm>
+          <a:prstGeom prst="ellipse">
+            <a:avLst/>
           </a:prstGeom>
           <a:solidFill>
-            <a:srgbClr val="EEF8ED"/>
+            <a:srgbClr val="2F8A28"/>
           </a:solidFill>
           <a:ln w="12700">
             <a:solidFill>
-              <a:srgbClr val="B9D7E6"/>
+              <a:srgbClr val="2F8A28"/>
             </a:solidFill>
             <a:prstDash val="solid"/>
           </a:ln>
@@ -3377,14 +3489,108 @@
       </p:sp>
       <p:sp>
         <p:nvSpPr>
-          <p:cNvPr id="13" name="Text 11"/>
-          <p:cNvSpPr/>
-          <p:nvPr/>
-        </p:nvSpPr>
-        <p:spPr>
-          <a:xfrm>
-            <a:off x="8074152" y="1563624"/>
-            <a:ext cx="2825496" cy="256032"/>
+          <p:cNvPr id="16" name="Shape 14"/>
+          <p:cNvSpPr/>
+          <p:nvPr/>
+        </p:nvSpPr>
+        <p:spPr>
+          <a:xfrm>
+            <a:off x="9089136" y="3456432"/>
+            <a:ext cx="566928" cy="566928"/>
+          </a:xfrm>
+          <a:prstGeom prst="ellipse">
+            <a:avLst/>
+          </a:prstGeom>
+          <a:solidFill>
+            <a:srgbClr val="6A4CA3"/>
+          </a:solidFill>
+          <a:ln w="12700">
+            <a:solidFill>
+              <a:srgbClr val="6A4CA3"/>
+            </a:solidFill>
+            <a:prstDash val="solid"/>
+          </a:ln>
+        </p:spPr>
+      </p:sp>
+      <p:sp>
+        <p:nvSpPr>
+          <p:cNvPr id="17" name="Shape 15"/>
+          <p:cNvSpPr/>
+          <p:nvPr/>
+        </p:nvSpPr>
+        <p:spPr>
+          <a:xfrm>
+            <a:off x="8385048" y="3419856"/>
+            <a:ext cx="1975104" cy="0"/>
+          </a:xfrm>
+          <a:prstGeom prst="line">
+            <a:avLst/>
+          </a:prstGeom>
+          <a:noFill/>
+          <a:ln w="25400">
+            <a:solidFill>
+              <a:srgbClr val="8ABBD8"/>
+            </a:solidFill>
+            <a:prstDash val="solid"/>
+          </a:ln>
+        </p:spPr>
+      </p:sp>
+      <p:sp>
+        <p:nvSpPr>
+          <p:cNvPr id="18" name="Shape 16"/>
+          <p:cNvSpPr/>
+          <p:nvPr/>
+        </p:nvSpPr>
+        <p:spPr>
+          <a:xfrm>
+            <a:off x="8202168" y="3630168"/>
+            <a:ext cx="1170432" cy="118872"/>
+          </a:xfrm>
+          <a:prstGeom prst="line">
+            <a:avLst/>
+          </a:prstGeom>
+          <a:noFill/>
+          <a:ln w="25400">
+            <a:solidFill>
+              <a:srgbClr val="8ABBD8"/>
+            </a:solidFill>
+            <a:prstDash val="solid"/>
+          </a:ln>
+        </p:spPr>
+      </p:sp>
+      <p:sp>
+        <p:nvSpPr>
+          <p:cNvPr id="19" name="Shape 17"/>
+          <p:cNvSpPr/>
+          <p:nvPr/>
+        </p:nvSpPr>
+        <p:spPr>
+          <a:xfrm>
+            <a:off x="10543032" y="3630168"/>
+            <a:ext cx="-1170432" cy="118872"/>
+          </a:xfrm>
+          <a:prstGeom prst="line">
+            <a:avLst/>
+          </a:prstGeom>
+          <a:noFill/>
+          <a:ln w="25400">
+            <a:solidFill>
+              <a:srgbClr val="8ABBD8"/>
+            </a:solidFill>
+            <a:prstDash val="solid"/>
+          </a:ln>
+        </p:spPr>
+      </p:sp>
+      <p:sp>
+        <p:nvSpPr>
+          <p:cNvPr id="20" name="Text 18"/>
+          <p:cNvSpPr/>
+          <p:nvPr/>
+        </p:nvSpPr>
+        <p:spPr>
+          <a:xfrm>
+            <a:off x="7863840" y="4069080"/>
+            <a:ext cx="3017520" cy="164592"/>
           </a:xfrm>
           <a:prstGeom prst="rect">
             <a:avLst/>
@@ -3396,79 +3602,38 @@
           <a:bodyPr wrap="square" lIns="0" tIns="0" rIns="0" bIns="0" rtlCol="0" anchor="ctr"/>
           <a:lstStyle/>
           <a:p>
-            <a:pPr indent="0" marL="0">
-              <a:buNone/>
-            </a:pPr>
-            <a:r>
-              <a:rPr lang="en-US" sz="1300" b="1" dirty="0">
-                <a:solidFill>
-                  <a:srgbClr val="0068B7"/>
-                </a:solidFill>
-                <a:latin typeface="Aptos" pitchFamily="34" charset="0"/>
-                <a:ea typeface="Aptos" pitchFamily="34" charset="-122"/>
-                <a:cs typeface="Aptos" pitchFamily="34" charset="-120"/>
-              </a:rPr>
-              <a:t>Key idea</a:t>
-            </a:r>
-            <a:endParaRPr lang="en-US" sz="1300" dirty="0"/>
-          </a:p>
-        </p:txBody>
-      </p:sp>
-      <p:sp>
-        <p:nvSpPr>
-          <p:cNvPr id="14" name="Text 12"/>
-          <p:cNvSpPr/>
-          <p:nvPr/>
-        </p:nvSpPr>
-        <p:spPr>
-          <a:xfrm>
-            <a:off x="8074152" y="1920240"/>
-            <a:ext cx="2825496" cy="1188720"/>
-          </a:xfrm>
-          <a:prstGeom prst="rect">
-            <a:avLst/>
-          </a:prstGeom>
-          <a:noFill/>
-          <a:ln/>
-        </p:spPr>
-        <p:txBody>
-          <a:bodyPr wrap="square" lIns="0" tIns="0" rIns="0" bIns="0" rtlCol="0" anchor="t">
-            <a:normAutofit/>
-          </a:bodyPr>
-          <a:lstStyle/>
-          <a:p>
-            <a:pPr indent="0" marL="0">
-              <a:buNone/>
-            </a:pPr>
-            <a:r>
-              <a:rPr lang="en-US" sz="1550" dirty="0">
-                <a:solidFill>
-                  <a:srgbClr val="17364A"/>
-                </a:solidFill>
-                <a:latin typeface="Aptos" pitchFamily="34" charset="0"/>
-                <a:ea typeface="Aptos" pitchFamily="34" charset="-122"/>
-                <a:cs typeface="Aptos" pitchFamily="34" charset="-120"/>
-              </a:rPr>
-              <a:t>An AI business case should begin with a problem statement.</a:t>
-            </a:r>
-            <a:endParaRPr lang="en-US" sz="1550" dirty="0"/>
-          </a:p>
-        </p:txBody>
-      </p:sp>
-      <p:sp>
-        <p:nvSpPr>
-          <p:cNvPr id="15" name="Shape 13"/>
-          <p:cNvSpPr/>
-          <p:nvPr/>
-        </p:nvSpPr>
-        <p:spPr>
-          <a:xfrm>
-            <a:off x="7909560" y="3520440"/>
-            <a:ext cx="3154680" cy="1737360"/>
+            <a:pPr algn="ctr" indent="0" marL="0">
+              <a:buNone/>
+            </a:pPr>
+            <a:r>
+              <a:rPr lang="en-US" sz="900" b="1" dirty="0">
+                <a:solidFill>
+                  <a:srgbClr val="003A63"/>
+                </a:solidFill>
+                <a:latin typeface="Aptos" pitchFamily="34" charset="0"/>
+                <a:ea typeface="Aptos" pitchFamily="34" charset="-122"/>
+                <a:cs typeface="Aptos" pitchFamily="34" charset="-120"/>
+              </a:rPr>
+              <a:t>Decision rights</a:t>
+            </a:r>
+            <a:endParaRPr lang="en-US" sz="900" dirty="0"/>
+          </a:p>
+        </p:txBody>
+      </p:sp>
+      <p:sp>
+        <p:nvSpPr>
+          <p:cNvPr id="21" name="Shape 19"/>
+          <p:cNvSpPr/>
+          <p:nvPr/>
+        </p:nvSpPr>
+        <p:spPr>
+          <a:xfrm>
+            <a:off x="7635240" y="4498848"/>
+            <a:ext cx="3474720" cy="1143000"/>
           </a:xfrm>
           <a:prstGeom prst="roundRect">
             <a:avLst>
-              <a:gd name="adj" fmla="val 6316"/>
+              <a:gd name="adj" fmla="val 9600"/>
             </a:avLst>
           </a:prstGeom>
           <a:solidFill>
@@ -3484,14 +3649,14 @@
       </p:sp>
       <p:sp>
         <p:nvSpPr>
-          <p:cNvPr id="16" name="Text 14"/>
-          <p:cNvSpPr/>
-          <p:nvPr/>
-        </p:nvSpPr>
-        <p:spPr>
-          <a:xfrm>
-            <a:off x="8074152" y="3666744"/>
-            <a:ext cx="2825496" cy="256032"/>
+          <p:cNvPr id="22" name="Text 20"/>
+          <p:cNvSpPr/>
+          <p:nvPr/>
+        </p:nvSpPr>
+        <p:spPr>
+          <a:xfrm>
+            <a:off x="7799832" y="4645152"/>
+            <a:ext cx="3145536" cy="256032"/>
           </a:xfrm>
           <a:prstGeom prst="rect">
             <a:avLst/>
@@ -3515,7 +3680,7 @@
                 <a:ea typeface="Aptos" pitchFamily="34" charset="-122"/>
                 <a:cs typeface="Aptos" pitchFamily="34" charset="-120"/>
               </a:rPr>
-              <a:t>Use this for</a:t>
+              <a:t>What to document</a:t>
             </a:r>
             <a:endParaRPr lang="en-US" sz="1300" dirty="0"/>
           </a:p>
@@ -3523,14 +3688,14 @@
       </p:sp>
       <p:sp>
         <p:nvSpPr>
-          <p:cNvPr id="17" name="Text 15"/>
-          <p:cNvSpPr/>
-          <p:nvPr/>
-        </p:nvSpPr>
-        <p:spPr>
-          <a:xfrm>
-            <a:off x="8074152" y="4023360"/>
-            <a:ext cx="2825496" cy="1097280"/>
+          <p:cNvPr id="23" name="Text 21"/>
+          <p:cNvSpPr/>
+          <p:nvPr/>
+        </p:nvSpPr>
+        <p:spPr>
+          <a:xfrm>
+            <a:off x="7799832" y="5001768"/>
+            <a:ext cx="3145536" cy="502920"/>
           </a:xfrm>
           <a:prstGeom prst="rect">
             <a:avLst/>
@@ -3556,7 +3721,7 @@
                 <a:ea typeface="Aptos" pitchFamily="34" charset="-122"/>
                 <a:cs typeface="Aptos" pitchFamily="34" charset="-120"/>
               </a:rPr>
-              <a:t>Connect the concept to public health decisions, safeguards, documentation, or implementation work.</a:t>
+              <a:t>Translate this concept into clear decision rights, review steps, documentation expectations, and escalation paths before an AI-supported workflow is approved.</a:t>
             </a:r>
             <a:endParaRPr lang="en-US" sz="1550" dirty="0"/>
           </a:p>
@@ -3730,8 +3895,8 @@
         </p:nvSpPr>
         <p:spPr>
           <a:xfrm>
-            <a:off x="9966960" y="6537960"/>
-            <a:ext cx="1645920" cy="201168"/>
+            <a:off x="9646920" y="6537960"/>
+            <a:ext cx="1965960" cy="201168"/>
           </a:xfrm>
           <a:prstGeom prst="rect">
             <a:avLst/>
@@ -3755,7 +3920,7 @@
                 <a:ea typeface="Aptos" pitchFamily="34" charset="-122"/>
                 <a:cs typeface="Aptos" pitchFamily="34" charset="-120"/>
               </a:rPr>
-              <a:t>Â© Paula Soper</a:t>
+              <a:t>Copyright Paula Soper</a:t>
             </a:r>
             <a:endParaRPr lang="en-US" sz="800" dirty="0"/>
           </a:p>
@@ -3802,77 +3967,13 @@
       </p:sp>
       <p:sp>
         <p:nvSpPr>
-          <p:cNvPr id="8" name="Shape 6"/>
+          <p:cNvPr id="8" name="Text 6"/>
           <p:cNvSpPr/>
           <p:nvPr/>
         </p:nvSpPr>
         <p:spPr>
           <a:xfrm>
             <a:off x="640080" y="658368"/>
-            <a:ext cx="420624" cy="420624"/>
-          </a:xfrm>
-          <a:prstGeom prst="ellipse">
-            <a:avLst/>
-          </a:prstGeom>
-          <a:solidFill>
-            <a:srgbClr val="0068B7"/>
-          </a:solidFill>
-          <a:ln w="12700">
-            <a:solidFill>
-              <a:srgbClr val="0068B7"/>
-            </a:solidFill>
-            <a:prstDash val="solid"/>
-          </a:ln>
-        </p:spPr>
-      </p:sp>
-      <p:sp>
-        <p:nvSpPr>
-          <p:cNvPr id="9" name="Text 7"/>
-          <p:cNvSpPr/>
-          <p:nvPr/>
-        </p:nvSpPr>
-        <p:spPr>
-          <a:xfrm>
-            <a:off x="640080" y="731520"/>
-            <a:ext cx="420624" cy="164592"/>
-          </a:xfrm>
-          <a:prstGeom prst="rect">
-            <a:avLst/>
-          </a:prstGeom>
-          <a:noFill/>
-          <a:ln/>
-        </p:spPr>
-        <p:txBody>
-          <a:bodyPr wrap="square" lIns="0" tIns="0" rIns="0" bIns="0" rtlCol="0" anchor="ctr"/>
-          <a:lstStyle/>
-          <a:p>
-            <a:pPr algn="ctr" indent="0" marL="0">
-              <a:buNone/>
-            </a:pPr>
-            <a:r>
-              <a:rPr lang="en-US" sz="1100" b="1" dirty="0">
-                <a:solidFill>
-                  <a:srgbClr val="FFFFFF"/>
-                </a:solidFill>
-                <a:latin typeface="Aptos" pitchFamily="34" charset="0"/>
-                <a:ea typeface="Aptos" pitchFamily="34" charset="-122"/>
-                <a:cs typeface="Aptos" pitchFamily="34" charset="-120"/>
-              </a:rPr>
-              <a:t>7</a:t>
-            </a:r>
-            <a:endParaRPr lang="en-US" sz="1100" dirty="0"/>
-          </a:p>
-        </p:txBody>
-      </p:sp>
-      <p:sp>
-        <p:nvSpPr>
-          <p:cNvPr id="10" name="Text 8"/>
-          <p:cNvSpPr/>
-          <p:nvPr/>
-        </p:nvSpPr>
-        <p:spPr>
-          <a:xfrm>
-            <a:off x="640080" y="621792"/>
             <a:ext cx="10881360" cy="713232"/>
           </a:xfrm>
           <a:prstGeom prst="rect">
@@ -3907,14 +4008,14 @@
       </p:sp>
       <p:sp>
         <p:nvSpPr>
-          <p:cNvPr id="11" name="Text 9"/>
+          <p:cNvPr id="9" name="Text 7"/>
           <p:cNvSpPr/>
           <p:nvPr/>
         </p:nvSpPr>
         <p:spPr>
           <a:xfrm>
             <a:off x="868680" y="1508760"/>
-            <a:ext cx="6537960" cy="4160520"/>
+            <a:ext cx="6309360" cy="4160520"/>
           </a:xfrm>
           <a:prstGeom prst="rect">
             <a:avLst/>
@@ -3973,18 +4074,18 @@
       </p:sp>
       <p:sp>
         <p:nvSpPr>
-          <p:cNvPr id="12" name="Shape 10"/>
-          <p:cNvSpPr/>
-          <p:nvPr/>
-        </p:nvSpPr>
-        <p:spPr>
-          <a:xfrm>
-            <a:off x="7909560" y="1417320"/>
-            <a:ext cx="3154680" cy="1828800"/>
+          <p:cNvPr id="10" name="Shape 8"/>
+          <p:cNvSpPr/>
+          <p:nvPr/>
+        </p:nvSpPr>
+        <p:spPr>
+          <a:xfrm>
+            <a:off x="7635240" y="1325880"/>
+            <a:ext cx="3474720" cy="1325880"/>
           </a:xfrm>
           <a:prstGeom prst="roundRect">
             <a:avLst>
-              <a:gd name="adj" fmla="val 6000"/>
+              <a:gd name="adj" fmla="val 8276"/>
             </a:avLst>
           </a:prstGeom>
           <a:solidFill>
@@ -4000,14 +4101,14 @@
       </p:sp>
       <p:sp>
         <p:nvSpPr>
-          <p:cNvPr id="13" name="Text 11"/>
-          <p:cNvSpPr/>
-          <p:nvPr/>
-        </p:nvSpPr>
-        <p:spPr>
-          <a:xfrm>
-            <a:off x="8074152" y="1563624"/>
-            <a:ext cx="2825496" cy="256032"/>
+          <p:cNvPr id="11" name="Text 9"/>
+          <p:cNvSpPr/>
+          <p:nvPr/>
+        </p:nvSpPr>
+        <p:spPr>
+          <a:xfrm>
+            <a:off x="7799832" y="1472184"/>
+            <a:ext cx="3145536" cy="256032"/>
           </a:xfrm>
           <a:prstGeom prst="rect">
             <a:avLst/>
@@ -4031,7 +4132,7 @@
                 <a:ea typeface="Aptos" pitchFamily="34" charset="-122"/>
                 <a:cs typeface="Aptos" pitchFamily="34" charset="-120"/>
               </a:rPr>
-              <a:t>Key idea</a:t>
+              <a:t>Risk check</a:t>
             </a:r>
             <a:endParaRPr lang="en-US" sz="1300" dirty="0"/>
           </a:p>
@@ -4039,14 +4140,14 @@
       </p:sp>
       <p:sp>
         <p:nvSpPr>
-          <p:cNvPr id="14" name="Text 12"/>
-          <p:cNvSpPr/>
-          <p:nvPr/>
-        </p:nvSpPr>
-        <p:spPr>
-          <a:xfrm>
-            <a:off x="8074152" y="1920240"/>
-            <a:ext cx="2825496" cy="1188720"/>
+          <p:cNvPr id="12" name="Text 10"/>
+          <p:cNvSpPr/>
+          <p:nvPr/>
+        </p:nvSpPr>
+        <p:spPr>
+          <a:xfrm>
+            <a:off x="7799832" y="1828800"/>
+            <a:ext cx="3145536" cy="685800"/>
           </a:xfrm>
           <a:prstGeom prst="rect">
             <a:avLst/>
@@ -4080,18 +4181,171 @@
       </p:sp>
       <p:sp>
         <p:nvSpPr>
-          <p:cNvPr id="15" name="Shape 13"/>
-          <p:cNvSpPr/>
-          <p:nvPr/>
-        </p:nvSpPr>
-        <p:spPr>
-          <a:xfrm>
-            <a:off x="7909560" y="3520440"/>
-            <a:ext cx="3154680" cy="1737360"/>
+          <p:cNvPr id="13" name="Shape 11"/>
+          <p:cNvSpPr/>
+          <p:nvPr/>
+        </p:nvSpPr>
+        <p:spPr>
+          <a:xfrm>
+            <a:off x="7635240" y="2788920"/>
+            <a:ext cx="3474720" cy="1536192"/>
           </a:xfrm>
           <a:prstGeom prst="roundRect">
             <a:avLst>
-              <a:gd name="adj" fmla="val 6316"/>
+              <a:gd name="adj" fmla="val 7143"/>
+            </a:avLst>
+          </a:prstGeom>
+          <a:solidFill>
+            <a:srgbClr val="FFFFFF">
+              <a:alpha val="88000"/>
+            </a:srgbClr>
+          </a:solidFill>
+          <a:ln w="12700">
+            <a:solidFill>
+              <a:srgbClr val="D6E8F2"/>
+            </a:solidFill>
+            <a:prstDash val="solid"/>
+          </a:ln>
+        </p:spPr>
+      </p:sp>
+      <p:sp>
+        <p:nvSpPr>
+          <p:cNvPr id="14" name="Shape 12"/>
+          <p:cNvSpPr/>
+          <p:nvPr/>
+        </p:nvSpPr>
+        <p:spPr>
+          <a:xfrm>
+            <a:off x="8046720" y="3108960"/>
+            <a:ext cx="2651760" cy="896112"/>
+          </a:xfrm>
+          <a:prstGeom prst="arc">
+            <a:avLst/>
+          </a:prstGeom>
+          <a:noFill/>
+          <a:ln w="25400">
+            <a:solidFill>
+              <a:srgbClr val="0068B7"/>
+            </a:solidFill>
+            <a:prstDash val="solid"/>
+          </a:ln>
+        </p:spPr>
+      </p:sp>
+      <p:sp>
+        <p:nvSpPr>
+          <p:cNvPr id="15" name="Text 13"/>
+          <p:cNvSpPr/>
+          <p:nvPr/>
+        </p:nvSpPr>
+        <p:spPr>
+          <a:xfrm>
+            <a:off x="7909560" y="3099816"/>
+            <a:ext cx="2926080" cy="256032"/>
+          </a:xfrm>
+          <a:prstGeom prst="rect">
+            <a:avLst/>
+          </a:prstGeom>
+          <a:noFill/>
+          <a:ln/>
+        </p:spPr>
+        <p:txBody>
+          <a:bodyPr wrap="square" lIns="0" tIns="0" rIns="0" bIns="0" rtlCol="0" anchor="ctr"/>
+          <a:lstStyle/>
+          <a:p>
+            <a:pPr algn="ctr" indent="0" marL="0">
+              <a:buNone/>
+            </a:pPr>
+            <a:r>
+              <a:rPr lang="en-US" sz="1500" b="1" dirty="0">
+                <a:solidFill>
+                  <a:srgbClr val="003A63"/>
+                </a:solidFill>
+                <a:latin typeface="Aptos" pitchFamily="34" charset="0"/>
+                <a:ea typeface="Aptos" pitchFamily="34" charset="-122"/>
+                <a:cs typeface="Aptos" pitchFamily="34" charset="-120"/>
+              </a:rPr>
+              <a:t>Risk</a:t>
+            </a:r>
+            <a:endParaRPr lang="en-US" sz="1500" dirty="0"/>
+          </a:p>
+        </p:txBody>
+      </p:sp>
+      <p:sp>
+        <p:nvSpPr>
+          <p:cNvPr id="16" name="Shape 14"/>
+          <p:cNvSpPr/>
+          <p:nvPr/>
+        </p:nvSpPr>
+        <p:spPr>
+          <a:xfrm>
+            <a:off x="8366760" y="3639312"/>
+            <a:ext cx="2011680" cy="0"/>
+          </a:xfrm>
+          <a:prstGeom prst="line">
+            <a:avLst/>
+          </a:prstGeom>
+          <a:noFill/>
+          <a:ln w="63500">
+            <a:solidFill>
+              <a:srgbClr val="2F8A28"/>
+            </a:solidFill>
+            <a:prstDash val="solid"/>
+          </a:ln>
+        </p:spPr>
+      </p:sp>
+      <p:sp>
+        <p:nvSpPr>
+          <p:cNvPr id="17" name="Text 15"/>
+          <p:cNvSpPr/>
+          <p:nvPr/>
+        </p:nvSpPr>
+        <p:spPr>
+          <a:xfrm>
+            <a:off x="7909560" y="3849624"/>
+            <a:ext cx="2926080" cy="164592"/>
+          </a:xfrm>
+          <a:prstGeom prst="rect">
+            <a:avLst/>
+          </a:prstGeom>
+          <a:noFill/>
+          <a:ln/>
+        </p:spPr>
+        <p:txBody>
+          <a:bodyPr wrap="square" lIns="0" tIns="0" rIns="0" bIns="0" rtlCol="0" anchor="ctr"/>
+          <a:lstStyle/>
+          <a:p>
+            <a:pPr algn="ctr" indent="0" marL="0">
+              <a:buNone/>
+            </a:pPr>
+            <a:r>
+              <a:rPr lang="en-US" sz="900" dirty="0">
+                <a:solidFill>
+                  <a:srgbClr val="003A63"/>
+                </a:solidFill>
+                <a:latin typeface="Aptos" pitchFamily="34" charset="0"/>
+                <a:ea typeface="Aptos" pitchFamily="34" charset="-122"/>
+                <a:cs typeface="Aptos" pitchFamily="34" charset="-120"/>
+              </a:rPr>
+              <a:t>Human review</a:t>
+            </a:r>
+            <a:endParaRPr lang="en-US" sz="900" dirty="0"/>
+          </a:p>
+        </p:txBody>
+      </p:sp>
+      <p:sp>
+        <p:nvSpPr>
+          <p:cNvPr id="18" name="Shape 16"/>
+          <p:cNvSpPr/>
+          <p:nvPr/>
+        </p:nvSpPr>
+        <p:spPr>
+          <a:xfrm>
+            <a:off x="7635240" y="4498848"/>
+            <a:ext cx="3474720" cy="1143000"/>
+          </a:xfrm>
+          <a:prstGeom prst="roundRect">
+            <a:avLst>
+              <a:gd name="adj" fmla="val 9600"/>
             </a:avLst>
           </a:prstGeom>
           <a:solidFill>
@@ -4107,14 +4361,14 @@
       </p:sp>
       <p:sp>
         <p:nvSpPr>
-          <p:cNvPr id="16" name="Text 14"/>
-          <p:cNvSpPr/>
-          <p:nvPr/>
-        </p:nvSpPr>
-        <p:spPr>
-          <a:xfrm>
-            <a:off x="8074152" y="3666744"/>
-            <a:ext cx="2825496" cy="256032"/>
+          <p:cNvPr id="19" name="Text 17"/>
+          <p:cNvSpPr/>
+          <p:nvPr/>
+        </p:nvSpPr>
+        <p:spPr>
+          <a:xfrm>
+            <a:off x="7799832" y="4645152"/>
+            <a:ext cx="3145536" cy="256032"/>
           </a:xfrm>
           <a:prstGeom prst="rect">
             <a:avLst/>
@@ -4138,7 +4392,7 @@
                 <a:ea typeface="Aptos" pitchFamily="34" charset="-122"/>
                 <a:cs typeface="Aptos" pitchFamily="34" charset="-120"/>
               </a:rPr>
-              <a:t>Use this for</a:t>
+              <a:t>Safeguard to plan</a:t>
             </a:r>
             <a:endParaRPr lang="en-US" sz="1300" dirty="0"/>
           </a:p>
@@ -4146,14 +4400,14 @@
       </p:sp>
       <p:sp>
         <p:nvSpPr>
-          <p:cNvPr id="17" name="Text 15"/>
-          <p:cNvSpPr/>
-          <p:nvPr/>
-        </p:nvSpPr>
-        <p:spPr>
-          <a:xfrm>
-            <a:off x="8074152" y="4023360"/>
-            <a:ext cx="2825496" cy="1097280"/>
+          <p:cNvPr id="20" name="Text 18"/>
+          <p:cNvSpPr/>
+          <p:nvPr/>
+        </p:nvSpPr>
+        <p:spPr>
+          <a:xfrm>
+            <a:off x="7799832" y="5001768"/>
+            <a:ext cx="3145536" cy="502920"/>
           </a:xfrm>
           <a:prstGeom prst="rect">
             <a:avLst/>
@@ -4179,7 +4433,7 @@
                 <a:ea typeface="Aptos" pitchFamily="34" charset="-122"/>
                 <a:cs typeface="Aptos" pitchFamily="34" charset="-120"/>
               </a:rPr>
-              <a:t>Connect the concept to public health decisions, safeguards, documentation, or implementation work.</a:t>
+              <a:t>Identify what could go wrong, who could be affected, what safeguards are needed, and what evidence should be reviewed before use expands.</a:t>
             </a:r>
             <a:endParaRPr lang="en-US" sz="1550" dirty="0"/>
           </a:p>
@@ -4353,8 +4607,8 @@
         </p:nvSpPr>
         <p:spPr>
           <a:xfrm>
-            <a:off x="9966960" y="6537960"/>
-            <a:ext cx="1645920" cy="201168"/>
+            <a:off x="9646920" y="6537960"/>
+            <a:ext cx="1965960" cy="201168"/>
           </a:xfrm>
           <a:prstGeom prst="rect">
             <a:avLst/>
@@ -4378,7 +4632,7 @@
                 <a:ea typeface="Aptos" pitchFamily="34" charset="-122"/>
                 <a:cs typeface="Aptos" pitchFamily="34" charset="-120"/>
               </a:rPr>
-              <a:t>Â© Paula Soper</a:t>
+              <a:t>Copyright Paula Soper</a:t>
             </a:r>
             <a:endParaRPr lang="en-US" sz="800" dirty="0"/>
           </a:p>
@@ -4425,17 +4679,262 @@
       </p:sp>
       <p:sp>
         <p:nvSpPr>
-          <p:cNvPr id="8" name="Shape 6"/>
+          <p:cNvPr id="8" name="Text 6"/>
           <p:cNvSpPr/>
           <p:nvPr/>
         </p:nvSpPr>
         <p:spPr>
           <a:xfrm>
             <a:off x="640080" y="658368"/>
-            <a:ext cx="420624" cy="420624"/>
-          </a:xfrm>
-          <a:prstGeom prst="ellipse">
-            <a:avLst/>
+            <a:ext cx="10881360" cy="713232"/>
+          </a:xfrm>
+          <a:prstGeom prst="rect">
+            <a:avLst/>
+          </a:prstGeom>
+          <a:noFill/>
+          <a:ln/>
+        </p:spPr>
+        <p:txBody>
+          <a:bodyPr wrap="square" lIns="0" tIns="0" rIns="0" bIns="0" rtlCol="0" anchor="ctr">
+            <a:normAutofit/>
+          </a:bodyPr>
+          <a:lstStyle/>
+          <a:p>
+            <a:pPr indent="0" marL="0">
+              <a:buNone/>
+            </a:pPr>
+            <a:r>
+              <a:rPr lang="en-US" sz="3400" b="1" dirty="0">
+                <a:solidFill>
+                  <a:srgbClr val="003A63"/>
+                </a:solidFill>
+                <a:latin typeface="Aptos Display" pitchFamily="34" charset="0"/>
+                <a:ea typeface="Aptos Display" pitchFamily="34" charset="-122"/>
+                <a:cs typeface="Aptos Display" pitchFamily="34" charset="-120"/>
+              </a:rPr>
+              <a:t>Application to AI-Supported Workflows</a:t>
+            </a:r>
+            <a:endParaRPr lang="en-US" sz="3400" dirty="0"/>
+          </a:p>
+        </p:txBody>
+      </p:sp>
+      <p:sp>
+        <p:nvSpPr>
+          <p:cNvPr id="9" name="Text 7"/>
+          <p:cNvSpPr/>
+          <p:nvPr/>
+        </p:nvSpPr>
+        <p:spPr>
+          <a:xfrm>
+            <a:off x="868680" y="1508760"/>
+            <a:ext cx="6309360" cy="4160520"/>
+          </a:xfrm>
+          <a:prstGeom prst="rect">
+            <a:avLst/>
+          </a:prstGeom>
+          <a:noFill/>
+          <a:ln/>
+        </p:spPr>
+        <p:txBody>
+          <a:bodyPr wrap="square" lIns="635" tIns="635" rIns="635" bIns="635" rtlCol="0" anchor="t">
+            <a:normAutofit/>
+          </a:bodyPr>
+          <a:lstStyle/>
+          <a:p>
+            <a:r>
+              <a:rPr lang="en-US" sz="2100" dirty="0">
+                <a:solidFill>
+                  <a:srgbClr val="17364A"/>
+                </a:solidFill>
+                <a:latin typeface="Aptos" pitchFamily="34" charset="0"/>
+                <a:ea typeface="Aptos" pitchFamily="34" charset="-122"/>
+                <a:cs typeface="Aptos" pitchFamily="34" charset="-120"/>
+              </a:rPr>
+              <a:t>Generative AI business cases should include review time, source verification, and records considerations.</a:t>
+            </a:r>
+            <a:endParaRPr lang="en-US" sz="2100" dirty="0"/>
+          </a:p>
+          <a:p>
+            <a:r>
+              <a:rPr lang="en-US" sz="2100" dirty="0">
+                <a:solidFill>
+                  <a:srgbClr val="17364A"/>
+                </a:solidFill>
+                <a:latin typeface="Aptos" pitchFamily="34" charset="0"/>
+                <a:ea typeface="Aptos" pitchFamily="34" charset="-122"/>
+                <a:cs typeface="Aptos" pitchFamily="34" charset="-120"/>
+              </a:rPr>
+              <a:t>Predictive analytics business cases should include validation data, subgroup testing, and monitoring.</a:t>
+            </a:r>
+            <a:endParaRPr lang="en-US" sz="2100" dirty="0"/>
+          </a:p>
+          <a:p>
+            <a:r>
+              <a:rPr lang="en-US" sz="2100" dirty="0">
+                <a:solidFill>
+                  <a:srgbClr val="17364A"/>
+                </a:solidFill>
+                <a:latin typeface="Aptos" pitchFamily="34" charset="0"/>
+                <a:ea typeface="Aptos" pitchFamily="34" charset="-122"/>
+                <a:cs typeface="Aptos" pitchFamily="34" charset="-120"/>
+              </a:rPr>
+              <a:t>Agentic AI business cases should include security architecture, approval workflows, rollback, logging,.</a:t>
+            </a:r>
+            <a:endParaRPr lang="en-US" sz="2100" dirty="0"/>
+          </a:p>
+        </p:txBody>
+      </p:sp>
+      <p:sp>
+        <p:nvSpPr>
+          <p:cNvPr id="10" name="Shape 8"/>
+          <p:cNvSpPr/>
+          <p:nvPr/>
+        </p:nvSpPr>
+        <p:spPr>
+          <a:xfrm>
+            <a:off x="7635240" y="1325880"/>
+            <a:ext cx="3474720" cy="1325880"/>
+          </a:xfrm>
+          <a:prstGeom prst="roundRect">
+            <a:avLst>
+              <a:gd name="adj" fmla="val 8276"/>
+            </a:avLst>
+          </a:prstGeom>
+          <a:solidFill>
+            <a:srgbClr val="EEF8ED"/>
+          </a:solidFill>
+          <a:ln w="12700">
+            <a:solidFill>
+              <a:srgbClr val="B9D7E6"/>
+            </a:solidFill>
+            <a:prstDash val="solid"/>
+          </a:ln>
+        </p:spPr>
+      </p:sp>
+      <p:sp>
+        <p:nvSpPr>
+          <p:cNvPr id="11" name="Text 9"/>
+          <p:cNvSpPr/>
+          <p:nvPr/>
+        </p:nvSpPr>
+        <p:spPr>
+          <a:xfrm>
+            <a:off x="7799832" y="1472184"/>
+            <a:ext cx="3145536" cy="256032"/>
+          </a:xfrm>
+          <a:prstGeom prst="rect">
+            <a:avLst/>
+          </a:prstGeom>
+          <a:noFill/>
+          <a:ln/>
+        </p:spPr>
+        <p:txBody>
+          <a:bodyPr wrap="square" lIns="0" tIns="0" rIns="0" bIns="0" rtlCol="0" anchor="ctr"/>
+          <a:lstStyle/>
+          <a:p>
+            <a:pPr indent="0" marL="0">
+              <a:buNone/>
+            </a:pPr>
+            <a:r>
+              <a:rPr lang="en-US" sz="1300" b="1" dirty="0">
+                <a:solidFill>
+                  <a:srgbClr val="0068B7"/>
+                </a:solidFill>
+                <a:latin typeface="Aptos" pitchFamily="34" charset="0"/>
+                <a:ea typeface="Aptos" pitchFamily="34" charset="-122"/>
+                <a:cs typeface="Aptos" pitchFamily="34" charset="-120"/>
+              </a:rPr>
+              <a:t>Implementation cue</a:t>
+            </a:r>
+            <a:endParaRPr lang="en-US" sz="1300" dirty="0"/>
+          </a:p>
+        </p:txBody>
+      </p:sp>
+      <p:sp>
+        <p:nvSpPr>
+          <p:cNvPr id="12" name="Text 10"/>
+          <p:cNvSpPr/>
+          <p:nvPr/>
+        </p:nvSpPr>
+        <p:spPr>
+          <a:xfrm>
+            <a:off x="7799832" y="1828800"/>
+            <a:ext cx="3145536" cy="685800"/>
+          </a:xfrm>
+          <a:prstGeom prst="rect">
+            <a:avLst/>
+          </a:prstGeom>
+          <a:noFill/>
+          <a:ln/>
+        </p:spPr>
+        <p:txBody>
+          <a:bodyPr wrap="square" lIns="0" tIns="0" rIns="0" bIns="0" rtlCol="0" anchor="t">
+            <a:normAutofit/>
+          </a:bodyPr>
+          <a:lstStyle/>
+          <a:p>
+            <a:pPr indent="0" marL="0">
+              <a:buNone/>
+            </a:pPr>
+            <a:r>
+              <a:rPr lang="en-US" sz="1550" dirty="0">
+                <a:solidFill>
+                  <a:srgbClr val="17364A"/>
+                </a:solidFill>
+                <a:latin typeface="Aptos" pitchFamily="34" charset="0"/>
+                <a:ea typeface="Aptos" pitchFamily="34" charset="-122"/>
+                <a:cs typeface="Aptos" pitchFamily="34" charset="-120"/>
+              </a:rPr>
+              <a:t>Generative AI business cases should include review time, source verification, and records considerations.</a:t>
+            </a:r>
+            <a:endParaRPr lang="en-US" sz="1550" dirty="0"/>
+          </a:p>
+        </p:txBody>
+      </p:sp>
+      <p:sp>
+        <p:nvSpPr>
+          <p:cNvPr id="13" name="Shape 11"/>
+          <p:cNvSpPr/>
+          <p:nvPr/>
+        </p:nvSpPr>
+        <p:spPr>
+          <a:xfrm>
+            <a:off x="7635240" y="2788920"/>
+            <a:ext cx="3474720" cy="1536192"/>
+          </a:xfrm>
+          <a:prstGeom prst="roundRect">
+            <a:avLst>
+              <a:gd name="adj" fmla="val 7143"/>
+            </a:avLst>
+          </a:prstGeom>
+          <a:solidFill>
+            <a:srgbClr val="FFFFFF">
+              <a:alpha val="88000"/>
+            </a:srgbClr>
+          </a:solidFill>
+          <a:ln w="12700">
+            <a:solidFill>
+              <a:srgbClr val="D6E8F2"/>
+            </a:solidFill>
+            <a:prstDash val="solid"/>
+          </a:ln>
+        </p:spPr>
+      </p:sp>
+      <p:sp>
+        <p:nvSpPr>
+          <p:cNvPr id="14" name="Shape 12"/>
+          <p:cNvSpPr/>
+          <p:nvPr/>
+        </p:nvSpPr>
+        <p:spPr>
+          <a:xfrm>
+            <a:off x="7927848" y="3319272"/>
+            <a:ext cx="792480" cy="749808"/>
+          </a:xfrm>
+          <a:prstGeom prst="roundRect">
+            <a:avLst>
+              <a:gd name="adj" fmla="val 14634"/>
+            </a:avLst>
           </a:prstGeom>
           <a:solidFill>
             <a:srgbClr val="0068B7"/>
@@ -4450,53 +4949,14 @@
       </p:sp>
       <p:sp>
         <p:nvSpPr>
-          <p:cNvPr id="9" name="Text 7"/>
-          <p:cNvSpPr/>
-          <p:nvPr/>
-        </p:nvSpPr>
-        <p:spPr>
-          <a:xfrm>
-            <a:off x="640080" y="731520"/>
-            <a:ext cx="420624" cy="164592"/>
-          </a:xfrm>
-          <a:prstGeom prst="rect">
-            <a:avLst/>
-          </a:prstGeom>
-          <a:noFill/>
-          <a:ln/>
-        </p:spPr>
-        <p:txBody>
-          <a:bodyPr wrap="square" lIns="0" tIns="0" rIns="0" bIns="0" rtlCol="0" anchor="ctr"/>
-          <a:lstStyle/>
-          <a:p>
-            <a:pPr algn="ctr" indent="0" marL="0">
-              <a:buNone/>
-            </a:pPr>
-            <a:r>
-              <a:rPr lang="en-US" sz="1100" b="1" dirty="0">
-                <a:solidFill>
-                  <a:srgbClr val="FFFFFF"/>
-                </a:solidFill>
-                <a:latin typeface="Aptos" pitchFamily="34" charset="0"/>
-                <a:ea typeface="Aptos" pitchFamily="34" charset="-122"/>
-                <a:cs typeface="Aptos" pitchFamily="34" charset="-120"/>
-              </a:rPr>
-              <a:t>8</a:t>
-            </a:r>
-            <a:endParaRPr lang="en-US" sz="1100" dirty="0"/>
-          </a:p>
-        </p:txBody>
-      </p:sp>
-      <p:sp>
-        <p:nvSpPr>
-          <p:cNvPr id="10" name="Text 8"/>
-          <p:cNvSpPr/>
-          <p:nvPr/>
-        </p:nvSpPr>
-        <p:spPr>
-          <a:xfrm>
-            <a:off x="640080" y="621792"/>
-            <a:ext cx="10881360" cy="713232"/>
+          <p:cNvPr id="15" name="Text 13"/>
+          <p:cNvSpPr/>
+          <p:nvPr/>
+        </p:nvSpPr>
+        <p:spPr>
+          <a:xfrm>
+            <a:off x="8001000" y="3511296"/>
+            <a:ext cx="646176" cy="310896"/>
           </a:xfrm>
           <a:prstGeom prst="rect">
             <a:avLst/>
@@ -4510,112 +4970,46 @@
           </a:bodyPr>
           <a:lstStyle/>
           <a:p>
-            <a:pPr indent="0" marL="0">
-              <a:buNone/>
-            </a:pPr>
-            <a:r>
-              <a:rPr lang="en-US" sz="3400" b="1" dirty="0">
-                <a:solidFill>
-                  <a:srgbClr val="003A63"/>
-                </a:solidFill>
-                <a:latin typeface="Aptos Display" pitchFamily="34" charset="0"/>
-                <a:ea typeface="Aptos Display" pitchFamily="34" charset="-122"/>
-                <a:cs typeface="Aptos Display" pitchFamily="34" charset="-120"/>
-              </a:rPr>
-              <a:t>Application to AI-Supported Workflows</a:t>
-            </a:r>
-            <a:endParaRPr lang="en-US" sz="3400" dirty="0"/>
-          </a:p>
-        </p:txBody>
-      </p:sp>
-      <p:sp>
-        <p:nvSpPr>
-          <p:cNvPr id="11" name="Text 9"/>
-          <p:cNvSpPr/>
-          <p:nvPr/>
-        </p:nvSpPr>
-        <p:spPr>
-          <a:xfrm>
-            <a:off x="868680" y="1508760"/>
-            <a:ext cx="6537960" cy="4160520"/>
-          </a:xfrm>
-          <a:prstGeom prst="rect">
-            <a:avLst/>
-          </a:prstGeom>
-          <a:noFill/>
-          <a:ln/>
-        </p:spPr>
-        <p:txBody>
-          <a:bodyPr wrap="square" lIns="635" tIns="635" rIns="635" bIns="635" rtlCol="0" anchor="t">
-            <a:normAutofit/>
-          </a:bodyPr>
-          <a:lstStyle/>
-          <a:p>
-            <a:r>
-              <a:rPr lang="en-US" sz="2100" dirty="0">
-                <a:solidFill>
-                  <a:srgbClr val="17364A"/>
-                </a:solidFill>
-                <a:latin typeface="Aptos" pitchFamily="34" charset="0"/>
-                <a:ea typeface="Aptos" pitchFamily="34" charset="-122"/>
-                <a:cs typeface="Aptos" pitchFamily="34" charset="-120"/>
-              </a:rPr>
-              <a:t>Generative AI business cases should include review time, source verification, and records considerations.</a:t>
-            </a:r>
-            <a:endParaRPr lang="en-US" sz="2100" dirty="0"/>
-          </a:p>
-          <a:p>
-            <a:r>
-              <a:rPr lang="en-US" sz="2100" dirty="0">
-                <a:solidFill>
-                  <a:srgbClr val="17364A"/>
-                </a:solidFill>
-                <a:latin typeface="Aptos" pitchFamily="34" charset="0"/>
-                <a:ea typeface="Aptos" pitchFamily="34" charset="-122"/>
-                <a:cs typeface="Aptos" pitchFamily="34" charset="-120"/>
-              </a:rPr>
-              <a:t>Predictive analytics business cases should include validation data, subgroup testing, and monitoring.</a:t>
-            </a:r>
-            <a:endParaRPr lang="en-US" sz="2100" dirty="0"/>
-          </a:p>
-          <a:p>
-            <a:r>
-              <a:rPr lang="en-US" sz="2100" dirty="0">
-                <a:solidFill>
-                  <a:srgbClr val="17364A"/>
-                </a:solidFill>
-                <a:latin typeface="Aptos" pitchFamily="34" charset="0"/>
-                <a:ea typeface="Aptos" pitchFamily="34" charset="-122"/>
-                <a:cs typeface="Aptos" pitchFamily="34" charset="-120"/>
-              </a:rPr>
-              <a:t>Agentic AI business cases should include security architecture, approval workflows, rollback, logging,.</a:t>
-            </a:r>
-            <a:endParaRPr lang="en-US" sz="2100" dirty="0"/>
-          </a:p>
-        </p:txBody>
-      </p:sp>
-      <p:sp>
-        <p:nvSpPr>
-          <p:cNvPr id="12" name="Shape 10"/>
-          <p:cNvSpPr/>
-          <p:nvPr/>
-        </p:nvSpPr>
-        <p:spPr>
-          <a:xfrm>
-            <a:off x="7909560" y="1417320"/>
-            <a:ext cx="3154680" cy="1828800"/>
+            <a:pPr algn="ctr" indent="0" marL="0">
+              <a:buNone/>
+            </a:pPr>
+            <a:r>
+              <a:rPr lang="en-US" sz="1500" b="1" dirty="0">
+                <a:solidFill>
+                  <a:srgbClr val="FFFFFF"/>
+                </a:solidFill>
+                <a:latin typeface="Aptos" pitchFamily="34" charset="0"/>
+                <a:ea typeface="Aptos" pitchFamily="34" charset="-122"/>
+                <a:cs typeface="Aptos" pitchFamily="34" charset="-120"/>
+              </a:rPr>
+              <a:t>Plan</a:t>
+            </a:r>
+            <a:endParaRPr lang="en-US" sz="1500" dirty="0"/>
+          </a:p>
+        </p:txBody>
+      </p:sp>
+      <p:sp>
+        <p:nvSpPr>
+          <p:cNvPr id="16" name="Shape 14"/>
+          <p:cNvSpPr/>
+          <p:nvPr/>
+        </p:nvSpPr>
+        <p:spPr>
+          <a:xfrm>
+            <a:off x="8976360" y="3319272"/>
+            <a:ext cx="792480" cy="749808"/>
           </a:xfrm>
           <a:prstGeom prst="roundRect">
             <a:avLst>
-              <a:gd name="adj" fmla="val 6000"/>
+              <a:gd name="adj" fmla="val 14634"/>
             </a:avLst>
           </a:prstGeom>
           <a:solidFill>
-            <a:srgbClr val="EEF8ED"/>
+            <a:srgbClr val="2F8A28"/>
           </a:solidFill>
           <a:ln w="12700">
             <a:solidFill>
-              <a:srgbClr val="B9D7E6"/>
+              <a:srgbClr val="2F8A28"/>
             </a:solidFill>
             <a:prstDash val="solid"/>
           </a:ln>
@@ -4623,98 +5017,189 @@
       </p:sp>
       <p:sp>
         <p:nvSpPr>
-          <p:cNvPr id="13" name="Text 11"/>
-          <p:cNvSpPr/>
-          <p:nvPr/>
-        </p:nvSpPr>
-        <p:spPr>
-          <a:xfrm>
-            <a:off x="8074152" y="1563624"/>
-            <a:ext cx="2825496" cy="256032"/>
-          </a:xfrm>
-          <a:prstGeom prst="rect">
-            <a:avLst/>
-          </a:prstGeom>
-          <a:noFill/>
-          <a:ln/>
-        </p:spPr>
-        <p:txBody>
-          <a:bodyPr wrap="square" lIns="0" tIns="0" rIns="0" bIns="0" rtlCol="0" anchor="ctr"/>
-          <a:lstStyle/>
-          <a:p>
-            <a:pPr indent="0" marL="0">
-              <a:buNone/>
-            </a:pPr>
-            <a:r>
-              <a:rPr lang="en-US" sz="1300" b="1" dirty="0">
-                <a:solidFill>
-                  <a:srgbClr val="0068B7"/>
-                </a:solidFill>
-                <a:latin typeface="Aptos" pitchFamily="34" charset="0"/>
-                <a:ea typeface="Aptos" pitchFamily="34" charset="-122"/>
-                <a:cs typeface="Aptos" pitchFamily="34" charset="-120"/>
-              </a:rPr>
-              <a:t>Key idea</a:t>
-            </a:r>
-            <a:endParaRPr lang="en-US" sz="1300" dirty="0"/>
-          </a:p>
-        </p:txBody>
-      </p:sp>
-      <p:sp>
-        <p:nvSpPr>
-          <p:cNvPr id="14" name="Text 12"/>
-          <p:cNvSpPr/>
-          <p:nvPr/>
-        </p:nvSpPr>
-        <p:spPr>
-          <a:xfrm>
-            <a:off x="8074152" y="1920240"/>
-            <a:ext cx="2825496" cy="1188720"/>
-          </a:xfrm>
-          <a:prstGeom prst="rect">
-            <a:avLst/>
-          </a:prstGeom>
-          <a:noFill/>
-          <a:ln/>
-        </p:spPr>
-        <p:txBody>
-          <a:bodyPr wrap="square" lIns="0" tIns="0" rIns="0" bIns="0" rtlCol="0" anchor="t">
+          <p:cNvPr id="17" name="Text 15"/>
+          <p:cNvSpPr/>
+          <p:nvPr/>
+        </p:nvSpPr>
+        <p:spPr>
+          <a:xfrm>
+            <a:off x="9049512" y="3511296"/>
+            <a:ext cx="646176" cy="310896"/>
+          </a:xfrm>
+          <a:prstGeom prst="rect">
+            <a:avLst/>
+          </a:prstGeom>
+          <a:noFill/>
+          <a:ln/>
+        </p:spPr>
+        <p:txBody>
+          <a:bodyPr wrap="square" lIns="0" tIns="0" rIns="0" bIns="0" rtlCol="0" anchor="ctr">
             <a:normAutofit/>
           </a:bodyPr>
           <a:lstStyle/>
           <a:p>
-            <a:pPr indent="0" marL="0">
-              <a:buNone/>
-            </a:pPr>
-            <a:r>
-              <a:rPr lang="en-US" sz="1550" dirty="0">
-                <a:solidFill>
-                  <a:srgbClr val="17364A"/>
-                </a:solidFill>
-                <a:latin typeface="Aptos" pitchFamily="34" charset="0"/>
-                <a:ea typeface="Aptos" pitchFamily="34" charset="-122"/>
-                <a:cs typeface="Aptos" pitchFamily="34" charset="-120"/>
-              </a:rPr>
-              <a:t>Generative AI business cases should include review time, source verification, and records considerations.</a:t>
-            </a:r>
-            <a:endParaRPr lang="en-US" sz="1550" dirty="0"/>
-          </a:p>
-        </p:txBody>
-      </p:sp>
-      <p:sp>
-        <p:nvSpPr>
-          <p:cNvPr id="15" name="Shape 13"/>
-          <p:cNvSpPr/>
-          <p:nvPr/>
-        </p:nvSpPr>
-        <p:spPr>
-          <a:xfrm>
-            <a:off x="7909560" y="3520440"/>
-            <a:ext cx="3154680" cy="1737360"/>
+            <a:pPr algn="ctr" indent="0" marL="0">
+              <a:buNone/>
+            </a:pPr>
+            <a:r>
+              <a:rPr lang="en-US" sz="1500" b="1" dirty="0">
+                <a:solidFill>
+                  <a:srgbClr val="FFFFFF"/>
+                </a:solidFill>
+                <a:latin typeface="Aptos" pitchFamily="34" charset="0"/>
+                <a:ea typeface="Aptos" pitchFamily="34" charset="-122"/>
+                <a:cs typeface="Aptos" pitchFamily="34" charset="-120"/>
+              </a:rPr>
+              <a:t>Do</a:t>
+            </a:r>
+            <a:endParaRPr lang="en-US" sz="1500" dirty="0"/>
+          </a:p>
+        </p:txBody>
+      </p:sp>
+      <p:sp>
+        <p:nvSpPr>
+          <p:cNvPr id="18" name="Shape 16"/>
+          <p:cNvSpPr/>
+          <p:nvPr/>
+        </p:nvSpPr>
+        <p:spPr>
+          <a:xfrm>
+            <a:off x="10024872" y="3319272"/>
+            <a:ext cx="792480" cy="749808"/>
           </a:xfrm>
           <a:prstGeom prst="roundRect">
             <a:avLst>
-              <a:gd name="adj" fmla="val 6316"/>
+              <a:gd name="adj" fmla="val 14634"/>
+            </a:avLst>
+          </a:prstGeom>
+          <a:solidFill>
+            <a:srgbClr val="D69A2D"/>
+          </a:solidFill>
+          <a:ln w="12700">
+            <a:solidFill>
+              <a:srgbClr val="D69A2D"/>
+            </a:solidFill>
+            <a:prstDash val="solid"/>
+          </a:ln>
+        </p:spPr>
+      </p:sp>
+      <p:sp>
+        <p:nvSpPr>
+          <p:cNvPr id="19" name="Text 17"/>
+          <p:cNvSpPr/>
+          <p:nvPr/>
+        </p:nvSpPr>
+        <p:spPr>
+          <a:xfrm>
+            <a:off x="10098024" y="3511296"/>
+            <a:ext cx="646176" cy="310896"/>
+          </a:xfrm>
+          <a:prstGeom prst="rect">
+            <a:avLst/>
+          </a:prstGeom>
+          <a:noFill/>
+          <a:ln/>
+        </p:spPr>
+        <p:txBody>
+          <a:bodyPr wrap="square" lIns="0" tIns="0" rIns="0" bIns="0" rtlCol="0" anchor="ctr">
+            <a:normAutofit/>
+          </a:bodyPr>
+          <a:lstStyle/>
+          <a:p>
+            <a:pPr algn="ctr" indent="0" marL="0">
+              <a:buNone/>
+            </a:pPr>
+            <a:r>
+              <a:rPr lang="en-US" sz="1500" b="1" dirty="0">
+                <a:solidFill>
+                  <a:srgbClr val="FFFFFF"/>
+                </a:solidFill>
+                <a:latin typeface="Aptos" pitchFamily="34" charset="0"/>
+                <a:ea typeface="Aptos" pitchFamily="34" charset="-122"/>
+                <a:cs typeface="Aptos" pitchFamily="34" charset="-120"/>
+              </a:rPr>
+              <a:t>Review</a:t>
+            </a:r>
+            <a:endParaRPr lang="en-US" sz="1500" dirty="0"/>
+          </a:p>
+        </p:txBody>
+      </p:sp>
+      <p:sp>
+        <p:nvSpPr>
+          <p:cNvPr id="20" name="Shape 18"/>
+          <p:cNvSpPr/>
+          <p:nvPr/>
+        </p:nvSpPr>
+        <p:spPr>
+          <a:xfrm>
+            <a:off x="8293608" y="4389120"/>
+            <a:ext cx="2157984" cy="0"/>
+          </a:xfrm>
+          <a:prstGeom prst="line">
+            <a:avLst/>
+          </a:prstGeom>
+          <a:noFill/>
+          <a:ln w="25400">
+            <a:solidFill>
+              <a:srgbClr val="8ABBD8"/>
+            </a:solidFill>
+            <a:prstDash val="solid"/>
+          </a:ln>
+        </p:spPr>
+      </p:sp>
+      <p:sp>
+        <p:nvSpPr>
+          <p:cNvPr id="21" name="Text 19"/>
+          <p:cNvSpPr/>
+          <p:nvPr/>
+        </p:nvSpPr>
+        <p:spPr>
+          <a:xfrm>
+            <a:off x="7909560" y="3977640"/>
+            <a:ext cx="2926080" cy="182880"/>
+          </a:xfrm>
+          <a:prstGeom prst="rect">
+            <a:avLst/>
+          </a:prstGeom>
+          <a:noFill/>
+          <a:ln/>
+        </p:spPr>
+        <p:txBody>
+          <a:bodyPr wrap="square" lIns="0" tIns="0" rIns="0" bIns="0" rtlCol="0" anchor="ctr"/>
+          <a:lstStyle/>
+          <a:p>
+            <a:pPr algn="ctr" indent="0" marL="0">
+              <a:buNone/>
+            </a:pPr>
+            <a:r>
+              <a:rPr lang="en-US" sz="1000" dirty="0">
+                <a:solidFill>
+                  <a:srgbClr val="003A63"/>
+                </a:solidFill>
+                <a:latin typeface="Aptos" pitchFamily="34" charset="0"/>
+                <a:ea typeface="Aptos" pitchFamily="34" charset="-122"/>
+                <a:cs typeface="Aptos" pitchFamily="34" charset="-120"/>
+              </a:rPr>
+              <a:t>Dependencies visible</a:t>
+            </a:r>
+            <a:endParaRPr lang="en-US" sz="1000" dirty="0"/>
+          </a:p>
+        </p:txBody>
+      </p:sp>
+      <p:sp>
+        <p:nvSpPr>
+          <p:cNvPr id="22" name="Shape 20"/>
+          <p:cNvSpPr/>
+          <p:nvPr/>
+        </p:nvSpPr>
+        <p:spPr>
+          <a:xfrm>
+            <a:off x="7635240" y="4498848"/>
+            <a:ext cx="3474720" cy="1143000"/>
+          </a:xfrm>
+          <a:prstGeom prst="roundRect">
+            <a:avLst>
+              <a:gd name="adj" fmla="val 9600"/>
             </a:avLst>
           </a:prstGeom>
           <a:solidFill>
@@ -4730,14 +5215,14 @@
       </p:sp>
       <p:sp>
         <p:nvSpPr>
-          <p:cNvPr id="16" name="Text 14"/>
-          <p:cNvSpPr/>
-          <p:nvPr/>
-        </p:nvSpPr>
-        <p:spPr>
-          <a:xfrm>
-            <a:off x="8074152" y="3666744"/>
-            <a:ext cx="2825496" cy="256032"/>
+          <p:cNvPr id="23" name="Text 21"/>
+          <p:cNvSpPr/>
+          <p:nvPr/>
+        </p:nvSpPr>
+        <p:spPr>
+          <a:xfrm>
+            <a:off x="7799832" y="4645152"/>
+            <a:ext cx="3145536" cy="256032"/>
           </a:xfrm>
           <a:prstGeom prst="rect">
             <a:avLst/>
@@ -4761,7 +5246,7 @@
                 <a:ea typeface="Aptos" pitchFamily="34" charset="-122"/>
                 <a:cs typeface="Aptos" pitchFamily="34" charset="-120"/>
               </a:rPr>
-              <a:t>Use this for</a:t>
+              <a:t>Next action</a:t>
             </a:r>
             <a:endParaRPr lang="en-US" sz="1300" dirty="0"/>
           </a:p>
@@ -4769,14 +5254,14 @@
       </p:sp>
       <p:sp>
         <p:nvSpPr>
-          <p:cNvPr id="17" name="Text 15"/>
-          <p:cNvSpPr/>
-          <p:nvPr/>
-        </p:nvSpPr>
-        <p:spPr>
-          <a:xfrm>
-            <a:off x="8074152" y="4023360"/>
-            <a:ext cx="2825496" cy="1097280"/>
+          <p:cNvPr id="24" name="Text 22"/>
+          <p:cNvSpPr/>
+          <p:nvPr/>
+        </p:nvSpPr>
+        <p:spPr>
+          <a:xfrm>
+            <a:off x="7799832" y="5001768"/>
+            <a:ext cx="3145536" cy="502920"/>
           </a:xfrm>
           <a:prstGeom prst="rect">
             <a:avLst/>
@@ -4802,7 +5287,7 @@
                 <a:ea typeface="Aptos" pitchFamily="34" charset="-122"/>
                 <a:cs typeface="Aptos" pitchFamily="34" charset="-120"/>
               </a:rPr>
-              <a:t>Connect the concept to public health decisions, safeguards, documentation, or implementation work.</a:t>
+              <a:t>Use the concept to clarify workflow changes, dependencies, staffing, procurement requirements, training needs, and implementation checkpoints.</a:t>
             </a:r>
             <a:endParaRPr lang="en-US" sz="1550" dirty="0"/>
           </a:p>
@@ -4976,8 +5461,8 @@
         </p:nvSpPr>
         <p:spPr>
           <a:xfrm>
-            <a:off x="9966960" y="6537960"/>
-            <a:ext cx="1645920" cy="201168"/>
+            <a:off x="9646920" y="6537960"/>
+            <a:ext cx="1965960" cy="201168"/>
           </a:xfrm>
           <a:prstGeom prst="rect">
             <a:avLst/>
@@ -5001,7 +5486,7 @@
                 <a:ea typeface="Aptos" pitchFamily="34" charset="-122"/>
                 <a:cs typeface="Aptos" pitchFamily="34" charset="-120"/>
               </a:rPr>
-              <a:t>Â© Paula Soper</a:t>
+              <a:t>Copyright Paula Soper</a:t>
             </a:r>
             <a:endParaRPr lang="en-US" sz="800" dirty="0"/>
           </a:p>
@@ -5048,77 +5533,13 @@
       </p:sp>
       <p:sp>
         <p:nvSpPr>
-          <p:cNvPr id="8" name="Shape 6"/>
+          <p:cNvPr id="8" name="Text 6"/>
           <p:cNvSpPr/>
           <p:nvPr/>
         </p:nvSpPr>
         <p:spPr>
           <a:xfrm>
             <a:off x="640080" y="658368"/>
-            <a:ext cx="420624" cy="420624"/>
-          </a:xfrm>
-          <a:prstGeom prst="ellipse">
-            <a:avLst/>
-          </a:prstGeom>
-          <a:solidFill>
-            <a:srgbClr val="0068B7"/>
-          </a:solidFill>
-          <a:ln w="12700">
-            <a:solidFill>
-              <a:srgbClr val="0068B7"/>
-            </a:solidFill>
-            <a:prstDash val="solid"/>
-          </a:ln>
-        </p:spPr>
-      </p:sp>
-      <p:sp>
-        <p:nvSpPr>
-          <p:cNvPr id="9" name="Text 7"/>
-          <p:cNvSpPr/>
-          <p:nvPr/>
-        </p:nvSpPr>
-        <p:spPr>
-          <a:xfrm>
-            <a:off x="640080" y="731520"/>
-            <a:ext cx="420624" cy="164592"/>
-          </a:xfrm>
-          <a:prstGeom prst="rect">
-            <a:avLst/>
-          </a:prstGeom>
-          <a:noFill/>
-          <a:ln/>
-        </p:spPr>
-        <p:txBody>
-          <a:bodyPr wrap="square" lIns="0" tIns="0" rIns="0" bIns="0" rtlCol="0" anchor="ctr"/>
-          <a:lstStyle/>
-          <a:p>
-            <a:pPr algn="ctr" indent="0" marL="0">
-              <a:buNone/>
-            </a:pPr>
-            <a:r>
-              <a:rPr lang="en-US" sz="1100" b="1" dirty="0">
-                <a:solidFill>
-                  <a:srgbClr val="FFFFFF"/>
-                </a:solidFill>
-                <a:latin typeface="Aptos" pitchFamily="34" charset="0"/>
-                <a:ea typeface="Aptos" pitchFamily="34" charset="-122"/>
-                <a:cs typeface="Aptos" pitchFamily="34" charset="-120"/>
-              </a:rPr>
-              <a:t>9</a:t>
-            </a:r>
-            <a:endParaRPr lang="en-US" sz="1100" dirty="0"/>
-          </a:p>
-        </p:txBody>
-      </p:sp>
-      <p:sp>
-        <p:nvSpPr>
-          <p:cNvPr id="10" name="Text 8"/>
-          <p:cNvSpPr/>
-          <p:nvPr/>
-        </p:nvSpPr>
-        <p:spPr>
-          <a:xfrm>
-            <a:off x="640080" y="621792"/>
             <a:ext cx="10881360" cy="713232"/>
           </a:xfrm>
           <a:prstGeom prst="rect">
@@ -5153,14 +5574,14 @@
       </p:sp>
       <p:sp>
         <p:nvSpPr>
-          <p:cNvPr id="11" name="Text 9"/>
+          <p:cNvPr id="9" name="Text 7"/>
           <p:cNvSpPr/>
           <p:nvPr/>
         </p:nvSpPr>
         <p:spPr>
           <a:xfrm>
             <a:off x="868680" y="1508760"/>
-            <a:ext cx="6537960" cy="4160520"/>
+            <a:ext cx="6309360" cy="4160520"/>
           </a:xfrm>
           <a:prstGeom prst="rect">
             <a:avLst/>
@@ -5219,18 +5640,18 @@
       </p:sp>
       <p:sp>
         <p:nvSpPr>
-          <p:cNvPr id="12" name="Shape 10"/>
-          <p:cNvSpPr/>
-          <p:nvPr/>
-        </p:nvSpPr>
-        <p:spPr>
-          <a:xfrm>
-            <a:off x="7909560" y="1417320"/>
-            <a:ext cx="3154680" cy="1828800"/>
+          <p:cNvPr id="10" name="Shape 8"/>
+          <p:cNvSpPr/>
+          <p:nvPr/>
+        </p:nvSpPr>
+        <p:spPr>
+          <a:xfrm>
+            <a:off x="7635240" y="1325880"/>
+            <a:ext cx="3474720" cy="1325880"/>
           </a:xfrm>
           <a:prstGeom prst="roundRect">
             <a:avLst>
-              <a:gd name="adj" fmla="val 6000"/>
+              <a:gd name="adj" fmla="val 8276"/>
             </a:avLst>
           </a:prstGeom>
           <a:solidFill>
@@ -5246,14 +5667,14 @@
       </p:sp>
       <p:sp>
         <p:nvSpPr>
-          <p:cNvPr id="13" name="Text 11"/>
-          <p:cNvSpPr/>
-          <p:nvPr/>
-        </p:nvSpPr>
-        <p:spPr>
-          <a:xfrm>
-            <a:off x="8074152" y="1563624"/>
-            <a:ext cx="2825496" cy="256032"/>
+          <p:cNvPr id="11" name="Text 9"/>
+          <p:cNvSpPr/>
+          <p:nvPr/>
+        </p:nvSpPr>
+        <p:spPr>
+          <a:xfrm>
+            <a:off x="7799832" y="1472184"/>
+            <a:ext cx="3145536" cy="256032"/>
           </a:xfrm>
           <a:prstGeom prst="rect">
             <a:avLst/>
@@ -5277,7 +5698,7 @@
                 <a:ea typeface="Aptos" pitchFamily="34" charset="-122"/>
                 <a:cs typeface="Aptos" pitchFamily="34" charset="-120"/>
               </a:rPr>
-              <a:t>Key idea</a:t>
+              <a:t>Core concept</a:t>
             </a:r>
             <a:endParaRPr lang="en-US" sz="1300" dirty="0"/>
           </a:p>
@@ -5285,14 +5706,14 @@
       </p:sp>
       <p:sp>
         <p:nvSpPr>
-          <p:cNvPr id="14" name="Text 12"/>
-          <p:cNvSpPr/>
-          <p:nvPr/>
-        </p:nvSpPr>
-        <p:spPr>
-          <a:xfrm>
-            <a:off x="8074152" y="1920240"/>
-            <a:ext cx="2825496" cy="1188720"/>
+          <p:cNvPr id="12" name="Text 10"/>
+          <p:cNvSpPr/>
+          <p:nvPr/>
+        </p:nvSpPr>
+        <p:spPr>
+          <a:xfrm>
+            <a:off x="7799832" y="1828800"/>
+            <a:ext cx="3145536" cy="685800"/>
           </a:xfrm>
           <a:prstGeom prst="rect">
             <a:avLst/>
@@ -5326,18 +5747,159 @@
       </p:sp>
       <p:sp>
         <p:nvSpPr>
-          <p:cNvPr id="15" name="Shape 13"/>
-          <p:cNvSpPr/>
-          <p:nvPr/>
-        </p:nvSpPr>
-        <p:spPr>
-          <a:xfrm>
-            <a:off x="7909560" y="3520440"/>
-            <a:ext cx="3154680" cy="1737360"/>
+          <p:cNvPr id="13" name="Shape 11"/>
+          <p:cNvSpPr/>
+          <p:nvPr/>
+        </p:nvSpPr>
+        <p:spPr>
+          <a:xfrm>
+            <a:off x="7635240" y="2788920"/>
+            <a:ext cx="3474720" cy="1536192"/>
           </a:xfrm>
           <a:prstGeom prst="roundRect">
             <a:avLst>
-              <a:gd name="adj" fmla="val 6316"/>
+              <a:gd name="adj" fmla="val 7143"/>
+            </a:avLst>
+          </a:prstGeom>
+          <a:solidFill>
+            <a:srgbClr val="FFFFFF">
+              <a:alpha val="88000"/>
+            </a:srgbClr>
+          </a:solidFill>
+          <a:ln w="12700">
+            <a:solidFill>
+              <a:srgbClr val="D6E8F2"/>
+            </a:solidFill>
+            <a:prstDash val="solid"/>
+          </a:ln>
+        </p:spPr>
+      </p:sp>
+      <p:sp>
+        <p:nvSpPr>
+          <p:cNvPr id="14" name="Shape 12"/>
+          <p:cNvSpPr/>
+          <p:nvPr/>
+        </p:nvSpPr>
+        <p:spPr>
+          <a:xfrm>
+            <a:off x="8074152" y="3291840"/>
+            <a:ext cx="2596896" cy="749808"/>
+          </a:xfrm>
+          <a:prstGeom prst="rect">
+            <a:avLst/>
+          </a:prstGeom>
+          <a:solidFill>
+            <a:srgbClr val="EAF6F8"/>
+          </a:solidFill>
+          <a:ln w="12700">
+            <a:solidFill>
+              <a:srgbClr val="8ABBD8"/>
+            </a:solidFill>
+            <a:prstDash val="solid"/>
+          </a:ln>
+        </p:spPr>
+      </p:sp>
+      <p:sp>
+        <p:nvSpPr>
+          <p:cNvPr id="15" name="Shape 13"/>
+          <p:cNvSpPr/>
+          <p:nvPr/>
+        </p:nvSpPr>
+        <p:spPr>
+          <a:xfrm>
+            <a:off x="8202168" y="3721608"/>
+            <a:ext cx="2340864" cy="0"/>
+          </a:xfrm>
+          <a:prstGeom prst="line">
+            <a:avLst/>
+          </a:prstGeom>
+          <a:noFill/>
+          <a:ln w="19050">
+            <a:solidFill>
+              <a:srgbClr val="0068B7"/>
+            </a:solidFill>
+            <a:prstDash val="solid"/>
+          </a:ln>
+        </p:spPr>
+      </p:sp>
+      <p:sp>
+        <p:nvSpPr>
+          <p:cNvPr id="16" name="Shape 14"/>
+          <p:cNvSpPr/>
+          <p:nvPr/>
+        </p:nvSpPr>
+        <p:spPr>
+          <a:xfrm>
+            <a:off x="9198864" y="4206240"/>
+            <a:ext cx="347472" cy="347472"/>
+          </a:xfrm>
+          <a:prstGeom prst="ellipse">
+            <a:avLst/>
+          </a:prstGeom>
+          <a:solidFill>
+            <a:srgbClr val="2F8A28"/>
+          </a:solidFill>
+          <a:ln w="12700">
+            <a:solidFill>
+              <a:srgbClr val="2F8A28"/>
+            </a:solidFill>
+            <a:prstDash val="solid"/>
+          </a:ln>
+        </p:spPr>
+      </p:sp>
+      <p:sp>
+        <p:nvSpPr>
+          <p:cNvPr id="17" name="Text 15"/>
+          <p:cNvSpPr/>
+          <p:nvPr/>
+        </p:nvSpPr>
+        <p:spPr>
+          <a:xfrm>
+            <a:off x="7909560" y="3977640"/>
+            <a:ext cx="2926080" cy="182880"/>
+          </a:xfrm>
+          <a:prstGeom prst="rect">
+            <a:avLst/>
+          </a:prstGeom>
+          <a:noFill/>
+          <a:ln/>
+        </p:spPr>
+        <p:txBody>
+          <a:bodyPr wrap="square" lIns="0" tIns="0" rIns="0" bIns="0" rtlCol="0" anchor="ctr"/>
+          <a:lstStyle/>
+          <a:p>
+            <a:pPr algn="ctr" indent="0" marL="0">
+              <a:buNone/>
+            </a:pPr>
+            <a:r>
+              <a:rPr lang="en-US" sz="1000" dirty="0">
+                <a:solidFill>
+                  <a:srgbClr val="003A63"/>
+                </a:solidFill>
+                <a:latin typeface="Aptos" pitchFamily="34" charset="0"/>
+                <a:ea typeface="Aptos" pitchFamily="34" charset="-122"/>
+                <a:cs typeface="Aptos" pitchFamily="34" charset="-120"/>
+              </a:rPr>
+              <a:t>Concept to action</a:t>
+            </a:r>
+            <a:endParaRPr lang="en-US" sz="1000" dirty="0"/>
+          </a:p>
+        </p:txBody>
+      </p:sp>
+      <p:sp>
+        <p:nvSpPr>
+          <p:cNvPr id="18" name="Shape 16"/>
+          <p:cNvSpPr/>
+          <p:nvPr/>
+        </p:nvSpPr>
+        <p:spPr>
+          <a:xfrm>
+            <a:off x="7635240" y="4498848"/>
+            <a:ext cx="3474720" cy="1143000"/>
+          </a:xfrm>
+          <a:prstGeom prst="roundRect">
+            <a:avLst>
+              <a:gd name="adj" fmla="val 9600"/>
             </a:avLst>
           </a:prstGeom>
           <a:solidFill>
@@ -5353,14 +5915,14 @@
       </p:sp>
       <p:sp>
         <p:nvSpPr>
-          <p:cNvPr id="16" name="Text 14"/>
-          <p:cNvSpPr/>
-          <p:nvPr/>
-        </p:nvSpPr>
-        <p:spPr>
-          <a:xfrm>
-            <a:off x="8074152" y="3666744"/>
-            <a:ext cx="2825496" cy="256032"/>
+          <p:cNvPr id="19" name="Text 17"/>
+          <p:cNvSpPr/>
+          <p:nvPr/>
+        </p:nvSpPr>
+        <p:spPr>
+          <a:xfrm>
+            <a:off x="7799832" y="4645152"/>
+            <a:ext cx="3145536" cy="256032"/>
           </a:xfrm>
           <a:prstGeom prst="rect">
             <a:avLst/>
@@ -5384,7 +5946,7 @@
                 <a:ea typeface="Aptos" pitchFamily="34" charset="-122"/>
                 <a:cs typeface="Aptos" pitchFamily="34" charset="-120"/>
               </a:rPr>
-              <a:t>Use this for</a:t>
+              <a:t>Apply it</a:t>
             </a:r>
             <a:endParaRPr lang="en-US" sz="1300" dirty="0"/>
           </a:p>
@@ -5392,14 +5954,14 @@
       </p:sp>
       <p:sp>
         <p:nvSpPr>
-          <p:cNvPr id="17" name="Text 15"/>
-          <p:cNvSpPr/>
-          <p:nvPr/>
-        </p:nvSpPr>
-        <p:spPr>
-          <a:xfrm>
-            <a:off x="8074152" y="4023360"/>
-            <a:ext cx="2825496" cy="1097280"/>
+          <p:cNvPr id="20" name="Text 18"/>
+          <p:cNvSpPr/>
+          <p:nvPr/>
+        </p:nvSpPr>
+        <p:spPr>
+          <a:xfrm>
+            <a:off x="7799832" y="5001768"/>
+            <a:ext cx="3145536" cy="502920"/>
           </a:xfrm>
           <a:prstGeom prst="rect">
             <a:avLst/>
@@ -5425,7 +5987,7 @@
                 <a:ea typeface="Aptos" pitchFamily="34" charset="-122"/>
                 <a:cs typeface="Aptos" pitchFamily="34" charset="-120"/>
               </a:rPr>
-              <a:t>Connect the concept to public health decisions, safeguards, documentation, or implementation work.</a:t>
+              <a:t>Connect the concept to public health purpose, responsible use, required safeguards, documentation, and the next action a department should take.</a:t>
             </a:r>
             <a:endParaRPr lang="en-US" sz="1550" dirty="0"/>
           </a:p>
@@ -5599,8 +6161,8 @@
         </p:nvSpPr>
         <p:spPr>
           <a:xfrm>
-            <a:off x="9966960" y="6537960"/>
-            <a:ext cx="1645920" cy="201168"/>
+            <a:off x="9646920" y="6537960"/>
+            <a:ext cx="1965960" cy="201168"/>
           </a:xfrm>
           <a:prstGeom prst="rect">
             <a:avLst/>
@@ -5624,7 +6186,7 @@
                 <a:ea typeface="Aptos" pitchFamily="34" charset="-122"/>
                 <a:cs typeface="Aptos" pitchFamily="34" charset="-120"/>
               </a:rPr>
-              <a:t>Â© Paula Soper</a:t>
+              <a:t>Copyright Paula Soper</a:t>
             </a:r>
             <a:endParaRPr lang="en-US" sz="800" dirty="0"/>
           </a:p>
@@ -5719,7 +6281,7 @@
         <p:spPr>
           <a:xfrm>
             <a:off x="868680" y="1508760"/>
-            <a:ext cx="6537960" cy="4160520"/>
+            <a:ext cx="6309360" cy="4160520"/>
           </a:xfrm>
           <a:prstGeom prst="rect">
             <a:avLst/>
@@ -5770,12 +6332,12 @@
         </p:nvSpPr>
         <p:spPr>
           <a:xfrm>
-            <a:off x="7909560" y="1417320"/>
-            <a:ext cx="3154680" cy="1828800"/>
+            <a:off x="7635240" y="1325880"/>
+            <a:ext cx="3474720" cy="1325880"/>
           </a:xfrm>
           <a:prstGeom prst="roundRect">
             <a:avLst>
-              <a:gd name="adj" fmla="val 6000"/>
+              <a:gd name="adj" fmla="val 8276"/>
             </a:avLst>
           </a:prstGeom>
           <a:solidFill>
@@ -5797,8 +6359,8 @@
         </p:nvSpPr>
         <p:spPr>
           <a:xfrm>
-            <a:off x="8074152" y="1563624"/>
-            <a:ext cx="2825496" cy="256032"/>
+            <a:off x="7799832" y="1472184"/>
+            <a:ext cx="3145536" cy="256032"/>
           </a:xfrm>
           <a:prstGeom prst="rect">
             <a:avLst/>
@@ -5822,7 +6384,7 @@
                 <a:ea typeface="Aptos" pitchFamily="34" charset="-122"/>
                 <a:cs typeface="Aptos" pitchFamily="34" charset="-120"/>
               </a:rPr>
-              <a:t>Key idea</a:t>
+              <a:t>Core concept</a:t>
             </a:r>
             <a:endParaRPr lang="en-US" sz="1300" dirty="0"/>
           </a:p>
@@ -5836,8 +6398,8 @@
         </p:nvSpPr>
         <p:spPr>
           <a:xfrm>
-            <a:off x="8074152" y="1920240"/>
-            <a:ext cx="2825496" cy="1188720"/>
+            <a:off x="7799832" y="1828800"/>
+            <a:ext cx="3145536" cy="685800"/>
           </a:xfrm>
           <a:prstGeom prst="rect">
             <a:avLst/>
@@ -5877,12 +6439,153 @@
         </p:nvSpPr>
         <p:spPr>
           <a:xfrm>
-            <a:off x="7909560" y="3520440"/>
-            <a:ext cx="3154680" cy="1737360"/>
+            <a:off x="7635240" y="2788920"/>
+            <a:ext cx="3474720" cy="1536192"/>
           </a:xfrm>
           <a:prstGeom prst="roundRect">
             <a:avLst>
-              <a:gd name="adj" fmla="val 6316"/>
+              <a:gd name="adj" fmla="val 7143"/>
+            </a:avLst>
+          </a:prstGeom>
+          <a:solidFill>
+            <a:srgbClr val="FFFFFF">
+              <a:alpha val="88000"/>
+            </a:srgbClr>
+          </a:solidFill>
+          <a:ln w="12700">
+            <a:solidFill>
+              <a:srgbClr val="D6E8F2"/>
+            </a:solidFill>
+            <a:prstDash val="solid"/>
+          </a:ln>
+        </p:spPr>
+      </p:sp>
+      <p:sp>
+        <p:nvSpPr>
+          <p:cNvPr id="14" name="Shape 12"/>
+          <p:cNvSpPr/>
+          <p:nvPr/>
+        </p:nvSpPr>
+        <p:spPr>
+          <a:xfrm>
+            <a:off x="8074152" y="3291840"/>
+            <a:ext cx="2596896" cy="749808"/>
+          </a:xfrm>
+          <a:prstGeom prst="rect">
+            <a:avLst/>
+          </a:prstGeom>
+          <a:solidFill>
+            <a:srgbClr val="EAF6F8"/>
+          </a:solidFill>
+          <a:ln w="12700">
+            <a:solidFill>
+              <a:srgbClr val="8ABBD8"/>
+            </a:solidFill>
+            <a:prstDash val="solid"/>
+          </a:ln>
+        </p:spPr>
+      </p:sp>
+      <p:sp>
+        <p:nvSpPr>
+          <p:cNvPr id="15" name="Shape 13"/>
+          <p:cNvSpPr/>
+          <p:nvPr/>
+        </p:nvSpPr>
+        <p:spPr>
+          <a:xfrm>
+            <a:off x="8202168" y="3721608"/>
+            <a:ext cx="2340864" cy="0"/>
+          </a:xfrm>
+          <a:prstGeom prst="line">
+            <a:avLst/>
+          </a:prstGeom>
+          <a:noFill/>
+          <a:ln w="19050">
+            <a:solidFill>
+              <a:srgbClr val="0068B7"/>
+            </a:solidFill>
+            <a:prstDash val="solid"/>
+          </a:ln>
+        </p:spPr>
+      </p:sp>
+      <p:sp>
+        <p:nvSpPr>
+          <p:cNvPr id="16" name="Shape 14"/>
+          <p:cNvSpPr/>
+          <p:nvPr/>
+        </p:nvSpPr>
+        <p:spPr>
+          <a:xfrm>
+            <a:off x="9198864" y="4206240"/>
+            <a:ext cx="347472" cy="347472"/>
+          </a:xfrm>
+          <a:prstGeom prst="ellipse">
+            <a:avLst/>
+          </a:prstGeom>
+          <a:solidFill>
+            <a:srgbClr val="2F8A28"/>
+          </a:solidFill>
+          <a:ln w="12700">
+            <a:solidFill>
+              <a:srgbClr val="2F8A28"/>
+            </a:solidFill>
+            <a:prstDash val="solid"/>
+          </a:ln>
+        </p:spPr>
+      </p:sp>
+      <p:sp>
+        <p:nvSpPr>
+          <p:cNvPr id="17" name="Text 15"/>
+          <p:cNvSpPr/>
+          <p:nvPr/>
+        </p:nvSpPr>
+        <p:spPr>
+          <a:xfrm>
+            <a:off x="7909560" y="3977640"/>
+            <a:ext cx="2926080" cy="182880"/>
+          </a:xfrm>
+          <a:prstGeom prst="rect">
+            <a:avLst/>
+          </a:prstGeom>
+          <a:noFill/>
+          <a:ln/>
+        </p:spPr>
+        <p:txBody>
+          <a:bodyPr wrap="square" lIns="0" tIns="0" rIns="0" bIns="0" rtlCol="0" anchor="ctr"/>
+          <a:lstStyle/>
+          <a:p>
+            <a:pPr algn="ctr" indent="0" marL="0">
+              <a:buNone/>
+            </a:pPr>
+            <a:r>
+              <a:rPr lang="en-US" sz="1000" dirty="0">
+                <a:solidFill>
+                  <a:srgbClr val="003A63"/>
+                </a:solidFill>
+                <a:latin typeface="Aptos" pitchFamily="34" charset="0"/>
+                <a:ea typeface="Aptos" pitchFamily="34" charset="-122"/>
+                <a:cs typeface="Aptos" pitchFamily="34" charset="-120"/>
+              </a:rPr>
+              <a:t>Concept to action</a:t>
+            </a:r>
+            <a:endParaRPr lang="en-US" sz="1000" dirty="0"/>
+          </a:p>
+        </p:txBody>
+      </p:sp>
+      <p:sp>
+        <p:nvSpPr>
+          <p:cNvPr id="18" name="Shape 16"/>
+          <p:cNvSpPr/>
+          <p:nvPr/>
+        </p:nvSpPr>
+        <p:spPr>
+          <a:xfrm>
+            <a:off x="7635240" y="4498848"/>
+            <a:ext cx="3474720" cy="1143000"/>
+          </a:xfrm>
+          <a:prstGeom prst="roundRect">
+            <a:avLst>
+              <a:gd name="adj" fmla="val 9600"/>
             </a:avLst>
           </a:prstGeom>
           <a:solidFill>
@@ -5898,14 +6601,14 @@
       </p:sp>
       <p:sp>
         <p:nvSpPr>
-          <p:cNvPr id="14" name="Text 12"/>
-          <p:cNvSpPr/>
-          <p:nvPr/>
-        </p:nvSpPr>
-        <p:spPr>
-          <a:xfrm>
-            <a:off x="8074152" y="3666744"/>
-            <a:ext cx="2825496" cy="256032"/>
+          <p:cNvPr id="19" name="Text 17"/>
+          <p:cNvSpPr/>
+          <p:nvPr/>
+        </p:nvSpPr>
+        <p:spPr>
+          <a:xfrm>
+            <a:off x="7799832" y="4645152"/>
+            <a:ext cx="3145536" cy="256032"/>
           </a:xfrm>
           <a:prstGeom prst="rect">
             <a:avLst/>
@@ -5929,7 +6632,7 @@
                 <a:ea typeface="Aptos" pitchFamily="34" charset="-122"/>
                 <a:cs typeface="Aptos" pitchFamily="34" charset="-120"/>
               </a:rPr>
-              <a:t>Use this for</a:t>
+              <a:t>Apply it</a:t>
             </a:r>
             <a:endParaRPr lang="en-US" sz="1300" dirty="0"/>
           </a:p>
@@ -5937,14 +6640,14 @@
       </p:sp>
       <p:sp>
         <p:nvSpPr>
-          <p:cNvPr id="15" name="Text 13"/>
-          <p:cNvSpPr/>
-          <p:nvPr/>
-        </p:nvSpPr>
-        <p:spPr>
-          <a:xfrm>
-            <a:off x="8074152" y="4023360"/>
-            <a:ext cx="2825496" cy="1097280"/>
+          <p:cNvPr id="20" name="Text 18"/>
+          <p:cNvSpPr/>
+          <p:nvPr/>
+        </p:nvSpPr>
+        <p:spPr>
+          <a:xfrm>
+            <a:off x="7799832" y="5001768"/>
+            <a:ext cx="3145536" cy="502920"/>
           </a:xfrm>
           <a:prstGeom prst="rect">
             <a:avLst/>
@@ -5970,7 +6673,7 @@
                 <a:ea typeface="Aptos" pitchFamily="34" charset="-122"/>
                 <a:cs typeface="Aptos" pitchFamily="34" charset="-120"/>
               </a:rPr>
-              <a:t>Connect the concept to public health decisions, safeguards, documentation, or implementation work.</a:t>
+              <a:t>Connect the concept to public health purpose, responsible use, required safeguards, documentation, and the next action a department should take.</a:t>
             </a:r>
             <a:endParaRPr lang="en-US" sz="1550" dirty="0"/>
           </a:p>
@@ -6144,8 +6847,8 @@
         </p:nvSpPr>
         <p:spPr>
           <a:xfrm>
-            <a:off x="9966960" y="6537960"/>
-            <a:ext cx="1645920" cy="201168"/>
+            <a:off x="9646920" y="6537960"/>
+            <a:ext cx="1965960" cy="201168"/>
           </a:xfrm>
           <a:prstGeom prst="rect">
             <a:avLst/>
@@ -6169,7 +6872,7 @@
                 <a:ea typeface="Aptos" pitchFamily="34" charset="-122"/>
                 <a:cs typeface="Aptos" pitchFamily="34" charset="-120"/>
               </a:rPr>
-              <a:t>Â© Paula Soper</a:t>
+              <a:t>Copyright Paula Soper</a:t>
             </a:r>
             <a:endParaRPr lang="en-US" sz="800" dirty="0"/>
           </a:p>
@@ -6216,77 +6919,13 @@
       </p:sp>
       <p:sp>
         <p:nvSpPr>
-          <p:cNvPr id="8" name="Shape 6"/>
+          <p:cNvPr id="8" name="Text 6"/>
           <p:cNvSpPr/>
           <p:nvPr/>
         </p:nvSpPr>
         <p:spPr>
           <a:xfrm>
             <a:off x="640080" y="658368"/>
-            <a:ext cx="420624" cy="420624"/>
-          </a:xfrm>
-          <a:prstGeom prst="ellipse">
-            <a:avLst/>
-          </a:prstGeom>
-          <a:solidFill>
-            <a:srgbClr val="0068B7"/>
-          </a:solidFill>
-          <a:ln w="12700">
-            <a:solidFill>
-              <a:srgbClr val="0068B7"/>
-            </a:solidFill>
-            <a:prstDash val="solid"/>
-          </a:ln>
-        </p:spPr>
-      </p:sp>
-      <p:sp>
-        <p:nvSpPr>
-          <p:cNvPr id="9" name="Text 7"/>
-          <p:cNvSpPr/>
-          <p:nvPr/>
-        </p:nvSpPr>
-        <p:spPr>
-          <a:xfrm>
-            <a:off x="640080" y="731520"/>
-            <a:ext cx="420624" cy="164592"/>
-          </a:xfrm>
-          <a:prstGeom prst="rect">
-            <a:avLst/>
-          </a:prstGeom>
-          <a:noFill/>
-          <a:ln/>
-        </p:spPr>
-        <p:txBody>
-          <a:bodyPr wrap="square" lIns="0" tIns="0" rIns="0" bIns="0" rtlCol="0" anchor="ctr"/>
-          <a:lstStyle/>
-          <a:p>
-            <a:pPr algn="ctr" indent="0" marL="0">
-              <a:buNone/>
-            </a:pPr>
-            <a:r>
-              <a:rPr lang="en-US" sz="1100" b="1" dirty="0">
-                <a:solidFill>
-                  <a:srgbClr val="FFFFFF"/>
-                </a:solidFill>
-                <a:latin typeface="Aptos" pitchFamily="34" charset="0"/>
-                <a:ea typeface="Aptos" pitchFamily="34" charset="-122"/>
-                <a:cs typeface="Aptos" pitchFamily="34" charset="-120"/>
-              </a:rPr>
-              <a:t>10</a:t>
-            </a:r>
-            <a:endParaRPr lang="en-US" sz="1100" dirty="0"/>
-          </a:p>
-        </p:txBody>
-      </p:sp>
-      <p:sp>
-        <p:nvSpPr>
-          <p:cNvPr id="10" name="Text 8"/>
-          <p:cNvSpPr/>
-          <p:nvPr/>
-        </p:nvSpPr>
-        <p:spPr>
-          <a:xfrm>
-            <a:off x="640080" y="621792"/>
             <a:ext cx="10881360" cy="713232"/>
           </a:xfrm>
           <a:prstGeom prst="rect">
@@ -6321,14 +6960,14 @@
       </p:sp>
       <p:sp>
         <p:nvSpPr>
-          <p:cNvPr id="11" name="Text 9"/>
+          <p:cNvPr id="9" name="Text 7"/>
           <p:cNvSpPr/>
           <p:nvPr/>
         </p:nvSpPr>
         <p:spPr>
           <a:xfrm>
             <a:off x="868680" y="1508760"/>
-            <a:ext cx="6537960" cy="4160520"/>
+            <a:ext cx="6309360" cy="4160520"/>
           </a:xfrm>
           <a:prstGeom prst="rect">
             <a:avLst/>
@@ -6373,18 +7012,18 @@
       </p:sp>
       <p:sp>
         <p:nvSpPr>
-          <p:cNvPr id="12" name="Shape 10"/>
-          <p:cNvSpPr/>
-          <p:nvPr/>
-        </p:nvSpPr>
-        <p:spPr>
-          <a:xfrm>
-            <a:off x="7909560" y="1417320"/>
-            <a:ext cx="3154680" cy="1828800"/>
+          <p:cNvPr id="10" name="Shape 8"/>
+          <p:cNvSpPr/>
+          <p:nvPr/>
+        </p:nvSpPr>
+        <p:spPr>
+          <a:xfrm>
+            <a:off x="7635240" y="1325880"/>
+            <a:ext cx="3474720" cy="1325880"/>
           </a:xfrm>
           <a:prstGeom prst="roundRect">
             <a:avLst>
-              <a:gd name="adj" fmla="val 6000"/>
+              <a:gd name="adj" fmla="val 8276"/>
             </a:avLst>
           </a:prstGeom>
           <a:solidFill>
@@ -6400,14 +7039,14 @@
       </p:sp>
       <p:sp>
         <p:nvSpPr>
-          <p:cNvPr id="13" name="Text 11"/>
-          <p:cNvSpPr/>
-          <p:nvPr/>
-        </p:nvSpPr>
-        <p:spPr>
-          <a:xfrm>
-            <a:off x="8074152" y="1563624"/>
-            <a:ext cx="2825496" cy="256032"/>
+          <p:cNvPr id="11" name="Text 9"/>
+          <p:cNvSpPr/>
+          <p:nvPr/>
+        </p:nvSpPr>
+        <p:spPr>
+          <a:xfrm>
+            <a:off x="7799832" y="1472184"/>
+            <a:ext cx="3145536" cy="256032"/>
           </a:xfrm>
           <a:prstGeom prst="rect">
             <a:avLst/>
@@ -6431,7 +7070,7 @@
                 <a:ea typeface="Aptos" pitchFamily="34" charset="-122"/>
                 <a:cs typeface="Aptos" pitchFamily="34" charset="-120"/>
               </a:rPr>
-              <a:t>Key idea</a:t>
+              <a:t>Practice focus</a:t>
             </a:r>
             <a:endParaRPr lang="en-US" sz="1300" dirty="0"/>
           </a:p>
@@ -6439,14 +7078,14 @@
       </p:sp>
       <p:sp>
         <p:nvSpPr>
-          <p:cNvPr id="14" name="Text 12"/>
-          <p:cNvSpPr/>
-          <p:nvPr/>
-        </p:nvSpPr>
-        <p:spPr>
-          <a:xfrm>
-            <a:off x="8074152" y="1920240"/>
-            <a:ext cx="2825496" cy="1188720"/>
+          <p:cNvPr id="12" name="Text 10"/>
+          <p:cNvSpPr/>
+          <p:nvPr/>
+        </p:nvSpPr>
+        <p:spPr>
+          <a:xfrm>
+            <a:off x="7799832" y="1828800"/>
+            <a:ext cx="3145536" cy="685800"/>
           </a:xfrm>
           <a:prstGeom prst="rect">
             <a:avLst/>
@@ -6480,18 +7119,159 @@
       </p:sp>
       <p:sp>
         <p:nvSpPr>
-          <p:cNvPr id="15" name="Shape 13"/>
-          <p:cNvSpPr/>
-          <p:nvPr/>
-        </p:nvSpPr>
-        <p:spPr>
-          <a:xfrm>
-            <a:off x="7909560" y="3520440"/>
-            <a:ext cx="3154680" cy="1737360"/>
+          <p:cNvPr id="13" name="Shape 11"/>
+          <p:cNvSpPr/>
+          <p:nvPr/>
+        </p:nvSpPr>
+        <p:spPr>
+          <a:xfrm>
+            <a:off x="7635240" y="2788920"/>
+            <a:ext cx="3474720" cy="1536192"/>
           </a:xfrm>
           <a:prstGeom prst="roundRect">
             <a:avLst>
-              <a:gd name="adj" fmla="val 6316"/>
+              <a:gd name="adj" fmla="val 7143"/>
+            </a:avLst>
+          </a:prstGeom>
+          <a:solidFill>
+            <a:srgbClr val="FFFFFF">
+              <a:alpha val="88000"/>
+            </a:srgbClr>
+          </a:solidFill>
+          <a:ln w="12700">
+            <a:solidFill>
+              <a:srgbClr val="D6E8F2"/>
+            </a:solidFill>
+            <a:prstDash val="solid"/>
+          </a:ln>
+        </p:spPr>
+      </p:sp>
+      <p:sp>
+        <p:nvSpPr>
+          <p:cNvPr id="14" name="Shape 12"/>
+          <p:cNvSpPr/>
+          <p:nvPr/>
+        </p:nvSpPr>
+        <p:spPr>
+          <a:xfrm>
+            <a:off x="8074152" y="3291840"/>
+            <a:ext cx="2596896" cy="749808"/>
+          </a:xfrm>
+          <a:prstGeom prst="rect">
+            <a:avLst/>
+          </a:prstGeom>
+          <a:solidFill>
+            <a:srgbClr val="EAF6F8"/>
+          </a:solidFill>
+          <a:ln w="12700">
+            <a:solidFill>
+              <a:srgbClr val="8ABBD8"/>
+            </a:solidFill>
+            <a:prstDash val="solid"/>
+          </a:ln>
+        </p:spPr>
+      </p:sp>
+      <p:sp>
+        <p:nvSpPr>
+          <p:cNvPr id="15" name="Shape 13"/>
+          <p:cNvSpPr/>
+          <p:nvPr/>
+        </p:nvSpPr>
+        <p:spPr>
+          <a:xfrm>
+            <a:off x="8202168" y="3721608"/>
+            <a:ext cx="2340864" cy="0"/>
+          </a:xfrm>
+          <a:prstGeom prst="line">
+            <a:avLst/>
+          </a:prstGeom>
+          <a:noFill/>
+          <a:ln w="19050">
+            <a:solidFill>
+              <a:srgbClr val="0068B7"/>
+            </a:solidFill>
+            <a:prstDash val="solid"/>
+          </a:ln>
+        </p:spPr>
+      </p:sp>
+      <p:sp>
+        <p:nvSpPr>
+          <p:cNvPr id="16" name="Shape 14"/>
+          <p:cNvSpPr/>
+          <p:nvPr/>
+        </p:nvSpPr>
+        <p:spPr>
+          <a:xfrm>
+            <a:off x="9198864" y="4206240"/>
+            <a:ext cx="347472" cy="347472"/>
+          </a:xfrm>
+          <a:prstGeom prst="ellipse">
+            <a:avLst/>
+          </a:prstGeom>
+          <a:solidFill>
+            <a:srgbClr val="2F8A28"/>
+          </a:solidFill>
+          <a:ln w="12700">
+            <a:solidFill>
+              <a:srgbClr val="2F8A28"/>
+            </a:solidFill>
+            <a:prstDash val="solid"/>
+          </a:ln>
+        </p:spPr>
+      </p:sp>
+      <p:sp>
+        <p:nvSpPr>
+          <p:cNvPr id="17" name="Text 15"/>
+          <p:cNvSpPr/>
+          <p:nvPr/>
+        </p:nvSpPr>
+        <p:spPr>
+          <a:xfrm>
+            <a:off x="7909560" y="3977640"/>
+            <a:ext cx="2926080" cy="182880"/>
+          </a:xfrm>
+          <a:prstGeom prst="rect">
+            <a:avLst/>
+          </a:prstGeom>
+          <a:noFill/>
+          <a:ln/>
+        </p:spPr>
+        <p:txBody>
+          <a:bodyPr wrap="square" lIns="0" tIns="0" rIns="0" bIns="0" rtlCol="0" anchor="ctr"/>
+          <a:lstStyle/>
+          <a:p>
+            <a:pPr algn="ctr" indent="0" marL="0">
+              <a:buNone/>
+            </a:pPr>
+            <a:r>
+              <a:rPr lang="en-US" sz="1000" dirty="0">
+                <a:solidFill>
+                  <a:srgbClr val="003A63"/>
+                </a:solidFill>
+                <a:latin typeface="Aptos" pitchFamily="34" charset="0"/>
+                <a:ea typeface="Aptos" pitchFamily="34" charset="-122"/>
+                <a:cs typeface="Aptos" pitchFamily="34" charset="-120"/>
+              </a:rPr>
+              <a:t>Concept to action</a:t>
+            </a:r>
+            <a:endParaRPr lang="en-US" sz="1000" dirty="0"/>
+          </a:p>
+        </p:txBody>
+      </p:sp>
+      <p:sp>
+        <p:nvSpPr>
+          <p:cNvPr id="18" name="Shape 16"/>
+          <p:cNvSpPr/>
+          <p:nvPr/>
+        </p:nvSpPr>
+        <p:spPr>
+          <a:xfrm>
+            <a:off x="7635240" y="4498848"/>
+            <a:ext cx="3474720" cy="1143000"/>
+          </a:xfrm>
+          <a:prstGeom prst="roundRect">
+            <a:avLst>
+              <a:gd name="adj" fmla="val 9600"/>
             </a:avLst>
           </a:prstGeom>
           <a:solidFill>
@@ -6507,14 +7287,14 @@
       </p:sp>
       <p:sp>
         <p:nvSpPr>
-          <p:cNvPr id="16" name="Text 14"/>
-          <p:cNvSpPr/>
-          <p:nvPr/>
-        </p:nvSpPr>
-        <p:spPr>
-          <a:xfrm>
-            <a:off x="8074152" y="3666744"/>
-            <a:ext cx="2825496" cy="256032"/>
+          <p:cNvPr id="19" name="Text 17"/>
+          <p:cNvSpPr/>
+          <p:nvPr/>
+        </p:nvSpPr>
+        <p:spPr>
+          <a:xfrm>
+            <a:off x="7799832" y="4645152"/>
+            <a:ext cx="3145536" cy="256032"/>
           </a:xfrm>
           <a:prstGeom prst="rect">
             <a:avLst/>
@@ -6538,7 +7318,7 @@
                 <a:ea typeface="Aptos" pitchFamily="34" charset="-122"/>
                 <a:cs typeface="Aptos" pitchFamily="34" charset="-120"/>
               </a:rPr>
-              <a:t>Use this for</a:t>
+              <a:t>What to produce</a:t>
             </a:r>
             <a:endParaRPr lang="en-US" sz="1300" dirty="0"/>
           </a:p>
@@ -6546,14 +7326,14 @@
       </p:sp>
       <p:sp>
         <p:nvSpPr>
-          <p:cNvPr id="17" name="Text 15"/>
-          <p:cNvSpPr/>
-          <p:nvPr/>
-        </p:nvSpPr>
-        <p:spPr>
-          <a:xfrm>
-            <a:off x="8074152" y="4023360"/>
-            <a:ext cx="2825496" cy="1097280"/>
+          <p:cNvPr id="20" name="Text 18"/>
+          <p:cNvSpPr/>
+          <p:nvPr/>
+        </p:nvSpPr>
+        <p:spPr>
+          <a:xfrm>
+            <a:off x="7799832" y="5001768"/>
+            <a:ext cx="3145536" cy="502920"/>
           </a:xfrm>
           <a:prstGeom prst="rect">
             <a:avLst/>
@@ -6579,7 +7359,7 @@
                 <a:ea typeface="Aptos" pitchFamily="34" charset="-122"/>
                 <a:cs typeface="Aptos" pitchFamily="34" charset="-120"/>
               </a:rPr>
-              <a:t>Connect the concept to public health decisions, safeguards, documentation, or implementation work.</a:t>
+              <a:t>Use the assignment to test whether you can explain the concept, apply it to a realistic public health situation, and identify what would need review before the work moves forward.</a:t>
             </a:r>
             <a:endParaRPr lang="en-US" sz="1550" dirty="0"/>
           </a:p>
@@ -6753,8 +7533,8 @@
         </p:nvSpPr>
         <p:spPr>
           <a:xfrm>
-            <a:off x="9966960" y="6537960"/>
-            <a:ext cx="1645920" cy="201168"/>
+            <a:off x="9646920" y="6537960"/>
+            <a:ext cx="1965960" cy="201168"/>
           </a:xfrm>
           <a:prstGeom prst="rect">
             <a:avLst/>
@@ -6778,7 +7558,7 @@
                 <a:ea typeface="Aptos" pitchFamily="34" charset="-122"/>
                 <a:cs typeface="Aptos" pitchFamily="34" charset="-120"/>
               </a:rPr>
-              <a:t>Â© Paula Soper</a:t>
+              <a:t>Copyright Paula Soper</a:t>
             </a:r>
             <a:endParaRPr lang="en-US" sz="800" dirty="0"/>
           </a:p>
@@ -6825,77 +7605,13 @@
       </p:sp>
       <p:sp>
         <p:nvSpPr>
-          <p:cNvPr id="8" name="Shape 6"/>
+          <p:cNvPr id="8" name="Text 6"/>
           <p:cNvSpPr/>
           <p:nvPr/>
         </p:nvSpPr>
         <p:spPr>
           <a:xfrm>
             <a:off x="640080" y="658368"/>
-            <a:ext cx="420624" cy="420624"/>
-          </a:xfrm>
-          <a:prstGeom prst="ellipse">
-            <a:avLst/>
-          </a:prstGeom>
-          <a:solidFill>
-            <a:srgbClr val="0068B7"/>
-          </a:solidFill>
-          <a:ln w="12700">
-            <a:solidFill>
-              <a:srgbClr val="0068B7"/>
-            </a:solidFill>
-            <a:prstDash val="solid"/>
-          </a:ln>
-        </p:spPr>
-      </p:sp>
-      <p:sp>
-        <p:nvSpPr>
-          <p:cNvPr id="9" name="Text 7"/>
-          <p:cNvSpPr/>
-          <p:nvPr/>
-        </p:nvSpPr>
-        <p:spPr>
-          <a:xfrm>
-            <a:off x="640080" y="731520"/>
-            <a:ext cx="420624" cy="164592"/>
-          </a:xfrm>
-          <a:prstGeom prst="rect">
-            <a:avLst/>
-          </a:prstGeom>
-          <a:noFill/>
-          <a:ln/>
-        </p:spPr>
-        <p:txBody>
-          <a:bodyPr wrap="square" lIns="0" tIns="0" rIns="0" bIns="0" rtlCol="0" anchor="ctr"/>
-          <a:lstStyle/>
-          <a:p>
-            <a:pPr algn="ctr" indent="0" marL="0">
-              <a:buNone/>
-            </a:pPr>
-            <a:r>
-              <a:rPr lang="en-US" sz="1100" b="1" dirty="0">
-                <a:solidFill>
-                  <a:srgbClr val="FFFFFF"/>
-                </a:solidFill>
-                <a:latin typeface="Aptos" pitchFamily="34" charset="0"/>
-                <a:ea typeface="Aptos" pitchFamily="34" charset="-122"/>
-                <a:cs typeface="Aptos" pitchFamily="34" charset="-120"/>
-              </a:rPr>
-              <a:t>11</a:t>
-            </a:r>
-            <a:endParaRPr lang="en-US" sz="1100" dirty="0"/>
-          </a:p>
-        </p:txBody>
-      </p:sp>
-      <p:sp>
-        <p:nvSpPr>
-          <p:cNvPr id="10" name="Text 8"/>
-          <p:cNvSpPr/>
-          <p:nvPr/>
-        </p:nvSpPr>
-        <p:spPr>
-          <a:xfrm>
-            <a:off x="640080" y="621792"/>
             <a:ext cx="10881360" cy="713232"/>
           </a:xfrm>
           <a:prstGeom prst="rect">
@@ -6930,14 +7646,14 @@
       </p:sp>
       <p:sp>
         <p:nvSpPr>
-          <p:cNvPr id="11" name="Text 9"/>
+          <p:cNvPr id="9" name="Text 7"/>
           <p:cNvSpPr/>
           <p:nvPr/>
         </p:nvSpPr>
         <p:spPr>
           <a:xfrm>
             <a:off x="868680" y="1508760"/>
-            <a:ext cx="6537960" cy="4160520"/>
+            <a:ext cx="6309360" cy="4160520"/>
           </a:xfrm>
           <a:prstGeom prst="rect">
             <a:avLst/>
@@ -6996,18 +7712,18 @@
       </p:sp>
       <p:sp>
         <p:nvSpPr>
-          <p:cNvPr id="12" name="Shape 10"/>
-          <p:cNvSpPr/>
-          <p:nvPr/>
-        </p:nvSpPr>
-        <p:spPr>
-          <a:xfrm>
-            <a:off x="7909560" y="1417320"/>
-            <a:ext cx="3154680" cy="1828800"/>
+          <p:cNvPr id="10" name="Shape 8"/>
+          <p:cNvSpPr/>
+          <p:nvPr/>
+        </p:nvSpPr>
+        <p:spPr>
+          <a:xfrm>
+            <a:off x="7635240" y="1325880"/>
+            <a:ext cx="3474720" cy="1325880"/>
           </a:xfrm>
           <a:prstGeom prst="roundRect">
             <a:avLst>
-              <a:gd name="adj" fmla="val 6000"/>
+              <a:gd name="adj" fmla="val 8276"/>
             </a:avLst>
           </a:prstGeom>
           <a:solidFill>
@@ -7023,14 +7739,14 @@
       </p:sp>
       <p:sp>
         <p:nvSpPr>
-          <p:cNvPr id="13" name="Text 11"/>
-          <p:cNvSpPr/>
-          <p:nvPr/>
-        </p:nvSpPr>
-        <p:spPr>
-          <a:xfrm>
-            <a:off x="8074152" y="1563624"/>
-            <a:ext cx="2825496" cy="256032"/>
+          <p:cNvPr id="11" name="Text 9"/>
+          <p:cNvSpPr/>
+          <p:nvPr/>
+        </p:nvSpPr>
+        <p:spPr>
+          <a:xfrm>
+            <a:off x="7799832" y="1472184"/>
+            <a:ext cx="3145536" cy="256032"/>
           </a:xfrm>
           <a:prstGeom prst="rect">
             <a:avLst/>
@@ -7054,7 +7770,7 @@
                 <a:ea typeface="Aptos" pitchFamily="34" charset="-122"/>
                 <a:cs typeface="Aptos" pitchFamily="34" charset="-120"/>
               </a:rPr>
-              <a:t>Key idea</a:t>
+              <a:t>Core concept</a:t>
             </a:r>
             <a:endParaRPr lang="en-US" sz="1300" dirty="0"/>
           </a:p>
@@ -7062,14 +7778,14 @@
       </p:sp>
       <p:sp>
         <p:nvSpPr>
-          <p:cNvPr id="14" name="Text 12"/>
-          <p:cNvSpPr/>
-          <p:nvPr/>
-        </p:nvSpPr>
-        <p:spPr>
-          <a:xfrm>
-            <a:off x="8074152" y="1920240"/>
-            <a:ext cx="2825496" cy="1188720"/>
+          <p:cNvPr id="12" name="Text 10"/>
+          <p:cNvSpPr/>
+          <p:nvPr/>
+        </p:nvSpPr>
+        <p:spPr>
+          <a:xfrm>
+            <a:off x="7799832" y="1828800"/>
+            <a:ext cx="3145536" cy="685800"/>
           </a:xfrm>
           <a:prstGeom prst="rect">
             <a:avLst/>
@@ -7103,18 +7819,159 @@
       </p:sp>
       <p:sp>
         <p:nvSpPr>
-          <p:cNvPr id="15" name="Shape 13"/>
-          <p:cNvSpPr/>
-          <p:nvPr/>
-        </p:nvSpPr>
-        <p:spPr>
-          <a:xfrm>
-            <a:off x="7909560" y="3520440"/>
-            <a:ext cx="3154680" cy="1737360"/>
+          <p:cNvPr id="13" name="Shape 11"/>
+          <p:cNvSpPr/>
+          <p:nvPr/>
+        </p:nvSpPr>
+        <p:spPr>
+          <a:xfrm>
+            <a:off x="7635240" y="2788920"/>
+            <a:ext cx="3474720" cy="1536192"/>
           </a:xfrm>
           <a:prstGeom prst="roundRect">
             <a:avLst>
-              <a:gd name="adj" fmla="val 6316"/>
+              <a:gd name="adj" fmla="val 7143"/>
+            </a:avLst>
+          </a:prstGeom>
+          <a:solidFill>
+            <a:srgbClr val="FFFFFF">
+              <a:alpha val="88000"/>
+            </a:srgbClr>
+          </a:solidFill>
+          <a:ln w="12700">
+            <a:solidFill>
+              <a:srgbClr val="D6E8F2"/>
+            </a:solidFill>
+            <a:prstDash val="solid"/>
+          </a:ln>
+        </p:spPr>
+      </p:sp>
+      <p:sp>
+        <p:nvSpPr>
+          <p:cNvPr id="14" name="Shape 12"/>
+          <p:cNvSpPr/>
+          <p:nvPr/>
+        </p:nvSpPr>
+        <p:spPr>
+          <a:xfrm>
+            <a:off x="8074152" y="3291840"/>
+            <a:ext cx="2596896" cy="749808"/>
+          </a:xfrm>
+          <a:prstGeom prst="rect">
+            <a:avLst/>
+          </a:prstGeom>
+          <a:solidFill>
+            <a:srgbClr val="EAF6F8"/>
+          </a:solidFill>
+          <a:ln w="12700">
+            <a:solidFill>
+              <a:srgbClr val="8ABBD8"/>
+            </a:solidFill>
+            <a:prstDash val="solid"/>
+          </a:ln>
+        </p:spPr>
+      </p:sp>
+      <p:sp>
+        <p:nvSpPr>
+          <p:cNvPr id="15" name="Shape 13"/>
+          <p:cNvSpPr/>
+          <p:nvPr/>
+        </p:nvSpPr>
+        <p:spPr>
+          <a:xfrm>
+            <a:off x="8202168" y="3721608"/>
+            <a:ext cx="2340864" cy="0"/>
+          </a:xfrm>
+          <a:prstGeom prst="line">
+            <a:avLst/>
+          </a:prstGeom>
+          <a:noFill/>
+          <a:ln w="19050">
+            <a:solidFill>
+              <a:srgbClr val="0068B7"/>
+            </a:solidFill>
+            <a:prstDash val="solid"/>
+          </a:ln>
+        </p:spPr>
+      </p:sp>
+      <p:sp>
+        <p:nvSpPr>
+          <p:cNvPr id="16" name="Shape 14"/>
+          <p:cNvSpPr/>
+          <p:nvPr/>
+        </p:nvSpPr>
+        <p:spPr>
+          <a:xfrm>
+            <a:off x="9198864" y="4206240"/>
+            <a:ext cx="347472" cy="347472"/>
+          </a:xfrm>
+          <a:prstGeom prst="ellipse">
+            <a:avLst/>
+          </a:prstGeom>
+          <a:solidFill>
+            <a:srgbClr val="2F8A28"/>
+          </a:solidFill>
+          <a:ln w="12700">
+            <a:solidFill>
+              <a:srgbClr val="2F8A28"/>
+            </a:solidFill>
+            <a:prstDash val="solid"/>
+          </a:ln>
+        </p:spPr>
+      </p:sp>
+      <p:sp>
+        <p:nvSpPr>
+          <p:cNvPr id="17" name="Text 15"/>
+          <p:cNvSpPr/>
+          <p:nvPr/>
+        </p:nvSpPr>
+        <p:spPr>
+          <a:xfrm>
+            <a:off x="7909560" y="3977640"/>
+            <a:ext cx="2926080" cy="182880"/>
+          </a:xfrm>
+          <a:prstGeom prst="rect">
+            <a:avLst/>
+          </a:prstGeom>
+          <a:noFill/>
+          <a:ln/>
+        </p:spPr>
+        <p:txBody>
+          <a:bodyPr wrap="square" lIns="0" tIns="0" rIns="0" bIns="0" rtlCol="0" anchor="ctr"/>
+          <a:lstStyle/>
+          <a:p>
+            <a:pPr algn="ctr" indent="0" marL="0">
+              <a:buNone/>
+            </a:pPr>
+            <a:r>
+              <a:rPr lang="en-US" sz="1000" dirty="0">
+                <a:solidFill>
+                  <a:srgbClr val="003A63"/>
+                </a:solidFill>
+                <a:latin typeface="Aptos" pitchFamily="34" charset="0"/>
+                <a:ea typeface="Aptos" pitchFamily="34" charset="-122"/>
+                <a:cs typeface="Aptos" pitchFamily="34" charset="-120"/>
+              </a:rPr>
+              <a:t>Concept to action</a:t>
+            </a:r>
+            <a:endParaRPr lang="en-US" sz="1000" dirty="0"/>
+          </a:p>
+        </p:txBody>
+      </p:sp>
+      <p:sp>
+        <p:nvSpPr>
+          <p:cNvPr id="18" name="Shape 16"/>
+          <p:cNvSpPr/>
+          <p:nvPr/>
+        </p:nvSpPr>
+        <p:spPr>
+          <a:xfrm>
+            <a:off x="7635240" y="4498848"/>
+            <a:ext cx="3474720" cy="1143000"/>
+          </a:xfrm>
+          <a:prstGeom prst="roundRect">
+            <a:avLst>
+              <a:gd name="adj" fmla="val 9600"/>
             </a:avLst>
           </a:prstGeom>
           <a:solidFill>
@@ -7130,14 +7987,14 @@
       </p:sp>
       <p:sp>
         <p:nvSpPr>
-          <p:cNvPr id="16" name="Text 14"/>
-          <p:cNvSpPr/>
-          <p:nvPr/>
-        </p:nvSpPr>
-        <p:spPr>
-          <a:xfrm>
-            <a:off x="8074152" y="3666744"/>
-            <a:ext cx="2825496" cy="256032"/>
+          <p:cNvPr id="19" name="Text 17"/>
+          <p:cNvSpPr/>
+          <p:nvPr/>
+        </p:nvSpPr>
+        <p:spPr>
+          <a:xfrm>
+            <a:off x="7799832" y="4645152"/>
+            <a:ext cx="3145536" cy="256032"/>
           </a:xfrm>
           <a:prstGeom prst="rect">
             <a:avLst/>
@@ -7161,7 +8018,7 @@
                 <a:ea typeface="Aptos" pitchFamily="34" charset="-122"/>
                 <a:cs typeface="Aptos" pitchFamily="34" charset="-120"/>
               </a:rPr>
-              <a:t>Use this for</a:t>
+              <a:t>Apply it</a:t>
             </a:r>
             <a:endParaRPr lang="en-US" sz="1300" dirty="0"/>
           </a:p>
@@ -7169,14 +8026,14 @@
       </p:sp>
       <p:sp>
         <p:nvSpPr>
-          <p:cNvPr id="17" name="Text 15"/>
-          <p:cNvSpPr/>
-          <p:nvPr/>
-        </p:nvSpPr>
-        <p:spPr>
-          <a:xfrm>
-            <a:off x="8074152" y="4023360"/>
-            <a:ext cx="2825496" cy="1097280"/>
+          <p:cNvPr id="20" name="Text 18"/>
+          <p:cNvSpPr/>
+          <p:nvPr/>
+        </p:nvSpPr>
+        <p:spPr>
+          <a:xfrm>
+            <a:off x="7799832" y="5001768"/>
+            <a:ext cx="3145536" cy="502920"/>
           </a:xfrm>
           <a:prstGeom prst="rect">
             <a:avLst/>
@@ -7202,7 +8059,7 @@
                 <a:ea typeface="Aptos" pitchFamily="34" charset="-122"/>
                 <a:cs typeface="Aptos" pitchFamily="34" charset="-120"/>
               </a:rPr>
-              <a:t>Connect the concept to public health decisions, safeguards, documentation, or implementation work.</a:t>
+              <a:t>Connect the concept to public health purpose, responsible use, required safeguards, documentation, and the next action a department should take.</a:t>
             </a:r>
             <a:endParaRPr lang="en-US" sz="1550" dirty="0"/>
           </a:p>
@@ -7376,8 +8233,8 @@
         </p:nvSpPr>
         <p:spPr>
           <a:xfrm>
-            <a:off x="9966960" y="6537960"/>
-            <a:ext cx="1645920" cy="201168"/>
+            <a:off x="9646920" y="6537960"/>
+            <a:ext cx="1965960" cy="201168"/>
           </a:xfrm>
           <a:prstGeom prst="rect">
             <a:avLst/>
@@ -7401,7 +8258,7 @@
                 <a:ea typeface="Aptos" pitchFamily="34" charset="-122"/>
                 <a:cs typeface="Aptos" pitchFamily="34" charset="-120"/>
               </a:rPr>
-              <a:t>Â© Paula Soper</a:t>
+              <a:t>Copyright Paula Soper</a:t>
             </a:r>
             <a:endParaRPr lang="en-US" sz="800" dirty="0"/>
           </a:p>
@@ -7448,77 +8305,13 @@
       </p:sp>
       <p:sp>
         <p:nvSpPr>
-          <p:cNvPr id="8" name="Shape 6"/>
+          <p:cNvPr id="8" name="Text 6"/>
           <p:cNvSpPr/>
           <p:nvPr/>
         </p:nvSpPr>
         <p:spPr>
           <a:xfrm>
             <a:off x="640080" y="658368"/>
-            <a:ext cx="420624" cy="420624"/>
-          </a:xfrm>
-          <a:prstGeom prst="ellipse">
-            <a:avLst/>
-          </a:prstGeom>
-          <a:solidFill>
-            <a:srgbClr val="0068B7"/>
-          </a:solidFill>
-          <a:ln w="12700">
-            <a:solidFill>
-              <a:srgbClr val="0068B7"/>
-            </a:solidFill>
-            <a:prstDash val="solid"/>
-          </a:ln>
-        </p:spPr>
-      </p:sp>
-      <p:sp>
-        <p:nvSpPr>
-          <p:cNvPr id="9" name="Text 7"/>
-          <p:cNvSpPr/>
-          <p:nvPr/>
-        </p:nvSpPr>
-        <p:spPr>
-          <a:xfrm>
-            <a:off x="640080" y="731520"/>
-            <a:ext cx="420624" cy="164592"/>
-          </a:xfrm>
-          <a:prstGeom prst="rect">
-            <a:avLst/>
-          </a:prstGeom>
-          <a:noFill/>
-          <a:ln/>
-        </p:spPr>
-        <p:txBody>
-          <a:bodyPr wrap="square" lIns="0" tIns="0" rIns="0" bIns="0" rtlCol="0" anchor="ctr"/>
-          <a:lstStyle/>
-          <a:p>
-            <a:pPr algn="ctr" indent="0" marL="0">
-              <a:buNone/>
-            </a:pPr>
-            <a:r>
-              <a:rPr lang="en-US" sz="1100" b="1" dirty="0">
-                <a:solidFill>
-                  <a:srgbClr val="FFFFFF"/>
-                </a:solidFill>
-                <a:latin typeface="Aptos" pitchFamily="34" charset="0"/>
-                <a:ea typeface="Aptos" pitchFamily="34" charset="-122"/>
-                <a:cs typeface="Aptos" pitchFamily="34" charset="-120"/>
-              </a:rPr>
-              <a:t>12</a:t>
-            </a:r>
-            <a:endParaRPr lang="en-US" sz="1100" dirty="0"/>
-          </a:p>
-        </p:txBody>
-      </p:sp>
-      <p:sp>
-        <p:nvSpPr>
-          <p:cNvPr id="10" name="Text 8"/>
-          <p:cNvSpPr/>
-          <p:nvPr/>
-        </p:nvSpPr>
-        <p:spPr>
-          <a:xfrm>
-            <a:off x="640080" y="621792"/>
             <a:ext cx="10881360" cy="713232"/>
           </a:xfrm>
           <a:prstGeom prst="rect">
@@ -7553,14 +8346,14 @@
       </p:sp>
       <p:sp>
         <p:nvSpPr>
-          <p:cNvPr id="11" name="Text 9"/>
+          <p:cNvPr id="9" name="Text 7"/>
           <p:cNvSpPr/>
           <p:nvPr/>
         </p:nvSpPr>
         <p:spPr>
           <a:xfrm>
             <a:off x="868680" y="1508760"/>
-            <a:ext cx="6537960" cy="4160520"/>
+            <a:ext cx="6309360" cy="4160520"/>
           </a:xfrm>
           <a:prstGeom prst="rect">
             <a:avLst/>
@@ -7591,18 +8384,18 @@
       </p:sp>
       <p:sp>
         <p:nvSpPr>
-          <p:cNvPr id="12" name="Shape 10"/>
-          <p:cNvSpPr/>
-          <p:nvPr/>
-        </p:nvSpPr>
-        <p:spPr>
-          <a:xfrm>
-            <a:off x="7909560" y="1417320"/>
-            <a:ext cx="3154680" cy="1828800"/>
+          <p:cNvPr id="10" name="Shape 8"/>
+          <p:cNvSpPr/>
+          <p:nvPr/>
+        </p:nvSpPr>
+        <p:spPr>
+          <a:xfrm>
+            <a:off x="7635240" y="1325880"/>
+            <a:ext cx="3474720" cy="1325880"/>
           </a:xfrm>
           <a:prstGeom prst="roundRect">
             <a:avLst>
-              <a:gd name="adj" fmla="val 6000"/>
+              <a:gd name="adj" fmla="val 8276"/>
             </a:avLst>
           </a:prstGeom>
           <a:solidFill>
@@ -7618,14 +8411,14 @@
       </p:sp>
       <p:sp>
         <p:nvSpPr>
-          <p:cNvPr id="13" name="Text 11"/>
-          <p:cNvSpPr/>
-          <p:nvPr/>
-        </p:nvSpPr>
-        <p:spPr>
-          <a:xfrm>
-            <a:off x="8074152" y="1563624"/>
-            <a:ext cx="2825496" cy="256032"/>
+          <p:cNvPr id="11" name="Text 9"/>
+          <p:cNvSpPr/>
+          <p:nvPr/>
+        </p:nvSpPr>
+        <p:spPr>
+          <a:xfrm>
+            <a:off x="7799832" y="1472184"/>
+            <a:ext cx="3145536" cy="256032"/>
           </a:xfrm>
           <a:prstGeom prst="rect">
             <a:avLst/>
@@ -7649,7 +8442,7 @@
                 <a:ea typeface="Aptos" pitchFamily="34" charset="-122"/>
                 <a:cs typeface="Aptos" pitchFamily="34" charset="-120"/>
               </a:rPr>
-              <a:t>Key idea</a:t>
+              <a:t>Core concept</a:t>
             </a:r>
             <a:endParaRPr lang="en-US" sz="1300" dirty="0"/>
           </a:p>
@@ -7657,14 +8450,14 @@
       </p:sp>
       <p:sp>
         <p:nvSpPr>
-          <p:cNvPr id="14" name="Text 12"/>
-          <p:cNvSpPr/>
-          <p:nvPr/>
-        </p:nvSpPr>
-        <p:spPr>
-          <a:xfrm>
-            <a:off x="8074152" y="1920240"/>
-            <a:ext cx="2825496" cy="1188720"/>
+          <p:cNvPr id="12" name="Text 10"/>
+          <p:cNvSpPr/>
+          <p:nvPr/>
+        </p:nvSpPr>
+        <p:spPr>
+          <a:xfrm>
+            <a:off x="7799832" y="1828800"/>
+            <a:ext cx="3145536" cy="685800"/>
           </a:xfrm>
           <a:prstGeom prst="rect">
             <a:avLst/>
@@ -7698,18 +8491,159 @@
       </p:sp>
       <p:sp>
         <p:nvSpPr>
-          <p:cNvPr id="15" name="Shape 13"/>
-          <p:cNvSpPr/>
-          <p:nvPr/>
-        </p:nvSpPr>
-        <p:spPr>
-          <a:xfrm>
-            <a:off x="7909560" y="3520440"/>
-            <a:ext cx="3154680" cy="1737360"/>
+          <p:cNvPr id="13" name="Shape 11"/>
+          <p:cNvSpPr/>
+          <p:nvPr/>
+        </p:nvSpPr>
+        <p:spPr>
+          <a:xfrm>
+            <a:off x="7635240" y="2788920"/>
+            <a:ext cx="3474720" cy="1536192"/>
           </a:xfrm>
           <a:prstGeom prst="roundRect">
             <a:avLst>
-              <a:gd name="adj" fmla="val 6316"/>
+              <a:gd name="adj" fmla="val 7143"/>
+            </a:avLst>
+          </a:prstGeom>
+          <a:solidFill>
+            <a:srgbClr val="FFFFFF">
+              <a:alpha val="88000"/>
+            </a:srgbClr>
+          </a:solidFill>
+          <a:ln w="12700">
+            <a:solidFill>
+              <a:srgbClr val="D6E8F2"/>
+            </a:solidFill>
+            <a:prstDash val="solid"/>
+          </a:ln>
+        </p:spPr>
+      </p:sp>
+      <p:sp>
+        <p:nvSpPr>
+          <p:cNvPr id="14" name="Shape 12"/>
+          <p:cNvSpPr/>
+          <p:nvPr/>
+        </p:nvSpPr>
+        <p:spPr>
+          <a:xfrm>
+            <a:off x="8074152" y="3291840"/>
+            <a:ext cx="2596896" cy="749808"/>
+          </a:xfrm>
+          <a:prstGeom prst="rect">
+            <a:avLst/>
+          </a:prstGeom>
+          <a:solidFill>
+            <a:srgbClr val="EAF6F8"/>
+          </a:solidFill>
+          <a:ln w="12700">
+            <a:solidFill>
+              <a:srgbClr val="8ABBD8"/>
+            </a:solidFill>
+            <a:prstDash val="solid"/>
+          </a:ln>
+        </p:spPr>
+      </p:sp>
+      <p:sp>
+        <p:nvSpPr>
+          <p:cNvPr id="15" name="Shape 13"/>
+          <p:cNvSpPr/>
+          <p:nvPr/>
+        </p:nvSpPr>
+        <p:spPr>
+          <a:xfrm>
+            <a:off x="8202168" y="3721608"/>
+            <a:ext cx="2340864" cy="0"/>
+          </a:xfrm>
+          <a:prstGeom prst="line">
+            <a:avLst/>
+          </a:prstGeom>
+          <a:noFill/>
+          <a:ln w="19050">
+            <a:solidFill>
+              <a:srgbClr val="0068B7"/>
+            </a:solidFill>
+            <a:prstDash val="solid"/>
+          </a:ln>
+        </p:spPr>
+      </p:sp>
+      <p:sp>
+        <p:nvSpPr>
+          <p:cNvPr id="16" name="Shape 14"/>
+          <p:cNvSpPr/>
+          <p:nvPr/>
+        </p:nvSpPr>
+        <p:spPr>
+          <a:xfrm>
+            <a:off x="9198864" y="4206240"/>
+            <a:ext cx="347472" cy="347472"/>
+          </a:xfrm>
+          <a:prstGeom prst="ellipse">
+            <a:avLst/>
+          </a:prstGeom>
+          <a:solidFill>
+            <a:srgbClr val="2F8A28"/>
+          </a:solidFill>
+          <a:ln w="12700">
+            <a:solidFill>
+              <a:srgbClr val="2F8A28"/>
+            </a:solidFill>
+            <a:prstDash val="solid"/>
+          </a:ln>
+        </p:spPr>
+      </p:sp>
+      <p:sp>
+        <p:nvSpPr>
+          <p:cNvPr id="17" name="Text 15"/>
+          <p:cNvSpPr/>
+          <p:nvPr/>
+        </p:nvSpPr>
+        <p:spPr>
+          <a:xfrm>
+            <a:off x="7909560" y="3977640"/>
+            <a:ext cx="2926080" cy="182880"/>
+          </a:xfrm>
+          <a:prstGeom prst="rect">
+            <a:avLst/>
+          </a:prstGeom>
+          <a:noFill/>
+          <a:ln/>
+        </p:spPr>
+        <p:txBody>
+          <a:bodyPr wrap="square" lIns="0" tIns="0" rIns="0" bIns="0" rtlCol="0" anchor="ctr"/>
+          <a:lstStyle/>
+          <a:p>
+            <a:pPr algn="ctr" indent="0" marL="0">
+              <a:buNone/>
+            </a:pPr>
+            <a:r>
+              <a:rPr lang="en-US" sz="1000" dirty="0">
+                <a:solidFill>
+                  <a:srgbClr val="003A63"/>
+                </a:solidFill>
+                <a:latin typeface="Aptos" pitchFamily="34" charset="0"/>
+                <a:ea typeface="Aptos" pitchFamily="34" charset="-122"/>
+                <a:cs typeface="Aptos" pitchFamily="34" charset="-120"/>
+              </a:rPr>
+              <a:t>Concept to action</a:t>
+            </a:r>
+            <a:endParaRPr lang="en-US" sz="1000" dirty="0"/>
+          </a:p>
+        </p:txBody>
+      </p:sp>
+      <p:sp>
+        <p:nvSpPr>
+          <p:cNvPr id="18" name="Shape 16"/>
+          <p:cNvSpPr/>
+          <p:nvPr/>
+        </p:nvSpPr>
+        <p:spPr>
+          <a:xfrm>
+            <a:off x="7635240" y="4498848"/>
+            <a:ext cx="3474720" cy="1143000"/>
+          </a:xfrm>
+          <a:prstGeom prst="roundRect">
+            <a:avLst>
+              <a:gd name="adj" fmla="val 9600"/>
             </a:avLst>
           </a:prstGeom>
           <a:solidFill>
@@ -7725,14 +8659,14 @@
       </p:sp>
       <p:sp>
         <p:nvSpPr>
-          <p:cNvPr id="16" name="Text 14"/>
-          <p:cNvSpPr/>
-          <p:nvPr/>
-        </p:nvSpPr>
-        <p:spPr>
-          <a:xfrm>
-            <a:off x="8074152" y="3666744"/>
-            <a:ext cx="2825496" cy="256032"/>
+          <p:cNvPr id="19" name="Text 17"/>
+          <p:cNvSpPr/>
+          <p:nvPr/>
+        </p:nvSpPr>
+        <p:spPr>
+          <a:xfrm>
+            <a:off x="7799832" y="4645152"/>
+            <a:ext cx="3145536" cy="256032"/>
           </a:xfrm>
           <a:prstGeom prst="rect">
             <a:avLst/>
@@ -7756,7 +8690,7 @@
                 <a:ea typeface="Aptos" pitchFamily="34" charset="-122"/>
                 <a:cs typeface="Aptos" pitchFamily="34" charset="-120"/>
               </a:rPr>
-              <a:t>Use this for</a:t>
+              <a:t>Apply it</a:t>
             </a:r>
             <a:endParaRPr lang="en-US" sz="1300" dirty="0"/>
           </a:p>
@@ -7764,14 +8698,14 @@
       </p:sp>
       <p:sp>
         <p:nvSpPr>
-          <p:cNvPr id="17" name="Text 15"/>
-          <p:cNvSpPr/>
-          <p:nvPr/>
-        </p:nvSpPr>
-        <p:spPr>
-          <a:xfrm>
-            <a:off x="8074152" y="4023360"/>
-            <a:ext cx="2825496" cy="1097280"/>
+          <p:cNvPr id="20" name="Text 18"/>
+          <p:cNvSpPr/>
+          <p:nvPr/>
+        </p:nvSpPr>
+        <p:spPr>
+          <a:xfrm>
+            <a:off x="7799832" y="5001768"/>
+            <a:ext cx="3145536" cy="502920"/>
           </a:xfrm>
           <a:prstGeom prst="rect">
             <a:avLst/>
@@ -7797,7 +8731,7 @@
                 <a:ea typeface="Aptos" pitchFamily="34" charset="-122"/>
                 <a:cs typeface="Aptos" pitchFamily="34" charset="-120"/>
               </a:rPr>
-              <a:t>Connect the concept to public health decisions, safeguards, documentation, or implementation work.</a:t>
+              <a:t>Connect the concept to public health purpose, responsible use, required safeguards, documentation, and the next action a department should take.</a:t>
             </a:r>
             <a:endParaRPr lang="en-US" sz="1550" dirty="0"/>
           </a:p>
@@ -7971,8 +8905,8 @@
         </p:nvSpPr>
         <p:spPr>
           <a:xfrm>
-            <a:off x="9966960" y="6537960"/>
-            <a:ext cx="1645920" cy="201168"/>
+            <a:off x="9646920" y="6537960"/>
+            <a:ext cx="1965960" cy="201168"/>
           </a:xfrm>
           <a:prstGeom prst="rect">
             <a:avLst/>
@@ -7996,7 +8930,7 @@
                 <a:ea typeface="Aptos" pitchFamily="34" charset="-122"/>
                 <a:cs typeface="Aptos" pitchFamily="34" charset="-120"/>
               </a:rPr>
-              <a:t>Â© Paula Soper</a:t>
+              <a:t>Copyright Paula Soper</a:t>
             </a:r>
             <a:endParaRPr lang="en-US" sz="800" dirty="0"/>
           </a:p>
@@ -8043,77 +8977,13 @@
       </p:sp>
       <p:sp>
         <p:nvSpPr>
-          <p:cNvPr id="8" name="Shape 6"/>
+          <p:cNvPr id="8" name="Text 6"/>
           <p:cNvSpPr/>
           <p:nvPr/>
         </p:nvSpPr>
         <p:spPr>
           <a:xfrm>
             <a:off x="640080" y="658368"/>
-            <a:ext cx="420624" cy="420624"/>
-          </a:xfrm>
-          <a:prstGeom prst="ellipse">
-            <a:avLst/>
-          </a:prstGeom>
-          <a:solidFill>
-            <a:srgbClr val="0068B7"/>
-          </a:solidFill>
-          <a:ln w="12700">
-            <a:solidFill>
-              <a:srgbClr val="0068B7"/>
-            </a:solidFill>
-            <a:prstDash val="solid"/>
-          </a:ln>
-        </p:spPr>
-      </p:sp>
-      <p:sp>
-        <p:nvSpPr>
-          <p:cNvPr id="9" name="Text 7"/>
-          <p:cNvSpPr/>
-          <p:nvPr/>
-        </p:nvSpPr>
-        <p:spPr>
-          <a:xfrm>
-            <a:off x="640080" y="731520"/>
-            <a:ext cx="420624" cy="164592"/>
-          </a:xfrm>
-          <a:prstGeom prst="rect">
-            <a:avLst/>
-          </a:prstGeom>
-          <a:noFill/>
-          <a:ln/>
-        </p:spPr>
-        <p:txBody>
-          <a:bodyPr wrap="square" lIns="0" tIns="0" rIns="0" bIns="0" rtlCol="0" anchor="ctr"/>
-          <a:lstStyle/>
-          <a:p>
-            <a:pPr algn="ctr" indent="0" marL="0">
-              <a:buNone/>
-            </a:pPr>
-            <a:r>
-              <a:rPr lang="en-US" sz="1100" b="1" dirty="0">
-                <a:solidFill>
-                  <a:srgbClr val="FFFFFF"/>
-                </a:solidFill>
-                <a:latin typeface="Aptos" pitchFamily="34" charset="0"/>
-                <a:ea typeface="Aptos" pitchFamily="34" charset="-122"/>
-                <a:cs typeface="Aptos" pitchFamily="34" charset="-120"/>
-              </a:rPr>
-              <a:t>13</a:t>
-            </a:r>
-            <a:endParaRPr lang="en-US" sz="1100" dirty="0"/>
-          </a:p>
-        </p:txBody>
-      </p:sp>
-      <p:sp>
-        <p:nvSpPr>
-          <p:cNvPr id="10" name="Text 8"/>
-          <p:cNvSpPr/>
-          <p:nvPr/>
-        </p:nvSpPr>
-        <p:spPr>
-          <a:xfrm>
-            <a:off x="640080" y="621792"/>
             <a:ext cx="10881360" cy="713232"/>
           </a:xfrm>
           <a:prstGeom prst="rect">
@@ -8148,14 +9018,14 @@
       </p:sp>
       <p:sp>
         <p:nvSpPr>
-          <p:cNvPr id="11" name="Text 9"/>
+          <p:cNvPr id="9" name="Text 7"/>
           <p:cNvSpPr/>
           <p:nvPr/>
         </p:nvSpPr>
         <p:spPr>
           <a:xfrm>
             <a:off x="868680" y="1508760"/>
-            <a:ext cx="6537960" cy="4160520"/>
+            <a:ext cx="6309360" cy="4160520"/>
           </a:xfrm>
           <a:prstGeom prst="rect">
             <a:avLst/>
@@ -8186,18 +9056,18 @@
       </p:sp>
       <p:sp>
         <p:nvSpPr>
-          <p:cNvPr id="12" name="Shape 10"/>
-          <p:cNvSpPr/>
-          <p:nvPr/>
-        </p:nvSpPr>
-        <p:spPr>
-          <a:xfrm>
-            <a:off x="7909560" y="1417320"/>
-            <a:ext cx="3154680" cy="1828800"/>
+          <p:cNvPr id="10" name="Shape 8"/>
+          <p:cNvSpPr/>
+          <p:nvPr/>
+        </p:nvSpPr>
+        <p:spPr>
+          <a:xfrm>
+            <a:off x="7635240" y="1325880"/>
+            <a:ext cx="3474720" cy="1325880"/>
           </a:xfrm>
           <a:prstGeom prst="roundRect">
             <a:avLst>
-              <a:gd name="adj" fmla="val 6000"/>
+              <a:gd name="adj" fmla="val 8276"/>
             </a:avLst>
           </a:prstGeom>
           <a:solidFill>
@@ -8213,14 +9083,14 @@
       </p:sp>
       <p:sp>
         <p:nvSpPr>
-          <p:cNvPr id="13" name="Text 11"/>
-          <p:cNvSpPr/>
-          <p:nvPr/>
-        </p:nvSpPr>
-        <p:spPr>
-          <a:xfrm>
-            <a:off x="8074152" y="1563624"/>
-            <a:ext cx="2825496" cy="256032"/>
+          <p:cNvPr id="11" name="Text 9"/>
+          <p:cNvSpPr/>
+          <p:nvPr/>
+        </p:nvSpPr>
+        <p:spPr>
+          <a:xfrm>
+            <a:off x="7799832" y="1472184"/>
+            <a:ext cx="3145536" cy="256032"/>
           </a:xfrm>
           <a:prstGeom prst="rect">
             <a:avLst/>
@@ -8244,7 +9114,7 @@
                 <a:ea typeface="Aptos" pitchFamily="34" charset="-122"/>
                 <a:cs typeface="Aptos" pitchFamily="34" charset="-120"/>
               </a:rPr>
-              <a:t>Key idea</a:t>
+              <a:t>Practice focus</a:t>
             </a:r>
             <a:endParaRPr lang="en-US" sz="1300" dirty="0"/>
           </a:p>
@@ -8252,14 +9122,14 @@
       </p:sp>
       <p:sp>
         <p:nvSpPr>
-          <p:cNvPr id="14" name="Text 12"/>
-          <p:cNvSpPr/>
-          <p:nvPr/>
-        </p:nvSpPr>
-        <p:spPr>
-          <a:xfrm>
-            <a:off x="8074152" y="1920240"/>
-            <a:ext cx="2825496" cy="1188720"/>
+          <p:cNvPr id="12" name="Text 10"/>
+          <p:cNvSpPr/>
+          <p:nvPr/>
+        </p:nvSpPr>
+        <p:spPr>
+          <a:xfrm>
+            <a:off x="7799832" y="1828800"/>
+            <a:ext cx="3145536" cy="685800"/>
           </a:xfrm>
           <a:prstGeom prst="rect">
             <a:avLst/>
@@ -8293,18 +9163,159 @@
       </p:sp>
       <p:sp>
         <p:nvSpPr>
-          <p:cNvPr id="15" name="Shape 13"/>
-          <p:cNvSpPr/>
-          <p:nvPr/>
-        </p:nvSpPr>
-        <p:spPr>
-          <a:xfrm>
-            <a:off x="7909560" y="3520440"/>
-            <a:ext cx="3154680" cy="1737360"/>
+          <p:cNvPr id="13" name="Shape 11"/>
+          <p:cNvSpPr/>
+          <p:nvPr/>
+        </p:nvSpPr>
+        <p:spPr>
+          <a:xfrm>
+            <a:off x="7635240" y="2788920"/>
+            <a:ext cx="3474720" cy="1536192"/>
           </a:xfrm>
           <a:prstGeom prst="roundRect">
             <a:avLst>
-              <a:gd name="adj" fmla="val 6316"/>
+              <a:gd name="adj" fmla="val 7143"/>
+            </a:avLst>
+          </a:prstGeom>
+          <a:solidFill>
+            <a:srgbClr val="FFFFFF">
+              <a:alpha val="88000"/>
+            </a:srgbClr>
+          </a:solidFill>
+          <a:ln w="12700">
+            <a:solidFill>
+              <a:srgbClr val="D6E8F2"/>
+            </a:solidFill>
+            <a:prstDash val="solid"/>
+          </a:ln>
+        </p:spPr>
+      </p:sp>
+      <p:sp>
+        <p:nvSpPr>
+          <p:cNvPr id="14" name="Shape 12"/>
+          <p:cNvSpPr/>
+          <p:nvPr/>
+        </p:nvSpPr>
+        <p:spPr>
+          <a:xfrm>
+            <a:off x="8074152" y="3291840"/>
+            <a:ext cx="2596896" cy="749808"/>
+          </a:xfrm>
+          <a:prstGeom prst="rect">
+            <a:avLst/>
+          </a:prstGeom>
+          <a:solidFill>
+            <a:srgbClr val="EAF6F8"/>
+          </a:solidFill>
+          <a:ln w="12700">
+            <a:solidFill>
+              <a:srgbClr val="8ABBD8"/>
+            </a:solidFill>
+            <a:prstDash val="solid"/>
+          </a:ln>
+        </p:spPr>
+      </p:sp>
+      <p:sp>
+        <p:nvSpPr>
+          <p:cNvPr id="15" name="Shape 13"/>
+          <p:cNvSpPr/>
+          <p:nvPr/>
+        </p:nvSpPr>
+        <p:spPr>
+          <a:xfrm>
+            <a:off x="8202168" y="3721608"/>
+            <a:ext cx="2340864" cy="0"/>
+          </a:xfrm>
+          <a:prstGeom prst="line">
+            <a:avLst/>
+          </a:prstGeom>
+          <a:noFill/>
+          <a:ln w="19050">
+            <a:solidFill>
+              <a:srgbClr val="0068B7"/>
+            </a:solidFill>
+            <a:prstDash val="solid"/>
+          </a:ln>
+        </p:spPr>
+      </p:sp>
+      <p:sp>
+        <p:nvSpPr>
+          <p:cNvPr id="16" name="Shape 14"/>
+          <p:cNvSpPr/>
+          <p:nvPr/>
+        </p:nvSpPr>
+        <p:spPr>
+          <a:xfrm>
+            <a:off x="9198864" y="4206240"/>
+            <a:ext cx="347472" cy="347472"/>
+          </a:xfrm>
+          <a:prstGeom prst="ellipse">
+            <a:avLst/>
+          </a:prstGeom>
+          <a:solidFill>
+            <a:srgbClr val="2F8A28"/>
+          </a:solidFill>
+          <a:ln w="12700">
+            <a:solidFill>
+              <a:srgbClr val="2F8A28"/>
+            </a:solidFill>
+            <a:prstDash val="solid"/>
+          </a:ln>
+        </p:spPr>
+      </p:sp>
+      <p:sp>
+        <p:nvSpPr>
+          <p:cNvPr id="17" name="Text 15"/>
+          <p:cNvSpPr/>
+          <p:nvPr/>
+        </p:nvSpPr>
+        <p:spPr>
+          <a:xfrm>
+            <a:off x="7909560" y="3977640"/>
+            <a:ext cx="2926080" cy="182880"/>
+          </a:xfrm>
+          <a:prstGeom prst="rect">
+            <a:avLst/>
+          </a:prstGeom>
+          <a:noFill/>
+          <a:ln/>
+        </p:spPr>
+        <p:txBody>
+          <a:bodyPr wrap="square" lIns="0" tIns="0" rIns="0" bIns="0" rtlCol="0" anchor="ctr"/>
+          <a:lstStyle/>
+          <a:p>
+            <a:pPr algn="ctr" indent="0" marL="0">
+              <a:buNone/>
+            </a:pPr>
+            <a:r>
+              <a:rPr lang="en-US" sz="1000" dirty="0">
+                <a:solidFill>
+                  <a:srgbClr val="003A63"/>
+                </a:solidFill>
+                <a:latin typeface="Aptos" pitchFamily="34" charset="0"/>
+                <a:ea typeface="Aptos" pitchFamily="34" charset="-122"/>
+                <a:cs typeface="Aptos" pitchFamily="34" charset="-120"/>
+              </a:rPr>
+              <a:t>Concept to action</a:t>
+            </a:r>
+            <a:endParaRPr lang="en-US" sz="1000" dirty="0"/>
+          </a:p>
+        </p:txBody>
+      </p:sp>
+      <p:sp>
+        <p:nvSpPr>
+          <p:cNvPr id="18" name="Shape 16"/>
+          <p:cNvSpPr/>
+          <p:nvPr/>
+        </p:nvSpPr>
+        <p:spPr>
+          <a:xfrm>
+            <a:off x="7635240" y="4498848"/>
+            <a:ext cx="3474720" cy="1143000"/>
+          </a:xfrm>
+          <a:prstGeom prst="roundRect">
+            <a:avLst>
+              <a:gd name="adj" fmla="val 9600"/>
             </a:avLst>
           </a:prstGeom>
           <a:solidFill>
@@ -8320,14 +9331,14 @@
       </p:sp>
       <p:sp>
         <p:nvSpPr>
-          <p:cNvPr id="16" name="Text 14"/>
-          <p:cNvSpPr/>
-          <p:nvPr/>
-        </p:nvSpPr>
-        <p:spPr>
-          <a:xfrm>
-            <a:off x="8074152" y="3666744"/>
-            <a:ext cx="2825496" cy="256032"/>
+          <p:cNvPr id="19" name="Text 17"/>
+          <p:cNvSpPr/>
+          <p:nvPr/>
+        </p:nvSpPr>
+        <p:spPr>
+          <a:xfrm>
+            <a:off x="7799832" y="4645152"/>
+            <a:ext cx="3145536" cy="256032"/>
           </a:xfrm>
           <a:prstGeom prst="rect">
             <a:avLst/>
@@ -8351,7 +9362,7 @@
                 <a:ea typeface="Aptos" pitchFamily="34" charset="-122"/>
                 <a:cs typeface="Aptos" pitchFamily="34" charset="-120"/>
               </a:rPr>
-              <a:t>Use this for</a:t>
+              <a:t>What to produce</a:t>
             </a:r>
             <a:endParaRPr lang="en-US" sz="1300" dirty="0"/>
           </a:p>
@@ -8359,14 +9370,14 @@
       </p:sp>
       <p:sp>
         <p:nvSpPr>
-          <p:cNvPr id="17" name="Text 15"/>
-          <p:cNvSpPr/>
-          <p:nvPr/>
-        </p:nvSpPr>
-        <p:spPr>
-          <a:xfrm>
-            <a:off x="8074152" y="4023360"/>
-            <a:ext cx="2825496" cy="1097280"/>
+          <p:cNvPr id="20" name="Text 18"/>
+          <p:cNvSpPr/>
+          <p:nvPr/>
+        </p:nvSpPr>
+        <p:spPr>
+          <a:xfrm>
+            <a:off x="7799832" y="5001768"/>
+            <a:ext cx="3145536" cy="502920"/>
           </a:xfrm>
           <a:prstGeom prst="rect">
             <a:avLst/>
@@ -8392,7 +9403,7 @@
                 <a:ea typeface="Aptos" pitchFamily="34" charset="-122"/>
                 <a:cs typeface="Aptos" pitchFamily="34" charset="-120"/>
               </a:rPr>
-              <a:t>Connect the concept to public health decisions, safeguards, documentation, or implementation work.</a:t>
+              <a:t>Use the assignment to test whether you can explain the concept, apply it to a realistic public health situation, and identify what would need review before the work moves forward.</a:t>
             </a:r>
             <a:endParaRPr lang="en-US" sz="1550" dirty="0"/>
           </a:p>
@@ -8566,8 +9577,8 @@
         </p:nvSpPr>
         <p:spPr>
           <a:xfrm>
-            <a:off x="9966960" y="6537960"/>
-            <a:ext cx="1645920" cy="201168"/>
+            <a:off x="9646920" y="6537960"/>
+            <a:ext cx="1965960" cy="201168"/>
           </a:xfrm>
           <a:prstGeom prst="rect">
             <a:avLst/>
@@ -8591,7 +9602,7 @@
                 <a:ea typeface="Aptos" pitchFamily="34" charset="-122"/>
                 <a:cs typeface="Aptos" pitchFamily="34" charset="-120"/>
               </a:rPr>
-              <a:t>Â© Paula Soper</a:t>
+              <a:t>Copyright Paula Soper</a:t>
             </a:r>
             <a:endParaRPr lang="en-US" sz="800" dirty="0"/>
           </a:p>
@@ -8638,77 +9649,13 @@
       </p:sp>
       <p:sp>
         <p:nvSpPr>
-          <p:cNvPr id="8" name="Shape 6"/>
+          <p:cNvPr id="8" name="Text 6"/>
           <p:cNvSpPr/>
           <p:nvPr/>
         </p:nvSpPr>
         <p:spPr>
           <a:xfrm>
             <a:off x="640080" y="658368"/>
-            <a:ext cx="420624" cy="420624"/>
-          </a:xfrm>
-          <a:prstGeom prst="ellipse">
-            <a:avLst/>
-          </a:prstGeom>
-          <a:solidFill>
-            <a:srgbClr val="0068B7"/>
-          </a:solidFill>
-          <a:ln w="12700">
-            <a:solidFill>
-              <a:srgbClr val="0068B7"/>
-            </a:solidFill>
-            <a:prstDash val="solid"/>
-          </a:ln>
-        </p:spPr>
-      </p:sp>
-      <p:sp>
-        <p:nvSpPr>
-          <p:cNvPr id="9" name="Text 7"/>
-          <p:cNvSpPr/>
-          <p:nvPr/>
-        </p:nvSpPr>
-        <p:spPr>
-          <a:xfrm>
-            <a:off x="640080" y="731520"/>
-            <a:ext cx="420624" cy="164592"/>
-          </a:xfrm>
-          <a:prstGeom prst="rect">
-            <a:avLst/>
-          </a:prstGeom>
-          <a:noFill/>
-          <a:ln/>
-        </p:spPr>
-        <p:txBody>
-          <a:bodyPr wrap="square" lIns="0" tIns="0" rIns="0" bIns="0" rtlCol="0" anchor="ctr"/>
-          <a:lstStyle/>
-          <a:p>
-            <a:pPr algn="ctr" indent="0" marL="0">
-              <a:buNone/>
-            </a:pPr>
-            <a:r>
-              <a:rPr lang="en-US" sz="1100" b="1" dirty="0">
-                <a:solidFill>
-                  <a:srgbClr val="FFFFFF"/>
-                </a:solidFill>
-                <a:latin typeface="Aptos" pitchFamily="34" charset="0"/>
-                <a:ea typeface="Aptos" pitchFamily="34" charset="-122"/>
-                <a:cs typeface="Aptos" pitchFamily="34" charset="-120"/>
-              </a:rPr>
-              <a:t>14</a:t>
-            </a:r>
-            <a:endParaRPr lang="en-US" sz="1100" dirty="0"/>
-          </a:p>
-        </p:txBody>
-      </p:sp>
-      <p:sp>
-        <p:nvSpPr>
-          <p:cNvPr id="10" name="Text 8"/>
-          <p:cNvSpPr/>
-          <p:nvPr/>
-        </p:nvSpPr>
-        <p:spPr>
-          <a:xfrm>
-            <a:off x="640080" y="621792"/>
             <a:ext cx="10881360" cy="713232"/>
           </a:xfrm>
           <a:prstGeom prst="rect">
@@ -8743,14 +9690,14 @@
       </p:sp>
       <p:sp>
         <p:nvSpPr>
-          <p:cNvPr id="11" name="Text 9"/>
+          <p:cNvPr id="9" name="Text 7"/>
           <p:cNvSpPr/>
           <p:nvPr/>
         </p:nvSpPr>
         <p:spPr>
           <a:xfrm>
             <a:off x="868680" y="1508760"/>
-            <a:ext cx="6537960" cy="4160520"/>
+            <a:ext cx="6309360" cy="4160520"/>
           </a:xfrm>
           <a:prstGeom prst="rect">
             <a:avLst/>
@@ -8809,18 +9756,18 @@
       </p:sp>
       <p:sp>
         <p:nvSpPr>
-          <p:cNvPr id="12" name="Shape 10"/>
-          <p:cNvSpPr/>
-          <p:nvPr/>
-        </p:nvSpPr>
-        <p:spPr>
-          <a:xfrm>
-            <a:off x="7909560" y="1417320"/>
-            <a:ext cx="3154680" cy="1828800"/>
+          <p:cNvPr id="10" name="Shape 8"/>
+          <p:cNvSpPr/>
+          <p:nvPr/>
+        </p:nvSpPr>
+        <p:spPr>
+          <a:xfrm>
+            <a:off x="7635240" y="1325880"/>
+            <a:ext cx="3474720" cy="1325880"/>
           </a:xfrm>
           <a:prstGeom prst="roundRect">
             <a:avLst>
-              <a:gd name="adj" fmla="val 6000"/>
+              <a:gd name="adj" fmla="val 8276"/>
             </a:avLst>
           </a:prstGeom>
           <a:solidFill>
@@ -8836,14 +9783,14 @@
       </p:sp>
       <p:sp>
         <p:nvSpPr>
-          <p:cNvPr id="13" name="Text 11"/>
-          <p:cNvSpPr/>
-          <p:nvPr/>
-        </p:nvSpPr>
-        <p:spPr>
-          <a:xfrm>
-            <a:off x="8074152" y="1563624"/>
-            <a:ext cx="2825496" cy="256032"/>
+          <p:cNvPr id="11" name="Text 9"/>
+          <p:cNvSpPr/>
+          <p:nvPr/>
+        </p:nvSpPr>
+        <p:spPr>
+          <a:xfrm>
+            <a:off x="7799832" y="1472184"/>
+            <a:ext cx="3145536" cy="256032"/>
           </a:xfrm>
           <a:prstGeom prst="rect">
             <a:avLst/>
@@ -8867,7 +9814,7 @@
                 <a:ea typeface="Aptos" pitchFamily="34" charset="-122"/>
                 <a:cs typeface="Aptos" pitchFamily="34" charset="-120"/>
               </a:rPr>
-              <a:t>Key idea</a:t>
+              <a:t>Practice focus</a:t>
             </a:r>
             <a:endParaRPr lang="en-US" sz="1300" dirty="0"/>
           </a:p>
@@ -8875,14 +9822,14 @@
       </p:sp>
       <p:sp>
         <p:nvSpPr>
-          <p:cNvPr id="14" name="Text 12"/>
-          <p:cNvSpPr/>
-          <p:nvPr/>
-        </p:nvSpPr>
-        <p:spPr>
-          <a:xfrm>
-            <a:off x="8074152" y="1920240"/>
-            <a:ext cx="2825496" cy="1188720"/>
+          <p:cNvPr id="12" name="Text 10"/>
+          <p:cNvSpPr/>
+          <p:nvPr/>
+        </p:nvSpPr>
+        <p:spPr>
+          <a:xfrm>
+            <a:off x="7799832" y="1828800"/>
+            <a:ext cx="3145536" cy="685800"/>
           </a:xfrm>
           <a:prstGeom prst="rect">
             <a:avLst/>
@@ -8916,18 +9863,159 @@
       </p:sp>
       <p:sp>
         <p:nvSpPr>
-          <p:cNvPr id="15" name="Shape 13"/>
-          <p:cNvSpPr/>
-          <p:nvPr/>
-        </p:nvSpPr>
-        <p:spPr>
-          <a:xfrm>
-            <a:off x="7909560" y="3520440"/>
-            <a:ext cx="3154680" cy="1737360"/>
+          <p:cNvPr id="13" name="Shape 11"/>
+          <p:cNvSpPr/>
+          <p:nvPr/>
+        </p:nvSpPr>
+        <p:spPr>
+          <a:xfrm>
+            <a:off x="7635240" y="2788920"/>
+            <a:ext cx="3474720" cy="1536192"/>
           </a:xfrm>
           <a:prstGeom prst="roundRect">
             <a:avLst>
-              <a:gd name="adj" fmla="val 6316"/>
+              <a:gd name="adj" fmla="val 7143"/>
+            </a:avLst>
+          </a:prstGeom>
+          <a:solidFill>
+            <a:srgbClr val="FFFFFF">
+              <a:alpha val="88000"/>
+            </a:srgbClr>
+          </a:solidFill>
+          <a:ln w="12700">
+            <a:solidFill>
+              <a:srgbClr val="D6E8F2"/>
+            </a:solidFill>
+            <a:prstDash val="solid"/>
+          </a:ln>
+        </p:spPr>
+      </p:sp>
+      <p:sp>
+        <p:nvSpPr>
+          <p:cNvPr id="14" name="Shape 12"/>
+          <p:cNvSpPr/>
+          <p:nvPr/>
+        </p:nvSpPr>
+        <p:spPr>
+          <a:xfrm>
+            <a:off x="8074152" y="3291840"/>
+            <a:ext cx="2596896" cy="749808"/>
+          </a:xfrm>
+          <a:prstGeom prst="rect">
+            <a:avLst/>
+          </a:prstGeom>
+          <a:solidFill>
+            <a:srgbClr val="EAF6F8"/>
+          </a:solidFill>
+          <a:ln w="12700">
+            <a:solidFill>
+              <a:srgbClr val="8ABBD8"/>
+            </a:solidFill>
+            <a:prstDash val="solid"/>
+          </a:ln>
+        </p:spPr>
+      </p:sp>
+      <p:sp>
+        <p:nvSpPr>
+          <p:cNvPr id="15" name="Shape 13"/>
+          <p:cNvSpPr/>
+          <p:nvPr/>
+        </p:nvSpPr>
+        <p:spPr>
+          <a:xfrm>
+            <a:off x="8202168" y="3721608"/>
+            <a:ext cx="2340864" cy="0"/>
+          </a:xfrm>
+          <a:prstGeom prst="line">
+            <a:avLst/>
+          </a:prstGeom>
+          <a:noFill/>
+          <a:ln w="19050">
+            <a:solidFill>
+              <a:srgbClr val="0068B7"/>
+            </a:solidFill>
+            <a:prstDash val="solid"/>
+          </a:ln>
+        </p:spPr>
+      </p:sp>
+      <p:sp>
+        <p:nvSpPr>
+          <p:cNvPr id="16" name="Shape 14"/>
+          <p:cNvSpPr/>
+          <p:nvPr/>
+        </p:nvSpPr>
+        <p:spPr>
+          <a:xfrm>
+            <a:off x="9198864" y="4206240"/>
+            <a:ext cx="347472" cy="347472"/>
+          </a:xfrm>
+          <a:prstGeom prst="ellipse">
+            <a:avLst/>
+          </a:prstGeom>
+          <a:solidFill>
+            <a:srgbClr val="2F8A28"/>
+          </a:solidFill>
+          <a:ln w="12700">
+            <a:solidFill>
+              <a:srgbClr val="2F8A28"/>
+            </a:solidFill>
+            <a:prstDash val="solid"/>
+          </a:ln>
+        </p:spPr>
+      </p:sp>
+      <p:sp>
+        <p:nvSpPr>
+          <p:cNvPr id="17" name="Text 15"/>
+          <p:cNvSpPr/>
+          <p:nvPr/>
+        </p:nvSpPr>
+        <p:spPr>
+          <a:xfrm>
+            <a:off x="7909560" y="3977640"/>
+            <a:ext cx="2926080" cy="182880"/>
+          </a:xfrm>
+          <a:prstGeom prst="rect">
+            <a:avLst/>
+          </a:prstGeom>
+          <a:noFill/>
+          <a:ln/>
+        </p:spPr>
+        <p:txBody>
+          <a:bodyPr wrap="square" lIns="0" tIns="0" rIns="0" bIns="0" rtlCol="0" anchor="ctr"/>
+          <a:lstStyle/>
+          <a:p>
+            <a:pPr algn="ctr" indent="0" marL="0">
+              <a:buNone/>
+            </a:pPr>
+            <a:r>
+              <a:rPr lang="en-US" sz="1000" dirty="0">
+                <a:solidFill>
+                  <a:srgbClr val="003A63"/>
+                </a:solidFill>
+                <a:latin typeface="Aptos" pitchFamily="34" charset="0"/>
+                <a:ea typeface="Aptos" pitchFamily="34" charset="-122"/>
+                <a:cs typeface="Aptos" pitchFamily="34" charset="-120"/>
+              </a:rPr>
+              <a:t>Concept to action</a:t>
+            </a:r>
+            <a:endParaRPr lang="en-US" sz="1000" dirty="0"/>
+          </a:p>
+        </p:txBody>
+      </p:sp>
+      <p:sp>
+        <p:nvSpPr>
+          <p:cNvPr id="18" name="Shape 16"/>
+          <p:cNvSpPr/>
+          <p:nvPr/>
+        </p:nvSpPr>
+        <p:spPr>
+          <a:xfrm>
+            <a:off x="7635240" y="4498848"/>
+            <a:ext cx="3474720" cy="1143000"/>
+          </a:xfrm>
+          <a:prstGeom prst="roundRect">
+            <a:avLst>
+              <a:gd name="adj" fmla="val 9600"/>
             </a:avLst>
           </a:prstGeom>
           <a:solidFill>
@@ -8943,14 +10031,14 @@
       </p:sp>
       <p:sp>
         <p:nvSpPr>
-          <p:cNvPr id="16" name="Text 14"/>
-          <p:cNvSpPr/>
-          <p:nvPr/>
-        </p:nvSpPr>
-        <p:spPr>
-          <a:xfrm>
-            <a:off x="8074152" y="3666744"/>
-            <a:ext cx="2825496" cy="256032"/>
+          <p:cNvPr id="19" name="Text 17"/>
+          <p:cNvSpPr/>
+          <p:nvPr/>
+        </p:nvSpPr>
+        <p:spPr>
+          <a:xfrm>
+            <a:off x="7799832" y="4645152"/>
+            <a:ext cx="3145536" cy="256032"/>
           </a:xfrm>
           <a:prstGeom prst="rect">
             <a:avLst/>
@@ -8974,7 +10062,7 @@
                 <a:ea typeface="Aptos" pitchFamily="34" charset="-122"/>
                 <a:cs typeface="Aptos" pitchFamily="34" charset="-120"/>
               </a:rPr>
-              <a:t>Use this for</a:t>
+              <a:t>What to produce</a:t>
             </a:r>
             <a:endParaRPr lang="en-US" sz="1300" dirty="0"/>
           </a:p>
@@ -8982,14 +10070,14 @@
       </p:sp>
       <p:sp>
         <p:nvSpPr>
-          <p:cNvPr id="17" name="Text 15"/>
-          <p:cNvSpPr/>
-          <p:nvPr/>
-        </p:nvSpPr>
-        <p:spPr>
-          <a:xfrm>
-            <a:off x="8074152" y="4023360"/>
-            <a:ext cx="2825496" cy="1097280"/>
+          <p:cNvPr id="20" name="Text 18"/>
+          <p:cNvSpPr/>
+          <p:nvPr/>
+        </p:nvSpPr>
+        <p:spPr>
+          <a:xfrm>
+            <a:off x="7799832" y="5001768"/>
+            <a:ext cx="3145536" cy="502920"/>
           </a:xfrm>
           <a:prstGeom prst="rect">
             <a:avLst/>
@@ -9015,7 +10103,7 @@
                 <a:ea typeface="Aptos" pitchFamily="34" charset="-122"/>
                 <a:cs typeface="Aptos" pitchFamily="34" charset="-120"/>
               </a:rPr>
-              <a:t>Connect the concept to public health decisions, safeguards, documentation, or implementation work.</a:t>
+              <a:t>Use the assignment to test whether you can explain the concept, apply it to a realistic public health situation, and identify what would need review before the work moves forward.</a:t>
             </a:r>
             <a:endParaRPr lang="en-US" sz="1550" dirty="0"/>
           </a:p>
@@ -9189,8 +10277,8 @@
         </p:nvSpPr>
         <p:spPr>
           <a:xfrm>
-            <a:off x="9966960" y="6537960"/>
-            <a:ext cx="1645920" cy="201168"/>
+            <a:off x="9646920" y="6537960"/>
+            <a:ext cx="1965960" cy="201168"/>
           </a:xfrm>
           <a:prstGeom prst="rect">
             <a:avLst/>
@@ -9214,7 +10302,7 @@
                 <a:ea typeface="Aptos" pitchFamily="34" charset="-122"/>
                 <a:cs typeface="Aptos" pitchFamily="34" charset="-120"/>
               </a:rPr>
-              <a:t>Â© Paula Soper</a:t>
+              <a:t>Copyright Paula Soper</a:t>
             </a:r>
             <a:endParaRPr lang="en-US" sz="800" dirty="0"/>
           </a:p>
@@ -9577,46 +10665,7 @@
       </p:sp>
       <p:sp>
         <p:nvSpPr>
-          <p:cNvPr id="15" name="Text 13"/>
-          <p:cNvSpPr/>
-          <p:nvPr/>
-        </p:nvSpPr>
-        <p:spPr>
-          <a:xfrm>
-            <a:off x="8695944" y="3941064"/>
-            <a:ext cx="201168" cy="256032"/>
-          </a:xfrm>
-          <a:prstGeom prst="rect">
-            <a:avLst/>
-          </a:prstGeom>
-          <a:noFill/>
-          <a:ln/>
-        </p:spPr>
-        <p:txBody>
-          <a:bodyPr wrap="square" lIns="0" tIns="0" rIns="0" bIns="0" rtlCol="0" anchor="ctr"/>
-          <a:lstStyle/>
-          <a:p>
-            <a:pPr algn="ctr" indent="0" marL="0">
-              <a:buNone/>
-            </a:pPr>
-            <a:r>
-              <a:rPr lang="en-US" sz="1800" b="1" dirty="0">
-                <a:solidFill>
-                  <a:srgbClr val="0068B7"/>
-                </a:solidFill>
-                <a:latin typeface="Aptos" pitchFamily="34" charset="0"/>
-                <a:ea typeface="Aptos" pitchFamily="34" charset="-122"/>
-                <a:cs typeface="Aptos" pitchFamily="34" charset="-120"/>
-              </a:rPr>
-              <a:t>â†’</a:t>
-            </a:r>
-            <a:endParaRPr lang="en-US" sz="1800" dirty="0"/>
-          </a:p>
-        </p:txBody>
-      </p:sp>
-      <p:sp>
-        <p:nvSpPr>
-          <p:cNvPr id="16" name="Shape 14"/>
+          <p:cNvPr id="15" name="Shape 13"/>
           <p:cNvSpPr/>
           <p:nvPr/>
         </p:nvSpPr>
@@ -9643,7 +10692,7 @@
       </p:sp>
       <p:sp>
         <p:nvSpPr>
-          <p:cNvPr id="17" name="Text 15"/>
+          <p:cNvPr id="16" name="Text 14"/>
           <p:cNvSpPr/>
           <p:nvPr/>
         </p:nvSpPr>
@@ -9684,46 +10733,7 @@
       </p:sp>
       <p:sp>
         <p:nvSpPr>
-          <p:cNvPr id="18" name="Text 16"/>
-          <p:cNvSpPr/>
-          <p:nvPr/>
-        </p:nvSpPr>
-        <p:spPr>
-          <a:xfrm>
-            <a:off x="9985248" y="3941064"/>
-            <a:ext cx="201168" cy="256032"/>
-          </a:xfrm>
-          <a:prstGeom prst="rect">
-            <a:avLst/>
-          </a:prstGeom>
-          <a:noFill/>
-          <a:ln/>
-        </p:spPr>
-        <p:txBody>
-          <a:bodyPr wrap="square" lIns="0" tIns="0" rIns="0" bIns="0" rtlCol="0" anchor="ctr"/>
-          <a:lstStyle/>
-          <a:p>
-            <a:pPr algn="ctr" indent="0" marL="0">
-              <a:buNone/>
-            </a:pPr>
-            <a:r>
-              <a:rPr lang="en-US" sz="1800" b="1" dirty="0">
-                <a:solidFill>
-                  <a:srgbClr val="0068B7"/>
-                </a:solidFill>
-                <a:latin typeface="Aptos" pitchFamily="34" charset="0"/>
-                <a:ea typeface="Aptos" pitchFamily="34" charset="-122"/>
-                <a:cs typeface="Aptos" pitchFamily="34" charset="-120"/>
-              </a:rPr>
-              <a:t>â†’</a:t>
-            </a:r>
-            <a:endParaRPr lang="en-US" sz="1800" dirty="0"/>
-          </a:p>
-        </p:txBody>
-      </p:sp>
-      <p:sp>
-        <p:nvSpPr>
-          <p:cNvPr id="19" name="Shape 17"/>
+          <p:cNvPr id="17" name="Shape 15"/>
           <p:cNvSpPr/>
           <p:nvPr/>
         </p:nvSpPr>
@@ -9750,7 +10760,7 @@
       </p:sp>
       <p:sp>
         <p:nvSpPr>
-          <p:cNvPr id="20" name="Text 18"/>
+          <p:cNvPr id="18" name="Text 16"/>
           <p:cNvSpPr/>
           <p:nvPr/>
         </p:nvSpPr>
@@ -9957,8 +10967,8 @@
         </p:nvSpPr>
         <p:spPr>
           <a:xfrm>
-            <a:off x="9966960" y="6537960"/>
-            <a:ext cx="1645920" cy="201168"/>
+            <a:off x="9646920" y="6537960"/>
+            <a:ext cx="1965960" cy="201168"/>
           </a:xfrm>
           <a:prstGeom prst="rect">
             <a:avLst/>
@@ -9982,7 +10992,7 @@
                 <a:ea typeface="Aptos" pitchFamily="34" charset="-122"/>
                 <a:cs typeface="Aptos" pitchFamily="34" charset="-120"/>
               </a:rPr>
-              <a:t>Â© Paula Soper</a:t>
+              <a:t>Copyright Paula Soper</a:t>
             </a:r>
             <a:endParaRPr lang="en-US" sz="800" dirty="0"/>
           </a:p>
@@ -10029,77 +11039,13 @@
       </p:sp>
       <p:sp>
         <p:nvSpPr>
-          <p:cNvPr id="8" name="Shape 6"/>
+          <p:cNvPr id="8" name="Text 6"/>
           <p:cNvSpPr/>
           <p:nvPr/>
         </p:nvSpPr>
         <p:spPr>
           <a:xfrm>
             <a:off x="640080" y="658368"/>
-            <a:ext cx="420624" cy="420624"/>
-          </a:xfrm>
-          <a:prstGeom prst="ellipse">
-            <a:avLst/>
-          </a:prstGeom>
-          <a:solidFill>
-            <a:srgbClr val="0068B7"/>
-          </a:solidFill>
-          <a:ln w="12700">
-            <a:solidFill>
-              <a:srgbClr val="0068B7"/>
-            </a:solidFill>
-            <a:prstDash val="solid"/>
-          </a:ln>
-        </p:spPr>
-      </p:sp>
-      <p:sp>
-        <p:nvSpPr>
-          <p:cNvPr id="9" name="Text 7"/>
-          <p:cNvSpPr/>
-          <p:nvPr/>
-        </p:nvSpPr>
-        <p:spPr>
-          <a:xfrm>
-            <a:off x="640080" y="731520"/>
-            <a:ext cx="420624" cy="164592"/>
-          </a:xfrm>
-          <a:prstGeom prst="rect">
-            <a:avLst/>
-          </a:prstGeom>
-          <a:noFill/>
-          <a:ln/>
-        </p:spPr>
-        <p:txBody>
-          <a:bodyPr wrap="square" lIns="0" tIns="0" rIns="0" bIns="0" rtlCol="0" anchor="ctr"/>
-          <a:lstStyle/>
-          <a:p>
-            <a:pPr algn="ctr" indent="0" marL="0">
-              <a:buNone/>
-            </a:pPr>
-            <a:r>
-              <a:rPr lang="en-US" sz="1100" b="1" dirty="0">
-                <a:solidFill>
-                  <a:srgbClr val="FFFFFF"/>
-                </a:solidFill>
-                <a:latin typeface="Aptos" pitchFamily="34" charset="0"/>
-                <a:ea typeface="Aptos" pitchFamily="34" charset="-122"/>
-                <a:cs typeface="Aptos" pitchFamily="34" charset="-120"/>
-              </a:rPr>
-              <a:t>15</a:t>
-            </a:r>
-            <a:endParaRPr lang="en-US" sz="1100" dirty="0"/>
-          </a:p>
-        </p:txBody>
-      </p:sp>
-      <p:sp>
-        <p:nvSpPr>
-          <p:cNvPr id="10" name="Text 8"/>
-          <p:cNvSpPr/>
-          <p:nvPr/>
-        </p:nvSpPr>
-        <p:spPr>
-          <a:xfrm>
-            <a:off x="640080" y="621792"/>
             <a:ext cx="10881360" cy="713232"/>
           </a:xfrm>
           <a:prstGeom prst="rect">
@@ -10134,14 +11080,14 @@
       </p:sp>
       <p:sp>
         <p:nvSpPr>
-          <p:cNvPr id="11" name="Text 9"/>
+          <p:cNvPr id="9" name="Text 7"/>
           <p:cNvSpPr/>
           <p:nvPr/>
         </p:nvSpPr>
         <p:spPr>
           <a:xfrm>
             <a:off x="868680" y="1508760"/>
-            <a:ext cx="6537960" cy="4160520"/>
+            <a:ext cx="6309360" cy="4160520"/>
           </a:xfrm>
           <a:prstGeom prst="rect">
             <a:avLst/>
@@ -10200,18 +11146,18 @@
       </p:sp>
       <p:sp>
         <p:nvSpPr>
-          <p:cNvPr id="12" name="Shape 10"/>
-          <p:cNvSpPr/>
-          <p:nvPr/>
-        </p:nvSpPr>
-        <p:spPr>
-          <a:xfrm>
-            <a:off x="7909560" y="1417320"/>
-            <a:ext cx="3154680" cy="1828800"/>
+          <p:cNvPr id="10" name="Shape 8"/>
+          <p:cNvSpPr/>
+          <p:nvPr/>
+        </p:nvSpPr>
+        <p:spPr>
+          <a:xfrm>
+            <a:off x="7635240" y="1325880"/>
+            <a:ext cx="3474720" cy="1325880"/>
           </a:xfrm>
           <a:prstGeom prst="roundRect">
             <a:avLst>
-              <a:gd name="adj" fmla="val 6000"/>
+              <a:gd name="adj" fmla="val 8276"/>
             </a:avLst>
           </a:prstGeom>
           <a:solidFill>
@@ -10227,14 +11173,14 @@
       </p:sp>
       <p:sp>
         <p:nvSpPr>
-          <p:cNvPr id="13" name="Text 11"/>
-          <p:cNvSpPr/>
-          <p:nvPr/>
-        </p:nvSpPr>
-        <p:spPr>
-          <a:xfrm>
-            <a:off x="8074152" y="1563624"/>
-            <a:ext cx="2825496" cy="256032"/>
+          <p:cNvPr id="11" name="Text 9"/>
+          <p:cNvSpPr/>
+          <p:nvPr/>
+        </p:nvSpPr>
+        <p:spPr>
+          <a:xfrm>
+            <a:off x="7799832" y="1472184"/>
+            <a:ext cx="3145536" cy="256032"/>
           </a:xfrm>
           <a:prstGeom prst="rect">
             <a:avLst/>
@@ -10258,7 +11204,7 @@
                 <a:ea typeface="Aptos" pitchFamily="34" charset="-122"/>
                 <a:cs typeface="Aptos" pitchFamily="34" charset="-120"/>
               </a:rPr>
-              <a:t>Key idea</a:t>
+              <a:t>Core concept</a:t>
             </a:r>
             <a:endParaRPr lang="en-US" sz="1300" dirty="0"/>
           </a:p>
@@ -10266,14 +11212,14 @@
       </p:sp>
       <p:sp>
         <p:nvSpPr>
-          <p:cNvPr id="14" name="Text 12"/>
-          <p:cNvSpPr/>
-          <p:nvPr/>
-        </p:nvSpPr>
-        <p:spPr>
-          <a:xfrm>
-            <a:off x="8074152" y="1920240"/>
-            <a:ext cx="2825496" cy="1188720"/>
+          <p:cNvPr id="12" name="Text 10"/>
+          <p:cNvSpPr/>
+          <p:nvPr/>
+        </p:nvSpPr>
+        <p:spPr>
+          <a:xfrm>
+            <a:off x="7799832" y="1828800"/>
+            <a:ext cx="3145536" cy="685800"/>
           </a:xfrm>
           <a:prstGeom prst="rect">
             <a:avLst/>
@@ -10307,18 +11253,159 @@
       </p:sp>
       <p:sp>
         <p:nvSpPr>
-          <p:cNvPr id="15" name="Shape 13"/>
-          <p:cNvSpPr/>
-          <p:nvPr/>
-        </p:nvSpPr>
-        <p:spPr>
-          <a:xfrm>
-            <a:off x="7909560" y="3520440"/>
-            <a:ext cx="3154680" cy="1737360"/>
+          <p:cNvPr id="13" name="Shape 11"/>
+          <p:cNvSpPr/>
+          <p:nvPr/>
+        </p:nvSpPr>
+        <p:spPr>
+          <a:xfrm>
+            <a:off x="7635240" y="2788920"/>
+            <a:ext cx="3474720" cy="1536192"/>
           </a:xfrm>
           <a:prstGeom prst="roundRect">
             <a:avLst>
-              <a:gd name="adj" fmla="val 6316"/>
+              <a:gd name="adj" fmla="val 7143"/>
+            </a:avLst>
+          </a:prstGeom>
+          <a:solidFill>
+            <a:srgbClr val="FFFFFF">
+              <a:alpha val="88000"/>
+            </a:srgbClr>
+          </a:solidFill>
+          <a:ln w="12700">
+            <a:solidFill>
+              <a:srgbClr val="D6E8F2"/>
+            </a:solidFill>
+            <a:prstDash val="solid"/>
+          </a:ln>
+        </p:spPr>
+      </p:sp>
+      <p:sp>
+        <p:nvSpPr>
+          <p:cNvPr id="14" name="Shape 12"/>
+          <p:cNvSpPr/>
+          <p:nvPr/>
+        </p:nvSpPr>
+        <p:spPr>
+          <a:xfrm>
+            <a:off x="8074152" y="3291840"/>
+            <a:ext cx="2596896" cy="749808"/>
+          </a:xfrm>
+          <a:prstGeom prst="rect">
+            <a:avLst/>
+          </a:prstGeom>
+          <a:solidFill>
+            <a:srgbClr val="EAF6F8"/>
+          </a:solidFill>
+          <a:ln w="12700">
+            <a:solidFill>
+              <a:srgbClr val="8ABBD8"/>
+            </a:solidFill>
+            <a:prstDash val="solid"/>
+          </a:ln>
+        </p:spPr>
+      </p:sp>
+      <p:sp>
+        <p:nvSpPr>
+          <p:cNvPr id="15" name="Shape 13"/>
+          <p:cNvSpPr/>
+          <p:nvPr/>
+        </p:nvSpPr>
+        <p:spPr>
+          <a:xfrm>
+            <a:off x="8202168" y="3721608"/>
+            <a:ext cx="2340864" cy="0"/>
+          </a:xfrm>
+          <a:prstGeom prst="line">
+            <a:avLst/>
+          </a:prstGeom>
+          <a:noFill/>
+          <a:ln w="19050">
+            <a:solidFill>
+              <a:srgbClr val="0068B7"/>
+            </a:solidFill>
+            <a:prstDash val="solid"/>
+          </a:ln>
+        </p:spPr>
+      </p:sp>
+      <p:sp>
+        <p:nvSpPr>
+          <p:cNvPr id="16" name="Shape 14"/>
+          <p:cNvSpPr/>
+          <p:nvPr/>
+        </p:nvSpPr>
+        <p:spPr>
+          <a:xfrm>
+            <a:off x="9198864" y="4206240"/>
+            <a:ext cx="347472" cy="347472"/>
+          </a:xfrm>
+          <a:prstGeom prst="ellipse">
+            <a:avLst/>
+          </a:prstGeom>
+          <a:solidFill>
+            <a:srgbClr val="2F8A28"/>
+          </a:solidFill>
+          <a:ln w="12700">
+            <a:solidFill>
+              <a:srgbClr val="2F8A28"/>
+            </a:solidFill>
+            <a:prstDash val="solid"/>
+          </a:ln>
+        </p:spPr>
+      </p:sp>
+      <p:sp>
+        <p:nvSpPr>
+          <p:cNvPr id="17" name="Text 15"/>
+          <p:cNvSpPr/>
+          <p:nvPr/>
+        </p:nvSpPr>
+        <p:spPr>
+          <a:xfrm>
+            <a:off x="7909560" y="3977640"/>
+            <a:ext cx="2926080" cy="182880"/>
+          </a:xfrm>
+          <a:prstGeom prst="rect">
+            <a:avLst/>
+          </a:prstGeom>
+          <a:noFill/>
+          <a:ln/>
+        </p:spPr>
+        <p:txBody>
+          <a:bodyPr wrap="square" lIns="0" tIns="0" rIns="0" bIns="0" rtlCol="0" anchor="ctr"/>
+          <a:lstStyle/>
+          <a:p>
+            <a:pPr algn="ctr" indent="0" marL="0">
+              <a:buNone/>
+            </a:pPr>
+            <a:r>
+              <a:rPr lang="en-US" sz="1000" dirty="0">
+                <a:solidFill>
+                  <a:srgbClr val="003A63"/>
+                </a:solidFill>
+                <a:latin typeface="Aptos" pitchFamily="34" charset="0"/>
+                <a:ea typeface="Aptos" pitchFamily="34" charset="-122"/>
+                <a:cs typeface="Aptos" pitchFamily="34" charset="-120"/>
+              </a:rPr>
+              <a:t>Concept to action</a:t>
+            </a:r>
+            <a:endParaRPr lang="en-US" sz="1000" dirty="0"/>
+          </a:p>
+        </p:txBody>
+      </p:sp>
+      <p:sp>
+        <p:nvSpPr>
+          <p:cNvPr id="18" name="Shape 16"/>
+          <p:cNvSpPr/>
+          <p:nvPr/>
+        </p:nvSpPr>
+        <p:spPr>
+          <a:xfrm>
+            <a:off x="7635240" y="4498848"/>
+            <a:ext cx="3474720" cy="1143000"/>
+          </a:xfrm>
+          <a:prstGeom prst="roundRect">
+            <a:avLst>
+              <a:gd name="adj" fmla="val 9600"/>
             </a:avLst>
           </a:prstGeom>
           <a:solidFill>
@@ -10334,14 +11421,14 @@
       </p:sp>
       <p:sp>
         <p:nvSpPr>
-          <p:cNvPr id="16" name="Text 14"/>
-          <p:cNvSpPr/>
-          <p:nvPr/>
-        </p:nvSpPr>
-        <p:spPr>
-          <a:xfrm>
-            <a:off x="8074152" y="3666744"/>
-            <a:ext cx="2825496" cy="256032"/>
+          <p:cNvPr id="19" name="Text 17"/>
+          <p:cNvSpPr/>
+          <p:nvPr/>
+        </p:nvSpPr>
+        <p:spPr>
+          <a:xfrm>
+            <a:off x="7799832" y="4645152"/>
+            <a:ext cx="3145536" cy="256032"/>
           </a:xfrm>
           <a:prstGeom prst="rect">
             <a:avLst/>
@@ -10365,7 +11452,7 @@
                 <a:ea typeface="Aptos" pitchFamily="34" charset="-122"/>
                 <a:cs typeface="Aptos" pitchFamily="34" charset="-120"/>
               </a:rPr>
-              <a:t>Use this for</a:t>
+              <a:t>Apply it</a:t>
             </a:r>
             <a:endParaRPr lang="en-US" sz="1300" dirty="0"/>
           </a:p>
@@ -10373,14 +11460,14 @@
       </p:sp>
       <p:sp>
         <p:nvSpPr>
-          <p:cNvPr id="17" name="Text 15"/>
-          <p:cNvSpPr/>
-          <p:nvPr/>
-        </p:nvSpPr>
-        <p:spPr>
-          <a:xfrm>
-            <a:off x="8074152" y="4023360"/>
-            <a:ext cx="2825496" cy="1097280"/>
+          <p:cNvPr id="20" name="Text 18"/>
+          <p:cNvSpPr/>
+          <p:nvPr/>
+        </p:nvSpPr>
+        <p:spPr>
+          <a:xfrm>
+            <a:off x="7799832" y="5001768"/>
+            <a:ext cx="3145536" cy="502920"/>
           </a:xfrm>
           <a:prstGeom prst="rect">
             <a:avLst/>
@@ -10406,7 +11493,7 @@
                 <a:ea typeface="Aptos" pitchFamily="34" charset="-122"/>
                 <a:cs typeface="Aptos" pitchFamily="34" charset="-120"/>
               </a:rPr>
-              <a:t>Connect the concept to public health decisions, safeguards, documentation, or implementation work.</a:t>
+              <a:t>Connect the concept to public health purpose, responsible use, required safeguards, documentation, and the next action a department should take.</a:t>
             </a:r>
             <a:endParaRPr lang="en-US" sz="1550" dirty="0"/>
           </a:p>
@@ -10580,8 +11667,8 @@
         </p:nvSpPr>
         <p:spPr>
           <a:xfrm>
-            <a:off x="9966960" y="6537960"/>
-            <a:ext cx="1645920" cy="201168"/>
+            <a:off x="9646920" y="6537960"/>
+            <a:ext cx="1965960" cy="201168"/>
           </a:xfrm>
           <a:prstGeom prst="rect">
             <a:avLst/>
@@ -10605,7 +11692,7 @@
                 <a:ea typeface="Aptos" pitchFamily="34" charset="-122"/>
                 <a:cs typeface="Aptos" pitchFamily="34" charset="-120"/>
               </a:rPr>
-              <a:t>Â© Paula Soper</a:t>
+              <a:t>Copyright Paula Soper</a:t>
             </a:r>
             <a:endParaRPr lang="en-US" sz="800" dirty="0"/>
           </a:p>
@@ -10700,7 +11787,7 @@
         <p:spPr>
           <a:xfrm>
             <a:off x="868680" y="1508760"/>
-            <a:ext cx="6537960" cy="4160520"/>
+            <a:ext cx="6309360" cy="4160520"/>
           </a:xfrm>
           <a:prstGeom prst="rect">
             <a:avLst/>
@@ -10751,12 +11838,12 @@
         </p:nvSpPr>
         <p:spPr>
           <a:xfrm>
-            <a:off x="7909560" y="1417320"/>
-            <a:ext cx="3154680" cy="1828800"/>
+            <a:off x="7635240" y="1325880"/>
+            <a:ext cx="3474720" cy="1325880"/>
           </a:xfrm>
           <a:prstGeom prst="roundRect">
             <a:avLst>
-              <a:gd name="adj" fmla="val 6000"/>
+              <a:gd name="adj" fmla="val 8276"/>
             </a:avLst>
           </a:prstGeom>
           <a:solidFill>
@@ -10778,8 +11865,8 @@
         </p:nvSpPr>
         <p:spPr>
           <a:xfrm>
-            <a:off x="8074152" y="1563624"/>
-            <a:ext cx="2825496" cy="256032"/>
+            <a:off x="7799832" y="1472184"/>
+            <a:ext cx="3145536" cy="256032"/>
           </a:xfrm>
           <a:prstGeom prst="rect">
             <a:avLst/>
@@ -10803,7 +11890,7 @@
                 <a:ea typeface="Aptos" pitchFamily="34" charset="-122"/>
                 <a:cs typeface="Aptos" pitchFamily="34" charset="-120"/>
               </a:rPr>
-              <a:t>Key idea</a:t>
+              <a:t>Core concept</a:t>
             </a:r>
             <a:endParaRPr lang="en-US" sz="1300" dirty="0"/>
           </a:p>
@@ -10817,8 +11904,8 @@
         </p:nvSpPr>
         <p:spPr>
           <a:xfrm>
-            <a:off x="8074152" y="1920240"/>
-            <a:ext cx="2825496" cy="1188720"/>
+            <a:off x="7799832" y="1828800"/>
+            <a:ext cx="3145536" cy="685800"/>
           </a:xfrm>
           <a:prstGeom prst="rect">
             <a:avLst/>
@@ -10858,12 +11945,153 @@
         </p:nvSpPr>
         <p:spPr>
           <a:xfrm>
-            <a:off x="7909560" y="3520440"/>
-            <a:ext cx="3154680" cy="1737360"/>
+            <a:off x="7635240" y="2788920"/>
+            <a:ext cx="3474720" cy="1536192"/>
           </a:xfrm>
           <a:prstGeom prst="roundRect">
             <a:avLst>
-              <a:gd name="adj" fmla="val 6316"/>
+              <a:gd name="adj" fmla="val 7143"/>
+            </a:avLst>
+          </a:prstGeom>
+          <a:solidFill>
+            <a:srgbClr val="FFFFFF">
+              <a:alpha val="88000"/>
+            </a:srgbClr>
+          </a:solidFill>
+          <a:ln w="12700">
+            <a:solidFill>
+              <a:srgbClr val="D6E8F2"/>
+            </a:solidFill>
+            <a:prstDash val="solid"/>
+          </a:ln>
+        </p:spPr>
+      </p:sp>
+      <p:sp>
+        <p:nvSpPr>
+          <p:cNvPr id="14" name="Shape 12"/>
+          <p:cNvSpPr/>
+          <p:nvPr/>
+        </p:nvSpPr>
+        <p:spPr>
+          <a:xfrm>
+            <a:off x="8074152" y="3291840"/>
+            <a:ext cx="2596896" cy="749808"/>
+          </a:xfrm>
+          <a:prstGeom prst="rect">
+            <a:avLst/>
+          </a:prstGeom>
+          <a:solidFill>
+            <a:srgbClr val="EAF6F8"/>
+          </a:solidFill>
+          <a:ln w="12700">
+            <a:solidFill>
+              <a:srgbClr val="8ABBD8"/>
+            </a:solidFill>
+            <a:prstDash val="solid"/>
+          </a:ln>
+        </p:spPr>
+      </p:sp>
+      <p:sp>
+        <p:nvSpPr>
+          <p:cNvPr id="15" name="Shape 13"/>
+          <p:cNvSpPr/>
+          <p:nvPr/>
+        </p:nvSpPr>
+        <p:spPr>
+          <a:xfrm>
+            <a:off x="8202168" y="3721608"/>
+            <a:ext cx="2340864" cy="0"/>
+          </a:xfrm>
+          <a:prstGeom prst="line">
+            <a:avLst/>
+          </a:prstGeom>
+          <a:noFill/>
+          <a:ln w="19050">
+            <a:solidFill>
+              <a:srgbClr val="0068B7"/>
+            </a:solidFill>
+            <a:prstDash val="solid"/>
+          </a:ln>
+        </p:spPr>
+      </p:sp>
+      <p:sp>
+        <p:nvSpPr>
+          <p:cNvPr id="16" name="Shape 14"/>
+          <p:cNvSpPr/>
+          <p:nvPr/>
+        </p:nvSpPr>
+        <p:spPr>
+          <a:xfrm>
+            <a:off x="9198864" y="4206240"/>
+            <a:ext cx="347472" cy="347472"/>
+          </a:xfrm>
+          <a:prstGeom prst="ellipse">
+            <a:avLst/>
+          </a:prstGeom>
+          <a:solidFill>
+            <a:srgbClr val="2F8A28"/>
+          </a:solidFill>
+          <a:ln w="12700">
+            <a:solidFill>
+              <a:srgbClr val="2F8A28"/>
+            </a:solidFill>
+            <a:prstDash val="solid"/>
+          </a:ln>
+        </p:spPr>
+      </p:sp>
+      <p:sp>
+        <p:nvSpPr>
+          <p:cNvPr id="17" name="Text 15"/>
+          <p:cNvSpPr/>
+          <p:nvPr/>
+        </p:nvSpPr>
+        <p:spPr>
+          <a:xfrm>
+            <a:off x="7909560" y="3977640"/>
+            <a:ext cx="2926080" cy="182880"/>
+          </a:xfrm>
+          <a:prstGeom prst="rect">
+            <a:avLst/>
+          </a:prstGeom>
+          <a:noFill/>
+          <a:ln/>
+        </p:spPr>
+        <p:txBody>
+          <a:bodyPr wrap="square" lIns="0" tIns="0" rIns="0" bIns="0" rtlCol="0" anchor="ctr"/>
+          <a:lstStyle/>
+          <a:p>
+            <a:pPr algn="ctr" indent="0" marL="0">
+              <a:buNone/>
+            </a:pPr>
+            <a:r>
+              <a:rPr lang="en-US" sz="1000" dirty="0">
+                <a:solidFill>
+                  <a:srgbClr val="003A63"/>
+                </a:solidFill>
+                <a:latin typeface="Aptos" pitchFamily="34" charset="0"/>
+                <a:ea typeface="Aptos" pitchFamily="34" charset="-122"/>
+                <a:cs typeface="Aptos" pitchFamily="34" charset="-120"/>
+              </a:rPr>
+              <a:t>Concept to action</a:t>
+            </a:r>
+            <a:endParaRPr lang="en-US" sz="1000" dirty="0"/>
+          </a:p>
+        </p:txBody>
+      </p:sp>
+      <p:sp>
+        <p:nvSpPr>
+          <p:cNvPr id="18" name="Shape 16"/>
+          <p:cNvSpPr/>
+          <p:nvPr/>
+        </p:nvSpPr>
+        <p:spPr>
+          <a:xfrm>
+            <a:off x="7635240" y="4498848"/>
+            <a:ext cx="3474720" cy="1143000"/>
+          </a:xfrm>
+          <a:prstGeom prst="roundRect">
+            <a:avLst>
+              <a:gd name="adj" fmla="val 9600"/>
             </a:avLst>
           </a:prstGeom>
           <a:solidFill>
@@ -10879,14 +12107,14 @@
       </p:sp>
       <p:sp>
         <p:nvSpPr>
-          <p:cNvPr id="14" name="Text 12"/>
-          <p:cNvSpPr/>
-          <p:nvPr/>
-        </p:nvSpPr>
-        <p:spPr>
-          <a:xfrm>
-            <a:off x="8074152" y="3666744"/>
-            <a:ext cx="2825496" cy="256032"/>
+          <p:cNvPr id="19" name="Text 17"/>
+          <p:cNvSpPr/>
+          <p:nvPr/>
+        </p:nvSpPr>
+        <p:spPr>
+          <a:xfrm>
+            <a:off x="7799832" y="4645152"/>
+            <a:ext cx="3145536" cy="256032"/>
           </a:xfrm>
           <a:prstGeom prst="rect">
             <a:avLst/>
@@ -10910,7 +12138,7 @@
                 <a:ea typeface="Aptos" pitchFamily="34" charset="-122"/>
                 <a:cs typeface="Aptos" pitchFamily="34" charset="-120"/>
               </a:rPr>
-              <a:t>Use this for</a:t>
+              <a:t>Apply it</a:t>
             </a:r>
             <a:endParaRPr lang="en-US" sz="1300" dirty="0"/>
           </a:p>
@@ -10918,14 +12146,14 @@
       </p:sp>
       <p:sp>
         <p:nvSpPr>
-          <p:cNvPr id="15" name="Text 13"/>
-          <p:cNvSpPr/>
-          <p:nvPr/>
-        </p:nvSpPr>
-        <p:spPr>
-          <a:xfrm>
-            <a:off x="8074152" y="4023360"/>
-            <a:ext cx="2825496" cy="1097280"/>
+          <p:cNvPr id="20" name="Text 18"/>
+          <p:cNvSpPr/>
+          <p:nvPr/>
+        </p:nvSpPr>
+        <p:spPr>
+          <a:xfrm>
+            <a:off x="7799832" y="5001768"/>
+            <a:ext cx="3145536" cy="502920"/>
           </a:xfrm>
           <a:prstGeom prst="rect">
             <a:avLst/>
@@ -10951,7 +12179,7 @@
                 <a:ea typeface="Aptos" pitchFamily="34" charset="-122"/>
                 <a:cs typeface="Aptos" pitchFamily="34" charset="-120"/>
               </a:rPr>
-              <a:t>Connect the concept to public health decisions, safeguards, documentation, or implementation work.</a:t>
+              <a:t>Connect the concept to public health purpose, responsible use, required safeguards, documentation, and the next action a department should take.</a:t>
             </a:r>
             <a:endParaRPr lang="en-US" sz="1550" dirty="0"/>
           </a:p>
@@ -11125,8 +12353,8 @@
         </p:nvSpPr>
         <p:spPr>
           <a:xfrm>
-            <a:off x="9966960" y="6537960"/>
-            <a:ext cx="1645920" cy="201168"/>
+            <a:off x="9646920" y="6537960"/>
+            <a:ext cx="1965960" cy="201168"/>
           </a:xfrm>
           <a:prstGeom prst="rect">
             <a:avLst/>
@@ -11150,7 +12378,7 @@
                 <a:ea typeface="Aptos" pitchFamily="34" charset="-122"/>
                 <a:cs typeface="Aptos" pitchFamily="34" charset="-120"/>
               </a:rPr>
-              <a:t>Â© Paula Soper</a:t>
+              <a:t>Copyright Paula Soper</a:t>
             </a:r>
             <a:endParaRPr lang="en-US" sz="800" dirty="0"/>
           </a:p>
@@ -11493,46 +12721,7 @@
       </p:sp>
       <p:sp>
         <p:nvSpPr>
-          <p:cNvPr id="15" name="Text 13"/>
-          <p:cNvSpPr/>
-          <p:nvPr/>
-        </p:nvSpPr>
-        <p:spPr>
-          <a:xfrm>
-            <a:off x="8817864" y="4187952"/>
-            <a:ext cx="201168" cy="256032"/>
-          </a:xfrm>
-          <a:prstGeom prst="rect">
-            <a:avLst/>
-          </a:prstGeom>
-          <a:noFill/>
-          <a:ln/>
-        </p:spPr>
-        <p:txBody>
-          <a:bodyPr wrap="square" lIns="0" tIns="0" rIns="0" bIns="0" rtlCol="0" anchor="ctr"/>
-          <a:lstStyle/>
-          <a:p>
-            <a:pPr algn="ctr" indent="0" marL="0">
-              <a:buNone/>
-            </a:pPr>
-            <a:r>
-              <a:rPr lang="en-US" sz="1800" b="1" dirty="0">
-                <a:solidFill>
-                  <a:srgbClr val="0068B7"/>
-                </a:solidFill>
-                <a:latin typeface="Aptos" pitchFamily="34" charset="0"/>
-                <a:ea typeface="Aptos" pitchFamily="34" charset="-122"/>
-                <a:cs typeface="Aptos" pitchFamily="34" charset="-120"/>
-              </a:rPr>
-              <a:t>â†’</a:t>
-            </a:r>
-            <a:endParaRPr lang="en-US" sz="1800" dirty="0"/>
-          </a:p>
-        </p:txBody>
-      </p:sp>
-      <p:sp>
-        <p:nvSpPr>
-          <p:cNvPr id="16" name="Shape 14"/>
+          <p:cNvPr id="15" name="Shape 13"/>
           <p:cNvSpPr/>
           <p:nvPr/>
         </p:nvSpPr>
@@ -11559,7 +12748,7 @@
       </p:sp>
       <p:sp>
         <p:nvSpPr>
-          <p:cNvPr id="17" name="Text 15"/>
+          <p:cNvPr id="16" name="Text 14"/>
           <p:cNvSpPr/>
           <p:nvPr/>
         </p:nvSpPr>
@@ -11600,46 +12789,7 @@
       </p:sp>
       <p:sp>
         <p:nvSpPr>
-          <p:cNvPr id="18" name="Text 16"/>
-          <p:cNvSpPr/>
-          <p:nvPr/>
-        </p:nvSpPr>
-        <p:spPr>
-          <a:xfrm>
-            <a:off x="10046208" y="4187952"/>
-            <a:ext cx="201168" cy="256032"/>
-          </a:xfrm>
-          <a:prstGeom prst="rect">
-            <a:avLst/>
-          </a:prstGeom>
-          <a:noFill/>
-          <a:ln/>
-        </p:spPr>
-        <p:txBody>
-          <a:bodyPr wrap="square" lIns="0" tIns="0" rIns="0" bIns="0" rtlCol="0" anchor="ctr"/>
-          <a:lstStyle/>
-          <a:p>
-            <a:pPr algn="ctr" indent="0" marL="0">
-              <a:buNone/>
-            </a:pPr>
-            <a:r>
-              <a:rPr lang="en-US" sz="1800" b="1" dirty="0">
-                <a:solidFill>
-                  <a:srgbClr val="0068B7"/>
-                </a:solidFill>
-                <a:latin typeface="Aptos" pitchFamily="34" charset="0"/>
-                <a:ea typeface="Aptos" pitchFamily="34" charset="-122"/>
-                <a:cs typeface="Aptos" pitchFamily="34" charset="-120"/>
-              </a:rPr>
-              <a:t>â†’</a:t>
-            </a:r>
-            <a:endParaRPr lang="en-US" sz="1800" dirty="0"/>
-          </a:p>
-        </p:txBody>
-      </p:sp>
-      <p:sp>
-        <p:nvSpPr>
-          <p:cNvPr id="19" name="Shape 17"/>
+          <p:cNvPr id="17" name="Shape 15"/>
           <p:cNvSpPr/>
           <p:nvPr/>
         </p:nvSpPr>
@@ -11666,7 +12816,7 @@
       </p:sp>
       <p:sp>
         <p:nvSpPr>
-          <p:cNvPr id="20" name="Text 18"/>
+          <p:cNvPr id="18" name="Text 16"/>
           <p:cNvSpPr/>
           <p:nvPr/>
         </p:nvSpPr>
@@ -11873,8 +13023,8 @@
         </p:nvSpPr>
         <p:spPr>
           <a:xfrm>
-            <a:off x="9966960" y="6537960"/>
-            <a:ext cx="1645920" cy="201168"/>
+            <a:off x="9646920" y="6537960"/>
+            <a:ext cx="1965960" cy="201168"/>
           </a:xfrm>
           <a:prstGeom prst="rect">
             <a:avLst/>
@@ -11898,7 +13048,7 @@
                 <a:ea typeface="Aptos" pitchFamily="34" charset="-122"/>
                 <a:cs typeface="Aptos" pitchFamily="34" charset="-120"/>
               </a:rPr>
-              <a:t>Â© Paula Soper</a:t>
+              <a:t>Copyright Paula Soper</a:t>
             </a:r>
             <a:endParaRPr lang="en-US" sz="800" dirty="0"/>
           </a:p>
@@ -12241,46 +13391,7 @@
       </p:sp>
       <p:sp>
         <p:nvSpPr>
-          <p:cNvPr id="15" name="Text 13"/>
-          <p:cNvSpPr/>
-          <p:nvPr/>
-        </p:nvSpPr>
-        <p:spPr>
-          <a:xfrm>
-            <a:off x="8817864" y="4187952"/>
-            <a:ext cx="201168" cy="256032"/>
-          </a:xfrm>
-          <a:prstGeom prst="rect">
-            <a:avLst/>
-          </a:prstGeom>
-          <a:noFill/>
-          <a:ln/>
-        </p:spPr>
-        <p:txBody>
-          <a:bodyPr wrap="square" lIns="0" tIns="0" rIns="0" bIns="0" rtlCol="0" anchor="ctr"/>
-          <a:lstStyle/>
-          <a:p>
-            <a:pPr algn="ctr" indent="0" marL="0">
-              <a:buNone/>
-            </a:pPr>
-            <a:r>
-              <a:rPr lang="en-US" sz="1800" b="1" dirty="0">
-                <a:solidFill>
-                  <a:srgbClr val="0068B7"/>
-                </a:solidFill>
-                <a:latin typeface="Aptos" pitchFamily="34" charset="0"/>
-                <a:ea typeface="Aptos" pitchFamily="34" charset="-122"/>
-                <a:cs typeface="Aptos" pitchFamily="34" charset="-120"/>
-              </a:rPr>
-              <a:t>â†’</a:t>
-            </a:r>
-            <a:endParaRPr lang="en-US" sz="1800" dirty="0"/>
-          </a:p>
-        </p:txBody>
-      </p:sp>
-      <p:sp>
-        <p:nvSpPr>
-          <p:cNvPr id="16" name="Shape 14"/>
+          <p:cNvPr id="15" name="Shape 13"/>
           <p:cNvSpPr/>
           <p:nvPr/>
         </p:nvSpPr>
@@ -12307,7 +13418,7 @@
       </p:sp>
       <p:sp>
         <p:nvSpPr>
-          <p:cNvPr id="17" name="Text 15"/>
+          <p:cNvPr id="16" name="Text 14"/>
           <p:cNvSpPr/>
           <p:nvPr/>
         </p:nvSpPr>
@@ -12348,46 +13459,7 @@
       </p:sp>
       <p:sp>
         <p:nvSpPr>
-          <p:cNvPr id="18" name="Text 16"/>
-          <p:cNvSpPr/>
-          <p:nvPr/>
-        </p:nvSpPr>
-        <p:spPr>
-          <a:xfrm>
-            <a:off x="10046208" y="4187952"/>
-            <a:ext cx="201168" cy="256032"/>
-          </a:xfrm>
-          <a:prstGeom prst="rect">
-            <a:avLst/>
-          </a:prstGeom>
-          <a:noFill/>
-          <a:ln/>
-        </p:spPr>
-        <p:txBody>
-          <a:bodyPr wrap="square" lIns="0" tIns="0" rIns="0" bIns="0" rtlCol="0" anchor="ctr"/>
-          <a:lstStyle/>
-          <a:p>
-            <a:pPr algn="ctr" indent="0" marL="0">
-              <a:buNone/>
-            </a:pPr>
-            <a:r>
-              <a:rPr lang="en-US" sz="1800" b="1" dirty="0">
-                <a:solidFill>
-                  <a:srgbClr val="0068B7"/>
-                </a:solidFill>
-                <a:latin typeface="Aptos" pitchFamily="34" charset="0"/>
-                <a:ea typeface="Aptos" pitchFamily="34" charset="-122"/>
-                <a:cs typeface="Aptos" pitchFamily="34" charset="-120"/>
-              </a:rPr>
-              <a:t>â†’</a:t>
-            </a:r>
-            <a:endParaRPr lang="en-US" sz="1800" dirty="0"/>
-          </a:p>
-        </p:txBody>
-      </p:sp>
-      <p:sp>
-        <p:nvSpPr>
-          <p:cNvPr id="19" name="Shape 17"/>
+          <p:cNvPr id="17" name="Shape 15"/>
           <p:cNvSpPr/>
           <p:nvPr/>
         </p:nvSpPr>
@@ -12414,7 +13486,7 @@
       </p:sp>
       <p:sp>
         <p:nvSpPr>
-          <p:cNvPr id="20" name="Text 18"/>
+          <p:cNvPr id="18" name="Text 16"/>
           <p:cNvSpPr/>
           <p:nvPr/>
         </p:nvSpPr>
@@ -12621,8 +13693,8 @@
         </p:nvSpPr>
         <p:spPr>
           <a:xfrm>
-            <a:off x="9966960" y="6537960"/>
-            <a:ext cx="1645920" cy="201168"/>
+            <a:off x="9646920" y="6537960"/>
+            <a:ext cx="1965960" cy="201168"/>
           </a:xfrm>
           <a:prstGeom prst="rect">
             <a:avLst/>
@@ -12646,7 +13718,7 @@
                 <a:ea typeface="Aptos" pitchFamily="34" charset="-122"/>
                 <a:cs typeface="Aptos" pitchFamily="34" charset="-120"/>
               </a:rPr>
-              <a:t>Â© Paula Soper</a:t>
+              <a:t>Copyright Paula Soper</a:t>
             </a:r>
             <a:endParaRPr lang="en-US" sz="800" dirty="0"/>
           </a:p>
@@ -12693,77 +13765,13 @@
       </p:sp>
       <p:sp>
         <p:nvSpPr>
-          <p:cNvPr id="8" name="Shape 6"/>
+          <p:cNvPr id="8" name="Text 6"/>
           <p:cNvSpPr/>
           <p:nvPr/>
         </p:nvSpPr>
         <p:spPr>
           <a:xfrm>
             <a:off x="640080" y="658368"/>
-            <a:ext cx="420624" cy="420624"/>
-          </a:xfrm>
-          <a:prstGeom prst="ellipse">
-            <a:avLst/>
-          </a:prstGeom>
-          <a:solidFill>
-            <a:srgbClr val="0068B7"/>
-          </a:solidFill>
-          <a:ln w="12700">
-            <a:solidFill>
-              <a:srgbClr val="0068B7"/>
-            </a:solidFill>
-            <a:prstDash val="solid"/>
-          </a:ln>
-        </p:spPr>
-      </p:sp>
-      <p:sp>
-        <p:nvSpPr>
-          <p:cNvPr id="9" name="Text 7"/>
-          <p:cNvSpPr/>
-          <p:nvPr/>
-        </p:nvSpPr>
-        <p:spPr>
-          <a:xfrm>
-            <a:off x="640080" y="731520"/>
-            <a:ext cx="420624" cy="164592"/>
-          </a:xfrm>
-          <a:prstGeom prst="rect">
-            <a:avLst/>
-          </a:prstGeom>
-          <a:noFill/>
-          <a:ln/>
-        </p:spPr>
-        <p:txBody>
-          <a:bodyPr wrap="square" lIns="0" tIns="0" rIns="0" bIns="0" rtlCol="0" anchor="ctr"/>
-          <a:lstStyle/>
-          <a:p>
-            <a:pPr algn="ctr" indent="0" marL="0">
-              <a:buNone/>
-            </a:pPr>
-            <a:r>
-              <a:rPr lang="en-US" sz="1100" b="1" dirty="0">
-                <a:solidFill>
-                  <a:srgbClr val="FFFFFF"/>
-                </a:solidFill>
-                <a:latin typeface="Aptos" pitchFamily="34" charset="0"/>
-                <a:ea typeface="Aptos" pitchFamily="34" charset="-122"/>
-                <a:cs typeface="Aptos" pitchFamily="34" charset="-120"/>
-              </a:rPr>
-              <a:t>1</a:t>
-            </a:r>
-            <a:endParaRPr lang="en-US" sz="1100" dirty="0"/>
-          </a:p>
-        </p:txBody>
-      </p:sp>
-      <p:sp>
-        <p:nvSpPr>
-          <p:cNvPr id="10" name="Text 8"/>
-          <p:cNvSpPr/>
-          <p:nvPr/>
-        </p:nvSpPr>
-        <p:spPr>
-          <a:xfrm>
-            <a:off x="640080" y="621792"/>
             <a:ext cx="10881360" cy="713232"/>
           </a:xfrm>
           <a:prstGeom prst="rect">
@@ -12798,14 +13806,14 @@
       </p:sp>
       <p:sp>
         <p:nvSpPr>
-          <p:cNvPr id="11" name="Text 9"/>
+          <p:cNvPr id="9" name="Text 7"/>
           <p:cNvSpPr/>
           <p:nvPr/>
         </p:nvSpPr>
         <p:spPr>
           <a:xfrm>
             <a:off x="868680" y="1508760"/>
-            <a:ext cx="6537960" cy="4160520"/>
+            <a:ext cx="6309360" cy="4160520"/>
           </a:xfrm>
           <a:prstGeom prst="rect">
             <a:avLst/>
@@ -12864,18 +13872,18 @@
       </p:sp>
       <p:sp>
         <p:nvSpPr>
-          <p:cNvPr id="12" name="Shape 10"/>
-          <p:cNvSpPr/>
-          <p:nvPr/>
-        </p:nvSpPr>
-        <p:spPr>
-          <a:xfrm>
-            <a:off x="7909560" y="1417320"/>
-            <a:ext cx="3154680" cy="1828800"/>
+          <p:cNvPr id="10" name="Shape 8"/>
+          <p:cNvSpPr/>
+          <p:nvPr/>
+        </p:nvSpPr>
+        <p:spPr>
+          <a:xfrm>
+            <a:off x="7635240" y="1325880"/>
+            <a:ext cx="3474720" cy="1325880"/>
           </a:xfrm>
           <a:prstGeom prst="roundRect">
             <a:avLst>
-              <a:gd name="adj" fmla="val 6000"/>
+              <a:gd name="adj" fmla="val 8276"/>
             </a:avLst>
           </a:prstGeom>
           <a:solidFill>
@@ -12891,14 +13899,14 @@
       </p:sp>
       <p:sp>
         <p:nvSpPr>
-          <p:cNvPr id="13" name="Text 11"/>
-          <p:cNvSpPr/>
-          <p:nvPr/>
-        </p:nvSpPr>
-        <p:spPr>
-          <a:xfrm>
-            <a:off x="8074152" y="1563624"/>
-            <a:ext cx="2825496" cy="256032"/>
+          <p:cNvPr id="11" name="Text 9"/>
+          <p:cNvSpPr/>
+          <p:nvPr/>
+        </p:nvSpPr>
+        <p:spPr>
+          <a:xfrm>
+            <a:off x="7799832" y="1472184"/>
+            <a:ext cx="3145536" cy="256032"/>
           </a:xfrm>
           <a:prstGeom prst="rect">
             <a:avLst/>
@@ -12922,7 +13930,7 @@
                 <a:ea typeface="Aptos" pitchFamily="34" charset="-122"/>
                 <a:cs typeface="Aptos" pitchFamily="34" charset="-120"/>
               </a:rPr>
-              <a:t>Key idea</a:t>
+              <a:t>Practice focus</a:t>
             </a:r>
             <a:endParaRPr lang="en-US" sz="1300" dirty="0"/>
           </a:p>
@@ -12930,14 +13938,14 @@
       </p:sp>
       <p:sp>
         <p:nvSpPr>
-          <p:cNvPr id="14" name="Text 12"/>
-          <p:cNvSpPr/>
-          <p:nvPr/>
-        </p:nvSpPr>
-        <p:spPr>
-          <a:xfrm>
-            <a:off x="8074152" y="1920240"/>
-            <a:ext cx="2825496" cy="1188720"/>
+          <p:cNvPr id="12" name="Text 10"/>
+          <p:cNvSpPr/>
+          <p:nvPr/>
+        </p:nvSpPr>
+        <p:spPr>
+          <a:xfrm>
+            <a:off x="7799832" y="1828800"/>
+            <a:ext cx="3145536" cy="685800"/>
           </a:xfrm>
           <a:prstGeom prst="rect">
             <a:avLst/>
@@ -12971,18 +13979,159 @@
       </p:sp>
       <p:sp>
         <p:nvSpPr>
-          <p:cNvPr id="15" name="Shape 13"/>
-          <p:cNvSpPr/>
-          <p:nvPr/>
-        </p:nvSpPr>
-        <p:spPr>
-          <a:xfrm>
-            <a:off x="7909560" y="3520440"/>
-            <a:ext cx="3154680" cy="1737360"/>
+          <p:cNvPr id="13" name="Shape 11"/>
+          <p:cNvSpPr/>
+          <p:nvPr/>
+        </p:nvSpPr>
+        <p:spPr>
+          <a:xfrm>
+            <a:off x="7635240" y="2788920"/>
+            <a:ext cx="3474720" cy="1536192"/>
           </a:xfrm>
           <a:prstGeom prst="roundRect">
             <a:avLst>
-              <a:gd name="adj" fmla="val 6316"/>
+              <a:gd name="adj" fmla="val 7143"/>
+            </a:avLst>
+          </a:prstGeom>
+          <a:solidFill>
+            <a:srgbClr val="FFFFFF">
+              <a:alpha val="88000"/>
+            </a:srgbClr>
+          </a:solidFill>
+          <a:ln w="12700">
+            <a:solidFill>
+              <a:srgbClr val="D6E8F2"/>
+            </a:solidFill>
+            <a:prstDash val="solid"/>
+          </a:ln>
+        </p:spPr>
+      </p:sp>
+      <p:sp>
+        <p:nvSpPr>
+          <p:cNvPr id="14" name="Shape 12"/>
+          <p:cNvSpPr/>
+          <p:nvPr/>
+        </p:nvSpPr>
+        <p:spPr>
+          <a:xfrm>
+            <a:off x="8074152" y="3291840"/>
+            <a:ext cx="2596896" cy="749808"/>
+          </a:xfrm>
+          <a:prstGeom prst="rect">
+            <a:avLst/>
+          </a:prstGeom>
+          <a:solidFill>
+            <a:srgbClr val="EAF6F8"/>
+          </a:solidFill>
+          <a:ln w="12700">
+            <a:solidFill>
+              <a:srgbClr val="8ABBD8"/>
+            </a:solidFill>
+            <a:prstDash val="solid"/>
+          </a:ln>
+        </p:spPr>
+      </p:sp>
+      <p:sp>
+        <p:nvSpPr>
+          <p:cNvPr id="15" name="Shape 13"/>
+          <p:cNvSpPr/>
+          <p:nvPr/>
+        </p:nvSpPr>
+        <p:spPr>
+          <a:xfrm>
+            <a:off x="8202168" y="3721608"/>
+            <a:ext cx="2340864" cy="0"/>
+          </a:xfrm>
+          <a:prstGeom prst="line">
+            <a:avLst/>
+          </a:prstGeom>
+          <a:noFill/>
+          <a:ln w="19050">
+            <a:solidFill>
+              <a:srgbClr val="0068B7"/>
+            </a:solidFill>
+            <a:prstDash val="solid"/>
+          </a:ln>
+        </p:spPr>
+      </p:sp>
+      <p:sp>
+        <p:nvSpPr>
+          <p:cNvPr id="16" name="Shape 14"/>
+          <p:cNvSpPr/>
+          <p:nvPr/>
+        </p:nvSpPr>
+        <p:spPr>
+          <a:xfrm>
+            <a:off x="9198864" y="4206240"/>
+            <a:ext cx="347472" cy="347472"/>
+          </a:xfrm>
+          <a:prstGeom prst="ellipse">
+            <a:avLst/>
+          </a:prstGeom>
+          <a:solidFill>
+            <a:srgbClr val="2F8A28"/>
+          </a:solidFill>
+          <a:ln w="12700">
+            <a:solidFill>
+              <a:srgbClr val="2F8A28"/>
+            </a:solidFill>
+            <a:prstDash val="solid"/>
+          </a:ln>
+        </p:spPr>
+      </p:sp>
+      <p:sp>
+        <p:nvSpPr>
+          <p:cNvPr id="17" name="Text 15"/>
+          <p:cNvSpPr/>
+          <p:nvPr/>
+        </p:nvSpPr>
+        <p:spPr>
+          <a:xfrm>
+            <a:off x="7909560" y="3977640"/>
+            <a:ext cx="2926080" cy="182880"/>
+          </a:xfrm>
+          <a:prstGeom prst="rect">
+            <a:avLst/>
+          </a:prstGeom>
+          <a:noFill/>
+          <a:ln/>
+        </p:spPr>
+        <p:txBody>
+          <a:bodyPr wrap="square" lIns="0" tIns="0" rIns="0" bIns="0" rtlCol="0" anchor="ctr"/>
+          <a:lstStyle/>
+          <a:p>
+            <a:pPr algn="ctr" indent="0" marL="0">
+              <a:buNone/>
+            </a:pPr>
+            <a:r>
+              <a:rPr lang="en-US" sz="1000" dirty="0">
+                <a:solidFill>
+                  <a:srgbClr val="003A63"/>
+                </a:solidFill>
+                <a:latin typeface="Aptos" pitchFamily="34" charset="0"/>
+                <a:ea typeface="Aptos" pitchFamily="34" charset="-122"/>
+                <a:cs typeface="Aptos" pitchFamily="34" charset="-120"/>
+              </a:rPr>
+              <a:t>Concept to action</a:t>
+            </a:r>
+            <a:endParaRPr lang="en-US" sz="1000" dirty="0"/>
+          </a:p>
+        </p:txBody>
+      </p:sp>
+      <p:sp>
+        <p:nvSpPr>
+          <p:cNvPr id="18" name="Shape 16"/>
+          <p:cNvSpPr/>
+          <p:nvPr/>
+        </p:nvSpPr>
+        <p:spPr>
+          <a:xfrm>
+            <a:off x="7635240" y="4498848"/>
+            <a:ext cx="3474720" cy="1143000"/>
+          </a:xfrm>
+          <a:prstGeom prst="roundRect">
+            <a:avLst>
+              <a:gd name="adj" fmla="val 9600"/>
             </a:avLst>
           </a:prstGeom>
           <a:solidFill>
@@ -12998,14 +14147,14 @@
       </p:sp>
       <p:sp>
         <p:nvSpPr>
-          <p:cNvPr id="16" name="Text 14"/>
-          <p:cNvSpPr/>
-          <p:nvPr/>
-        </p:nvSpPr>
-        <p:spPr>
-          <a:xfrm>
-            <a:off x="8074152" y="3666744"/>
-            <a:ext cx="2825496" cy="256032"/>
+          <p:cNvPr id="19" name="Text 17"/>
+          <p:cNvSpPr/>
+          <p:nvPr/>
+        </p:nvSpPr>
+        <p:spPr>
+          <a:xfrm>
+            <a:off x="7799832" y="4645152"/>
+            <a:ext cx="3145536" cy="256032"/>
           </a:xfrm>
           <a:prstGeom prst="rect">
             <a:avLst/>
@@ -13029,7 +14178,7 @@
                 <a:ea typeface="Aptos" pitchFamily="34" charset="-122"/>
                 <a:cs typeface="Aptos" pitchFamily="34" charset="-120"/>
               </a:rPr>
-              <a:t>Use this for</a:t>
+              <a:t>What to produce</a:t>
             </a:r>
             <a:endParaRPr lang="en-US" sz="1300" dirty="0"/>
           </a:p>
@@ -13037,14 +14186,14 @@
       </p:sp>
       <p:sp>
         <p:nvSpPr>
-          <p:cNvPr id="17" name="Text 15"/>
-          <p:cNvSpPr/>
-          <p:nvPr/>
-        </p:nvSpPr>
-        <p:spPr>
-          <a:xfrm>
-            <a:off x="8074152" y="4023360"/>
-            <a:ext cx="2825496" cy="1097280"/>
+          <p:cNvPr id="20" name="Text 18"/>
+          <p:cNvSpPr/>
+          <p:nvPr/>
+        </p:nvSpPr>
+        <p:spPr>
+          <a:xfrm>
+            <a:off x="7799832" y="5001768"/>
+            <a:ext cx="3145536" cy="502920"/>
           </a:xfrm>
           <a:prstGeom prst="rect">
             <a:avLst/>
@@ -13070,7 +14219,7 @@
                 <a:ea typeface="Aptos" pitchFamily="34" charset="-122"/>
                 <a:cs typeface="Aptos" pitchFamily="34" charset="-120"/>
               </a:rPr>
-              <a:t>Connect the concept to public health decisions, safeguards, documentation, or implementation work.</a:t>
+              <a:t>Use the assignment to test whether you can explain the concept, apply it to a realistic public health situation, and identify what would need review before the work moves forward.</a:t>
             </a:r>
             <a:endParaRPr lang="en-US" sz="1550" dirty="0"/>
           </a:p>
@@ -13244,8 +14393,8 @@
         </p:nvSpPr>
         <p:spPr>
           <a:xfrm>
-            <a:off x="9966960" y="6537960"/>
-            <a:ext cx="1645920" cy="201168"/>
+            <a:off x="9646920" y="6537960"/>
+            <a:ext cx="1965960" cy="201168"/>
           </a:xfrm>
           <a:prstGeom prst="rect">
             <a:avLst/>
@@ -13269,7 +14418,7 @@
                 <a:ea typeface="Aptos" pitchFamily="34" charset="-122"/>
                 <a:cs typeface="Aptos" pitchFamily="34" charset="-120"/>
               </a:rPr>
-              <a:t>Â© Paula Soper</a:t>
+              <a:t>Copyright Paula Soper</a:t>
             </a:r>
             <a:endParaRPr lang="en-US" sz="800" dirty="0"/>
           </a:p>
@@ -13316,77 +14465,13 @@
       </p:sp>
       <p:sp>
         <p:nvSpPr>
-          <p:cNvPr id="8" name="Shape 6"/>
+          <p:cNvPr id="8" name="Text 6"/>
           <p:cNvSpPr/>
           <p:nvPr/>
         </p:nvSpPr>
         <p:spPr>
           <a:xfrm>
             <a:off x="640080" y="658368"/>
-            <a:ext cx="420624" cy="420624"/>
-          </a:xfrm>
-          <a:prstGeom prst="ellipse">
-            <a:avLst/>
-          </a:prstGeom>
-          <a:solidFill>
-            <a:srgbClr val="0068B7"/>
-          </a:solidFill>
-          <a:ln w="12700">
-            <a:solidFill>
-              <a:srgbClr val="0068B7"/>
-            </a:solidFill>
-            <a:prstDash val="solid"/>
-          </a:ln>
-        </p:spPr>
-      </p:sp>
-      <p:sp>
-        <p:nvSpPr>
-          <p:cNvPr id="9" name="Text 7"/>
-          <p:cNvSpPr/>
-          <p:nvPr/>
-        </p:nvSpPr>
-        <p:spPr>
-          <a:xfrm>
-            <a:off x="640080" y="731520"/>
-            <a:ext cx="420624" cy="164592"/>
-          </a:xfrm>
-          <a:prstGeom prst="rect">
-            <a:avLst/>
-          </a:prstGeom>
-          <a:noFill/>
-          <a:ln/>
-        </p:spPr>
-        <p:txBody>
-          <a:bodyPr wrap="square" lIns="0" tIns="0" rIns="0" bIns="0" rtlCol="0" anchor="ctr"/>
-          <a:lstStyle/>
-          <a:p>
-            <a:pPr algn="ctr" indent="0" marL="0">
-              <a:buNone/>
-            </a:pPr>
-            <a:r>
-              <a:rPr lang="en-US" sz="1100" b="1" dirty="0">
-                <a:solidFill>
-                  <a:srgbClr val="FFFFFF"/>
-                </a:solidFill>
-                <a:latin typeface="Aptos" pitchFamily="34" charset="0"/>
-                <a:ea typeface="Aptos" pitchFamily="34" charset="-122"/>
-                <a:cs typeface="Aptos" pitchFamily="34" charset="-120"/>
-              </a:rPr>
-              <a:t>2</a:t>
-            </a:r>
-            <a:endParaRPr lang="en-US" sz="1100" dirty="0"/>
-          </a:p>
-        </p:txBody>
-      </p:sp>
-      <p:sp>
-        <p:nvSpPr>
-          <p:cNvPr id="10" name="Text 8"/>
-          <p:cNvSpPr/>
-          <p:nvPr/>
-        </p:nvSpPr>
-        <p:spPr>
-          <a:xfrm>
-            <a:off x="640080" y="621792"/>
             <a:ext cx="10881360" cy="713232"/>
           </a:xfrm>
           <a:prstGeom prst="rect">
@@ -13421,14 +14506,14 @@
       </p:sp>
       <p:sp>
         <p:nvSpPr>
-          <p:cNvPr id="11" name="Text 9"/>
+          <p:cNvPr id="9" name="Text 7"/>
           <p:cNvSpPr/>
           <p:nvPr/>
         </p:nvSpPr>
         <p:spPr>
           <a:xfrm>
             <a:off x="868680" y="1508760"/>
-            <a:ext cx="6537960" cy="4160520"/>
+            <a:ext cx="6309360" cy="4160520"/>
           </a:xfrm>
           <a:prstGeom prst="rect">
             <a:avLst/>
@@ -13487,18 +14572,18 @@
       </p:sp>
       <p:sp>
         <p:nvSpPr>
-          <p:cNvPr id="12" name="Shape 10"/>
-          <p:cNvSpPr/>
-          <p:nvPr/>
-        </p:nvSpPr>
-        <p:spPr>
-          <a:xfrm>
-            <a:off x="7909560" y="1417320"/>
-            <a:ext cx="3154680" cy="1828800"/>
+          <p:cNvPr id="10" name="Shape 8"/>
+          <p:cNvSpPr/>
+          <p:nvPr/>
+        </p:nvSpPr>
+        <p:spPr>
+          <a:xfrm>
+            <a:off x="7635240" y="1325880"/>
+            <a:ext cx="3474720" cy="1325880"/>
           </a:xfrm>
           <a:prstGeom prst="roundRect">
             <a:avLst>
-              <a:gd name="adj" fmla="val 6000"/>
+              <a:gd name="adj" fmla="val 8276"/>
             </a:avLst>
           </a:prstGeom>
           <a:solidFill>
@@ -13514,14 +14599,14 @@
       </p:sp>
       <p:sp>
         <p:nvSpPr>
-          <p:cNvPr id="13" name="Text 11"/>
-          <p:cNvSpPr/>
-          <p:nvPr/>
-        </p:nvSpPr>
-        <p:spPr>
-          <a:xfrm>
-            <a:off x="8074152" y="1563624"/>
-            <a:ext cx="2825496" cy="256032"/>
+          <p:cNvPr id="11" name="Text 9"/>
+          <p:cNvSpPr/>
+          <p:nvPr/>
+        </p:nvSpPr>
+        <p:spPr>
+          <a:xfrm>
+            <a:off x="7799832" y="1472184"/>
+            <a:ext cx="3145536" cy="256032"/>
           </a:xfrm>
           <a:prstGeom prst="rect">
             <a:avLst/>
@@ -13545,7 +14630,7 @@
                 <a:ea typeface="Aptos" pitchFamily="34" charset="-122"/>
                 <a:cs typeface="Aptos" pitchFamily="34" charset="-120"/>
               </a:rPr>
-              <a:t>Key idea</a:t>
+              <a:t>Core concept</a:t>
             </a:r>
             <a:endParaRPr lang="en-US" sz="1300" dirty="0"/>
           </a:p>
@@ -13553,14 +14638,14 @@
       </p:sp>
       <p:sp>
         <p:nvSpPr>
-          <p:cNvPr id="14" name="Text 12"/>
-          <p:cNvSpPr/>
-          <p:nvPr/>
-        </p:nvSpPr>
-        <p:spPr>
-          <a:xfrm>
-            <a:off x="8074152" y="1920240"/>
-            <a:ext cx="2825496" cy="1188720"/>
+          <p:cNvPr id="12" name="Text 10"/>
+          <p:cNvSpPr/>
+          <p:nvPr/>
+        </p:nvSpPr>
+        <p:spPr>
+          <a:xfrm>
+            <a:off x="7799832" y="1828800"/>
+            <a:ext cx="3145536" cy="685800"/>
           </a:xfrm>
           <a:prstGeom prst="rect">
             <a:avLst/>
@@ -13594,18 +14679,159 @@
       </p:sp>
       <p:sp>
         <p:nvSpPr>
-          <p:cNvPr id="15" name="Shape 13"/>
-          <p:cNvSpPr/>
-          <p:nvPr/>
-        </p:nvSpPr>
-        <p:spPr>
-          <a:xfrm>
-            <a:off x="7909560" y="3520440"/>
-            <a:ext cx="3154680" cy="1737360"/>
+          <p:cNvPr id="13" name="Shape 11"/>
+          <p:cNvSpPr/>
+          <p:nvPr/>
+        </p:nvSpPr>
+        <p:spPr>
+          <a:xfrm>
+            <a:off x="7635240" y="2788920"/>
+            <a:ext cx="3474720" cy="1536192"/>
           </a:xfrm>
           <a:prstGeom prst="roundRect">
             <a:avLst>
-              <a:gd name="adj" fmla="val 6316"/>
+              <a:gd name="adj" fmla="val 7143"/>
+            </a:avLst>
+          </a:prstGeom>
+          <a:solidFill>
+            <a:srgbClr val="FFFFFF">
+              <a:alpha val="88000"/>
+            </a:srgbClr>
+          </a:solidFill>
+          <a:ln w="12700">
+            <a:solidFill>
+              <a:srgbClr val="D6E8F2"/>
+            </a:solidFill>
+            <a:prstDash val="solid"/>
+          </a:ln>
+        </p:spPr>
+      </p:sp>
+      <p:sp>
+        <p:nvSpPr>
+          <p:cNvPr id="14" name="Shape 12"/>
+          <p:cNvSpPr/>
+          <p:nvPr/>
+        </p:nvSpPr>
+        <p:spPr>
+          <a:xfrm>
+            <a:off x="8074152" y="3291840"/>
+            <a:ext cx="2596896" cy="749808"/>
+          </a:xfrm>
+          <a:prstGeom prst="rect">
+            <a:avLst/>
+          </a:prstGeom>
+          <a:solidFill>
+            <a:srgbClr val="EAF6F8"/>
+          </a:solidFill>
+          <a:ln w="12700">
+            <a:solidFill>
+              <a:srgbClr val="8ABBD8"/>
+            </a:solidFill>
+            <a:prstDash val="solid"/>
+          </a:ln>
+        </p:spPr>
+      </p:sp>
+      <p:sp>
+        <p:nvSpPr>
+          <p:cNvPr id="15" name="Shape 13"/>
+          <p:cNvSpPr/>
+          <p:nvPr/>
+        </p:nvSpPr>
+        <p:spPr>
+          <a:xfrm>
+            <a:off x="8202168" y="3721608"/>
+            <a:ext cx="2340864" cy="0"/>
+          </a:xfrm>
+          <a:prstGeom prst="line">
+            <a:avLst/>
+          </a:prstGeom>
+          <a:noFill/>
+          <a:ln w="19050">
+            <a:solidFill>
+              <a:srgbClr val="0068B7"/>
+            </a:solidFill>
+            <a:prstDash val="solid"/>
+          </a:ln>
+        </p:spPr>
+      </p:sp>
+      <p:sp>
+        <p:nvSpPr>
+          <p:cNvPr id="16" name="Shape 14"/>
+          <p:cNvSpPr/>
+          <p:nvPr/>
+        </p:nvSpPr>
+        <p:spPr>
+          <a:xfrm>
+            <a:off x="9198864" y="4206240"/>
+            <a:ext cx="347472" cy="347472"/>
+          </a:xfrm>
+          <a:prstGeom prst="ellipse">
+            <a:avLst/>
+          </a:prstGeom>
+          <a:solidFill>
+            <a:srgbClr val="2F8A28"/>
+          </a:solidFill>
+          <a:ln w="12700">
+            <a:solidFill>
+              <a:srgbClr val="2F8A28"/>
+            </a:solidFill>
+            <a:prstDash val="solid"/>
+          </a:ln>
+        </p:spPr>
+      </p:sp>
+      <p:sp>
+        <p:nvSpPr>
+          <p:cNvPr id="17" name="Text 15"/>
+          <p:cNvSpPr/>
+          <p:nvPr/>
+        </p:nvSpPr>
+        <p:spPr>
+          <a:xfrm>
+            <a:off x="7909560" y="3977640"/>
+            <a:ext cx="2926080" cy="182880"/>
+          </a:xfrm>
+          <a:prstGeom prst="rect">
+            <a:avLst/>
+          </a:prstGeom>
+          <a:noFill/>
+          <a:ln/>
+        </p:spPr>
+        <p:txBody>
+          <a:bodyPr wrap="square" lIns="0" tIns="0" rIns="0" bIns="0" rtlCol="0" anchor="ctr"/>
+          <a:lstStyle/>
+          <a:p>
+            <a:pPr algn="ctr" indent="0" marL="0">
+              <a:buNone/>
+            </a:pPr>
+            <a:r>
+              <a:rPr lang="en-US" sz="1000" dirty="0">
+                <a:solidFill>
+                  <a:srgbClr val="003A63"/>
+                </a:solidFill>
+                <a:latin typeface="Aptos" pitchFamily="34" charset="0"/>
+                <a:ea typeface="Aptos" pitchFamily="34" charset="-122"/>
+                <a:cs typeface="Aptos" pitchFamily="34" charset="-120"/>
+              </a:rPr>
+              <a:t>Concept to action</a:t>
+            </a:r>
+            <a:endParaRPr lang="en-US" sz="1000" dirty="0"/>
+          </a:p>
+        </p:txBody>
+      </p:sp>
+      <p:sp>
+        <p:nvSpPr>
+          <p:cNvPr id="18" name="Shape 16"/>
+          <p:cNvSpPr/>
+          <p:nvPr/>
+        </p:nvSpPr>
+        <p:spPr>
+          <a:xfrm>
+            <a:off x="7635240" y="4498848"/>
+            <a:ext cx="3474720" cy="1143000"/>
+          </a:xfrm>
+          <a:prstGeom prst="roundRect">
+            <a:avLst>
+              <a:gd name="adj" fmla="val 9600"/>
             </a:avLst>
           </a:prstGeom>
           <a:solidFill>
@@ -13621,14 +14847,14 @@
       </p:sp>
       <p:sp>
         <p:nvSpPr>
-          <p:cNvPr id="16" name="Text 14"/>
-          <p:cNvSpPr/>
-          <p:nvPr/>
-        </p:nvSpPr>
-        <p:spPr>
-          <a:xfrm>
-            <a:off x="8074152" y="3666744"/>
-            <a:ext cx="2825496" cy="256032"/>
+          <p:cNvPr id="19" name="Text 17"/>
+          <p:cNvSpPr/>
+          <p:nvPr/>
+        </p:nvSpPr>
+        <p:spPr>
+          <a:xfrm>
+            <a:off x="7799832" y="4645152"/>
+            <a:ext cx="3145536" cy="256032"/>
           </a:xfrm>
           <a:prstGeom prst="rect">
             <a:avLst/>
@@ -13652,7 +14878,7 @@
                 <a:ea typeface="Aptos" pitchFamily="34" charset="-122"/>
                 <a:cs typeface="Aptos" pitchFamily="34" charset="-120"/>
               </a:rPr>
-              <a:t>Use this for</a:t>
+              <a:t>Apply it</a:t>
             </a:r>
             <a:endParaRPr lang="en-US" sz="1300" dirty="0"/>
           </a:p>
@@ -13660,14 +14886,14 @@
       </p:sp>
       <p:sp>
         <p:nvSpPr>
-          <p:cNvPr id="17" name="Text 15"/>
-          <p:cNvSpPr/>
-          <p:nvPr/>
-        </p:nvSpPr>
-        <p:spPr>
-          <a:xfrm>
-            <a:off x="8074152" y="4023360"/>
-            <a:ext cx="2825496" cy="1097280"/>
+          <p:cNvPr id="20" name="Text 18"/>
+          <p:cNvSpPr/>
+          <p:nvPr/>
+        </p:nvSpPr>
+        <p:spPr>
+          <a:xfrm>
+            <a:off x="7799832" y="5001768"/>
+            <a:ext cx="3145536" cy="502920"/>
           </a:xfrm>
           <a:prstGeom prst="rect">
             <a:avLst/>
@@ -13693,7 +14919,7 @@
                 <a:ea typeface="Aptos" pitchFamily="34" charset="-122"/>
                 <a:cs typeface="Aptos" pitchFamily="34" charset="-120"/>
               </a:rPr>
-              <a:t>Connect the concept to public health decisions, safeguards, documentation, or implementation work.</a:t>
+              <a:t>Connect the concept to public health purpose, responsible use, required safeguards, documentation, and the next action a department should take.</a:t>
             </a:r>
             <a:endParaRPr lang="en-US" sz="1550" dirty="0"/>
           </a:p>
@@ -13867,8 +15093,8 @@
         </p:nvSpPr>
         <p:spPr>
           <a:xfrm>
-            <a:off x="9966960" y="6537960"/>
-            <a:ext cx="1645920" cy="201168"/>
+            <a:off x="9646920" y="6537960"/>
+            <a:ext cx="1965960" cy="201168"/>
           </a:xfrm>
           <a:prstGeom prst="rect">
             <a:avLst/>
@@ -13892,7 +15118,7 @@
                 <a:ea typeface="Aptos" pitchFamily="34" charset="-122"/>
                 <a:cs typeface="Aptos" pitchFamily="34" charset="-120"/>
               </a:rPr>
-              <a:t>Â© Paula Soper</a:t>
+              <a:t>Copyright Paula Soper</a:t>
             </a:r>
             <a:endParaRPr lang="en-US" sz="800" dirty="0"/>
           </a:p>
@@ -13939,14 +15165,257 @@
       </p:sp>
       <p:sp>
         <p:nvSpPr>
-          <p:cNvPr id="8" name="Shape 6"/>
+          <p:cNvPr id="8" name="Text 6"/>
           <p:cNvSpPr/>
           <p:nvPr/>
         </p:nvSpPr>
         <p:spPr>
           <a:xfrm>
             <a:off x="640080" y="658368"/>
-            <a:ext cx="420624" cy="420624"/>
+            <a:ext cx="10881360" cy="713232"/>
+          </a:xfrm>
+          <a:prstGeom prst="rect">
+            <a:avLst/>
+          </a:prstGeom>
+          <a:noFill/>
+          <a:ln/>
+        </p:spPr>
+        <p:txBody>
+          <a:bodyPr wrap="square" lIns="0" tIns="0" rIns="0" bIns="0" rtlCol="0" anchor="ctr">
+            <a:normAutofit/>
+          </a:bodyPr>
+          <a:lstStyle/>
+          <a:p>
+            <a:pPr indent="0" marL="0">
+              <a:buNone/>
+            </a:pPr>
+            <a:r>
+              <a:rPr lang="en-US" sz="3400" b="1" dirty="0">
+                <a:solidFill>
+                  <a:srgbClr val="003A63"/>
+                </a:solidFill>
+                <a:latin typeface="Aptos Display" pitchFamily="34" charset="0"/>
+                <a:ea typeface="Aptos Display" pitchFamily="34" charset="-122"/>
+                <a:cs typeface="Aptos Display" pitchFamily="34" charset="-120"/>
+              </a:rPr>
+              <a:t>Jurisdiction and Agency Policy Note</a:t>
+            </a:r>
+            <a:endParaRPr lang="en-US" sz="3400" dirty="0"/>
+          </a:p>
+        </p:txBody>
+      </p:sp>
+      <p:sp>
+        <p:nvSpPr>
+          <p:cNvPr id="9" name="Text 7"/>
+          <p:cNvSpPr/>
+          <p:nvPr/>
+        </p:nvSpPr>
+        <p:spPr>
+          <a:xfrm>
+            <a:off x="868680" y="1508760"/>
+            <a:ext cx="6309360" cy="4160520"/>
+          </a:xfrm>
+          <a:prstGeom prst="rect">
+            <a:avLst/>
+          </a:prstGeom>
+          <a:noFill/>
+          <a:ln/>
+        </p:spPr>
+        <p:txBody>
+          <a:bodyPr wrap="square" lIns="635" tIns="635" rIns="635" bIns="635" rtlCol="0" anchor="t">
+            <a:normAutofit/>
+          </a:bodyPr>
+          <a:lstStyle/>
+          <a:p>
+            <a:r>
+              <a:rPr lang="en-US" sz="2100" dirty="0">
+                <a:solidFill>
+                  <a:srgbClr val="17364A"/>
+                </a:solidFill>
+                <a:latin typeface="Aptos" pitchFamily="34" charset="0"/>
+                <a:ea typeface="Aptos" pitchFamily="34" charset="-122"/>
+                <a:cs typeface="Aptos" pitchFamily="34" charset="-120"/>
+              </a:rPr>
+              <a:t>This national-level module is intended for training and planning purposes.</a:t>
+            </a:r>
+            <a:endParaRPr lang="en-US" sz="2100" dirty="0"/>
+          </a:p>
+          <a:p>
+            <a:r>
+              <a:rPr lang="en-US" sz="2100" dirty="0">
+                <a:solidFill>
+                  <a:srgbClr val="17364A"/>
+                </a:solidFill>
+                <a:latin typeface="Aptos" pitchFamily="34" charset="0"/>
+                <a:ea typeface="Aptos" pitchFamily="34" charset="-122"/>
+                <a:cs typeface="Aptos" pitchFamily="34" charset="-120"/>
+              </a:rPr>
+              <a:t>It does not replace legal, privacy, procurement, civil rights, records, or agency policy review.</a:t>
+            </a:r>
+            <a:endParaRPr lang="en-US" sz="2100" dirty="0"/>
+          </a:p>
+          <a:p>
+            <a:r>
+              <a:rPr lang="en-US" sz="2100" dirty="0">
+                <a:solidFill>
+                  <a:srgbClr val="17364A"/>
+                </a:solidFill>
+                <a:latin typeface="Aptos" pitchFamily="34" charset="0"/>
+                <a:ea typeface="Aptos" pitchFamily="34" charset="-122"/>
+                <a:cs typeface="Aptos" pitchFamily="34" charset="-120"/>
+              </a:rPr>
+              <a:t>Learners should confirm applicable requirements in their own jurisdiction and organization before.</a:t>
+            </a:r>
+            <a:endParaRPr lang="en-US" sz="2100" dirty="0"/>
+          </a:p>
+        </p:txBody>
+      </p:sp>
+      <p:sp>
+        <p:nvSpPr>
+          <p:cNvPr id="10" name="Shape 8"/>
+          <p:cNvSpPr/>
+          <p:nvPr/>
+        </p:nvSpPr>
+        <p:spPr>
+          <a:xfrm>
+            <a:off x="7635240" y="1325880"/>
+            <a:ext cx="3474720" cy="1325880"/>
+          </a:xfrm>
+          <a:prstGeom prst="roundRect">
+            <a:avLst>
+              <a:gd name="adj" fmla="val 8276"/>
+            </a:avLst>
+          </a:prstGeom>
+          <a:solidFill>
+            <a:srgbClr val="EEF8ED"/>
+          </a:solidFill>
+          <a:ln w="12700">
+            <a:solidFill>
+              <a:srgbClr val="B9D7E6"/>
+            </a:solidFill>
+            <a:prstDash val="solid"/>
+          </a:ln>
+        </p:spPr>
+      </p:sp>
+      <p:sp>
+        <p:nvSpPr>
+          <p:cNvPr id="11" name="Text 9"/>
+          <p:cNvSpPr/>
+          <p:nvPr/>
+        </p:nvSpPr>
+        <p:spPr>
+          <a:xfrm>
+            <a:off x="7799832" y="1472184"/>
+            <a:ext cx="3145536" cy="256032"/>
+          </a:xfrm>
+          <a:prstGeom prst="rect">
+            <a:avLst/>
+          </a:prstGeom>
+          <a:noFill/>
+          <a:ln/>
+        </p:spPr>
+        <p:txBody>
+          <a:bodyPr wrap="square" lIns="0" tIns="0" rIns="0" bIns="0" rtlCol="0" anchor="ctr"/>
+          <a:lstStyle/>
+          <a:p>
+            <a:pPr indent="0" marL="0">
+              <a:buNone/>
+            </a:pPr>
+            <a:r>
+              <a:rPr lang="en-US" sz="1300" b="1" dirty="0">
+                <a:solidFill>
+                  <a:srgbClr val="0068B7"/>
+                </a:solidFill>
+                <a:latin typeface="Aptos" pitchFamily="34" charset="0"/>
+                <a:ea typeface="Aptos" pitchFamily="34" charset="-122"/>
+                <a:cs typeface="Aptos" pitchFamily="34" charset="-120"/>
+              </a:rPr>
+              <a:t>Governance lens</a:t>
+            </a:r>
+            <a:endParaRPr lang="en-US" sz="1300" dirty="0"/>
+          </a:p>
+        </p:txBody>
+      </p:sp>
+      <p:sp>
+        <p:nvSpPr>
+          <p:cNvPr id="12" name="Text 10"/>
+          <p:cNvSpPr/>
+          <p:nvPr/>
+        </p:nvSpPr>
+        <p:spPr>
+          <a:xfrm>
+            <a:off x="7799832" y="1828800"/>
+            <a:ext cx="3145536" cy="685800"/>
+          </a:xfrm>
+          <a:prstGeom prst="rect">
+            <a:avLst/>
+          </a:prstGeom>
+          <a:noFill/>
+          <a:ln/>
+        </p:spPr>
+        <p:txBody>
+          <a:bodyPr wrap="square" lIns="0" tIns="0" rIns="0" bIns="0" rtlCol="0" anchor="t">
+            <a:normAutofit/>
+          </a:bodyPr>
+          <a:lstStyle/>
+          <a:p>
+            <a:pPr indent="0" marL="0">
+              <a:buNone/>
+            </a:pPr>
+            <a:r>
+              <a:rPr lang="en-US" sz="1550" dirty="0">
+                <a:solidFill>
+                  <a:srgbClr val="17364A"/>
+                </a:solidFill>
+                <a:latin typeface="Aptos" pitchFamily="34" charset="0"/>
+                <a:ea typeface="Aptos" pitchFamily="34" charset="-122"/>
+                <a:cs typeface="Aptos" pitchFamily="34" charset="-120"/>
+              </a:rPr>
+              <a:t>This national-level module is intended for training and planning purposes.</a:t>
+            </a:r>
+            <a:endParaRPr lang="en-US" sz="1550" dirty="0"/>
+          </a:p>
+        </p:txBody>
+      </p:sp>
+      <p:sp>
+        <p:nvSpPr>
+          <p:cNvPr id="13" name="Shape 11"/>
+          <p:cNvSpPr/>
+          <p:nvPr/>
+        </p:nvSpPr>
+        <p:spPr>
+          <a:xfrm>
+            <a:off x="7635240" y="2788920"/>
+            <a:ext cx="3474720" cy="1536192"/>
+          </a:xfrm>
+          <a:prstGeom prst="roundRect">
+            <a:avLst>
+              <a:gd name="adj" fmla="val 7143"/>
+            </a:avLst>
+          </a:prstGeom>
+          <a:solidFill>
+            <a:srgbClr val="FFFFFF">
+              <a:alpha val="88000"/>
+            </a:srgbClr>
+          </a:solidFill>
+          <a:ln w="12700">
+            <a:solidFill>
+              <a:srgbClr val="D6E8F2"/>
+            </a:solidFill>
+            <a:prstDash val="solid"/>
+          </a:ln>
+        </p:spPr>
+      </p:sp>
+      <p:sp>
+        <p:nvSpPr>
+          <p:cNvPr id="14" name="Shape 12"/>
+          <p:cNvSpPr/>
+          <p:nvPr/>
+        </p:nvSpPr>
+        <p:spPr>
+          <a:xfrm>
+            <a:off x="7891272" y="3108960"/>
+            <a:ext cx="566928" cy="566928"/>
           </a:xfrm>
           <a:prstGeom prst="ellipse">
             <a:avLst/>
@@ -13964,172 +15433,24 @@
       </p:sp>
       <p:sp>
         <p:nvSpPr>
-          <p:cNvPr id="9" name="Text 7"/>
-          <p:cNvSpPr/>
-          <p:nvPr/>
-        </p:nvSpPr>
-        <p:spPr>
-          <a:xfrm>
-            <a:off x="640080" y="731520"/>
-            <a:ext cx="420624" cy="164592"/>
-          </a:xfrm>
-          <a:prstGeom prst="rect">
-            <a:avLst/>
-          </a:prstGeom>
-          <a:noFill/>
-          <a:ln/>
-        </p:spPr>
-        <p:txBody>
-          <a:bodyPr wrap="square" lIns="0" tIns="0" rIns="0" bIns="0" rtlCol="0" anchor="ctr"/>
-          <a:lstStyle/>
-          <a:p>
-            <a:pPr algn="ctr" indent="0" marL="0">
-              <a:buNone/>
-            </a:pPr>
-            <a:r>
-              <a:rPr lang="en-US" sz="1100" b="1" dirty="0">
-                <a:solidFill>
-                  <a:srgbClr val="FFFFFF"/>
-                </a:solidFill>
-                <a:latin typeface="Aptos" pitchFamily="34" charset="0"/>
-                <a:ea typeface="Aptos" pitchFamily="34" charset="-122"/>
-                <a:cs typeface="Aptos" pitchFamily="34" charset="-120"/>
-              </a:rPr>
-              <a:t>3</a:t>
-            </a:r>
-            <a:endParaRPr lang="en-US" sz="1100" dirty="0"/>
-          </a:p>
-        </p:txBody>
-      </p:sp>
-      <p:sp>
-        <p:nvSpPr>
-          <p:cNvPr id="10" name="Text 8"/>
-          <p:cNvSpPr/>
-          <p:nvPr/>
-        </p:nvSpPr>
-        <p:spPr>
-          <a:xfrm>
-            <a:off x="640080" y="621792"/>
-            <a:ext cx="10881360" cy="713232"/>
-          </a:xfrm>
-          <a:prstGeom prst="rect">
-            <a:avLst/>
-          </a:prstGeom>
-          <a:noFill/>
-          <a:ln/>
-        </p:spPr>
-        <p:txBody>
-          <a:bodyPr wrap="square" lIns="0" tIns="0" rIns="0" bIns="0" rtlCol="0" anchor="ctr">
-            <a:normAutofit/>
-          </a:bodyPr>
-          <a:lstStyle/>
-          <a:p>
-            <a:pPr indent="0" marL="0">
-              <a:buNone/>
-            </a:pPr>
-            <a:r>
-              <a:rPr lang="en-US" sz="3400" b="1" dirty="0">
-                <a:solidFill>
-                  <a:srgbClr val="003A63"/>
-                </a:solidFill>
-                <a:latin typeface="Aptos Display" pitchFamily="34" charset="0"/>
-                <a:ea typeface="Aptos Display" pitchFamily="34" charset="-122"/>
-                <a:cs typeface="Aptos Display" pitchFamily="34" charset="-120"/>
-              </a:rPr>
-              <a:t>Jurisdiction and Agency Policy Note</a:t>
-            </a:r>
-            <a:endParaRPr lang="en-US" sz="3400" dirty="0"/>
-          </a:p>
-        </p:txBody>
-      </p:sp>
-      <p:sp>
-        <p:nvSpPr>
-          <p:cNvPr id="11" name="Text 9"/>
-          <p:cNvSpPr/>
-          <p:nvPr/>
-        </p:nvSpPr>
-        <p:spPr>
-          <a:xfrm>
-            <a:off x="868680" y="1508760"/>
-            <a:ext cx="6537960" cy="4160520"/>
-          </a:xfrm>
-          <a:prstGeom prst="rect">
-            <a:avLst/>
-          </a:prstGeom>
-          <a:noFill/>
-          <a:ln/>
-        </p:spPr>
-        <p:txBody>
-          <a:bodyPr wrap="square" lIns="635" tIns="635" rIns="635" bIns="635" rtlCol="0" anchor="t">
-            <a:normAutofit/>
-          </a:bodyPr>
-          <a:lstStyle/>
-          <a:p>
-            <a:r>
-              <a:rPr lang="en-US" sz="2100" dirty="0">
-                <a:solidFill>
-                  <a:srgbClr val="17364A"/>
-                </a:solidFill>
-                <a:latin typeface="Aptos" pitchFamily="34" charset="0"/>
-                <a:ea typeface="Aptos" pitchFamily="34" charset="-122"/>
-                <a:cs typeface="Aptos" pitchFamily="34" charset="-120"/>
-              </a:rPr>
-              <a:t>This national-level module is intended for training and planning purposes.</a:t>
-            </a:r>
-            <a:endParaRPr lang="en-US" sz="2100" dirty="0"/>
-          </a:p>
-          <a:p>
-            <a:r>
-              <a:rPr lang="en-US" sz="2100" dirty="0">
-                <a:solidFill>
-                  <a:srgbClr val="17364A"/>
-                </a:solidFill>
-                <a:latin typeface="Aptos" pitchFamily="34" charset="0"/>
-                <a:ea typeface="Aptos" pitchFamily="34" charset="-122"/>
-                <a:cs typeface="Aptos" pitchFamily="34" charset="-120"/>
-              </a:rPr>
-              <a:t>It does not replace legal, privacy, procurement, civil rights, records, or agency policy review.</a:t>
-            </a:r>
-            <a:endParaRPr lang="en-US" sz="2100" dirty="0"/>
-          </a:p>
-          <a:p>
-            <a:r>
-              <a:rPr lang="en-US" sz="2100" dirty="0">
-                <a:solidFill>
-                  <a:srgbClr val="17364A"/>
-                </a:solidFill>
-                <a:latin typeface="Aptos" pitchFamily="34" charset="0"/>
-                <a:ea typeface="Aptos" pitchFamily="34" charset="-122"/>
-                <a:cs typeface="Aptos" pitchFamily="34" charset="-120"/>
-              </a:rPr>
-              <a:t>Learners should confirm applicable requirements in their own jurisdiction and organization before.</a:t>
-            </a:r>
-            <a:endParaRPr lang="en-US" sz="2100" dirty="0"/>
-          </a:p>
-        </p:txBody>
-      </p:sp>
-      <p:sp>
-        <p:nvSpPr>
-          <p:cNvPr id="12" name="Shape 10"/>
-          <p:cNvSpPr/>
-          <p:nvPr/>
-        </p:nvSpPr>
-        <p:spPr>
-          <a:xfrm>
-            <a:off x="7909560" y="1417320"/>
-            <a:ext cx="3154680" cy="1828800"/>
-          </a:xfrm>
-          <a:prstGeom prst="roundRect">
-            <a:avLst>
-              <a:gd name="adj" fmla="val 6000"/>
-            </a:avLst>
+          <p:cNvPr id="15" name="Shape 13"/>
+          <p:cNvSpPr/>
+          <p:nvPr/>
+        </p:nvSpPr>
+        <p:spPr>
+          <a:xfrm>
+            <a:off x="10287000" y="3108960"/>
+            <a:ext cx="566928" cy="566928"/>
+          </a:xfrm>
+          <a:prstGeom prst="ellipse">
+            <a:avLst/>
           </a:prstGeom>
           <a:solidFill>
-            <a:srgbClr val="EEF8ED"/>
+            <a:srgbClr val="2F8A28"/>
           </a:solidFill>
           <a:ln w="12700">
             <a:solidFill>
-              <a:srgbClr val="B9D7E6"/>
+              <a:srgbClr val="2F8A28"/>
             </a:solidFill>
             <a:prstDash val="solid"/>
           </a:ln>
@@ -14137,14 +15458,108 @@
       </p:sp>
       <p:sp>
         <p:nvSpPr>
-          <p:cNvPr id="13" name="Text 11"/>
-          <p:cNvSpPr/>
-          <p:nvPr/>
-        </p:nvSpPr>
-        <p:spPr>
-          <a:xfrm>
-            <a:off x="8074152" y="1563624"/>
-            <a:ext cx="2825496" cy="256032"/>
+          <p:cNvPr id="16" name="Shape 14"/>
+          <p:cNvSpPr/>
+          <p:nvPr/>
+        </p:nvSpPr>
+        <p:spPr>
+          <a:xfrm>
+            <a:off x="9089136" y="3456432"/>
+            <a:ext cx="566928" cy="566928"/>
+          </a:xfrm>
+          <a:prstGeom prst="ellipse">
+            <a:avLst/>
+          </a:prstGeom>
+          <a:solidFill>
+            <a:srgbClr val="6A4CA3"/>
+          </a:solidFill>
+          <a:ln w="12700">
+            <a:solidFill>
+              <a:srgbClr val="6A4CA3"/>
+            </a:solidFill>
+            <a:prstDash val="solid"/>
+          </a:ln>
+        </p:spPr>
+      </p:sp>
+      <p:sp>
+        <p:nvSpPr>
+          <p:cNvPr id="17" name="Shape 15"/>
+          <p:cNvSpPr/>
+          <p:nvPr/>
+        </p:nvSpPr>
+        <p:spPr>
+          <a:xfrm>
+            <a:off x="8385048" y="3419856"/>
+            <a:ext cx="1975104" cy="0"/>
+          </a:xfrm>
+          <a:prstGeom prst="line">
+            <a:avLst/>
+          </a:prstGeom>
+          <a:noFill/>
+          <a:ln w="25400">
+            <a:solidFill>
+              <a:srgbClr val="8ABBD8"/>
+            </a:solidFill>
+            <a:prstDash val="solid"/>
+          </a:ln>
+        </p:spPr>
+      </p:sp>
+      <p:sp>
+        <p:nvSpPr>
+          <p:cNvPr id="18" name="Shape 16"/>
+          <p:cNvSpPr/>
+          <p:nvPr/>
+        </p:nvSpPr>
+        <p:spPr>
+          <a:xfrm>
+            <a:off x="8202168" y="3630168"/>
+            <a:ext cx="1170432" cy="118872"/>
+          </a:xfrm>
+          <a:prstGeom prst="line">
+            <a:avLst/>
+          </a:prstGeom>
+          <a:noFill/>
+          <a:ln w="25400">
+            <a:solidFill>
+              <a:srgbClr val="8ABBD8"/>
+            </a:solidFill>
+            <a:prstDash val="solid"/>
+          </a:ln>
+        </p:spPr>
+      </p:sp>
+      <p:sp>
+        <p:nvSpPr>
+          <p:cNvPr id="19" name="Shape 17"/>
+          <p:cNvSpPr/>
+          <p:nvPr/>
+        </p:nvSpPr>
+        <p:spPr>
+          <a:xfrm>
+            <a:off x="10543032" y="3630168"/>
+            <a:ext cx="-1170432" cy="118872"/>
+          </a:xfrm>
+          <a:prstGeom prst="line">
+            <a:avLst/>
+          </a:prstGeom>
+          <a:noFill/>
+          <a:ln w="25400">
+            <a:solidFill>
+              <a:srgbClr val="8ABBD8"/>
+            </a:solidFill>
+            <a:prstDash val="solid"/>
+          </a:ln>
+        </p:spPr>
+      </p:sp>
+      <p:sp>
+        <p:nvSpPr>
+          <p:cNvPr id="20" name="Text 18"/>
+          <p:cNvSpPr/>
+          <p:nvPr/>
+        </p:nvSpPr>
+        <p:spPr>
+          <a:xfrm>
+            <a:off x="7863840" y="4069080"/>
+            <a:ext cx="3017520" cy="164592"/>
           </a:xfrm>
           <a:prstGeom prst="rect">
             <a:avLst/>
@@ -14156,79 +15571,38 @@
           <a:bodyPr wrap="square" lIns="0" tIns="0" rIns="0" bIns="0" rtlCol="0" anchor="ctr"/>
           <a:lstStyle/>
           <a:p>
-            <a:pPr indent="0" marL="0">
-              <a:buNone/>
-            </a:pPr>
-            <a:r>
-              <a:rPr lang="en-US" sz="1300" b="1" dirty="0">
-                <a:solidFill>
-                  <a:srgbClr val="0068B7"/>
-                </a:solidFill>
-                <a:latin typeface="Aptos" pitchFamily="34" charset="0"/>
-                <a:ea typeface="Aptos" pitchFamily="34" charset="-122"/>
-                <a:cs typeface="Aptos" pitchFamily="34" charset="-120"/>
-              </a:rPr>
-              <a:t>Key idea</a:t>
-            </a:r>
-            <a:endParaRPr lang="en-US" sz="1300" dirty="0"/>
-          </a:p>
-        </p:txBody>
-      </p:sp>
-      <p:sp>
-        <p:nvSpPr>
-          <p:cNvPr id="14" name="Text 12"/>
-          <p:cNvSpPr/>
-          <p:nvPr/>
-        </p:nvSpPr>
-        <p:spPr>
-          <a:xfrm>
-            <a:off x="8074152" y="1920240"/>
-            <a:ext cx="2825496" cy="1188720"/>
-          </a:xfrm>
-          <a:prstGeom prst="rect">
-            <a:avLst/>
-          </a:prstGeom>
-          <a:noFill/>
-          <a:ln/>
-        </p:spPr>
-        <p:txBody>
-          <a:bodyPr wrap="square" lIns="0" tIns="0" rIns="0" bIns="0" rtlCol="0" anchor="t">
-            <a:normAutofit/>
-          </a:bodyPr>
-          <a:lstStyle/>
-          <a:p>
-            <a:pPr indent="0" marL="0">
-              <a:buNone/>
-            </a:pPr>
-            <a:r>
-              <a:rPr lang="en-US" sz="1550" dirty="0">
-                <a:solidFill>
-                  <a:srgbClr val="17364A"/>
-                </a:solidFill>
-                <a:latin typeface="Aptos" pitchFamily="34" charset="0"/>
-                <a:ea typeface="Aptos" pitchFamily="34" charset="-122"/>
-                <a:cs typeface="Aptos" pitchFamily="34" charset="-120"/>
-              </a:rPr>
-              <a:t>This national-level module is intended for training and planning purposes.</a:t>
-            </a:r>
-            <a:endParaRPr lang="en-US" sz="1550" dirty="0"/>
-          </a:p>
-        </p:txBody>
-      </p:sp>
-      <p:sp>
-        <p:nvSpPr>
-          <p:cNvPr id="15" name="Shape 13"/>
-          <p:cNvSpPr/>
-          <p:nvPr/>
-        </p:nvSpPr>
-        <p:spPr>
-          <a:xfrm>
-            <a:off x="7909560" y="3520440"/>
-            <a:ext cx="3154680" cy="1737360"/>
+            <a:pPr algn="ctr" indent="0" marL="0">
+              <a:buNone/>
+            </a:pPr>
+            <a:r>
+              <a:rPr lang="en-US" sz="900" b="1" dirty="0">
+                <a:solidFill>
+                  <a:srgbClr val="003A63"/>
+                </a:solidFill>
+                <a:latin typeface="Aptos" pitchFamily="34" charset="0"/>
+                <a:ea typeface="Aptos" pitchFamily="34" charset="-122"/>
+                <a:cs typeface="Aptos" pitchFamily="34" charset="-120"/>
+              </a:rPr>
+              <a:t>Decision rights</a:t>
+            </a:r>
+            <a:endParaRPr lang="en-US" sz="900" dirty="0"/>
+          </a:p>
+        </p:txBody>
+      </p:sp>
+      <p:sp>
+        <p:nvSpPr>
+          <p:cNvPr id="21" name="Shape 19"/>
+          <p:cNvSpPr/>
+          <p:nvPr/>
+        </p:nvSpPr>
+        <p:spPr>
+          <a:xfrm>
+            <a:off x="7635240" y="4498848"/>
+            <a:ext cx="3474720" cy="1143000"/>
           </a:xfrm>
           <a:prstGeom prst="roundRect">
             <a:avLst>
-              <a:gd name="adj" fmla="val 6316"/>
+              <a:gd name="adj" fmla="val 9600"/>
             </a:avLst>
           </a:prstGeom>
           <a:solidFill>
@@ -14244,14 +15618,14 @@
       </p:sp>
       <p:sp>
         <p:nvSpPr>
-          <p:cNvPr id="16" name="Text 14"/>
-          <p:cNvSpPr/>
-          <p:nvPr/>
-        </p:nvSpPr>
-        <p:spPr>
-          <a:xfrm>
-            <a:off x="8074152" y="3666744"/>
-            <a:ext cx="2825496" cy="256032"/>
+          <p:cNvPr id="22" name="Text 20"/>
+          <p:cNvSpPr/>
+          <p:nvPr/>
+        </p:nvSpPr>
+        <p:spPr>
+          <a:xfrm>
+            <a:off x="7799832" y="4645152"/>
+            <a:ext cx="3145536" cy="256032"/>
           </a:xfrm>
           <a:prstGeom prst="rect">
             <a:avLst/>
@@ -14275,7 +15649,7 @@
                 <a:ea typeface="Aptos" pitchFamily="34" charset="-122"/>
                 <a:cs typeface="Aptos" pitchFamily="34" charset="-120"/>
               </a:rPr>
-              <a:t>Use this for</a:t>
+              <a:t>What to document</a:t>
             </a:r>
             <a:endParaRPr lang="en-US" sz="1300" dirty="0"/>
           </a:p>
@@ -14283,14 +15657,14 @@
       </p:sp>
       <p:sp>
         <p:nvSpPr>
-          <p:cNvPr id="17" name="Text 15"/>
-          <p:cNvSpPr/>
-          <p:nvPr/>
-        </p:nvSpPr>
-        <p:spPr>
-          <a:xfrm>
-            <a:off x="8074152" y="4023360"/>
-            <a:ext cx="2825496" cy="1097280"/>
+          <p:cNvPr id="23" name="Text 21"/>
+          <p:cNvSpPr/>
+          <p:nvPr/>
+        </p:nvSpPr>
+        <p:spPr>
+          <a:xfrm>
+            <a:off x="7799832" y="5001768"/>
+            <a:ext cx="3145536" cy="502920"/>
           </a:xfrm>
           <a:prstGeom prst="rect">
             <a:avLst/>
@@ -14316,7 +15690,7 @@
                 <a:ea typeface="Aptos" pitchFamily="34" charset="-122"/>
                 <a:cs typeface="Aptos" pitchFamily="34" charset="-120"/>
               </a:rPr>
-              <a:t>Connect the concept to public health decisions, safeguards, documentation, or implementation work.</a:t>
+              <a:t>Translate this concept into clear decision rights, review steps, documentation expectations, and escalation paths before an AI-supported workflow is approved.</a:t>
             </a:r>
             <a:endParaRPr lang="en-US" sz="1550" dirty="0"/>
           </a:p>
@@ -14490,8 +15864,8 @@
         </p:nvSpPr>
         <p:spPr>
           <a:xfrm>
-            <a:off x="9966960" y="6537960"/>
-            <a:ext cx="1645920" cy="201168"/>
+            <a:off x="9646920" y="6537960"/>
+            <a:ext cx="1965960" cy="201168"/>
           </a:xfrm>
           <a:prstGeom prst="rect">
             <a:avLst/>
@@ -14515,7 +15889,7 @@
                 <a:ea typeface="Aptos" pitchFamily="34" charset="-122"/>
                 <a:cs typeface="Aptos" pitchFamily="34" charset="-120"/>
               </a:rPr>
-              <a:t>Â© Paula Soper</a:t>
+              <a:t>Copyright Paula Soper</a:t>
             </a:r>
             <a:endParaRPr lang="en-US" sz="800" dirty="0"/>
           </a:p>
@@ -14562,77 +15936,13 @@
       </p:sp>
       <p:sp>
         <p:nvSpPr>
-          <p:cNvPr id="8" name="Shape 6"/>
+          <p:cNvPr id="8" name="Text 6"/>
           <p:cNvSpPr/>
           <p:nvPr/>
         </p:nvSpPr>
         <p:spPr>
           <a:xfrm>
             <a:off x="640080" y="658368"/>
-            <a:ext cx="420624" cy="420624"/>
-          </a:xfrm>
-          <a:prstGeom prst="ellipse">
-            <a:avLst/>
-          </a:prstGeom>
-          <a:solidFill>
-            <a:srgbClr val="0068B7"/>
-          </a:solidFill>
-          <a:ln w="12700">
-            <a:solidFill>
-              <a:srgbClr val="0068B7"/>
-            </a:solidFill>
-            <a:prstDash val="solid"/>
-          </a:ln>
-        </p:spPr>
-      </p:sp>
-      <p:sp>
-        <p:nvSpPr>
-          <p:cNvPr id="9" name="Text 7"/>
-          <p:cNvSpPr/>
-          <p:nvPr/>
-        </p:nvSpPr>
-        <p:spPr>
-          <a:xfrm>
-            <a:off x="640080" y="731520"/>
-            <a:ext cx="420624" cy="164592"/>
-          </a:xfrm>
-          <a:prstGeom prst="rect">
-            <a:avLst/>
-          </a:prstGeom>
-          <a:noFill/>
-          <a:ln/>
-        </p:spPr>
-        <p:txBody>
-          <a:bodyPr wrap="square" lIns="0" tIns="0" rIns="0" bIns="0" rtlCol="0" anchor="ctr"/>
-          <a:lstStyle/>
-          <a:p>
-            <a:pPr algn="ctr" indent="0" marL="0">
-              <a:buNone/>
-            </a:pPr>
-            <a:r>
-              <a:rPr lang="en-US" sz="1100" b="1" dirty="0">
-                <a:solidFill>
-                  <a:srgbClr val="FFFFFF"/>
-                </a:solidFill>
-                <a:latin typeface="Aptos" pitchFamily="34" charset="0"/>
-                <a:ea typeface="Aptos" pitchFamily="34" charset="-122"/>
-                <a:cs typeface="Aptos" pitchFamily="34" charset="-120"/>
-              </a:rPr>
-              <a:t>4</a:t>
-            </a:r>
-            <a:endParaRPr lang="en-US" sz="1100" dirty="0"/>
-          </a:p>
-        </p:txBody>
-      </p:sp>
-      <p:sp>
-        <p:nvSpPr>
-          <p:cNvPr id="10" name="Text 8"/>
-          <p:cNvSpPr/>
-          <p:nvPr/>
-        </p:nvSpPr>
-        <p:spPr>
-          <a:xfrm>
-            <a:off x="640080" y="621792"/>
             <a:ext cx="10881360" cy="713232"/>
           </a:xfrm>
           <a:prstGeom prst="rect">
@@ -14667,14 +15977,14 @@
       </p:sp>
       <p:sp>
         <p:nvSpPr>
-          <p:cNvPr id="11" name="Text 9"/>
+          <p:cNvPr id="9" name="Text 7"/>
           <p:cNvSpPr/>
           <p:nvPr/>
         </p:nvSpPr>
         <p:spPr>
           <a:xfrm>
             <a:off x="868680" y="1508760"/>
-            <a:ext cx="6537960" cy="4160520"/>
+            <a:ext cx="6309360" cy="4160520"/>
           </a:xfrm>
           <a:prstGeom prst="rect">
             <a:avLst/>
@@ -14733,18 +16043,18 @@
       </p:sp>
       <p:sp>
         <p:nvSpPr>
-          <p:cNvPr id="12" name="Shape 10"/>
-          <p:cNvSpPr/>
-          <p:nvPr/>
-        </p:nvSpPr>
-        <p:spPr>
-          <a:xfrm>
-            <a:off x="7909560" y="1417320"/>
-            <a:ext cx="3154680" cy="1828800"/>
+          <p:cNvPr id="10" name="Shape 8"/>
+          <p:cNvSpPr/>
+          <p:nvPr/>
+        </p:nvSpPr>
+        <p:spPr>
+          <a:xfrm>
+            <a:off x="7635240" y="1325880"/>
+            <a:ext cx="3474720" cy="1325880"/>
           </a:xfrm>
           <a:prstGeom prst="roundRect">
             <a:avLst>
-              <a:gd name="adj" fmla="val 6000"/>
+              <a:gd name="adj" fmla="val 8276"/>
             </a:avLst>
           </a:prstGeom>
           <a:solidFill>
@@ -14760,14 +16070,14 @@
       </p:sp>
       <p:sp>
         <p:nvSpPr>
-          <p:cNvPr id="13" name="Text 11"/>
-          <p:cNvSpPr/>
-          <p:nvPr/>
-        </p:nvSpPr>
-        <p:spPr>
-          <a:xfrm>
-            <a:off x="8074152" y="1563624"/>
-            <a:ext cx="2825496" cy="256032"/>
+          <p:cNvPr id="11" name="Text 9"/>
+          <p:cNvSpPr/>
+          <p:nvPr/>
+        </p:nvSpPr>
+        <p:spPr>
+          <a:xfrm>
+            <a:off x="7799832" y="1472184"/>
+            <a:ext cx="3145536" cy="256032"/>
           </a:xfrm>
           <a:prstGeom prst="rect">
             <a:avLst/>
@@ -14791,7 +16101,7 @@
                 <a:ea typeface="Aptos" pitchFamily="34" charset="-122"/>
                 <a:cs typeface="Aptos" pitchFamily="34" charset="-120"/>
               </a:rPr>
-              <a:t>Key idea</a:t>
+              <a:t>Core concept</a:t>
             </a:r>
             <a:endParaRPr lang="en-US" sz="1300" dirty="0"/>
           </a:p>
@@ -14799,14 +16109,14 @@
       </p:sp>
       <p:sp>
         <p:nvSpPr>
-          <p:cNvPr id="14" name="Text 12"/>
-          <p:cNvSpPr/>
-          <p:nvPr/>
-        </p:nvSpPr>
-        <p:spPr>
-          <a:xfrm>
-            <a:off x="8074152" y="1920240"/>
-            <a:ext cx="2825496" cy="1188720"/>
+          <p:cNvPr id="12" name="Text 10"/>
+          <p:cNvSpPr/>
+          <p:nvPr/>
+        </p:nvSpPr>
+        <p:spPr>
+          <a:xfrm>
+            <a:off x="7799832" y="1828800"/>
+            <a:ext cx="3145536" cy="685800"/>
           </a:xfrm>
           <a:prstGeom prst="rect">
             <a:avLst/>
@@ -14840,18 +16150,159 @@
       </p:sp>
       <p:sp>
         <p:nvSpPr>
-          <p:cNvPr id="15" name="Shape 13"/>
-          <p:cNvSpPr/>
-          <p:nvPr/>
-        </p:nvSpPr>
-        <p:spPr>
-          <a:xfrm>
-            <a:off x="7909560" y="3520440"/>
-            <a:ext cx="3154680" cy="1737360"/>
+          <p:cNvPr id="13" name="Shape 11"/>
+          <p:cNvSpPr/>
+          <p:nvPr/>
+        </p:nvSpPr>
+        <p:spPr>
+          <a:xfrm>
+            <a:off x="7635240" y="2788920"/>
+            <a:ext cx="3474720" cy="1536192"/>
           </a:xfrm>
           <a:prstGeom prst="roundRect">
             <a:avLst>
-              <a:gd name="adj" fmla="val 6316"/>
+              <a:gd name="adj" fmla="val 7143"/>
+            </a:avLst>
+          </a:prstGeom>
+          <a:solidFill>
+            <a:srgbClr val="FFFFFF">
+              <a:alpha val="88000"/>
+            </a:srgbClr>
+          </a:solidFill>
+          <a:ln w="12700">
+            <a:solidFill>
+              <a:srgbClr val="D6E8F2"/>
+            </a:solidFill>
+            <a:prstDash val="solid"/>
+          </a:ln>
+        </p:spPr>
+      </p:sp>
+      <p:sp>
+        <p:nvSpPr>
+          <p:cNvPr id="14" name="Shape 12"/>
+          <p:cNvSpPr/>
+          <p:nvPr/>
+        </p:nvSpPr>
+        <p:spPr>
+          <a:xfrm>
+            <a:off x="8074152" y="3291840"/>
+            <a:ext cx="2596896" cy="749808"/>
+          </a:xfrm>
+          <a:prstGeom prst="rect">
+            <a:avLst/>
+          </a:prstGeom>
+          <a:solidFill>
+            <a:srgbClr val="EAF6F8"/>
+          </a:solidFill>
+          <a:ln w="12700">
+            <a:solidFill>
+              <a:srgbClr val="8ABBD8"/>
+            </a:solidFill>
+            <a:prstDash val="solid"/>
+          </a:ln>
+        </p:spPr>
+      </p:sp>
+      <p:sp>
+        <p:nvSpPr>
+          <p:cNvPr id="15" name="Shape 13"/>
+          <p:cNvSpPr/>
+          <p:nvPr/>
+        </p:nvSpPr>
+        <p:spPr>
+          <a:xfrm>
+            <a:off x="8202168" y="3721608"/>
+            <a:ext cx="2340864" cy="0"/>
+          </a:xfrm>
+          <a:prstGeom prst="line">
+            <a:avLst/>
+          </a:prstGeom>
+          <a:noFill/>
+          <a:ln w="19050">
+            <a:solidFill>
+              <a:srgbClr val="0068B7"/>
+            </a:solidFill>
+            <a:prstDash val="solid"/>
+          </a:ln>
+        </p:spPr>
+      </p:sp>
+      <p:sp>
+        <p:nvSpPr>
+          <p:cNvPr id="16" name="Shape 14"/>
+          <p:cNvSpPr/>
+          <p:nvPr/>
+        </p:nvSpPr>
+        <p:spPr>
+          <a:xfrm>
+            <a:off x="9198864" y="4206240"/>
+            <a:ext cx="347472" cy="347472"/>
+          </a:xfrm>
+          <a:prstGeom prst="ellipse">
+            <a:avLst/>
+          </a:prstGeom>
+          <a:solidFill>
+            <a:srgbClr val="2F8A28"/>
+          </a:solidFill>
+          <a:ln w="12700">
+            <a:solidFill>
+              <a:srgbClr val="2F8A28"/>
+            </a:solidFill>
+            <a:prstDash val="solid"/>
+          </a:ln>
+        </p:spPr>
+      </p:sp>
+      <p:sp>
+        <p:nvSpPr>
+          <p:cNvPr id="17" name="Text 15"/>
+          <p:cNvSpPr/>
+          <p:nvPr/>
+        </p:nvSpPr>
+        <p:spPr>
+          <a:xfrm>
+            <a:off x="7909560" y="3977640"/>
+            <a:ext cx="2926080" cy="182880"/>
+          </a:xfrm>
+          <a:prstGeom prst="rect">
+            <a:avLst/>
+          </a:prstGeom>
+          <a:noFill/>
+          <a:ln/>
+        </p:spPr>
+        <p:txBody>
+          <a:bodyPr wrap="square" lIns="0" tIns="0" rIns="0" bIns="0" rtlCol="0" anchor="ctr"/>
+          <a:lstStyle/>
+          <a:p>
+            <a:pPr algn="ctr" indent="0" marL="0">
+              <a:buNone/>
+            </a:pPr>
+            <a:r>
+              <a:rPr lang="en-US" sz="1000" dirty="0">
+                <a:solidFill>
+                  <a:srgbClr val="003A63"/>
+                </a:solidFill>
+                <a:latin typeface="Aptos" pitchFamily="34" charset="0"/>
+                <a:ea typeface="Aptos" pitchFamily="34" charset="-122"/>
+                <a:cs typeface="Aptos" pitchFamily="34" charset="-120"/>
+              </a:rPr>
+              <a:t>Concept to action</a:t>
+            </a:r>
+            <a:endParaRPr lang="en-US" sz="1000" dirty="0"/>
+          </a:p>
+        </p:txBody>
+      </p:sp>
+      <p:sp>
+        <p:nvSpPr>
+          <p:cNvPr id="18" name="Shape 16"/>
+          <p:cNvSpPr/>
+          <p:nvPr/>
+        </p:nvSpPr>
+        <p:spPr>
+          <a:xfrm>
+            <a:off x="7635240" y="4498848"/>
+            <a:ext cx="3474720" cy="1143000"/>
+          </a:xfrm>
+          <a:prstGeom prst="roundRect">
+            <a:avLst>
+              <a:gd name="adj" fmla="val 9600"/>
             </a:avLst>
           </a:prstGeom>
           <a:solidFill>
@@ -14867,14 +16318,14 @@
       </p:sp>
       <p:sp>
         <p:nvSpPr>
-          <p:cNvPr id="16" name="Text 14"/>
-          <p:cNvSpPr/>
-          <p:nvPr/>
-        </p:nvSpPr>
-        <p:spPr>
-          <a:xfrm>
-            <a:off x="8074152" y="3666744"/>
-            <a:ext cx="2825496" cy="256032"/>
+          <p:cNvPr id="19" name="Text 17"/>
+          <p:cNvSpPr/>
+          <p:nvPr/>
+        </p:nvSpPr>
+        <p:spPr>
+          <a:xfrm>
+            <a:off x="7799832" y="4645152"/>
+            <a:ext cx="3145536" cy="256032"/>
           </a:xfrm>
           <a:prstGeom prst="rect">
             <a:avLst/>
@@ -14898,7 +16349,7 @@
                 <a:ea typeface="Aptos" pitchFamily="34" charset="-122"/>
                 <a:cs typeface="Aptos" pitchFamily="34" charset="-120"/>
               </a:rPr>
-              <a:t>Use this for</a:t>
+              <a:t>Apply it</a:t>
             </a:r>
             <a:endParaRPr lang="en-US" sz="1300" dirty="0"/>
           </a:p>
@@ -14906,14 +16357,14 @@
       </p:sp>
       <p:sp>
         <p:nvSpPr>
-          <p:cNvPr id="17" name="Text 15"/>
-          <p:cNvSpPr/>
-          <p:nvPr/>
-        </p:nvSpPr>
-        <p:spPr>
-          <a:xfrm>
-            <a:off x="8074152" y="4023360"/>
-            <a:ext cx="2825496" cy="1097280"/>
+          <p:cNvPr id="20" name="Text 18"/>
+          <p:cNvSpPr/>
+          <p:nvPr/>
+        </p:nvSpPr>
+        <p:spPr>
+          <a:xfrm>
+            <a:off x="7799832" y="5001768"/>
+            <a:ext cx="3145536" cy="502920"/>
           </a:xfrm>
           <a:prstGeom prst="rect">
             <a:avLst/>
@@ -14939,7 +16390,7 @@
                 <a:ea typeface="Aptos" pitchFamily="34" charset="-122"/>
                 <a:cs typeface="Aptos" pitchFamily="34" charset="-120"/>
               </a:rPr>
-              <a:t>Connect the concept to public health decisions, safeguards, documentation, or implementation work.</a:t>
+              <a:t>Connect the concept to public health purpose, responsible use, required safeguards, documentation, and the next action a department should take.</a:t>
             </a:r>
             <a:endParaRPr lang="en-US" sz="1550" dirty="0"/>
           </a:p>
@@ -15113,8 +16564,8 @@
         </p:nvSpPr>
         <p:spPr>
           <a:xfrm>
-            <a:off x="9966960" y="6537960"/>
-            <a:ext cx="1645920" cy="201168"/>
+            <a:off x="9646920" y="6537960"/>
+            <a:ext cx="1965960" cy="201168"/>
           </a:xfrm>
           <a:prstGeom prst="rect">
             <a:avLst/>
@@ -15138,7 +16589,7 @@
                 <a:ea typeface="Aptos" pitchFamily="34" charset="-122"/>
                 <a:cs typeface="Aptos" pitchFamily="34" charset="-120"/>
               </a:rPr>
-              <a:t>Â© Paula Soper</a:t>
+              <a:t>Copyright Paula Soper</a:t>
             </a:r>
             <a:endParaRPr lang="en-US" sz="800" dirty="0"/>
           </a:p>
@@ -15185,77 +16636,13 @@
       </p:sp>
       <p:sp>
         <p:nvSpPr>
-          <p:cNvPr id="8" name="Shape 6"/>
+          <p:cNvPr id="8" name="Text 6"/>
           <p:cNvSpPr/>
           <p:nvPr/>
         </p:nvSpPr>
         <p:spPr>
           <a:xfrm>
             <a:off x="640080" y="658368"/>
-            <a:ext cx="420624" cy="420624"/>
-          </a:xfrm>
-          <a:prstGeom prst="ellipse">
-            <a:avLst/>
-          </a:prstGeom>
-          <a:solidFill>
-            <a:srgbClr val="0068B7"/>
-          </a:solidFill>
-          <a:ln w="12700">
-            <a:solidFill>
-              <a:srgbClr val="0068B7"/>
-            </a:solidFill>
-            <a:prstDash val="solid"/>
-          </a:ln>
-        </p:spPr>
-      </p:sp>
-      <p:sp>
-        <p:nvSpPr>
-          <p:cNvPr id="9" name="Text 7"/>
-          <p:cNvSpPr/>
-          <p:nvPr/>
-        </p:nvSpPr>
-        <p:spPr>
-          <a:xfrm>
-            <a:off x="640080" y="731520"/>
-            <a:ext cx="420624" cy="164592"/>
-          </a:xfrm>
-          <a:prstGeom prst="rect">
-            <a:avLst/>
-          </a:prstGeom>
-          <a:noFill/>
-          <a:ln/>
-        </p:spPr>
-        <p:txBody>
-          <a:bodyPr wrap="square" lIns="0" tIns="0" rIns="0" bIns="0" rtlCol="0" anchor="ctr"/>
-          <a:lstStyle/>
-          <a:p>
-            <a:pPr algn="ctr" indent="0" marL="0">
-              <a:buNone/>
-            </a:pPr>
-            <a:r>
-              <a:rPr lang="en-US" sz="1100" b="1" dirty="0">
-                <a:solidFill>
-                  <a:srgbClr val="FFFFFF"/>
-                </a:solidFill>
-                <a:latin typeface="Aptos" pitchFamily="34" charset="0"/>
-                <a:ea typeface="Aptos" pitchFamily="34" charset="-122"/>
-                <a:cs typeface="Aptos" pitchFamily="34" charset="-120"/>
-              </a:rPr>
-              <a:t>5</a:t>
-            </a:r>
-            <a:endParaRPr lang="en-US" sz="1100" dirty="0"/>
-          </a:p>
-        </p:txBody>
-      </p:sp>
-      <p:sp>
-        <p:nvSpPr>
-          <p:cNvPr id="10" name="Text 8"/>
-          <p:cNvSpPr/>
-          <p:nvPr/>
-        </p:nvSpPr>
-        <p:spPr>
-          <a:xfrm>
-            <a:off x="640080" y="621792"/>
             <a:ext cx="10881360" cy="713232"/>
           </a:xfrm>
           <a:prstGeom prst="rect">
@@ -15290,14 +16677,14 @@
       </p:sp>
       <p:sp>
         <p:nvSpPr>
-          <p:cNvPr id="11" name="Text 9"/>
+          <p:cNvPr id="9" name="Text 7"/>
           <p:cNvSpPr/>
           <p:nvPr/>
         </p:nvSpPr>
         <p:spPr>
           <a:xfrm>
             <a:off x="868680" y="1508760"/>
-            <a:ext cx="6537960" cy="4160520"/>
+            <a:ext cx="6309360" cy="4160520"/>
           </a:xfrm>
           <a:prstGeom prst="rect">
             <a:avLst/>
@@ -15356,18 +16743,18 @@
       </p:sp>
       <p:sp>
         <p:nvSpPr>
-          <p:cNvPr id="12" name="Shape 10"/>
-          <p:cNvSpPr/>
-          <p:nvPr/>
-        </p:nvSpPr>
-        <p:spPr>
-          <a:xfrm>
-            <a:off x="7909560" y="1417320"/>
-            <a:ext cx="3154680" cy="1828800"/>
+          <p:cNvPr id="10" name="Shape 8"/>
+          <p:cNvSpPr/>
+          <p:nvPr/>
+        </p:nvSpPr>
+        <p:spPr>
+          <a:xfrm>
+            <a:off x="7635240" y="1325880"/>
+            <a:ext cx="3474720" cy="1325880"/>
           </a:xfrm>
           <a:prstGeom prst="roundRect">
             <a:avLst>
-              <a:gd name="adj" fmla="val 6000"/>
+              <a:gd name="adj" fmla="val 8276"/>
             </a:avLst>
           </a:prstGeom>
           <a:solidFill>
@@ -15383,14 +16770,14 @@
       </p:sp>
       <p:sp>
         <p:nvSpPr>
-          <p:cNvPr id="13" name="Text 11"/>
-          <p:cNvSpPr/>
-          <p:nvPr/>
-        </p:nvSpPr>
-        <p:spPr>
-          <a:xfrm>
-            <a:off x="8074152" y="1563624"/>
-            <a:ext cx="2825496" cy="256032"/>
+          <p:cNvPr id="11" name="Text 9"/>
+          <p:cNvSpPr/>
+          <p:nvPr/>
+        </p:nvSpPr>
+        <p:spPr>
+          <a:xfrm>
+            <a:off x="7799832" y="1472184"/>
+            <a:ext cx="3145536" cy="256032"/>
           </a:xfrm>
           <a:prstGeom prst="rect">
             <a:avLst/>
@@ -15414,7 +16801,7 @@
                 <a:ea typeface="Aptos" pitchFamily="34" charset="-122"/>
                 <a:cs typeface="Aptos" pitchFamily="34" charset="-120"/>
               </a:rPr>
-              <a:t>Key idea</a:t>
+              <a:t>Core concept</a:t>
             </a:r>
             <a:endParaRPr lang="en-US" sz="1300" dirty="0"/>
           </a:p>
@@ -15422,14 +16809,14 @@
       </p:sp>
       <p:sp>
         <p:nvSpPr>
-          <p:cNvPr id="14" name="Text 12"/>
-          <p:cNvSpPr/>
-          <p:nvPr/>
-        </p:nvSpPr>
-        <p:spPr>
-          <a:xfrm>
-            <a:off x="8074152" y="1920240"/>
-            <a:ext cx="2825496" cy="1188720"/>
+          <p:cNvPr id="12" name="Text 10"/>
+          <p:cNvSpPr/>
+          <p:nvPr/>
+        </p:nvSpPr>
+        <p:spPr>
+          <a:xfrm>
+            <a:off x="7799832" y="1828800"/>
+            <a:ext cx="3145536" cy="685800"/>
           </a:xfrm>
           <a:prstGeom prst="rect">
             <a:avLst/>
@@ -15463,18 +16850,159 @@
       </p:sp>
       <p:sp>
         <p:nvSpPr>
-          <p:cNvPr id="15" name="Shape 13"/>
-          <p:cNvSpPr/>
-          <p:nvPr/>
-        </p:nvSpPr>
-        <p:spPr>
-          <a:xfrm>
-            <a:off x="7909560" y="3520440"/>
-            <a:ext cx="3154680" cy="1737360"/>
+          <p:cNvPr id="13" name="Shape 11"/>
+          <p:cNvSpPr/>
+          <p:nvPr/>
+        </p:nvSpPr>
+        <p:spPr>
+          <a:xfrm>
+            <a:off x="7635240" y="2788920"/>
+            <a:ext cx="3474720" cy="1536192"/>
           </a:xfrm>
           <a:prstGeom prst="roundRect">
             <a:avLst>
-              <a:gd name="adj" fmla="val 6316"/>
+              <a:gd name="adj" fmla="val 7143"/>
+            </a:avLst>
+          </a:prstGeom>
+          <a:solidFill>
+            <a:srgbClr val="FFFFFF">
+              <a:alpha val="88000"/>
+            </a:srgbClr>
+          </a:solidFill>
+          <a:ln w="12700">
+            <a:solidFill>
+              <a:srgbClr val="D6E8F2"/>
+            </a:solidFill>
+            <a:prstDash val="solid"/>
+          </a:ln>
+        </p:spPr>
+      </p:sp>
+      <p:sp>
+        <p:nvSpPr>
+          <p:cNvPr id="14" name="Shape 12"/>
+          <p:cNvSpPr/>
+          <p:nvPr/>
+        </p:nvSpPr>
+        <p:spPr>
+          <a:xfrm>
+            <a:off x="8074152" y="3291840"/>
+            <a:ext cx="2596896" cy="749808"/>
+          </a:xfrm>
+          <a:prstGeom prst="rect">
+            <a:avLst/>
+          </a:prstGeom>
+          <a:solidFill>
+            <a:srgbClr val="EAF6F8"/>
+          </a:solidFill>
+          <a:ln w="12700">
+            <a:solidFill>
+              <a:srgbClr val="8ABBD8"/>
+            </a:solidFill>
+            <a:prstDash val="solid"/>
+          </a:ln>
+        </p:spPr>
+      </p:sp>
+      <p:sp>
+        <p:nvSpPr>
+          <p:cNvPr id="15" name="Shape 13"/>
+          <p:cNvSpPr/>
+          <p:nvPr/>
+        </p:nvSpPr>
+        <p:spPr>
+          <a:xfrm>
+            <a:off x="8202168" y="3721608"/>
+            <a:ext cx="2340864" cy="0"/>
+          </a:xfrm>
+          <a:prstGeom prst="line">
+            <a:avLst/>
+          </a:prstGeom>
+          <a:noFill/>
+          <a:ln w="19050">
+            <a:solidFill>
+              <a:srgbClr val="0068B7"/>
+            </a:solidFill>
+            <a:prstDash val="solid"/>
+          </a:ln>
+        </p:spPr>
+      </p:sp>
+      <p:sp>
+        <p:nvSpPr>
+          <p:cNvPr id="16" name="Shape 14"/>
+          <p:cNvSpPr/>
+          <p:nvPr/>
+        </p:nvSpPr>
+        <p:spPr>
+          <a:xfrm>
+            <a:off x="9198864" y="4206240"/>
+            <a:ext cx="347472" cy="347472"/>
+          </a:xfrm>
+          <a:prstGeom prst="ellipse">
+            <a:avLst/>
+          </a:prstGeom>
+          <a:solidFill>
+            <a:srgbClr val="2F8A28"/>
+          </a:solidFill>
+          <a:ln w="12700">
+            <a:solidFill>
+              <a:srgbClr val="2F8A28"/>
+            </a:solidFill>
+            <a:prstDash val="solid"/>
+          </a:ln>
+        </p:spPr>
+      </p:sp>
+      <p:sp>
+        <p:nvSpPr>
+          <p:cNvPr id="17" name="Text 15"/>
+          <p:cNvSpPr/>
+          <p:nvPr/>
+        </p:nvSpPr>
+        <p:spPr>
+          <a:xfrm>
+            <a:off x="7909560" y="3977640"/>
+            <a:ext cx="2926080" cy="182880"/>
+          </a:xfrm>
+          <a:prstGeom prst="rect">
+            <a:avLst/>
+          </a:prstGeom>
+          <a:noFill/>
+          <a:ln/>
+        </p:spPr>
+        <p:txBody>
+          <a:bodyPr wrap="square" lIns="0" tIns="0" rIns="0" bIns="0" rtlCol="0" anchor="ctr"/>
+          <a:lstStyle/>
+          <a:p>
+            <a:pPr algn="ctr" indent="0" marL="0">
+              <a:buNone/>
+            </a:pPr>
+            <a:r>
+              <a:rPr lang="en-US" sz="1000" dirty="0">
+                <a:solidFill>
+                  <a:srgbClr val="003A63"/>
+                </a:solidFill>
+                <a:latin typeface="Aptos" pitchFamily="34" charset="0"/>
+                <a:ea typeface="Aptos" pitchFamily="34" charset="-122"/>
+                <a:cs typeface="Aptos" pitchFamily="34" charset="-120"/>
+              </a:rPr>
+              <a:t>Concept to action</a:t>
+            </a:r>
+            <a:endParaRPr lang="en-US" sz="1000" dirty="0"/>
+          </a:p>
+        </p:txBody>
+      </p:sp>
+      <p:sp>
+        <p:nvSpPr>
+          <p:cNvPr id="18" name="Shape 16"/>
+          <p:cNvSpPr/>
+          <p:nvPr/>
+        </p:nvSpPr>
+        <p:spPr>
+          <a:xfrm>
+            <a:off x="7635240" y="4498848"/>
+            <a:ext cx="3474720" cy="1143000"/>
+          </a:xfrm>
+          <a:prstGeom prst="roundRect">
+            <a:avLst>
+              <a:gd name="adj" fmla="val 9600"/>
             </a:avLst>
           </a:prstGeom>
           <a:solidFill>
@@ -15490,14 +17018,14 @@
       </p:sp>
       <p:sp>
         <p:nvSpPr>
-          <p:cNvPr id="16" name="Text 14"/>
-          <p:cNvSpPr/>
-          <p:nvPr/>
-        </p:nvSpPr>
-        <p:spPr>
-          <a:xfrm>
-            <a:off x="8074152" y="3666744"/>
-            <a:ext cx="2825496" cy="256032"/>
+          <p:cNvPr id="19" name="Text 17"/>
+          <p:cNvSpPr/>
+          <p:nvPr/>
+        </p:nvSpPr>
+        <p:spPr>
+          <a:xfrm>
+            <a:off x="7799832" y="4645152"/>
+            <a:ext cx="3145536" cy="256032"/>
           </a:xfrm>
           <a:prstGeom prst="rect">
             <a:avLst/>
@@ -15521,7 +17049,7 @@
                 <a:ea typeface="Aptos" pitchFamily="34" charset="-122"/>
                 <a:cs typeface="Aptos" pitchFamily="34" charset="-120"/>
               </a:rPr>
-              <a:t>Use this for</a:t>
+              <a:t>Apply it</a:t>
             </a:r>
             <a:endParaRPr lang="en-US" sz="1300" dirty="0"/>
           </a:p>
@@ -15529,14 +17057,14 @@
       </p:sp>
       <p:sp>
         <p:nvSpPr>
-          <p:cNvPr id="17" name="Text 15"/>
-          <p:cNvSpPr/>
-          <p:nvPr/>
-        </p:nvSpPr>
-        <p:spPr>
-          <a:xfrm>
-            <a:off x="8074152" y="4023360"/>
-            <a:ext cx="2825496" cy="1097280"/>
+          <p:cNvPr id="20" name="Text 18"/>
+          <p:cNvSpPr/>
+          <p:nvPr/>
+        </p:nvSpPr>
+        <p:spPr>
+          <a:xfrm>
+            <a:off x="7799832" y="5001768"/>
+            <a:ext cx="3145536" cy="502920"/>
           </a:xfrm>
           <a:prstGeom prst="rect">
             <a:avLst/>
@@ -15562,7 +17090,7 @@
                 <a:ea typeface="Aptos" pitchFamily="34" charset="-122"/>
                 <a:cs typeface="Aptos" pitchFamily="34" charset="-120"/>
               </a:rPr>
-              <a:t>Connect the concept to public health decisions, safeguards, documentation, or implementation work.</a:t>
+              <a:t>Connect the concept to public health purpose, responsible use, required safeguards, documentation, and the next action a department should take.</a:t>
             </a:r>
             <a:endParaRPr lang="en-US" sz="1550" dirty="0"/>
           </a:p>

--- a/downloads/presentations/modules/exe-420.pptx
+++ b/downloads/presentations/modules/exe-420.pptx
@@ -3425,13 +3425,11 @@
             </a:avLst>
           </a:prstGeom>
           <a:solidFill>
-            <a:srgbClr val="FFFFFF">
-              <a:alpha val="88000"/>
-            </a:srgbClr>
+            <a:srgbClr val="FFFFFF"/>
           </a:solidFill>
           <a:ln w="12700">
             <a:solidFill>
-              <a:srgbClr val="D6E8F2"/>
+              <a:srgbClr val="B9D7E6"/>
             </a:solidFill>
             <a:prstDash val="solid"/>
           </a:ln>
@@ -3439,190 +3437,112 @@
       </p:sp>
       <p:sp>
         <p:nvSpPr>
-          <p:cNvPr id="14" name="Shape 12"/>
-          <p:cNvSpPr/>
-          <p:nvPr/>
-        </p:nvSpPr>
-        <p:spPr>
-          <a:xfrm>
-            <a:off x="7891272" y="3108960"/>
-            <a:ext cx="566928" cy="566928"/>
-          </a:xfrm>
-          <a:prstGeom prst="ellipse">
-            <a:avLst/>
-          </a:prstGeom>
-          <a:solidFill>
-            <a:srgbClr val="0068B7"/>
-          </a:solidFill>
-          <a:ln w="12700">
-            <a:solidFill>
-              <a:srgbClr val="0068B7"/>
-            </a:solidFill>
-            <a:prstDash val="solid"/>
-          </a:ln>
-        </p:spPr>
-      </p:sp>
-      <p:sp>
-        <p:nvSpPr>
-          <p:cNvPr id="15" name="Shape 13"/>
-          <p:cNvSpPr/>
-          <p:nvPr/>
-        </p:nvSpPr>
-        <p:spPr>
-          <a:xfrm>
-            <a:off x="10287000" y="3108960"/>
-            <a:ext cx="566928" cy="566928"/>
-          </a:xfrm>
-          <a:prstGeom prst="ellipse">
-            <a:avLst/>
-          </a:prstGeom>
-          <a:solidFill>
-            <a:srgbClr val="2F8A28"/>
-          </a:solidFill>
-          <a:ln w="12700">
-            <a:solidFill>
-              <a:srgbClr val="2F8A28"/>
-            </a:solidFill>
-            <a:prstDash val="solid"/>
-          </a:ln>
-        </p:spPr>
+          <p:cNvPr id="14" name="Text 12"/>
+          <p:cNvSpPr/>
+          <p:nvPr/>
+        </p:nvSpPr>
+        <p:spPr>
+          <a:xfrm>
+            <a:off x="7799832" y="2935224"/>
+            <a:ext cx="3145536" cy="256032"/>
+          </a:xfrm>
+          <a:prstGeom prst="rect">
+            <a:avLst/>
+          </a:prstGeom>
+          <a:noFill/>
+          <a:ln/>
+        </p:spPr>
+        <p:txBody>
+          <a:bodyPr wrap="square" lIns="0" tIns="0" rIns="0" bIns="0" rtlCol="0" anchor="ctr"/>
+          <a:lstStyle/>
+          <a:p>
+            <a:pPr indent="0" marL="0">
+              <a:buNone/>
+            </a:pPr>
+            <a:r>
+              <a:rPr lang="en-US" sz="1300" b="1" dirty="0">
+                <a:solidFill>
+                  <a:srgbClr val="0068B7"/>
+                </a:solidFill>
+                <a:latin typeface="Aptos" pitchFamily="34" charset="0"/>
+                <a:ea typeface="Aptos" pitchFamily="34" charset="-122"/>
+                <a:cs typeface="Aptos" pitchFamily="34" charset="-120"/>
+              </a:rPr>
+              <a:t>Concept checkpoints</a:t>
+            </a:r>
+            <a:endParaRPr lang="en-US" sz="1300" dirty="0"/>
+          </a:p>
+        </p:txBody>
+      </p:sp>
+      <p:sp>
+        <p:nvSpPr>
+          <p:cNvPr id="15" name="Text 13"/>
+          <p:cNvSpPr/>
+          <p:nvPr/>
+        </p:nvSpPr>
+        <p:spPr>
+          <a:xfrm>
+            <a:off x="7818120" y="3300984"/>
+            <a:ext cx="3090672" cy="877824"/>
+          </a:xfrm>
+          <a:prstGeom prst="rect">
+            <a:avLst/>
+          </a:prstGeom>
+          <a:noFill/>
+          <a:ln/>
+        </p:spPr>
+        <p:txBody>
+          <a:bodyPr wrap="square" lIns="254" tIns="254" rIns="254" bIns="254" rtlCol="0" anchor="t">
+            <a:normAutofit/>
+          </a:bodyPr>
+          <a:lstStyle/>
+          <a:p>
+            <a:r>
+              <a:rPr lang="en-US" sz="1380" dirty="0">
+                <a:solidFill>
+                  <a:srgbClr val="17364A"/>
+                </a:solidFill>
+                <a:latin typeface="Aptos" pitchFamily="34" charset="0"/>
+                <a:ea typeface="Aptos" pitchFamily="34" charset="-122"/>
+                <a:cs typeface="Aptos" pitchFamily="34" charset="-120"/>
+              </a:rPr>
+              <a:t>The problem should be operational and measurable, such as delayed case review,.</a:t>
+            </a:r>
+            <a:endParaRPr lang="en-US" sz="1380" dirty="0"/>
+          </a:p>
+          <a:p>
+            <a:r>
+              <a:rPr lang="en-US" sz="1380" dirty="0">
+                <a:solidFill>
+                  <a:srgbClr val="17364A"/>
+                </a:solidFill>
+                <a:latin typeface="Aptos" pitchFamily="34" charset="0"/>
+                <a:ea typeface="Aptos" pitchFamily="34" charset="-122"/>
+                <a:cs typeface="Aptos" pitchFamily="34" charset="-120"/>
+              </a:rPr>
+              <a:t>The business case should connect the proposed AI use to a real public health need.</a:t>
+            </a:r>
+            <a:endParaRPr lang="en-US" sz="1380" dirty="0"/>
+          </a:p>
+          <a:p>
+            <a:r>
+              <a:rPr lang="en-US" sz="1380" dirty="0">
+                <a:solidFill>
+                  <a:srgbClr val="17364A"/>
+                </a:solidFill>
+                <a:latin typeface="Aptos" pitchFamily="34" charset="0"/>
+                <a:ea typeface="Aptos" pitchFamily="34" charset="-122"/>
+                <a:cs typeface="Aptos" pitchFamily="34" charset="-120"/>
+              </a:rPr>
+              <a:t>The review should compare alternatives.</a:t>
+            </a:r>
+            <a:endParaRPr lang="en-US" sz="1380" dirty="0"/>
+          </a:p>
+        </p:txBody>
       </p:sp>
       <p:sp>
         <p:nvSpPr>
           <p:cNvPr id="16" name="Shape 14"/>
-          <p:cNvSpPr/>
-          <p:nvPr/>
-        </p:nvSpPr>
-        <p:spPr>
-          <a:xfrm>
-            <a:off x="9089136" y="3456432"/>
-            <a:ext cx="566928" cy="566928"/>
-          </a:xfrm>
-          <a:prstGeom prst="ellipse">
-            <a:avLst/>
-          </a:prstGeom>
-          <a:solidFill>
-            <a:srgbClr val="6A4CA3"/>
-          </a:solidFill>
-          <a:ln w="12700">
-            <a:solidFill>
-              <a:srgbClr val="6A4CA3"/>
-            </a:solidFill>
-            <a:prstDash val="solid"/>
-          </a:ln>
-        </p:spPr>
-      </p:sp>
-      <p:sp>
-        <p:nvSpPr>
-          <p:cNvPr id="17" name="Shape 15"/>
-          <p:cNvSpPr/>
-          <p:nvPr/>
-        </p:nvSpPr>
-        <p:spPr>
-          <a:xfrm>
-            <a:off x="8385048" y="3419856"/>
-            <a:ext cx="1975104" cy="0"/>
-          </a:xfrm>
-          <a:prstGeom prst="line">
-            <a:avLst/>
-          </a:prstGeom>
-          <a:noFill/>
-          <a:ln w="25400">
-            <a:solidFill>
-              <a:srgbClr val="8ABBD8"/>
-            </a:solidFill>
-            <a:prstDash val="solid"/>
-          </a:ln>
-        </p:spPr>
-      </p:sp>
-      <p:sp>
-        <p:nvSpPr>
-          <p:cNvPr id="18" name="Shape 16"/>
-          <p:cNvSpPr/>
-          <p:nvPr/>
-        </p:nvSpPr>
-        <p:spPr>
-          <a:xfrm>
-            <a:off x="8202168" y="3630168"/>
-            <a:ext cx="1170432" cy="118872"/>
-          </a:xfrm>
-          <a:prstGeom prst="line">
-            <a:avLst/>
-          </a:prstGeom>
-          <a:noFill/>
-          <a:ln w="25400">
-            <a:solidFill>
-              <a:srgbClr val="8ABBD8"/>
-            </a:solidFill>
-            <a:prstDash val="solid"/>
-          </a:ln>
-        </p:spPr>
-      </p:sp>
-      <p:sp>
-        <p:nvSpPr>
-          <p:cNvPr id="19" name="Shape 17"/>
-          <p:cNvSpPr/>
-          <p:nvPr/>
-        </p:nvSpPr>
-        <p:spPr>
-          <a:xfrm>
-            <a:off x="10543032" y="3630168"/>
-            <a:ext cx="-1170432" cy="118872"/>
-          </a:xfrm>
-          <a:prstGeom prst="line">
-            <a:avLst/>
-          </a:prstGeom>
-          <a:noFill/>
-          <a:ln w="25400">
-            <a:solidFill>
-              <a:srgbClr val="8ABBD8"/>
-            </a:solidFill>
-            <a:prstDash val="solid"/>
-          </a:ln>
-        </p:spPr>
-      </p:sp>
-      <p:sp>
-        <p:nvSpPr>
-          <p:cNvPr id="20" name="Text 18"/>
-          <p:cNvSpPr/>
-          <p:nvPr/>
-        </p:nvSpPr>
-        <p:spPr>
-          <a:xfrm>
-            <a:off x="7863840" y="4069080"/>
-            <a:ext cx="3017520" cy="164592"/>
-          </a:xfrm>
-          <a:prstGeom prst="rect">
-            <a:avLst/>
-          </a:prstGeom>
-          <a:noFill/>
-          <a:ln/>
-        </p:spPr>
-        <p:txBody>
-          <a:bodyPr wrap="square" lIns="0" tIns="0" rIns="0" bIns="0" rtlCol="0" anchor="ctr"/>
-          <a:lstStyle/>
-          <a:p>
-            <a:pPr algn="ctr" indent="0" marL="0">
-              <a:buNone/>
-            </a:pPr>
-            <a:r>
-              <a:rPr lang="en-US" sz="900" b="1" dirty="0">
-                <a:solidFill>
-                  <a:srgbClr val="003A63"/>
-                </a:solidFill>
-                <a:latin typeface="Aptos" pitchFamily="34" charset="0"/>
-                <a:ea typeface="Aptos" pitchFamily="34" charset="-122"/>
-                <a:cs typeface="Aptos" pitchFamily="34" charset="-120"/>
-              </a:rPr>
-              <a:t>Decision rights</a:t>
-            </a:r>
-            <a:endParaRPr lang="en-US" sz="900" dirty="0"/>
-          </a:p>
-        </p:txBody>
-      </p:sp>
-      <p:sp>
-        <p:nvSpPr>
-          <p:cNvPr id="21" name="Shape 19"/>
           <p:cNvSpPr/>
           <p:nvPr/>
         </p:nvSpPr>
@@ -3649,7 +3569,7 @@
       </p:sp>
       <p:sp>
         <p:nvSpPr>
-          <p:cNvPr id="22" name="Text 20"/>
+          <p:cNvPr id="17" name="Text 15"/>
           <p:cNvSpPr/>
           <p:nvPr/>
         </p:nvSpPr>
@@ -3688,7 +3608,7 @@
       </p:sp>
       <p:sp>
         <p:nvSpPr>
-          <p:cNvPr id="23" name="Text 21"/>
+          <p:cNvPr id="18" name="Text 16"/>
           <p:cNvSpPr/>
           <p:nvPr/>
         </p:nvSpPr>
@@ -4196,13 +4116,11 @@
             </a:avLst>
           </a:prstGeom>
           <a:solidFill>
-            <a:srgbClr val="FFFFFF">
-              <a:alpha val="88000"/>
-            </a:srgbClr>
+            <a:srgbClr val="FFFFFF"/>
           </a:solidFill>
           <a:ln w="12700">
             <a:solidFill>
-              <a:srgbClr val="D6E8F2"/>
+              <a:srgbClr val="B9D7E6"/>
             </a:solidFill>
             <a:prstDash val="solid"/>
           </a:ln>
@@ -4210,26 +4128,42 @@
       </p:sp>
       <p:sp>
         <p:nvSpPr>
-          <p:cNvPr id="14" name="Shape 12"/>
-          <p:cNvSpPr/>
-          <p:nvPr/>
-        </p:nvSpPr>
-        <p:spPr>
-          <a:xfrm>
-            <a:off x="8046720" y="3108960"/>
-            <a:ext cx="2651760" cy="896112"/>
-          </a:xfrm>
-          <a:prstGeom prst="arc">
-            <a:avLst/>
-          </a:prstGeom>
-          <a:noFill/>
-          <a:ln w="25400">
-            <a:solidFill>
-              <a:srgbClr val="0068B7"/>
-            </a:solidFill>
-            <a:prstDash val="solid"/>
-          </a:ln>
-        </p:spPr>
+          <p:cNvPr id="14" name="Text 12"/>
+          <p:cNvSpPr/>
+          <p:nvPr/>
+        </p:nvSpPr>
+        <p:spPr>
+          <a:xfrm>
+            <a:off x="7799832" y="2935224"/>
+            <a:ext cx="3145536" cy="256032"/>
+          </a:xfrm>
+          <a:prstGeom prst="rect">
+            <a:avLst/>
+          </a:prstGeom>
+          <a:noFill/>
+          <a:ln/>
+        </p:spPr>
+        <p:txBody>
+          <a:bodyPr wrap="square" lIns="0" tIns="0" rIns="0" bIns="0" rtlCol="0" anchor="ctr"/>
+          <a:lstStyle/>
+          <a:p>
+            <a:pPr indent="0" marL="0">
+              <a:buNone/>
+            </a:pPr>
+            <a:r>
+              <a:rPr lang="en-US" sz="1300" b="1" dirty="0">
+                <a:solidFill>
+                  <a:srgbClr val="0068B7"/>
+                </a:solidFill>
+                <a:latin typeface="Aptos" pitchFamily="34" charset="0"/>
+                <a:ea typeface="Aptos" pitchFamily="34" charset="-122"/>
+                <a:cs typeface="Aptos" pitchFamily="34" charset="-120"/>
+              </a:rPr>
+              <a:t>Concept checkpoints</a:t>
+            </a:r>
+            <a:endParaRPr lang="en-US" sz="1300" dirty="0"/>
+          </a:p>
+        </p:txBody>
       </p:sp>
       <p:sp>
         <p:nvSpPr>
@@ -4239,102 +4173,67 @@
         </p:nvSpPr>
         <p:spPr>
           <a:xfrm>
-            <a:off x="7909560" y="3099816"/>
-            <a:ext cx="2926080" cy="256032"/>
-          </a:xfrm>
-          <a:prstGeom prst="rect">
-            <a:avLst/>
-          </a:prstGeom>
-          <a:noFill/>
-          <a:ln/>
-        </p:spPr>
-        <p:txBody>
-          <a:bodyPr wrap="square" lIns="0" tIns="0" rIns="0" bIns="0" rtlCol="0" anchor="ctr"/>
-          <a:lstStyle/>
-          <a:p>
-            <a:pPr algn="ctr" indent="0" marL="0">
-              <a:buNone/>
-            </a:pPr>
-            <a:r>
-              <a:rPr lang="en-US" sz="1500" b="1" dirty="0">
-                <a:solidFill>
-                  <a:srgbClr val="003A63"/>
-                </a:solidFill>
-                <a:latin typeface="Aptos" pitchFamily="34" charset="0"/>
-                <a:ea typeface="Aptos" pitchFamily="34" charset="-122"/>
-                <a:cs typeface="Aptos" pitchFamily="34" charset="-120"/>
-              </a:rPr>
-              <a:t>Risk</a:t>
-            </a:r>
-            <a:endParaRPr lang="en-US" sz="1500" dirty="0"/>
+            <a:off x="7818120" y="3300984"/>
+            <a:ext cx="3090672" cy="877824"/>
+          </a:xfrm>
+          <a:prstGeom prst="rect">
+            <a:avLst/>
+          </a:prstGeom>
+          <a:noFill/>
+          <a:ln/>
+        </p:spPr>
+        <p:txBody>
+          <a:bodyPr wrap="square" lIns="254" tIns="254" rIns="254" bIns="254" rtlCol="0" anchor="t">
+            <a:normAutofit/>
+          </a:bodyPr>
+          <a:lstStyle/>
+          <a:p>
+            <a:r>
+              <a:rPr lang="en-US" sz="1380" dirty="0">
+                <a:solidFill>
+                  <a:srgbClr val="17364A"/>
+                </a:solidFill>
+                <a:latin typeface="Aptos" pitchFamily="34" charset="0"/>
+                <a:ea typeface="Aptos" pitchFamily="34" charset="-122"/>
+                <a:cs typeface="Aptos" pitchFamily="34" charset="-120"/>
+              </a:rPr>
+              <a:t>Agencies may purchase an AI tool without funding integration, monitoring, validation,.</a:t>
+            </a:r>
+            <a:endParaRPr lang="en-US" sz="1380" dirty="0"/>
+          </a:p>
+          <a:p>
+            <a:r>
+              <a:rPr lang="en-US" sz="1380" dirty="0">
+                <a:solidFill>
+                  <a:srgbClr val="17364A"/>
+                </a:solidFill>
+                <a:latin typeface="Aptos" pitchFamily="34" charset="0"/>
+                <a:ea typeface="Aptos" pitchFamily="34" charset="-122"/>
+                <a:cs typeface="Aptos" pitchFamily="34" charset="-120"/>
+              </a:rPr>
+              <a:t>Another risk is benefits inflation.</a:t>
+            </a:r>
+            <a:endParaRPr lang="en-US" sz="1380" dirty="0"/>
+          </a:p>
+          <a:p>
+            <a:r>
+              <a:rPr lang="en-US" sz="1380" dirty="0">
+                <a:solidFill>
+                  <a:srgbClr val="17364A"/>
+                </a:solidFill>
+                <a:latin typeface="Aptos" pitchFamily="34" charset="0"/>
+                <a:ea typeface="Aptos" pitchFamily="34" charset="-122"/>
+                <a:cs typeface="Aptos" pitchFamily="34" charset="-120"/>
+              </a:rPr>
+              <a:t>Vendors or project champions may overstate time savings or accuracy without local evidence.</a:t>
+            </a:r>
+            <a:endParaRPr lang="en-US" sz="1380" dirty="0"/>
           </a:p>
         </p:txBody>
       </p:sp>
       <p:sp>
         <p:nvSpPr>
           <p:cNvPr id="16" name="Shape 14"/>
-          <p:cNvSpPr/>
-          <p:nvPr/>
-        </p:nvSpPr>
-        <p:spPr>
-          <a:xfrm>
-            <a:off x="8366760" y="3639312"/>
-            <a:ext cx="2011680" cy="0"/>
-          </a:xfrm>
-          <a:prstGeom prst="line">
-            <a:avLst/>
-          </a:prstGeom>
-          <a:noFill/>
-          <a:ln w="63500">
-            <a:solidFill>
-              <a:srgbClr val="2F8A28"/>
-            </a:solidFill>
-            <a:prstDash val="solid"/>
-          </a:ln>
-        </p:spPr>
-      </p:sp>
-      <p:sp>
-        <p:nvSpPr>
-          <p:cNvPr id="17" name="Text 15"/>
-          <p:cNvSpPr/>
-          <p:nvPr/>
-        </p:nvSpPr>
-        <p:spPr>
-          <a:xfrm>
-            <a:off x="7909560" y="3849624"/>
-            <a:ext cx="2926080" cy="164592"/>
-          </a:xfrm>
-          <a:prstGeom prst="rect">
-            <a:avLst/>
-          </a:prstGeom>
-          <a:noFill/>
-          <a:ln/>
-        </p:spPr>
-        <p:txBody>
-          <a:bodyPr wrap="square" lIns="0" tIns="0" rIns="0" bIns="0" rtlCol="0" anchor="ctr"/>
-          <a:lstStyle/>
-          <a:p>
-            <a:pPr algn="ctr" indent="0" marL="0">
-              <a:buNone/>
-            </a:pPr>
-            <a:r>
-              <a:rPr lang="en-US" sz="900" dirty="0">
-                <a:solidFill>
-                  <a:srgbClr val="003A63"/>
-                </a:solidFill>
-                <a:latin typeface="Aptos" pitchFamily="34" charset="0"/>
-                <a:ea typeface="Aptos" pitchFamily="34" charset="-122"/>
-                <a:cs typeface="Aptos" pitchFamily="34" charset="-120"/>
-              </a:rPr>
-              <a:t>Human review</a:t>
-            </a:r>
-            <a:endParaRPr lang="en-US" sz="900" dirty="0"/>
-          </a:p>
-        </p:txBody>
-      </p:sp>
-      <p:sp>
-        <p:nvSpPr>
-          <p:cNvPr id="18" name="Shape 16"/>
           <p:cNvSpPr/>
           <p:nvPr/>
         </p:nvSpPr>
@@ -4361,7 +4260,7 @@
       </p:sp>
       <p:sp>
         <p:nvSpPr>
-          <p:cNvPr id="19" name="Text 17"/>
+          <p:cNvPr id="17" name="Text 15"/>
           <p:cNvSpPr/>
           <p:nvPr/>
         </p:nvSpPr>
@@ -4400,7 +4299,7 @@
       </p:sp>
       <p:sp>
         <p:nvSpPr>
-          <p:cNvPr id="20" name="Text 18"/>
+          <p:cNvPr id="18" name="Text 16"/>
           <p:cNvSpPr/>
           <p:nvPr/>
         </p:nvSpPr>
@@ -4908,13 +4807,11 @@
             </a:avLst>
           </a:prstGeom>
           <a:solidFill>
-            <a:srgbClr val="FFFFFF">
-              <a:alpha val="88000"/>
-            </a:srgbClr>
+            <a:srgbClr val="FFFFFF"/>
           </a:solidFill>
           <a:ln w="12700">
             <a:solidFill>
-              <a:srgbClr val="D6E8F2"/>
+              <a:srgbClr val="B9D7E6"/>
             </a:solidFill>
             <a:prstDash val="solid"/>
           </a:ln>
@@ -4922,30 +4819,42 @@
       </p:sp>
       <p:sp>
         <p:nvSpPr>
-          <p:cNvPr id="14" name="Shape 12"/>
-          <p:cNvSpPr/>
-          <p:nvPr/>
-        </p:nvSpPr>
-        <p:spPr>
-          <a:xfrm>
-            <a:off x="7927848" y="3319272"/>
-            <a:ext cx="792480" cy="749808"/>
-          </a:xfrm>
-          <a:prstGeom prst="roundRect">
-            <a:avLst>
-              <a:gd name="adj" fmla="val 14634"/>
-            </a:avLst>
-          </a:prstGeom>
-          <a:solidFill>
-            <a:srgbClr val="0068B7"/>
-          </a:solidFill>
-          <a:ln w="12700">
-            <a:solidFill>
-              <a:srgbClr val="0068B7"/>
-            </a:solidFill>
-            <a:prstDash val="solid"/>
-          </a:ln>
-        </p:spPr>
+          <p:cNvPr id="14" name="Text 12"/>
+          <p:cNvSpPr/>
+          <p:nvPr/>
+        </p:nvSpPr>
+        <p:spPr>
+          <a:xfrm>
+            <a:off x="7799832" y="2935224"/>
+            <a:ext cx="3145536" cy="256032"/>
+          </a:xfrm>
+          <a:prstGeom prst="rect">
+            <a:avLst/>
+          </a:prstGeom>
+          <a:noFill/>
+          <a:ln/>
+        </p:spPr>
+        <p:txBody>
+          <a:bodyPr wrap="square" lIns="0" tIns="0" rIns="0" bIns="0" rtlCol="0" anchor="ctr"/>
+          <a:lstStyle/>
+          <a:p>
+            <a:pPr indent="0" marL="0">
+              <a:buNone/>
+            </a:pPr>
+            <a:r>
+              <a:rPr lang="en-US" sz="1300" b="1" dirty="0">
+                <a:solidFill>
+                  <a:srgbClr val="0068B7"/>
+                </a:solidFill>
+                <a:latin typeface="Aptos" pitchFamily="34" charset="0"/>
+                <a:ea typeface="Aptos" pitchFamily="34" charset="-122"/>
+                <a:cs typeface="Aptos" pitchFamily="34" charset="-120"/>
+              </a:rPr>
+              <a:t>Concept checkpoints</a:t>
+            </a:r>
+            <a:endParaRPr lang="en-US" sz="1300" dirty="0"/>
+          </a:p>
+        </p:txBody>
       </p:sp>
       <p:sp>
         <p:nvSpPr>
@@ -4955,240 +4864,67 @@
         </p:nvSpPr>
         <p:spPr>
           <a:xfrm>
-            <a:off x="8001000" y="3511296"/>
-            <a:ext cx="646176" cy="310896"/>
-          </a:xfrm>
-          <a:prstGeom prst="rect">
-            <a:avLst/>
-          </a:prstGeom>
-          <a:noFill/>
-          <a:ln/>
-        </p:spPr>
-        <p:txBody>
-          <a:bodyPr wrap="square" lIns="0" tIns="0" rIns="0" bIns="0" rtlCol="0" anchor="ctr">
+            <a:off x="7818120" y="3300984"/>
+            <a:ext cx="3090672" cy="877824"/>
+          </a:xfrm>
+          <a:prstGeom prst="rect">
+            <a:avLst/>
+          </a:prstGeom>
+          <a:noFill/>
+          <a:ln/>
+        </p:spPr>
+        <p:txBody>
+          <a:bodyPr wrap="square" lIns="254" tIns="254" rIns="254" bIns="254" rtlCol="0" anchor="t">
             <a:normAutofit/>
           </a:bodyPr>
           <a:lstStyle/>
           <a:p>
-            <a:pPr algn="ctr" indent="0" marL="0">
-              <a:buNone/>
-            </a:pPr>
-            <a:r>
-              <a:rPr lang="en-US" sz="1500" b="1" dirty="0">
-                <a:solidFill>
-                  <a:srgbClr val="FFFFFF"/>
-                </a:solidFill>
-                <a:latin typeface="Aptos" pitchFamily="34" charset="0"/>
-                <a:ea typeface="Aptos" pitchFamily="34" charset="-122"/>
-                <a:cs typeface="Aptos" pitchFamily="34" charset="-120"/>
-              </a:rPr>
-              <a:t>Plan</a:t>
-            </a:r>
-            <a:endParaRPr lang="en-US" sz="1500" dirty="0"/>
+            <a:r>
+              <a:rPr lang="en-US" sz="1380" dirty="0">
+                <a:solidFill>
+                  <a:srgbClr val="17364A"/>
+                </a:solidFill>
+                <a:latin typeface="Aptos" pitchFamily="34" charset="0"/>
+                <a:ea typeface="Aptos" pitchFamily="34" charset="-122"/>
+                <a:cs typeface="Aptos" pitchFamily="34" charset="-120"/>
+              </a:rPr>
+              <a:t>Predictive analytics business cases should include validation data, subgroup testing, and.</a:t>
+            </a:r>
+            <a:endParaRPr lang="en-US" sz="1380" dirty="0"/>
+          </a:p>
+          <a:p>
+            <a:r>
+              <a:rPr lang="en-US" sz="1380" dirty="0">
+                <a:solidFill>
+                  <a:srgbClr val="17364A"/>
+                </a:solidFill>
+                <a:latin typeface="Aptos" pitchFamily="34" charset="0"/>
+                <a:ea typeface="Aptos" pitchFamily="34" charset="-122"/>
+                <a:cs typeface="Aptos" pitchFamily="34" charset="-120"/>
+              </a:rPr>
+              <a:t>Agentic AI business cases should include security architecture, approval workflows,.</a:t>
+            </a:r>
+            <a:endParaRPr lang="en-US" sz="1380" dirty="0"/>
+          </a:p>
+          <a:p>
+            <a:r>
+              <a:rPr lang="en-US" sz="1380" dirty="0">
+                <a:solidFill>
+                  <a:srgbClr val="17364A"/>
+                </a:solidFill>
+                <a:latin typeface="Aptos" pitchFamily="34" charset="0"/>
+                <a:ea typeface="Aptos" pitchFamily="34" charset="-122"/>
+                <a:cs typeface="Aptos" pitchFamily="34" charset="-120"/>
+              </a:rPr>
+              <a:t>Cost and value must reflect responsible use.</a:t>
+            </a:r>
+            <a:endParaRPr lang="en-US" sz="1380" dirty="0"/>
           </a:p>
         </p:txBody>
       </p:sp>
       <p:sp>
         <p:nvSpPr>
           <p:cNvPr id="16" name="Shape 14"/>
-          <p:cNvSpPr/>
-          <p:nvPr/>
-        </p:nvSpPr>
-        <p:spPr>
-          <a:xfrm>
-            <a:off x="8976360" y="3319272"/>
-            <a:ext cx="792480" cy="749808"/>
-          </a:xfrm>
-          <a:prstGeom prst="roundRect">
-            <a:avLst>
-              <a:gd name="adj" fmla="val 14634"/>
-            </a:avLst>
-          </a:prstGeom>
-          <a:solidFill>
-            <a:srgbClr val="2F8A28"/>
-          </a:solidFill>
-          <a:ln w="12700">
-            <a:solidFill>
-              <a:srgbClr val="2F8A28"/>
-            </a:solidFill>
-            <a:prstDash val="solid"/>
-          </a:ln>
-        </p:spPr>
-      </p:sp>
-      <p:sp>
-        <p:nvSpPr>
-          <p:cNvPr id="17" name="Text 15"/>
-          <p:cNvSpPr/>
-          <p:nvPr/>
-        </p:nvSpPr>
-        <p:spPr>
-          <a:xfrm>
-            <a:off x="9049512" y="3511296"/>
-            <a:ext cx="646176" cy="310896"/>
-          </a:xfrm>
-          <a:prstGeom prst="rect">
-            <a:avLst/>
-          </a:prstGeom>
-          <a:noFill/>
-          <a:ln/>
-        </p:spPr>
-        <p:txBody>
-          <a:bodyPr wrap="square" lIns="0" tIns="0" rIns="0" bIns="0" rtlCol="0" anchor="ctr">
-            <a:normAutofit/>
-          </a:bodyPr>
-          <a:lstStyle/>
-          <a:p>
-            <a:pPr algn="ctr" indent="0" marL="0">
-              <a:buNone/>
-            </a:pPr>
-            <a:r>
-              <a:rPr lang="en-US" sz="1500" b="1" dirty="0">
-                <a:solidFill>
-                  <a:srgbClr val="FFFFFF"/>
-                </a:solidFill>
-                <a:latin typeface="Aptos" pitchFamily="34" charset="0"/>
-                <a:ea typeface="Aptos" pitchFamily="34" charset="-122"/>
-                <a:cs typeface="Aptos" pitchFamily="34" charset="-120"/>
-              </a:rPr>
-              <a:t>Do</a:t>
-            </a:r>
-            <a:endParaRPr lang="en-US" sz="1500" dirty="0"/>
-          </a:p>
-        </p:txBody>
-      </p:sp>
-      <p:sp>
-        <p:nvSpPr>
-          <p:cNvPr id="18" name="Shape 16"/>
-          <p:cNvSpPr/>
-          <p:nvPr/>
-        </p:nvSpPr>
-        <p:spPr>
-          <a:xfrm>
-            <a:off x="10024872" y="3319272"/>
-            <a:ext cx="792480" cy="749808"/>
-          </a:xfrm>
-          <a:prstGeom prst="roundRect">
-            <a:avLst>
-              <a:gd name="adj" fmla="val 14634"/>
-            </a:avLst>
-          </a:prstGeom>
-          <a:solidFill>
-            <a:srgbClr val="D69A2D"/>
-          </a:solidFill>
-          <a:ln w="12700">
-            <a:solidFill>
-              <a:srgbClr val="D69A2D"/>
-            </a:solidFill>
-            <a:prstDash val="solid"/>
-          </a:ln>
-        </p:spPr>
-      </p:sp>
-      <p:sp>
-        <p:nvSpPr>
-          <p:cNvPr id="19" name="Text 17"/>
-          <p:cNvSpPr/>
-          <p:nvPr/>
-        </p:nvSpPr>
-        <p:spPr>
-          <a:xfrm>
-            <a:off x="10098024" y="3511296"/>
-            <a:ext cx="646176" cy="310896"/>
-          </a:xfrm>
-          <a:prstGeom prst="rect">
-            <a:avLst/>
-          </a:prstGeom>
-          <a:noFill/>
-          <a:ln/>
-        </p:spPr>
-        <p:txBody>
-          <a:bodyPr wrap="square" lIns="0" tIns="0" rIns="0" bIns="0" rtlCol="0" anchor="ctr">
-            <a:normAutofit/>
-          </a:bodyPr>
-          <a:lstStyle/>
-          <a:p>
-            <a:pPr algn="ctr" indent="0" marL="0">
-              <a:buNone/>
-            </a:pPr>
-            <a:r>
-              <a:rPr lang="en-US" sz="1500" b="1" dirty="0">
-                <a:solidFill>
-                  <a:srgbClr val="FFFFFF"/>
-                </a:solidFill>
-                <a:latin typeface="Aptos" pitchFamily="34" charset="0"/>
-                <a:ea typeface="Aptos" pitchFamily="34" charset="-122"/>
-                <a:cs typeface="Aptos" pitchFamily="34" charset="-120"/>
-              </a:rPr>
-              <a:t>Review</a:t>
-            </a:r>
-            <a:endParaRPr lang="en-US" sz="1500" dirty="0"/>
-          </a:p>
-        </p:txBody>
-      </p:sp>
-      <p:sp>
-        <p:nvSpPr>
-          <p:cNvPr id="20" name="Shape 18"/>
-          <p:cNvSpPr/>
-          <p:nvPr/>
-        </p:nvSpPr>
-        <p:spPr>
-          <a:xfrm>
-            <a:off x="8293608" y="4389120"/>
-            <a:ext cx="2157984" cy="0"/>
-          </a:xfrm>
-          <a:prstGeom prst="line">
-            <a:avLst/>
-          </a:prstGeom>
-          <a:noFill/>
-          <a:ln w="25400">
-            <a:solidFill>
-              <a:srgbClr val="8ABBD8"/>
-            </a:solidFill>
-            <a:prstDash val="solid"/>
-          </a:ln>
-        </p:spPr>
-      </p:sp>
-      <p:sp>
-        <p:nvSpPr>
-          <p:cNvPr id="21" name="Text 19"/>
-          <p:cNvSpPr/>
-          <p:nvPr/>
-        </p:nvSpPr>
-        <p:spPr>
-          <a:xfrm>
-            <a:off x="7909560" y="3977640"/>
-            <a:ext cx="2926080" cy="182880"/>
-          </a:xfrm>
-          <a:prstGeom prst="rect">
-            <a:avLst/>
-          </a:prstGeom>
-          <a:noFill/>
-          <a:ln/>
-        </p:spPr>
-        <p:txBody>
-          <a:bodyPr wrap="square" lIns="0" tIns="0" rIns="0" bIns="0" rtlCol="0" anchor="ctr"/>
-          <a:lstStyle/>
-          <a:p>
-            <a:pPr algn="ctr" indent="0" marL="0">
-              <a:buNone/>
-            </a:pPr>
-            <a:r>
-              <a:rPr lang="en-US" sz="1000" dirty="0">
-                <a:solidFill>
-                  <a:srgbClr val="003A63"/>
-                </a:solidFill>
-                <a:latin typeface="Aptos" pitchFamily="34" charset="0"/>
-                <a:ea typeface="Aptos" pitchFamily="34" charset="-122"/>
-                <a:cs typeface="Aptos" pitchFamily="34" charset="-120"/>
-              </a:rPr>
-              <a:t>Dependencies visible</a:t>
-            </a:r>
-            <a:endParaRPr lang="en-US" sz="1000" dirty="0"/>
-          </a:p>
-        </p:txBody>
-      </p:sp>
-      <p:sp>
-        <p:nvSpPr>
-          <p:cNvPr id="22" name="Shape 20"/>
           <p:cNvSpPr/>
           <p:nvPr/>
         </p:nvSpPr>
@@ -5215,7 +4951,7 @@
       </p:sp>
       <p:sp>
         <p:nvSpPr>
-          <p:cNvPr id="23" name="Text 21"/>
+          <p:cNvPr id="17" name="Text 15"/>
           <p:cNvSpPr/>
           <p:nvPr/>
         </p:nvSpPr>
@@ -5254,7 +4990,7 @@
       </p:sp>
       <p:sp>
         <p:nvSpPr>
-          <p:cNvPr id="24" name="Text 22"/>
+          <p:cNvPr id="18" name="Text 16"/>
           <p:cNvSpPr/>
           <p:nvPr/>
         </p:nvSpPr>
@@ -5762,13 +5498,11 @@
             </a:avLst>
           </a:prstGeom>
           <a:solidFill>
-            <a:srgbClr val="FFFFFF">
-              <a:alpha val="88000"/>
-            </a:srgbClr>
+            <a:srgbClr val="FFFFFF"/>
           </a:solidFill>
           <a:ln w="12700">
             <a:solidFill>
-              <a:srgbClr val="D6E8F2"/>
+              <a:srgbClr val="B9D7E6"/>
             </a:solidFill>
             <a:prstDash val="solid"/>
           </a:ln>
@@ -5776,119 +5510,112 @@
       </p:sp>
       <p:sp>
         <p:nvSpPr>
-          <p:cNvPr id="14" name="Shape 12"/>
-          <p:cNvSpPr/>
-          <p:nvPr/>
-        </p:nvSpPr>
-        <p:spPr>
-          <a:xfrm>
-            <a:off x="8074152" y="3291840"/>
-            <a:ext cx="2596896" cy="749808"/>
-          </a:xfrm>
-          <a:prstGeom prst="rect">
-            <a:avLst/>
-          </a:prstGeom>
-          <a:solidFill>
-            <a:srgbClr val="EAF6F8"/>
-          </a:solidFill>
-          <a:ln w="12700">
-            <a:solidFill>
-              <a:srgbClr val="8ABBD8"/>
-            </a:solidFill>
-            <a:prstDash val="solid"/>
-          </a:ln>
-        </p:spPr>
-      </p:sp>
-      <p:sp>
-        <p:nvSpPr>
-          <p:cNvPr id="15" name="Shape 13"/>
-          <p:cNvSpPr/>
-          <p:nvPr/>
-        </p:nvSpPr>
-        <p:spPr>
-          <a:xfrm>
-            <a:off x="8202168" y="3721608"/>
-            <a:ext cx="2340864" cy="0"/>
-          </a:xfrm>
-          <a:prstGeom prst="line">
-            <a:avLst/>
-          </a:prstGeom>
-          <a:noFill/>
-          <a:ln w="19050">
-            <a:solidFill>
-              <a:srgbClr val="0068B7"/>
-            </a:solidFill>
-            <a:prstDash val="solid"/>
-          </a:ln>
-        </p:spPr>
+          <p:cNvPr id="14" name="Text 12"/>
+          <p:cNvSpPr/>
+          <p:nvPr/>
+        </p:nvSpPr>
+        <p:spPr>
+          <a:xfrm>
+            <a:off x="7799832" y="2935224"/>
+            <a:ext cx="3145536" cy="256032"/>
+          </a:xfrm>
+          <a:prstGeom prst="rect">
+            <a:avLst/>
+          </a:prstGeom>
+          <a:noFill/>
+          <a:ln/>
+        </p:spPr>
+        <p:txBody>
+          <a:bodyPr wrap="square" lIns="0" tIns="0" rIns="0" bIns="0" rtlCol="0" anchor="ctr"/>
+          <a:lstStyle/>
+          <a:p>
+            <a:pPr indent="0" marL="0">
+              <a:buNone/>
+            </a:pPr>
+            <a:r>
+              <a:rPr lang="en-US" sz="1300" b="1" dirty="0">
+                <a:solidFill>
+                  <a:srgbClr val="0068B7"/>
+                </a:solidFill>
+                <a:latin typeface="Aptos" pitchFamily="34" charset="0"/>
+                <a:ea typeface="Aptos" pitchFamily="34" charset="-122"/>
+                <a:cs typeface="Aptos" pitchFamily="34" charset="-120"/>
+              </a:rPr>
+              <a:t>Concept checkpoints</a:t>
+            </a:r>
+            <a:endParaRPr lang="en-US" sz="1300" dirty="0"/>
+          </a:p>
+        </p:txBody>
+      </p:sp>
+      <p:sp>
+        <p:nvSpPr>
+          <p:cNvPr id="15" name="Text 13"/>
+          <p:cNvSpPr/>
+          <p:nvPr/>
+        </p:nvSpPr>
+        <p:spPr>
+          <a:xfrm>
+            <a:off x="7818120" y="3300984"/>
+            <a:ext cx="3090672" cy="877824"/>
+          </a:xfrm>
+          <a:prstGeom prst="rect">
+            <a:avLst/>
+          </a:prstGeom>
+          <a:noFill/>
+          <a:ln/>
+        </p:spPr>
+        <p:txBody>
+          <a:bodyPr wrap="square" lIns="254" tIns="254" rIns="254" bIns="254" rtlCol="0" anchor="t">
+            <a:normAutofit/>
+          </a:bodyPr>
+          <a:lstStyle/>
+          <a:p>
+            <a:r>
+              <a:rPr lang="en-US" sz="1380" dirty="0">
+                <a:solidFill>
+                  <a:srgbClr val="17364A"/>
+                </a:solidFill>
+                <a:latin typeface="Aptos" pitchFamily="34" charset="0"/>
+                <a:ea typeface="Aptos" pitchFamily="34" charset="-122"/>
+                <a:cs typeface="Aptos" pitchFamily="34" charset="-120"/>
+              </a:rPr>
+              <a:t>Which current or proposed AI use case in your agency raises this leadership or governance.</a:t>
+            </a:r>
+            <a:endParaRPr lang="en-US" sz="1380" dirty="0"/>
+          </a:p>
+          <a:p>
+            <a:r>
+              <a:rPr lang="en-US" sz="1380" dirty="0">
+                <a:solidFill>
+                  <a:srgbClr val="17364A"/>
+                </a:solidFill>
+                <a:latin typeface="Aptos" pitchFamily="34" charset="0"/>
+                <a:ea typeface="Aptos" pitchFamily="34" charset="-122"/>
+                <a:cs typeface="Aptos" pitchFamily="34" charset="-120"/>
+              </a:rPr>
+              <a:t>Who currently has authority to make decisions about this issue, and is that authority.</a:t>
+            </a:r>
+            <a:endParaRPr lang="en-US" sz="1380" dirty="0"/>
+          </a:p>
+          <a:p>
+            <a:r>
+              <a:rPr lang="en-US" sz="1380" dirty="0">
+                <a:solidFill>
+                  <a:srgbClr val="17364A"/>
+                </a:solidFill>
+                <a:latin typeface="Aptos" pitchFamily="34" charset="0"/>
+                <a:ea typeface="Aptos" pitchFamily="34" charset="-122"/>
+                <a:cs typeface="Aptos" pitchFamily="34" charset="-120"/>
+              </a:rPr>
+              <a:t>What evidence would governance or leadership need before approving the use case?</a:t>
+            </a:r>
+            <a:endParaRPr lang="en-US" sz="1380" dirty="0"/>
+          </a:p>
+        </p:txBody>
       </p:sp>
       <p:sp>
         <p:nvSpPr>
           <p:cNvPr id="16" name="Shape 14"/>
-          <p:cNvSpPr/>
-          <p:nvPr/>
-        </p:nvSpPr>
-        <p:spPr>
-          <a:xfrm>
-            <a:off x="9198864" y="4206240"/>
-            <a:ext cx="347472" cy="347472"/>
-          </a:xfrm>
-          <a:prstGeom prst="ellipse">
-            <a:avLst/>
-          </a:prstGeom>
-          <a:solidFill>
-            <a:srgbClr val="2F8A28"/>
-          </a:solidFill>
-          <a:ln w="12700">
-            <a:solidFill>
-              <a:srgbClr val="2F8A28"/>
-            </a:solidFill>
-            <a:prstDash val="solid"/>
-          </a:ln>
-        </p:spPr>
-      </p:sp>
-      <p:sp>
-        <p:nvSpPr>
-          <p:cNvPr id="17" name="Text 15"/>
-          <p:cNvSpPr/>
-          <p:nvPr/>
-        </p:nvSpPr>
-        <p:spPr>
-          <a:xfrm>
-            <a:off x="7909560" y="3977640"/>
-            <a:ext cx="2926080" cy="182880"/>
-          </a:xfrm>
-          <a:prstGeom prst="rect">
-            <a:avLst/>
-          </a:prstGeom>
-          <a:noFill/>
-          <a:ln/>
-        </p:spPr>
-        <p:txBody>
-          <a:bodyPr wrap="square" lIns="0" tIns="0" rIns="0" bIns="0" rtlCol="0" anchor="ctr"/>
-          <a:lstStyle/>
-          <a:p>
-            <a:pPr algn="ctr" indent="0" marL="0">
-              <a:buNone/>
-            </a:pPr>
-            <a:r>
-              <a:rPr lang="en-US" sz="1000" dirty="0">
-                <a:solidFill>
-                  <a:srgbClr val="003A63"/>
-                </a:solidFill>
-                <a:latin typeface="Aptos" pitchFamily="34" charset="0"/>
-                <a:ea typeface="Aptos" pitchFamily="34" charset="-122"/>
-                <a:cs typeface="Aptos" pitchFamily="34" charset="-120"/>
-              </a:rPr>
-              <a:t>Concept to action</a:t>
-            </a:r>
-            <a:endParaRPr lang="en-US" sz="1000" dirty="0"/>
-          </a:p>
-        </p:txBody>
-      </p:sp>
-      <p:sp>
-        <p:nvSpPr>
-          <p:cNvPr id="18" name="Shape 16"/>
           <p:cNvSpPr/>
           <p:nvPr/>
         </p:nvSpPr>
@@ -5915,7 +5642,7 @@
       </p:sp>
       <p:sp>
         <p:nvSpPr>
-          <p:cNvPr id="19" name="Text 17"/>
+          <p:cNvPr id="17" name="Text 15"/>
           <p:cNvSpPr/>
           <p:nvPr/>
         </p:nvSpPr>
@@ -5954,7 +5681,7 @@
       </p:sp>
       <p:sp>
         <p:nvSpPr>
-          <p:cNvPr id="20" name="Text 18"/>
+          <p:cNvPr id="18" name="Text 16"/>
           <p:cNvSpPr/>
           <p:nvPr/>
         </p:nvSpPr>
@@ -6448,13 +6175,11 @@
             </a:avLst>
           </a:prstGeom>
           <a:solidFill>
-            <a:srgbClr val="FFFFFF">
-              <a:alpha val="88000"/>
-            </a:srgbClr>
+            <a:srgbClr val="FFFFFF"/>
           </a:solidFill>
           <a:ln w="12700">
             <a:solidFill>
-              <a:srgbClr val="D6E8F2"/>
+              <a:srgbClr val="B9D7E6"/>
             </a:solidFill>
             <a:prstDash val="solid"/>
           </a:ln>
@@ -6462,119 +6187,98 @@
       </p:sp>
       <p:sp>
         <p:nvSpPr>
-          <p:cNvPr id="14" name="Shape 12"/>
-          <p:cNvSpPr/>
-          <p:nvPr/>
-        </p:nvSpPr>
-        <p:spPr>
-          <a:xfrm>
-            <a:off x="8074152" y="3291840"/>
-            <a:ext cx="2596896" cy="749808"/>
-          </a:xfrm>
-          <a:prstGeom prst="rect">
-            <a:avLst/>
-          </a:prstGeom>
-          <a:solidFill>
-            <a:srgbClr val="EAF6F8"/>
-          </a:solidFill>
-          <a:ln w="12700">
-            <a:solidFill>
-              <a:srgbClr val="8ABBD8"/>
-            </a:solidFill>
-            <a:prstDash val="solid"/>
-          </a:ln>
-        </p:spPr>
-      </p:sp>
-      <p:sp>
-        <p:nvSpPr>
-          <p:cNvPr id="15" name="Shape 13"/>
-          <p:cNvSpPr/>
-          <p:nvPr/>
-        </p:nvSpPr>
-        <p:spPr>
-          <a:xfrm>
-            <a:off x="8202168" y="3721608"/>
-            <a:ext cx="2340864" cy="0"/>
-          </a:xfrm>
-          <a:prstGeom prst="line">
-            <a:avLst/>
-          </a:prstGeom>
-          <a:noFill/>
-          <a:ln w="19050">
-            <a:solidFill>
-              <a:srgbClr val="0068B7"/>
-            </a:solidFill>
-            <a:prstDash val="solid"/>
-          </a:ln>
-        </p:spPr>
+          <p:cNvPr id="14" name="Text 12"/>
+          <p:cNvSpPr/>
+          <p:nvPr/>
+        </p:nvSpPr>
+        <p:spPr>
+          <a:xfrm>
+            <a:off x="7799832" y="2935224"/>
+            <a:ext cx="3145536" cy="256032"/>
+          </a:xfrm>
+          <a:prstGeom prst="rect">
+            <a:avLst/>
+          </a:prstGeom>
+          <a:noFill/>
+          <a:ln/>
+        </p:spPr>
+        <p:txBody>
+          <a:bodyPr wrap="square" lIns="0" tIns="0" rIns="0" bIns="0" rtlCol="0" anchor="ctr"/>
+          <a:lstStyle/>
+          <a:p>
+            <a:pPr indent="0" marL="0">
+              <a:buNone/>
+            </a:pPr>
+            <a:r>
+              <a:rPr lang="en-US" sz="1300" b="1" dirty="0">
+                <a:solidFill>
+                  <a:srgbClr val="0068B7"/>
+                </a:solidFill>
+                <a:latin typeface="Aptos" pitchFamily="34" charset="0"/>
+                <a:ea typeface="Aptos" pitchFamily="34" charset="-122"/>
+                <a:cs typeface="Aptos" pitchFamily="34" charset="-120"/>
+              </a:rPr>
+              <a:t>Concept checkpoints</a:t>
+            </a:r>
+            <a:endParaRPr lang="en-US" sz="1300" dirty="0"/>
+          </a:p>
+        </p:txBody>
+      </p:sp>
+      <p:sp>
+        <p:nvSpPr>
+          <p:cNvPr id="15" name="Text 13"/>
+          <p:cNvSpPr/>
+          <p:nvPr/>
+        </p:nvSpPr>
+        <p:spPr>
+          <a:xfrm>
+            <a:off x="7818120" y="3300984"/>
+            <a:ext cx="3090672" cy="877824"/>
+          </a:xfrm>
+          <a:prstGeom prst="rect">
+            <a:avLst/>
+          </a:prstGeom>
+          <a:noFill/>
+          <a:ln/>
+        </p:spPr>
+        <p:txBody>
+          <a:bodyPr wrap="square" lIns="254" tIns="254" rIns="254" bIns="254" rtlCol="0" anchor="t">
+            <a:normAutofit/>
+          </a:bodyPr>
+          <a:lstStyle/>
+          <a:p>
+            <a:r>
+              <a:rPr lang="en-US" sz="1380" dirty="0">
+                <a:solidFill>
+                  <a:srgbClr val="17364A"/>
+                </a:solidFill>
+                <a:latin typeface="Aptos" pitchFamily="34" charset="0"/>
+                <a:ea typeface="Aptos" pitchFamily="34" charset="-122"/>
+                <a:cs typeface="Aptos" pitchFamily="34" charset="-120"/>
+              </a:rPr>
+              <a:t>Which staff, partners, or communities would be affected if this issue were handled poorly?</a:t>
+            </a:r>
+            <a:endParaRPr lang="en-US" sz="1380" dirty="0"/>
+          </a:p>
+          <a:p>
+            <a:r>
+              <a:rPr lang="en-US" sz="1380" dirty="0">
+                <a:solidFill>
+                  <a:srgbClr val="17364A"/>
+                </a:solidFill>
+                <a:latin typeface="Aptos" pitchFamily="34" charset="0"/>
+                <a:ea typeface="Aptos" pitchFamily="34" charset="-122"/>
+                <a:cs typeface="Aptos" pitchFamily="34" charset="-120"/>
+              </a:rPr>
+              <a:t>What policy, process, or artifact should be created or updated after this module?</a:t>
+            </a:r>
+            <a:endParaRPr lang="en-US" sz="1380" dirty="0"/>
+          </a:p>
+        </p:txBody>
       </p:sp>
       <p:sp>
         <p:nvSpPr>
           <p:cNvPr id="16" name="Shape 14"/>
-          <p:cNvSpPr/>
-          <p:nvPr/>
-        </p:nvSpPr>
-        <p:spPr>
-          <a:xfrm>
-            <a:off x="9198864" y="4206240"/>
-            <a:ext cx="347472" cy="347472"/>
-          </a:xfrm>
-          <a:prstGeom prst="ellipse">
-            <a:avLst/>
-          </a:prstGeom>
-          <a:solidFill>
-            <a:srgbClr val="2F8A28"/>
-          </a:solidFill>
-          <a:ln w="12700">
-            <a:solidFill>
-              <a:srgbClr val="2F8A28"/>
-            </a:solidFill>
-            <a:prstDash val="solid"/>
-          </a:ln>
-        </p:spPr>
-      </p:sp>
-      <p:sp>
-        <p:nvSpPr>
-          <p:cNvPr id="17" name="Text 15"/>
-          <p:cNvSpPr/>
-          <p:nvPr/>
-        </p:nvSpPr>
-        <p:spPr>
-          <a:xfrm>
-            <a:off x="7909560" y="3977640"/>
-            <a:ext cx="2926080" cy="182880"/>
-          </a:xfrm>
-          <a:prstGeom prst="rect">
-            <a:avLst/>
-          </a:prstGeom>
-          <a:noFill/>
-          <a:ln/>
-        </p:spPr>
-        <p:txBody>
-          <a:bodyPr wrap="square" lIns="0" tIns="0" rIns="0" bIns="0" rtlCol="0" anchor="ctr"/>
-          <a:lstStyle/>
-          <a:p>
-            <a:pPr algn="ctr" indent="0" marL="0">
-              <a:buNone/>
-            </a:pPr>
-            <a:r>
-              <a:rPr lang="en-US" sz="1000" dirty="0">
-                <a:solidFill>
-                  <a:srgbClr val="003A63"/>
-                </a:solidFill>
-                <a:latin typeface="Aptos" pitchFamily="34" charset="0"/>
-                <a:ea typeface="Aptos" pitchFamily="34" charset="-122"/>
-                <a:cs typeface="Aptos" pitchFamily="34" charset="-120"/>
-              </a:rPr>
-              <a:t>Concept to action</a:t>
-            </a:r>
-            <a:endParaRPr lang="en-US" sz="1000" dirty="0"/>
-          </a:p>
-        </p:txBody>
-      </p:sp>
-      <p:sp>
-        <p:nvSpPr>
-          <p:cNvPr id="18" name="Shape 16"/>
           <p:cNvSpPr/>
           <p:nvPr/>
         </p:nvSpPr>
@@ -6601,7 +6305,7 @@
       </p:sp>
       <p:sp>
         <p:nvSpPr>
-          <p:cNvPr id="19" name="Text 17"/>
+          <p:cNvPr id="17" name="Text 15"/>
           <p:cNvSpPr/>
           <p:nvPr/>
         </p:nvSpPr>
@@ -6640,7 +6344,7 @@
       </p:sp>
       <p:sp>
         <p:nvSpPr>
-          <p:cNvPr id="20" name="Text 18"/>
+          <p:cNvPr id="18" name="Text 16"/>
           <p:cNvSpPr/>
           <p:nvPr/>
         </p:nvSpPr>
@@ -7134,13 +6838,11 @@
             </a:avLst>
           </a:prstGeom>
           <a:solidFill>
-            <a:srgbClr val="FFFFFF">
-              <a:alpha val="88000"/>
-            </a:srgbClr>
+            <a:srgbClr val="FFFFFF"/>
           </a:solidFill>
           <a:ln w="12700">
             <a:solidFill>
-              <a:srgbClr val="D6E8F2"/>
+              <a:srgbClr val="B9D7E6"/>
             </a:solidFill>
             <a:prstDash val="solid"/>
           </a:ln>
@@ -7148,119 +6850,98 @@
       </p:sp>
       <p:sp>
         <p:nvSpPr>
-          <p:cNvPr id="14" name="Shape 12"/>
-          <p:cNvSpPr/>
-          <p:nvPr/>
-        </p:nvSpPr>
-        <p:spPr>
-          <a:xfrm>
-            <a:off x="8074152" y="3291840"/>
-            <a:ext cx="2596896" cy="749808"/>
-          </a:xfrm>
-          <a:prstGeom prst="rect">
-            <a:avLst/>
-          </a:prstGeom>
-          <a:solidFill>
-            <a:srgbClr val="EAF6F8"/>
-          </a:solidFill>
-          <a:ln w="12700">
-            <a:solidFill>
-              <a:srgbClr val="8ABBD8"/>
-            </a:solidFill>
-            <a:prstDash val="solid"/>
-          </a:ln>
-        </p:spPr>
-      </p:sp>
-      <p:sp>
-        <p:nvSpPr>
-          <p:cNvPr id="15" name="Shape 13"/>
-          <p:cNvSpPr/>
-          <p:nvPr/>
-        </p:nvSpPr>
-        <p:spPr>
-          <a:xfrm>
-            <a:off x="8202168" y="3721608"/>
-            <a:ext cx="2340864" cy="0"/>
-          </a:xfrm>
-          <a:prstGeom prst="line">
-            <a:avLst/>
-          </a:prstGeom>
-          <a:noFill/>
-          <a:ln w="19050">
-            <a:solidFill>
-              <a:srgbClr val="0068B7"/>
-            </a:solidFill>
-            <a:prstDash val="solid"/>
-          </a:ln>
-        </p:spPr>
+          <p:cNvPr id="14" name="Text 12"/>
+          <p:cNvSpPr/>
+          <p:nvPr/>
+        </p:nvSpPr>
+        <p:spPr>
+          <a:xfrm>
+            <a:off x="7799832" y="2935224"/>
+            <a:ext cx="3145536" cy="256032"/>
+          </a:xfrm>
+          <a:prstGeom prst="rect">
+            <a:avLst/>
+          </a:prstGeom>
+          <a:noFill/>
+          <a:ln/>
+        </p:spPr>
+        <p:txBody>
+          <a:bodyPr wrap="square" lIns="0" tIns="0" rIns="0" bIns="0" rtlCol="0" anchor="ctr"/>
+          <a:lstStyle/>
+          <a:p>
+            <a:pPr indent="0" marL="0">
+              <a:buNone/>
+            </a:pPr>
+            <a:r>
+              <a:rPr lang="en-US" sz="1300" b="1" dirty="0">
+                <a:solidFill>
+                  <a:srgbClr val="0068B7"/>
+                </a:solidFill>
+                <a:latin typeface="Aptos" pitchFamily="34" charset="0"/>
+                <a:ea typeface="Aptos" pitchFamily="34" charset="-122"/>
+                <a:cs typeface="Aptos" pitchFamily="34" charset="-120"/>
+              </a:rPr>
+              <a:t>Concept checkpoints</a:t>
+            </a:r>
+            <a:endParaRPr lang="en-US" sz="1300" dirty="0"/>
+          </a:p>
+        </p:txBody>
+      </p:sp>
+      <p:sp>
+        <p:nvSpPr>
+          <p:cNvPr id="15" name="Text 13"/>
+          <p:cNvSpPr/>
+          <p:nvPr/>
+        </p:nvSpPr>
+        <p:spPr>
+          <a:xfrm>
+            <a:off x="7818120" y="3300984"/>
+            <a:ext cx="3090672" cy="877824"/>
+          </a:xfrm>
+          <a:prstGeom prst="rect">
+            <a:avLst/>
+          </a:prstGeom>
+          <a:noFill/>
+          <a:ln/>
+        </p:spPr>
+        <p:txBody>
+          <a:bodyPr wrap="square" lIns="254" tIns="254" rIns="254" bIns="254" rtlCol="0" anchor="t">
+            <a:normAutofit/>
+          </a:bodyPr>
+          <a:lstStyle/>
+          <a:p>
+            <a:r>
+              <a:rPr lang="en-US" sz="1380" dirty="0">
+                <a:solidFill>
+                  <a:srgbClr val="17364A"/>
+                </a:solidFill>
+                <a:latin typeface="Aptos" pitchFamily="34" charset="0"/>
+                <a:ea typeface="Aptos" pitchFamily="34" charset="-122"/>
+                <a:cs typeface="Aptos" pitchFamily="34" charset="-120"/>
+              </a:rPr>
+              <a:t>Complete an AI business case review worksheet for one proposed investment.</a:t>
+            </a:r>
+            <a:endParaRPr lang="en-US" sz="1380" dirty="0"/>
+          </a:p>
+          <a:p>
+            <a:r>
+              <a:rPr lang="en-US" sz="1380" dirty="0">
+                <a:solidFill>
+                  <a:srgbClr val="17364A"/>
+                </a:solidFill>
+                <a:latin typeface="Aptos" pitchFamily="34" charset="0"/>
+                <a:ea typeface="Aptos" pitchFamily="34" charset="-122"/>
+                <a:cs typeface="Aptos" pitchFamily="34" charset="-120"/>
+              </a:rPr>
+              <a:t>Include problem, alternatives, expected benefits, total cost of ownership, risk, equity.</a:t>
+            </a:r>
+            <a:endParaRPr lang="en-US" sz="1380" dirty="0"/>
+          </a:p>
+        </p:txBody>
       </p:sp>
       <p:sp>
         <p:nvSpPr>
           <p:cNvPr id="16" name="Shape 14"/>
-          <p:cNvSpPr/>
-          <p:nvPr/>
-        </p:nvSpPr>
-        <p:spPr>
-          <a:xfrm>
-            <a:off x="9198864" y="4206240"/>
-            <a:ext cx="347472" cy="347472"/>
-          </a:xfrm>
-          <a:prstGeom prst="ellipse">
-            <a:avLst/>
-          </a:prstGeom>
-          <a:solidFill>
-            <a:srgbClr val="2F8A28"/>
-          </a:solidFill>
-          <a:ln w="12700">
-            <a:solidFill>
-              <a:srgbClr val="2F8A28"/>
-            </a:solidFill>
-            <a:prstDash val="solid"/>
-          </a:ln>
-        </p:spPr>
-      </p:sp>
-      <p:sp>
-        <p:nvSpPr>
-          <p:cNvPr id="17" name="Text 15"/>
-          <p:cNvSpPr/>
-          <p:nvPr/>
-        </p:nvSpPr>
-        <p:spPr>
-          <a:xfrm>
-            <a:off x="7909560" y="3977640"/>
-            <a:ext cx="2926080" cy="182880"/>
-          </a:xfrm>
-          <a:prstGeom prst="rect">
-            <a:avLst/>
-          </a:prstGeom>
-          <a:noFill/>
-          <a:ln/>
-        </p:spPr>
-        <p:txBody>
-          <a:bodyPr wrap="square" lIns="0" tIns="0" rIns="0" bIns="0" rtlCol="0" anchor="ctr"/>
-          <a:lstStyle/>
-          <a:p>
-            <a:pPr algn="ctr" indent="0" marL="0">
-              <a:buNone/>
-            </a:pPr>
-            <a:r>
-              <a:rPr lang="en-US" sz="1000" dirty="0">
-                <a:solidFill>
-                  <a:srgbClr val="003A63"/>
-                </a:solidFill>
-                <a:latin typeface="Aptos" pitchFamily="34" charset="0"/>
-                <a:ea typeface="Aptos" pitchFamily="34" charset="-122"/>
-                <a:cs typeface="Aptos" pitchFamily="34" charset="-120"/>
-              </a:rPr>
-              <a:t>Concept to action</a:t>
-            </a:r>
-            <a:endParaRPr lang="en-US" sz="1000" dirty="0"/>
-          </a:p>
-        </p:txBody>
-      </p:sp>
-      <p:sp>
-        <p:nvSpPr>
-          <p:cNvPr id="18" name="Shape 16"/>
           <p:cNvSpPr/>
           <p:nvPr/>
         </p:nvSpPr>
@@ -7287,7 +6968,7 @@
       </p:sp>
       <p:sp>
         <p:nvSpPr>
-          <p:cNvPr id="19" name="Text 17"/>
+          <p:cNvPr id="17" name="Text 15"/>
           <p:cNvSpPr/>
           <p:nvPr/>
         </p:nvSpPr>
@@ -7326,7 +7007,7 @@
       </p:sp>
       <p:sp>
         <p:nvSpPr>
-          <p:cNvPr id="20" name="Text 18"/>
+          <p:cNvPr id="18" name="Text 16"/>
           <p:cNvSpPr/>
           <p:nvPr/>
         </p:nvSpPr>
@@ -7834,13 +7515,11 @@
             </a:avLst>
           </a:prstGeom>
           <a:solidFill>
-            <a:srgbClr val="FFFFFF">
-              <a:alpha val="88000"/>
-            </a:srgbClr>
+            <a:srgbClr val="FFFFFF"/>
           </a:solidFill>
           <a:ln w="12700">
             <a:solidFill>
-              <a:srgbClr val="D6E8F2"/>
+              <a:srgbClr val="B9D7E6"/>
             </a:solidFill>
             <a:prstDash val="solid"/>
           </a:ln>
@@ -7848,119 +7527,98 @@
       </p:sp>
       <p:sp>
         <p:nvSpPr>
-          <p:cNvPr id="14" name="Shape 12"/>
-          <p:cNvSpPr/>
-          <p:nvPr/>
-        </p:nvSpPr>
-        <p:spPr>
-          <a:xfrm>
-            <a:off x="8074152" y="3291840"/>
-            <a:ext cx="2596896" cy="749808"/>
-          </a:xfrm>
-          <a:prstGeom prst="rect">
-            <a:avLst/>
-          </a:prstGeom>
-          <a:solidFill>
-            <a:srgbClr val="EAF6F8"/>
-          </a:solidFill>
-          <a:ln w="12700">
-            <a:solidFill>
-              <a:srgbClr val="8ABBD8"/>
-            </a:solidFill>
-            <a:prstDash val="solid"/>
-          </a:ln>
-        </p:spPr>
-      </p:sp>
-      <p:sp>
-        <p:nvSpPr>
-          <p:cNvPr id="15" name="Shape 13"/>
-          <p:cNvSpPr/>
-          <p:nvPr/>
-        </p:nvSpPr>
-        <p:spPr>
-          <a:xfrm>
-            <a:off x="8202168" y="3721608"/>
-            <a:ext cx="2340864" cy="0"/>
-          </a:xfrm>
-          <a:prstGeom prst="line">
-            <a:avLst/>
-          </a:prstGeom>
-          <a:noFill/>
-          <a:ln w="19050">
-            <a:solidFill>
-              <a:srgbClr val="0068B7"/>
-            </a:solidFill>
-            <a:prstDash val="solid"/>
-          </a:ln>
-        </p:spPr>
+          <p:cNvPr id="14" name="Text 12"/>
+          <p:cNvSpPr/>
+          <p:nvPr/>
+        </p:nvSpPr>
+        <p:spPr>
+          <a:xfrm>
+            <a:off x="7799832" y="2935224"/>
+            <a:ext cx="3145536" cy="256032"/>
+          </a:xfrm>
+          <a:prstGeom prst="rect">
+            <a:avLst/>
+          </a:prstGeom>
+          <a:noFill/>
+          <a:ln/>
+        </p:spPr>
+        <p:txBody>
+          <a:bodyPr wrap="square" lIns="0" tIns="0" rIns="0" bIns="0" rtlCol="0" anchor="ctr"/>
+          <a:lstStyle/>
+          <a:p>
+            <a:pPr indent="0" marL="0">
+              <a:buNone/>
+            </a:pPr>
+            <a:r>
+              <a:rPr lang="en-US" sz="1300" b="1" dirty="0">
+                <a:solidFill>
+                  <a:srgbClr val="0068B7"/>
+                </a:solidFill>
+                <a:latin typeface="Aptos" pitchFamily="34" charset="0"/>
+                <a:ea typeface="Aptos" pitchFamily="34" charset="-122"/>
+                <a:cs typeface="Aptos" pitchFamily="34" charset="-120"/>
+              </a:rPr>
+              <a:t>Concept checkpoints</a:t>
+            </a:r>
+            <a:endParaRPr lang="en-US" sz="1300" dirty="0"/>
+          </a:p>
+        </p:txBody>
+      </p:sp>
+      <p:sp>
+        <p:nvSpPr>
+          <p:cNvPr id="15" name="Text 13"/>
+          <p:cNvSpPr/>
+          <p:nvPr/>
+        </p:nvSpPr>
+        <p:spPr>
+          <a:xfrm>
+            <a:off x="7818120" y="3300984"/>
+            <a:ext cx="3090672" cy="877824"/>
+          </a:xfrm>
+          <a:prstGeom prst="rect">
+            <a:avLst/>
+          </a:prstGeom>
+          <a:noFill/>
+          <a:ln/>
+        </p:spPr>
+        <p:txBody>
+          <a:bodyPr wrap="square" lIns="254" tIns="254" rIns="254" bIns="254" rtlCol="0" anchor="t">
+            <a:normAutofit/>
+          </a:bodyPr>
+          <a:lstStyle/>
+          <a:p>
+            <a:r>
+              <a:rPr lang="en-US" sz="1380" dirty="0">
+                <a:solidFill>
+                  <a:srgbClr val="17364A"/>
+                </a:solidFill>
+                <a:latin typeface="Aptos" pitchFamily="34" charset="0"/>
+                <a:ea typeface="Aptos" pitchFamily="34" charset="-122"/>
+                <a:cs typeface="Aptos" pitchFamily="34" charset="-120"/>
+              </a:rPr>
+              <a:t>Document assumptions, unresolved questions, and which agency roles would need to review.</a:t>
+            </a:r>
+            <a:endParaRPr lang="en-US" sz="1380" dirty="0"/>
+          </a:p>
+          <a:p>
+            <a:r>
+              <a:rPr lang="en-US" sz="1380" dirty="0">
+                <a:solidFill>
+                  <a:srgbClr val="17364A"/>
+                </a:solidFill>
+                <a:latin typeface="Aptos" pitchFamily="34" charset="0"/>
+                <a:ea typeface="Aptos" pitchFamily="34" charset="-122"/>
+                <a:cs typeface="Aptos" pitchFamily="34" charset="-120"/>
+              </a:rPr>
+              <a:t>The exercise should produce a work product that could support governance review,.</a:t>
+            </a:r>
+            <a:endParaRPr lang="en-US" sz="1380" dirty="0"/>
+          </a:p>
+        </p:txBody>
       </p:sp>
       <p:sp>
         <p:nvSpPr>
           <p:cNvPr id="16" name="Shape 14"/>
-          <p:cNvSpPr/>
-          <p:nvPr/>
-        </p:nvSpPr>
-        <p:spPr>
-          <a:xfrm>
-            <a:off x="9198864" y="4206240"/>
-            <a:ext cx="347472" cy="347472"/>
-          </a:xfrm>
-          <a:prstGeom prst="ellipse">
-            <a:avLst/>
-          </a:prstGeom>
-          <a:solidFill>
-            <a:srgbClr val="2F8A28"/>
-          </a:solidFill>
-          <a:ln w="12700">
-            <a:solidFill>
-              <a:srgbClr val="2F8A28"/>
-            </a:solidFill>
-            <a:prstDash val="solid"/>
-          </a:ln>
-        </p:spPr>
-      </p:sp>
-      <p:sp>
-        <p:nvSpPr>
-          <p:cNvPr id="17" name="Text 15"/>
-          <p:cNvSpPr/>
-          <p:nvPr/>
-        </p:nvSpPr>
-        <p:spPr>
-          <a:xfrm>
-            <a:off x="7909560" y="3977640"/>
-            <a:ext cx="2926080" cy="182880"/>
-          </a:xfrm>
-          <a:prstGeom prst="rect">
-            <a:avLst/>
-          </a:prstGeom>
-          <a:noFill/>
-          <a:ln/>
-        </p:spPr>
-        <p:txBody>
-          <a:bodyPr wrap="square" lIns="0" tIns="0" rIns="0" bIns="0" rtlCol="0" anchor="ctr"/>
-          <a:lstStyle/>
-          <a:p>
-            <a:pPr algn="ctr" indent="0" marL="0">
-              <a:buNone/>
-            </a:pPr>
-            <a:r>
-              <a:rPr lang="en-US" sz="1000" dirty="0">
-                <a:solidFill>
-                  <a:srgbClr val="003A63"/>
-                </a:solidFill>
-                <a:latin typeface="Aptos" pitchFamily="34" charset="0"/>
-                <a:ea typeface="Aptos" pitchFamily="34" charset="-122"/>
-                <a:cs typeface="Aptos" pitchFamily="34" charset="-120"/>
-              </a:rPr>
-              <a:t>Concept to action</a:t>
-            </a:r>
-            <a:endParaRPr lang="en-US" sz="1000" dirty="0"/>
-          </a:p>
-        </p:txBody>
-      </p:sp>
-      <p:sp>
-        <p:nvSpPr>
-          <p:cNvPr id="18" name="Shape 16"/>
           <p:cNvSpPr/>
           <p:nvPr/>
         </p:nvSpPr>
@@ -7987,7 +7645,7 @@
       </p:sp>
       <p:sp>
         <p:nvSpPr>
-          <p:cNvPr id="19" name="Text 17"/>
+          <p:cNvPr id="17" name="Text 15"/>
           <p:cNvSpPr/>
           <p:nvPr/>
         </p:nvSpPr>
@@ -8026,7 +7684,7 @@
       </p:sp>
       <p:sp>
         <p:nvSpPr>
-          <p:cNvPr id="20" name="Text 18"/>
+          <p:cNvPr id="18" name="Text 16"/>
           <p:cNvSpPr/>
           <p:nvPr/>
         </p:nvSpPr>
@@ -8506,13 +8164,11 @@
             </a:avLst>
           </a:prstGeom>
           <a:solidFill>
-            <a:srgbClr val="FFFFFF">
-              <a:alpha val="88000"/>
-            </a:srgbClr>
+            <a:srgbClr val="FFFFFF"/>
           </a:solidFill>
           <a:ln w="12700">
             <a:solidFill>
-              <a:srgbClr val="D6E8F2"/>
+              <a:srgbClr val="B9D7E6"/>
             </a:solidFill>
             <a:prstDash val="solid"/>
           </a:ln>
@@ -8520,119 +8176,84 @@
       </p:sp>
       <p:sp>
         <p:nvSpPr>
-          <p:cNvPr id="14" name="Shape 12"/>
-          <p:cNvSpPr/>
-          <p:nvPr/>
-        </p:nvSpPr>
-        <p:spPr>
-          <a:xfrm>
-            <a:off x="8074152" y="3291840"/>
-            <a:ext cx="2596896" cy="749808"/>
-          </a:xfrm>
-          <a:prstGeom prst="rect">
-            <a:avLst/>
-          </a:prstGeom>
-          <a:solidFill>
-            <a:srgbClr val="EAF6F8"/>
-          </a:solidFill>
-          <a:ln w="12700">
-            <a:solidFill>
-              <a:srgbClr val="8ABBD8"/>
-            </a:solidFill>
-            <a:prstDash val="solid"/>
-          </a:ln>
-        </p:spPr>
-      </p:sp>
-      <p:sp>
-        <p:nvSpPr>
-          <p:cNvPr id="15" name="Shape 13"/>
-          <p:cNvSpPr/>
-          <p:nvPr/>
-        </p:nvSpPr>
-        <p:spPr>
-          <a:xfrm>
-            <a:off x="8202168" y="3721608"/>
-            <a:ext cx="2340864" cy="0"/>
-          </a:xfrm>
-          <a:prstGeom prst="line">
-            <a:avLst/>
-          </a:prstGeom>
-          <a:noFill/>
-          <a:ln w="19050">
-            <a:solidFill>
-              <a:srgbClr val="0068B7"/>
-            </a:solidFill>
-            <a:prstDash val="solid"/>
-          </a:ln>
-        </p:spPr>
+          <p:cNvPr id="14" name="Text 12"/>
+          <p:cNvSpPr/>
+          <p:nvPr/>
+        </p:nvSpPr>
+        <p:spPr>
+          <a:xfrm>
+            <a:off x="7799832" y="2935224"/>
+            <a:ext cx="3145536" cy="256032"/>
+          </a:xfrm>
+          <a:prstGeom prst="rect">
+            <a:avLst/>
+          </a:prstGeom>
+          <a:noFill/>
+          <a:ln/>
+        </p:spPr>
+        <p:txBody>
+          <a:bodyPr wrap="square" lIns="0" tIns="0" rIns="0" bIns="0" rtlCol="0" anchor="ctr"/>
+          <a:lstStyle/>
+          <a:p>
+            <a:pPr indent="0" marL="0">
+              <a:buNone/>
+            </a:pPr>
+            <a:r>
+              <a:rPr lang="en-US" sz="1300" b="1" dirty="0">
+                <a:solidFill>
+                  <a:srgbClr val="0068B7"/>
+                </a:solidFill>
+                <a:latin typeface="Aptos" pitchFamily="34" charset="0"/>
+                <a:ea typeface="Aptos" pitchFamily="34" charset="-122"/>
+                <a:cs typeface="Aptos" pitchFamily="34" charset="-120"/>
+              </a:rPr>
+              <a:t>Concept checkpoints</a:t>
+            </a:r>
+            <a:endParaRPr lang="en-US" sz="1300" dirty="0"/>
+          </a:p>
+        </p:txBody>
+      </p:sp>
+      <p:sp>
+        <p:nvSpPr>
+          <p:cNvPr id="15" name="Text 13"/>
+          <p:cNvSpPr/>
+          <p:nvPr/>
+        </p:nvSpPr>
+        <p:spPr>
+          <a:xfrm>
+            <a:off x="7818120" y="3300984"/>
+            <a:ext cx="3090672" cy="877824"/>
+          </a:xfrm>
+          <a:prstGeom prst="rect">
+            <a:avLst/>
+          </a:prstGeom>
+          <a:noFill/>
+          <a:ln/>
+        </p:spPr>
+        <p:txBody>
+          <a:bodyPr wrap="square" lIns="254" tIns="254" rIns="254" bIns="254" rtlCol="0" anchor="t">
+            <a:normAutofit/>
+          </a:bodyPr>
+          <a:lstStyle/>
+          <a:p>
+            <a:r>
+              <a:rPr lang="en-US" sz="1380" dirty="0">
+                <a:solidFill>
+                  <a:srgbClr val="17364A"/>
+                </a:solidFill>
+                <a:latin typeface="Aptos" pitchFamily="34" charset="0"/>
+                <a:ea typeface="Aptos" pitchFamily="34" charset="-122"/>
+                <a:cs typeface="Aptos" pitchFamily="34" charset="-120"/>
+              </a:rPr>
+              <a:t>AI business case worksheet; total cost of ownership estimate; benefits realization plan;.</a:t>
+            </a:r>
+            <a:endParaRPr lang="en-US" sz="1380" dirty="0"/>
+          </a:p>
+        </p:txBody>
       </p:sp>
       <p:sp>
         <p:nvSpPr>
           <p:cNvPr id="16" name="Shape 14"/>
-          <p:cNvSpPr/>
-          <p:nvPr/>
-        </p:nvSpPr>
-        <p:spPr>
-          <a:xfrm>
-            <a:off x="9198864" y="4206240"/>
-            <a:ext cx="347472" cy="347472"/>
-          </a:xfrm>
-          <a:prstGeom prst="ellipse">
-            <a:avLst/>
-          </a:prstGeom>
-          <a:solidFill>
-            <a:srgbClr val="2F8A28"/>
-          </a:solidFill>
-          <a:ln w="12700">
-            <a:solidFill>
-              <a:srgbClr val="2F8A28"/>
-            </a:solidFill>
-            <a:prstDash val="solid"/>
-          </a:ln>
-        </p:spPr>
-      </p:sp>
-      <p:sp>
-        <p:nvSpPr>
-          <p:cNvPr id="17" name="Text 15"/>
-          <p:cNvSpPr/>
-          <p:nvPr/>
-        </p:nvSpPr>
-        <p:spPr>
-          <a:xfrm>
-            <a:off x="7909560" y="3977640"/>
-            <a:ext cx="2926080" cy="182880"/>
-          </a:xfrm>
-          <a:prstGeom prst="rect">
-            <a:avLst/>
-          </a:prstGeom>
-          <a:noFill/>
-          <a:ln/>
-        </p:spPr>
-        <p:txBody>
-          <a:bodyPr wrap="square" lIns="0" tIns="0" rIns="0" bIns="0" rtlCol="0" anchor="ctr"/>
-          <a:lstStyle/>
-          <a:p>
-            <a:pPr algn="ctr" indent="0" marL="0">
-              <a:buNone/>
-            </a:pPr>
-            <a:r>
-              <a:rPr lang="en-US" sz="1000" dirty="0">
-                <a:solidFill>
-                  <a:srgbClr val="003A63"/>
-                </a:solidFill>
-                <a:latin typeface="Aptos" pitchFamily="34" charset="0"/>
-                <a:ea typeface="Aptos" pitchFamily="34" charset="-122"/>
-                <a:cs typeface="Aptos" pitchFamily="34" charset="-120"/>
-              </a:rPr>
-              <a:t>Concept to action</a:t>
-            </a:r>
-            <a:endParaRPr lang="en-US" sz="1000" dirty="0"/>
-          </a:p>
-        </p:txBody>
-      </p:sp>
-      <p:sp>
-        <p:nvSpPr>
-          <p:cNvPr id="18" name="Shape 16"/>
           <p:cNvSpPr/>
           <p:nvPr/>
         </p:nvSpPr>
@@ -8659,7 +8280,7 @@
       </p:sp>
       <p:sp>
         <p:nvSpPr>
-          <p:cNvPr id="19" name="Text 17"/>
+          <p:cNvPr id="17" name="Text 15"/>
           <p:cNvSpPr/>
           <p:nvPr/>
         </p:nvSpPr>
@@ -8698,7 +8319,7 @@
       </p:sp>
       <p:sp>
         <p:nvSpPr>
-          <p:cNvPr id="20" name="Text 18"/>
+          <p:cNvPr id="18" name="Text 16"/>
           <p:cNvSpPr/>
           <p:nvPr/>
         </p:nvSpPr>
@@ -9178,13 +8799,11 @@
             </a:avLst>
           </a:prstGeom>
           <a:solidFill>
-            <a:srgbClr val="FFFFFF">
-              <a:alpha val="88000"/>
-            </a:srgbClr>
+            <a:srgbClr val="FFFFFF"/>
           </a:solidFill>
           <a:ln w="12700">
             <a:solidFill>
-              <a:srgbClr val="D6E8F2"/>
+              <a:srgbClr val="B9D7E6"/>
             </a:solidFill>
             <a:prstDash val="solid"/>
           </a:ln>
@@ -9192,119 +8811,84 @@
       </p:sp>
       <p:sp>
         <p:nvSpPr>
-          <p:cNvPr id="14" name="Shape 12"/>
-          <p:cNvSpPr/>
-          <p:nvPr/>
-        </p:nvSpPr>
-        <p:spPr>
-          <a:xfrm>
-            <a:off x="8074152" y="3291840"/>
-            <a:ext cx="2596896" cy="749808"/>
-          </a:xfrm>
-          <a:prstGeom prst="rect">
-            <a:avLst/>
-          </a:prstGeom>
-          <a:solidFill>
-            <a:srgbClr val="EAF6F8"/>
-          </a:solidFill>
-          <a:ln w="12700">
-            <a:solidFill>
-              <a:srgbClr val="8ABBD8"/>
-            </a:solidFill>
-            <a:prstDash val="solid"/>
-          </a:ln>
-        </p:spPr>
-      </p:sp>
-      <p:sp>
-        <p:nvSpPr>
-          <p:cNvPr id="15" name="Shape 13"/>
-          <p:cNvSpPr/>
-          <p:nvPr/>
-        </p:nvSpPr>
-        <p:spPr>
-          <a:xfrm>
-            <a:off x="8202168" y="3721608"/>
-            <a:ext cx="2340864" cy="0"/>
-          </a:xfrm>
-          <a:prstGeom prst="line">
-            <a:avLst/>
-          </a:prstGeom>
-          <a:noFill/>
-          <a:ln w="19050">
-            <a:solidFill>
-              <a:srgbClr val="0068B7"/>
-            </a:solidFill>
-            <a:prstDash val="solid"/>
-          </a:ln>
-        </p:spPr>
+          <p:cNvPr id="14" name="Text 12"/>
+          <p:cNvSpPr/>
+          <p:nvPr/>
+        </p:nvSpPr>
+        <p:spPr>
+          <a:xfrm>
+            <a:off x="7799832" y="2935224"/>
+            <a:ext cx="3145536" cy="256032"/>
+          </a:xfrm>
+          <a:prstGeom prst="rect">
+            <a:avLst/>
+          </a:prstGeom>
+          <a:noFill/>
+          <a:ln/>
+        </p:spPr>
+        <p:txBody>
+          <a:bodyPr wrap="square" lIns="0" tIns="0" rIns="0" bIns="0" rtlCol="0" anchor="ctr"/>
+          <a:lstStyle/>
+          <a:p>
+            <a:pPr indent="0" marL="0">
+              <a:buNone/>
+            </a:pPr>
+            <a:r>
+              <a:rPr lang="en-US" sz="1300" b="1" dirty="0">
+                <a:solidFill>
+                  <a:srgbClr val="0068B7"/>
+                </a:solidFill>
+                <a:latin typeface="Aptos" pitchFamily="34" charset="0"/>
+                <a:ea typeface="Aptos" pitchFamily="34" charset="-122"/>
+                <a:cs typeface="Aptos" pitchFamily="34" charset="-120"/>
+              </a:rPr>
+              <a:t>Concept checkpoints</a:t>
+            </a:r>
+            <a:endParaRPr lang="en-US" sz="1300" dirty="0"/>
+          </a:p>
+        </p:txBody>
+      </p:sp>
+      <p:sp>
+        <p:nvSpPr>
+          <p:cNvPr id="15" name="Text 13"/>
+          <p:cNvSpPr/>
+          <p:nvPr/>
+        </p:nvSpPr>
+        <p:spPr>
+          <a:xfrm>
+            <a:off x="7818120" y="3300984"/>
+            <a:ext cx="3090672" cy="877824"/>
+          </a:xfrm>
+          <a:prstGeom prst="rect">
+            <a:avLst/>
+          </a:prstGeom>
+          <a:noFill/>
+          <a:ln/>
+        </p:spPr>
+        <p:txBody>
+          <a:bodyPr wrap="square" lIns="254" tIns="254" rIns="254" bIns="254" rtlCol="0" anchor="t">
+            <a:normAutofit/>
+          </a:bodyPr>
+          <a:lstStyle/>
+          <a:p>
+            <a:r>
+              <a:rPr lang="en-US" sz="1380" dirty="0">
+                <a:solidFill>
+                  <a:srgbClr val="17364A"/>
+                </a:solidFill>
+                <a:latin typeface="Aptos" pitchFamily="34" charset="0"/>
+                <a:ea typeface="Aptos" pitchFamily="34" charset="-122"/>
+                <a:cs typeface="Aptos" pitchFamily="34" charset="-120"/>
+              </a:rPr>
+              <a:t>AI business case worksheet; total cost of ownership estimate; benefits realization plan;.</a:t>
+            </a:r>
+            <a:endParaRPr lang="en-US" sz="1380" dirty="0"/>
+          </a:p>
+        </p:txBody>
       </p:sp>
       <p:sp>
         <p:nvSpPr>
           <p:cNvPr id="16" name="Shape 14"/>
-          <p:cNvSpPr/>
-          <p:nvPr/>
-        </p:nvSpPr>
-        <p:spPr>
-          <a:xfrm>
-            <a:off x="9198864" y="4206240"/>
-            <a:ext cx="347472" cy="347472"/>
-          </a:xfrm>
-          <a:prstGeom prst="ellipse">
-            <a:avLst/>
-          </a:prstGeom>
-          <a:solidFill>
-            <a:srgbClr val="2F8A28"/>
-          </a:solidFill>
-          <a:ln w="12700">
-            <a:solidFill>
-              <a:srgbClr val="2F8A28"/>
-            </a:solidFill>
-            <a:prstDash val="solid"/>
-          </a:ln>
-        </p:spPr>
-      </p:sp>
-      <p:sp>
-        <p:nvSpPr>
-          <p:cNvPr id="17" name="Text 15"/>
-          <p:cNvSpPr/>
-          <p:nvPr/>
-        </p:nvSpPr>
-        <p:spPr>
-          <a:xfrm>
-            <a:off x="7909560" y="3977640"/>
-            <a:ext cx="2926080" cy="182880"/>
-          </a:xfrm>
-          <a:prstGeom prst="rect">
-            <a:avLst/>
-          </a:prstGeom>
-          <a:noFill/>
-          <a:ln/>
-        </p:spPr>
-        <p:txBody>
-          <a:bodyPr wrap="square" lIns="0" tIns="0" rIns="0" bIns="0" rtlCol="0" anchor="ctr"/>
-          <a:lstStyle/>
-          <a:p>
-            <a:pPr algn="ctr" indent="0" marL="0">
-              <a:buNone/>
-            </a:pPr>
-            <a:r>
-              <a:rPr lang="en-US" sz="1000" dirty="0">
-                <a:solidFill>
-                  <a:srgbClr val="003A63"/>
-                </a:solidFill>
-                <a:latin typeface="Aptos" pitchFamily="34" charset="0"/>
-                <a:ea typeface="Aptos" pitchFamily="34" charset="-122"/>
-                <a:cs typeface="Aptos" pitchFamily="34" charset="-120"/>
-              </a:rPr>
-              <a:t>Concept to action</a:t>
-            </a:r>
-            <a:endParaRPr lang="en-US" sz="1000" dirty="0"/>
-          </a:p>
-        </p:txBody>
-      </p:sp>
-      <p:sp>
-        <p:nvSpPr>
-          <p:cNvPr id="18" name="Shape 16"/>
           <p:cNvSpPr/>
           <p:nvPr/>
         </p:nvSpPr>
@@ -9331,7 +8915,7 @@
       </p:sp>
       <p:sp>
         <p:nvSpPr>
-          <p:cNvPr id="19" name="Text 17"/>
+          <p:cNvPr id="17" name="Text 15"/>
           <p:cNvSpPr/>
           <p:nvPr/>
         </p:nvSpPr>
@@ -9370,7 +8954,7 @@
       </p:sp>
       <p:sp>
         <p:nvSpPr>
-          <p:cNvPr id="20" name="Text 18"/>
+          <p:cNvPr id="18" name="Text 16"/>
           <p:cNvSpPr/>
           <p:nvPr/>
         </p:nvSpPr>
@@ -9878,13 +9462,11 @@
             </a:avLst>
           </a:prstGeom>
           <a:solidFill>
-            <a:srgbClr val="FFFFFF">
-              <a:alpha val="88000"/>
-            </a:srgbClr>
+            <a:srgbClr val="FFFFFF"/>
           </a:solidFill>
           <a:ln w="12700">
             <a:solidFill>
-              <a:srgbClr val="D6E8F2"/>
+              <a:srgbClr val="B9D7E6"/>
             </a:solidFill>
             <a:prstDash val="solid"/>
           </a:ln>
@@ -9892,119 +9474,112 @@
       </p:sp>
       <p:sp>
         <p:nvSpPr>
-          <p:cNvPr id="14" name="Shape 12"/>
-          <p:cNvSpPr/>
-          <p:nvPr/>
-        </p:nvSpPr>
-        <p:spPr>
-          <a:xfrm>
-            <a:off x="8074152" y="3291840"/>
-            <a:ext cx="2596896" cy="749808"/>
-          </a:xfrm>
-          <a:prstGeom prst="rect">
-            <a:avLst/>
-          </a:prstGeom>
-          <a:solidFill>
-            <a:srgbClr val="EAF6F8"/>
-          </a:solidFill>
-          <a:ln w="12700">
-            <a:solidFill>
-              <a:srgbClr val="8ABBD8"/>
-            </a:solidFill>
-            <a:prstDash val="solid"/>
-          </a:ln>
-        </p:spPr>
-      </p:sp>
-      <p:sp>
-        <p:nvSpPr>
-          <p:cNvPr id="15" name="Shape 13"/>
-          <p:cNvSpPr/>
-          <p:nvPr/>
-        </p:nvSpPr>
-        <p:spPr>
-          <a:xfrm>
-            <a:off x="8202168" y="3721608"/>
-            <a:ext cx="2340864" cy="0"/>
-          </a:xfrm>
-          <a:prstGeom prst="line">
-            <a:avLst/>
-          </a:prstGeom>
-          <a:noFill/>
-          <a:ln w="19050">
-            <a:solidFill>
-              <a:srgbClr val="0068B7"/>
-            </a:solidFill>
-            <a:prstDash val="solid"/>
-          </a:ln>
-        </p:spPr>
+          <p:cNvPr id="14" name="Text 12"/>
+          <p:cNvSpPr/>
+          <p:nvPr/>
+        </p:nvSpPr>
+        <p:spPr>
+          <a:xfrm>
+            <a:off x="7799832" y="2935224"/>
+            <a:ext cx="3145536" cy="256032"/>
+          </a:xfrm>
+          <a:prstGeom prst="rect">
+            <a:avLst/>
+          </a:prstGeom>
+          <a:noFill/>
+          <a:ln/>
+        </p:spPr>
+        <p:txBody>
+          <a:bodyPr wrap="square" lIns="0" tIns="0" rIns="0" bIns="0" rtlCol="0" anchor="ctr"/>
+          <a:lstStyle/>
+          <a:p>
+            <a:pPr indent="0" marL="0">
+              <a:buNone/>
+            </a:pPr>
+            <a:r>
+              <a:rPr lang="en-US" sz="1300" b="1" dirty="0">
+                <a:solidFill>
+                  <a:srgbClr val="0068B7"/>
+                </a:solidFill>
+                <a:latin typeface="Aptos" pitchFamily="34" charset="0"/>
+                <a:ea typeface="Aptos" pitchFamily="34" charset="-122"/>
+                <a:cs typeface="Aptos" pitchFamily="34" charset="-120"/>
+              </a:rPr>
+              <a:t>Concept checkpoints</a:t>
+            </a:r>
+            <a:endParaRPr lang="en-US" sz="1300" dirty="0"/>
+          </a:p>
+        </p:txBody>
+      </p:sp>
+      <p:sp>
+        <p:nvSpPr>
+          <p:cNvPr id="15" name="Text 13"/>
+          <p:cNvSpPr/>
+          <p:nvPr/>
+        </p:nvSpPr>
+        <p:spPr>
+          <a:xfrm>
+            <a:off x="7818120" y="3300984"/>
+            <a:ext cx="3090672" cy="877824"/>
+          </a:xfrm>
+          <a:prstGeom prst="rect">
+            <a:avLst/>
+          </a:prstGeom>
+          <a:noFill/>
+          <a:ln/>
+        </p:spPr>
+        <p:txBody>
+          <a:bodyPr wrap="square" lIns="254" tIns="254" rIns="254" bIns="254" rtlCol="0" anchor="t">
+            <a:normAutofit/>
+          </a:bodyPr>
+          <a:lstStyle/>
+          <a:p>
+            <a:r>
+              <a:rPr lang="en-US" sz="1380" dirty="0">
+                <a:solidFill>
+                  <a:srgbClr val="17364A"/>
+                </a:solidFill>
+                <a:latin typeface="Aptos" pitchFamily="34" charset="0"/>
+                <a:ea typeface="Aptos" pitchFamily="34" charset="-122"/>
+                <a:cs typeface="Aptos" pitchFamily="34" charset="-120"/>
+              </a:rPr>
+              <a:t>1.</a:t>
+            </a:r>
+            <a:endParaRPr lang="en-US" sz="1380" dirty="0"/>
+          </a:p>
+          <a:p>
+            <a:r>
+              <a:rPr lang="en-US" sz="1380" dirty="0">
+                <a:solidFill>
+                  <a:srgbClr val="17364A"/>
+                </a:solidFill>
+                <a:latin typeface="Aptos" pitchFamily="34" charset="0"/>
+                <a:ea typeface="Aptos" pitchFamily="34" charset="-122"/>
+                <a:cs typeface="Aptos" pitchFamily="34" charset="-120"/>
+              </a:rPr>
+              <a:t>What is the strongest reason this module topic belongs in AI leadership and governance.</a:t>
+            </a:r>
+            <a:endParaRPr lang="en-US" sz="1380" dirty="0"/>
+          </a:p>
+          <a:p>
+            <a:r>
+              <a:rPr lang="en-US" sz="1380" dirty="0">
+                <a:solidFill>
+                  <a:srgbClr val="17364A"/>
+                </a:solidFill>
+                <a:latin typeface="Aptos" pitchFamily="34" charset="0"/>
+                <a:ea typeface="Aptos" pitchFamily="34" charset="-122"/>
+                <a:cs typeface="Aptos" pitchFamily="34" charset="-120"/>
+              </a:rPr>
+              <a:t>2.</a:t>
+            </a:r>
+            <a:endParaRPr lang="en-US" sz="1380" dirty="0"/>
+          </a:p>
+        </p:txBody>
       </p:sp>
       <p:sp>
         <p:nvSpPr>
           <p:cNvPr id="16" name="Shape 14"/>
-          <p:cNvSpPr/>
-          <p:nvPr/>
-        </p:nvSpPr>
-        <p:spPr>
-          <a:xfrm>
-            <a:off x="9198864" y="4206240"/>
-            <a:ext cx="347472" cy="347472"/>
-          </a:xfrm>
-          <a:prstGeom prst="ellipse">
-            <a:avLst/>
-          </a:prstGeom>
-          <a:solidFill>
-            <a:srgbClr val="2F8A28"/>
-          </a:solidFill>
-          <a:ln w="12700">
-            <a:solidFill>
-              <a:srgbClr val="2F8A28"/>
-            </a:solidFill>
-            <a:prstDash val="solid"/>
-          </a:ln>
-        </p:spPr>
-      </p:sp>
-      <p:sp>
-        <p:nvSpPr>
-          <p:cNvPr id="17" name="Text 15"/>
-          <p:cNvSpPr/>
-          <p:nvPr/>
-        </p:nvSpPr>
-        <p:spPr>
-          <a:xfrm>
-            <a:off x="7909560" y="3977640"/>
-            <a:ext cx="2926080" cy="182880"/>
-          </a:xfrm>
-          <a:prstGeom prst="rect">
-            <a:avLst/>
-          </a:prstGeom>
-          <a:noFill/>
-          <a:ln/>
-        </p:spPr>
-        <p:txBody>
-          <a:bodyPr wrap="square" lIns="0" tIns="0" rIns="0" bIns="0" rtlCol="0" anchor="ctr"/>
-          <a:lstStyle/>
-          <a:p>
-            <a:pPr algn="ctr" indent="0" marL="0">
-              <a:buNone/>
-            </a:pPr>
-            <a:r>
-              <a:rPr lang="en-US" sz="1000" dirty="0">
-                <a:solidFill>
-                  <a:srgbClr val="003A63"/>
-                </a:solidFill>
-                <a:latin typeface="Aptos" pitchFamily="34" charset="0"/>
-                <a:ea typeface="Aptos" pitchFamily="34" charset="-122"/>
-                <a:cs typeface="Aptos" pitchFamily="34" charset="-120"/>
-              </a:rPr>
-              <a:t>Concept to action</a:t>
-            </a:r>
-            <a:endParaRPr lang="en-US" sz="1000" dirty="0"/>
-          </a:p>
-        </p:txBody>
-      </p:sp>
-      <p:sp>
-        <p:nvSpPr>
-          <p:cNvPr id="18" name="Shape 16"/>
           <p:cNvSpPr/>
           <p:nvPr/>
         </p:nvSpPr>
@@ -10031,7 +9606,7 @@
       </p:sp>
       <p:sp>
         <p:nvSpPr>
-          <p:cNvPr id="19" name="Text 17"/>
+          <p:cNvPr id="17" name="Text 15"/>
           <p:cNvSpPr/>
           <p:nvPr/>
         </p:nvSpPr>
@@ -10070,7 +9645,7 @@
       </p:sp>
       <p:sp>
         <p:nvSpPr>
-          <p:cNvPr id="20" name="Text 18"/>
+          <p:cNvPr id="18" name="Text 16"/>
           <p:cNvSpPr/>
           <p:nvPr/>
         </p:nvSpPr>
@@ -10603,20 +10178,20 @@
         </p:nvSpPr>
         <p:spPr>
           <a:xfrm>
-            <a:off x="7635240" y="3730752"/>
-            <a:ext cx="1033272" cy="749808"/>
+            <a:off x="7909560" y="3675888"/>
+            <a:ext cx="3154680" cy="1691640"/>
           </a:xfrm>
           <a:prstGeom prst="roundRect">
             <a:avLst>
-              <a:gd name="adj" fmla="val 14634"/>
+              <a:gd name="adj" fmla="val 6486"/>
             </a:avLst>
           </a:prstGeom>
           <a:solidFill>
-            <a:srgbClr val="0068B7"/>
+            <a:srgbClr val="FFFFFF"/>
           </a:solidFill>
           <a:ln w="12700">
             <a:solidFill>
-              <a:srgbClr val="0068B7"/>
+              <a:srgbClr val="B9D7E6"/>
             </a:solidFill>
             <a:prstDash val="solid"/>
           </a:ln>
@@ -10630,172 +10205,100 @@
         </p:nvSpPr>
         <p:spPr>
           <a:xfrm>
-            <a:off x="7708392" y="3922776"/>
-            <a:ext cx="886968" cy="310896"/>
-          </a:xfrm>
-          <a:prstGeom prst="rect">
-            <a:avLst/>
-          </a:prstGeom>
-          <a:noFill/>
-          <a:ln/>
-        </p:spPr>
-        <p:txBody>
-          <a:bodyPr wrap="square" lIns="0" tIns="0" rIns="0" bIns="0" rtlCol="0" anchor="ctr">
+            <a:off x="8074152" y="3822192"/>
+            <a:ext cx="2825496" cy="256032"/>
+          </a:xfrm>
+          <a:prstGeom prst="rect">
+            <a:avLst/>
+          </a:prstGeom>
+          <a:noFill/>
+          <a:ln/>
+        </p:spPr>
+        <p:txBody>
+          <a:bodyPr wrap="square" lIns="0" tIns="0" rIns="0" bIns="0" rtlCol="0" anchor="ctr"/>
+          <a:lstStyle/>
+          <a:p>
+            <a:pPr indent="0" marL="0">
+              <a:buNone/>
+            </a:pPr>
+            <a:r>
+              <a:rPr lang="en-US" sz="1300" b="1" dirty="0">
+                <a:solidFill>
+                  <a:srgbClr val="0068B7"/>
+                </a:solidFill>
+                <a:latin typeface="Aptos" pitchFamily="34" charset="0"/>
+                <a:ea typeface="Aptos" pitchFamily="34" charset="-122"/>
+                <a:cs typeface="Aptos" pitchFamily="34" charset="-120"/>
+              </a:rPr>
+              <a:t>Learning sequence</a:t>
+            </a:r>
+            <a:endParaRPr lang="en-US" sz="1300" dirty="0"/>
+          </a:p>
+        </p:txBody>
+      </p:sp>
+      <p:sp>
+        <p:nvSpPr>
+          <p:cNvPr id="15" name="Text 13"/>
+          <p:cNvSpPr/>
+          <p:nvPr/>
+        </p:nvSpPr>
+        <p:spPr>
+          <a:xfrm>
+            <a:off x="8092440" y="4187952"/>
+            <a:ext cx="2770632" cy="1033272"/>
+          </a:xfrm>
+          <a:prstGeom prst="rect">
+            <a:avLst/>
+          </a:prstGeom>
+          <a:noFill/>
+          <a:ln/>
+        </p:spPr>
+        <p:txBody>
+          <a:bodyPr wrap="square" lIns="254" tIns="254" rIns="254" bIns="254" rtlCol="0" anchor="t">
             <a:normAutofit/>
           </a:bodyPr>
           <a:lstStyle/>
           <a:p>
-            <a:pPr algn="ctr" indent="0" marL="0">
-              <a:buNone/>
-            </a:pPr>
-            <a:r>
-              <a:rPr lang="en-US" sz="1500" b="1" dirty="0">
-                <a:solidFill>
-                  <a:srgbClr val="FFFFFF"/>
-                </a:solidFill>
-                <a:latin typeface="Aptos" pitchFamily="34" charset="0"/>
-                <a:ea typeface="Aptos" pitchFamily="34" charset="-122"/>
-                <a:cs typeface="Aptos" pitchFamily="34" charset="-120"/>
-              </a:rPr>
-              <a:t>Learn</a:t>
-            </a:r>
-            <a:endParaRPr lang="en-US" sz="1500" dirty="0"/>
-          </a:p>
-        </p:txBody>
-      </p:sp>
-      <p:sp>
-        <p:nvSpPr>
-          <p:cNvPr id="15" name="Shape 13"/>
-          <p:cNvSpPr/>
-          <p:nvPr/>
-        </p:nvSpPr>
-        <p:spPr>
-          <a:xfrm>
-            <a:off x="8924544" y="3730752"/>
-            <a:ext cx="1033272" cy="749808"/>
-          </a:xfrm>
-          <a:prstGeom prst="roundRect">
-            <a:avLst>
-              <a:gd name="adj" fmla="val 14634"/>
-            </a:avLst>
-          </a:prstGeom>
-          <a:solidFill>
-            <a:srgbClr val="2F8A28"/>
-          </a:solidFill>
-          <a:ln w="12700">
-            <a:solidFill>
-              <a:srgbClr val="2F8A28"/>
-            </a:solidFill>
-            <a:prstDash val="solid"/>
-          </a:ln>
-        </p:spPr>
-      </p:sp>
-      <p:sp>
-        <p:nvSpPr>
-          <p:cNvPr id="16" name="Text 14"/>
-          <p:cNvSpPr/>
-          <p:nvPr/>
-        </p:nvSpPr>
-        <p:spPr>
-          <a:xfrm>
-            <a:off x="8997696" y="3922776"/>
-            <a:ext cx="886968" cy="310896"/>
-          </a:xfrm>
-          <a:prstGeom prst="rect">
-            <a:avLst/>
-          </a:prstGeom>
-          <a:noFill/>
-          <a:ln/>
-        </p:spPr>
-        <p:txBody>
-          <a:bodyPr wrap="square" lIns="0" tIns="0" rIns="0" bIns="0" rtlCol="0" anchor="ctr">
-            <a:normAutofit/>
-          </a:bodyPr>
-          <a:lstStyle/>
-          <a:p>
-            <a:pPr algn="ctr" indent="0" marL="0">
-              <a:buNone/>
-            </a:pPr>
-            <a:r>
-              <a:rPr lang="en-US" sz="1500" b="1" dirty="0">
-                <a:solidFill>
-                  <a:srgbClr val="FFFFFF"/>
-                </a:solidFill>
-                <a:latin typeface="Aptos" pitchFamily="34" charset="0"/>
-                <a:ea typeface="Aptos" pitchFamily="34" charset="-122"/>
-                <a:cs typeface="Aptos" pitchFamily="34" charset="-120"/>
-              </a:rPr>
-              <a:t>Apply</a:t>
-            </a:r>
-            <a:endParaRPr lang="en-US" sz="1500" dirty="0"/>
-          </a:p>
-        </p:txBody>
-      </p:sp>
-      <p:sp>
-        <p:nvSpPr>
-          <p:cNvPr id="17" name="Shape 15"/>
-          <p:cNvSpPr/>
-          <p:nvPr/>
-        </p:nvSpPr>
-        <p:spPr>
-          <a:xfrm>
-            <a:off x="10213848" y="3730752"/>
-            <a:ext cx="1033272" cy="749808"/>
-          </a:xfrm>
-          <a:prstGeom prst="roundRect">
-            <a:avLst>
-              <a:gd name="adj" fmla="val 14634"/>
-            </a:avLst>
-          </a:prstGeom>
-          <a:solidFill>
-            <a:srgbClr val="6A4CA3"/>
-          </a:solidFill>
-          <a:ln w="12700">
-            <a:solidFill>
-              <a:srgbClr val="6A4CA3"/>
-            </a:solidFill>
-            <a:prstDash val="solid"/>
-          </a:ln>
-        </p:spPr>
-      </p:sp>
-      <p:sp>
-        <p:nvSpPr>
-          <p:cNvPr id="18" name="Text 16"/>
-          <p:cNvSpPr/>
-          <p:nvPr/>
-        </p:nvSpPr>
-        <p:spPr>
-          <a:xfrm>
-            <a:off x="10287000" y="3922776"/>
-            <a:ext cx="886968" cy="310896"/>
-          </a:xfrm>
-          <a:prstGeom prst="rect">
-            <a:avLst/>
-          </a:prstGeom>
-          <a:noFill/>
-          <a:ln/>
-        </p:spPr>
-        <p:txBody>
-          <a:bodyPr wrap="square" lIns="0" tIns="0" rIns="0" bIns="0" rtlCol="0" anchor="ctr">
-            <a:normAutofit/>
-          </a:bodyPr>
-          <a:lstStyle/>
-          <a:p>
-            <a:pPr algn="ctr" indent="0" marL="0">
-              <a:buNone/>
-            </a:pPr>
-            <a:r>
-              <a:rPr lang="en-US" sz="1500" b="1" dirty="0">
-                <a:solidFill>
-                  <a:srgbClr val="FFFFFF"/>
-                </a:solidFill>
-                <a:latin typeface="Aptos" pitchFamily="34" charset="0"/>
-                <a:ea typeface="Aptos" pitchFamily="34" charset="-122"/>
-                <a:cs typeface="Aptos" pitchFamily="34" charset="-120"/>
-              </a:rPr>
-              <a:t>Document</a:t>
-            </a:r>
-            <a:endParaRPr lang="en-US" sz="1500" dirty="0"/>
+            <a:r>
+              <a:rPr lang="en-US" sz="1380" dirty="0">
+                <a:solidFill>
+                  <a:srgbClr val="17364A"/>
+                </a:solidFill>
+                <a:latin typeface="Aptos" pitchFamily="34" charset="0"/>
+                <a:ea typeface="Aptos" pitchFamily="34" charset="-122"/>
+                <a:cs typeface="Aptos" pitchFamily="34" charset="-120"/>
+              </a:rPr>
+              <a:t>Read the module for shared vocabulary and context.</a:t>
+            </a:r>
+            <a:endParaRPr lang="en-US" sz="1380" dirty="0"/>
+          </a:p>
+          <a:p>
+            <a:r>
+              <a:rPr lang="en-US" sz="1380" dirty="0">
+                <a:solidFill>
+                  <a:srgbClr val="17364A"/>
+                </a:solidFill>
+                <a:latin typeface="Aptos" pitchFamily="34" charset="0"/>
+                <a:ea typeface="Aptos" pitchFamily="34" charset="-122"/>
+                <a:cs typeface="Aptos" pitchFamily="34" charset="-120"/>
+              </a:rPr>
+              <a:t>Complete the practical exercise to apply the concept.</a:t>
+            </a:r>
+            <a:endParaRPr lang="en-US" sz="1380" dirty="0"/>
+          </a:p>
+          <a:p>
+            <a:r>
+              <a:rPr lang="en-US" sz="1380" dirty="0">
+                <a:solidFill>
+                  <a:srgbClr val="17364A"/>
+                </a:solidFill>
+                <a:latin typeface="Aptos" pitchFamily="34" charset="0"/>
+                <a:ea typeface="Aptos" pitchFamily="34" charset="-122"/>
+                <a:cs typeface="Aptos" pitchFamily="34" charset="-120"/>
+              </a:rPr>
+              <a:t>Use the notes and references for deeper review.</a:t>
+            </a:r>
+            <a:endParaRPr lang="en-US" sz="1380" dirty="0"/>
           </a:p>
         </p:txBody>
       </p:sp>
@@ -11268,13 +10771,11 @@
             </a:avLst>
           </a:prstGeom>
           <a:solidFill>
-            <a:srgbClr val="FFFFFF">
-              <a:alpha val="88000"/>
-            </a:srgbClr>
+            <a:srgbClr val="FFFFFF"/>
           </a:solidFill>
           <a:ln w="12700">
             <a:solidFill>
-              <a:srgbClr val="D6E8F2"/>
+              <a:srgbClr val="B9D7E6"/>
             </a:solidFill>
             <a:prstDash val="solid"/>
           </a:ln>
@@ -11282,119 +10783,112 @@
       </p:sp>
       <p:sp>
         <p:nvSpPr>
-          <p:cNvPr id="14" name="Shape 12"/>
-          <p:cNvSpPr/>
-          <p:nvPr/>
-        </p:nvSpPr>
-        <p:spPr>
-          <a:xfrm>
-            <a:off x="8074152" y="3291840"/>
-            <a:ext cx="2596896" cy="749808"/>
-          </a:xfrm>
-          <a:prstGeom prst="rect">
-            <a:avLst/>
-          </a:prstGeom>
-          <a:solidFill>
-            <a:srgbClr val="EAF6F8"/>
-          </a:solidFill>
-          <a:ln w="12700">
-            <a:solidFill>
-              <a:srgbClr val="8ABBD8"/>
-            </a:solidFill>
-            <a:prstDash val="solid"/>
-          </a:ln>
-        </p:spPr>
-      </p:sp>
-      <p:sp>
-        <p:nvSpPr>
-          <p:cNvPr id="15" name="Shape 13"/>
-          <p:cNvSpPr/>
-          <p:nvPr/>
-        </p:nvSpPr>
-        <p:spPr>
-          <a:xfrm>
-            <a:off x="8202168" y="3721608"/>
-            <a:ext cx="2340864" cy="0"/>
-          </a:xfrm>
-          <a:prstGeom prst="line">
-            <a:avLst/>
-          </a:prstGeom>
-          <a:noFill/>
-          <a:ln w="19050">
-            <a:solidFill>
-              <a:srgbClr val="0068B7"/>
-            </a:solidFill>
-            <a:prstDash val="solid"/>
-          </a:ln>
-        </p:spPr>
+          <p:cNvPr id="14" name="Text 12"/>
+          <p:cNvSpPr/>
+          <p:nvPr/>
+        </p:nvSpPr>
+        <p:spPr>
+          <a:xfrm>
+            <a:off x="7799832" y="2935224"/>
+            <a:ext cx="3145536" cy="256032"/>
+          </a:xfrm>
+          <a:prstGeom prst="rect">
+            <a:avLst/>
+          </a:prstGeom>
+          <a:noFill/>
+          <a:ln/>
+        </p:spPr>
+        <p:txBody>
+          <a:bodyPr wrap="square" lIns="0" tIns="0" rIns="0" bIns="0" rtlCol="0" anchor="ctr"/>
+          <a:lstStyle/>
+          <a:p>
+            <a:pPr indent="0" marL="0">
+              <a:buNone/>
+            </a:pPr>
+            <a:r>
+              <a:rPr lang="en-US" sz="1300" b="1" dirty="0">
+                <a:solidFill>
+                  <a:srgbClr val="0068B7"/>
+                </a:solidFill>
+                <a:latin typeface="Aptos" pitchFamily="34" charset="0"/>
+                <a:ea typeface="Aptos" pitchFamily="34" charset="-122"/>
+                <a:cs typeface="Aptos" pitchFamily="34" charset="-120"/>
+              </a:rPr>
+              <a:t>Concept checkpoints</a:t>
+            </a:r>
+            <a:endParaRPr lang="en-US" sz="1300" dirty="0"/>
+          </a:p>
+        </p:txBody>
+      </p:sp>
+      <p:sp>
+        <p:nvSpPr>
+          <p:cNvPr id="15" name="Text 13"/>
+          <p:cNvSpPr/>
+          <p:nvPr/>
+        </p:nvSpPr>
+        <p:spPr>
+          <a:xfrm>
+            <a:off x="7818120" y="3300984"/>
+            <a:ext cx="3090672" cy="877824"/>
+          </a:xfrm>
+          <a:prstGeom prst="rect">
+            <a:avLst/>
+          </a:prstGeom>
+          <a:noFill/>
+          <a:ln/>
+        </p:spPr>
+        <p:txBody>
+          <a:bodyPr wrap="square" lIns="254" tIns="254" rIns="254" bIns="254" rtlCol="0" anchor="t">
+            <a:normAutofit/>
+          </a:bodyPr>
+          <a:lstStyle/>
+          <a:p>
+            <a:r>
+              <a:rPr lang="en-US" sz="1380" dirty="0">
+                <a:solidFill>
+                  <a:srgbClr val="17364A"/>
+                </a:solidFill>
+                <a:latin typeface="Aptos" pitchFamily="34" charset="0"/>
+                <a:ea typeface="Aptos" pitchFamily="34" charset="-122"/>
+                <a:cs typeface="Aptos" pitchFamily="34" charset="-120"/>
+              </a:rPr>
+              <a:t>NIST Artificial Intelligence Risk Management Framework (AI RMF 1.0):.</a:t>
+            </a:r>
+            <a:endParaRPr lang="en-US" sz="1380" dirty="0"/>
+          </a:p>
+          <a:p>
+            <a:r>
+              <a:rPr lang="en-US" sz="1380" dirty="0">
+                <a:solidFill>
+                  <a:srgbClr val="17364A"/>
+                </a:solidFill>
+                <a:latin typeface="Aptos" pitchFamily="34" charset="0"/>
+                <a:ea typeface="Aptos" pitchFamily="34" charset="-122"/>
+                <a:cs typeface="Aptos" pitchFamily="34" charset="-120"/>
+              </a:rPr>
+              <a:t>CDC Public Health Data Strategy and Data Modernization resources:.</a:t>
+            </a:r>
+            <a:endParaRPr lang="en-US" sz="1380" dirty="0"/>
+          </a:p>
+          <a:p>
+            <a:r>
+              <a:rPr lang="en-US" sz="1380" dirty="0">
+                <a:solidFill>
+                  <a:srgbClr val="17364A"/>
+                </a:solidFill>
+                <a:latin typeface="Aptos" pitchFamily="34" charset="0"/>
+                <a:ea typeface="Aptos" pitchFamily="34" charset="-122"/>
+                <a:cs typeface="Aptos" pitchFamily="34" charset="-120"/>
+              </a:rPr>
+              <a:t>WHO Ethics and Governance of Artificial Intelligence for Health:.</a:t>
+            </a:r>
+            <a:endParaRPr lang="en-US" sz="1380" dirty="0"/>
+          </a:p>
+        </p:txBody>
       </p:sp>
       <p:sp>
         <p:nvSpPr>
           <p:cNvPr id="16" name="Shape 14"/>
-          <p:cNvSpPr/>
-          <p:nvPr/>
-        </p:nvSpPr>
-        <p:spPr>
-          <a:xfrm>
-            <a:off x="9198864" y="4206240"/>
-            <a:ext cx="347472" cy="347472"/>
-          </a:xfrm>
-          <a:prstGeom prst="ellipse">
-            <a:avLst/>
-          </a:prstGeom>
-          <a:solidFill>
-            <a:srgbClr val="2F8A28"/>
-          </a:solidFill>
-          <a:ln w="12700">
-            <a:solidFill>
-              <a:srgbClr val="2F8A28"/>
-            </a:solidFill>
-            <a:prstDash val="solid"/>
-          </a:ln>
-        </p:spPr>
-      </p:sp>
-      <p:sp>
-        <p:nvSpPr>
-          <p:cNvPr id="17" name="Text 15"/>
-          <p:cNvSpPr/>
-          <p:nvPr/>
-        </p:nvSpPr>
-        <p:spPr>
-          <a:xfrm>
-            <a:off x="7909560" y="3977640"/>
-            <a:ext cx="2926080" cy="182880"/>
-          </a:xfrm>
-          <a:prstGeom prst="rect">
-            <a:avLst/>
-          </a:prstGeom>
-          <a:noFill/>
-          <a:ln/>
-        </p:spPr>
-        <p:txBody>
-          <a:bodyPr wrap="square" lIns="0" tIns="0" rIns="0" bIns="0" rtlCol="0" anchor="ctr"/>
-          <a:lstStyle/>
-          <a:p>
-            <a:pPr algn="ctr" indent="0" marL="0">
-              <a:buNone/>
-            </a:pPr>
-            <a:r>
-              <a:rPr lang="en-US" sz="1000" dirty="0">
-                <a:solidFill>
-                  <a:srgbClr val="003A63"/>
-                </a:solidFill>
-                <a:latin typeface="Aptos" pitchFamily="34" charset="0"/>
-                <a:ea typeface="Aptos" pitchFamily="34" charset="-122"/>
-                <a:cs typeface="Aptos" pitchFamily="34" charset="-120"/>
-              </a:rPr>
-              <a:t>Concept to action</a:t>
-            </a:r>
-            <a:endParaRPr lang="en-US" sz="1000" dirty="0"/>
-          </a:p>
-        </p:txBody>
-      </p:sp>
-      <p:sp>
-        <p:nvSpPr>
-          <p:cNvPr id="18" name="Shape 16"/>
           <p:cNvSpPr/>
           <p:nvPr/>
         </p:nvSpPr>
@@ -11421,7 +10915,7 @@
       </p:sp>
       <p:sp>
         <p:nvSpPr>
-          <p:cNvPr id="19" name="Text 17"/>
+          <p:cNvPr id="17" name="Text 15"/>
           <p:cNvSpPr/>
           <p:nvPr/>
         </p:nvSpPr>
@@ -11460,7 +10954,7 @@
       </p:sp>
       <p:sp>
         <p:nvSpPr>
-          <p:cNvPr id="20" name="Text 18"/>
+          <p:cNvPr id="18" name="Text 16"/>
           <p:cNvSpPr/>
           <p:nvPr/>
         </p:nvSpPr>
@@ -11954,13 +11448,11 @@
             </a:avLst>
           </a:prstGeom>
           <a:solidFill>
-            <a:srgbClr val="FFFFFF">
-              <a:alpha val="88000"/>
-            </a:srgbClr>
+            <a:srgbClr val="FFFFFF"/>
           </a:solidFill>
           <a:ln w="12700">
             <a:solidFill>
-              <a:srgbClr val="D6E8F2"/>
+              <a:srgbClr val="B9D7E6"/>
             </a:solidFill>
             <a:prstDash val="solid"/>
           </a:ln>
@@ -11968,119 +11460,98 @@
       </p:sp>
       <p:sp>
         <p:nvSpPr>
-          <p:cNvPr id="14" name="Shape 12"/>
-          <p:cNvSpPr/>
-          <p:nvPr/>
-        </p:nvSpPr>
-        <p:spPr>
-          <a:xfrm>
-            <a:off x="8074152" y="3291840"/>
-            <a:ext cx="2596896" cy="749808"/>
-          </a:xfrm>
-          <a:prstGeom prst="rect">
-            <a:avLst/>
-          </a:prstGeom>
-          <a:solidFill>
-            <a:srgbClr val="EAF6F8"/>
-          </a:solidFill>
-          <a:ln w="12700">
-            <a:solidFill>
-              <a:srgbClr val="8ABBD8"/>
-            </a:solidFill>
-            <a:prstDash val="solid"/>
-          </a:ln>
-        </p:spPr>
-      </p:sp>
-      <p:sp>
-        <p:nvSpPr>
-          <p:cNvPr id="15" name="Shape 13"/>
-          <p:cNvSpPr/>
-          <p:nvPr/>
-        </p:nvSpPr>
-        <p:spPr>
-          <a:xfrm>
-            <a:off x="8202168" y="3721608"/>
-            <a:ext cx="2340864" cy="0"/>
-          </a:xfrm>
-          <a:prstGeom prst="line">
-            <a:avLst/>
-          </a:prstGeom>
-          <a:noFill/>
-          <a:ln w="19050">
-            <a:solidFill>
-              <a:srgbClr val="0068B7"/>
-            </a:solidFill>
-            <a:prstDash val="solid"/>
-          </a:ln>
-        </p:spPr>
+          <p:cNvPr id="14" name="Text 12"/>
+          <p:cNvSpPr/>
+          <p:nvPr/>
+        </p:nvSpPr>
+        <p:spPr>
+          <a:xfrm>
+            <a:off x="7799832" y="2935224"/>
+            <a:ext cx="3145536" cy="256032"/>
+          </a:xfrm>
+          <a:prstGeom prst="rect">
+            <a:avLst/>
+          </a:prstGeom>
+          <a:noFill/>
+          <a:ln/>
+        </p:spPr>
+        <p:txBody>
+          <a:bodyPr wrap="square" lIns="0" tIns="0" rIns="0" bIns="0" rtlCol="0" anchor="ctr"/>
+          <a:lstStyle/>
+          <a:p>
+            <a:pPr indent="0" marL="0">
+              <a:buNone/>
+            </a:pPr>
+            <a:r>
+              <a:rPr lang="en-US" sz="1300" b="1" dirty="0">
+                <a:solidFill>
+                  <a:srgbClr val="0068B7"/>
+                </a:solidFill>
+                <a:latin typeface="Aptos" pitchFamily="34" charset="0"/>
+                <a:ea typeface="Aptos" pitchFamily="34" charset="-122"/>
+                <a:cs typeface="Aptos" pitchFamily="34" charset="-120"/>
+              </a:rPr>
+              <a:t>Concept checkpoints</a:t>
+            </a:r>
+            <a:endParaRPr lang="en-US" sz="1300" dirty="0"/>
+          </a:p>
+        </p:txBody>
+      </p:sp>
+      <p:sp>
+        <p:nvSpPr>
+          <p:cNvPr id="15" name="Text 13"/>
+          <p:cNvSpPr/>
+          <p:nvPr/>
+        </p:nvSpPr>
+        <p:spPr>
+          <a:xfrm>
+            <a:off x="7818120" y="3300984"/>
+            <a:ext cx="3090672" cy="877824"/>
+          </a:xfrm>
+          <a:prstGeom prst="rect">
+            <a:avLst/>
+          </a:prstGeom>
+          <a:noFill/>
+          <a:ln/>
+        </p:spPr>
+        <p:txBody>
+          <a:bodyPr wrap="square" lIns="254" tIns="254" rIns="254" bIns="254" rtlCol="0" anchor="t">
+            <a:normAutofit/>
+          </a:bodyPr>
+          <a:lstStyle/>
+          <a:p>
+            <a:r>
+              <a:rPr lang="en-US" sz="1380" dirty="0">
+                <a:solidFill>
+                  <a:srgbClr val="17364A"/>
+                </a:solidFill>
+                <a:latin typeface="Aptos" pitchFamily="34" charset="0"/>
+                <a:ea typeface="Aptos" pitchFamily="34" charset="-122"/>
+                <a:cs typeface="Aptos" pitchFamily="34" charset="-120"/>
+              </a:rPr>
+              <a:t>OMB Memorandum M-24-10 on federal AI governance, risk management, and innovation, where.</a:t>
+            </a:r>
+            <a:endParaRPr lang="en-US" sz="1380" dirty="0"/>
+          </a:p>
+          <a:p>
+            <a:r>
+              <a:rPr lang="en-US" sz="1380" dirty="0">
+                <a:solidFill>
+                  <a:srgbClr val="17364A"/>
+                </a:solidFill>
+                <a:latin typeface="Aptos" pitchFamily="34" charset="0"/>
+                <a:ea typeface="Aptos" pitchFamily="34" charset="-122"/>
+                <a:cs typeface="Aptos" pitchFamily="34" charset="-120"/>
+              </a:rPr>
+              <a:t>Agency strategic plans, procurement policies, privacy policies, cybersecurity policies,.</a:t>
+            </a:r>
+            <a:endParaRPr lang="en-US" sz="1380" dirty="0"/>
+          </a:p>
+        </p:txBody>
       </p:sp>
       <p:sp>
         <p:nvSpPr>
           <p:cNvPr id="16" name="Shape 14"/>
-          <p:cNvSpPr/>
-          <p:nvPr/>
-        </p:nvSpPr>
-        <p:spPr>
-          <a:xfrm>
-            <a:off x="9198864" y="4206240"/>
-            <a:ext cx="347472" cy="347472"/>
-          </a:xfrm>
-          <a:prstGeom prst="ellipse">
-            <a:avLst/>
-          </a:prstGeom>
-          <a:solidFill>
-            <a:srgbClr val="2F8A28"/>
-          </a:solidFill>
-          <a:ln w="12700">
-            <a:solidFill>
-              <a:srgbClr val="2F8A28"/>
-            </a:solidFill>
-            <a:prstDash val="solid"/>
-          </a:ln>
-        </p:spPr>
-      </p:sp>
-      <p:sp>
-        <p:nvSpPr>
-          <p:cNvPr id="17" name="Text 15"/>
-          <p:cNvSpPr/>
-          <p:nvPr/>
-        </p:nvSpPr>
-        <p:spPr>
-          <a:xfrm>
-            <a:off x="7909560" y="3977640"/>
-            <a:ext cx="2926080" cy="182880"/>
-          </a:xfrm>
-          <a:prstGeom prst="rect">
-            <a:avLst/>
-          </a:prstGeom>
-          <a:noFill/>
-          <a:ln/>
-        </p:spPr>
-        <p:txBody>
-          <a:bodyPr wrap="square" lIns="0" tIns="0" rIns="0" bIns="0" rtlCol="0" anchor="ctr"/>
-          <a:lstStyle/>
-          <a:p>
-            <a:pPr algn="ctr" indent="0" marL="0">
-              <a:buNone/>
-            </a:pPr>
-            <a:r>
-              <a:rPr lang="en-US" sz="1000" dirty="0">
-                <a:solidFill>
-                  <a:srgbClr val="003A63"/>
-                </a:solidFill>
-                <a:latin typeface="Aptos" pitchFamily="34" charset="0"/>
-                <a:ea typeface="Aptos" pitchFamily="34" charset="-122"/>
-                <a:cs typeface="Aptos" pitchFamily="34" charset="-120"/>
-              </a:rPr>
-              <a:t>Concept to action</a:t>
-            </a:r>
-            <a:endParaRPr lang="en-US" sz="1000" dirty="0"/>
-          </a:p>
-        </p:txBody>
-      </p:sp>
-      <p:sp>
-        <p:nvSpPr>
-          <p:cNvPr id="18" name="Shape 16"/>
           <p:cNvSpPr/>
           <p:nvPr/>
         </p:nvSpPr>
@@ -12107,7 +11578,7 @@
       </p:sp>
       <p:sp>
         <p:nvSpPr>
-          <p:cNvPr id="19" name="Text 17"/>
+          <p:cNvPr id="17" name="Text 15"/>
           <p:cNvSpPr/>
           <p:nvPr/>
         </p:nvSpPr>
@@ -12146,7 +11617,7 @@
       </p:sp>
       <p:sp>
         <p:nvSpPr>
-          <p:cNvPr id="20" name="Text 18"/>
+          <p:cNvPr id="18" name="Text 16"/>
           <p:cNvSpPr/>
           <p:nvPr/>
         </p:nvSpPr>
@@ -12659,20 +12130,20 @@
         </p:nvSpPr>
         <p:spPr>
           <a:xfrm>
-            <a:off x="7818120" y="3977640"/>
-            <a:ext cx="972312" cy="749808"/>
+            <a:off x="8046720" y="3794760"/>
+            <a:ext cx="3063240" cy="1600200"/>
           </a:xfrm>
           <a:prstGeom prst="roundRect">
             <a:avLst>
-              <a:gd name="adj" fmla="val 14634"/>
+              <a:gd name="adj" fmla="val 6857"/>
             </a:avLst>
           </a:prstGeom>
           <a:solidFill>
-            <a:srgbClr val="0068B7"/>
+            <a:srgbClr val="FFFFFF"/>
           </a:solidFill>
           <a:ln w="12700">
             <a:solidFill>
-              <a:srgbClr val="0068B7"/>
+              <a:srgbClr val="B9D7E6"/>
             </a:solidFill>
             <a:prstDash val="solid"/>
           </a:ln>
@@ -12686,172 +12157,100 @@
         </p:nvSpPr>
         <p:spPr>
           <a:xfrm>
-            <a:off x="7891272" y="4169664"/>
-            <a:ext cx="826008" cy="310896"/>
-          </a:xfrm>
-          <a:prstGeom prst="rect">
-            <a:avLst/>
-          </a:prstGeom>
-          <a:noFill/>
-          <a:ln/>
-        </p:spPr>
-        <p:txBody>
-          <a:bodyPr wrap="square" lIns="0" tIns="0" rIns="0" bIns="0" rtlCol="0" anchor="ctr">
+            <a:off x="8211312" y="3941064"/>
+            <a:ext cx="2734056" cy="256032"/>
+          </a:xfrm>
+          <a:prstGeom prst="rect">
+            <a:avLst/>
+          </a:prstGeom>
+          <a:noFill/>
+          <a:ln/>
+        </p:spPr>
+        <p:txBody>
+          <a:bodyPr wrap="square" lIns="0" tIns="0" rIns="0" bIns="0" rtlCol="0" anchor="ctr"/>
+          <a:lstStyle/>
+          <a:p>
+            <a:pPr indent="0" marL="0">
+              <a:buNone/>
+            </a:pPr>
+            <a:r>
+              <a:rPr lang="en-US" sz="1300" b="1" dirty="0">
+                <a:solidFill>
+                  <a:srgbClr val="0068B7"/>
+                </a:solidFill>
+                <a:latin typeface="Aptos" pitchFamily="34" charset="0"/>
+                <a:ea typeface="Aptos" pitchFamily="34" charset="-122"/>
+                <a:cs typeface="Aptos" pitchFamily="34" charset="-120"/>
+              </a:rPr>
+              <a:t>Use the play links to</a:t>
+            </a:r>
+            <a:endParaRPr lang="en-US" sz="1300" dirty="0"/>
+          </a:p>
+        </p:txBody>
+      </p:sp>
+      <p:sp>
+        <p:nvSpPr>
+          <p:cNvPr id="15" name="Text 13"/>
+          <p:cNvSpPr/>
+          <p:nvPr/>
+        </p:nvSpPr>
+        <p:spPr>
+          <a:xfrm>
+            <a:off x="8229600" y="4306824"/>
+            <a:ext cx="2679192" cy="941832"/>
+          </a:xfrm>
+          <a:prstGeom prst="rect">
+            <a:avLst/>
+          </a:prstGeom>
+          <a:noFill/>
+          <a:ln/>
+        </p:spPr>
+        <p:txBody>
+          <a:bodyPr wrap="square" lIns="254" tIns="254" rIns="254" bIns="254" rtlCol="0" anchor="t">
             <a:normAutofit/>
           </a:bodyPr>
           <a:lstStyle/>
           <a:p>
-            <a:pPr algn="ctr" indent="0" marL="0">
-              <a:buNone/>
-            </a:pPr>
-            <a:r>
-              <a:rPr lang="en-US" sz="1500" b="1" dirty="0">
-                <a:solidFill>
-                  <a:srgbClr val="FFFFFF"/>
-                </a:solidFill>
-                <a:latin typeface="Aptos" pitchFamily="34" charset="0"/>
-                <a:ea typeface="Aptos" pitchFamily="34" charset="-122"/>
-                <a:cs typeface="Aptos" pitchFamily="34" charset="-120"/>
-              </a:rPr>
-              <a:t>Lesson</a:t>
-            </a:r>
-            <a:endParaRPr lang="en-US" sz="1500" dirty="0"/>
-          </a:p>
-        </p:txBody>
-      </p:sp>
-      <p:sp>
-        <p:nvSpPr>
-          <p:cNvPr id="15" name="Shape 13"/>
-          <p:cNvSpPr/>
-          <p:nvPr/>
-        </p:nvSpPr>
-        <p:spPr>
-          <a:xfrm>
-            <a:off x="9046464" y="3977640"/>
-            <a:ext cx="972312" cy="749808"/>
-          </a:xfrm>
-          <a:prstGeom prst="roundRect">
-            <a:avLst>
-              <a:gd name="adj" fmla="val 14634"/>
-            </a:avLst>
-          </a:prstGeom>
-          <a:solidFill>
-            <a:srgbClr val="2F8A28"/>
-          </a:solidFill>
-          <a:ln w="12700">
-            <a:solidFill>
-              <a:srgbClr val="2F8A28"/>
-            </a:solidFill>
-            <a:prstDash val="solid"/>
-          </a:ln>
-        </p:spPr>
-      </p:sp>
-      <p:sp>
-        <p:nvSpPr>
-          <p:cNvPr id="16" name="Text 14"/>
-          <p:cNvSpPr/>
-          <p:nvPr/>
-        </p:nvSpPr>
-        <p:spPr>
-          <a:xfrm>
-            <a:off x="9119616" y="4169664"/>
-            <a:ext cx="826008" cy="310896"/>
-          </a:xfrm>
-          <a:prstGeom prst="rect">
-            <a:avLst/>
-          </a:prstGeom>
-          <a:noFill/>
-          <a:ln/>
-        </p:spPr>
-        <p:txBody>
-          <a:bodyPr wrap="square" lIns="0" tIns="0" rIns="0" bIns="0" rtlCol="0" anchor="ctr">
-            <a:normAutofit/>
-          </a:bodyPr>
-          <a:lstStyle/>
-          <a:p>
-            <a:pPr algn="ctr" indent="0" marL="0">
-              <a:buNone/>
-            </a:pPr>
-            <a:r>
-              <a:rPr lang="en-US" sz="1500" b="1" dirty="0">
-                <a:solidFill>
-                  <a:srgbClr val="FFFFFF"/>
-                </a:solidFill>
-                <a:latin typeface="Aptos" pitchFamily="34" charset="0"/>
-                <a:ea typeface="Aptos" pitchFamily="34" charset="-122"/>
-                <a:cs typeface="Aptos" pitchFamily="34" charset="-120"/>
-              </a:rPr>
-              <a:t>Plays</a:t>
-            </a:r>
-            <a:endParaRPr lang="en-US" sz="1500" dirty="0"/>
-          </a:p>
-        </p:txBody>
-      </p:sp>
-      <p:sp>
-        <p:nvSpPr>
-          <p:cNvPr id="17" name="Shape 15"/>
-          <p:cNvSpPr/>
-          <p:nvPr/>
-        </p:nvSpPr>
-        <p:spPr>
-          <a:xfrm>
-            <a:off x="10274808" y="3977640"/>
-            <a:ext cx="972312" cy="749808"/>
-          </a:xfrm>
-          <a:prstGeom prst="roundRect">
-            <a:avLst>
-              <a:gd name="adj" fmla="val 14634"/>
-            </a:avLst>
-          </a:prstGeom>
-          <a:solidFill>
-            <a:srgbClr val="6A4CA3"/>
-          </a:solidFill>
-          <a:ln w="12700">
-            <a:solidFill>
-              <a:srgbClr val="6A4CA3"/>
-            </a:solidFill>
-            <a:prstDash val="solid"/>
-          </a:ln>
-        </p:spPr>
-      </p:sp>
-      <p:sp>
-        <p:nvSpPr>
-          <p:cNvPr id="18" name="Text 16"/>
-          <p:cNvSpPr/>
-          <p:nvPr/>
-        </p:nvSpPr>
-        <p:spPr>
-          <a:xfrm>
-            <a:off x="10347960" y="4169664"/>
-            <a:ext cx="826008" cy="310896"/>
-          </a:xfrm>
-          <a:prstGeom prst="rect">
-            <a:avLst/>
-          </a:prstGeom>
-          <a:noFill/>
-          <a:ln/>
-        </p:spPr>
-        <p:txBody>
-          <a:bodyPr wrap="square" lIns="0" tIns="0" rIns="0" bIns="0" rtlCol="0" anchor="ctr">
-            <a:normAutofit/>
-          </a:bodyPr>
-          <a:lstStyle/>
-          <a:p>
-            <a:pPr algn="ctr" indent="0" marL="0">
-              <a:buNone/>
-            </a:pPr>
-            <a:r>
-              <a:rPr lang="en-US" sz="1500" b="1" dirty="0">
-                <a:solidFill>
-                  <a:srgbClr val="FFFFFF"/>
-                </a:solidFill>
-                <a:latin typeface="Aptos" pitchFamily="34" charset="0"/>
-                <a:ea typeface="Aptos" pitchFamily="34" charset="-122"/>
-                <a:cs typeface="Aptos" pitchFamily="34" charset="-120"/>
-              </a:rPr>
-              <a:t>Action</a:t>
-            </a:r>
-            <a:endParaRPr lang="en-US" sz="1500" dirty="0"/>
+            <a:r>
+              <a:rPr lang="en-US" sz="1380" dirty="0">
+                <a:solidFill>
+                  <a:srgbClr val="17364A"/>
+                </a:solidFill>
+                <a:latin typeface="Aptos" pitchFamily="34" charset="0"/>
+                <a:ea typeface="Aptos" pitchFamily="34" charset="-122"/>
+                <a:cs typeface="Aptos" pitchFamily="34" charset="-120"/>
+              </a:rPr>
+              <a:t>Locate the decision point in the playbook sequence.</a:t>
+            </a:r>
+            <a:endParaRPr lang="en-US" sz="1380" dirty="0"/>
+          </a:p>
+          <a:p>
+            <a:r>
+              <a:rPr lang="en-US" sz="1380" dirty="0">
+                <a:solidFill>
+                  <a:srgbClr val="17364A"/>
+                </a:solidFill>
+                <a:latin typeface="Aptos" pitchFamily="34" charset="0"/>
+                <a:ea typeface="Aptos" pitchFamily="34" charset="-122"/>
+                <a:cs typeface="Aptos" pitchFamily="34" charset="-120"/>
+              </a:rPr>
+              <a:t>Identify who should participate in the work.</a:t>
+            </a:r>
+            <a:endParaRPr lang="en-US" sz="1380" dirty="0"/>
+          </a:p>
+          <a:p>
+            <a:r>
+              <a:rPr lang="en-US" sz="1380" dirty="0">
+                <a:solidFill>
+                  <a:srgbClr val="17364A"/>
+                </a:solidFill>
+                <a:latin typeface="Aptos" pitchFamily="34" charset="0"/>
+                <a:ea typeface="Aptos" pitchFamily="34" charset="-122"/>
+                <a:cs typeface="Aptos" pitchFamily="34" charset="-120"/>
+              </a:rPr>
+              <a:t>Document the review, approval, or implementation step.</a:t>
+            </a:r>
+            <a:endParaRPr lang="en-US" sz="1380" dirty="0"/>
           </a:p>
         </p:txBody>
       </p:sp>
@@ -13329,20 +12728,20 @@
         </p:nvSpPr>
         <p:spPr>
           <a:xfrm>
-            <a:off x="7818120" y="3977640"/>
-            <a:ext cx="972312" cy="749808"/>
+            <a:off x="8046720" y="3794760"/>
+            <a:ext cx="3063240" cy="1600200"/>
           </a:xfrm>
           <a:prstGeom prst="roundRect">
             <a:avLst>
-              <a:gd name="adj" fmla="val 14634"/>
+              <a:gd name="adj" fmla="val 6857"/>
             </a:avLst>
           </a:prstGeom>
           <a:solidFill>
-            <a:srgbClr val="0068B7"/>
+            <a:srgbClr val="FFFFFF"/>
           </a:solidFill>
           <a:ln w="12700">
             <a:solidFill>
-              <a:srgbClr val="0068B7"/>
+              <a:srgbClr val="B9D7E6"/>
             </a:solidFill>
             <a:prstDash val="solid"/>
           </a:ln>
@@ -13356,172 +12755,100 @@
         </p:nvSpPr>
         <p:spPr>
           <a:xfrm>
-            <a:off x="7891272" y="4169664"/>
-            <a:ext cx="826008" cy="310896"/>
-          </a:xfrm>
-          <a:prstGeom prst="rect">
-            <a:avLst/>
-          </a:prstGeom>
-          <a:noFill/>
-          <a:ln/>
-        </p:spPr>
-        <p:txBody>
-          <a:bodyPr wrap="square" lIns="0" tIns="0" rIns="0" bIns="0" rtlCol="0" anchor="ctr">
+            <a:off x="8211312" y="3941064"/>
+            <a:ext cx="2734056" cy="256032"/>
+          </a:xfrm>
+          <a:prstGeom prst="rect">
+            <a:avLst/>
+          </a:prstGeom>
+          <a:noFill/>
+          <a:ln/>
+        </p:spPr>
+        <p:txBody>
+          <a:bodyPr wrap="square" lIns="0" tIns="0" rIns="0" bIns="0" rtlCol="0" anchor="ctr"/>
+          <a:lstStyle/>
+          <a:p>
+            <a:pPr indent="0" marL="0">
+              <a:buNone/>
+            </a:pPr>
+            <a:r>
+              <a:rPr lang="en-US" sz="1300" b="1" dirty="0">
+                <a:solidFill>
+                  <a:srgbClr val="0068B7"/>
+                </a:solidFill>
+                <a:latin typeface="Aptos" pitchFamily="34" charset="0"/>
+                <a:ea typeface="Aptos" pitchFamily="34" charset="-122"/>
+                <a:cs typeface="Aptos" pitchFamily="34" charset="-120"/>
+              </a:rPr>
+              <a:t>Tool selection cues</a:t>
+            </a:r>
+            <a:endParaRPr lang="en-US" sz="1300" dirty="0"/>
+          </a:p>
+        </p:txBody>
+      </p:sp>
+      <p:sp>
+        <p:nvSpPr>
+          <p:cNvPr id="15" name="Text 13"/>
+          <p:cNvSpPr/>
+          <p:nvPr/>
+        </p:nvSpPr>
+        <p:spPr>
+          <a:xfrm>
+            <a:off x="8229600" y="4306824"/>
+            <a:ext cx="2679192" cy="941832"/>
+          </a:xfrm>
+          <a:prstGeom prst="rect">
+            <a:avLst/>
+          </a:prstGeom>
+          <a:noFill/>
+          <a:ln/>
+        </p:spPr>
+        <p:txBody>
+          <a:bodyPr wrap="square" lIns="254" tIns="254" rIns="254" bIns="254" rtlCol="0" anchor="t">
             <a:normAutofit/>
           </a:bodyPr>
           <a:lstStyle/>
           <a:p>
-            <a:pPr algn="ctr" indent="0" marL="0">
-              <a:buNone/>
-            </a:pPr>
-            <a:r>
-              <a:rPr lang="en-US" sz="1500" b="1" dirty="0">
-                <a:solidFill>
-                  <a:srgbClr val="FFFFFF"/>
-                </a:solidFill>
-                <a:latin typeface="Aptos" pitchFamily="34" charset="0"/>
-                <a:ea typeface="Aptos" pitchFamily="34" charset="-122"/>
-                <a:cs typeface="Aptos" pitchFamily="34" charset="-120"/>
-              </a:rPr>
-              <a:t>Concept</a:t>
-            </a:r>
-            <a:endParaRPr lang="en-US" sz="1500" dirty="0"/>
-          </a:p>
-        </p:txBody>
-      </p:sp>
-      <p:sp>
-        <p:nvSpPr>
-          <p:cNvPr id="15" name="Shape 13"/>
-          <p:cNvSpPr/>
-          <p:nvPr/>
-        </p:nvSpPr>
-        <p:spPr>
-          <a:xfrm>
-            <a:off x="9046464" y="3977640"/>
-            <a:ext cx="972312" cy="749808"/>
-          </a:xfrm>
-          <a:prstGeom prst="roundRect">
-            <a:avLst>
-              <a:gd name="adj" fmla="val 14634"/>
-            </a:avLst>
-          </a:prstGeom>
-          <a:solidFill>
-            <a:srgbClr val="2F8A28"/>
-          </a:solidFill>
-          <a:ln w="12700">
-            <a:solidFill>
-              <a:srgbClr val="2F8A28"/>
-            </a:solidFill>
-            <a:prstDash val="solid"/>
-          </a:ln>
-        </p:spPr>
-      </p:sp>
-      <p:sp>
-        <p:nvSpPr>
-          <p:cNvPr id="16" name="Text 14"/>
-          <p:cNvSpPr/>
-          <p:nvPr/>
-        </p:nvSpPr>
-        <p:spPr>
-          <a:xfrm>
-            <a:off x="9119616" y="4169664"/>
-            <a:ext cx="826008" cy="310896"/>
-          </a:xfrm>
-          <a:prstGeom prst="rect">
-            <a:avLst/>
-          </a:prstGeom>
-          <a:noFill/>
-          <a:ln/>
-        </p:spPr>
-        <p:txBody>
-          <a:bodyPr wrap="square" lIns="0" tIns="0" rIns="0" bIns="0" rtlCol="0" anchor="ctr">
-            <a:normAutofit/>
-          </a:bodyPr>
-          <a:lstStyle/>
-          <a:p>
-            <a:pPr algn="ctr" indent="0" marL="0">
-              <a:buNone/>
-            </a:pPr>
-            <a:r>
-              <a:rPr lang="en-US" sz="1500" b="1" dirty="0">
-                <a:solidFill>
-                  <a:srgbClr val="FFFFFF"/>
-                </a:solidFill>
-                <a:latin typeface="Aptos" pitchFamily="34" charset="0"/>
-                <a:ea typeface="Aptos" pitchFamily="34" charset="-122"/>
-                <a:cs typeface="Aptos" pitchFamily="34" charset="-120"/>
-              </a:rPr>
-              <a:t>Tool</a:t>
-            </a:r>
-            <a:endParaRPr lang="en-US" sz="1500" dirty="0"/>
-          </a:p>
-        </p:txBody>
-      </p:sp>
-      <p:sp>
-        <p:nvSpPr>
-          <p:cNvPr id="17" name="Shape 15"/>
-          <p:cNvSpPr/>
-          <p:nvPr/>
-        </p:nvSpPr>
-        <p:spPr>
-          <a:xfrm>
-            <a:off x="10274808" y="3977640"/>
-            <a:ext cx="972312" cy="749808"/>
-          </a:xfrm>
-          <a:prstGeom prst="roundRect">
-            <a:avLst>
-              <a:gd name="adj" fmla="val 14634"/>
-            </a:avLst>
-          </a:prstGeom>
-          <a:solidFill>
-            <a:srgbClr val="D69A2D"/>
-          </a:solidFill>
-          <a:ln w="12700">
-            <a:solidFill>
-              <a:srgbClr val="D69A2D"/>
-            </a:solidFill>
-            <a:prstDash val="solid"/>
-          </a:ln>
-        </p:spPr>
-      </p:sp>
-      <p:sp>
-        <p:nvSpPr>
-          <p:cNvPr id="18" name="Text 16"/>
-          <p:cNvSpPr/>
-          <p:nvPr/>
-        </p:nvSpPr>
-        <p:spPr>
-          <a:xfrm>
-            <a:off x="10347960" y="4169664"/>
-            <a:ext cx="826008" cy="310896"/>
-          </a:xfrm>
-          <a:prstGeom prst="rect">
-            <a:avLst/>
-          </a:prstGeom>
-          <a:noFill/>
-          <a:ln/>
-        </p:spPr>
-        <p:txBody>
-          <a:bodyPr wrap="square" lIns="0" tIns="0" rIns="0" bIns="0" rtlCol="0" anchor="ctr">
-            <a:normAutofit/>
-          </a:bodyPr>
-          <a:lstStyle/>
-          <a:p>
-            <a:pPr algn="ctr" indent="0" marL="0">
-              <a:buNone/>
-            </a:pPr>
-            <a:r>
-              <a:rPr lang="en-US" sz="1500" b="1" dirty="0">
-                <a:solidFill>
-                  <a:srgbClr val="FFFFFF"/>
-                </a:solidFill>
-                <a:latin typeface="Aptos" pitchFamily="34" charset="0"/>
-                <a:ea typeface="Aptos" pitchFamily="34" charset="-122"/>
-                <a:cs typeface="Aptos" pitchFamily="34" charset="-120"/>
-              </a:rPr>
-              <a:t>Artifact</a:t>
-            </a:r>
-            <a:endParaRPr lang="en-US" sz="1500" dirty="0"/>
+            <a:r>
+              <a:rPr lang="en-US" sz="1380" dirty="0">
+                <a:solidFill>
+                  <a:srgbClr val="17364A"/>
+                </a:solidFill>
+                <a:latin typeface="Aptos" pitchFamily="34" charset="0"/>
+                <a:ea typeface="Aptos" pitchFamily="34" charset="-122"/>
+                <a:cs typeface="Aptos" pitchFamily="34" charset="-120"/>
+              </a:rPr>
+              <a:t>Use a tool when no comparable local process exists.</a:t>
+            </a:r>
+            <a:endParaRPr lang="en-US" sz="1380" dirty="0"/>
+          </a:p>
+          <a:p>
+            <a:r>
+              <a:rPr lang="en-US" sz="1380" dirty="0">
+                <a:solidFill>
+                  <a:srgbClr val="17364A"/>
+                </a:solidFill>
+                <a:latin typeface="Aptos" pitchFamily="34" charset="0"/>
+                <a:ea typeface="Aptos" pitchFamily="34" charset="-122"/>
+                <a:cs typeface="Aptos" pitchFamily="34" charset="-120"/>
+              </a:rPr>
+              <a:t>Adapt existing department templates when they already fit the purpose.</a:t>
+            </a:r>
+            <a:endParaRPr lang="en-US" sz="1380" dirty="0"/>
+          </a:p>
+          <a:p>
+            <a:r>
+              <a:rPr lang="en-US" sz="1380" dirty="0">
+                <a:solidFill>
+                  <a:srgbClr val="17364A"/>
+                </a:solidFill>
+                <a:latin typeface="Aptos" pitchFamily="34" charset="0"/>
+                <a:ea typeface="Aptos" pitchFamily="34" charset="-122"/>
+                <a:cs typeface="Aptos" pitchFamily="34" charset="-120"/>
+              </a:rPr>
+              <a:t>Save the completed artifact as evidence of the decision.</a:t>
+            </a:r>
+            <a:endParaRPr lang="en-US" sz="1380" dirty="0"/>
           </a:p>
         </p:txBody>
       </p:sp>
@@ -13994,13 +13321,11 @@
             </a:avLst>
           </a:prstGeom>
           <a:solidFill>
-            <a:srgbClr val="FFFFFF">
-              <a:alpha val="88000"/>
-            </a:srgbClr>
+            <a:srgbClr val="FFFFFF"/>
           </a:solidFill>
           <a:ln w="12700">
             <a:solidFill>
-              <a:srgbClr val="D6E8F2"/>
+              <a:srgbClr val="B9D7E6"/>
             </a:solidFill>
             <a:prstDash val="solid"/>
           </a:ln>
@@ -14008,119 +13333,112 @@
       </p:sp>
       <p:sp>
         <p:nvSpPr>
-          <p:cNvPr id="14" name="Shape 12"/>
-          <p:cNvSpPr/>
-          <p:nvPr/>
-        </p:nvSpPr>
-        <p:spPr>
-          <a:xfrm>
-            <a:off x="8074152" y="3291840"/>
-            <a:ext cx="2596896" cy="749808"/>
-          </a:xfrm>
-          <a:prstGeom prst="rect">
-            <a:avLst/>
-          </a:prstGeom>
-          <a:solidFill>
-            <a:srgbClr val="EAF6F8"/>
-          </a:solidFill>
-          <a:ln w="12700">
-            <a:solidFill>
-              <a:srgbClr val="8ABBD8"/>
-            </a:solidFill>
-            <a:prstDash val="solid"/>
-          </a:ln>
-        </p:spPr>
-      </p:sp>
-      <p:sp>
-        <p:nvSpPr>
-          <p:cNvPr id="15" name="Shape 13"/>
-          <p:cNvSpPr/>
-          <p:nvPr/>
-        </p:nvSpPr>
-        <p:spPr>
-          <a:xfrm>
-            <a:off x="8202168" y="3721608"/>
-            <a:ext cx="2340864" cy="0"/>
-          </a:xfrm>
-          <a:prstGeom prst="line">
-            <a:avLst/>
-          </a:prstGeom>
-          <a:noFill/>
-          <a:ln w="19050">
-            <a:solidFill>
-              <a:srgbClr val="0068B7"/>
-            </a:solidFill>
-            <a:prstDash val="solid"/>
-          </a:ln>
-        </p:spPr>
+          <p:cNvPr id="14" name="Text 12"/>
+          <p:cNvSpPr/>
+          <p:nvPr/>
+        </p:nvSpPr>
+        <p:spPr>
+          <a:xfrm>
+            <a:off x="7799832" y="2935224"/>
+            <a:ext cx="3145536" cy="256032"/>
+          </a:xfrm>
+          <a:prstGeom prst="rect">
+            <a:avLst/>
+          </a:prstGeom>
+          <a:noFill/>
+          <a:ln/>
+        </p:spPr>
+        <p:txBody>
+          <a:bodyPr wrap="square" lIns="0" tIns="0" rIns="0" bIns="0" rtlCol="0" anchor="ctr"/>
+          <a:lstStyle/>
+          <a:p>
+            <a:pPr indent="0" marL="0">
+              <a:buNone/>
+            </a:pPr>
+            <a:r>
+              <a:rPr lang="en-US" sz="1300" b="1" dirty="0">
+                <a:solidFill>
+                  <a:srgbClr val="0068B7"/>
+                </a:solidFill>
+                <a:latin typeface="Aptos" pitchFamily="34" charset="0"/>
+                <a:ea typeface="Aptos" pitchFamily="34" charset="-122"/>
+                <a:cs typeface="Aptos" pitchFamily="34" charset="-120"/>
+              </a:rPr>
+              <a:t>Concept checkpoints</a:t>
+            </a:r>
+            <a:endParaRPr lang="en-US" sz="1300" dirty="0"/>
+          </a:p>
+        </p:txBody>
+      </p:sp>
+      <p:sp>
+        <p:nvSpPr>
+          <p:cNvPr id="15" name="Text 13"/>
+          <p:cNvSpPr/>
+          <p:nvPr/>
+        </p:nvSpPr>
+        <p:spPr>
+          <a:xfrm>
+            <a:off x="7818120" y="3300984"/>
+            <a:ext cx="3090672" cy="877824"/>
+          </a:xfrm>
+          <a:prstGeom prst="rect">
+            <a:avLst/>
+          </a:prstGeom>
+          <a:noFill/>
+          <a:ln/>
+        </p:spPr>
+        <p:txBody>
+          <a:bodyPr wrap="square" lIns="254" tIns="254" rIns="254" bIns="254" rtlCol="0" anchor="t">
+            <a:normAutofit/>
+          </a:bodyPr>
+          <a:lstStyle/>
+          <a:p>
+            <a:r>
+              <a:rPr lang="en-US" sz="1380" dirty="0">
+                <a:solidFill>
+                  <a:srgbClr val="17364A"/>
+                </a:solidFill>
+                <a:latin typeface="Aptos" pitchFamily="34" charset="0"/>
+                <a:ea typeface="Aptos" pitchFamily="34" charset="-122"/>
+                <a:cs typeface="Aptos" pitchFamily="34" charset="-120"/>
+              </a:rPr>
+              <a:t>Evaluate expected benefits in terms of public health value, workflow improvement, equity,.</a:t>
+            </a:r>
+            <a:endParaRPr lang="en-US" sz="1380" dirty="0"/>
+          </a:p>
+          <a:p>
+            <a:r>
+              <a:rPr lang="en-US" sz="1380" dirty="0">
+                <a:solidFill>
+                  <a:srgbClr val="17364A"/>
+                </a:solidFill>
+                <a:latin typeface="Aptos" pitchFamily="34" charset="0"/>
+                <a:ea typeface="Aptos" pitchFamily="34" charset="-122"/>
+                <a:cs typeface="Aptos" pitchFamily="34" charset="-120"/>
+              </a:rPr>
+              <a:t>Develop business case questions for AI procurement or internal development.</a:t>
+            </a:r>
+            <a:endParaRPr lang="en-US" sz="1380" dirty="0"/>
+          </a:p>
+          <a:p>
+            <a:r>
+              <a:rPr lang="en-US" sz="1380" dirty="0">
+                <a:solidFill>
+                  <a:srgbClr val="17364A"/>
+                </a:solidFill>
+                <a:latin typeface="Aptos" pitchFamily="34" charset="0"/>
+                <a:ea typeface="Aptos" pitchFamily="34" charset="-122"/>
+                <a:cs typeface="Aptos" pitchFamily="34" charset="-120"/>
+              </a:rPr>
+              <a:t>Produce an AI business case review worksheet.</a:t>
+            </a:r>
+            <a:endParaRPr lang="en-US" sz="1380" dirty="0"/>
+          </a:p>
+        </p:txBody>
       </p:sp>
       <p:sp>
         <p:nvSpPr>
           <p:cNvPr id="16" name="Shape 14"/>
-          <p:cNvSpPr/>
-          <p:nvPr/>
-        </p:nvSpPr>
-        <p:spPr>
-          <a:xfrm>
-            <a:off x="9198864" y="4206240"/>
-            <a:ext cx="347472" cy="347472"/>
-          </a:xfrm>
-          <a:prstGeom prst="ellipse">
-            <a:avLst/>
-          </a:prstGeom>
-          <a:solidFill>
-            <a:srgbClr val="2F8A28"/>
-          </a:solidFill>
-          <a:ln w="12700">
-            <a:solidFill>
-              <a:srgbClr val="2F8A28"/>
-            </a:solidFill>
-            <a:prstDash val="solid"/>
-          </a:ln>
-        </p:spPr>
-      </p:sp>
-      <p:sp>
-        <p:nvSpPr>
-          <p:cNvPr id="17" name="Text 15"/>
-          <p:cNvSpPr/>
-          <p:nvPr/>
-        </p:nvSpPr>
-        <p:spPr>
-          <a:xfrm>
-            <a:off x="7909560" y="3977640"/>
-            <a:ext cx="2926080" cy="182880"/>
-          </a:xfrm>
-          <a:prstGeom prst="rect">
-            <a:avLst/>
-          </a:prstGeom>
-          <a:noFill/>
-          <a:ln/>
-        </p:spPr>
-        <p:txBody>
-          <a:bodyPr wrap="square" lIns="0" tIns="0" rIns="0" bIns="0" rtlCol="0" anchor="ctr"/>
-          <a:lstStyle/>
-          <a:p>
-            <a:pPr algn="ctr" indent="0" marL="0">
-              <a:buNone/>
-            </a:pPr>
-            <a:r>
-              <a:rPr lang="en-US" sz="1000" dirty="0">
-                <a:solidFill>
-                  <a:srgbClr val="003A63"/>
-                </a:solidFill>
-                <a:latin typeface="Aptos" pitchFamily="34" charset="0"/>
-                <a:ea typeface="Aptos" pitchFamily="34" charset="-122"/>
-                <a:cs typeface="Aptos" pitchFamily="34" charset="-120"/>
-              </a:rPr>
-              <a:t>Concept to action</a:t>
-            </a:r>
-            <a:endParaRPr lang="en-US" sz="1000" dirty="0"/>
-          </a:p>
-        </p:txBody>
-      </p:sp>
-      <p:sp>
-        <p:nvSpPr>
-          <p:cNvPr id="18" name="Shape 16"/>
           <p:cNvSpPr/>
           <p:nvPr/>
         </p:nvSpPr>
@@ -14147,7 +13465,7 @@
       </p:sp>
       <p:sp>
         <p:nvSpPr>
-          <p:cNvPr id="19" name="Text 17"/>
+          <p:cNvPr id="17" name="Text 15"/>
           <p:cNvSpPr/>
           <p:nvPr/>
         </p:nvSpPr>
@@ -14186,7 +13504,7 @@
       </p:sp>
       <p:sp>
         <p:nvSpPr>
-          <p:cNvPr id="20" name="Text 18"/>
+          <p:cNvPr id="18" name="Text 16"/>
           <p:cNvSpPr/>
           <p:nvPr/>
         </p:nvSpPr>
@@ -14694,13 +14012,11 @@
             </a:avLst>
           </a:prstGeom>
           <a:solidFill>
-            <a:srgbClr val="FFFFFF">
-              <a:alpha val="88000"/>
-            </a:srgbClr>
+            <a:srgbClr val="FFFFFF"/>
           </a:solidFill>
           <a:ln w="12700">
             <a:solidFill>
-              <a:srgbClr val="D6E8F2"/>
+              <a:srgbClr val="B9D7E6"/>
             </a:solidFill>
             <a:prstDash val="solid"/>
           </a:ln>
@@ -14708,119 +14024,112 @@
       </p:sp>
       <p:sp>
         <p:nvSpPr>
-          <p:cNvPr id="14" name="Shape 12"/>
-          <p:cNvSpPr/>
-          <p:nvPr/>
-        </p:nvSpPr>
-        <p:spPr>
-          <a:xfrm>
-            <a:off x="8074152" y="3291840"/>
-            <a:ext cx="2596896" cy="749808"/>
-          </a:xfrm>
-          <a:prstGeom prst="rect">
-            <a:avLst/>
-          </a:prstGeom>
-          <a:solidFill>
-            <a:srgbClr val="EAF6F8"/>
-          </a:solidFill>
-          <a:ln w="12700">
-            <a:solidFill>
-              <a:srgbClr val="8ABBD8"/>
-            </a:solidFill>
-            <a:prstDash val="solid"/>
-          </a:ln>
-        </p:spPr>
-      </p:sp>
-      <p:sp>
-        <p:nvSpPr>
-          <p:cNvPr id="15" name="Shape 13"/>
-          <p:cNvSpPr/>
-          <p:nvPr/>
-        </p:nvSpPr>
-        <p:spPr>
-          <a:xfrm>
-            <a:off x="8202168" y="3721608"/>
-            <a:ext cx="2340864" cy="0"/>
-          </a:xfrm>
-          <a:prstGeom prst="line">
-            <a:avLst/>
-          </a:prstGeom>
-          <a:noFill/>
-          <a:ln w="19050">
-            <a:solidFill>
-              <a:srgbClr val="0068B7"/>
-            </a:solidFill>
-            <a:prstDash val="solid"/>
-          </a:ln>
-        </p:spPr>
+          <p:cNvPr id="14" name="Text 12"/>
+          <p:cNvSpPr/>
+          <p:nvPr/>
+        </p:nvSpPr>
+        <p:spPr>
+          <a:xfrm>
+            <a:off x="7799832" y="2935224"/>
+            <a:ext cx="3145536" cy="256032"/>
+          </a:xfrm>
+          <a:prstGeom prst="rect">
+            <a:avLst/>
+          </a:prstGeom>
+          <a:noFill/>
+          <a:ln/>
+        </p:spPr>
+        <p:txBody>
+          <a:bodyPr wrap="square" lIns="0" tIns="0" rIns="0" bIns="0" rtlCol="0" anchor="ctr"/>
+          <a:lstStyle/>
+          <a:p>
+            <a:pPr indent="0" marL="0">
+              <a:buNone/>
+            </a:pPr>
+            <a:r>
+              <a:rPr lang="en-US" sz="1300" b="1" dirty="0">
+                <a:solidFill>
+                  <a:srgbClr val="0068B7"/>
+                </a:solidFill>
+                <a:latin typeface="Aptos" pitchFamily="34" charset="0"/>
+                <a:ea typeface="Aptos" pitchFamily="34" charset="-122"/>
+                <a:cs typeface="Aptos" pitchFamily="34" charset="-120"/>
+              </a:rPr>
+              <a:t>Concept checkpoints</a:t>
+            </a:r>
+            <a:endParaRPr lang="en-US" sz="1300" dirty="0"/>
+          </a:p>
+        </p:txBody>
+      </p:sp>
+      <p:sp>
+        <p:nvSpPr>
+          <p:cNvPr id="15" name="Text 13"/>
+          <p:cNvSpPr/>
+          <p:nvPr/>
+        </p:nvSpPr>
+        <p:spPr>
+          <a:xfrm>
+            <a:off x="7818120" y="3300984"/>
+            <a:ext cx="3090672" cy="877824"/>
+          </a:xfrm>
+          <a:prstGeom prst="rect">
+            <a:avLst/>
+          </a:prstGeom>
+          <a:noFill/>
+          <a:ln/>
+        </p:spPr>
+        <p:txBody>
+          <a:bodyPr wrap="square" lIns="254" tIns="254" rIns="254" bIns="254" rtlCol="0" anchor="t">
+            <a:normAutofit/>
+          </a:bodyPr>
+          <a:lstStyle/>
+          <a:p>
+            <a:r>
+              <a:rPr lang="en-US" sz="1380" dirty="0">
+                <a:solidFill>
+                  <a:srgbClr val="17364A"/>
+                </a:solidFill>
+                <a:latin typeface="Aptos" pitchFamily="34" charset="0"/>
+                <a:ea typeface="Aptos" pitchFamily="34" charset="-122"/>
+                <a:cs typeface="Aptos" pitchFamily="34" charset="-120"/>
+              </a:rPr>
+              <a:t>Leaders need a disciplined way to decide when AI is worth funding, what costs must be.</a:t>
+            </a:r>
+            <a:endParaRPr lang="en-US" sz="1380" dirty="0"/>
+          </a:p>
+          <a:p>
+            <a:r>
+              <a:rPr lang="en-US" sz="1380" dirty="0">
+                <a:solidFill>
+                  <a:srgbClr val="17364A"/>
+                </a:solidFill>
+                <a:latin typeface="Aptos" pitchFamily="34" charset="0"/>
+                <a:ea typeface="Aptos" pitchFamily="34" charset="-122"/>
+                <a:cs typeface="Aptos" pitchFamily="34" charset="-120"/>
+              </a:rPr>
+              <a:t>A business case review helps agencies avoid buying tools that are impressive in.</a:t>
+            </a:r>
+            <a:endParaRPr lang="en-US" sz="1380" dirty="0"/>
+          </a:p>
+          <a:p>
+            <a:r>
+              <a:rPr lang="en-US" sz="1380" dirty="0">
+                <a:solidFill>
+                  <a:srgbClr val="17364A"/>
+                </a:solidFill>
+                <a:latin typeface="Aptos" pitchFamily="34" charset="0"/>
+                <a:ea typeface="Aptos" pitchFamily="34" charset="-122"/>
+                <a:cs typeface="Aptos" pitchFamily="34" charset="-120"/>
+              </a:rPr>
+              <a:t>This module teaches leaders to evaluate AI investments across cost, value, readiness,.</a:t>
+            </a:r>
+            <a:endParaRPr lang="en-US" sz="1380" dirty="0"/>
+          </a:p>
+        </p:txBody>
       </p:sp>
       <p:sp>
         <p:nvSpPr>
           <p:cNvPr id="16" name="Shape 14"/>
-          <p:cNvSpPr/>
-          <p:nvPr/>
-        </p:nvSpPr>
-        <p:spPr>
-          <a:xfrm>
-            <a:off x="9198864" y="4206240"/>
-            <a:ext cx="347472" cy="347472"/>
-          </a:xfrm>
-          <a:prstGeom prst="ellipse">
-            <a:avLst/>
-          </a:prstGeom>
-          <a:solidFill>
-            <a:srgbClr val="2F8A28"/>
-          </a:solidFill>
-          <a:ln w="12700">
-            <a:solidFill>
-              <a:srgbClr val="2F8A28"/>
-            </a:solidFill>
-            <a:prstDash val="solid"/>
-          </a:ln>
-        </p:spPr>
-      </p:sp>
-      <p:sp>
-        <p:nvSpPr>
-          <p:cNvPr id="17" name="Text 15"/>
-          <p:cNvSpPr/>
-          <p:nvPr/>
-        </p:nvSpPr>
-        <p:spPr>
-          <a:xfrm>
-            <a:off x="7909560" y="3977640"/>
-            <a:ext cx="2926080" cy="182880"/>
-          </a:xfrm>
-          <a:prstGeom prst="rect">
-            <a:avLst/>
-          </a:prstGeom>
-          <a:noFill/>
-          <a:ln/>
-        </p:spPr>
-        <p:txBody>
-          <a:bodyPr wrap="square" lIns="0" tIns="0" rIns="0" bIns="0" rtlCol="0" anchor="ctr"/>
-          <a:lstStyle/>
-          <a:p>
-            <a:pPr algn="ctr" indent="0" marL="0">
-              <a:buNone/>
-            </a:pPr>
-            <a:r>
-              <a:rPr lang="en-US" sz="1000" dirty="0">
-                <a:solidFill>
-                  <a:srgbClr val="003A63"/>
-                </a:solidFill>
-                <a:latin typeface="Aptos" pitchFamily="34" charset="0"/>
-                <a:ea typeface="Aptos" pitchFamily="34" charset="-122"/>
-                <a:cs typeface="Aptos" pitchFamily="34" charset="-120"/>
-              </a:rPr>
-              <a:t>Concept to action</a:t>
-            </a:r>
-            <a:endParaRPr lang="en-US" sz="1000" dirty="0"/>
-          </a:p>
-        </p:txBody>
-      </p:sp>
-      <p:sp>
-        <p:nvSpPr>
-          <p:cNvPr id="18" name="Shape 16"/>
           <p:cNvSpPr/>
           <p:nvPr/>
         </p:nvSpPr>
@@ -14847,7 +14156,7 @@
       </p:sp>
       <p:sp>
         <p:nvSpPr>
-          <p:cNvPr id="19" name="Text 17"/>
+          <p:cNvPr id="17" name="Text 15"/>
           <p:cNvSpPr/>
           <p:nvPr/>
         </p:nvSpPr>
@@ -14886,7 +14195,7 @@
       </p:sp>
       <p:sp>
         <p:nvSpPr>
-          <p:cNvPr id="20" name="Text 18"/>
+          <p:cNvPr id="18" name="Text 16"/>
           <p:cNvSpPr/>
           <p:nvPr/>
         </p:nvSpPr>
@@ -15394,13 +14703,11 @@
             </a:avLst>
           </a:prstGeom>
           <a:solidFill>
-            <a:srgbClr val="FFFFFF">
-              <a:alpha val="88000"/>
-            </a:srgbClr>
+            <a:srgbClr val="FFFFFF"/>
           </a:solidFill>
           <a:ln w="12700">
             <a:solidFill>
-              <a:srgbClr val="D6E8F2"/>
+              <a:srgbClr val="B9D7E6"/>
             </a:solidFill>
             <a:prstDash val="solid"/>
           </a:ln>
@@ -15408,190 +14715,112 @@
       </p:sp>
       <p:sp>
         <p:nvSpPr>
-          <p:cNvPr id="14" name="Shape 12"/>
-          <p:cNvSpPr/>
-          <p:nvPr/>
-        </p:nvSpPr>
-        <p:spPr>
-          <a:xfrm>
-            <a:off x="7891272" y="3108960"/>
-            <a:ext cx="566928" cy="566928"/>
-          </a:xfrm>
-          <a:prstGeom prst="ellipse">
-            <a:avLst/>
-          </a:prstGeom>
-          <a:solidFill>
-            <a:srgbClr val="0068B7"/>
-          </a:solidFill>
-          <a:ln w="12700">
-            <a:solidFill>
-              <a:srgbClr val="0068B7"/>
-            </a:solidFill>
-            <a:prstDash val="solid"/>
-          </a:ln>
-        </p:spPr>
-      </p:sp>
-      <p:sp>
-        <p:nvSpPr>
-          <p:cNvPr id="15" name="Shape 13"/>
-          <p:cNvSpPr/>
-          <p:nvPr/>
-        </p:nvSpPr>
-        <p:spPr>
-          <a:xfrm>
-            <a:off x="10287000" y="3108960"/>
-            <a:ext cx="566928" cy="566928"/>
-          </a:xfrm>
-          <a:prstGeom prst="ellipse">
-            <a:avLst/>
-          </a:prstGeom>
-          <a:solidFill>
-            <a:srgbClr val="2F8A28"/>
-          </a:solidFill>
-          <a:ln w="12700">
-            <a:solidFill>
-              <a:srgbClr val="2F8A28"/>
-            </a:solidFill>
-            <a:prstDash val="solid"/>
-          </a:ln>
-        </p:spPr>
+          <p:cNvPr id="14" name="Text 12"/>
+          <p:cNvSpPr/>
+          <p:nvPr/>
+        </p:nvSpPr>
+        <p:spPr>
+          <a:xfrm>
+            <a:off x="7799832" y="2935224"/>
+            <a:ext cx="3145536" cy="256032"/>
+          </a:xfrm>
+          <a:prstGeom prst="rect">
+            <a:avLst/>
+          </a:prstGeom>
+          <a:noFill/>
+          <a:ln/>
+        </p:spPr>
+        <p:txBody>
+          <a:bodyPr wrap="square" lIns="0" tIns="0" rIns="0" bIns="0" rtlCol="0" anchor="ctr"/>
+          <a:lstStyle/>
+          <a:p>
+            <a:pPr indent="0" marL="0">
+              <a:buNone/>
+            </a:pPr>
+            <a:r>
+              <a:rPr lang="en-US" sz="1300" b="1" dirty="0">
+                <a:solidFill>
+                  <a:srgbClr val="0068B7"/>
+                </a:solidFill>
+                <a:latin typeface="Aptos" pitchFamily="34" charset="0"/>
+                <a:ea typeface="Aptos" pitchFamily="34" charset="-122"/>
+                <a:cs typeface="Aptos" pitchFamily="34" charset="-120"/>
+              </a:rPr>
+              <a:t>Concept checkpoints</a:t>
+            </a:r>
+            <a:endParaRPr lang="en-US" sz="1300" dirty="0"/>
+          </a:p>
+        </p:txBody>
+      </p:sp>
+      <p:sp>
+        <p:nvSpPr>
+          <p:cNvPr id="15" name="Text 13"/>
+          <p:cNvSpPr/>
+          <p:nvPr/>
+        </p:nvSpPr>
+        <p:spPr>
+          <a:xfrm>
+            <a:off x="7818120" y="3300984"/>
+            <a:ext cx="3090672" cy="877824"/>
+          </a:xfrm>
+          <a:prstGeom prst="rect">
+            <a:avLst/>
+          </a:prstGeom>
+          <a:noFill/>
+          <a:ln/>
+        </p:spPr>
+        <p:txBody>
+          <a:bodyPr wrap="square" lIns="254" tIns="254" rIns="254" bIns="254" rtlCol="0" anchor="t">
+            <a:normAutofit/>
+          </a:bodyPr>
+          <a:lstStyle/>
+          <a:p>
+            <a:r>
+              <a:rPr lang="en-US" sz="1380" dirty="0">
+                <a:solidFill>
+                  <a:srgbClr val="17364A"/>
+                </a:solidFill>
+                <a:latin typeface="Aptos" pitchFamily="34" charset="0"/>
+                <a:ea typeface="Aptos" pitchFamily="34" charset="-122"/>
+                <a:cs typeface="Aptos" pitchFamily="34" charset="-120"/>
+              </a:rPr>
+              <a:t>This national-level module is intended for training and planning purposes.</a:t>
+            </a:r>
+            <a:endParaRPr lang="en-US" sz="1380" dirty="0"/>
+          </a:p>
+          <a:p>
+            <a:r>
+              <a:rPr lang="en-US" sz="1380" dirty="0">
+                <a:solidFill>
+                  <a:srgbClr val="17364A"/>
+                </a:solidFill>
+                <a:latin typeface="Aptos" pitchFamily="34" charset="0"/>
+                <a:ea typeface="Aptos" pitchFamily="34" charset="-122"/>
+                <a:cs typeface="Aptos" pitchFamily="34" charset="-120"/>
+              </a:rPr>
+              <a:t>It does not replace legal, privacy, procurement, civil rights, records, or agency policy.</a:t>
+            </a:r>
+            <a:endParaRPr lang="en-US" sz="1380" dirty="0"/>
+          </a:p>
+          <a:p>
+            <a:r>
+              <a:rPr lang="en-US" sz="1380" dirty="0">
+                <a:solidFill>
+                  <a:srgbClr val="17364A"/>
+                </a:solidFill>
+                <a:latin typeface="Aptos" pitchFamily="34" charset="0"/>
+                <a:ea typeface="Aptos" pitchFamily="34" charset="-122"/>
+                <a:cs typeface="Aptos" pitchFamily="34" charset="-120"/>
+              </a:rPr>
+              <a:t>Learners should confirm applicable requirements in their own jurisdiction and organization.</a:t>
+            </a:r>
+            <a:endParaRPr lang="en-US" sz="1380" dirty="0"/>
+          </a:p>
+        </p:txBody>
       </p:sp>
       <p:sp>
         <p:nvSpPr>
           <p:cNvPr id="16" name="Shape 14"/>
-          <p:cNvSpPr/>
-          <p:nvPr/>
-        </p:nvSpPr>
-        <p:spPr>
-          <a:xfrm>
-            <a:off x="9089136" y="3456432"/>
-            <a:ext cx="566928" cy="566928"/>
-          </a:xfrm>
-          <a:prstGeom prst="ellipse">
-            <a:avLst/>
-          </a:prstGeom>
-          <a:solidFill>
-            <a:srgbClr val="6A4CA3"/>
-          </a:solidFill>
-          <a:ln w="12700">
-            <a:solidFill>
-              <a:srgbClr val="6A4CA3"/>
-            </a:solidFill>
-            <a:prstDash val="solid"/>
-          </a:ln>
-        </p:spPr>
-      </p:sp>
-      <p:sp>
-        <p:nvSpPr>
-          <p:cNvPr id="17" name="Shape 15"/>
-          <p:cNvSpPr/>
-          <p:nvPr/>
-        </p:nvSpPr>
-        <p:spPr>
-          <a:xfrm>
-            <a:off x="8385048" y="3419856"/>
-            <a:ext cx="1975104" cy="0"/>
-          </a:xfrm>
-          <a:prstGeom prst="line">
-            <a:avLst/>
-          </a:prstGeom>
-          <a:noFill/>
-          <a:ln w="25400">
-            <a:solidFill>
-              <a:srgbClr val="8ABBD8"/>
-            </a:solidFill>
-            <a:prstDash val="solid"/>
-          </a:ln>
-        </p:spPr>
-      </p:sp>
-      <p:sp>
-        <p:nvSpPr>
-          <p:cNvPr id="18" name="Shape 16"/>
-          <p:cNvSpPr/>
-          <p:nvPr/>
-        </p:nvSpPr>
-        <p:spPr>
-          <a:xfrm>
-            <a:off x="8202168" y="3630168"/>
-            <a:ext cx="1170432" cy="118872"/>
-          </a:xfrm>
-          <a:prstGeom prst="line">
-            <a:avLst/>
-          </a:prstGeom>
-          <a:noFill/>
-          <a:ln w="25400">
-            <a:solidFill>
-              <a:srgbClr val="8ABBD8"/>
-            </a:solidFill>
-            <a:prstDash val="solid"/>
-          </a:ln>
-        </p:spPr>
-      </p:sp>
-      <p:sp>
-        <p:nvSpPr>
-          <p:cNvPr id="19" name="Shape 17"/>
-          <p:cNvSpPr/>
-          <p:nvPr/>
-        </p:nvSpPr>
-        <p:spPr>
-          <a:xfrm>
-            <a:off x="10543032" y="3630168"/>
-            <a:ext cx="-1170432" cy="118872"/>
-          </a:xfrm>
-          <a:prstGeom prst="line">
-            <a:avLst/>
-          </a:prstGeom>
-          <a:noFill/>
-          <a:ln w="25400">
-            <a:solidFill>
-              <a:srgbClr val="8ABBD8"/>
-            </a:solidFill>
-            <a:prstDash val="solid"/>
-          </a:ln>
-        </p:spPr>
-      </p:sp>
-      <p:sp>
-        <p:nvSpPr>
-          <p:cNvPr id="20" name="Text 18"/>
-          <p:cNvSpPr/>
-          <p:nvPr/>
-        </p:nvSpPr>
-        <p:spPr>
-          <a:xfrm>
-            <a:off x="7863840" y="4069080"/>
-            <a:ext cx="3017520" cy="164592"/>
-          </a:xfrm>
-          <a:prstGeom prst="rect">
-            <a:avLst/>
-          </a:prstGeom>
-          <a:noFill/>
-          <a:ln/>
-        </p:spPr>
-        <p:txBody>
-          <a:bodyPr wrap="square" lIns="0" tIns="0" rIns="0" bIns="0" rtlCol="0" anchor="ctr"/>
-          <a:lstStyle/>
-          <a:p>
-            <a:pPr algn="ctr" indent="0" marL="0">
-              <a:buNone/>
-            </a:pPr>
-            <a:r>
-              <a:rPr lang="en-US" sz="900" b="1" dirty="0">
-                <a:solidFill>
-                  <a:srgbClr val="003A63"/>
-                </a:solidFill>
-                <a:latin typeface="Aptos" pitchFamily="34" charset="0"/>
-                <a:ea typeface="Aptos" pitchFamily="34" charset="-122"/>
-                <a:cs typeface="Aptos" pitchFamily="34" charset="-120"/>
-              </a:rPr>
-              <a:t>Decision rights</a:t>
-            </a:r>
-            <a:endParaRPr lang="en-US" sz="900" dirty="0"/>
-          </a:p>
-        </p:txBody>
-      </p:sp>
-      <p:sp>
-        <p:nvSpPr>
-          <p:cNvPr id="21" name="Shape 19"/>
           <p:cNvSpPr/>
           <p:nvPr/>
         </p:nvSpPr>
@@ -15618,7 +14847,7 @@
       </p:sp>
       <p:sp>
         <p:nvSpPr>
-          <p:cNvPr id="22" name="Text 20"/>
+          <p:cNvPr id="17" name="Text 15"/>
           <p:cNvSpPr/>
           <p:nvPr/>
         </p:nvSpPr>
@@ -15657,7 +14886,7 @@
       </p:sp>
       <p:sp>
         <p:nvSpPr>
-          <p:cNvPr id="23" name="Text 21"/>
+          <p:cNvPr id="18" name="Text 16"/>
           <p:cNvSpPr/>
           <p:nvPr/>
         </p:nvSpPr>
@@ -16165,13 +15394,11 @@
             </a:avLst>
           </a:prstGeom>
           <a:solidFill>
-            <a:srgbClr val="FFFFFF">
-              <a:alpha val="88000"/>
-            </a:srgbClr>
+            <a:srgbClr val="FFFFFF"/>
           </a:solidFill>
           <a:ln w="12700">
             <a:solidFill>
-              <a:srgbClr val="D6E8F2"/>
+              <a:srgbClr val="B9D7E6"/>
             </a:solidFill>
             <a:prstDash val="solid"/>
           </a:ln>
@@ -16179,119 +15406,112 @@
       </p:sp>
       <p:sp>
         <p:nvSpPr>
-          <p:cNvPr id="14" name="Shape 12"/>
-          <p:cNvSpPr/>
-          <p:nvPr/>
-        </p:nvSpPr>
-        <p:spPr>
-          <a:xfrm>
-            <a:off x="8074152" y="3291840"/>
-            <a:ext cx="2596896" cy="749808"/>
-          </a:xfrm>
-          <a:prstGeom prst="rect">
-            <a:avLst/>
-          </a:prstGeom>
-          <a:solidFill>
-            <a:srgbClr val="EAF6F8"/>
-          </a:solidFill>
-          <a:ln w="12700">
-            <a:solidFill>
-              <a:srgbClr val="8ABBD8"/>
-            </a:solidFill>
-            <a:prstDash val="solid"/>
-          </a:ln>
-        </p:spPr>
-      </p:sp>
-      <p:sp>
-        <p:nvSpPr>
-          <p:cNvPr id="15" name="Shape 13"/>
-          <p:cNvSpPr/>
-          <p:nvPr/>
-        </p:nvSpPr>
-        <p:spPr>
-          <a:xfrm>
-            <a:off x="8202168" y="3721608"/>
-            <a:ext cx="2340864" cy="0"/>
-          </a:xfrm>
-          <a:prstGeom prst="line">
-            <a:avLst/>
-          </a:prstGeom>
-          <a:noFill/>
-          <a:ln w="19050">
-            <a:solidFill>
-              <a:srgbClr val="0068B7"/>
-            </a:solidFill>
-            <a:prstDash val="solid"/>
-          </a:ln>
-        </p:spPr>
+          <p:cNvPr id="14" name="Text 12"/>
+          <p:cNvSpPr/>
+          <p:nvPr/>
+        </p:nvSpPr>
+        <p:spPr>
+          <a:xfrm>
+            <a:off x="7799832" y="2935224"/>
+            <a:ext cx="3145536" cy="256032"/>
+          </a:xfrm>
+          <a:prstGeom prst="rect">
+            <a:avLst/>
+          </a:prstGeom>
+          <a:noFill/>
+          <a:ln/>
+        </p:spPr>
+        <p:txBody>
+          <a:bodyPr wrap="square" lIns="0" tIns="0" rIns="0" bIns="0" rtlCol="0" anchor="ctr"/>
+          <a:lstStyle/>
+          <a:p>
+            <a:pPr indent="0" marL="0">
+              <a:buNone/>
+            </a:pPr>
+            <a:r>
+              <a:rPr lang="en-US" sz="1300" b="1" dirty="0">
+                <a:solidFill>
+                  <a:srgbClr val="0068B7"/>
+                </a:solidFill>
+                <a:latin typeface="Aptos" pitchFamily="34" charset="0"/>
+                <a:ea typeface="Aptos" pitchFamily="34" charset="-122"/>
+                <a:cs typeface="Aptos" pitchFamily="34" charset="-120"/>
+              </a:rPr>
+              <a:t>Concept checkpoints</a:t>
+            </a:r>
+            <a:endParaRPr lang="en-US" sz="1300" dirty="0"/>
+          </a:p>
+        </p:txBody>
+      </p:sp>
+      <p:sp>
+        <p:nvSpPr>
+          <p:cNvPr id="15" name="Text 13"/>
+          <p:cNvSpPr/>
+          <p:nvPr/>
+        </p:nvSpPr>
+        <p:spPr>
+          <a:xfrm>
+            <a:off x="7818120" y="3300984"/>
+            <a:ext cx="3090672" cy="877824"/>
+          </a:xfrm>
+          <a:prstGeom prst="rect">
+            <a:avLst/>
+          </a:prstGeom>
+          <a:noFill/>
+          <a:ln/>
+        </p:spPr>
+        <p:txBody>
+          <a:bodyPr wrap="square" lIns="254" tIns="254" rIns="254" bIns="254" rtlCol="0" anchor="t">
+            <a:normAutofit/>
+          </a:bodyPr>
+          <a:lstStyle/>
+          <a:p>
+            <a:r>
+              <a:rPr lang="en-US" sz="1380" dirty="0">
+                <a:solidFill>
+                  <a:srgbClr val="17364A"/>
+                </a:solidFill>
+                <a:latin typeface="Aptos" pitchFamily="34" charset="0"/>
+                <a:ea typeface="Aptos" pitchFamily="34" charset="-122"/>
+                <a:cs typeface="Aptos" pitchFamily="34" charset="-120"/>
+              </a:rPr>
+              <a:t>AI products may be marketed as quick solutions, but the true cost of responsible.</a:t>
+            </a:r>
+            <a:endParaRPr lang="en-US" sz="1380" dirty="0"/>
+          </a:p>
+          <a:p>
+            <a:r>
+              <a:rPr lang="en-US" sz="1380" dirty="0">
+                <a:solidFill>
+                  <a:srgbClr val="17364A"/>
+                </a:solidFill>
+                <a:latin typeface="Aptos" pitchFamily="34" charset="0"/>
+                <a:ea typeface="Aptos" pitchFamily="34" charset="-122"/>
+                <a:cs typeface="Aptos" pitchFamily="34" charset="-120"/>
+              </a:rPr>
+              <a:t>Agencies may need to update data pipelines, configure security controls, develop.</a:t>
+            </a:r>
+            <a:endParaRPr lang="en-US" sz="1380" dirty="0"/>
+          </a:p>
+          <a:p>
+            <a:r>
+              <a:rPr lang="en-US" sz="1380" dirty="0">
+                <a:solidFill>
+                  <a:srgbClr val="17364A"/>
+                </a:solidFill>
+                <a:latin typeface="Aptos" pitchFamily="34" charset="0"/>
+                <a:ea typeface="Aptos" pitchFamily="34" charset="-122"/>
+                <a:cs typeface="Aptos" pitchFamily="34" charset="-120"/>
+              </a:rPr>
+              <a:t>A strong business case also protects mission focus.</a:t>
+            </a:r>
+            <a:endParaRPr lang="en-US" sz="1380" dirty="0"/>
+          </a:p>
+        </p:txBody>
       </p:sp>
       <p:sp>
         <p:nvSpPr>
           <p:cNvPr id="16" name="Shape 14"/>
-          <p:cNvSpPr/>
-          <p:nvPr/>
-        </p:nvSpPr>
-        <p:spPr>
-          <a:xfrm>
-            <a:off x="9198864" y="4206240"/>
-            <a:ext cx="347472" cy="347472"/>
-          </a:xfrm>
-          <a:prstGeom prst="ellipse">
-            <a:avLst/>
-          </a:prstGeom>
-          <a:solidFill>
-            <a:srgbClr val="2F8A28"/>
-          </a:solidFill>
-          <a:ln w="12700">
-            <a:solidFill>
-              <a:srgbClr val="2F8A28"/>
-            </a:solidFill>
-            <a:prstDash val="solid"/>
-          </a:ln>
-        </p:spPr>
-      </p:sp>
-      <p:sp>
-        <p:nvSpPr>
-          <p:cNvPr id="17" name="Text 15"/>
-          <p:cNvSpPr/>
-          <p:nvPr/>
-        </p:nvSpPr>
-        <p:spPr>
-          <a:xfrm>
-            <a:off x="7909560" y="3977640"/>
-            <a:ext cx="2926080" cy="182880"/>
-          </a:xfrm>
-          <a:prstGeom prst="rect">
-            <a:avLst/>
-          </a:prstGeom>
-          <a:noFill/>
-          <a:ln/>
-        </p:spPr>
-        <p:txBody>
-          <a:bodyPr wrap="square" lIns="0" tIns="0" rIns="0" bIns="0" rtlCol="0" anchor="ctr"/>
-          <a:lstStyle/>
-          <a:p>
-            <a:pPr algn="ctr" indent="0" marL="0">
-              <a:buNone/>
-            </a:pPr>
-            <a:r>
-              <a:rPr lang="en-US" sz="1000" dirty="0">
-                <a:solidFill>
-                  <a:srgbClr val="003A63"/>
-                </a:solidFill>
-                <a:latin typeface="Aptos" pitchFamily="34" charset="0"/>
-                <a:ea typeface="Aptos" pitchFamily="34" charset="-122"/>
-                <a:cs typeface="Aptos" pitchFamily="34" charset="-120"/>
-              </a:rPr>
-              <a:t>Concept to action</a:t>
-            </a:r>
-            <a:endParaRPr lang="en-US" sz="1000" dirty="0"/>
-          </a:p>
-        </p:txBody>
-      </p:sp>
-      <p:sp>
-        <p:nvSpPr>
-          <p:cNvPr id="18" name="Shape 16"/>
           <p:cNvSpPr/>
           <p:nvPr/>
         </p:nvSpPr>
@@ -16318,7 +15538,7 @@
       </p:sp>
       <p:sp>
         <p:nvSpPr>
-          <p:cNvPr id="19" name="Text 17"/>
+          <p:cNvPr id="17" name="Text 15"/>
           <p:cNvSpPr/>
           <p:nvPr/>
         </p:nvSpPr>
@@ -16357,7 +15577,7 @@
       </p:sp>
       <p:sp>
         <p:nvSpPr>
-          <p:cNvPr id="20" name="Text 18"/>
+          <p:cNvPr id="18" name="Text 16"/>
           <p:cNvSpPr/>
           <p:nvPr/>
         </p:nvSpPr>
@@ -16865,13 +16085,11 @@
             </a:avLst>
           </a:prstGeom>
           <a:solidFill>
-            <a:srgbClr val="FFFFFF">
-              <a:alpha val="88000"/>
-            </a:srgbClr>
+            <a:srgbClr val="FFFFFF"/>
           </a:solidFill>
           <a:ln w="12700">
             <a:solidFill>
-              <a:srgbClr val="D6E8F2"/>
+              <a:srgbClr val="B9D7E6"/>
             </a:solidFill>
             <a:prstDash val="solid"/>
           </a:ln>
@@ -16879,119 +16097,112 @@
       </p:sp>
       <p:sp>
         <p:nvSpPr>
-          <p:cNvPr id="14" name="Shape 12"/>
-          <p:cNvSpPr/>
-          <p:nvPr/>
-        </p:nvSpPr>
-        <p:spPr>
-          <a:xfrm>
-            <a:off x="8074152" y="3291840"/>
-            <a:ext cx="2596896" cy="749808"/>
-          </a:xfrm>
-          <a:prstGeom prst="rect">
-            <a:avLst/>
-          </a:prstGeom>
-          <a:solidFill>
-            <a:srgbClr val="EAF6F8"/>
-          </a:solidFill>
-          <a:ln w="12700">
-            <a:solidFill>
-              <a:srgbClr val="8ABBD8"/>
-            </a:solidFill>
-            <a:prstDash val="solid"/>
-          </a:ln>
-        </p:spPr>
-      </p:sp>
-      <p:sp>
-        <p:nvSpPr>
-          <p:cNvPr id="15" name="Shape 13"/>
-          <p:cNvSpPr/>
-          <p:nvPr/>
-        </p:nvSpPr>
-        <p:spPr>
-          <a:xfrm>
-            <a:off x="8202168" y="3721608"/>
-            <a:ext cx="2340864" cy="0"/>
-          </a:xfrm>
-          <a:prstGeom prst="line">
-            <a:avLst/>
-          </a:prstGeom>
-          <a:noFill/>
-          <a:ln w="19050">
-            <a:solidFill>
-              <a:srgbClr val="0068B7"/>
-            </a:solidFill>
-            <a:prstDash val="solid"/>
-          </a:ln>
-        </p:spPr>
+          <p:cNvPr id="14" name="Text 12"/>
+          <p:cNvSpPr/>
+          <p:nvPr/>
+        </p:nvSpPr>
+        <p:spPr>
+          <a:xfrm>
+            <a:off x="7799832" y="2935224"/>
+            <a:ext cx="3145536" cy="256032"/>
+          </a:xfrm>
+          <a:prstGeom prst="rect">
+            <a:avLst/>
+          </a:prstGeom>
+          <a:noFill/>
+          <a:ln/>
+        </p:spPr>
+        <p:txBody>
+          <a:bodyPr wrap="square" lIns="0" tIns="0" rIns="0" bIns="0" rtlCol="0" anchor="ctr"/>
+          <a:lstStyle/>
+          <a:p>
+            <a:pPr indent="0" marL="0">
+              <a:buNone/>
+            </a:pPr>
+            <a:r>
+              <a:rPr lang="en-US" sz="1300" b="1" dirty="0">
+                <a:solidFill>
+                  <a:srgbClr val="0068B7"/>
+                </a:solidFill>
+                <a:latin typeface="Aptos" pitchFamily="34" charset="0"/>
+                <a:ea typeface="Aptos" pitchFamily="34" charset="-122"/>
+                <a:cs typeface="Aptos" pitchFamily="34" charset="-120"/>
+              </a:rPr>
+              <a:t>Concept checkpoints</a:t>
+            </a:r>
+            <a:endParaRPr lang="en-US" sz="1300" dirty="0"/>
+          </a:p>
+        </p:txBody>
+      </p:sp>
+      <p:sp>
+        <p:nvSpPr>
+          <p:cNvPr id="15" name="Text 13"/>
+          <p:cNvSpPr/>
+          <p:nvPr/>
+        </p:nvSpPr>
+        <p:spPr>
+          <a:xfrm>
+            <a:off x="7818120" y="3300984"/>
+            <a:ext cx="3090672" cy="877824"/>
+          </a:xfrm>
+          <a:prstGeom prst="rect">
+            <a:avLst/>
+          </a:prstGeom>
+          <a:noFill/>
+          <a:ln/>
+        </p:spPr>
+        <p:txBody>
+          <a:bodyPr wrap="square" lIns="254" tIns="254" rIns="254" bIns="254" rtlCol="0" anchor="t">
+            <a:normAutofit/>
+          </a:bodyPr>
+          <a:lstStyle/>
+          <a:p>
+            <a:r>
+              <a:rPr lang="en-US" sz="1380" dirty="0">
+                <a:solidFill>
+                  <a:srgbClr val="17364A"/>
+                </a:solidFill>
+                <a:latin typeface="Aptos" pitchFamily="34" charset="0"/>
+                <a:ea typeface="Aptos" pitchFamily="34" charset="-122"/>
+                <a:cs typeface="Aptos" pitchFamily="34" charset="-120"/>
+              </a:rPr>
+              <a:t>A vendor offers an AI tool that promises to reduce disease investigator workload by.</a:t>
+            </a:r>
+            <a:endParaRPr lang="en-US" sz="1380" dirty="0"/>
+          </a:p>
+          <a:p>
+            <a:r>
+              <a:rPr lang="en-US" sz="1380" dirty="0">
+                <a:solidFill>
+                  <a:srgbClr val="17364A"/>
+                </a:solidFill>
+                <a:latin typeface="Aptos" pitchFamily="34" charset="0"/>
+                <a:ea typeface="Aptos" pitchFamily="34" charset="-122"/>
+                <a:cs typeface="Aptos" pitchFamily="34" charset="-120"/>
+              </a:rPr>
+              <a:t>The annual license appears affordable, but the agency must also pay for integration with.</a:t>
+            </a:r>
+            <a:endParaRPr lang="en-US" sz="1380" dirty="0"/>
+          </a:p>
+          <a:p>
+            <a:r>
+              <a:rPr lang="en-US" sz="1380" dirty="0">
+                <a:solidFill>
+                  <a:srgbClr val="17364A"/>
+                </a:solidFill>
+                <a:latin typeface="Aptos" pitchFamily="34" charset="0"/>
+                <a:ea typeface="Aptos" pitchFamily="34" charset="-122"/>
+                <a:cs typeface="Aptos" pitchFamily="34" charset="-120"/>
+              </a:rPr>
+              <a:t>A business case review asks whether the tool will meaningfully reduce burden, improve.</a:t>
+            </a:r>
+            <a:endParaRPr lang="en-US" sz="1380" dirty="0"/>
+          </a:p>
+        </p:txBody>
       </p:sp>
       <p:sp>
         <p:nvSpPr>
           <p:cNvPr id="16" name="Shape 14"/>
-          <p:cNvSpPr/>
-          <p:nvPr/>
-        </p:nvSpPr>
-        <p:spPr>
-          <a:xfrm>
-            <a:off x="9198864" y="4206240"/>
-            <a:ext cx="347472" cy="347472"/>
-          </a:xfrm>
-          <a:prstGeom prst="ellipse">
-            <a:avLst/>
-          </a:prstGeom>
-          <a:solidFill>
-            <a:srgbClr val="2F8A28"/>
-          </a:solidFill>
-          <a:ln w="12700">
-            <a:solidFill>
-              <a:srgbClr val="2F8A28"/>
-            </a:solidFill>
-            <a:prstDash val="solid"/>
-          </a:ln>
-        </p:spPr>
-      </p:sp>
-      <p:sp>
-        <p:nvSpPr>
-          <p:cNvPr id="17" name="Text 15"/>
-          <p:cNvSpPr/>
-          <p:nvPr/>
-        </p:nvSpPr>
-        <p:spPr>
-          <a:xfrm>
-            <a:off x="7909560" y="3977640"/>
-            <a:ext cx="2926080" cy="182880"/>
-          </a:xfrm>
-          <a:prstGeom prst="rect">
-            <a:avLst/>
-          </a:prstGeom>
-          <a:noFill/>
-          <a:ln/>
-        </p:spPr>
-        <p:txBody>
-          <a:bodyPr wrap="square" lIns="0" tIns="0" rIns="0" bIns="0" rtlCol="0" anchor="ctr"/>
-          <a:lstStyle/>
-          <a:p>
-            <a:pPr algn="ctr" indent="0" marL="0">
-              <a:buNone/>
-            </a:pPr>
-            <a:r>
-              <a:rPr lang="en-US" sz="1000" dirty="0">
-                <a:solidFill>
-                  <a:srgbClr val="003A63"/>
-                </a:solidFill>
-                <a:latin typeface="Aptos" pitchFamily="34" charset="0"/>
-                <a:ea typeface="Aptos" pitchFamily="34" charset="-122"/>
-                <a:cs typeface="Aptos" pitchFamily="34" charset="-120"/>
-              </a:rPr>
-              <a:t>Concept to action</a:t>
-            </a:r>
-            <a:endParaRPr lang="en-US" sz="1000" dirty="0"/>
-          </a:p>
-        </p:txBody>
-      </p:sp>
-      <p:sp>
-        <p:nvSpPr>
-          <p:cNvPr id="18" name="Shape 16"/>
           <p:cNvSpPr/>
           <p:nvPr/>
         </p:nvSpPr>
@@ -17018,7 +16229,7 @@
       </p:sp>
       <p:sp>
         <p:nvSpPr>
-          <p:cNvPr id="19" name="Text 17"/>
+          <p:cNvPr id="17" name="Text 15"/>
           <p:cNvSpPr/>
           <p:nvPr/>
         </p:nvSpPr>
@@ -17057,7 +16268,7 @@
       </p:sp>
       <p:sp>
         <p:nvSpPr>
-          <p:cNvPr id="20" name="Text 18"/>
+          <p:cNvPr id="18" name="Text 16"/>
           <p:cNvSpPr/>
           <p:nvPr/>
         </p:nvSpPr>

--- a/downloads/presentations/modules/exe-420.pptx
+++ b/downloads/presentations/modules/exe-420.pptx
@@ -3253,49 +3253,58 @@
           <a:ln/>
         </p:spPr>
         <p:txBody>
-          <a:bodyPr wrap="square" lIns="635" tIns="635" rIns="635" bIns="635" rtlCol="0" anchor="t">
+          <a:bodyPr wrap="square" lIns="1016" tIns="1016" rIns="1016" bIns="1016" rtlCol="0" anchor="t">
             <a:normAutofit/>
           </a:bodyPr>
           <a:lstStyle/>
           <a:p>
+            <a:pPr indent="0" marL="0">
+              <a:buNone/>
+            </a:pPr>
             <a:r>
               <a:rPr lang="en-US" sz="2100" dirty="0">
                 <a:solidFill>
-                  <a:srgbClr val="17364A"/>
-                </a:solidFill>
-                <a:latin typeface="Aptos" pitchFamily="34" charset="0"/>
-                <a:ea typeface="Aptos" pitchFamily="34" charset="-122"/>
-                <a:cs typeface="Aptos" pitchFamily="34" charset="-120"/>
-              </a:rPr>
-              <a:t>An AI business case should begin with a problem statement.</a:t>
+                  <a:srgbClr val="003A63"/>
+                </a:solidFill>
+                <a:latin typeface="Aptos" pitchFamily="34" charset="0"/>
+                <a:ea typeface="Aptos" pitchFamily="34" charset="-122"/>
+                <a:cs typeface="Aptos" pitchFamily="34" charset="-120"/>
+              </a:rPr>
+              <a:t>• An AI business case should begin with a problem statement.</a:t>
             </a:r>
             <a:endParaRPr lang="en-US" sz="2100" dirty="0"/>
           </a:p>
           <a:p>
+            <a:pPr indent="0" marL="0">
+              <a:buNone/>
+            </a:pPr>
             <a:r>
               <a:rPr lang="en-US" sz="2100" dirty="0">
                 <a:solidFill>
-                  <a:srgbClr val="17364A"/>
-                </a:solidFill>
-                <a:latin typeface="Aptos" pitchFamily="34" charset="0"/>
-                <a:ea typeface="Aptos" pitchFamily="34" charset="-122"/>
-                <a:cs typeface="Aptos" pitchFamily="34" charset="-120"/>
-              </a:rPr>
-              <a:t>The problem should be operational and measurable, such as delayed case review, inconsistent public.</a:t>
+                  <a:srgbClr val="003A63"/>
+                </a:solidFill>
+                <a:latin typeface="Aptos" pitchFamily="34" charset="0"/>
+                <a:ea typeface="Aptos" pitchFamily="34" charset="-122"/>
+                <a:cs typeface="Aptos" pitchFamily="34" charset="-120"/>
+              </a:rPr>
+              <a:t>• The problem should be operational and measurable, such as delayed case review, inconsistent.</a:t>
             </a:r>
             <a:endParaRPr lang="en-US" sz="2100" dirty="0"/>
           </a:p>
           <a:p>
+            <a:pPr indent="0" marL="0">
+              <a:buNone/>
+            </a:pPr>
             <a:r>
               <a:rPr lang="en-US" sz="2100" dirty="0">
                 <a:solidFill>
-                  <a:srgbClr val="17364A"/>
-                </a:solidFill>
-                <a:latin typeface="Aptos" pitchFamily="34" charset="0"/>
-                <a:ea typeface="Aptos" pitchFamily="34" charset="-122"/>
-                <a:cs typeface="Aptos" pitchFamily="34" charset="-120"/>
-              </a:rPr>
-              <a:t>A vague desire to 'use AI' is not a sufficient problem statement.</a:t>
+                  <a:srgbClr val="003A63"/>
+                </a:solidFill>
+                <a:latin typeface="Aptos" pitchFamily="34" charset="0"/>
+                <a:ea typeface="Aptos" pitchFamily="34" charset="-122"/>
+                <a:cs typeface="Aptos" pitchFamily="34" charset="-120"/>
+              </a:rPr>
+              <a:t>• A vague desire to 'use AI' is not a sufficient problem statement.</a:t>
             </a:r>
             <a:endParaRPr lang="en-US" sz="2100" dirty="0"/>
           </a:p>
@@ -3375,17 +3384,17 @@
         </p:nvSpPr>
         <p:spPr>
           <a:xfrm>
-            <a:off x="7799832" y="1828800"/>
-            <a:ext cx="3145536" cy="685800"/>
-          </a:xfrm>
-          <a:prstGeom prst="rect">
-            <a:avLst/>
-          </a:prstGeom>
-          <a:noFill/>
-          <a:ln/>
-        </p:spPr>
-        <p:txBody>
-          <a:bodyPr wrap="square" lIns="0" tIns="0" rIns="0" bIns="0" rtlCol="0" anchor="t">
+            <a:off x="7799832" y="1801368"/>
+            <a:ext cx="3145536" cy="758952"/>
+          </a:xfrm>
+          <a:prstGeom prst="rect">
+            <a:avLst/>
+          </a:prstGeom>
+          <a:noFill/>
+          <a:ln/>
+        </p:spPr>
+        <p:txBody>
+          <a:bodyPr wrap="square" lIns="254" tIns="254" rIns="254" bIns="254" rtlCol="0" anchor="t">
             <a:normAutofit/>
           </a:bodyPr>
           <a:lstStyle/>
@@ -3394,7 +3403,7 @@
               <a:buNone/>
             </a:pPr>
             <a:r>
-              <a:rPr lang="en-US" sz="1550" dirty="0">
+              <a:rPr lang="en-US" sz="1320" dirty="0">
                 <a:solidFill>
                   <a:srgbClr val="17364A"/>
                 </a:solidFill>
@@ -3404,7 +3413,7 @@
               </a:rPr>
               <a:t>An AI business case should begin with a problem statement.</a:t>
             </a:r>
-            <a:endParaRPr lang="en-US" sz="1550" dirty="0"/>
+            <a:endParaRPr lang="en-US" sz="1320" dirty="0"/>
           </a:p>
         </p:txBody>
       </p:sp>
@@ -3492,13 +3501,16 @@
           <a:ln/>
         </p:spPr>
         <p:txBody>
-          <a:bodyPr wrap="square" lIns="254" tIns="254" rIns="254" bIns="254" rtlCol="0" anchor="t">
+          <a:bodyPr wrap="square" lIns="508" tIns="508" rIns="508" bIns="508" rtlCol="0" anchor="t">
             <a:normAutofit/>
           </a:bodyPr>
           <a:lstStyle/>
           <a:p>
-            <a:r>
-              <a:rPr lang="en-US" sz="1380" dirty="0">
+            <a:pPr indent="0" marL="0">
+              <a:buNone/>
+            </a:pPr>
+            <a:r>
+              <a:rPr lang="en-US" sz="1220" dirty="0">
                 <a:solidFill>
                   <a:srgbClr val="17364A"/>
                 </a:solidFill>
@@ -3506,13 +3518,16 @@
                 <a:ea typeface="Aptos" pitchFamily="34" charset="-122"/>
                 <a:cs typeface="Aptos" pitchFamily="34" charset="-120"/>
               </a:rPr>
-              <a:t>The problem should be operational and measurable, such as delayed case review,.</a:t>
-            </a:r>
-            <a:endParaRPr lang="en-US" sz="1380" dirty="0"/>
-          </a:p>
-          <a:p>
-            <a:r>
-              <a:rPr lang="en-US" sz="1380" dirty="0">
+              <a:t>The problem should be operational and measurable, such as delayed.</a:t>
+            </a:r>
+            <a:endParaRPr lang="en-US" sz="1220" dirty="0"/>
+          </a:p>
+          <a:p>
+            <a:pPr indent="0" marL="0">
+              <a:buNone/>
+            </a:pPr>
+            <a:r>
+              <a:rPr lang="en-US" sz="1220" dirty="0">
                 <a:solidFill>
                   <a:srgbClr val="17364A"/>
                 </a:solidFill>
@@ -3520,13 +3535,16 @@
                 <a:ea typeface="Aptos" pitchFamily="34" charset="-122"/>
                 <a:cs typeface="Aptos" pitchFamily="34" charset="-120"/>
               </a:rPr>
-              <a:t>The business case should connect the proposed AI use to a real public health need.</a:t>
-            </a:r>
-            <a:endParaRPr lang="en-US" sz="1380" dirty="0"/>
-          </a:p>
-          <a:p>
-            <a:r>
-              <a:rPr lang="en-US" sz="1380" dirty="0">
+              <a:t>The business case should connect the proposed AI use to a real.</a:t>
+            </a:r>
+            <a:endParaRPr lang="en-US" sz="1220" dirty="0"/>
+          </a:p>
+          <a:p>
+            <a:pPr indent="0" marL="0">
+              <a:buNone/>
+            </a:pPr>
+            <a:r>
+              <a:rPr lang="en-US" sz="1220" dirty="0">
                 <a:solidFill>
                   <a:srgbClr val="17364A"/>
                 </a:solidFill>
@@ -3536,7 +3554,7 @@
               </a:rPr>
               <a:t>The review should compare alternatives.</a:t>
             </a:r>
-            <a:endParaRPr lang="en-US" sz="1380" dirty="0"/>
+            <a:endParaRPr lang="en-US" sz="1220" dirty="0"/>
           </a:p>
         </p:txBody>
       </p:sp>
@@ -3614,17 +3632,17 @@
         </p:nvSpPr>
         <p:spPr>
           <a:xfrm>
-            <a:off x="7799832" y="5001768"/>
-            <a:ext cx="3145536" cy="502920"/>
-          </a:xfrm>
-          <a:prstGeom prst="rect">
-            <a:avLst/>
-          </a:prstGeom>
-          <a:noFill/>
-          <a:ln/>
-        </p:spPr>
-        <p:txBody>
-          <a:bodyPr wrap="square" lIns="0" tIns="0" rIns="0" bIns="0" rtlCol="0" anchor="t">
+            <a:off x="7799832" y="4974336"/>
+            <a:ext cx="3145536" cy="576072"/>
+          </a:xfrm>
+          <a:prstGeom prst="rect">
+            <a:avLst/>
+          </a:prstGeom>
+          <a:noFill/>
+          <a:ln/>
+        </p:spPr>
+        <p:txBody>
+          <a:bodyPr wrap="square" lIns="254" tIns="254" rIns="254" bIns="254" rtlCol="0" anchor="t">
             <a:normAutofit/>
           </a:bodyPr>
           <a:lstStyle/>
@@ -3633,7 +3651,7 @@
               <a:buNone/>
             </a:pPr>
             <a:r>
-              <a:rPr lang="en-US" sz="1550" dirty="0">
+              <a:rPr lang="en-US" sz="1320" dirty="0">
                 <a:solidFill>
                   <a:srgbClr val="17364A"/>
                 </a:solidFill>
@@ -3641,9 +3659,9 @@
                 <a:ea typeface="Aptos" pitchFamily="34" charset="-122"/>
                 <a:cs typeface="Aptos" pitchFamily="34" charset="-120"/>
               </a:rPr>
-              <a:t>Translate this concept into clear decision rights, review steps, documentation expectations, and escalation paths before an AI-supported workflow is approved.</a:t>
-            </a:r>
-            <a:endParaRPr lang="en-US" sz="1550" dirty="0"/>
+              <a:t>Translate this concept into clear decision rights, review steps, documentation expectations, and escalation paths before.</a:t>
+            </a:r>
+            <a:endParaRPr lang="en-US" sz="1320" dirty="0"/>
           </a:p>
         </p:txBody>
       </p:sp>
@@ -3944,49 +3962,58 @@
           <a:ln/>
         </p:spPr>
         <p:txBody>
-          <a:bodyPr wrap="square" lIns="635" tIns="635" rIns="635" bIns="635" rtlCol="0" anchor="t">
+          <a:bodyPr wrap="square" lIns="1016" tIns="1016" rIns="1016" bIns="1016" rtlCol="0" anchor="t">
             <a:normAutofit/>
           </a:bodyPr>
           <a:lstStyle/>
           <a:p>
+            <a:pPr indent="0" marL="0">
+              <a:buNone/>
+            </a:pPr>
             <a:r>
               <a:rPr lang="en-US" sz="2100" dirty="0">
                 <a:solidFill>
-                  <a:srgbClr val="17364A"/>
-                </a:solidFill>
-                <a:latin typeface="Aptos" pitchFamily="34" charset="0"/>
-                <a:ea typeface="Aptos" pitchFamily="34" charset="-122"/>
-                <a:cs typeface="Aptos" pitchFamily="34" charset="-120"/>
-              </a:rPr>
-              <a:t>One risk is hidden cost.</a:t>
+                  <a:srgbClr val="003A63"/>
+                </a:solidFill>
+                <a:latin typeface="Aptos" pitchFamily="34" charset="0"/>
+                <a:ea typeface="Aptos" pitchFamily="34" charset="-122"/>
+                <a:cs typeface="Aptos" pitchFamily="34" charset="-120"/>
+              </a:rPr>
+              <a:t>• One risk is hidden cost.</a:t>
             </a:r>
             <a:endParaRPr lang="en-US" sz="2100" dirty="0"/>
           </a:p>
           <a:p>
+            <a:pPr indent="0" marL="0">
+              <a:buNone/>
+            </a:pPr>
             <a:r>
               <a:rPr lang="en-US" sz="2100" dirty="0">
                 <a:solidFill>
-                  <a:srgbClr val="17364A"/>
-                </a:solidFill>
-                <a:latin typeface="Aptos" pitchFamily="34" charset="0"/>
-                <a:ea typeface="Aptos" pitchFamily="34" charset="-122"/>
-                <a:cs typeface="Aptos" pitchFamily="34" charset="-120"/>
-              </a:rPr>
-              <a:t>Agencies may purchase an AI tool without funding integration, monitoring, validation, staff training,.</a:t>
+                  <a:srgbClr val="003A63"/>
+                </a:solidFill>
+                <a:latin typeface="Aptos" pitchFamily="34" charset="0"/>
+                <a:ea typeface="Aptos" pitchFamily="34" charset="-122"/>
+                <a:cs typeface="Aptos" pitchFamily="34" charset="-120"/>
+              </a:rPr>
+              <a:t>• Agencies may purchase an AI tool without funding integration, monitoring, validation, staff.</a:t>
             </a:r>
             <a:endParaRPr lang="en-US" sz="2100" dirty="0"/>
           </a:p>
           <a:p>
+            <a:pPr indent="0" marL="0">
+              <a:buNone/>
+            </a:pPr>
             <a:r>
               <a:rPr lang="en-US" sz="2100" dirty="0">
                 <a:solidFill>
-                  <a:srgbClr val="17364A"/>
-                </a:solidFill>
-                <a:latin typeface="Aptos" pitchFamily="34" charset="0"/>
-                <a:ea typeface="Aptos" pitchFamily="34" charset="-122"/>
-                <a:cs typeface="Aptos" pitchFamily="34" charset="-120"/>
-              </a:rPr>
-              <a:t>A guardrail is to require total cost of ownership in every business case.</a:t>
+                  <a:srgbClr val="003A63"/>
+                </a:solidFill>
+                <a:latin typeface="Aptos" pitchFamily="34" charset="0"/>
+                <a:ea typeface="Aptos" pitchFamily="34" charset="-122"/>
+                <a:cs typeface="Aptos" pitchFamily="34" charset="-120"/>
+              </a:rPr>
+              <a:t>• A guardrail is to require total cost of ownership in every business case.</a:t>
             </a:r>
             <a:endParaRPr lang="en-US" sz="2100" dirty="0"/>
           </a:p>
@@ -4066,17 +4093,17 @@
         </p:nvSpPr>
         <p:spPr>
           <a:xfrm>
-            <a:off x="7799832" y="1828800"/>
-            <a:ext cx="3145536" cy="685800"/>
-          </a:xfrm>
-          <a:prstGeom prst="rect">
-            <a:avLst/>
-          </a:prstGeom>
-          <a:noFill/>
-          <a:ln/>
-        </p:spPr>
-        <p:txBody>
-          <a:bodyPr wrap="square" lIns="0" tIns="0" rIns="0" bIns="0" rtlCol="0" anchor="t">
+            <a:off x="7799832" y="1801368"/>
+            <a:ext cx="3145536" cy="758952"/>
+          </a:xfrm>
+          <a:prstGeom prst="rect">
+            <a:avLst/>
+          </a:prstGeom>
+          <a:noFill/>
+          <a:ln/>
+        </p:spPr>
+        <p:txBody>
+          <a:bodyPr wrap="square" lIns="254" tIns="254" rIns="254" bIns="254" rtlCol="0" anchor="t">
             <a:normAutofit/>
           </a:bodyPr>
           <a:lstStyle/>
@@ -4085,7 +4112,7 @@
               <a:buNone/>
             </a:pPr>
             <a:r>
-              <a:rPr lang="en-US" sz="1550" dirty="0">
+              <a:rPr lang="en-US" sz="1320" dirty="0">
                 <a:solidFill>
                   <a:srgbClr val="17364A"/>
                 </a:solidFill>
@@ -4095,7 +4122,7 @@
               </a:rPr>
               <a:t>One risk is hidden cost.</a:t>
             </a:r>
-            <a:endParaRPr lang="en-US" sz="1550" dirty="0"/>
+            <a:endParaRPr lang="en-US" sz="1320" dirty="0"/>
           </a:p>
         </p:txBody>
       </p:sp>
@@ -4183,13 +4210,16 @@
           <a:ln/>
         </p:spPr>
         <p:txBody>
-          <a:bodyPr wrap="square" lIns="254" tIns="254" rIns="254" bIns="254" rtlCol="0" anchor="t">
+          <a:bodyPr wrap="square" lIns="508" tIns="508" rIns="508" bIns="508" rtlCol="0" anchor="t">
             <a:normAutofit/>
           </a:bodyPr>
           <a:lstStyle/>
           <a:p>
-            <a:r>
-              <a:rPr lang="en-US" sz="1380" dirty="0">
+            <a:pPr indent="0" marL="0">
+              <a:buNone/>
+            </a:pPr>
+            <a:r>
+              <a:rPr lang="en-US" sz="1220" dirty="0">
                 <a:solidFill>
                   <a:srgbClr val="17364A"/>
                 </a:solidFill>
@@ -4197,13 +4227,16 @@
                 <a:ea typeface="Aptos" pitchFamily="34" charset="-122"/>
                 <a:cs typeface="Aptos" pitchFamily="34" charset="-120"/>
               </a:rPr>
-              <a:t>Agencies may purchase an AI tool without funding integration, monitoring, validation,.</a:t>
-            </a:r>
-            <a:endParaRPr lang="en-US" sz="1380" dirty="0"/>
-          </a:p>
-          <a:p>
-            <a:r>
-              <a:rPr lang="en-US" sz="1380" dirty="0">
+              <a:t>Agencies may purchase an AI tool without funding integration,.</a:t>
+            </a:r>
+            <a:endParaRPr lang="en-US" sz="1220" dirty="0"/>
+          </a:p>
+          <a:p>
+            <a:pPr indent="0" marL="0">
+              <a:buNone/>
+            </a:pPr>
+            <a:r>
+              <a:rPr lang="en-US" sz="1220" dirty="0">
                 <a:solidFill>
                   <a:srgbClr val="17364A"/>
                 </a:solidFill>
@@ -4213,11 +4246,14 @@
               </a:rPr>
               <a:t>Another risk is benefits inflation.</a:t>
             </a:r>
-            <a:endParaRPr lang="en-US" sz="1380" dirty="0"/>
-          </a:p>
-          <a:p>
-            <a:r>
-              <a:rPr lang="en-US" sz="1380" dirty="0">
+            <a:endParaRPr lang="en-US" sz="1220" dirty="0"/>
+          </a:p>
+          <a:p>
+            <a:pPr indent="0" marL="0">
+              <a:buNone/>
+            </a:pPr>
+            <a:r>
+              <a:rPr lang="en-US" sz="1220" dirty="0">
                 <a:solidFill>
                   <a:srgbClr val="17364A"/>
                 </a:solidFill>
@@ -4225,9 +4261,9 @@
                 <a:ea typeface="Aptos" pitchFamily="34" charset="-122"/>
                 <a:cs typeface="Aptos" pitchFamily="34" charset="-120"/>
               </a:rPr>
-              <a:t>Vendors or project champions may overstate time savings or accuracy without local evidence.</a:t>
-            </a:r>
-            <a:endParaRPr lang="en-US" sz="1380" dirty="0"/>
+              <a:t>Vendors or project champions may overstate time savings or.</a:t>
+            </a:r>
+            <a:endParaRPr lang="en-US" sz="1220" dirty="0"/>
           </a:p>
         </p:txBody>
       </p:sp>
@@ -4305,17 +4341,17 @@
         </p:nvSpPr>
         <p:spPr>
           <a:xfrm>
-            <a:off x="7799832" y="5001768"/>
-            <a:ext cx="3145536" cy="502920"/>
-          </a:xfrm>
-          <a:prstGeom prst="rect">
-            <a:avLst/>
-          </a:prstGeom>
-          <a:noFill/>
-          <a:ln/>
-        </p:spPr>
-        <p:txBody>
-          <a:bodyPr wrap="square" lIns="0" tIns="0" rIns="0" bIns="0" rtlCol="0" anchor="t">
+            <a:off x="7799832" y="4974336"/>
+            <a:ext cx="3145536" cy="576072"/>
+          </a:xfrm>
+          <a:prstGeom prst="rect">
+            <a:avLst/>
+          </a:prstGeom>
+          <a:noFill/>
+          <a:ln/>
+        </p:spPr>
+        <p:txBody>
+          <a:bodyPr wrap="square" lIns="254" tIns="254" rIns="254" bIns="254" rtlCol="0" anchor="t">
             <a:normAutofit/>
           </a:bodyPr>
           <a:lstStyle/>
@@ -4324,7 +4360,7 @@
               <a:buNone/>
             </a:pPr>
             <a:r>
-              <a:rPr lang="en-US" sz="1550" dirty="0">
+              <a:rPr lang="en-US" sz="1320" dirty="0">
                 <a:solidFill>
                   <a:srgbClr val="17364A"/>
                 </a:solidFill>
@@ -4332,9 +4368,9 @@
                 <a:ea typeface="Aptos" pitchFamily="34" charset="-122"/>
                 <a:cs typeface="Aptos" pitchFamily="34" charset="-120"/>
               </a:rPr>
-              <a:t>Identify what could go wrong, who could be affected, what safeguards are needed, and what evidence should be reviewed before use expands.</a:t>
-            </a:r>
-            <a:endParaRPr lang="en-US" sz="1550" dirty="0"/>
+              <a:t>Identify what could go wrong, who could be affected, what safeguards are needed, and what evidence should be reviewed.</a:t>
+            </a:r>
+            <a:endParaRPr lang="en-US" sz="1320" dirty="0"/>
           </a:p>
         </p:txBody>
       </p:sp>
@@ -4635,49 +4671,58 @@
           <a:ln/>
         </p:spPr>
         <p:txBody>
-          <a:bodyPr wrap="square" lIns="635" tIns="635" rIns="635" bIns="635" rtlCol="0" anchor="t">
+          <a:bodyPr wrap="square" lIns="1016" tIns="1016" rIns="1016" bIns="1016" rtlCol="0" anchor="t">
             <a:normAutofit/>
           </a:bodyPr>
           <a:lstStyle/>
           <a:p>
+            <a:pPr indent="0" marL="0">
+              <a:buNone/>
+            </a:pPr>
             <a:r>
               <a:rPr lang="en-US" sz="2100" dirty="0">
                 <a:solidFill>
-                  <a:srgbClr val="17364A"/>
-                </a:solidFill>
-                <a:latin typeface="Aptos" pitchFamily="34" charset="0"/>
-                <a:ea typeface="Aptos" pitchFamily="34" charset="-122"/>
-                <a:cs typeface="Aptos" pitchFamily="34" charset="-120"/>
-              </a:rPr>
-              <a:t>Generative AI business cases should include review time, source verification, and records considerations.</a:t>
+                  <a:srgbClr val="003A63"/>
+                </a:solidFill>
+                <a:latin typeface="Aptos" pitchFamily="34" charset="0"/>
+                <a:ea typeface="Aptos" pitchFamily="34" charset="-122"/>
+                <a:cs typeface="Aptos" pitchFamily="34" charset="-120"/>
+              </a:rPr>
+              <a:t>• Generative AI business cases should include review time, source verification, and records.</a:t>
             </a:r>
             <a:endParaRPr lang="en-US" sz="2100" dirty="0"/>
           </a:p>
           <a:p>
+            <a:pPr indent="0" marL="0">
+              <a:buNone/>
+            </a:pPr>
             <a:r>
               <a:rPr lang="en-US" sz="2100" dirty="0">
                 <a:solidFill>
-                  <a:srgbClr val="17364A"/>
-                </a:solidFill>
-                <a:latin typeface="Aptos" pitchFamily="34" charset="0"/>
-                <a:ea typeface="Aptos" pitchFamily="34" charset="-122"/>
-                <a:cs typeface="Aptos" pitchFamily="34" charset="-120"/>
-              </a:rPr>
-              <a:t>Predictive analytics business cases should include validation data, subgroup testing, and monitoring.</a:t>
+                  <a:srgbClr val="003A63"/>
+                </a:solidFill>
+                <a:latin typeface="Aptos" pitchFamily="34" charset="0"/>
+                <a:ea typeface="Aptos" pitchFamily="34" charset="-122"/>
+                <a:cs typeface="Aptos" pitchFamily="34" charset="-120"/>
+              </a:rPr>
+              <a:t>• Predictive analytics business cases should include validation data, subgroup testing, and.</a:t>
             </a:r>
             <a:endParaRPr lang="en-US" sz="2100" dirty="0"/>
           </a:p>
           <a:p>
+            <a:pPr indent="0" marL="0">
+              <a:buNone/>
+            </a:pPr>
             <a:r>
               <a:rPr lang="en-US" sz="2100" dirty="0">
                 <a:solidFill>
-                  <a:srgbClr val="17364A"/>
-                </a:solidFill>
-                <a:latin typeface="Aptos" pitchFamily="34" charset="0"/>
-                <a:ea typeface="Aptos" pitchFamily="34" charset="-122"/>
-                <a:cs typeface="Aptos" pitchFamily="34" charset="-120"/>
-              </a:rPr>
-              <a:t>Agentic AI business cases should include security architecture, approval workflows, rollback, logging,.</a:t>
+                  <a:srgbClr val="003A63"/>
+                </a:solidFill>
+                <a:latin typeface="Aptos" pitchFamily="34" charset="0"/>
+                <a:ea typeface="Aptos" pitchFamily="34" charset="-122"/>
+                <a:cs typeface="Aptos" pitchFamily="34" charset="-120"/>
+              </a:rPr>
+              <a:t>• Agentic AI business cases should include security architecture, approval workflows, rollback,.</a:t>
             </a:r>
             <a:endParaRPr lang="en-US" sz="2100" dirty="0"/>
           </a:p>
@@ -4757,17 +4802,17 @@
         </p:nvSpPr>
         <p:spPr>
           <a:xfrm>
-            <a:off x="7799832" y="1828800"/>
-            <a:ext cx="3145536" cy="685800"/>
-          </a:xfrm>
-          <a:prstGeom prst="rect">
-            <a:avLst/>
-          </a:prstGeom>
-          <a:noFill/>
-          <a:ln/>
-        </p:spPr>
-        <p:txBody>
-          <a:bodyPr wrap="square" lIns="0" tIns="0" rIns="0" bIns="0" rtlCol="0" anchor="t">
+            <a:off x="7799832" y="1801368"/>
+            <a:ext cx="3145536" cy="758952"/>
+          </a:xfrm>
+          <a:prstGeom prst="rect">
+            <a:avLst/>
+          </a:prstGeom>
+          <a:noFill/>
+          <a:ln/>
+        </p:spPr>
+        <p:txBody>
+          <a:bodyPr wrap="square" lIns="254" tIns="254" rIns="254" bIns="254" rtlCol="0" anchor="t">
             <a:normAutofit/>
           </a:bodyPr>
           <a:lstStyle/>
@@ -4776,7 +4821,7 @@
               <a:buNone/>
             </a:pPr>
             <a:r>
-              <a:rPr lang="en-US" sz="1550" dirty="0">
+              <a:rPr lang="en-US" sz="1320" dirty="0">
                 <a:solidFill>
                   <a:srgbClr val="17364A"/>
                 </a:solidFill>
@@ -4786,7 +4831,7 @@
               </a:rPr>
               <a:t>Generative AI business cases should include review time, source verification, and records considerations.</a:t>
             </a:r>
-            <a:endParaRPr lang="en-US" sz="1550" dirty="0"/>
+            <a:endParaRPr lang="en-US" sz="1320" dirty="0"/>
           </a:p>
         </p:txBody>
       </p:sp>
@@ -4874,13 +4919,16 @@
           <a:ln/>
         </p:spPr>
         <p:txBody>
-          <a:bodyPr wrap="square" lIns="254" tIns="254" rIns="254" bIns="254" rtlCol="0" anchor="t">
+          <a:bodyPr wrap="square" lIns="508" tIns="508" rIns="508" bIns="508" rtlCol="0" anchor="t">
             <a:normAutofit/>
           </a:bodyPr>
           <a:lstStyle/>
           <a:p>
-            <a:r>
-              <a:rPr lang="en-US" sz="1380" dirty="0">
+            <a:pPr indent="0" marL="0">
+              <a:buNone/>
+            </a:pPr>
+            <a:r>
+              <a:rPr lang="en-US" sz="1220" dirty="0">
                 <a:solidFill>
                   <a:srgbClr val="17364A"/>
                 </a:solidFill>
@@ -4888,13 +4936,16 @@
                 <a:ea typeface="Aptos" pitchFamily="34" charset="-122"/>
                 <a:cs typeface="Aptos" pitchFamily="34" charset="-120"/>
               </a:rPr>
-              <a:t>Predictive analytics business cases should include validation data, subgroup testing, and.</a:t>
-            </a:r>
-            <a:endParaRPr lang="en-US" sz="1380" dirty="0"/>
-          </a:p>
-          <a:p>
-            <a:r>
-              <a:rPr lang="en-US" sz="1380" dirty="0">
+              <a:t>Predictive analytics business cases should include validation.</a:t>
+            </a:r>
+            <a:endParaRPr lang="en-US" sz="1220" dirty="0"/>
+          </a:p>
+          <a:p>
+            <a:pPr indent="0" marL="0">
+              <a:buNone/>
+            </a:pPr>
+            <a:r>
+              <a:rPr lang="en-US" sz="1220" dirty="0">
                 <a:solidFill>
                   <a:srgbClr val="17364A"/>
                 </a:solidFill>
@@ -4902,13 +4953,16 @@
                 <a:ea typeface="Aptos" pitchFamily="34" charset="-122"/>
                 <a:cs typeface="Aptos" pitchFamily="34" charset="-120"/>
               </a:rPr>
-              <a:t>Agentic AI business cases should include security architecture, approval workflows,.</a:t>
-            </a:r>
-            <a:endParaRPr lang="en-US" sz="1380" dirty="0"/>
-          </a:p>
-          <a:p>
-            <a:r>
-              <a:rPr lang="en-US" sz="1380" dirty="0">
+              <a:t>Agentic AI business cases should include security architecture,.</a:t>
+            </a:r>
+            <a:endParaRPr lang="en-US" sz="1220" dirty="0"/>
+          </a:p>
+          <a:p>
+            <a:pPr indent="0" marL="0">
+              <a:buNone/>
+            </a:pPr>
+            <a:r>
+              <a:rPr lang="en-US" sz="1220" dirty="0">
                 <a:solidFill>
                   <a:srgbClr val="17364A"/>
                 </a:solidFill>
@@ -4918,7 +4972,7 @@
               </a:rPr>
               <a:t>Cost and value must reflect responsible use.</a:t>
             </a:r>
-            <a:endParaRPr lang="en-US" sz="1380" dirty="0"/>
+            <a:endParaRPr lang="en-US" sz="1220" dirty="0"/>
           </a:p>
         </p:txBody>
       </p:sp>
@@ -4996,17 +5050,17 @@
         </p:nvSpPr>
         <p:spPr>
           <a:xfrm>
-            <a:off x="7799832" y="5001768"/>
-            <a:ext cx="3145536" cy="502920"/>
-          </a:xfrm>
-          <a:prstGeom prst="rect">
-            <a:avLst/>
-          </a:prstGeom>
-          <a:noFill/>
-          <a:ln/>
-        </p:spPr>
-        <p:txBody>
-          <a:bodyPr wrap="square" lIns="0" tIns="0" rIns="0" bIns="0" rtlCol="0" anchor="t">
+            <a:off x="7799832" y="4974336"/>
+            <a:ext cx="3145536" cy="576072"/>
+          </a:xfrm>
+          <a:prstGeom prst="rect">
+            <a:avLst/>
+          </a:prstGeom>
+          <a:noFill/>
+          <a:ln/>
+        </p:spPr>
+        <p:txBody>
+          <a:bodyPr wrap="square" lIns="254" tIns="254" rIns="254" bIns="254" rtlCol="0" anchor="t">
             <a:normAutofit/>
           </a:bodyPr>
           <a:lstStyle/>
@@ -5015,7 +5069,7 @@
               <a:buNone/>
             </a:pPr>
             <a:r>
-              <a:rPr lang="en-US" sz="1550" dirty="0">
+              <a:rPr lang="en-US" sz="1320" dirty="0">
                 <a:solidFill>
                   <a:srgbClr val="17364A"/>
                 </a:solidFill>
@@ -5023,9 +5077,9 @@
                 <a:ea typeface="Aptos" pitchFamily="34" charset="-122"/>
                 <a:cs typeface="Aptos" pitchFamily="34" charset="-120"/>
               </a:rPr>
-              <a:t>Use the concept to clarify workflow changes, dependencies, staffing, procurement requirements, training needs, and implementation checkpoints.</a:t>
-            </a:r>
-            <a:endParaRPr lang="en-US" sz="1550" dirty="0"/>
+              <a:t>Use the concept to clarify workflow changes, dependencies, staffing, procurement requirements, training needs, and.</a:t>
+            </a:r>
+            <a:endParaRPr lang="en-US" sz="1320" dirty="0"/>
           </a:p>
         </p:txBody>
       </p:sp>
@@ -5326,49 +5380,58 @@
           <a:ln/>
         </p:spPr>
         <p:txBody>
-          <a:bodyPr wrap="square" lIns="635" tIns="635" rIns="635" bIns="635" rtlCol="0" anchor="t">
+          <a:bodyPr wrap="square" lIns="1016" tIns="1016" rIns="1016" bIns="1016" rtlCol="0" anchor="t">
             <a:normAutofit/>
           </a:bodyPr>
           <a:lstStyle/>
           <a:p>
+            <a:pPr indent="0" marL="0">
+              <a:buNone/>
+            </a:pPr>
             <a:r>
               <a:rPr lang="en-US" sz="2100" dirty="0">
                 <a:solidFill>
-                  <a:srgbClr val="17364A"/>
-                </a:solidFill>
-                <a:latin typeface="Aptos" pitchFamily="34" charset="0"/>
-                <a:ea typeface="Aptos" pitchFamily="34" charset="-122"/>
-                <a:cs typeface="Aptos" pitchFamily="34" charset="-120"/>
-              </a:rPr>
-              <a:t>Which current or proposed AI use case in your agency raises this leadership or governance issue most.</a:t>
+                  <a:srgbClr val="003A63"/>
+                </a:solidFill>
+                <a:latin typeface="Aptos" pitchFamily="34" charset="0"/>
+                <a:ea typeface="Aptos" pitchFamily="34" charset="-122"/>
+                <a:cs typeface="Aptos" pitchFamily="34" charset="-120"/>
+              </a:rPr>
+              <a:t>• Which current or proposed AI use case in your agency raises this leadership or governance.</a:t>
             </a:r>
             <a:endParaRPr lang="en-US" sz="2100" dirty="0"/>
           </a:p>
           <a:p>
+            <a:pPr indent="0" marL="0">
+              <a:buNone/>
+            </a:pPr>
             <a:r>
               <a:rPr lang="en-US" sz="2100" dirty="0">
                 <a:solidFill>
-                  <a:srgbClr val="17364A"/>
-                </a:solidFill>
-                <a:latin typeface="Aptos" pitchFamily="34" charset="0"/>
-                <a:ea typeface="Aptos" pitchFamily="34" charset="-122"/>
-                <a:cs typeface="Aptos" pitchFamily="34" charset="-120"/>
-              </a:rPr>
-              <a:t>Who currently has authority to make decisions about this issue, and is that authority documented?</a:t>
+                  <a:srgbClr val="003A63"/>
+                </a:solidFill>
+                <a:latin typeface="Aptos" pitchFamily="34" charset="0"/>
+                <a:ea typeface="Aptos" pitchFamily="34" charset="-122"/>
+                <a:cs typeface="Aptos" pitchFamily="34" charset="-120"/>
+              </a:rPr>
+              <a:t>• Who currently has authority to make decisions about this issue, and is that authority.</a:t>
             </a:r>
             <a:endParaRPr lang="en-US" sz="2100" dirty="0"/>
           </a:p>
           <a:p>
+            <a:pPr indent="0" marL="0">
+              <a:buNone/>
+            </a:pPr>
             <a:r>
               <a:rPr lang="en-US" sz="2100" dirty="0">
                 <a:solidFill>
-                  <a:srgbClr val="17364A"/>
-                </a:solidFill>
-                <a:latin typeface="Aptos" pitchFamily="34" charset="0"/>
-                <a:ea typeface="Aptos" pitchFamily="34" charset="-122"/>
-                <a:cs typeface="Aptos" pitchFamily="34" charset="-120"/>
-              </a:rPr>
-              <a:t>What evidence would governance or leadership need before approving the use case?</a:t>
+                  <a:srgbClr val="003A63"/>
+                </a:solidFill>
+                <a:latin typeface="Aptos" pitchFamily="34" charset="0"/>
+                <a:ea typeface="Aptos" pitchFamily="34" charset="-122"/>
+                <a:cs typeface="Aptos" pitchFamily="34" charset="-120"/>
+              </a:rPr>
+              <a:t>• What evidence would governance or leadership need before approving the use case?</a:t>
             </a:r>
             <a:endParaRPr lang="en-US" sz="2100" dirty="0"/>
           </a:p>
@@ -5448,17 +5511,17 @@
         </p:nvSpPr>
         <p:spPr>
           <a:xfrm>
-            <a:off x="7799832" y="1828800"/>
-            <a:ext cx="3145536" cy="685800"/>
-          </a:xfrm>
-          <a:prstGeom prst="rect">
-            <a:avLst/>
-          </a:prstGeom>
-          <a:noFill/>
-          <a:ln/>
-        </p:spPr>
-        <p:txBody>
-          <a:bodyPr wrap="square" lIns="0" tIns="0" rIns="0" bIns="0" rtlCol="0" anchor="t">
+            <a:off x="7799832" y="1801368"/>
+            <a:ext cx="3145536" cy="758952"/>
+          </a:xfrm>
+          <a:prstGeom prst="rect">
+            <a:avLst/>
+          </a:prstGeom>
+          <a:noFill/>
+          <a:ln/>
+        </p:spPr>
+        <p:txBody>
+          <a:bodyPr wrap="square" lIns="254" tIns="254" rIns="254" bIns="254" rtlCol="0" anchor="t">
             <a:normAutofit/>
           </a:bodyPr>
           <a:lstStyle/>
@@ -5467,7 +5530,7 @@
               <a:buNone/>
             </a:pPr>
             <a:r>
-              <a:rPr lang="en-US" sz="1550" dirty="0">
+              <a:rPr lang="en-US" sz="1320" dirty="0">
                 <a:solidFill>
                   <a:srgbClr val="17364A"/>
                 </a:solidFill>
@@ -5477,7 +5540,7 @@
               </a:rPr>
               <a:t>Which current or proposed AI use case in your agency raises this leadership or governance issue most.</a:t>
             </a:r>
-            <a:endParaRPr lang="en-US" sz="1550" dirty="0"/>
+            <a:endParaRPr lang="en-US" sz="1320" dirty="0"/>
           </a:p>
         </p:txBody>
       </p:sp>
@@ -5565,13 +5628,16 @@
           <a:ln/>
         </p:spPr>
         <p:txBody>
-          <a:bodyPr wrap="square" lIns="254" tIns="254" rIns="254" bIns="254" rtlCol="0" anchor="t">
+          <a:bodyPr wrap="square" lIns="508" tIns="508" rIns="508" bIns="508" rtlCol="0" anchor="t">
             <a:normAutofit/>
           </a:bodyPr>
           <a:lstStyle/>
           <a:p>
-            <a:r>
-              <a:rPr lang="en-US" sz="1380" dirty="0">
+            <a:pPr indent="0" marL="0">
+              <a:buNone/>
+            </a:pPr>
+            <a:r>
+              <a:rPr lang="en-US" sz="1220" dirty="0">
                 <a:solidFill>
                   <a:srgbClr val="17364A"/>
                 </a:solidFill>
@@ -5579,13 +5645,16 @@
                 <a:ea typeface="Aptos" pitchFamily="34" charset="-122"/>
                 <a:cs typeface="Aptos" pitchFamily="34" charset="-120"/>
               </a:rPr>
-              <a:t>Which current or proposed AI use case in your agency raises this leadership or governance.</a:t>
-            </a:r>
-            <a:endParaRPr lang="en-US" sz="1380" dirty="0"/>
-          </a:p>
-          <a:p>
-            <a:r>
-              <a:rPr lang="en-US" sz="1380" dirty="0">
+              <a:t>Which current or proposed AI use case in your agency raises this.</a:t>
+            </a:r>
+            <a:endParaRPr lang="en-US" sz="1220" dirty="0"/>
+          </a:p>
+          <a:p>
+            <a:pPr indent="0" marL="0">
+              <a:buNone/>
+            </a:pPr>
+            <a:r>
+              <a:rPr lang="en-US" sz="1220" dirty="0">
                 <a:solidFill>
                   <a:srgbClr val="17364A"/>
                 </a:solidFill>
@@ -5593,13 +5662,16 @@
                 <a:ea typeface="Aptos" pitchFamily="34" charset="-122"/>
                 <a:cs typeface="Aptos" pitchFamily="34" charset="-120"/>
               </a:rPr>
-              <a:t>Who currently has authority to make decisions about this issue, and is that authority.</a:t>
-            </a:r>
-            <a:endParaRPr lang="en-US" sz="1380" dirty="0"/>
-          </a:p>
-          <a:p>
-            <a:r>
-              <a:rPr lang="en-US" sz="1380" dirty="0">
+              <a:t>Who currently has authority to make decisions about this issue,.</a:t>
+            </a:r>
+            <a:endParaRPr lang="en-US" sz="1220" dirty="0"/>
+          </a:p>
+          <a:p>
+            <a:pPr indent="0" marL="0">
+              <a:buNone/>
+            </a:pPr>
+            <a:r>
+              <a:rPr lang="en-US" sz="1220" dirty="0">
                 <a:solidFill>
                   <a:srgbClr val="17364A"/>
                 </a:solidFill>
@@ -5607,9 +5679,9 @@
                 <a:ea typeface="Aptos" pitchFamily="34" charset="-122"/>
                 <a:cs typeface="Aptos" pitchFamily="34" charset="-120"/>
               </a:rPr>
-              <a:t>What evidence would governance or leadership need before approving the use case?</a:t>
-            </a:r>
-            <a:endParaRPr lang="en-US" sz="1380" dirty="0"/>
+              <a:t>What evidence would governance or leadership need before approving.</a:t>
+            </a:r>
+            <a:endParaRPr lang="en-US" sz="1220" dirty="0"/>
           </a:p>
         </p:txBody>
       </p:sp>
@@ -5687,17 +5759,17 @@
         </p:nvSpPr>
         <p:spPr>
           <a:xfrm>
-            <a:off x="7799832" y="5001768"/>
-            <a:ext cx="3145536" cy="502920"/>
-          </a:xfrm>
-          <a:prstGeom prst="rect">
-            <a:avLst/>
-          </a:prstGeom>
-          <a:noFill/>
-          <a:ln/>
-        </p:spPr>
-        <p:txBody>
-          <a:bodyPr wrap="square" lIns="0" tIns="0" rIns="0" bIns="0" rtlCol="0" anchor="t">
+            <a:off x="7799832" y="4974336"/>
+            <a:ext cx="3145536" cy="576072"/>
+          </a:xfrm>
+          <a:prstGeom prst="rect">
+            <a:avLst/>
+          </a:prstGeom>
+          <a:noFill/>
+          <a:ln/>
+        </p:spPr>
+        <p:txBody>
+          <a:bodyPr wrap="square" lIns="254" tIns="254" rIns="254" bIns="254" rtlCol="0" anchor="t">
             <a:normAutofit/>
           </a:bodyPr>
           <a:lstStyle/>
@@ -5706,7 +5778,7 @@
               <a:buNone/>
             </a:pPr>
             <a:r>
-              <a:rPr lang="en-US" sz="1550" dirty="0">
+              <a:rPr lang="en-US" sz="1320" dirty="0">
                 <a:solidFill>
                   <a:srgbClr val="17364A"/>
                 </a:solidFill>
@@ -5714,9 +5786,9 @@
                 <a:ea typeface="Aptos" pitchFamily="34" charset="-122"/>
                 <a:cs typeface="Aptos" pitchFamily="34" charset="-120"/>
               </a:rPr>
-              <a:t>Connect the concept to public health purpose, responsible use, required safeguards, documentation, and the next action a department should take.</a:t>
-            </a:r>
-            <a:endParaRPr lang="en-US" sz="1550" dirty="0"/>
+              <a:t>Connect the concept to public health purpose, responsible use, required safeguards, documentation, and the next action a.</a:t>
+            </a:r>
+            <a:endParaRPr lang="en-US" sz="1320" dirty="0"/>
           </a:p>
         </p:txBody>
       </p:sp>
@@ -6017,35 +6089,41 @@
           <a:ln/>
         </p:spPr>
         <p:txBody>
-          <a:bodyPr wrap="square" lIns="635" tIns="635" rIns="635" bIns="635" rtlCol="0" anchor="t">
+          <a:bodyPr wrap="square" lIns="1016" tIns="1016" rIns="1016" bIns="1016" rtlCol="0" anchor="t">
             <a:normAutofit/>
           </a:bodyPr>
           <a:lstStyle/>
           <a:p>
+            <a:pPr indent="0" marL="0">
+              <a:buNone/>
+            </a:pPr>
             <a:r>
               <a:rPr lang="en-US" sz="2100" dirty="0">
                 <a:solidFill>
-                  <a:srgbClr val="17364A"/>
-                </a:solidFill>
-                <a:latin typeface="Aptos" pitchFamily="34" charset="0"/>
-                <a:ea typeface="Aptos" pitchFamily="34" charset="-122"/>
-                <a:cs typeface="Aptos" pitchFamily="34" charset="-120"/>
-              </a:rPr>
-              <a:t>Which staff, partners, or communities would be affected if this issue were handled poorly?</a:t>
+                  <a:srgbClr val="003A63"/>
+                </a:solidFill>
+                <a:latin typeface="Aptos" pitchFamily="34" charset="0"/>
+                <a:ea typeface="Aptos" pitchFamily="34" charset="-122"/>
+                <a:cs typeface="Aptos" pitchFamily="34" charset="-120"/>
+              </a:rPr>
+              <a:t>• Which staff, partners, or communities would be affected if this issue were handled poorly?</a:t>
             </a:r>
             <a:endParaRPr lang="en-US" sz="2100" dirty="0"/>
           </a:p>
           <a:p>
+            <a:pPr indent="0" marL="0">
+              <a:buNone/>
+            </a:pPr>
             <a:r>
               <a:rPr lang="en-US" sz="2100" dirty="0">
                 <a:solidFill>
-                  <a:srgbClr val="17364A"/>
-                </a:solidFill>
-                <a:latin typeface="Aptos" pitchFamily="34" charset="0"/>
-                <a:ea typeface="Aptos" pitchFamily="34" charset="-122"/>
-                <a:cs typeface="Aptos" pitchFamily="34" charset="-120"/>
-              </a:rPr>
-              <a:t>What policy, process, or artifact should be created or updated after this module?</a:t>
+                  <a:srgbClr val="003A63"/>
+                </a:solidFill>
+                <a:latin typeface="Aptos" pitchFamily="34" charset="0"/>
+                <a:ea typeface="Aptos" pitchFamily="34" charset="-122"/>
+                <a:cs typeface="Aptos" pitchFamily="34" charset="-120"/>
+              </a:rPr>
+              <a:t>• What policy, process, or artifact should be created or updated after this module?</a:t>
             </a:r>
             <a:endParaRPr lang="en-US" sz="2100" dirty="0"/>
           </a:p>
@@ -6125,17 +6203,17 @@
         </p:nvSpPr>
         <p:spPr>
           <a:xfrm>
-            <a:off x="7799832" y="1828800"/>
-            <a:ext cx="3145536" cy="685800"/>
-          </a:xfrm>
-          <a:prstGeom prst="rect">
-            <a:avLst/>
-          </a:prstGeom>
-          <a:noFill/>
-          <a:ln/>
-        </p:spPr>
-        <p:txBody>
-          <a:bodyPr wrap="square" lIns="0" tIns="0" rIns="0" bIns="0" rtlCol="0" anchor="t">
+            <a:off x="7799832" y="1801368"/>
+            <a:ext cx="3145536" cy="758952"/>
+          </a:xfrm>
+          <a:prstGeom prst="rect">
+            <a:avLst/>
+          </a:prstGeom>
+          <a:noFill/>
+          <a:ln/>
+        </p:spPr>
+        <p:txBody>
+          <a:bodyPr wrap="square" lIns="254" tIns="254" rIns="254" bIns="254" rtlCol="0" anchor="t">
             <a:normAutofit/>
           </a:bodyPr>
           <a:lstStyle/>
@@ -6144,7 +6222,7 @@
               <a:buNone/>
             </a:pPr>
             <a:r>
-              <a:rPr lang="en-US" sz="1550" dirty="0">
+              <a:rPr lang="en-US" sz="1320" dirty="0">
                 <a:solidFill>
                   <a:srgbClr val="17364A"/>
                 </a:solidFill>
@@ -6154,7 +6232,7 @@
               </a:rPr>
               <a:t>Which staff, partners, or communities would be affected if this issue were handled poorly?</a:t>
             </a:r>
-            <a:endParaRPr lang="en-US" sz="1550" dirty="0"/>
+            <a:endParaRPr lang="en-US" sz="1320" dirty="0"/>
           </a:p>
         </p:txBody>
       </p:sp>
@@ -6242,13 +6320,16 @@
           <a:ln/>
         </p:spPr>
         <p:txBody>
-          <a:bodyPr wrap="square" lIns="254" tIns="254" rIns="254" bIns="254" rtlCol="0" anchor="t">
+          <a:bodyPr wrap="square" lIns="508" tIns="508" rIns="508" bIns="508" rtlCol="0" anchor="t">
             <a:normAutofit/>
           </a:bodyPr>
           <a:lstStyle/>
           <a:p>
-            <a:r>
-              <a:rPr lang="en-US" sz="1380" dirty="0">
+            <a:pPr indent="0" marL="0">
+              <a:buNone/>
+            </a:pPr>
+            <a:r>
+              <a:rPr lang="en-US" sz="1220" dirty="0">
                 <a:solidFill>
                   <a:srgbClr val="17364A"/>
                 </a:solidFill>
@@ -6256,13 +6337,16 @@
                 <a:ea typeface="Aptos" pitchFamily="34" charset="-122"/>
                 <a:cs typeface="Aptos" pitchFamily="34" charset="-120"/>
               </a:rPr>
-              <a:t>Which staff, partners, or communities would be affected if this issue were handled poorly?</a:t>
-            </a:r>
-            <a:endParaRPr lang="en-US" sz="1380" dirty="0"/>
-          </a:p>
-          <a:p>
-            <a:r>
-              <a:rPr lang="en-US" sz="1380" dirty="0">
+              <a:t>Which staff, partners, or communities would be affected if this.</a:t>
+            </a:r>
+            <a:endParaRPr lang="en-US" sz="1220" dirty="0"/>
+          </a:p>
+          <a:p>
+            <a:pPr indent="0" marL="0">
+              <a:buNone/>
+            </a:pPr>
+            <a:r>
+              <a:rPr lang="en-US" sz="1220" dirty="0">
                 <a:solidFill>
                   <a:srgbClr val="17364A"/>
                 </a:solidFill>
@@ -6270,9 +6354,9 @@
                 <a:ea typeface="Aptos" pitchFamily="34" charset="-122"/>
                 <a:cs typeface="Aptos" pitchFamily="34" charset="-120"/>
               </a:rPr>
-              <a:t>What policy, process, or artifact should be created or updated after this module?</a:t>
-            </a:r>
-            <a:endParaRPr lang="en-US" sz="1380" dirty="0"/>
+              <a:t>What policy, process, or artifact should be created or updated.</a:t>
+            </a:r>
+            <a:endParaRPr lang="en-US" sz="1220" dirty="0"/>
           </a:p>
         </p:txBody>
       </p:sp>
@@ -6350,17 +6434,17 @@
         </p:nvSpPr>
         <p:spPr>
           <a:xfrm>
-            <a:off x="7799832" y="5001768"/>
-            <a:ext cx="3145536" cy="502920"/>
-          </a:xfrm>
-          <a:prstGeom prst="rect">
-            <a:avLst/>
-          </a:prstGeom>
-          <a:noFill/>
-          <a:ln/>
-        </p:spPr>
-        <p:txBody>
-          <a:bodyPr wrap="square" lIns="0" tIns="0" rIns="0" bIns="0" rtlCol="0" anchor="t">
+            <a:off x="7799832" y="4974336"/>
+            <a:ext cx="3145536" cy="576072"/>
+          </a:xfrm>
+          <a:prstGeom prst="rect">
+            <a:avLst/>
+          </a:prstGeom>
+          <a:noFill/>
+          <a:ln/>
+        </p:spPr>
+        <p:txBody>
+          <a:bodyPr wrap="square" lIns="254" tIns="254" rIns="254" bIns="254" rtlCol="0" anchor="t">
             <a:normAutofit/>
           </a:bodyPr>
           <a:lstStyle/>
@@ -6369,7 +6453,7 @@
               <a:buNone/>
             </a:pPr>
             <a:r>
-              <a:rPr lang="en-US" sz="1550" dirty="0">
+              <a:rPr lang="en-US" sz="1320" dirty="0">
                 <a:solidFill>
                   <a:srgbClr val="17364A"/>
                 </a:solidFill>
@@ -6377,9 +6461,9 @@
                 <a:ea typeface="Aptos" pitchFamily="34" charset="-122"/>
                 <a:cs typeface="Aptos" pitchFamily="34" charset="-120"/>
               </a:rPr>
-              <a:t>Connect the concept to public health purpose, responsible use, required safeguards, documentation, and the next action a department should take.</a:t>
-            </a:r>
-            <a:endParaRPr lang="en-US" sz="1550" dirty="0"/>
+              <a:t>Connect the concept to public health purpose, responsible use, required safeguards, documentation, and the next action a.</a:t>
+            </a:r>
+            <a:endParaRPr lang="en-US" sz="1320" dirty="0"/>
           </a:p>
         </p:txBody>
       </p:sp>
@@ -6680,35 +6764,41 @@
           <a:ln/>
         </p:spPr>
         <p:txBody>
-          <a:bodyPr wrap="square" lIns="635" tIns="635" rIns="635" bIns="635" rtlCol="0" anchor="t">
+          <a:bodyPr wrap="square" lIns="1016" tIns="1016" rIns="1016" bIns="1016" rtlCol="0" anchor="t">
             <a:normAutofit/>
           </a:bodyPr>
           <a:lstStyle/>
           <a:p>
+            <a:pPr indent="0" marL="0">
+              <a:buNone/>
+            </a:pPr>
             <a:r>
               <a:rPr lang="en-US" sz="2100" dirty="0">
                 <a:solidFill>
-                  <a:srgbClr val="17364A"/>
-                </a:solidFill>
-                <a:latin typeface="Aptos" pitchFamily="34" charset="0"/>
-                <a:ea typeface="Aptos" pitchFamily="34" charset="-122"/>
-                <a:cs typeface="Aptos" pitchFamily="34" charset="-120"/>
-              </a:rPr>
-              <a:t>Complete an AI business case review worksheet for one proposed investment.</a:t>
+                  <a:srgbClr val="003A63"/>
+                </a:solidFill>
+                <a:latin typeface="Aptos" pitchFamily="34" charset="0"/>
+                <a:ea typeface="Aptos" pitchFamily="34" charset="-122"/>
+                <a:cs typeface="Aptos" pitchFamily="34" charset="-120"/>
+              </a:rPr>
+              <a:t>• Complete an AI business case review worksheet for one proposed investment.</a:t>
             </a:r>
             <a:endParaRPr lang="en-US" sz="2100" dirty="0"/>
           </a:p>
           <a:p>
+            <a:pPr indent="0" marL="0">
+              <a:buNone/>
+            </a:pPr>
             <a:r>
               <a:rPr lang="en-US" sz="2100" dirty="0">
                 <a:solidFill>
-                  <a:srgbClr val="17364A"/>
-                </a:solidFill>
-                <a:latin typeface="Aptos" pitchFamily="34" charset="0"/>
-                <a:ea typeface="Aptos" pitchFamily="34" charset="-122"/>
-                <a:cs typeface="Aptos" pitchFamily="34" charset="-120"/>
-              </a:rPr>
-              <a:t>Include problem, alternatives, expected benefits, total cost of ownership, risk, equity considerations,.</a:t>
+                  <a:srgbClr val="003A63"/>
+                </a:solidFill>
+                <a:latin typeface="Aptos" pitchFamily="34" charset="0"/>
+                <a:ea typeface="Aptos" pitchFamily="34" charset="-122"/>
+                <a:cs typeface="Aptos" pitchFamily="34" charset="-120"/>
+              </a:rPr>
+              <a:t>• Include problem, alternatives, expected benefits, total cost of ownership, risk, equity.</a:t>
             </a:r>
             <a:endParaRPr lang="en-US" sz="2100" dirty="0"/>
           </a:p>
@@ -6788,17 +6878,17 @@
         </p:nvSpPr>
         <p:spPr>
           <a:xfrm>
-            <a:off x="7799832" y="1828800"/>
-            <a:ext cx="3145536" cy="685800"/>
-          </a:xfrm>
-          <a:prstGeom prst="rect">
-            <a:avLst/>
-          </a:prstGeom>
-          <a:noFill/>
-          <a:ln/>
-        </p:spPr>
-        <p:txBody>
-          <a:bodyPr wrap="square" lIns="0" tIns="0" rIns="0" bIns="0" rtlCol="0" anchor="t">
+            <a:off x="7799832" y="1801368"/>
+            <a:ext cx="3145536" cy="758952"/>
+          </a:xfrm>
+          <a:prstGeom prst="rect">
+            <a:avLst/>
+          </a:prstGeom>
+          <a:noFill/>
+          <a:ln/>
+        </p:spPr>
+        <p:txBody>
+          <a:bodyPr wrap="square" lIns="254" tIns="254" rIns="254" bIns="254" rtlCol="0" anchor="t">
             <a:normAutofit/>
           </a:bodyPr>
           <a:lstStyle/>
@@ -6807,7 +6897,7 @@
               <a:buNone/>
             </a:pPr>
             <a:r>
-              <a:rPr lang="en-US" sz="1550" dirty="0">
+              <a:rPr lang="en-US" sz="1320" dirty="0">
                 <a:solidFill>
                   <a:srgbClr val="17364A"/>
                 </a:solidFill>
@@ -6817,7 +6907,7 @@
               </a:rPr>
               <a:t>Complete an AI business case review worksheet for one proposed investment.</a:t>
             </a:r>
-            <a:endParaRPr lang="en-US" sz="1550" dirty="0"/>
+            <a:endParaRPr lang="en-US" sz="1320" dirty="0"/>
           </a:p>
         </p:txBody>
       </p:sp>
@@ -6905,13 +6995,16 @@
           <a:ln/>
         </p:spPr>
         <p:txBody>
-          <a:bodyPr wrap="square" lIns="254" tIns="254" rIns="254" bIns="254" rtlCol="0" anchor="t">
+          <a:bodyPr wrap="square" lIns="508" tIns="508" rIns="508" bIns="508" rtlCol="0" anchor="t">
             <a:normAutofit/>
           </a:bodyPr>
           <a:lstStyle/>
           <a:p>
-            <a:r>
-              <a:rPr lang="en-US" sz="1380" dirty="0">
+            <a:pPr indent="0" marL="0">
+              <a:buNone/>
+            </a:pPr>
+            <a:r>
+              <a:rPr lang="en-US" sz="1220" dirty="0">
                 <a:solidFill>
                   <a:srgbClr val="17364A"/>
                 </a:solidFill>
@@ -6919,13 +7012,16 @@
                 <a:ea typeface="Aptos" pitchFamily="34" charset="-122"/>
                 <a:cs typeface="Aptos" pitchFamily="34" charset="-120"/>
               </a:rPr>
-              <a:t>Complete an AI business case review worksheet for one proposed investment.</a:t>
-            </a:r>
-            <a:endParaRPr lang="en-US" sz="1380" dirty="0"/>
-          </a:p>
-          <a:p>
-            <a:r>
-              <a:rPr lang="en-US" sz="1380" dirty="0">
+              <a:t>Complete an AI business case review worksheet for one proposed.</a:t>
+            </a:r>
+            <a:endParaRPr lang="en-US" sz="1220" dirty="0"/>
+          </a:p>
+          <a:p>
+            <a:pPr indent="0" marL="0">
+              <a:buNone/>
+            </a:pPr>
+            <a:r>
+              <a:rPr lang="en-US" sz="1220" dirty="0">
                 <a:solidFill>
                   <a:srgbClr val="17364A"/>
                 </a:solidFill>
@@ -6933,9 +7029,9 @@
                 <a:ea typeface="Aptos" pitchFamily="34" charset="-122"/>
                 <a:cs typeface="Aptos" pitchFamily="34" charset="-120"/>
               </a:rPr>
-              <a:t>Include problem, alternatives, expected benefits, total cost of ownership, risk, equity.</a:t>
-            </a:r>
-            <a:endParaRPr lang="en-US" sz="1380" dirty="0"/>
+              <a:t>Include problem, alternatives, expected benefits, total cost of.</a:t>
+            </a:r>
+            <a:endParaRPr lang="en-US" sz="1220" dirty="0"/>
           </a:p>
         </p:txBody>
       </p:sp>
@@ -7013,17 +7109,17 @@
         </p:nvSpPr>
         <p:spPr>
           <a:xfrm>
-            <a:off x="7799832" y="5001768"/>
-            <a:ext cx="3145536" cy="502920"/>
-          </a:xfrm>
-          <a:prstGeom prst="rect">
-            <a:avLst/>
-          </a:prstGeom>
-          <a:noFill/>
-          <a:ln/>
-        </p:spPr>
-        <p:txBody>
-          <a:bodyPr wrap="square" lIns="0" tIns="0" rIns="0" bIns="0" rtlCol="0" anchor="t">
+            <a:off x="7799832" y="4974336"/>
+            <a:ext cx="3145536" cy="576072"/>
+          </a:xfrm>
+          <a:prstGeom prst="rect">
+            <a:avLst/>
+          </a:prstGeom>
+          <a:noFill/>
+          <a:ln/>
+        </p:spPr>
+        <p:txBody>
+          <a:bodyPr wrap="square" lIns="254" tIns="254" rIns="254" bIns="254" rtlCol="0" anchor="t">
             <a:normAutofit/>
           </a:bodyPr>
           <a:lstStyle/>
@@ -7032,7 +7128,7 @@
               <a:buNone/>
             </a:pPr>
             <a:r>
-              <a:rPr lang="en-US" sz="1550" dirty="0">
+              <a:rPr lang="en-US" sz="1320" dirty="0">
                 <a:solidFill>
                   <a:srgbClr val="17364A"/>
                 </a:solidFill>
@@ -7040,9 +7136,9 @@
                 <a:ea typeface="Aptos" pitchFamily="34" charset="-122"/>
                 <a:cs typeface="Aptos" pitchFamily="34" charset="-120"/>
               </a:rPr>
-              <a:t>Use the assignment to test whether you can explain the concept, apply it to a realistic public health situation, and identify what would need review before the work moves forward.</a:t>
-            </a:r>
-            <a:endParaRPr lang="en-US" sz="1550" dirty="0"/>
+              <a:t>Use the assignment to test whether you can explain the concept, apply it to a realistic public health situation, and.</a:t>
+            </a:r>
+            <a:endParaRPr lang="en-US" sz="1320" dirty="0"/>
           </a:p>
         </p:txBody>
       </p:sp>
@@ -7343,49 +7439,58 @@
           <a:ln/>
         </p:spPr>
         <p:txBody>
-          <a:bodyPr wrap="square" lIns="635" tIns="635" rIns="635" bIns="635" rtlCol="0" anchor="t">
+          <a:bodyPr wrap="square" lIns="1016" tIns="1016" rIns="1016" bIns="1016" rtlCol="0" anchor="t">
             <a:normAutofit/>
           </a:bodyPr>
           <a:lstStyle/>
           <a:p>
+            <a:pPr indent="0" marL="0">
+              <a:buNone/>
+            </a:pPr>
             <a:r>
               <a:rPr lang="en-US" sz="2100" dirty="0">
                 <a:solidFill>
-                  <a:srgbClr val="17364A"/>
-                </a:solidFill>
-                <a:latin typeface="Aptos" pitchFamily="34" charset="0"/>
-                <a:ea typeface="Aptos" pitchFamily="34" charset="-122"/>
-                <a:cs typeface="Aptos" pitchFamily="34" charset="-120"/>
-              </a:rPr>
-              <a:t>Choose a real or realistic public health AI use case.</a:t>
+                  <a:srgbClr val="003A63"/>
+                </a:solidFill>
+                <a:latin typeface="Aptos" pitchFamily="34" charset="0"/>
+                <a:ea typeface="Aptos" pitchFamily="34" charset="-122"/>
+                <a:cs typeface="Aptos" pitchFamily="34" charset="-120"/>
+              </a:rPr>
+              <a:t>• Choose a real or realistic public health AI use case.</a:t>
             </a:r>
             <a:endParaRPr lang="en-US" sz="2100" dirty="0"/>
           </a:p>
           <a:p>
+            <a:pPr indent="0" marL="0">
+              <a:buNone/>
+            </a:pPr>
             <a:r>
               <a:rPr lang="en-US" sz="2100" dirty="0">
                 <a:solidFill>
-                  <a:srgbClr val="17364A"/>
-                </a:solidFill>
-                <a:latin typeface="Aptos" pitchFamily="34" charset="0"/>
-                <a:ea typeface="Aptos" pitchFamily="34" charset="-122"/>
-                <a:cs typeface="Aptos" pitchFamily="34" charset="-120"/>
-              </a:rPr>
-              <a:t>Document assumptions, unresolved questions, and which agency roles would need to review the artifact.</a:t>
+                  <a:srgbClr val="003A63"/>
+                </a:solidFill>
+                <a:latin typeface="Aptos" pitchFamily="34" charset="0"/>
+                <a:ea typeface="Aptos" pitchFamily="34" charset="-122"/>
+                <a:cs typeface="Aptos" pitchFamily="34" charset="-120"/>
+              </a:rPr>
+              <a:t>• Document assumptions, unresolved questions, and which agency roles would need to review the.</a:t>
             </a:r>
             <a:endParaRPr lang="en-US" sz="2100" dirty="0"/>
           </a:p>
           <a:p>
+            <a:pPr indent="0" marL="0">
+              <a:buNone/>
+            </a:pPr>
             <a:r>
               <a:rPr lang="en-US" sz="2100" dirty="0">
                 <a:solidFill>
-                  <a:srgbClr val="17364A"/>
-                </a:solidFill>
-                <a:latin typeface="Aptos" pitchFamily="34" charset="0"/>
-                <a:ea typeface="Aptos" pitchFamily="34" charset="-122"/>
-                <a:cs typeface="Aptos" pitchFamily="34" charset="-120"/>
-              </a:rPr>
-              <a:t>The exercise should produce a work product that could support governance review, leadership discussion,.</a:t>
+                  <a:srgbClr val="003A63"/>
+                </a:solidFill>
+                <a:latin typeface="Aptos" pitchFamily="34" charset="0"/>
+                <a:ea typeface="Aptos" pitchFamily="34" charset="-122"/>
+                <a:cs typeface="Aptos" pitchFamily="34" charset="-120"/>
+              </a:rPr>
+              <a:t>• The exercise should produce a work product that could support governance review, leadership.</a:t>
             </a:r>
             <a:endParaRPr lang="en-US" sz="2100" dirty="0"/>
           </a:p>
@@ -7465,17 +7570,17 @@
         </p:nvSpPr>
         <p:spPr>
           <a:xfrm>
-            <a:off x="7799832" y="1828800"/>
-            <a:ext cx="3145536" cy="685800"/>
-          </a:xfrm>
-          <a:prstGeom prst="rect">
-            <a:avLst/>
-          </a:prstGeom>
-          <a:noFill/>
-          <a:ln/>
-        </p:spPr>
-        <p:txBody>
-          <a:bodyPr wrap="square" lIns="0" tIns="0" rIns="0" bIns="0" rtlCol="0" anchor="t">
+            <a:off x="7799832" y="1801368"/>
+            <a:ext cx="3145536" cy="758952"/>
+          </a:xfrm>
+          <a:prstGeom prst="rect">
+            <a:avLst/>
+          </a:prstGeom>
+          <a:noFill/>
+          <a:ln/>
+        </p:spPr>
+        <p:txBody>
+          <a:bodyPr wrap="square" lIns="254" tIns="254" rIns="254" bIns="254" rtlCol="0" anchor="t">
             <a:normAutofit/>
           </a:bodyPr>
           <a:lstStyle/>
@@ -7484,7 +7589,7 @@
               <a:buNone/>
             </a:pPr>
             <a:r>
-              <a:rPr lang="en-US" sz="1550" dirty="0">
+              <a:rPr lang="en-US" sz="1320" dirty="0">
                 <a:solidFill>
                   <a:srgbClr val="17364A"/>
                 </a:solidFill>
@@ -7494,7 +7599,7 @@
               </a:rPr>
               <a:t>Choose a real or realistic public health AI use case.</a:t>
             </a:r>
-            <a:endParaRPr lang="en-US" sz="1550" dirty="0"/>
+            <a:endParaRPr lang="en-US" sz="1320" dirty="0"/>
           </a:p>
         </p:txBody>
       </p:sp>
@@ -7582,13 +7687,16 @@
           <a:ln/>
         </p:spPr>
         <p:txBody>
-          <a:bodyPr wrap="square" lIns="254" tIns="254" rIns="254" bIns="254" rtlCol="0" anchor="t">
+          <a:bodyPr wrap="square" lIns="508" tIns="508" rIns="508" bIns="508" rtlCol="0" anchor="t">
             <a:normAutofit/>
           </a:bodyPr>
           <a:lstStyle/>
           <a:p>
-            <a:r>
-              <a:rPr lang="en-US" sz="1380" dirty="0">
+            <a:pPr indent="0" marL="0">
+              <a:buNone/>
+            </a:pPr>
+            <a:r>
+              <a:rPr lang="en-US" sz="1220" dirty="0">
                 <a:solidFill>
                   <a:srgbClr val="17364A"/>
                 </a:solidFill>
@@ -7596,13 +7704,16 @@
                 <a:ea typeface="Aptos" pitchFamily="34" charset="-122"/>
                 <a:cs typeface="Aptos" pitchFamily="34" charset="-120"/>
               </a:rPr>
-              <a:t>Document assumptions, unresolved questions, and which agency roles would need to review.</a:t>
-            </a:r>
-            <a:endParaRPr lang="en-US" sz="1380" dirty="0"/>
-          </a:p>
-          <a:p>
-            <a:r>
-              <a:rPr lang="en-US" sz="1380" dirty="0">
+              <a:t>Document assumptions, unresolved questions, and which agency roles.</a:t>
+            </a:r>
+            <a:endParaRPr lang="en-US" sz="1220" dirty="0"/>
+          </a:p>
+          <a:p>
+            <a:pPr indent="0" marL="0">
+              <a:buNone/>
+            </a:pPr>
+            <a:r>
+              <a:rPr lang="en-US" sz="1220" dirty="0">
                 <a:solidFill>
                   <a:srgbClr val="17364A"/>
                 </a:solidFill>
@@ -7610,9 +7721,9 @@
                 <a:ea typeface="Aptos" pitchFamily="34" charset="-122"/>
                 <a:cs typeface="Aptos" pitchFamily="34" charset="-120"/>
               </a:rPr>
-              <a:t>The exercise should produce a work product that could support governance review,.</a:t>
-            </a:r>
-            <a:endParaRPr lang="en-US" sz="1380" dirty="0"/>
+              <a:t>The exercise should produce a work product that could support.</a:t>
+            </a:r>
+            <a:endParaRPr lang="en-US" sz="1220" dirty="0"/>
           </a:p>
         </p:txBody>
       </p:sp>
@@ -7690,17 +7801,17 @@
         </p:nvSpPr>
         <p:spPr>
           <a:xfrm>
-            <a:off x="7799832" y="5001768"/>
-            <a:ext cx="3145536" cy="502920"/>
-          </a:xfrm>
-          <a:prstGeom prst="rect">
-            <a:avLst/>
-          </a:prstGeom>
-          <a:noFill/>
-          <a:ln/>
-        </p:spPr>
-        <p:txBody>
-          <a:bodyPr wrap="square" lIns="0" tIns="0" rIns="0" bIns="0" rtlCol="0" anchor="t">
+            <a:off x="7799832" y="4974336"/>
+            <a:ext cx="3145536" cy="576072"/>
+          </a:xfrm>
+          <a:prstGeom prst="rect">
+            <a:avLst/>
+          </a:prstGeom>
+          <a:noFill/>
+          <a:ln/>
+        </p:spPr>
+        <p:txBody>
+          <a:bodyPr wrap="square" lIns="254" tIns="254" rIns="254" bIns="254" rtlCol="0" anchor="t">
             <a:normAutofit/>
           </a:bodyPr>
           <a:lstStyle/>
@@ -7709,7 +7820,7 @@
               <a:buNone/>
             </a:pPr>
             <a:r>
-              <a:rPr lang="en-US" sz="1550" dirty="0">
+              <a:rPr lang="en-US" sz="1320" dirty="0">
                 <a:solidFill>
                   <a:srgbClr val="17364A"/>
                 </a:solidFill>
@@ -7717,9 +7828,9 @@
                 <a:ea typeface="Aptos" pitchFamily="34" charset="-122"/>
                 <a:cs typeface="Aptos" pitchFamily="34" charset="-120"/>
               </a:rPr>
-              <a:t>Connect the concept to public health purpose, responsible use, required safeguards, documentation, and the next action a department should take.</a:t>
-            </a:r>
-            <a:endParaRPr lang="en-US" sz="1550" dirty="0"/>
+              <a:t>Connect the concept to public health purpose, responsible use, required safeguards, documentation, and the next action a.</a:t>
+            </a:r>
+            <a:endParaRPr lang="en-US" sz="1320" dirty="0"/>
           </a:p>
         </p:txBody>
       </p:sp>
@@ -8020,21 +8131,24 @@
           <a:ln/>
         </p:spPr>
         <p:txBody>
-          <a:bodyPr wrap="square" lIns="635" tIns="635" rIns="635" bIns="635" rtlCol="0" anchor="t">
+          <a:bodyPr wrap="square" lIns="1016" tIns="1016" rIns="1016" bIns="1016" rtlCol="0" anchor="t">
             <a:normAutofit/>
           </a:bodyPr>
           <a:lstStyle/>
           <a:p>
+            <a:pPr indent="0" marL="0">
+              <a:buNone/>
+            </a:pPr>
             <a:r>
               <a:rPr lang="en-US" sz="2100" dirty="0">
                 <a:solidFill>
-                  <a:srgbClr val="17364A"/>
-                </a:solidFill>
-                <a:latin typeface="Aptos" pitchFamily="34" charset="0"/>
-                <a:ea typeface="Aptos" pitchFamily="34" charset="-122"/>
-                <a:cs typeface="Aptos" pitchFamily="34" charset="-120"/>
-              </a:rPr>
-              <a:t>AI business case worksheet; total cost of ownership estimate; benefits realization plan; alternatives.</a:t>
+                  <a:srgbClr val="003A63"/>
+                </a:solidFill>
+                <a:latin typeface="Aptos" pitchFamily="34" charset="0"/>
+                <a:ea typeface="Aptos" pitchFamily="34" charset="-122"/>
+                <a:cs typeface="Aptos" pitchFamily="34" charset="-120"/>
+              </a:rPr>
+              <a:t>• AI business case worksheet; total cost of ownership estimate; benefits realization plan;.</a:t>
             </a:r>
             <a:endParaRPr lang="en-US" sz="2100" dirty="0"/>
           </a:p>
@@ -8114,17 +8228,17 @@
         </p:nvSpPr>
         <p:spPr>
           <a:xfrm>
-            <a:off x="7799832" y="1828800"/>
-            <a:ext cx="3145536" cy="685800"/>
-          </a:xfrm>
-          <a:prstGeom prst="rect">
-            <a:avLst/>
-          </a:prstGeom>
-          <a:noFill/>
-          <a:ln/>
-        </p:spPr>
-        <p:txBody>
-          <a:bodyPr wrap="square" lIns="0" tIns="0" rIns="0" bIns="0" rtlCol="0" anchor="t">
+            <a:off x="7799832" y="1801368"/>
+            <a:ext cx="3145536" cy="758952"/>
+          </a:xfrm>
+          <a:prstGeom prst="rect">
+            <a:avLst/>
+          </a:prstGeom>
+          <a:noFill/>
+          <a:ln/>
+        </p:spPr>
+        <p:txBody>
+          <a:bodyPr wrap="square" lIns="254" tIns="254" rIns="254" bIns="254" rtlCol="0" anchor="t">
             <a:normAutofit/>
           </a:bodyPr>
           <a:lstStyle/>
@@ -8133,7 +8247,7 @@
               <a:buNone/>
             </a:pPr>
             <a:r>
-              <a:rPr lang="en-US" sz="1550" dirty="0">
+              <a:rPr lang="en-US" sz="1320" dirty="0">
                 <a:solidFill>
                   <a:srgbClr val="17364A"/>
                 </a:solidFill>
@@ -8143,7 +8257,7 @@
               </a:rPr>
               <a:t>AI business case worksheet; total cost of ownership estimate; benefits realization plan; alternatives.</a:t>
             </a:r>
-            <a:endParaRPr lang="en-US" sz="1550" dirty="0"/>
+            <a:endParaRPr lang="en-US" sz="1320" dirty="0"/>
           </a:p>
         </p:txBody>
       </p:sp>
@@ -8231,13 +8345,16 @@
           <a:ln/>
         </p:spPr>
         <p:txBody>
-          <a:bodyPr wrap="square" lIns="254" tIns="254" rIns="254" bIns="254" rtlCol="0" anchor="t">
+          <a:bodyPr wrap="square" lIns="508" tIns="508" rIns="508" bIns="508" rtlCol="0" anchor="t">
             <a:normAutofit/>
           </a:bodyPr>
           <a:lstStyle/>
           <a:p>
-            <a:r>
-              <a:rPr lang="en-US" sz="1380" dirty="0">
+            <a:pPr indent="0" marL="0">
+              <a:buNone/>
+            </a:pPr>
+            <a:r>
+              <a:rPr lang="en-US" sz="1220" dirty="0">
                 <a:solidFill>
                   <a:srgbClr val="17364A"/>
                 </a:solidFill>
@@ -8245,9 +8362,9 @@
                 <a:ea typeface="Aptos" pitchFamily="34" charset="-122"/>
                 <a:cs typeface="Aptos" pitchFamily="34" charset="-120"/>
               </a:rPr>
-              <a:t>AI business case worksheet; total cost of ownership estimate; benefits realization plan;.</a:t>
-            </a:r>
-            <a:endParaRPr lang="en-US" sz="1380" dirty="0"/>
+              <a:t>AI business case worksheet; total cost of ownership estimate;.</a:t>
+            </a:r>
+            <a:endParaRPr lang="en-US" sz="1220" dirty="0"/>
           </a:p>
         </p:txBody>
       </p:sp>
@@ -8325,17 +8442,17 @@
         </p:nvSpPr>
         <p:spPr>
           <a:xfrm>
-            <a:off x="7799832" y="5001768"/>
-            <a:ext cx="3145536" cy="502920"/>
-          </a:xfrm>
-          <a:prstGeom prst="rect">
-            <a:avLst/>
-          </a:prstGeom>
-          <a:noFill/>
-          <a:ln/>
-        </p:spPr>
-        <p:txBody>
-          <a:bodyPr wrap="square" lIns="0" tIns="0" rIns="0" bIns="0" rtlCol="0" anchor="t">
+            <a:off x="7799832" y="4974336"/>
+            <a:ext cx="3145536" cy="576072"/>
+          </a:xfrm>
+          <a:prstGeom prst="rect">
+            <a:avLst/>
+          </a:prstGeom>
+          <a:noFill/>
+          <a:ln/>
+        </p:spPr>
+        <p:txBody>
+          <a:bodyPr wrap="square" lIns="254" tIns="254" rIns="254" bIns="254" rtlCol="0" anchor="t">
             <a:normAutofit/>
           </a:bodyPr>
           <a:lstStyle/>
@@ -8344,7 +8461,7 @@
               <a:buNone/>
             </a:pPr>
             <a:r>
-              <a:rPr lang="en-US" sz="1550" dirty="0">
+              <a:rPr lang="en-US" sz="1320" dirty="0">
                 <a:solidFill>
                   <a:srgbClr val="17364A"/>
                 </a:solidFill>
@@ -8352,9 +8469,9 @@
                 <a:ea typeface="Aptos" pitchFamily="34" charset="-122"/>
                 <a:cs typeface="Aptos" pitchFamily="34" charset="-120"/>
               </a:rPr>
-              <a:t>Connect the concept to public health purpose, responsible use, required safeguards, documentation, and the next action a department should take.</a:t>
-            </a:r>
-            <a:endParaRPr lang="en-US" sz="1550" dirty="0"/>
+              <a:t>Connect the concept to public health purpose, responsible use, required safeguards, documentation, and the next action a.</a:t>
+            </a:r>
+            <a:endParaRPr lang="en-US" sz="1320" dirty="0"/>
           </a:p>
         </p:txBody>
       </p:sp>
@@ -8655,21 +8772,24 @@
           <a:ln/>
         </p:spPr>
         <p:txBody>
-          <a:bodyPr wrap="square" lIns="635" tIns="635" rIns="635" bIns="635" rtlCol="0" anchor="t">
+          <a:bodyPr wrap="square" lIns="1016" tIns="1016" rIns="1016" bIns="1016" rtlCol="0" anchor="t">
             <a:normAutofit/>
           </a:bodyPr>
           <a:lstStyle/>
           <a:p>
+            <a:pPr indent="0" marL="0">
+              <a:buNone/>
+            </a:pPr>
             <a:r>
               <a:rPr lang="en-US" sz="2100" dirty="0">
                 <a:solidFill>
-                  <a:srgbClr val="17364A"/>
-                </a:solidFill>
-                <a:latin typeface="Aptos" pitchFamily="34" charset="0"/>
-                <a:ea typeface="Aptos" pitchFamily="34" charset="-122"/>
-                <a:cs typeface="Aptos" pitchFamily="34" charset="-120"/>
-              </a:rPr>
-              <a:t>AI business case worksheet; total cost of ownership estimate; benefits realization plan; alternatives.</a:t>
+                  <a:srgbClr val="003A63"/>
+                </a:solidFill>
+                <a:latin typeface="Aptos" pitchFamily="34" charset="0"/>
+                <a:ea typeface="Aptos" pitchFamily="34" charset="-122"/>
+                <a:cs typeface="Aptos" pitchFamily="34" charset="-120"/>
+              </a:rPr>
+              <a:t>• AI business case worksheet; total cost of ownership estimate; benefits realization plan;.</a:t>
             </a:r>
             <a:endParaRPr lang="en-US" sz="2100" dirty="0"/>
           </a:p>
@@ -8749,17 +8869,17 @@
         </p:nvSpPr>
         <p:spPr>
           <a:xfrm>
-            <a:off x="7799832" y="1828800"/>
-            <a:ext cx="3145536" cy="685800"/>
-          </a:xfrm>
-          <a:prstGeom prst="rect">
-            <a:avLst/>
-          </a:prstGeom>
-          <a:noFill/>
-          <a:ln/>
-        </p:spPr>
-        <p:txBody>
-          <a:bodyPr wrap="square" lIns="0" tIns="0" rIns="0" bIns="0" rtlCol="0" anchor="t">
+            <a:off x="7799832" y="1801368"/>
+            <a:ext cx="3145536" cy="758952"/>
+          </a:xfrm>
+          <a:prstGeom prst="rect">
+            <a:avLst/>
+          </a:prstGeom>
+          <a:noFill/>
+          <a:ln/>
+        </p:spPr>
+        <p:txBody>
+          <a:bodyPr wrap="square" lIns="254" tIns="254" rIns="254" bIns="254" rtlCol="0" anchor="t">
             <a:normAutofit/>
           </a:bodyPr>
           <a:lstStyle/>
@@ -8768,7 +8888,7 @@
               <a:buNone/>
             </a:pPr>
             <a:r>
-              <a:rPr lang="en-US" sz="1550" dirty="0">
+              <a:rPr lang="en-US" sz="1320" dirty="0">
                 <a:solidFill>
                   <a:srgbClr val="17364A"/>
                 </a:solidFill>
@@ -8778,7 +8898,7 @@
               </a:rPr>
               <a:t>AI business case worksheet; total cost of ownership estimate; benefits realization plan; alternatives.</a:t>
             </a:r>
-            <a:endParaRPr lang="en-US" sz="1550" dirty="0"/>
+            <a:endParaRPr lang="en-US" sz="1320" dirty="0"/>
           </a:p>
         </p:txBody>
       </p:sp>
@@ -8866,13 +8986,16 @@
           <a:ln/>
         </p:spPr>
         <p:txBody>
-          <a:bodyPr wrap="square" lIns="254" tIns="254" rIns="254" bIns="254" rtlCol="0" anchor="t">
+          <a:bodyPr wrap="square" lIns="508" tIns="508" rIns="508" bIns="508" rtlCol="0" anchor="t">
             <a:normAutofit/>
           </a:bodyPr>
           <a:lstStyle/>
           <a:p>
-            <a:r>
-              <a:rPr lang="en-US" sz="1380" dirty="0">
+            <a:pPr indent="0" marL="0">
+              <a:buNone/>
+            </a:pPr>
+            <a:r>
+              <a:rPr lang="en-US" sz="1220" dirty="0">
                 <a:solidFill>
                   <a:srgbClr val="17364A"/>
                 </a:solidFill>
@@ -8880,9 +9003,9 @@
                 <a:ea typeface="Aptos" pitchFamily="34" charset="-122"/>
                 <a:cs typeface="Aptos" pitchFamily="34" charset="-120"/>
               </a:rPr>
-              <a:t>AI business case worksheet; total cost of ownership estimate; benefits realization plan;.</a:t>
-            </a:r>
-            <a:endParaRPr lang="en-US" sz="1380" dirty="0"/>
+              <a:t>AI business case worksheet; total cost of ownership estimate;.</a:t>
+            </a:r>
+            <a:endParaRPr lang="en-US" sz="1220" dirty="0"/>
           </a:p>
         </p:txBody>
       </p:sp>
@@ -8960,17 +9083,17 @@
         </p:nvSpPr>
         <p:spPr>
           <a:xfrm>
-            <a:off x="7799832" y="5001768"/>
-            <a:ext cx="3145536" cy="502920"/>
-          </a:xfrm>
-          <a:prstGeom prst="rect">
-            <a:avLst/>
-          </a:prstGeom>
-          <a:noFill/>
-          <a:ln/>
-        </p:spPr>
-        <p:txBody>
-          <a:bodyPr wrap="square" lIns="0" tIns="0" rIns="0" bIns="0" rtlCol="0" anchor="t">
+            <a:off x="7799832" y="4974336"/>
+            <a:ext cx="3145536" cy="576072"/>
+          </a:xfrm>
+          <a:prstGeom prst="rect">
+            <a:avLst/>
+          </a:prstGeom>
+          <a:noFill/>
+          <a:ln/>
+        </p:spPr>
+        <p:txBody>
+          <a:bodyPr wrap="square" lIns="254" tIns="254" rIns="254" bIns="254" rtlCol="0" anchor="t">
             <a:normAutofit/>
           </a:bodyPr>
           <a:lstStyle/>
@@ -8979,7 +9102,7 @@
               <a:buNone/>
             </a:pPr>
             <a:r>
-              <a:rPr lang="en-US" sz="1550" dirty="0">
+              <a:rPr lang="en-US" sz="1320" dirty="0">
                 <a:solidFill>
                   <a:srgbClr val="17364A"/>
                 </a:solidFill>
@@ -8987,9 +9110,9 @@
                 <a:ea typeface="Aptos" pitchFamily="34" charset="-122"/>
                 <a:cs typeface="Aptos" pitchFamily="34" charset="-120"/>
               </a:rPr>
-              <a:t>Use the assignment to test whether you can explain the concept, apply it to a realistic public health situation, and identify what would need review before the work moves forward.</a:t>
-            </a:r>
-            <a:endParaRPr lang="en-US" sz="1550" dirty="0"/>
+              <a:t>Use the assignment to test whether you can explain the concept, apply it to a realistic public health situation, and.</a:t>
+            </a:r>
+            <a:endParaRPr lang="en-US" sz="1320" dirty="0"/>
           </a:p>
         </p:txBody>
       </p:sp>
@@ -9290,49 +9413,58 @@
           <a:ln/>
         </p:spPr>
         <p:txBody>
-          <a:bodyPr wrap="square" lIns="635" tIns="635" rIns="635" bIns="635" rtlCol="0" anchor="t">
+          <a:bodyPr wrap="square" lIns="1016" tIns="1016" rIns="1016" bIns="1016" rtlCol="0" anchor="t">
             <a:normAutofit/>
           </a:bodyPr>
           <a:lstStyle/>
           <a:p>
+            <a:pPr indent="0" marL="0">
+              <a:buNone/>
+            </a:pPr>
             <a:r>
               <a:rPr lang="en-US" sz="2100" dirty="0">
                 <a:solidFill>
-                  <a:srgbClr val="17364A"/>
-                </a:solidFill>
-                <a:latin typeface="Aptos" pitchFamily="34" charset="0"/>
-                <a:ea typeface="Aptos" pitchFamily="34" charset="-122"/>
-                <a:cs typeface="Aptos" pitchFamily="34" charset="-120"/>
-              </a:rPr>
-              <a:t>1. What is the strongest reason this module topic belongs in AI leadership and governance training?</a:t>
+                  <a:srgbClr val="003A63"/>
+                </a:solidFill>
+                <a:latin typeface="Aptos" pitchFamily="34" charset="0"/>
+                <a:ea typeface="Aptos" pitchFamily="34" charset="-122"/>
+                <a:cs typeface="Aptos" pitchFamily="34" charset="-120"/>
+              </a:rPr>
+              <a:t>• 1. What is the strongest reason this module topic belongs in AI leadership and governance.</a:t>
             </a:r>
             <a:endParaRPr lang="en-US" sz="2100" dirty="0"/>
           </a:p>
           <a:p>
+            <a:pPr indent="0" marL="0">
+              <a:buNone/>
+            </a:pPr>
             <a:r>
               <a:rPr lang="en-US" sz="2100" dirty="0">
                 <a:solidFill>
-                  <a:srgbClr val="17364A"/>
-                </a:solidFill>
-                <a:latin typeface="Aptos" pitchFamily="34" charset="0"/>
-                <a:ea typeface="Aptos" pitchFamily="34" charset="-122"/>
-                <a:cs typeface="Aptos" pitchFamily="34" charset="-120"/>
-              </a:rPr>
-              <a:t>2. Which practice best supports accountable public health AI governance?</a:t>
+                  <a:srgbClr val="003A63"/>
+                </a:solidFill>
+                <a:latin typeface="Aptos" pitchFamily="34" charset="0"/>
+                <a:ea typeface="Aptos" pitchFamily="34" charset="-122"/>
+                <a:cs typeface="Aptos" pitchFamily="34" charset="-120"/>
+              </a:rPr>
+              <a:t>• 2. Which practice best supports accountable public health AI governance?</a:t>
             </a:r>
             <a:endParaRPr lang="en-US" sz="2100" dirty="0"/>
           </a:p>
           <a:p>
+            <a:pPr indent="0" marL="0">
+              <a:buNone/>
+            </a:pPr>
             <a:r>
               <a:rPr lang="en-US" sz="2100" dirty="0">
                 <a:solidFill>
-                  <a:srgbClr val="17364A"/>
-                </a:solidFill>
-                <a:latin typeface="Aptos" pitchFamily="34" charset="0"/>
-                <a:ea typeface="Aptos" pitchFamily="34" charset="-122"/>
-                <a:cs typeface="Aptos" pitchFamily="34" charset="-120"/>
-              </a:rPr>
-              <a:t>3. When should an AI use case be escalated for leadership or governance review?</a:t>
+                  <a:srgbClr val="003A63"/>
+                </a:solidFill>
+                <a:latin typeface="Aptos" pitchFamily="34" charset="0"/>
+                <a:ea typeface="Aptos" pitchFamily="34" charset="-122"/>
+                <a:cs typeface="Aptos" pitchFamily="34" charset="-120"/>
+              </a:rPr>
+              <a:t>• 3. When should an AI use case be escalated for leadership or governance review?</a:t>
             </a:r>
             <a:endParaRPr lang="en-US" sz="2100" dirty="0"/>
           </a:p>
@@ -9412,17 +9544,17 @@
         </p:nvSpPr>
         <p:spPr>
           <a:xfrm>
-            <a:off x="7799832" y="1828800"/>
-            <a:ext cx="3145536" cy="685800"/>
-          </a:xfrm>
-          <a:prstGeom prst="rect">
-            <a:avLst/>
-          </a:prstGeom>
-          <a:noFill/>
-          <a:ln/>
-        </p:spPr>
-        <p:txBody>
-          <a:bodyPr wrap="square" lIns="0" tIns="0" rIns="0" bIns="0" rtlCol="0" anchor="t">
+            <a:off x="7799832" y="1801368"/>
+            <a:ext cx="3145536" cy="758952"/>
+          </a:xfrm>
+          <a:prstGeom prst="rect">
+            <a:avLst/>
+          </a:prstGeom>
+          <a:noFill/>
+          <a:ln/>
+        </p:spPr>
+        <p:txBody>
+          <a:bodyPr wrap="square" lIns="254" tIns="254" rIns="254" bIns="254" rtlCol="0" anchor="t">
             <a:normAutofit/>
           </a:bodyPr>
           <a:lstStyle/>
@@ -9431,7 +9563,7 @@
               <a:buNone/>
             </a:pPr>
             <a:r>
-              <a:rPr lang="en-US" sz="1550" dirty="0">
+              <a:rPr lang="en-US" sz="1320" dirty="0">
                 <a:solidFill>
                   <a:srgbClr val="17364A"/>
                 </a:solidFill>
@@ -9441,7 +9573,7 @@
               </a:rPr>
               <a:t>1. What is the strongest reason this module topic belongs in AI leadership and governance training?</a:t>
             </a:r>
-            <a:endParaRPr lang="en-US" sz="1550" dirty="0"/>
+            <a:endParaRPr lang="en-US" sz="1320" dirty="0"/>
           </a:p>
         </p:txBody>
       </p:sp>
@@ -9529,13 +9661,16 @@
           <a:ln/>
         </p:spPr>
         <p:txBody>
-          <a:bodyPr wrap="square" lIns="254" tIns="254" rIns="254" bIns="254" rtlCol="0" anchor="t">
+          <a:bodyPr wrap="square" lIns="508" tIns="508" rIns="508" bIns="508" rtlCol="0" anchor="t">
             <a:normAutofit/>
           </a:bodyPr>
           <a:lstStyle/>
           <a:p>
-            <a:r>
-              <a:rPr lang="en-US" sz="1380" dirty="0">
+            <a:pPr indent="0" marL="0">
+              <a:buNone/>
+            </a:pPr>
+            <a:r>
+              <a:rPr lang="en-US" sz="1220" dirty="0">
                 <a:solidFill>
                   <a:srgbClr val="17364A"/>
                 </a:solidFill>
@@ -9545,11 +9680,14 @@
               </a:rPr>
               <a:t>1.</a:t>
             </a:r>
-            <a:endParaRPr lang="en-US" sz="1380" dirty="0"/>
-          </a:p>
-          <a:p>
-            <a:r>
-              <a:rPr lang="en-US" sz="1380" dirty="0">
+            <a:endParaRPr lang="en-US" sz="1220" dirty="0"/>
+          </a:p>
+          <a:p>
+            <a:pPr indent="0" marL="0">
+              <a:buNone/>
+            </a:pPr>
+            <a:r>
+              <a:rPr lang="en-US" sz="1220" dirty="0">
                 <a:solidFill>
                   <a:srgbClr val="17364A"/>
                 </a:solidFill>
@@ -9557,13 +9695,16 @@
                 <a:ea typeface="Aptos" pitchFamily="34" charset="-122"/>
                 <a:cs typeface="Aptos" pitchFamily="34" charset="-120"/>
               </a:rPr>
-              <a:t>What is the strongest reason this module topic belongs in AI leadership and governance.</a:t>
-            </a:r>
-            <a:endParaRPr lang="en-US" sz="1380" dirty="0"/>
-          </a:p>
-          <a:p>
-            <a:r>
-              <a:rPr lang="en-US" sz="1380" dirty="0">
+              <a:t>What is the strongest reason this module topic belongs in AI.</a:t>
+            </a:r>
+            <a:endParaRPr lang="en-US" sz="1220" dirty="0"/>
+          </a:p>
+          <a:p>
+            <a:pPr indent="0" marL="0">
+              <a:buNone/>
+            </a:pPr>
+            <a:r>
+              <a:rPr lang="en-US" sz="1220" dirty="0">
                 <a:solidFill>
                   <a:srgbClr val="17364A"/>
                 </a:solidFill>
@@ -9573,7 +9714,7 @@
               </a:rPr>
               <a:t>2.</a:t>
             </a:r>
-            <a:endParaRPr lang="en-US" sz="1380" dirty="0"/>
+            <a:endParaRPr lang="en-US" sz="1220" dirty="0"/>
           </a:p>
         </p:txBody>
       </p:sp>
@@ -9651,17 +9792,17 @@
         </p:nvSpPr>
         <p:spPr>
           <a:xfrm>
-            <a:off x="7799832" y="5001768"/>
-            <a:ext cx="3145536" cy="502920"/>
-          </a:xfrm>
-          <a:prstGeom prst="rect">
-            <a:avLst/>
-          </a:prstGeom>
-          <a:noFill/>
-          <a:ln/>
-        </p:spPr>
-        <p:txBody>
-          <a:bodyPr wrap="square" lIns="0" tIns="0" rIns="0" bIns="0" rtlCol="0" anchor="t">
+            <a:off x="7799832" y="4974336"/>
+            <a:ext cx="3145536" cy="576072"/>
+          </a:xfrm>
+          <a:prstGeom prst="rect">
+            <a:avLst/>
+          </a:prstGeom>
+          <a:noFill/>
+          <a:ln/>
+        </p:spPr>
+        <p:txBody>
+          <a:bodyPr wrap="square" lIns="254" tIns="254" rIns="254" bIns="254" rtlCol="0" anchor="t">
             <a:normAutofit/>
           </a:bodyPr>
           <a:lstStyle/>
@@ -9670,7 +9811,7 @@
               <a:buNone/>
             </a:pPr>
             <a:r>
-              <a:rPr lang="en-US" sz="1550" dirty="0">
+              <a:rPr lang="en-US" sz="1320" dirty="0">
                 <a:solidFill>
                   <a:srgbClr val="17364A"/>
                 </a:solidFill>
@@ -9678,9 +9819,9 @@
                 <a:ea typeface="Aptos" pitchFamily="34" charset="-122"/>
                 <a:cs typeface="Aptos" pitchFamily="34" charset="-120"/>
               </a:rPr>
-              <a:t>Use the assignment to test whether you can explain the concept, apply it to a realistic public health situation, and identify what would need review before the work moves forward.</a:t>
-            </a:r>
-            <a:endParaRPr lang="en-US" sz="1550" dirty="0"/>
+              <a:t>Use the assignment to test whether you can explain the concept, apply it to a realistic public health situation, and.</a:t>
+            </a:r>
+            <a:endParaRPr lang="en-US" sz="1320" dirty="0"/>
           </a:p>
         </p:txBody>
       </p:sp>
@@ -9981,49 +10122,58 @@
           <a:ln/>
         </p:spPr>
         <p:txBody>
-          <a:bodyPr wrap="square" lIns="635" tIns="635" rIns="635" bIns="635" rtlCol="0" anchor="t">
+          <a:bodyPr wrap="square" lIns="1016" tIns="1016" rIns="1016" bIns="1016" rtlCol="0" anchor="t">
             <a:normAutofit/>
           </a:bodyPr>
           <a:lstStyle/>
           <a:p>
+            <a:pPr indent="0" marL="0">
+              <a:buNone/>
+            </a:pPr>
             <a:r>
               <a:rPr lang="en-US" sz="2100" dirty="0">
                 <a:solidFill>
-                  <a:srgbClr val="17364A"/>
-                </a:solidFill>
-                <a:latin typeface="Aptos" pitchFamily="34" charset="0"/>
-                <a:ea typeface="Aptos" pitchFamily="34" charset="-122"/>
-                <a:cs typeface="Aptos" pitchFamily="34" charset="-120"/>
-              </a:rPr>
-              <a:t>AI investments compete with many other public health priorities.</a:t>
+                  <a:srgbClr val="003A63"/>
+                </a:solidFill>
+                <a:latin typeface="Aptos" pitchFamily="34" charset="0"/>
+                <a:ea typeface="Aptos" pitchFamily="34" charset="-122"/>
+                <a:cs typeface="Aptos" pitchFamily="34" charset="-120"/>
+              </a:rPr>
+              <a:t>• AI investments compete with many other public health priorities.</a:t>
             </a:r>
             <a:endParaRPr lang="en-US" sz="2100" dirty="0"/>
           </a:p>
           <a:p>
+            <a:pPr indent="0" marL="0">
+              <a:buNone/>
+            </a:pPr>
             <a:r>
               <a:rPr lang="en-US" sz="2100" dirty="0">
                 <a:solidFill>
-                  <a:srgbClr val="17364A"/>
-                </a:solidFill>
-                <a:latin typeface="Aptos" pitchFamily="34" charset="0"/>
-                <a:ea typeface="Aptos" pitchFamily="34" charset="-122"/>
-                <a:cs typeface="Aptos" pitchFamily="34" charset="-120"/>
-              </a:rPr>
-              <a:t>Leaders need a disciplined way to decide when AI is worth funding, what costs must be considered, and how.</a:t>
+                  <a:srgbClr val="003A63"/>
+                </a:solidFill>
+                <a:latin typeface="Aptos" pitchFamily="34" charset="0"/>
+                <a:ea typeface="Aptos" pitchFamily="34" charset="-122"/>
+                <a:cs typeface="Aptos" pitchFamily="34" charset="-120"/>
+              </a:rPr>
+              <a:t>• Leaders need a disciplined way to decide when AI is worth funding, what costs must be.</a:t>
             </a:r>
             <a:endParaRPr lang="en-US" sz="2100" dirty="0"/>
           </a:p>
           <a:p>
+            <a:pPr indent="0" marL="0">
+              <a:buNone/>
+            </a:pPr>
             <a:r>
               <a:rPr lang="en-US" sz="2100" dirty="0">
                 <a:solidFill>
-                  <a:srgbClr val="17364A"/>
-                </a:solidFill>
-                <a:latin typeface="Aptos" pitchFamily="34" charset="0"/>
-                <a:ea typeface="Aptos" pitchFamily="34" charset="-122"/>
-                <a:cs typeface="Aptos" pitchFamily="34" charset="-120"/>
-              </a:rPr>
-              <a:t>A business case review helps agencies avoid buying tools that are impressive in demonstrations but weak in.</a:t>
+                  <a:srgbClr val="003A63"/>
+                </a:solidFill>
+                <a:latin typeface="Aptos" pitchFamily="34" charset="0"/>
+                <a:ea typeface="Aptos" pitchFamily="34" charset="-122"/>
+                <a:cs typeface="Aptos" pitchFamily="34" charset="-120"/>
+              </a:rPr>
+              <a:t>• A business case review helps agencies avoid buying tools that are impressive in demonstrations.</a:t>
             </a:r>
             <a:endParaRPr lang="en-US" sz="2100" dirty="0"/>
           </a:p>
@@ -10103,17 +10253,17 @@
         </p:nvSpPr>
         <p:spPr>
           <a:xfrm>
-            <a:off x="8074152" y="1920240"/>
-            <a:ext cx="2825496" cy="1280160"/>
-          </a:xfrm>
-          <a:prstGeom prst="rect">
-            <a:avLst/>
-          </a:prstGeom>
-          <a:noFill/>
-          <a:ln/>
-        </p:spPr>
-        <p:txBody>
-          <a:bodyPr wrap="square" lIns="0" tIns="0" rIns="0" bIns="0" rtlCol="0" anchor="t">
+            <a:off x="8074152" y="1892808"/>
+            <a:ext cx="2825496" cy="1353312"/>
+          </a:xfrm>
+          <a:prstGeom prst="rect">
+            <a:avLst/>
+          </a:prstGeom>
+          <a:noFill/>
+          <a:ln/>
+        </p:spPr>
+        <p:txBody>
+          <a:bodyPr wrap="square" lIns="254" tIns="254" rIns="254" bIns="254" rtlCol="0" anchor="t">
             <a:normAutofit/>
           </a:bodyPr>
           <a:lstStyle/>
@@ -10122,7 +10272,7 @@
               <a:buNone/>
             </a:pPr>
             <a:r>
-              <a:rPr lang="en-US" sz="1550" dirty="0">
+              <a:rPr lang="en-US" sz="1320" dirty="0">
                 <a:solidFill>
                   <a:srgbClr val="17364A"/>
                 </a:solidFill>
@@ -10130,43 +10280,9 @@
                 <a:ea typeface="Aptos" pitchFamily="34" charset="-122"/>
                 <a:cs typeface="Aptos" pitchFamily="34" charset="-120"/>
               </a:rPr>
-              <a:t>Level: advanced/leadership</a:t>
-            </a:r>
-            <a:endParaRPr lang="en-US" sz="1550" dirty="0"/>
-          </a:p>
-          <a:p>
-            <a:pPr indent="0" marL="0">
-              <a:buNone/>
-            </a:pPr>
-            <a:r>
-              <a:rPr lang="en-US" sz="1550" dirty="0">
-                <a:solidFill>
-                  <a:srgbClr val="17364A"/>
-                </a:solidFill>
-                <a:latin typeface="Aptos" pitchFamily="34" charset="0"/>
-                <a:ea typeface="Aptos" pitchFamily="34" charset="-122"/>
-                <a:cs typeface="Aptos" pitchFamily="34" charset="-120"/>
-              </a:rPr>
-              <a:t>Primary track: Public Health Executive Leadership Track</a:t>
-            </a:r>
-            <a:endParaRPr lang="en-US" sz="1550" dirty="0"/>
-          </a:p>
-          <a:p>
-            <a:pPr indent="0" marL="0">
-              <a:buNone/>
-            </a:pPr>
-            <a:r>
-              <a:rPr lang="en-US" sz="1550" dirty="0">
-                <a:solidFill>
-                  <a:srgbClr val="17364A"/>
-                </a:solidFill>
-                <a:latin typeface="Aptos" pitchFamily="34" charset="0"/>
-                <a:ea typeface="Aptos" pitchFamily="34" charset="-122"/>
-                <a:cs typeface="Aptos" pitchFamily="34" charset="-120"/>
-              </a:rPr>
-              <a:t>Appears in tracks: governance-security</a:t>
-            </a:r>
-            <a:endParaRPr lang="en-US" sz="1550" dirty="0"/>
+              <a:t>Level: advanced/leadership Primary track: Public Health Executive Leadership Track Appears in tracks: governance-security</a:t>
+            </a:r>
+            <a:endParaRPr lang="en-US" sz="1320" dirty="0"/>
           </a:p>
         </p:txBody>
       </p:sp>
@@ -10254,13 +10370,16 @@
           <a:ln/>
         </p:spPr>
         <p:txBody>
-          <a:bodyPr wrap="square" lIns="254" tIns="254" rIns="254" bIns="254" rtlCol="0" anchor="t">
+          <a:bodyPr wrap="square" lIns="508" tIns="508" rIns="508" bIns="508" rtlCol="0" anchor="t">
             <a:normAutofit/>
           </a:bodyPr>
           <a:lstStyle/>
           <a:p>
-            <a:r>
-              <a:rPr lang="en-US" sz="1380" dirty="0">
+            <a:pPr indent="0" marL="0">
+              <a:buNone/>
+            </a:pPr>
+            <a:r>
+              <a:rPr lang="en-US" sz="1220" dirty="0">
                 <a:solidFill>
                   <a:srgbClr val="17364A"/>
                 </a:solidFill>
@@ -10270,11 +10389,14 @@
               </a:rPr>
               <a:t>Read the module for shared vocabulary and context.</a:t>
             </a:r>
-            <a:endParaRPr lang="en-US" sz="1380" dirty="0"/>
-          </a:p>
-          <a:p>
-            <a:r>
-              <a:rPr lang="en-US" sz="1380" dirty="0">
+            <a:endParaRPr lang="en-US" sz="1220" dirty="0"/>
+          </a:p>
+          <a:p>
+            <a:pPr indent="0" marL="0">
+              <a:buNone/>
+            </a:pPr>
+            <a:r>
+              <a:rPr lang="en-US" sz="1220" dirty="0">
                 <a:solidFill>
                   <a:srgbClr val="17364A"/>
                 </a:solidFill>
@@ -10284,11 +10406,14 @@
               </a:rPr>
               <a:t>Complete the practical exercise to apply the concept.</a:t>
             </a:r>
-            <a:endParaRPr lang="en-US" sz="1380" dirty="0"/>
-          </a:p>
-          <a:p>
-            <a:r>
-              <a:rPr lang="en-US" sz="1380" dirty="0">
+            <a:endParaRPr lang="en-US" sz="1220" dirty="0"/>
+          </a:p>
+          <a:p>
+            <a:pPr indent="0" marL="0">
+              <a:buNone/>
+            </a:pPr>
+            <a:r>
+              <a:rPr lang="en-US" sz="1220" dirty="0">
                 <a:solidFill>
                   <a:srgbClr val="17364A"/>
                 </a:solidFill>
@@ -10298,7 +10423,7 @@
               </a:rPr>
               <a:t>Use the notes and references for deeper review.</a:t>
             </a:r>
-            <a:endParaRPr lang="en-US" sz="1380" dirty="0"/>
+            <a:endParaRPr lang="en-US" sz="1220" dirty="0"/>
           </a:p>
         </p:txBody>
       </p:sp>
@@ -10599,49 +10724,58 @@
           <a:ln/>
         </p:spPr>
         <p:txBody>
-          <a:bodyPr wrap="square" lIns="635" tIns="635" rIns="635" bIns="635" rtlCol="0" anchor="t">
+          <a:bodyPr wrap="square" lIns="1016" tIns="1016" rIns="1016" bIns="1016" rtlCol="0" anchor="t">
             <a:normAutofit/>
           </a:bodyPr>
           <a:lstStyle/>
           <a:p>
+            <a:pPr indent="0" marL="0">
+              <a:buNone/>
+            </a:pPr>
             <a:r>
               <a:rPr lang="en-US" sz="2100" dirty="0">
                 <a:solidFill>
-                  <a:srgbClr val="17364A"/>
-                </a:solidFill>
-                <a:latin typeface="Aptos" pitchFamily="34" charset="0"/>
-                <a:ea typeface="Aptos" pitchFamily="34" charset="-122"/>
-                <a:cs typeface="Aptos" pitchFamily="34" charset="-120"/>
-              </a:rPr>
-              <a:t>NIST Artificial Intelligence Risk Management Framework (AI RMF 1.0):.</a:t>
+                  <a:srgbClr val="003A63"/>
+                </a:solidFill>
+                <a:latin typeface="Aptos" pitchFamily="34" charset="0"/>
+                <a:ea typeface="Aptos" pitchFamily="34" charset="-122"/>
+                <a:cs typeface="Aptos" pitchFamily="34" charset="-120"/>
+              </a:rPr>
+              <a:t>• NIST Artificial Intelligence Risk Management Framework (AI RMF 1.0):.</a:t>
             </a:r>
             <a:endParaRPr lang="en-US" sz="2100" dirty="0"/>
           </a:p>
           <a:p>
+            <a:pPr indent="0" marL="0">
+              <a:buNone/>
+            </a:pPr>
             <a:r>
               <a:rPr lang="en-US" sz="2100" dirty="0">
                 <a:solidFill>
-                  <a:srgbClr val="17364A"/>
-                </a:solidFill>
-                <a:latin typeface="Aptos" pitchFamily="34" charset="0"/>
-                <a:ea typeface="Aptos" pitchFamily="34" charset="-122"/>
-                <a:cs typeface="Aptos" pitchFamily="34" charset="-120"/>
-              </a:rPr>
-              <a:t>NIST Generative AI Profile:.</a:t>
+                  <a:srgbClr val="003A63"/>
+                </a:solidFill>
+                <a:latin typeface="Aptos" pitchFamily="34" charset="0"/>
+                <a:ea typeface="Aptos" pitchFamily="34" charset="-122"/>
+                <a:cs typeface="Aptos" pitchFamily="34" charset="-120"/>
+              </a:rPr>
+              <a:t>• NIST Generative AI Profile:.</a:t>
             </a:r>
             <a:endParaRPr lang="en-US" sz="2100" dirty="0"/>
           </a:p>
           <a:p>
+            <a:pPr indent="0" marL="0">
+              <a:buNone/>
+            </a:pPr>
             <a:r>
               <a:rPr lang="en-US" sz="2100" dirty="0">
                 <a:solidFill>
-                  <a:srgbClr val="17364A"/>
-                </a:solidFill>
-                <a:latin typeface="Aptos" pitchFamily="34" charset="0"/>
-                <a:ea typeface="Aptos" pitchFamily="34" charset="-122"/>
-                <a:cs typeface="Aptos" pitchFamily="34" charset="-120"/>
-              </a:rPr>
-              <a:t>NIST Privacy Framework</a:t>
+                  <a:srgbClr val="003A63"/>
+                </a:solidFill>
+                <a:latin typeface="Aptos" pitchFamily="34" charset="0"/>
+                <a:ea typeface="Aptos" pitchFamily="34" charset="-122"/>
+                <a:cs typeface="Aptos" pitchFamily="34" charset="-120"/>
+              </a:rPr>
+              <a:t>• NIST Privacy Framework</a:t>
             </a:r>
             <a:endParaRPr lang="en-US" sz="2100" dirty="0"/>
           </a:p>
@@ -10721,17 +10855,17 @@
         </p:nvSpPr>
         <p:spPr>
           <a:xfrm>
-            <a:off x="7799832" y="1828800"/>
-            <a:ext cx="3145536" cy="685800"/>
-          </a:xfrm>
-          <a:prstGeom prst="rect">
-            <a:avLst/>
-          </a:prstGeom>
-          <a:noFill/>
-          <a:ln/>
-        </p:spPr>
-        <p:txBody>
-          <a:bodyPr wrap="square" lIns="0" tIns="0" rIns="0" bIns="0" rtlCol="0" anchor="t">
+            <a:off x="7799832" y="1801368"/>
+            <a:ext cx="3145536" cy="758952"/>
+          </a:xfrm>
+          <a:prstGeom prst="rect">
+            <a:avLst/>
+          </a:prstGeom>
+          <a:noFill/>
+          <a:ln/>
+        </p:spPr>
+        <p:txBody>
+          <a:bodyPr wrap="square" lIns="254" tIns="254" rIns="254" bIns="254" rtlCol="0" anchor="t">
             <a:normAutofit/>
           </a:bodyPr>
           <a:lstStyle/>
@@ -10740,7 +10874,7 @@
               <a:buNone/>
             </a:pPr>
             <a:r>
-              <a:rPr lang="en-US" sz="1550" dirty="0">
+              <a:rPr lang="en-US" sz="1320" dirty="0">
                 <a:solidFill>
                   <a:srgbClr val="17364A"/>
                 </a:solidFill>
@@ -10750,7 +10884,7 @@
               </a:rPr>
               <a:t>NIST Artificial Intelligence Risk Management Framework (AI RMF 1.0):.</a:t>
             </a:r>
-            <a:endParaRPr lang="en-US" sz="1550" dirty="0"/>
+            <a:endParaRPr lang="en-US" sz="1320" dirty="0"/>
           </a:p>
         </p:txBody>
       </p:sp>
@@ -10838,13 +10972,16 @@
           <a:ln/>
         </p:spPr>
         <p:txBody>
-          <a:bodyPr wrap="square" lIns="254" tIns="254" rIns="254" bIns="254" rtlCol="0" anchor="t">
+          <a:bodyPr wrap="square" lIns="508" tIns="508" rIns="508" bIns="508" rtlCol="0" anchor="t">
             <a:normAutofit/>
           </a:bodyPr>
           <a:lstStyle/>
           <a:p>
-            <a:r>
-              <a:rPr lang="en-US" sz="1380" dirty="0">
+            <a:pPr indent="0" marL="0">
+              <a:buNone/>
+            </a:pPr>
+            <a:r>
+              <a:rPr lang="en-US" sz="1220" dirty="0">
                 <a:solidFill>
                   <a:srgbClr val="17364A"/>
                 </a:solidFill>
@@ -10852,13 +10989,16 @@
                 <a:ea typeface="Aptos" pitchFamily="34" charset="-122"/>
                 <a:cs typeface="Aptos" pitchFamily="34" charset="-120"/>
               </a:rPr>
-              <a:t>NIST Artificial Intelligence Risk Management Framework (AI RMF 1.0):.</a:t>
-            </a:r>
-            <a:endParaRPr lang="en-US" sz="1380" dirty="0"/>
-          </a:p>
-          <a:p>
-            <a:r>
-              <a:rPr lang="en-US" sz="1380" dirty="0">
+              <a:t>NIST Artificial Intelligence Risk Management Framework (AI RMF.</a:t>
+            </a:r>
+            <a:endParaRPr lang="en-US" sz="1220" dirty="0"/>
+          </a:p>
+          <a:p>
+            <a:pPr indent="0" marL="0">
+              <a:buNone/>
+            </a:pPr>
+            <a:r>
+              <a:rPr lang="en-US" sz="1220" dirty="0">
                 <a:solidFill>
                   <a:srgbClr val="17364A"/>
                 </a:solidFill>
@@ -10868,11 +11008,14 @@
               </a:rPr>
               <a:t>CDC Public Health Data Strategy and Data Modernization resources:.</a:t>
             </a:r>
-            <a:endParaRPr lang="en-US" sz="1380" dirty="0"/>
-          </a:p>
-          <a:p>
-            <a:r>
-              <a:rPr lang="en-US" sz="1380" dirty="0">
+            <a:endParaRPr lang="en-US" sz="1220" dirty="0"/>
+          </a:p>
+          <a:p>
+            <a:pPr indent="0" marL="0">
+              <a:buNone/>
+            </a:pPr>
+            <a:r>
+              <a:rPr lang="en-US" sz="1220" dirty="0">
                 <a:solidFill>
                   <a:srgbClr val="17364A"/>
                 </a:solidFill>
@@ -10882,7 +11025,7 @@
               </a:rPr>
               <a:t>WHO Ethics and Governance of Artificial Intelligence for Health:.</a:t>
             </a:r>
-            <a:endParaRPr lang="en-US" sz="1380" dirty="0"/>
+            <a:endParaRPr lang="en-US" sz="1220" dirty="0"/>
           </a:p>
         </p:txBody>
       </p:sp>
@@ -10960,17 +11103,17 @@
         </p:nvSpPr>
         <p:spPr>
           <a:xfrm>
-            <a:off x="7799832" y="5001768"/>
-            <a:ext cx="3145536" cy="502920"/>
-          </a:xfrm>
-          <a:prstGeom prst="rect">
-            <a:avLst/>
-          </a:prstGeom>
-          <a:noFill/>
-          <a:ln/>
-        </p:spPr>
-        <p:txBody>
-          <a:bodyPr wrap="square" lIns="0" tIns="0" rIns="0" bIns="0" rtlCol="0" anchor="t">
+            <a:off x="7799832" y="4974336"/>
+            <a:ext cx="3145536" cy="576072"/>
+          </a:xfrm>
+          <a:prstGeom prst="rect">
+            <a:avLst/>
+          </a:prstGeom>
+          <a:noFill/>
+          <a:ln/>
+        </p:spPr>
+        <p:txBody>
+          <a:bodyPr wrap="square" lIns="254" tIns="254" rIns="254" bIns="254" rtlCol="0" anchor="t">
             <a:normAutofit/>
           </a:bodyPr>
           <a:lstStyle/>
@@ -10979,7 +11122,7 @@
               <a:buNone/>
             </a:pPr>
             <a:r>
-              <a:rPr lang="en-US" sz="1550" dirty="0">
+              <a:rPr lang="en-US" sz="1320" dirty="0">
                 <a:solidFill>
                   <a:srgbClr val="17364A"/>
                 </a:solidFill>
@@ -10987,9 +11130,9 @@
                 <a:ea typeface="Aptos" pitchFamily="34" charset="-122"/>
                 <a:cs typeface="Aptos" pitchFamily="34" charset="-120"/>
               </a:rPr>
-              <a:t>Connect the concept to public health purpose, responsible use, required safeguards, documentation, and the next action a department should take.</a:t>
-            </a:r>
-            <a:endParaRPr lang="en-US" sz="1550" dirty="0"/>
+              <a:t>Connect the concept to public health purpose, responsible use, required safeguards, documentation, and the next action a.</a:t>
+            </a:r>
+            <a:endParaRPr lang="en-US" sz="1320" dirty="0"/>
           </a:p>
         </p:txBody>
       </p:sp>
@@ -11290,35 +11433,41 @@
           <a:ln/>
         </p:spPr>
         <p:txBody>
-          <a:bodyPr wrap="square" lIns="635" tIns="635" rIns="635" bIns="635" rtlCol="0" anchor="t">
+          <a:bodyPr wrap="square" lIns="1016" tIns="1016" rIns="1016" bIns="1016" rtlCol="0" anchor="t">
             <a:normAutofit/>
           </a:bodyPr>
           <a:lstStyle/>
           <a:p>
+            <a:pPr indent="0" marL="0">
+              <a:buNone/>
+            </a:pPr>
             <a:r>
               <a:rPr lang="en-US" sz="2100" dirty="0">
                 <a:solidFill>
-                  <a:srgbClr val="17364A"/>
-                </a:solidFill>
-                <a:latin typeface="Aptos" pitchFamily="34" charset="0"/>
-                <a:ea typeface="Aptos" pitchFamily="34" charset="-122"/>
-                <a:cs typeface="Aptos" pitchFamily="34" charset="-120"/>
-              </a:rPr>
-              <a:t>OMB Memorandum M-24-10 on federal AI governance, risk management, and innovation, where relevant to.</a:t>
+                  <a:srgbClr val="003A63"/>
+                </a:solidFill>
+                <a:latin typeface="Aptos" pitchFamily="34" charset="0"/>
+                <a:ea typeface="Aptos" pitchFamily="34" charset="-122"/>
+                <a:cs typeface="Aptos" pitchFamily="34" charset="-120"/>
+              </a:rPr>
+              <a:t>• OMB Memorandum M-24-10 on federal AI governance, risk management, and innovation, where.</a:t>
             </a:r>
             <a:endParaRPr lang="en-US" sz="2100" dirty="0"/>
           </a:p>
           <a:p>
+            <a:pPr indent="0" marL="0">
+              <a:buNone/>
+            </a:pPr>
             <a:r>
               <a:rPr lang="en-US" sz="2100" dirty="0">
                 <a:solidFill>
-                  <a:srgbClr val="17364A"/>
-                </a:solidFill>
-                <a:latin typeface="Aptos" pitchFamily="34" charset="0"/>
-                <a:ea typeface="Aptos" pitchFamily="34" charset="-122"/>
-                <a:cs typeface="Aptos" pitchFamily="34" charset="-120"/>
-              </a:rPr>
-              <a:t>Agency strategic plans, procurement policies, privacy policies, cybersecurity policies, records.</a:t>
+                  <a:srgbClr val="003A63"/>
+                </a:solidFill>
+                <a:latin typeface="Aptos" pitchFamily="34" charset="0"/>
+                <a:ea typeface="Aptos" pitchFamily="34" charset="-122"/>
+                <a:cs typeface="Aptos" pitchFamily="34" charset="-120"/>
+              </a:rPr>
+              <a:t>• Agency strategic plans, procurement policies, privacy policies, cybersecurity policies, records.</a:t>
             </a:r>
             <a:endParaRPr lang="en-US" sz="2100" dirty="0"/>
           </a:p>
@@ -11398,17 +11547,17 @@
         </p:nvSpPr>
         <p:spPr>
           <a:xfrm>
-            <a:off x="7799832" y="1828800"/>
-            <a:ext cx="3145536" cy="685800"/>
-          </a:xfrm>
-          <a:prstGeom prst="rect">
-            <a:avLst/>
-          </a:prstGeom>
-          <a:noFill/>
-          <a:ln/>
-        </p:spPr>
-        <p:txBody>
-          <a:bodyPr wrap="square" lIns="0" tIns="0" rIns="0" bIns="0" rtlCol="0" anchor="t">
+            <a:off x="7799832" y="1801368"/>
+            <a:ext cx="3145536" cy="758952"/>
+          </a:xfrm>
+          <a:prstGeom prst="rect">
+            <a:avLst/>
+          </a:prstGeom>
+          <a:noFill/>
+          <a:ln/>
+        </p:spPr>
+        <p:txBody>
+          <a:bodyPr wrap="square" lIns="254" tIns="254" rIns="254" bIns="254" rtlCol="0" anchor="t">
             <a:normAutofit/>
           </a:bodyPr>
           <a:lstStyle/>
@@ -11417,7 +11566,7 @@
               <a:buNone/>
             </a:pPr>
             <a:r>
-              <a:rPr lang="en-US" sz="1550" dirty="0">
+              <a:rPr lang="en-US" sz="1320" dirty="0">
                 <a:solidFill>
                   <a:srgbClr val="17364A"/>
                 </a:solidFill>
@@ -11427,7 +11576,7 @@
               </a:rPr>
               <a:t>OMB Memorandum M-24-10 on federal AI governance, risk management, and innovation, where relevant to.</a:t>
             </a:r>
-            <a:endParaRPr lang="en-US" sz="1550" dirty="0"/>
+            <a:endParaRPr lang="en-US" sz="1320" dirty="0"/>
           </a:p>
         </p:txBody>
       </p:sp>
@@ -11515,13 +11664,16 @@
           <a:ln/>
         </p:spPr>
         <p:txBody>
-          <a:bodyPr wrap="square" lIns="254" tIns="254" rIns="254" bIns="254" rtlCol="0" anchor="t">
+          <a:bodyPr wrap="square" lIns="508" tIns="508" rIns="508" bIns="508" rtlCol="0" anchor="t">
             <a:normAutofit/>
           </a:bodyPr>
           <a:lstStyle/>
           <a:p>
-            <a:r>
-              <a:rPr lang="en-US" sz="1380" dirty="0">
+            <a:pPr indent="0" marL="0">
+              <a:buNone/>
+            </a:pPr>
+            <a:r>
+              <a:rPr lang="en-US" sz="1220" dirty="0">
                 <a:solidFill>
                   <a:srgbClr val="17364A"/>
                 </a:solidFill>
@@ -11529,13 +11681,16 @@
                 <a:ea typeface="Aptos" pitchFamily="34" charset="-122"/>
                 <a:cs typeface="Aptos" pitchFamily="34" charset="-120"/>
               </a:rPr>
-              <a:t>OMB Memorandum M-24-10 on federal AI governance, risk management, and innovation, where.</a:t>
-            </a:r>
-            <a:endParaRPr lang="en-US" sz="1380" dirty="0"/>
-          </a:p>
-          <a:p>
-            <a:r>
-              <a:rPr lang="en-US" sz="1380" dirty="0">
+              <a:t>OMB Memorandum M-24-10 on federal AI governance, risk management,.</a:t>
+            </a:r>
+            <a:endParaRPr lang="en-US" sz="1220" dirty="0"/>
+          </a:p>
+          <a:p>
+            <a:pPr indent="0" marL="0">
+              <a:buNone/>
+            </a:pPr>
+            <a:r>
+              <a:rPr lang="en-US" sz="1220" dirty="0">
                 <a:solidFill>
                   <a:srgbClr val="17364A"/>
                 </a:solidFill>
@@ -11543,9 +11698,9 @@
                 <a:ea typeface="Aptos" pitchFamily="34" charset="-122"/>
                 <a:cs typeface="Aptos" pitchFamily="34" charset="-120"/>
               </a:rPr>
-              <a:t>Agency strategic plans, procurement policies, privacy policies, cybersecurity policies,.</a:t>
-            </a:r>
-            <a:endParaRPr lang="en-US" sz="1380" dirty="0"/>
+              <a:t>Agency strategic plans, procurement policies, privacy policies,.</a:t>
+            </a:r>
+            <a:endParaRPr lang="en-US" sz="1220" dirty="0"/>
           </a:p>
         </p:txBody>
       </p:sp>
@@ -11623,17 +11778,17 @@
         </p:nvSpPr>
         <p:spPr>
           <a:xfrm>
-            <a:off x="7799832" y="5001768"/>
-            <a:ext cx="3145536" cy="502920"/>
-          </a:xfrm>
-          <a:prstGeom prst="rect">
-            <a:avLst/>
-          </a:prstGeom>
-          <a:noFill/>
-          <a:ln/>
-        </p:spPr>
-        <p:txBody>
-          <a:bodyPr wrap="square" lIns="0" tIns="0" rIns="0" bIns="0" rtlCol="0" anchor="t">
+            <a:off x="7799832" y="4974336"/>
+            <a:ext cx="3145536" cy="576072"/>
+          </a:xfrm>
+          <a:prstGeom prst="rect">
+            <a:avLst/>
+          </a:prstGeom>
+          <a:noFill/>
+          <a:ln/>
+        </p:spPr>
+        <p:txBody>
+          <a:bodyPr wrap="square" lIns="254" tIns="254" rIns="254" bIns="254" rtlCol="0" anchor="t">
             <a:normAutofit/>
           </a:bodyPr>
           <a:lstStyle/>
@@ -11642,7 +11797,7 @@
               <a:buNone/>
             </a:pPr>
             <a:r>
-              <a:rPr lang="en-US" sz="1550" dirty="0">
+              <a:rPr lang="en-US" sz="1320" dirty="0">
                 <a:solidFill>
                   <a:srgbClr val="17364A"/>
                 </a:solidFill>
@@ -11650,9 +11805,9 @@
                 <a:ea typeface="Aptos" pitchFamily="34" charset="-122"/>
                 <a:cs typeface="Aptos" pitchFamily="34" charset="-120"/>
               </a:rPr>
-              <a:t>Connect the concept to public health purpose, responsible use, required safeguards, documentation, and the next action a department should take.</a:t>
-            </a:r>
-            <a:endParaRPr lang="en-US" sz="1550" dirty="0"/>
+              <a:t>Connect the concept to public health purpose, responsible use, required safeguards, documentation, and the next action a.</a:t>
+            </a:r>
+            <a:endParaRPr lang="en-US" sz="1320" dirty="0"/>
           </a:p>
         </p:txBody>
       </p:sp>
@@ -11953,63 +12108,75 @@
           <a:ln/>
         </p:spPr>
         <p:txBody>
-          <a:bodyPr wrap="square" lIns="635" tIns="635" rIns="635" bIns="635" rtlCol="0" anchor="t">
+          <a:bodyPr wrap="square" lIns="1016" tIns="1016" rIns="1016" bIns="1016" rtlCol="0" anchor="t">
             <a:normAutofit/>
           </a:bodyPr>
           <a:lstStyle/>
           <a:p>
+            <a:pPr indent="0" marL="0">
+              <a:buNone/>
+            </a:pPr>
             <a:r>
               <a:rPr lang="en-US" sz="1900" dirty="0">
                 <a:solidFill>
-                  <a:srgbClr val="17364A"/>
-                </a:solidFill>
-                <a:latin typeface="Aptos" pitchFamily="34" charset="0"/>
-                <a:ea typeface="Aptos" pitchFamily="34" charset="-122"/>
-                <a:cs typeface="Aptos" pitchFamily="34" charset="-120"/>
-              </a:rPr>
-              <a:t>Play 11: Build and Deploy AI Solutions - This lesson informs Play 11 by helping learners connect the lesson.</a:t>
+                  <a:srgbClr val="003A63"/>
+                </a:solidFill>
+                <a:latin typeface="Aptos" pitchFamily="34" charset="0"/>
+                <a:ea typeface="Aptos" pitchFamily="34" charset="-122"/>
+                <a:cs typeface="Aptos" pitchFamily="34" charset="-120"/>
+              </a:rPr>
+              <a:t>• Play 11: Build and Deploy AI Solutions - This lesson informs Play 11 by helping learners.</a:t>
             </a:r>
             <a:endParaRPr lang="en-US" sz="1900" dirty="0"/>
           </a:p>
           <a:p>
+            <a:pPr indent="0" marL="0">
+              <a:buNone/>
+            </a:pPr>
             <a:r>
               <a:rPr lang="en-US" sz="1900" dirty="0">
                 <a:solidFill>
-                  <a:srgbClr val="17364A"/>
-                </a:solidFill>
-                <a:latin typeface="Aptos" pitchFamily="34" charset="0"/>
-                <a:ea typeface="Aptos" pitchFamily="34" charset="-122"/>
-                <a:cs typeface="Aptos" pitchFamily="34" charset="-120"/>
-              </a:rPr>
-              <a:t>Play 2: Readiness Assessment - This lesson informs Play 2 by helping learners connect the lesson topic to.</a:t>
+                  <a:srgbClr val="003A63"/>
+                </a:solidFill>
+                <a:latin typeface="Aptos" pitchFamily="34" charset="0"/>
+                <a:ea typeface="Aptos" pitchFamily="34" charset="-122"/>
+                <a:cs typeface="Aptos" pitchFamily="34" charset="-120"/>
+              </a:rPr>
+              <a:t>• Play 2: Readiness Assessment - This lesson informs Play 2 by helping learners connect the.</a:t>
             </a:r>
             <a:endParaRPr lang="en-US" sz="1900" dirty="0"/>
           </a:p>
           <a:p>
+            <a:pPr indent="0" marL="0">
+              <a:buNone/>
+            </a:pPr>
             <a:r>
               <a:rPr lang="en-US" sz="1900" dirty="0">
                 <a:solidFill>
-                  <a:srgbClr val="17364A"/>
-                </a:solidFill>
-                <a:latin typeface="Aptos" pitchFamily="34" charset="0"/>
-                <a:ea typeface="Aptos" pitchFamily="34" charset="-122"/>
-                <a:cs typeface="Aptos" pitchFamily="34" charset="-120"/>
-              </a:rPr>
-              <a:t>Play 3: Establish AI Governance - This lesson informs Play 3 by helping learners connect the lesson topic to.</a:t>
+                  <a:srgbClr val="003A63"/>
+                </a:solidFill>
+                <a:latin typeface="Aptos" pitchFamily="34" charset="0"/>
+                <a:ea typeface="Aptos" pitchFamily="34" charset="-122"/>
+                <a:cs typeface="Aptos" pitchFamily="34" charset="-120"/>
+              </a:rPr>
+              <a:t>• Play 3: Establish AI Governance - This lesson informs Play 3 by helping learners connect the.</a:t>
             </a:r>
             <a:endParaRPr lang="en-US" sz="1900" dirty="0"/>
           </a:p>
           <a:p>
+            <a:pPr indent="0" marL="0">
+              <a:buNone/>
+            </a:pPr>
             <a:r>
               <a:rPr lang="en-US" sz="1900" dirty="0">
                 <a:solidFill>
-                  <a:srgbClr val="17364A"/>
-                </a:solidFill>
-                <a:latin typeface="Aptos" pitchFamily="34" charset="0"/>
-                <a:ea typeface="Aptos" pitchFamily="34" charset="-122"/>
-                <a:cs typeface="Aptos" pitchFamily="34" charset="-120"/>
-              </a:rPr>
-              <a:t>Play 1: Vision &amp; Guardrails - This lesson informs Play 1 by helping learners connect the lesson topic to.</a:t>
+                  <a:srgbClr val="003A63"/>
+                </a:solidFill>
+                <a:latin typeface="Aptos" pitchFamily="34" charset="0"/>
+                <a:ea typeface="Aptos" pitchFamily="34" charset="-122"/>
+                <a:cs typeface="Aptos" pitchFamily="34" charset="-120"/>
+              </a:rPr>
+              <a:t>• Play 1: Vision &amp; Guardrails - This lesson informs Play 1 by helping learners connect the.</a:t>
             </a:r>
             <a:endParaRPr lang="en-US" sz="1900" dirty="0"/>
           </a:p>
@@ -12089,17 +12256,17 @@
         </p:nvSpPr>
         <p:spPr>
           <a:xfrm>
-            <a:off x="8211312" y="1920240"/>
-            <a:ext cx="2734056" cy="1463040"/>
-          </a:xfrm>
-          <a:prstGeom prst="rect">
-            <a:avLst/>
-          </a:prstGeom>
-          <a:noFill/>
-          <a:ln/>
-        </p:spPr>
-        <p:txBody>
-          <a:bodyPr wrap="square" lIns="0" tIns="0" rIns="0" bIns="0" rtlCol="0" anchor="t">
+            <a:off x="8211312" y="1892808"/>
+            <a:ext cx="2734056" cy="1536192"/>
+          </a:xfrm>
+          <a:prstGeom prst="rect">
+            <a:avLst/>
+          </a:prstGeom>
+          <a:noFill/>
+          <a:ln/>
+        </p:spPr>
+        <p:txBody>
+          <a:bodyPr wrap="square" lIns="254" tIns="254" rIns="254" bIns="254" rtlCol="0" anchor="t">
             <a:normAutofit/>
           </a:bodyPr>
           <a:lstStyle/>
@@ -12108,7 +12275,7 @@
               <a:buNone/>
             </a:pPr>
             <a:r>
-              <a:rPr lang="en-US" sz="1550" dirty="0">
+              <a:rPr lang="en-US" sz="1320" dirty="0">
                 <a:solidFill>
                   <a:srgbClr val="17364A"/>
                 </a:solidFill>
@@ -12116,9 +12283,9 @@
                 <a:ea typeface="Aptos" pitchFamily="34" charset="-122"/>
                 <a:cs typeface="Aptos" pitchFamily="34" charset="-120"/>
               </a:rPr>
-              <a:t>Use the related plays to identify decisions, participants, timing, approvals, and documentation needed for responsible implementation.</a:t>
-            </a:r>
-            <a:endParaRPr lang="en-US" sz="1550" dirty="0"/>
+              <a:t>Use the related plays to identify decisions, participants, timing, approvals, and documentation needed for responsible.</a:t>
+            </a:r>
+            <a:endParaRPr lang="en-US" sz="1320" dirty="0"/>
           </a:p>
         </p:txBody>
       </p:sp>
@@ -12206,13 +12373,16 @@
           <a:ln/>
         </p:spPr>
         <p:txBody>
-          <a:bodyPr wrap="square" lIns="254" tIns="254" rIns="254" bIns="254" rtlCol="0" anchor="t">
+          <a:bodyPr wrap="square" lIns="508" tIns="508" rIns="508" bIns="508" rtlCol="0" anchor="t">
             <a:normAutofit/>
           </a:bodyPr>
           <a:lstStyle/>
           <a:p>
-            <a:r>
-              <a:rPr lang="en-US" sz="1380" dirty="0">
+            <a:pPr indent="0" marL="0">
+              <a:buNone/>
+            </a:pPr>
+            <a:r>
+              <a:rPr lang="en-US" sz="1220" dirty="0">
                 <a:solidFill>
                   <a:srgbClr val="17364A"/>
                 </a:solidFill>
@@ -12222,11 +12392,14 @@
               </a:rPr>
               <a:t>Locate the decision point in the playbook sequence.</a:t>
             </a:r>
-            <a:endParaRPr lang="en-US" sz="1380" dirty="0"/>
-          </a:p>
-          <a:p>
-            <a:r>
-              <a:rPr lang="en-US" sz="1380" dirty="0">
+            <a:endParaRPr lang="en-US" sz="1220" dirty="0"/>
+          </a:p>
+          <a:p>
+            <a:pPr indent="0" marL="0">
+              <a:buNone/>
+            </a:pPr>
+            <a:r>
+              <a:rPr lang="en-US" sz="1220" dirty="0">
                 <a:solidFill>
                   <a:srgbClr val="17364A"/>
                 </a:solidFill>
@@ -12236,11 +12409,14 @@
               </a:rPr>
               <a:t>Identify who should participate in the work.</a:t>
             </a:r>
-            <a:endParaRPr lang="en-US" sz="1380" dirty="0"/>
-          </a:p>
-          <a:p>
-            <a:r>
-              <a:rPr lang="en-US" sz="1380" dirty="0">
+            <a:endParaRPr lang="en-US" sz="1220" dirty="0"/>
+          </a:p>
+          <a:p>
+            <a:pPr indent="0" marL="0">
+              <a:buNone/>
+            </a:pPr>
+            <a:r>
+              <a:rPr lang="en-US" sz="1220" dirty="0">
                 <a:solidFill>
                   <a:srgbClr val="17364A"/>
                 </a:solidFill>
@@ -12250,7 +12426,7 @@
               </a:rPr>
               <a:t>Document the review, approval, or implementation step.</a:t>
             </a:r>
-            <a:endParaRPr lang="en-US" sz="1380" dirty="0"/>
+            <a:endParaRPr lang="en-US" sz="1220" dirty="0"/>
           </a:p>
         </p:txBody>
       </p:sp>
@@ -12551,63 +12727,75 @@
           <a:ln/>
         </p:spPr>
         <p:txBody>
-          <a:bodyPr wrap="square" lIns="635" tIns="635" rIns="635" bIns="635" rtlCol="0" anchor="t">
+          <a:bodyPr wrap="square" lIns="1016" tIns="1016" rIns="1016" bIns="1016" rtlCol="0" anchor="t">
             <a:normAutofit/>
           </a:bodyPr>
           <a:lstStyle/>
           <a:p>
+            <a:pPr indent="0" marL="0">
+              <a:buNone/>
+            </a:pPr>
             <a:r>
               <a:rPr lang="en-US" sz="1850" dirty="0">
                 <a:solidFill>
-                  <a:srgbClr val="17364A"/>
-                </a:solidFill>
-                <a:latin typeface="Aptos" pitchFamily="34" charset="0"/>
-                <a:ea typeface="Aptos" pitchFamily="34" charset="-122"/>
-                <a:cs typeface="Aptos" pitchFamily="34" charset="-120"/>
-              </a:rPr>
-              <a:t>Tool 4: AI Policy Landscape Scan (Worksheet) - Use AI Policy Landscape Scan to translate this lesson into a.</a:t>
+                  <a:srgbClr val="003A63"/>
+                </a:solidFill>
+                <a:latin typeface="Aptos" pitchFamily="34" charset="0"/>
+                <a:ea typeface="Aptos" pitchFamily="34" charset="-122"/>
+                <a:cs typeface="Aptos" pitchFamily="34" charset="-120"/>
+              </a:rPr>
+              <a:t>• Tool 4: AI Policy Landscape Scan (Worksheet) - Use AI Policy Landscape Scan to translate this.</a:t>
             </a:r>
             <a:endParaRPr lang="en-US" sz="1850" dirty="0"/>
           </a:p>
           <a:p>
+            <a:pPr indent="0" marL="0">
+              <a:buNone/>
+            </a:pPr>
             <a:r>
               <a:rPr lang="en-US" sz="1850" dirty="0">
                 <a:solidFill>
-                  <a:srgbClr val="17364A"/>
-                </a:solidFill>
-                <a:latin typeface="Aptos" pitchFamily="34" charset="0"/>
-                <a:ea typeface="Aptos" pitchFamily="34" charset="-122"/>
-                <a:cs typeface="Aptos" pitchFamily="34" charset="-120"/>
-              </a:rPr>
-              <a:t>Tool 5: AI Environmental and Resource Impact Review (Checklist) - Use this tool to complete or strengthen.</a:t>
+                  <a:srgbClr val="003A63"/>
+                </a:solidFill>
+                <a:latin typeface="Aptos" pitchFamily="34" charset="0"/>
+                <a:ea typeface="Aptos" pitchFamily="34" charset="-122"/>
+                <a:cs typeface="Aptos" pitchFamily="34" charset="-120"/>
+              </a:rPr>
+              <a:t>• Tool 5: AI Environmental and Resource Impact Review (Checklist) - Use this tool to complete or.</a:t>
             </a:r>
             <a:endParaRPr lang="en-US" sz="1850" dirty="0"/>
           </a:p>
           <a:p>
+            <a:pPr indent="0" marL="0">
+              <a:buNone/>
+            </a:pPr>
             <a:r>
               <a:rPr lang="en-US" sz="1850" dirty="0">
                 <a:solidFill>
-                  <a:srgbClr val="17364A"/>
-                </a:solidFill>
-                <a:latin typeface="Aptos" pitchFamily="34" charset="0"/>
-                <a:ea typeface="Aptos" pitchFamily="34" charset="-122"/>
-                <a:cs typeface="Aptos" pitchFamily="34" charset="-120"/>
-              </a:rPr>
-              <a:t>Tool 6: Human-Centered AI Decision Rule Checklist (Checklist) - Use Human-Centered AI Decision Rule.</a:t>
+                  <a:srgbClr val="003A63"/>
+                </a:solidFill>
+                <a:latin typeface="Aptos" pitchFamily="34" charset="0"/>
+                <a:ea typeface="Aptos" pitchFamily="34" charset="-122"/>
+                <a:cs typeface="Aptos" pitchFamily="34" charset="-120"/>
+              </a:rPr>
+              <a:t>• Tool 6: Human-Centered AI Decision Rule Checklist (Checklist) - Use Human-Centered AI Decision.</a:t>
             </a:r>
             <a:endParaRPr lang="en-US" sz="1850" dirty="0"/>
           </a:p>
           <a:p>
+            <a:pPr indent="0" marL="0">
+              <a:buNone/>
+            </a:pPr>
             <a:r>
               <a:rPr lang="en-US" sz="1850" dirty="0">
                 <a:solidFill>
-                  <a:srgbClr val="17364A"/>
-                </a:solidFill>
-                <a:latin typeface="Aptos" pitchFamily="34" charset="0"/>
-                <a:ea typeface="Aptos" pitchFamily="34" charset="-122"/>
-                <a:cs typeface="Aptos" pitchFamily="34" charset="-120"/>
-              </a:rPr>
-              <a:t>Tool 8: AI Project Charter (Planning) - Use AI Project Charter to translate this lesson into a documented.</a:t>
+                  <a:srgbClr val="003A63"/>
+                </a:solidFill>
+                <a:latin typeface="Aptos" pitchFamily="34" charset="0"/>
+                <a:ea typeface="Aptos" pitchFamily="34" charset="-122"/>
+                <a:cs typeface="Aptos" pitchFamily="34" charset="-120"/>
+              </a:rPr>
+              <a:t>• Tool 8: AI Project Charter (Planning) - Use AI Project Charter to translate this lesson into a.</a:t>
             </a:r>
             <a:endParaRPr lang="en-US" sz="1850" dirty="0"/>
           </a:p>
@@ -12687,17 +12875,17 @@
         </p:nvSpPr>
         <p:spPr>
           <a:xfrm>
-            <a:off x="8211312" y="1920240"/>
-            <a:ext cx="2734056" cy="1463040"/>
-          </a:xfrm>
-          <a:prstGeom prst="rect">
-            <a:avLst/>
-          </a:prstGeom>
-          <a:noFill/>
-          <a:ln/>
-        </p:spPr>
-        <p:txBody>
-          <a:bodyPr wrap="square" lIns="0" tIns="0" rIns="0" bIns="0" rtlCol="0" anchor="t">
+            <a:off x="8211312" y="1892808"/>
+            <a:ext cx="2734056" cy="1536192"/>
+          </a:xfrm>
+          <a:prstGeom prst="rect">
+            <a:avLst/>
+          </a:prstGeom>
+          <a:noFill/>
+          <a:ln/>
+        </p:spPr>
+        <p:txBody>
+          <a:bodyPr wrap="square" lIns="254" tIns="254" rIns="254" bIns="254" rtlCol="0" anchor="t">
             <a:normAutofit/>
           </a:bodyPr>
           <a:lstStyle/>
@@ -12706,7 +12894,7 @@
               <a:buNone/>
             </a:pPr>
             <a:r>
-              <a:rPr lang="en-US" sz="1550" dirty="0">
+              <a:rPr lang="en-US" sz="1320" dirty="0">
                 <a:solidFill>
                   <a:srgbClr val="17364A"/>
                 </a:solidFill>
@@ -12714,9 +12902,9 @@
                 <a:ea typeface="Aptos" pitchFamily="34" charset="-122"/>
                 <a:cs typeface="Aptos" pitchFamily="34" charset="-120"/>
               </a:rPr>
-              <a:t>Use linked tools when your department needs a structured worksheet, template, checklist, review process, or documentation artifact.</a:t>
-            </a:r>
-            <a:endParaRPr lang="en-US" sz="1550" dirty="0"/>
+              <a:t>Use linked tools when your department needs a structured worksheet, template, checklist, review process, or.</a:t>
+            </a:r>
+            <a:endParaRPr lang="en-US" sz="1320" dirty="0"/>
           </a:p>
         </p:txBody>
       </p:sp>
@@ -12804,13 +12992,16 @@
           <a:ln/>
         </p:spPr>
         <p:txBody>
-          <a:bodyPr wrap="square" lIns="254" tIns="254" rIns="254" bIns="254" rtlCol="0" anchor="t">
+          <a:bodyPr wrap="square" lIns="508" tIns="508" rIns="508" bIns="508" rtlCol="0" anchor="t">
             <a:normAutofit/>
           </a:bodyPr>
           <a:lstStyle/>
           <a:p>
-            <a:r>
-              <a:rPr lang="en-US" sz="1380" dirty="0">
+            <a:pPr indent="0" marL="0">
+              <a:buNone/>
+            </a:pPr>
+            <a:r>
+              <a:rPr lang="en-US" sz="1220" dirty="0">
                 <a:solidFill>
                   <a:srgbClr val="17364A"/>
                 </a:solidFill>
@@ -12820,11 +13011,14 @@
               </a:rPr>
               <a:t>Use a tool when no comparable local process exists.</a:t>
             </a:r>
-            <a:endParaRPr lang="en-US" sz="1380" dirty="0"/>
-          </a:p>
-          <a:p>
-            <a:r>
-              <a:rPr lang="en-US" sz="1380" dirty="0">
+            <a:endParaRPr lang="en-US" sz="1220" dirty="0"/>
+          </a:p>
+          <a:p>
+            <a:pPr indent="0" marL="0">
+              <a:buNone/>
+            </a:pPr>
+            <a:r>
+              <a:rPr lang="en-US" sz="1220" dirty="0">
                 <a:solidFill>
                   <a:srgbClr val="17364A"/>
                 </a:solidFill>
@@ -12832,13 +13026,16 @@
                 <a:ea typeface="Aptos" pitchFamily="34" charset="-122"/>
                 <a:cs typeface="Aptos" pitchFamily="34" charset="-120"/>
               </a:rPr>
-              <a:t>Adapt existing department templates when they already fit the purpose.</a:t>
-            </a:r>
-            <a:endParaRPr lang="en-US" sz="1380" dirty="0"/>
-          </a:p>
-          <a:p>
-            <a:r>
-              <a:rPr lang="en-US" sz="1380" dirty="0">
+              <a:t>Adapt existing department templates when they already fit the.</a:t>
+            </a:r>
+            <a:endParaRPr lang="en-US" sz="1220" dirty="0"/>
+          </a:p>
+          <a:p>
+            <a:pPr indent="0" marL="0">
+              <a:buNone/>
+            </a:pPr>
+            <a:r>
+              <a:rPr lang="en-US" sz="1220" dirty="0">
                 <a:solidFill>
                   <a:srgbClr val="17364A"/>
                 </a:solidFill>
@@ -12848,7 +13045,7 @@
               </a:rPr>
               <a:t>Save the completed artifact as evidence of the decision.</a:t>
             </a:r>
-            <a:endParaRPr lang="en-US" sz="1380" dirty="0"/>
+            <a:endParaRPr lang="en-US" sz="1220" dirty="0"/>
           </a:p>
         </p:txBody>
       </p:sp>
@@ -13149,49 +13346,58 @@
           <a:ln/>
         </p:spPr>
         <p:txBody>
-          <a:bodyPr wrap="square" lIns="635" tIns="635" rIns="635" bIns="635" rtlCol="0" anchor="t">
+          <a:bodyPr wrap="square" lIns="1016" tIns="1016" rIns="1016" bIns="1016" rtlCol="0" anchor="t">
             <a:normAutofit/>
           </a:bodyPr>
           <a:lstStyle/>
           <a:p>
+            <a:pPr indent="0" marL="0">
+              <a:buNone/>
+            </a:pPr>
             <a:r>
               <a:rPr lang="en-US" sz="2100" dirty="0">
                 <a:solidFill>
-                  <a:srgbClr val="17364A"/>
-                </a:solidFill>
-                <a:latin typeface="Aptos" pitchFamily="34" charset="0"/>
-                <a:ea typeface="Aptos" pitchFamily="34" charset="-122"/>
-                <a:cs typeface="Aptos" pitchFamily="34" charset="-120"/>
-              </a:rPr>
-              <a:t>Identify the full cost components of AI implementation and operations.</a:t>
+                  <a:srgbClr val="003A63"/>
+                </a:solidFill>
+                <a:latin typeface="Aptos" pitchFamily="34" charset="0"/>
+                <a:ea typeface="Aptos" pitchFamily="34" charset="-122"/>
+                <a:cs typeface="Aptos" pitchFamily="34" charset="-120"/>
+              </a:rPr>
+              <a:t>• Identify the full cost components of AI implementation and operations.</a:t>
             </a:r>
             <a:endParaRPr lang="en-US" sz="2100" dirty="0"/>
           </a:p>
           <a:p>
+            <a:pPr indent="0" marL="0">
+              <a:buNone/>
+            </a:pPr>
             <a:r>
               <a:rPr lang="en-US" sz="2100" dirty="0">
                 <a:solidFill>
-                  <a:srgbClr val="17364A"/>
-                </a:solidFill>
-                <a:latin typeface="Aptos" pitchFamily="34" charset="0"/>
-                <a:ea typeface="Aptos" pitchFamily="34" charset="-122"/>
-                <a:cs typeface="Aptos" pitchFamily="34" charset="-120"/>
-              </a:rPr>
-              <a:t>Evaluate expected benefits in terms of public health value, workflow improvement, equity, quality,.</a:t>
+                  <a:srgbClr val="003A63"/>
+                </a:solidFill>
+                <a:latin typeface="Aptos" pitchFamily="34" charset="0"/>
+                <a:ea typeface="Aptos" pitchFamily="34" charset="-122"/>
+                <a:cs typeface="Aptos" pitchFamily="34" charset="-120"/>
+              </a:rPr>
+              <a:t>• Evaluate expected benefits in terms of public health value, workflow improvement, equity,.</a:t>
             </a:r>
             <a:endParaRPr lang="en-US" sz="2100" dirty="0"/>
           </a:p>
           <a:p>
+            <a:pPr indent="0" marL="0">
+              <a:buNone/>
+            </a:pPr>
             <a:r>
               <a:rPr lang="en-US" sz="2100" dirty="0">
                 <a:solidFill>
-                  <a:srgbClr val="17364A"/>
-                </a:solidFill>
-                <a:latin typeface="Aptos" pitchFamily="34" charset="0"/>
-                <a:ea typeface="Aptos" pitchFamily="34" charset="-122"/>
-                <a:cs typeface="Aptos" pitchFamily="34" charset="-120"/>
-              </a:rPr>
-              <a:t>Distinguish between a vendor demonstration and a credible business case.</a:t>
+                  <a:srgbClr val="003A63"/>
+                </a:solidFill>
+                <a:latin typeface="Aptos" pitchFamily="34" charset="0"/>
+                <a:ea typeface="Aptos" pitchFamily="34" charset="-122"/>
+                <a:cs typeface="Aptos" pitchFamily="34" charset="-120"/>
+              </a:rPr>
+              <a:t>• Distinguish between a vendor demonstration and a credible business case.</a:t>
             </a:r>
             <a:endParaRPr lang="en-US" sz="2100" dirty="0"/>
           </a:p>
@@ -13271,17 +13477,17 @@
         </p:nvSpPr>
         <p:spPr>
           <a:xfrm>
-            <a:off x="7799832" y="1828800"/>
-            <a:ext cx="3145536" cy="685800"/>
-          </a:xfrm>
-          <a:prstGeom prst="rect">
-            <a:avLst/>
-          </a:prstGeom>
-          <a:noFill/>
-          <a:ln/>
-        </p:spPr>
-        <p:txBody>
-          <a:bodyPr wrap="square" lIns="0" tIns="0" rIns="0" bIns="0" rtlCol="0" anchor="t">
+            <a:off x="7799832" y="1801368"/>
+            <a:ext cx="3145536" cy="758952"/>
+          </a:xfrm>
+          <a:prstGeom prst="rect">
+            <a:avLst/>
+          </a:prstGeom>
+          <a:noFill/>
+          <a:ln/>
+        </p:spPr>
+        <p:txBody>
+          <a:bodyPr wrap="square" lIns="254" tIns="254" rIns="254" bIns="254" rtlCol="0" anchor="t">
             <a:normAutofit/>
           </a:bodyPr>
           <a:lstStyle/>
@@ -13290,7 +13496,7 @@
               <a:buNone/>
             </a:pPr>
             <a:r>
-              <a:rPr lang="en-US" sz="1550" dirty="0">
+              <a:rPr lang="en-US" sz="1320" dirty="0">
                 <a:solidFill>
                   <a:srgbClr val="17364A"/>
                 </a:solidFill>
@@ -13300,7 +13506,7 @@
               </a:rPr>
               <a:t>Identify the full cost components of AI implementation and operations.</a:t>
             </a:r>
-            <a:endParaRPr lang="en-US" sz="1550" dirty="0"/>
+            <a:endParaRPr lang="en-US" sz="1320" dirty="0"/>
           </a:p>
         </p:txBody>
       </p:sp>
@@ -13388,13 +13594,16 @@
           <a:ln/>
         </p:spPr>
         <p:txBody>
-          <a:bodyPr wrap="square" lIns="254" tIns="254" rIns="254" bIns="254" rtlCol="0" anchor="t">
+          <a:bodyPr wrap="square" lIns="508" tIns="508" rIns="508" bIns="508" rtlCol="0" anchor="t">
             <a:normAutofit/>
           </a:bodyPr>
           <a:lstStyle/>
           <a:p>
-            <a:r>
-              <a:rPr lang="en-US" sz="1380" dirty="0">
+            <a:pPr indent="0" marL="0">
+              <a:buNone/>
+            </a:pPr>
+            <a:r>
+              <a:rPr lang="en-US" sz="1220" dirty="0">
                 <a:solidFill>
                   <a:srgbClr val="17364A"/>
                 </a:solidFill>
@@ -13402,13 +13611,16 @@
                 <a:ea typeface="Aptos" pitchFamily="34" charset="-122"/>
                 <a:cs typeface="Aptos" pitchFamily="34" charset="-120"/>
               </a:rPr>
-              <a:t>Evaluate expected benefits in terms of public health value, workflow improvement, equity,.</a:t>
-            </a:r>
-            <a:endParaRPr lang="en-US" sz="1380" dirty="0"/>
-          </a:p>
-          <a:p>
-            <a:r>
-              <a:rPr lang="en-US" sz="1380" dirty="0">
+              <a:t>Evaluate expected benefits in terms of public health value,.</a:t>
+            </a:r>
+            <a:endParaRPr lang="en-US" sz="1220" dirty="0"/>
+          </a:p>
+          <a:p>
+            <a:pPr indent="0" marL="0">
+              <a:buNone/>
+            </a:pPr>
+            <a:r>
+              <a:rPr lang="en-US" sz="1220" dirty="0">
                 <a:solidFill>
                   <a:srgbClr val="17364A"/>
                 </a:solidFill>
@@ -13416,13 +13628,16 @@
                 <a:ea typeface="Aptos" pitchFamily="34" charset="-122"/>
                 <a:cs typeface="Aptos" pitchFamily="34" charset="-120"/>
               </a:rPr>
-              <a:t>Develop business case questions for AI procurement or internal development.</a:t>
-            </a:r>
-            <a:endParaRPr lang="en-US" sz="1380" dirty="0"/>
-          </a:p>
-          <a:p>
-            <a:r>
-              <a:rPr lang="en-US" sz="1380" dirty="0">
+              <a:t>Develop business case questions for AI procurement or internal.</a:t>
+            </a:r>
+            <a:endParaRPr lang="en-US" sz="1220" dirty="0"/>
+          </a:p>
+          <a:p>
+            <a:pPr indent="0" marL="0">
+              <a:buNone/>
+            </a:pPr>
+            <a:r>
+              <a:rPr lang="en-US" sz="1220" dirty="0">
                 <a:solidFill>
                   <a:srgbClr val="17364A"/>
                 </a:solidFill>
@@ -13432,7 +13647,7 @@
               </a:rPr>
               <a:t>Produce an AI business case review worksheet.</a:t>
             </a:r>
-            <a:endParaRPr lang="en-US" sz="1380" dirty="0"/>
+            <a:endParaRPr lang="en-US" sz="1220" dirty="0"/>
           </a:p>
         </p:txBody>
       </p:sp>
@@ -13510,17 +13725,17 @@
         </p:nvSpPr>
         <p:spPr>
           <a:xfrm>
-            <a:off x="7799832" y="5001768"/>
-            <a:ext cx="3145536" cy="502920"/>
-          </a:xfrm>
-          <a:prstGeom prst="rect">
-            <a:avLst/>
-          </a:prstGeom>
-          <a:noFill/>
-          <a:ln/>
-        </p:spPr>
-        <p:txBody>
-          <a:bodyPr wrap="square" lIns="0" tIns="0" rIns="0" bIns="0" rtlCol="0" anchor="t">
+            <a:off x="7799832" y="4974336"/>
+            <a:ext cx="3145536" cy="576072"/>
+          </a:xfrm>
+          <a:prstGeom prst="rect">
+            <a:avLst/>
+          </a:prstGeom>
+          <a:noFill/>
+          <a:ln/>
+        </p:spPr>
+        <p:txBody>
+          <a:bodyPr wrap="square" lIns="254" tIns="254" rIns="254" bIns="254" rtlCol="0" anchor="t">
             <a:normAutofit/>
           </a:bodyPr>
           <a:lstStyle/>
@@ -13529,7 +13744,7 @@
               <a:buNone/>
             </a:pPr>
             <a:r>
-              <a:rPr lang="en-US" sz="1550" dirty="0">
+              <a:rPr lang="en-US" sz="1320" dirty="0">
                 <a:solidFill>
                   <a:srgbClr val="17364A"/>
                 </a:solidFill>
@@ -13537,9 +13752,9 @@
                 <a:ea typeface="Aptos" pitchFamily="34" charset="-122"/>
                 <a:cs typeface="Aptos" pitchFamily="34" charset="-120"/>
               </a:rPr>
-              <a:t>Use the assignment to test whether you can explain the concept, apply it to a realistic public health situation, and identify what would need review before the work moves forward.</a:t>
-            </a:r>
-            <a:endParaRPr lang="en-US" sz="1550" dirty="0"/>
+              <a:t>Use the assignment to test whether you can explain the concept, apply it to a realistic public health situation, and.</a:t>
+            </a:r>
+            <a:endParaRPr lang="en-US" sz="1320" dirty="0"/>
           </a:p>
         </p:txBody>
       </p:sp>
@@ -13840,49 +14055,58 @@
           <a:ln/>
         </p:spPr>
         <p:txBody>
-          <a:bodyPr wrap="square" lIns="635" tIns="635" rIns="635" bIns="635" rtlCol="0" anchor="t">
+          <a:bodyPr wrap="square" lIns="1016" tIns="1016" rIns="1016" bIns="1016" rtlCol="0" anchor="t">
             <a:normAutofit/>
           </a:bodyPr>
           <a:lstStyle/>
           <a:p>
+            <a:pPr indent="0" marL="0">
+              <a:buNone/>
+            </a:pPr>
             <a:r>
               <a:rPr lang="en-US" sz="2100" dirty="0">
                 <a:solidFill>
-                  <a:srgbClr val="17364A"/>
-                </a:solidFill>
-                <a:latin typeface="Aptos" pitchFamily="34" charset="0"/>
-                <a:ea typeface="Aptos" pitchFamily="34" charset="-122"/>
-                <a:cs typeface="Aptos" pitchFamily="34" charset="-120"/>
-              </a:rPr>
-              <a:t>AI investments compete with many other public health priorities.</a:t>
+                  <a:srgbClr val="003A63"/>
+                </a:solidFill>
+                <a:latin typeface="Aptos" pitchFamily="34" charset="0"/>
+                <a:ea typeface="Aptos" pitchFamily="34" charset="-122"/>
+                <a:cs typeface="Aptos" pitchFamily="34" charset="-120"/>
+              </a:rPr>
+              <a:t>• AI investments compete with many other public health priorities.</a:t>
             </a:r>
             <a:endParaRPr lang="en-US" sz="2100" dirty="0"/>
           </a:p>
           <a:p>
+            <a:pPr indent="0" marL="0">
+              <a:buNone/>
+            </a:pPr>
             <a:r>
               <a:rPr lang="en-US" sz="2100" dirty="0">
                 <a:solidFill>
-                  <a:srgbClr val="17364A"/>
-                </a:solidFill>
-                <a:latin typeface="Aptos" pitchFamily="34" charset="0"/>
-                <a:ea typeface="Aptos" pitchFamily="34" charset="-122"/>
-                <a:cs typeface="Aptos" pitchFamily="34" charset="-120"/>
-              </a:rPr>
-              <a:t>Leaders need a disciplined way to decide when AI is worth funding, what costs must be considered, and.</a:t>
+                  <a:srgbClr val="003A63"/>
+                </a:solidFill>
+                <a:latin typeface="Aptos" pitchFamily="34" charset="0"/>
+                <a:ea typeface="Aptos" pitchFamily="34" charset="-122"/>
+                <a:cs typeface="Aptos" pitchFamily="34" charset="-120"/>
+              </a:rPr>
+              <a:t>• Leaders need a disciplined way to decide when AI is worth funding, what costs must be.</a:t>
             </a:r>
             <a:endParaRPr lang="en-US" sz="2100" dirty="0"/>
           </a:p>
           <a:p>
+            <a:pPr indent="0" marL="0">
+              <a:buNone/>
+            </a:pPr>
             <a:r>
               <a:rPr lang="en-US" sz="2100" dirty="0">
                 <a:solidFill>
-                  <a:srgbClr val="17364A"/>
-                </a:solidFill>
-                <a:latin typeface="Aptos" pitchFamily="34" charset="0"/>
-                <a:ea typeface="Aptos" pitchFamily="34" charset="-122"/>
-                <a:cs typeface="Aptos" pitchFamily="34" charset="-120"/>
-              </a:rPr>
-              <a:t>A business case review helps agencies avoid buying tools that are impressive in demonstrations but weak.</a:t>
+                  <a:srgbClr val="003A63"/>
+                </a:solidFill>
+                <a:latin typeface="Aptos" pitchFamily="34" charset="0"/>
+                <a:ea typeface="Aptos" pitchFamily="34" charset="-122"/>
+                <a:cs typeface="Aptos" pitchFamily="34" charset="-120"/>
+              </a:rPr>
+              <a:t>• A business case review helps agencies avoid buying tools that are impressive in demonstrations.</a:t>
             </a:r>
             <a:endParaRPr lang="en-US" sz="2100" dirty="0"/>
           </a:p>
@@ -13962,17 +14186,17 @@
         </p:nvSpPr>
         <p:spPr>
           <a:xfrm>
-            <a:off x="7799832" y="1828800"/>
-            <a:ext cx="3145536" cy="685800"/>
-          </a:xfrm>
-          <a:prstGeom prst="rect">
-            <a:avLst/>
-          </a:prstGeom>
-          <a:noFill/>
-          <a:ln/>
-        </p:spPr>
-        <p:txBody>
-          <a:bodyPr wrap="square" lIns="0" tIns="0" rIns="0" bIns="0" rtlCol="0" anchor="t">
+            <a:off x="7799832" y="1801368"/>
+            <a:ext cx="3145536" cy="758952"/>
+          </a:xfrm>
+          <a:prstGeom prst="rect">
+            <a:avLst/>
+          </a:prstGeom>
+          <a:noFill/>
+          <a:ln/>
+        </p:spPr>
+        <p:txBody>
+          <a:bodyPr wrap="square" lIns="254" tIns="254" rIns="254" bIns="254" rtlCol="0" anchor="t">
             <a:normAutofit/>
           </a:bodyPr>
           <a:lstStyle/>
@@ -13981,7 +14205,7 @@
               <a:buNone/>
             </a:pPr>
             <a:r>
-              <a:rPr lang="en-US" sz="1550" dirty="0">
+              <a:rPr lang="en-US" sz="1320" dirty="0">
                 <a:solidFill>
                   <a:srgbClr val="17364A"/>
                 </a:solidFill>
@@ -13991,7 +14215,7 @@
               </a:rPr>
               <a:t>AI investments compete with many other public health priorities.</a:t>
             </a:r>
-            <a:endParaRPr lang="en-US" sz="1550" dirty="0"/>
+            <a:endParaRPr lang="en-US" sz="1320" dirty="0"/>
           </a:p>
         </p:txBody>
       </p:sp>
@@ -14079,13 +14303,16 @@
           <a:ln/>
         </p:spPr>
         <p:txBody>
-          <a:bodyPr wrap="square" lIns="254" tIns="254" rIns="254" bIns="254" rtlCol="0" anchor="t">
+          <a:bodyPr wrap="square" lIns="508" tIns="508" rIns="508" bIns="508" rtlCol="0" anchor="t">
             <a:normAutofit/>
           </a:bodyPr>
           <a:lstStyle/>
           <a:p>
-            <a:r>
-              <a:rPr lang="en-US" sz="1380" dirty="0">
+            <a:pPr indent="0" marL="0">
+              <a:buNone/>
+            </a:pPr>
+            <a:r>
+              <a:rPr lang="en-US" sz="1220" dirty="0">
                 <a:solidFill>
                   <a:srgbClr val="17364A"/>
                 </a:solidFill>
@@ -14093,13 +14320,16 @@
                 <a:ea typeface="Aptos" pitchFamily="34" charset="-122"/>
                 <a:cs typeface="Aptos" pitchFamily="34" charset="-120"/>
               </a:rPr>
-              <a:t>Leaders need a disciplined way to decide when AI is worth funding, what costs must be.</a:t>
-            </a:r>
-            <a:endParaRPr lang="en-US" sz="1380" dirty="0"/>
-          </a:p>
-          <a:p>
-            <a:r>
-              <a:rPr lang="en-US" sz="1380" dirty="0">
+              <a:t>Leaders need a disciplined way to decide when AI is worth funding,.</a:t>
+            </a:r>
+            <a:endParaRPr lang="en-US" sz="1220" dirty="0"/>
+          </a:p>
+          <a:p>
+            <a:pPr indent="0" marL="0">
+              <a:buNone/>
+            </a:pPr>
+            <a:r>
+              <a:rPr lang="en-US" sz="1220" dirty="0">
                 <a:solidFill>
                   <a:srgbClr val="17364A"/>
                 </a:solidFill>
@@ -14107,13 +14337,16 @@
                 <a:ea typeface="Aptos" pitchFamily="34" charset="-122"/>
                 <a:cs typeface="Aptos" pitchFamily="34" charset="-120"/>
               </a:rPr>
-              <a:t>A business case review helps agencies avoid buying tools that are impressive in.</a:t>
-            </a:r>
-            <a:endParaRPr lang="en-US" sz="1380" dirty="0"/>
-          </a:p>
-          <a:p>
-            <a:r>
-              <a:rPr lang="en-US" sz="1380" dirty="0">
+              <a:t>A business case review helps agencies avoid buying tools that are.</a:t>
+            </a:r>
+            <a:endParaRPr lang="en-US" sz="1220" dirty="0"/>
+          </a:p>
+          <a:p>
+            <a:pPr indent="0" marL="0">
+              <a:buNone/>
+            </a:pPr>
+            <a:r>
+              <a:rPr lang="en-US" sz="1220" dirty="0">
                 <a:solidFill>
                   <a:srgbClr val="17364A"/>
                 </a:solidFill>
@@ -14121,9 +14354,9 @@
                 <a:ea typeface="Aptos" pitchFamily="34" charset="-122"/>
                 <a:cs typeface="Aptos" pitchFamily="34" charset="-120"/>
               </a:rPr>
-              <a:t>This module teaches leaders to evaluate AI investments across cost, value, readiness,.</a:t>
-            </a:r>
-            <a:endParaRPr lang="en-US" sz="1380" dirty="0"/>
+              <a:t>This module teaches leaders to evaluate AI investments across.</a:t>
+            </a:r>
+            <a:endParaRPr lang="en-US" sz="1220" dirty="0"/>
           </a:p>
         </p:txBody>
       </p:sp>
@@ -14201,17 +14434,17 @@
         </p:nvSpPr>
         <p:spPr>
           <a:xfrm>
-            <a:off x="7799832" y="5001768"/>
-            <a:ext cx="3145536" cy="502920"/>
-          </a:xfrm>
-          <a:prstGeom prst="rect">
-            <a:avLst/>
-          </a:prstGeom>
-          <a:noFill/>
-          <a:ln/>
-        </p:spPr>
-        <p:txBody>
-          <a:bodyPr wrap="square" lIns="0" tIns="0" rIns="0" bIns="0" rtlCol="0" anchor="t">
+            <a:off x="7799832" y="4974336"/>
+            <a:ext cx="3145536" cy="576072"/>
+          </a:xfrm>
+          <a:prstGeom prst="rect">
+            <a:avLst/>
+          </a:prstGeom>
+          <a:noFill/>
+          <a:ln/>
+        </p:spPr>
+        <p:txBody>
+          <a:bodyPr wrap="square" lIns="254" tIns="254" rIns="254" bIns="254" rtlCol="0" anchor="t">
             <a:normAutofit/>
           </a:bodyPr>
           <a:lstStyle/>
@@ -14220,7 +14453,7 @@
               <a:buNone/>
             </a:pPr>
             <a:r>
-              <a:rPr lang="en-US" sz="1550" dirty="0">
+              <a:rPr lang="en-US" sz="1320" dirty="0">
                 <a:solidFill>
                   <a:srgbClr val="17364A"/>
                 </a:solidFill>
@@ -14228,9 +14461,9 @@
                 <a:ea typeface="Aptos" pitchFamily="34" charset="-122"/>
                 <a:cs typeface="Aptos" pitchFamily="34" charset="-120"/>
               </a:rPr>
-              <a:t>Connect the concept to public health purpose, responsible use, required safeguards, documentation, and the next action a department should take.</a:t>
-            </a:r>
-            <a:endParaRPr lang="en-US" sz="1550" dirty="0"/>
+              <a:t>Connect the concept to public health purpose, responsible use, required safeguards, documentation, and the next action a.</a:t>
+            </a:r>
+            <a:endParaRPr lang="en-US" sz="1320" dirty="0"/>
           </a:p>
         </p:txBody>
       </p:sp>
@@ -14531,49 +14764,58 @@
           <a:ln/>
         </p:spPr>
         <p:txBody>
-          <a:bodyPr wrap="square" lIns="635" tIns="635" rIns="635" bIns="635" rtlCol="0" anchor="t">
+          <a:bodyPr wrap="square" lIns="1016" tIns="1016" rIns="1016" bIns="1016" rtlCol="0" anchor="t">
             <a:normAutofit/>
           </a:bodyPr>
           <a:lstStyle/>
           <a:p>
+            <a:pPr indent="0" marL="0">
+              <a:buNone/>
+            </a:pPr>
             <a:r>
               <a:rPr lang="en-US" sz="2100" dirty="0">
                 <a:solidFill>
-                  <a:srgbClr val="17364A"/>
-                </a:solidFill>
-                <a:latin typeface="Aptos" pitchFamily="34" charset="0"/>
-                <a:ea typeface="Aptos" pitchFamily="34" charset="-122"/>
-                <a:cs typeface="Aptos" pitchFamily="34" charset="-120"/>
-              </a:rPr>
-              <a:t>This national-level module is intended for training and planning purposes.</a:t>
+                  <a:srgbClr val="003A63"/>
+                </a:solidFill>
+                <a:latin typeface="Aptos" pitchFamily="34" charset="0"/>
+                <a:ea typeface="Aptos" pitchFamily="34" charset="-122"/>
+                <a:cs typeface="Aptos" pitchFamily="34" charset="-120"/>
+              </a:rPr>
+              <a:t>• This national-level module is intended for training and planning purposes.</a:t>
             </a:r>
             <a:endParaRPr lang="en-US" sz="2100" dirty="0"/>
           </a:p>
           <a:p>
+            <a:pPr indent="0" marL="0">
+              <a:buNone/>
+            </a:pPr>
             <a:r>
               <a:rPr lang="en-US" sz="2100" dirty="0">
                 <a:solidFill>
-                  <a:srgbClr val="17364A"/>
-                </a:solidFill>
-                <a:latin typeface="Aptos" pitchFamily="34" charset="0"/>
-                <a:ea typeface="Aptos" pitchFamily="34" charset="-122"/>
-                <a:cs typeface="Aptos" pitchFamily="34" charset="-120"/>
-              </a:rPr>
-              <a:t>It does not replace legal, privacy, procurement, civil rights, records, or agency policy review.</a:t>
+                  <a:srgbClr val="003A63"/>
+                </a:solidFill>
+                <a:latin typeface="Aptos" pitchFamily="34" charset="0"/>
+                <a:ea typeface="Aptos" pitchFamily="34" charset="-122"/>
+                <a:cs typeface="Aptos" pitchFamily="34" charset="-120"/>
+              </a:rPr>
+              <a:t>• It does not replace legal, privacy, procurement, civil rights, records, or agency policy review.</a:t>
             </a:r>
             <a:endParaRPr lang="en-US" sz="2100" dirty="0"/>
           </a:p>
           <a:p>
+            <a:pPr indent="0" marL="0">
+              <a:buNone/>
+            </a:pPr>
             <a:r>
               <a:rPr lang="en-US" sz="2100" dirty="0">
                 <a:solidFill>
-                  <a:srgbClr val="17364A"/>
-                </a:solidFill>
-                <a:latin typeface="Aptos" pitchFamily="34" charset="0"/>
-                <a:ea typeface="Aptos" pitchFamily="34" charset="-122"/>
-                <a:cs typeface="Aptos" pitchFamily="34" charset="-120"/>
-              </a:rPr>
-              <a:t>Learners should confirm applicable requirements in their own jurisdiction and organization before.</a:t>
+                  <a:srgbClr val="003A63"/>
+                </a:solidFill>
+                <a:latin typeface="Aptos" pitchFamily="34" charset="0"/>
+                <a:ea typeface="Aptos" pitchFamily="34" charset="-122"/>
+                <a:cs typeface="Aptos" pitchFamily="34" charset="-120"/>
+              </a:rPr>
+              <a:t>• Learners should confirm applicable requirements in their own jurisdiction and organization.</a:t>
             </a:r>
             <a:endParaRPr lang="en-US" sz="2100" dirty="0"/>
           </a:p>
@@ -14653,17 +14895,17 @@
         </p:nvSpPr>
         <p:spPr>
           <a:xfrm>
-            <a:off x="7799832" y="1828800"/>
-            <a:ext cx="3145536" cy="685800"/>
-          </a:xfrm>
-          <a:prstGeom prst="rect">
-            <a:avLst/>
-          </a:prstGeom>
-          <a:noFill/>
-          <a:ln/>
-        </p:spPr>
-        <p:txBody>
-          <a:bodyPr wrap="square" lIns="0" tIns="0" rIns="0" bIns="0" rtlCol="0" anchor="t">
+            <a:off x="7799832" y="1801368"/>
+            <a:ext cx="3145536" cy="758952"/>
+          </a:xfrm>
+          <a:prstGeom prst="rect">
+            <a:avLst/>
+          </a:prstGeom>
+          <a:noFill/>
+          <a:ln/>
+        </p:spPr>
+        <p:txBody>
+          <a:bodyPr wrap="square" lIns="254" tIns="254" rIns="254" bIns="254" rtlCol="0" anchor="t">
             <a:normAutofit/>
           </a:bodyPr>
           <a:lstStyle/>
@@ -14672,7 +14914,7 @@
               <a:buNone/>
             </a:pPr>
             <a:r>
-              <a:rPr lang="en-US" sz="1550" dirty="0">
+              <a:rPr lang="en-US" sz="1320" dirty="0">
                 <a:solidFill>
                   <a:srgbClr val="17364A"/>
                 </a:solidFill>
@@ -14682,7 +14924,7 @@
               </a:rPr>
               <a:t>This national-level module is intended for training and planning purposes.</a:t>
             </a:r>
-            <a:endParaRPr lang="en-US" sz="1550" dirty="0"/>
+            <a:endParaRPr lang="en-US" sz="1320" dirty="0"/>
           </a:p>
         </p:txBody>
       </p:sp>
@@ -14770,13 +15012,16 @@
           <a:ln/>
         </p:spPr>
         <p:txBody>
-          <a:bodyPr wrap="square" lIns="254" tIns="254" rIns="254" bIns="254" rtlCol="0" anchor="t">
+          <a:bodyPr wrap="square" lIns="508" tIns="508" rIns="508" bIns="508" rtlCol="0" anchor="t">
             <a:normAutofit/>
           </a:bodyPr>
           <a:lstStyle/>
           <a:p>
-            <a:r>
-              <a:rPr lang="en-US" sz="1380" dirty="0">
+            <a:pPr indent="0" marL="0">
+              <a:buNone/>
+            </a:pPr>
+            <a:r>
+              <a:rPr lang="en-US" sz="1220" dirty="0">
                 <a:solidFill>
                   <a:srgbClr val="17364A"/>
                 </a:solidFill>
@@ -14784,13 +15029,16 @@
                 <a:ea typeface="Aptos" pitchFamily="34" charset="-122"/>
                 <a:cs typeface="Aptos" pitchFamily="34" charset="-120"/>
               </a:rPr>
-              <a:t>This national-level module is intended for training and planning purposes.</a:t>
-            </a:r>
-            <a:endParaRPr lang="en-US" sz="1380" dirty="0"/>
-          </a:p>
-          <a:p>
-            <a:r>
-              <a:rPr lang="en-US" sz="1380" dirty="0">
+              <a:t>This national-level module is intended for training and planning.</a:t>
+            </a:r>
+            <a:endParaRPr lang="en-US" sz="1220" dirty="0"/>
+          </a:p>
+          <a:p>
+            <a:pPr indent="0" marL="0">
+              <a:buNone/>
+            </a:pPr>
+            <a:r>
+              <a:rPr lang="en-US" sz="1220" dirty="0">
                 <a:solidFill>
                   <a:srgbClr val="17364A"/>
                 </a:solidFill>
@@ -14798,13 +15046,16 @@
                 <a:ea typeface="Aptos" pitchFamily="34" charset="-122"/>
                 <a:cs typeface="Aptos" pitchFamily="34" charset="-120"/>
               </a:rPr>
-              <a:t>It does not replace legal, privacy, procurement, civil rights, records, or agency policy.</a:t>
-            </a:r>
-            <a:endParaRPr lang="en-US" sz="1380" dirty="0"/>
-          </a:p>
-          <a:p>
-            <a:r>
-              <a:rPr lang="en-US" sz="1380" dirty="0">
+              <a:t>It does not replace legal, privacy, procurement, civil rights,.</a:t>
+            </a:r>
+            <a:endParaRPr lang="en-US" sz="1220" dirty="0"/>
+          </a:p>
+          <a:p>
+            <a:pPr indent="0" marL="0">
+              <a:buNone/>
+            </a:pPr>
+            <a:r>
+              <a:rPr lang="en-US" sz="1220" dirty="0">
                 <a:solidFill>
                   <a:srgbClr val="17364A"/>
                 </a:solidFill>
@@ -14812,9 +15063,9 @@
                 <a:ea typeface="Aptos" pitchFamily="34" charset="-122"/>
                 <a:cs typeface="Aptos" pitchFamily="34" charset="-120"/>
               </a:rPr>
-              <a:t>Learners should confirm applicable requirements in their own jurisdiction and organization.</a:t>
-            </a:r>
-            <a:endParaRPr lang="en-US" sz="1380" dirty="0"/>
+              <a:t>Learners should confirm applicable requirements in their own.</a:t>
+            </a:r>
+            <a:endParaRPr lang="en-US" sz="1220" dirty="0"/>
           </a:p>
         </p:txBody>
       </p:sp>
@@ -14892,17 +15143,17 @@
         </p:nvSpPr>
         <p:spPr>
           <a:xfrm>
-            <a:off x="7799832" y="5001768"/>
-            <a:ext cx="3145536" cy="502920"/>
-          </a:xfrm>
-          <a:prstGeom prst="rect">
-            <a:avLst/>
-          </a:prstGeom>
-          <a:noFill/>
-          <a:ln/>
-        </p:spPr>
-        <p:txBody>
-          <a:bodyPr wrap="square" lIns="0" tIns="0" rIns="0" bIns="0" rtlCol="0" anchor="t">
+            <a:off x="7799832" y="4974336"/>
+            <a:ext cx="3145536" cy="576072"/>
+          </a:xfrm>
+          <a:prstGeom prst="rect">
+            <a:avLst/>
+          </a:prstGeom>
+          <a:noFill/>
+          <a:ln/>
+        </p:spPr>
+        <p:txBody>
+          <a:bodyPr wrap="square" lIns="254" tIns="254" rIns="254" bIns="254" rtlCol="0" anchor="t">
             <a:normAutofit/>
           </a:bodyPr>
           <a:lstStyle/>
@@ -14911,7 +15162,7 @@
               <a:buNone/>
             </a:pPr>
             <a:r>
-              <a:rPr lang="en-US" sz="1550" dirty="0">
+              <a:rPr lang="en-US" sz="1320" dirty="0">
                 <a:solidFill>
                   <a:srgbClr val="17364A"/>
                 </a:solidFill>
@@ -14919,9 +15170,9 @@
                 <a:ea typeface="Aptos" pitchFamily="34" charset="-122"/>
                 <a:cs typeface="Aptos" pitchFamily="34" charset="-120"/>
               </a:rPr>
-              <a:t>Translate this concept into clear decision rights, review steps, documentation expectations, and escalation paths before an AI-supported workflow is approved.</a:t>
-            </a:r>
-            <a:endParaRPr lang="en-US" sz="1550" dirty="0"/>
+              <a:t>Translate this concept into clear decision rights, review steps, documentation expectations, and escalation paths before.</a:t>
+            </a:r>
+            <a:endParaRPr lang="en-US" sz="1320" dirty="0"/>
           </a:p>
         </p:txBody>
       </p:sp>
@@ -15222,49 +15473,58 @@
           <a:ln/>
         </p:spPr>
         <p:txBody>
-          <a:bodyPr wrap="square" lIns="635" tIns="635" rIns="635" bIns="635" rtlCol="0" anchor="t">
+          <a:bodyPr wrap="square" lIns="1016" tIns="1016" rIns="1016" bIns="1016" rtlCol="0" anchor="t">
             <a:normAutofit/>
           </a:bodyPr>
           <a:lstStyle/>
           <a:p>
+            <a:pPr indent="0" marL="0">
+              <a:buNone/>
+            </a:pPr>
             <a:r>
               <a:rPr lang="en-US" sz="2100" dirty="0">
                 <a:solidFill>
-                  <a:srgbClr val="17364A"/>
-                </a:solidFill>
-                <a:latin typeface="Aptos" pitchFamily="34" charset="0"/>
-                <a:ea typeface="Aptos" pitchFamily="34" charset="-122"/>
-                <a:cs typeface="Aptos" pitchFamily="34" charset="-120"/>
-              </a:rPr>
-              <a:t>Public health agencies often face short-term funding cycles and urgent operational needs.</a:t>
+                  <a:srgbClr val="003A63"/>
+                </a:solidFill>
+                <a:latin typeface="Aptos" pitchFamily="34" charset="0"/>
+                <a:ea typeface="Aptos" pitchFamily="34" charset="-122"/>
+                <a:cs typeface="Aptos" pitchFamily="34" charset="-120"/>
+              </a:rPr>
+              <a:t>• Public health agencies often face short-term funding cycles and urgent operational needs.</a:t>
             </a:r>
             <a:endParaRPr lang="en-US" sz="2100" dirty="0"/>
           </a:p>
           <a:p>
+            <a:pPr indent="0" marL="0">
+              <a:buNone/>
+            </a:pPr>
             <a:r>
               <a:rPr lang="en-US" sz="2100" dirty="0">
                 <a:solidFill>
-                  <a:srgbClr val="17364A"/>
-                </a:solidFill>
-                <a:latin typeface="Aptos" pitchFamily="34" charset="0"/>
-                <a:ea typeface="Aptos" pitchFamily="34" charset="-122"/>
-                <a:cs typeface="Aptos" pitchFamily="34" charset="-120"/>
-              </a:rPr>
-              <a:t>AI products may be marketed as quick solutions, but the true cost of responsible implementation is.</a:t>
+                  <a:srgbClr val="003A63"/>
+                </a:solidFill>
+                <a:latin typeface="Aptos" pitchFamily="34" charset="0"/>
+                <a:ea typeface="Aptos" pitchFamily="34" charset="-122"/>
+                <a:cs typeface="Aptos" pitchFamily="34" charset="-120"/>
+              </a:rPr>
+              <a:t>• AI products may be marketed as quick solutions, but the true cost of responsible.</a:t>
             </a:r>
             <a:endParaRPr lang="en-US" sz="2100" dirty="0"/>
           </a:p>
           <a:p>
+            <a:pPr indent="0" marL="0">
+              <a:buNone/>
+            </a:pPr>
             <a:r>
               <a:rPr lang="en-US" sz="2100" dirty="0">
                 <a:solidFill>
-                  <a:srgbClr val="17364A"/>
-                </a:solidFill>
-                <a:latin typeface="Aptos" pitchFamily="34" charset="0"/>
-                <a:ea typeface="Aptos" pitchFamily="34" charset="-122"/>
-                <a:cs typeface="Aptos" pitchFamily="34" charset="-120"/>
-              </a:rPr>
-              <a:t>Agencies may need to update data pipelines, configure security controls, develop validation plans,.</a:t>
+                  <a:srgbClr val="003A63"/>
+                </a:solidFill>
+                <a:latin typeface="Aptos" pitchFamily="34" charset="0"/>
+                <a:ea typeface="Aptos" pitchFamily="34" charset="-122"/>
+                <a:cs typeface="Aptos" pitchFamily="34" charset="-120"/>
+              </a:rPr>
+              <a:t>• Agencies may need to update data pipelines, configure security controls, develop validation.</a:t>
             </a:r>
             <a:endParaRPr lang="en-US" sz="2100" dirty="0"/>
           </a:p>
@@ -15344,17 +15604,17 @@
         </p:nvSpPr>
         <p:spPr>
           <a:xfrm>
-            <a:off x="7799832" y="1828800"/>
-            <a:ext cx="3145536" cy="685800"/>
-          </a:xfrm>
-          <a:prstGeom prst="rect">
-            <a:avLst/>
-          </a:prstGeom>
-          <a:noFill/>
-          <a:ln/>
-        </p:spPr>
-        <p:txBody>
-          <a:bodyPr wrap="square" lIns="0" tIns="0" rIns="0" bIns="0" rtlCol="0" anchor="t">
+            <a:off x="7799832" y="1801368"/>
+            <a:ext cx="3145536" cy="758952"/>
+          </a:xfrm>
+          <a:prstGeom prst="rect">
+            <a:avLst/>
+          </a:prstGeom>
+          <a:noFill/>
+          <a:ln/>
+        </p:spPr>
+        <p:txBody>
+          <a:bodyPr wrap="square" lIns="254" tIns="254" rIns="254" bIns="254" rtlCol="0" anchor="t">
             <a:normAutofit/>
           </a:bodyPr>
           <a:lstStyle/>
@@ -15363,7 +15623,7 @@
               <a:buNone/>
             </a:pPr>
             <a:r>
-              <a:rPr lang="en-US" sz="1550" dirty="0">
+              <a:rPr lang="en-US" sz="1320" dirty="0">
                 <a:solidFill>
                   <a:srgbClr val="17364A"/>
                 </a:solidFill>
@@ -15373,7 +15633,7 @@
               </a:rPr>
               <a:t>Public health agencies often face short-term funding cycles and urgent operational needs.</a:t>
             </a:r>
-            <a:endParaRPr lang="en-US" sz="1550" dirty="0"/>
+            <a:endParaRPr lang="en-US" sz="1320" dirty="0"/>
           </a:p>
         </p:txBody>
       </p:sp>
@@ -15461,13 +15721,16 @@
           <a:ln/>
         </p:spPr>
         <p:txBody>
-          <a:bodyPr wrap="square" lIns="254" tIns="254" rIns="254" bIns="254" rtlCol="0" anchor="t">
+          <a:bodyPr wrap="square" lIns="508" tIns="508" rIns="508" bIns="508" rtlCol="0" anchor="t">
             <a:normAutofit/>
           </a:bodyPr>
           <a:lstStyle/>
           <a:p>
-            <a:r>
-              <a:rPr lang="en-US" sz="1380" dirty="0">
+            <a:pPr indent="0" marL="0">
+              <a:buNone/>
+            </a:pPr>
+            <a:r>
+              <a:rPr lang="en-US" sz="1220" dirty="0">
                 <a:solidFill>
                   <a:srgbClr val="17364A"/>
                 </a:solidFill>
@@ -15475,13 +15738,16 @@
                 <a:ea typeface="Aptos" pitchFamily="34" charset="-122"/>
                 <a:cs typeface="Aptos" pitchFamily="34" charset="-120"/>
               </a:rPr>
-              <a:t>AI products may be marketed as quick solutions, but the true cost of responsible.</a:t>
-            </a:r>
-            <a:endParaRPr lang="en-US" sz="1380" dirty="0"/>
-          </a:p>
-          <a:p>
-            <a:r>
-              <a:rPr lang="en-US" sz="1380" dirty="0">
+              <a:t>AI products may be marketed as quick solutions, but the true cost.</a:t>
+            </a:r>
+            <a:endParaRPr lang="en-US" sz="1220" dirty="0"/>
+          </a:p>
+          <a:p>
+            <a:pPr indent="0" marL="0">
+              <a:buNone/>
+            </a:pPr>
+            <a:r>
+              <a:rPr lang="en-US" sz="1220" dirty="0">
                 <a:solidFill>
                   <a:srgbClr val="17364A"/>
                 </a:solidFill>
@@ -15489,13 +15755,16 @@
                 <a:ea typeface="Aptos" pitchFamily="34" charset="-122"/>
                 <a:cs typeface="Aptos" pitchFamily="34" charset="-120"/>
               </a:rPr>
-              <a:t>Agencies may need to update data pipelines, configure security controls, develop.</a:t>
-            </a:r>
-            <a:endParaRPr lang="en-US" sz="1380" dirty="0"/>
-          </a:p>
-          <a:p>
-            <a:r>
-              <a:rPr lang="en-US" sz="1380" dirty="0">
+              <a:t>Agencies may need to update data pipelines, configure security.</a:t>
+            </a:r>
+            <a:endParaRPr lang="en-US" sz="1220" dirty="0"/>
+          </a:p>
+          <a:p>
+            <a:pPr indent="0" marL="0">
+              <a:buNone/>
+            </a:pPr>
+            <a:r>
+              <a:rPr lang="en-US" sz="1220" dirty="0">
                 <a:solidFill>
                   <a:srgbClr val="17364A"/>
                 </a:solidFill>
@@ -15505,7 +15774,7 @@
               </a:rPr>
               <a:t>A strong business case also protects mission focus.</a:t>
             </a:r>
-            <a:endParaRPr lang="en-US" sz="1380" dirty="0"/>
+            <a:endParaRPr lang="en-US" sz="1220" dirty="0"/>
           </a:p>
         </p:txBody>
       </p:sp>
@@ -15583,17 +15852,17 @@
         </p:nvSpPr>
         <p:spPr>
           <a:xfrm>
-            <a:off x="7799832" y="5001768"/>
-            <a:ext cx="3145536" cy="502920"/>
-          </a:xfrm>
-          <a:prstGeom prst="rect">
-            <a:avLst/>
-          </a:prstGeom>
-          <a:noFill/>
-          <a:ln/>
-        </p:spPr>
-        <p:txBody>
-          <a:bodyPr wrap="square" lIns="0" tIns="0" rIns="0" bIns="0" rtlCol="0" anchor="t">
+            <a:off x="7799832" y="4974336"/>
+            <a:ext cx="3145536" cy="576072"/>
+          </a:xfrm>
+          <a:prstGeom prst="rect">
+            <a:avLst/>
+          </a:prstGeom>
+          <a:noFill/>
+          <a:ln/>
+        </p:spPr>
+        <p:txBody>
+          <a:bodyPr wrap="square" lIns="254" tIns="254" rIns="254" bIns="254" rtlCol="0" anchor="t">
             <a:normAutofit/>
           </a:bodyPr>
           <a:lstStyle/>
@@ -15602,7 +15871,7 @@
               <a:buNone/>
             </a:pPr>
             <a:r>
-              <a:rPr lang="en-US" sz="1550" dirty="0">
+              <a:rPr lang="en-US" sz="1320" dirty="0">
                 <a:solidFill>
                   <a:srgbClr val="17364A"/>
                 </a:solidFill>
@@ -15610,9 +15879,9 @@
                 <a:ea typeface="Aptos" pitchFamily="34" charset="-122"/>
                 <a:cs typeface="Aptos" pitchFamily="34" charset="-120"/>
               </a:rPr>
-              <a:t>Connect the concept to public health purpose, responsible use, required safeguards, documentation, and the next action a department should take.</a:t>
-            </a:r>
-            <a:endParaRPr lang="en-US" sz="1550" dirty="0"/>
+              <a:t>Connect the concept to public health purpose, responsible use, required safeguards, documentation, and the next action a.</a:t>
+            </a:r>
+            <a:endParaRPr lang="en-US" sz="1320" dirty="0"/>
           </a:p>
         </p:txBody>
       </p:sp>
@@ -15913,49 +16182,58 @@
           <a:ln/>
         </p:spPr>
         <p:txBody>
-          <a:bodyPr wrap="square" lIns="635" tIns="635" rIns="635" bIns="635" rtlCol="0" anchor="t">
+          <a:bodyPr wrap="square" lIns="1016" tIns="1016" rIns="1016" bIns="1016" rtlCol="0" anchor="t">
             <a:normAutofit/>
           </a:bodyPr>
           <a:lstStyle/>
           <a:p>
+            <a:pPr indent="0" marL="0">
+              <a:buNone/>
+            </a:pPr>
             <a:r>
               <a:rPr lang="en-US" sz="2100" dirty="0">
                 <a:solidFill>
-                  <a:srgbClr val="17364A"/>
-                </a:solidFill>
-                <a:latin typeface="Aptos" pitchFamily="34" charset="0"/>
-                <a:ea typeface="Aptos" pitchFamily="34" charset="-122"/>
-                <a:cs typeface="Aptos" pitchFamily="34" charset="-120"/>
-              </a:rPr>
-              <a:t>A vendor offers an AI tool that promises to reduce disease investigator workload by summarizing case.</a:t>
+                  <a:srgbClr val="003A63"/>
+                </a:solidFill>
+                <a:latin typeface="Aptos" pitchFamily="34" charset="0"/>
+                <a:ea typeface="Aptos" pitchFamily="34" charset="-122"/>
+                <a:cs typeface="Aptos" pitchFamily="34" charset="-120"/>
+              </a:rPr>
+              <a:t>• A vendor offers an AI tool that promises to reduce disease investigator workload by.</a:t>
             </a:r>
             <a:endParaRPr lang="en-US" sz="2100" dirty="0"/>
           </a:p>
           <a:p>
+            <a:pPr indent="0" marL="0">
+              <a:buNone/>
+            </a:pPr>
             <a:r>
               <a:rPr lang="en-US" sz="2100" dirty="0">
                 <a:solidFill>
-                  <a:srgbClr val="17364A"/>
-                </a:solidFill>
-                <a:latin typeface="Aptos" pitchFamily="34" charset="0"/>
-                <a:ea typeface="Aptos" pitchFamily="34" charset="-122"/>
-                <a:cs typeface="Aptos" pitchFamily="34" charset="-120"/>
-              </a:rPr>
-              <a:t>The annual license appears affordable, but the agency must also pay for integration with the.</a:t>
+                  <a:srgbClr val="003A63"/>
+                </a:solidFill>
+                <a:latin typeface="Aptos" pitchFamily="34" charset="0"/>
+                <a:ea typeface="Aptos" pitchFamily="34" charset="-122"/>
+                <a:cs typeface="Aptos" pitchFamily="34" charset="-120"/>
+              </a:rPr>
+              <a:t>• The annual license appears affordable, but the agency must also pay for integration with the.</a:t>
             </a:r>
             <a:endParaRPr lang="en-US" sz="2100" dirty="0"/>
           </a:p>
           <a:p>
+            <a:pPr indent="0" marL="0">
+              <a:buNone/>
+            </a:pPr>
             <a:r>
               <a:rPr lang="en-US" sz="2100" dirty="0">
                 <a:solidFill>
-                  <a:srgbClr val="17364A"/>
-                </a:solidFill>
-                <a:latin typeface="Aptos" pitchFamily="34" charset="0"/>
-                <a:ea typeface="Aptos" pitchFamily="34" charset="-122"/>
-                <a:cs typeface="Aptos" pitchFamily="34" charset="-120"/>
-              </a:rPr>
-              <a:t>If those costs are not considered, leadership may underestimate the investment required.</a:t>
+                  <a:srgbClr val="003A63"/>
+                </a:solidFill>
+                <a:latin typeface="Aptos" pitchFamily="34" charset="0"/>
+                <a:ea typeface="Aptos" pitchFamily="34" charset="-122"/>
+                <a:cs typeface="Aptos" pitchFamily="34" charset="-120"/>
+              </a:rPr>
+              <a:t>• If those costs are not considered, leadership may underestimate the investment required.</a:t>
             </a:r>
             <a:endParaRPr lang="en-US" sz="2100" dirty="0"/>
           </a:p>
@@ -16035,17 +16313,17 @@
         </p:nvSpPr>
         <p:spPr>
           <a:xfrm>
-            <a:off x="7799832" y="1828800"/>
-            <a:ext cx="3145536" cy="685800"/>
-          </a:xfrm>
-          <a:prstGeom prst="rect">
-            <a:avLst/>
-          </a:prstGeom>
-          <a:noFill/>
-          <a:ln/>
-        </p:spPr>
-        <p:txBody>
-          <a:bodyPr wrap="square" lIns="0" tIns="0" rIns="0" bIns="0" rtlCol="0" anchor="t">
+            <a:off x="7799832" y="1801368"/>
+            <a:ext cx="3145536" cy="758952"/>
+          </a:xfrm>
+          <a:prstGeom prst="rect">
+            <a:avLst/>
+          </a:prstGeom>
+          <a:noFill/>
+          <a:ln/>
+        </p:spPr>
+        <p:txBody>
+          <a:bodyPr wrap="square" lIns="254" tIns="254" rIns="254" bIns="254" rtlCol="0" anchor="t">
             <a:normAutofit/>
           </a:bodyPr>
           <a:lstStyle/>
@@ -16054,7 +16332,7 @@
               <a:buNone/>
             </a:pPr>
             <a:r>
-              <a:rPr lang="en-US" sz="1550" dirty="0">
+              <a:rPr lang="en-US" sz="1320" dirty="0">
                 <a:solidFill>
                   <a:srgbClr val="17364A"/>
                 </a:solidFill>
@@ -16064,7 +16342,7 @@
               </a:rPr>
               <a:t>A vendor offers an AI tool that promises to reduce disease investigator workload by summarizing case.</a:t>
             </a:r>
-            <a:endParaRPr lang="en-US" sz="1550" dirty="0"/>
+            <a:endParaRPr lang="en-US" sz="1320" dirty="0"/>
           </a:p>
         </p:txBody>
       </p:sp>
@@ -16152,13 +16430,16 @@
           <a:ln/>
         </p:spPr>
         <p:txBody>
-          <a:bodyPr wrap="square" lIns="254" tIns="254" rIns="254" bIns="254" rtlCol="0" anchor="t">
+          <a:bodyPr wrap="square" lIns="508" tIns="508" rIns="508" bIns="508" rtlCol="0" anchor="t">
             <a:normAutofit/>
           </a:bodyPr>
           <a:lstStyle/>
           <a:p>
-            <a:r>
-              <a:rPr lang="en-US" sz="1380" dirty="0">
+            <a:pPr indent="0" marL="0">
+              <a:buNone/>
+            </a:pPr>
+            <a:r>
+              <a:rPr lang="en-US" sz="1220" dirty="0">
                 <a:solidFill>
                   <a:srgbClr val="17364A"/>
                 </a:solidFill>
@@ -16166,13 +16447,16 @@
                 <a:ea typeface="Aptos" pitchFamily="34" charset="-122"/>
                 <a:cs typeface="Aptos" pitchFamily="34" charset="-120"/>
               </a:rPr>
-              <a:t>A vendor offers an AI tool that promises to reduce disease investigator workload by.</a:t>
-            </a:r>
-            <a:endParaRPr lang="en-US" sz="1380" dirty="0"/>
-          </a:p>
-          <a:p>
-            <a:r>
-              <a:rPr lang="en-US" sz="1380" dirty="0">
+              <a:t>A vendor offers an AI tool that promises to reduce disease.</a:t>
+            </a:r>
+            <a:endParaRPr lang="en-US" sz="1220" dirty="0"/>
+          </a:p>
+          <a:p>
+            <a:pPr indent="0" marL="0">
+              <a:buNone/>
+            </a:pPr>
+            <a:r>
+              <a:rPr lang="en-US" sz="1220" dirty="0">
                 <a:solidFill>
                   <a:srgbClr val="17364A"/>
                 </a:solidFill>
@@ -16180,13 +16464,16 @@
                 <a:ea typeface="Aptos" pitchFamily="34" charset="-122"/>
                 <a:cs typeface="Aptos" pitchFamily="34" charset="-120"/>
               </a:rPr>
-              <a:t>The annual license appears affordable, but the agency must also pay for integration with.</a:t>
-            </a:r>
-            <a:endParaRPr lang="en-US" sz="1380" dirty="0"/>
-          </a:p>
-          <a:p>
-            <a:r>
-              <a:rPr lang="en-US" sz="1380" dirty="0">
+              <a:t>The annual license appears affordable, but the agency must also.</a:t>
+            </a:r>
+            <a:endParaRPr lang="en-US" sz="1220" dirty="0"/>
+          </a:p>
+          <a:p>
+            <a:pPr indent="0" marL="0">
+              <a:buNone/>
+            </a:pPr>
+            <a:r>
+              <a:rPr lang="en-US" sz="1220" dirty="0">
                 <a:solidFill>
                   <a:srgbClr val="17364A"/>
                 </a:solidFill>
@@ -16194,9 +16481,9 @@
                 <a:ea typeface="Aptos" pitchFamily="34" charset="-122"/>
                 <a:cs typeface="Aptos" pitchFamily="34" charset="-120"/>
               </a:rPr>
-              <a:t>A business case review asks whether the tool will meaningfully reduce burden, improve.</a:t>
-            </a:r>
-            <a:endParaRPr lang="en-US" sz="1380" dirty="0"/>
+              <a:t>A business case review asks whether the tool will meaningfully.</a:t>
+            </a:r>
+            <a:endParaRPr lang="en-US" sz="1220" dirty="0"/>
           </a:p>
         </p:txBody>
       </p:sp>
@@ -16274,17 +16561,17 @@
         </p:nvSpPr>
         <p:spPr>
           <a:xfrm>
-            <a:off x="7799832" y="5001768"/>
-            <a:ext cx="3145536" cy="502920"/>
-          </a:xfrm>
-          <a:prstGeom prst="rect">
-            <a:avLst/>
-          </a:prstGeom>
-          <a:noFill/>
-          <a:ln/>
-        </p:spPr>
-        <p:txBody>
-          <a:bodyPr wrap="square" lIns="0" tIns="0" rIns="0" bIns="0" rtlCol="0" anchor="t">
+            <a:off x="7799832" y="4974336"/>
+            <a:ext cx="3145536" cy="576072"/>
+          </a:xfrm>
+          <a:prstGeom prst="rect">
+            <a:avLst/>
+          </a:prstGeom>
+          <a:noFill/>
+          <a:ln/>
+        </p:spPr>
+        <p:txBody>
+          <a:bodyPr wrap="square" lIns="254" tIns="254" rIns="254" bIns="254" rtlCol="0" anchor="t">
             <a:normAutofit/>
           </a:bodyPr>
           <a:lstStyle/>
@@ -16293,7 +16580,7 @@
               <a:buNone/>
             </a:pPr>
             <a:r>
-              <a:rPr lang="en-US" sz="1550" dirty="0">
+              <a:rPr lang="en-US" sz="1320" dirty="0">
                 <a:solidFill>
                   <a:srgbClr val="17364A"/>
                 </a:solidFill>
@@ -16301,9 +16588,9 @@
                 <a:ea typeface="Aptos" pitchFamily="34" charset="-122"/>
                 <a:cs typeface="Aptos" pitchFamily="34" charset="-120"/>
               </a:rPr>
-              <a:t>Connect the concept to public health purpose, responsible use, required safeguards, documentation, and the next action a department should take.</a:t>
-            </a:r>
-            <a:endParaRPr lang="en-US" sz="1550" dirty="0"/>
+              <a:t>Connect the concept to public health purpose, responsible use, required safeguards, documentation, and the next action a.</a:t>
+            </a:r>
+            <a:endParaRPr lang="en-US" sz="1320" dirty="0"/>
           </a:p>
         </p:txBody>
       </p:sp>

--- a/downloads/presentations/modules/exe-420.pptx
+++ b/downloads/presentations/modules/exe-420.pptx
@@ -3319,11 +3319,11 @@
         <p:spPr>
           <a:xfrm>
             <a:off x="7635240" y="1325880"/>
-            <a:ext cx="3474720" cy="1325880"/>
+            <a:ext cx="3474720" cy="1207008"/>
           </a:xfrm>
           <a:prstGeom prst="roundRect">
             <a:avLst>
-              <a:gd name="adj" fmla="val 8276"/>
+              <a:gd name="adj" fmla="val 9091"/>
             </a:avLst>
           </a:prstGeom>
           <a:solidFill>
@@ -3385,7 +3385,7 @@
         <p:spPr>
           <a:xfrm>
             <a:off x="7799832" y="1801368"/>
-            <a:ext cx="3145536" cy="758952"/>
+            <a:ext cx="3145536" cy="640080"/>
           </a:xfrm>
           <a:prstGeom prst="rect">
             <a:avLst/>
@@ -3425,12 +3425,12 @@
         </p:nvSpPr>
         <p:spPr>
           <a:xfrm>
-            <a:off x="7635240" y="2788920"/>
-            <a:ext cx="3474720" cy="1536192"/>
+            <a:off x="7635240" y="2670048"/>
+            <a:ext cx="3474720" cy="1377086"/>
           </a:xfrm>
           <a:prstGeom prst="roundRect">
             <a:avLst>
-              <a:gd name="adj" fmla="val 7143"/>
+              <a:gd name="adj" fmla="val 7968"/>
             </a:avLst>
           </a:prstGeom>
           <a:solidFill>
@@ -3452,8 +3452,8 @@
         </p:nvSpPr>
         <p:spPr>
           <a:xfrm>
-            <a:off x="7799832" y="2935224"/>
-            <a:ext cx="3145536" cy="256032"/>
+            <a:off x="7799832" y="2798064"/>
+            <a:ext cx="3145536" cy="237744"/>
           </a:xfrm>
           <a:prstGeom prst="rect">
             <a:avLst/>
@@ -3469,7 +3469,7 @@
               <a:buNone/>
             </a:pPr>
             <a:r>
-              <a:rPr lang="en-US" sz="1300" b="1" dirty="0">
+              <a:rPr lang="en-US" sz="1250" b="1" dirty="0">
                 <a:solidFill>
                   <a:srgbClr val="0068B7"/>
                 </a:solidFill>
@@ -3477,101 +3477,317 @@
                 <a:ea typeface="Aptos" pitchFamily="34" charset="-122"/>
                 <a:cs typeface="Aptos" pitchFamily="34" charset="-120"/>
               </a:rPr>
-              <a:t>Concept checkpoints</a:t>
-            </a:r>
-            <a:endParaRPr lang="en-US" sz="1300" dirty="0"/>
-          </a:p>
-        </p:txBody>
-      </p:sp>
-      <p:sp>
-        <p:nvSpPr>
-          <p:cNvPr id="15" name="Text 13"/>
-          <p:cNvSpPr/>
-          <p:nvPr/>
-        </p:nvSpPr>
-        <p:spPr>
-          <a:xfrm>
-            <a:off x="7818120" y="3300984"/>
-            <a:ext cx="3090672" cy="877824"/>
-          </a:xfrm>
-          <a:prstGeom prst="rect">
-            <a:avLst/>
-          </a:prstGeom>
-          <a:noFill/>
-          <a:ln/>
-        </p:spPr>
-        <p:txBody>
-          <a:bodyPr wrap="square" lIns="508" tIns="508" rIns="508" bIns="508" rtlCol="0" anchor="t">
+              <a:t>Governance pathway</a:t>
+            </a:r>
+            <a:endParaRPr lang="en-US" sz="1250" dirty="0"/>
+          </a:p>
+        </p:txBody>
+      </p:sp>
+      <p:sp>
+        <p:nvSpPr>
+          <p:cNvPr id="15" name="Shape 13"/>
+          <p:cNvSpPr/>
+          <p:nvPr/>
+        </p:nvSpPr>
+        <p:spPr>
+          <a:xfrm>
+            <a:off x="8763000" y="3351276"/>
+            <a:ext cx="164592" cy="0"/>
+          </a:xfrm>
+          <a:prstGeom prst="line">
+            <a:avLst/>
+          </a:prstGeom>
+          <a:noFill/>
+          <a:ln w="15240">
+            <a:solidFill>
+              <a:srgbClr val="8ABBD8"/>
+            </a:solidFill>
+            <a:prstDash val="solid"/>
+          </a:ln>
+        </p:spPr>
+      </p:sp>
+      <p:sp>
+        <p:nvSpPr>
+          <p:cNvPr id="16" name="Shape 14"/>
+          <p:cNvSpPr/>
+          <p:nvPr/>
+        </p:nvSpPr>
+        <p:spPr>
+          <a:xfrm>
+            <a:off x="7872984" y="3200400"/>
+            <a:ext cx="890016" cy="301752"/>
+          </a:xfrm>
+          <a:prstGeom prst="roundRect">
+            <a:avLst>
+              <a:gd name="adj" fmla="val 24242"/>
+            </a:avLst>
+          </a:prstGeom>
+          <a:solidFill>
+            <a:srgbClr val="0068B7"/>
+          </a:solidFill>
+          <a:ln w="12700">
+            <a:solidFill>
+              <a:srgbClr val="0068B7"/>
+            </a:solidFill>
+            <a:prstDash val="solid"/>
+          </a:ln>
+        </p:spPr>
+      </p:sp>
+      <p:sp>
+        <p:nvSpPr>
+          <p:cNvPr id="17" name="Text 15"/>
+          <p:cNvSpPr/>
+          <p:nvPr/>
+        </p:nvSpPr>
+        <p:spPr>
+          <a:xfrm>
+            <a:off x="7909560" y="3273552"/>
+            <a:ext cx="816864" cy="146304"/>
+          </a:xfrm>
+          <a:prstGeom prst="rect">
+            <a:avLst/>
+          </a:prstGeom>
+          <a:noFill/>
+          <a:ln/>
+        </p:spPr>
+        <p:txBody>
+          <a:bodyPr wrap="square" lIns="0" tIns="0" rIns="0" bIns="0" rtlCol="0" anchor="ctr">
             <a:normAutofit/>
           </a:bodyPr>
           <a:lstStyle/>
           <a:p>
-            <a:pPr indent="0" marL="0">
-              <a:buNone/>
-            </a:pPr>
-            <a:r>
-              <a:rPr lang="en-US" sz="1220" dirty="0">
-                <a:solidFill>
-                  <a:srgbClr val="17364A"/>
-                </a:solidFill>
-                <a:latin typeface="Aptos" pitchFamily="34" charset="0"/>
-                <a:ea typeface="Aptos" pitchFamily="34" charset="-122"/>
-                <a:cs typeface="Aptos" pitchFamily="34" charset="-120"/>
-              </a:rPr>
-              <a:t>The problem should be operational and measurable, such as delayed.</a:t>
-            </a:r>
-            <a:endParaRPr lang="en-US" sz="1220" dirty="0"/>
-          </a:p>
-          <a:p>
-            <a:pPr indent="0" marL="0">
-              <a:buNone/>
-            </a:pPr>
-            <a:r>
-              <a:rPr lang="en-US" sz="1220" dirty="0">
-                <a:solidFill>
-                  <a:srgbClr val="17364A"/>
-                </a:solidFill>
-                <a:latin typeface="Aptos" pitchFamily="34" charset="0"/>
-                <a:ea typeface="Aptos" pitchFamily="34" charset="-122"/>
-                <a:cs typeface="Aptos" pitchFamily="34" charset="-120"/>
-              </a:rPr>
-              <a:t>The business case should connect the proposed AI use to a real.</a:t>
-            </a:r>
-            <a:endParaRPr lang="en-US" sz="1220" dirty="0"/>
-          </a:p>
-          <a:p>
-            <a:pPr indent="0" marL="0">
-              <a:buNone/>
-            </a:pPr>
-            <a:r>
-              <a:rPr lang="en-US" sz="1220" dirty="0">
-                <a:solidFill>
-                  <a:srgbClr val="17364A"/>
-                </a:solidFill>
-                <a:latin typeface="Aptos" pitchFamily="34" charset="0"/>
-                <a:ea typeface="Aptos" pitchFamily="34" charset="-122"/>
-                <a:cs typeface="Aptos" pitchFamily="34" charset="-120"/>
-              </a:rPr>
-              <a:t>The review should compare alternatives.</a:t>
-            </a:r>
-            <a:endParaRPr lang="en-US" sz="1220" dirty="0"/>
-          </a:p>
-        </p:txBody>
-      </p:sp>
-      <p:sp>
-        <p:nvSpPr>
-          <p:cNvPr id="16" name="Shape 14"/>
-          <p:cNvSpPr/>
-          <p:nvPr/>
-        </p:nvSpPr>
-        <p:spPr>
-          <a:xfrm>
-            <a:off x="7635240" y="4498848"/>
-            <a:ext cx="3474720" cy="1143000"/>
+            <a:pPr algn="ctr" indent="0" marL="0">
+              <a:buNone/>
+            </a:pPr>
+            <a:r>
+              <a:rPr lang="en-US" sz="880" b="1" dirty="0">
+                <a:solidFill>
+                  <a:srgbClr val="FFFFFF"/>
+                </a:solidFill>
+                <a:latin typeface="Aptos" pitchFamily="34" charset="0"/>
+                <a:ea typeface="Aptos" pitchFamily="34" charset="-122"/>
+                <a:cs typeface="Aptos" pitchFamily="34" charset="-120"/>
+              </a:rPr>
+              <a:t>Submit</a:t>
+            </a:r>
+            <a:endParaRPr lang="en-US" sz="880" dirty="0"/>
+          </a:p>
+        </p:txBody>
+      </p:sp>
+      <p:sp>
+        <p:nvSpPr>
+          <p:cNvPr id="18" name="Shape 16"/>
+          <p:cNvSpPr/>
+          <p:nvPr/>
+        </p:nvSpPr>
+        <p:spPr>
+          <a:xfrm>
+            <a:off x="9817608" y="3351276"/>
+            <a:ext cx="164592" cy="0"/>
+          </a:xfrm>
+          <a:prstGeom prst="line">
+            <a:avLst/>
+          </a:prstGeom>
+          <a:noFill/>
+          <a:ln w="15240">
+            <a:solidFill>
+              <a:srgbClr val="8ABBD8"/>
+            </a:solidFill>
+            <a:prstDash val="solid"/>
+          </a:ln>
+        </p:spPr>
+      </p:sp>
+      <p:sp>
+        <p:nvSpPr>
+          <p:cNvPr id="19" name="Shape 17"/>
+          <p:cNvSpPr/>
+          <p:nvPr/>
+        </p:nvSpPr>
+        <p:spPr>
+          <a:xfrm>
+            <a:off x="8927592" y="3200400"/>
+            <a:ext cx="890016" cy="301752"/>
           </a:xfrm>
           <a:prstGeom prst="roundRect">
             <a:avLst>
-              <a:gd name="adj" fmla="val 9600"/>
+              <a:gd name="adj" fmla="val 24242"/>
+            </a:avLst>
+          </a:prstGeom>
+          <a:solidFill>
+            <a:srgbClr val="2F8A28"/>
+          </a:solidFill>
+          <a:ln w="12700">
+            <a:solidFill>
+              <a:srgbClr val="2F8A28"/>
+            </a:solidFill>
+            <a:prstDash val="solid"/>
+          </a:ln>
+        </p:spPr>
+      </p:sp>
+      <p:sp>
+        <p:nvSpPr>
+          <p:cNvPr id="20" name="Text 18"/>
+          <p:cNvSpPr/>
+          <p:nvPr/>
+        </p:nvSpPr>
+        <p:spPr>
+          <a:xfrm>
+            <a:off x="8964168" y="3273552"/>
+            <a:ext cx="816864" cy="146304"/>
+          </a:xfrm>
+          <a:prstGeom prst="rect">
+            <a:avLst/>
+          </a:prstGeom>
+          <a:noFill/>
+          <a:ln/>
+        </p:spPr>
+        <p:txBody>
+          <a:bodyPr wrap="square" lIns="0" tIns="0" rIns="0" bIns="0" rtlCol="0" anchor="ctr">
+            <a:normAutofit/>
+          </a:bodyPr>
+          <a:lstStyle/>
+          <a:p>
+            <a:pPr algn="ctr" indent="0" marL="0">
+              <a:buNone/>
+            </a:pPr>
+            <a:r>
+              <a:rPr lang="en-US" sz="880" b="1" dirty="0">
+                <a:solidFill>
+                  <a:srgbClr val="FFFFFF"/>
+                </a:solidFill>
+                <a:latin typeface="Aptos" pitchFamily="34" charset="0"/>
+                <a:ea typeface="Aptos" pitchFamily="34" charset="-122"/>
+                <a:cs typeface="Aptos" pitchFamily="34" charset="-120"/>
+              </a:rPr>
+              <a:t>Review</a:t>
+            </a:r>
+            <a:endParaRPr lang="en-US" sz="880" dirty="0"/>
+          </a:p>
+        </p:txBody>
+      </p:sp>
+      <p:sp>
+        <p:nvSpPr>
+          <p:cNvPr id="21" name="Shape 19"/>
+          <p:cNvSpPr/>
+          <p:nvPr/>
+        </p:nvSpPr>
+        <p:spPr>
+          <a:xfrm>
+            <a:off x="9982200" y="3200400"/>
+            <a:ext cx="890016" cy="301752"/>
+          </a:xfrm>
+          <a:prstGeom prst="roundRect">
+            <a:avLst>
+              <a:gd name="adj" fmla="val 24242"/>
+            </a:avLst>
+          </a:prstGeom>
+          <a:solidFill>
+            <a:srgbClr val="6A4CA3"/>
+          </a:solidFill>
+          <a:ln w="12700">
+            <a:solidFill>
+              <a:srgbClr val="6A4CA3"/>
+            </a:solidFill>
+            <a:prstDash val="solid"/>
+          </a:ln>
+        </p:spPr>
+      </p:sp>
+      <p:sp>
+        <p:nvSpPr>
+          <p:cNvPr id="22" name="Text 20"/>
+          <p:cNvSpPr/>
+          <p:nvPr/>
+        </p:nvSpPr>
+        <p:spPr>
+          <a:xfrm>
+            <a:off x="10018776" y="3273552"/>
+            <a:ext cx="816864" cy="146304"/>
+          </a:xfrm>
+          <a:prstGeom prst="rect">
+            <a:avLst/>
+          </a:prstGeom>
+          <a:noFill/>
+          <a:ln/>
+        </p:spPr>
+        <p:txBody>
+          <a:bodyPr wrap="square" lIns="0" tIns="0" rIns="0" bIns="0" rtlCol="0" anchor="ctr">
+            <a:normAutofit/>
+          </a:bodyPr>
+          <a:lstStyle/>
+          <a:p>
+            <a:pPr algn="ctr" indent="0" marL="0">
+              <a:buNone/>
+            </a:pPr>
+            <a:r>
+              <a:rPr lang="en-US" sz="880" b="1" dirty="0">
+                <a:solidFill>
+                  <a:srgbClr val="FFFFFF"/>
+                </a:solidFill>
+                <a:latin typeface="Aptos" pitchFamily="34" charset="0"/>
+                <a:ea typeface="Aptos" pitchFamily="34" charset="-122"/>
+                <a:cs typeface="Aptos" pitchFamily="34" charset="-120"/>
+              </a:rPr>
+              <a:t>Oversee</a:t>
+            </a:r>
+            <a:endParaRPr lang="en-US" sz="880" dirty="0"/>
+          </a:p>
+        </p:txBody>
+      </p:sp>
+      <p:sp>
+        <p:nvSpPr>
+          <p:cNvPr id="23" name="Text 21"/>
+          <p:cNvSpPr/>
+          <p:nvPr/>
+        </p:nvSpPr>
+        <p:spPr>
+          <a:xfrm>
+            <a:off x="7854696" y="3694176"/>
+            <a:ext cx="3035808" cy="206654"/>
+          </a:xfrm>
+          <a:prstGeom prst="rect">
+            <a:avLst/>
+          </a:prstGeom>
+          <a:noFill/>
+          <a:ln/>
+        </p:spPr>
+        <p:txBody>
+          <a:bodyPr wrap="square" lIns="254" tIns="254" rIns="254" bIns="254" rtlCol="0" anchor="t">
+            <a:normAutofit/>
+          </a:bodyPr>
+          <a:lstStyle/>
+          <a:p>
+            <a:pPr indent="0" marL="0">
+              <a:buNone/>
+            </a:pPr>
+            <a:r>
+              <a:rPr lang="en-US" sz="1120" dirty="0">
+                <a:solidFill>
+                  <a:srgbClr val="17364A"/>
+                </a:solidFill>
+                <a:latin typeface="Aptos" pitchFamily="34" charset="0"/>
+                <a:ea typeface="Aptos" pitchFamily="34" charset="-122"/>
+                <a:cs typeface="Aptos" pitchFamily="34" charset="-120"/>
+              </a:rPr>
+              <a:t>A proposed AI use should move through documented review before it becomes an operational workflow.</a:t>
+            </a:r>
+            <a:endParaRPr lang="en-US" sz="1120" dirty="0"/>
+          </a:p>
+        </p:txBody>
+      </p:sp>
+      <p:sp>
+        <p:nvSpPr>
+          <p:cNvPr id="24" name="Shape 22"/>
+          <p:cNvSpPr/>
+          <p:nvPr/>
+        </p:nvSpPr>
+        <p:spPr>
+          <a:xfrm>
+            <a:off x="7635240" y="4184294"/>
+            <a:ext cx="3474720" cy="1466698"/>
+          </a:xfrm>
+          <a:prstGeom prst="roundRect">
+            <a:avLst>
+              <a:gd name="adj" fmla="val 7481"/>
             </a:avLst>
           </a:prstGeom>
           <a:solidFill>
@@ -3587,13 +3803,13 @@
       </p:sp>
       <p:sp>
         <p:nvSpPr>
-          <p:cNvPr id="17" name="Text 15"/>
-          <p:cNvSpPr/>
-          <p:nvPr/>
-        </p:nvSpPr>
-        <p:spPr>
-          <a:xfrm>
-            <a:off x="7799832" y="4645152"/>
+          <p:cNvPr id="25" name="Text 23"/>
+          <p:cNvSpPr/>
+          <p:nvPr/>
+        </p:nvSpPr>
+        <p:spPr>
+          <a:xfrm>
+            <a:off x="7799832" y="4330598"/>
             <a:ext cx="3145536" cy="256032"/>
           </a:xfrm>
           <a:prstGeom prst="rect">
@@ -3626,14 +3842,14 @@
       </p:sp>
       <p:sp>
         <p:nvSpPr>
-          <p:cNvPr id="18" name="Text 16"/>
-          <p:cNvSpPr/>
-          <p:nvPr/>
-        </p:nvSpPr>
-        <p:spPr>
-          <a:xfrm>
-            <a:off x="7799832" y="4974336"/>
-            <a:ext cx="3145536" cy="576072"/>
+          <p:cNvPr id="26" name="Text 24"/>
+          <p:cNvSpPr/>
+          <p:nvPr/>
+        </p:nvSpPr>
+        <p:spPr>
+          <a:xfrm>
+            <a:off x="7799832" y="4659782"/>
+            <a:ext cx="3145536" cy="899770"/>
           </a:xfrm>
           <a:prstGeom prst="rect">
             <a:avLst/>
@@ -3659,7 +3875,7 @@
                 <a:ea typeface="Aptos" pitchFamily="34" charset="-122"/>
                 <a:cs typeface="Aptos" pitchFamily="34" charset="-120"/>
               </a:rPr>
-              <a:t>Translate this concept into clear decision rights, review steps, documentation expectations, and escalation paths before.</a:t>
+              <a:t>Translate this concept into clear decision rights, review steps, documentation expectations, and escalation paths before an AI-supported workflow is approved.</a:t>
             </a:r>
             <a:endParaRPr lang="en-US" sz="1320" dirty="0"/>
           </a:p>
@@ -4028,11 +4244,11 @@
         <p:spPr>
           <a:xfrm>
             <a:off x="7635240" y="1325880"/>
-            <a:ext cx="3474720" cy="1325880"/>
+            <a:ext cx="3474720" cy="1207008"/>
           </a:xfrm>
           <a:prstGeom prst="roundRect">
             <a:avLst>
-              <a:gd name="adj" fmla="val 8276"/>
+              <a:gd name="adj" fmla="val 9091"/>
             </a:avLst>
           </a:prstGeom>
           <a:solidFill>
@@ -4094,7 +4310,7 @@
         <p:spPr>
           <a:xfrm>
             <a:off x="7799832" y="1801368"/>
-            <a:ext cx="3145536" cy="758952"/>
+            <a:ext cx="3145536" cy="640080"/>
           </a:xfrm>
           <a:prstGeom prst="rect">
             <a:avLst/>
@@ -4134,7 +4350,7 @@
         </p:nvSpPr>
         <p:spPr>
           <a:xfrm>
-            <a:off x="7635240" y="2788920"/>
+            <a:off x="7635240" y="2670048"/>
             <a:ext cx="3474720" cy="1536192"/>
           </a:xfrm>
           <a:prstGeom prst="roundRect">
@@ -4161,8 +4377,8 @@
         </p:nvSpPr>
         <p:spPr>
           <a:xfrm>
-            <a:off x="7799832" y="2935224"/>
-            <a:ext cx="3145536" cy="256032"/>
+            <a:off x="7799832" y="2798064"/>
+            <a:ext cx="3145536" cy="237744"/>
           </a:xfrm>
           <a:prstGeom prst="rect">
             <a:avLst/>
@@ -4178,7 +4394,7 @@
               <a:buNone/>
             </a:pPr>
             <a:r>
-              <a:rPr lang="en-US" sz="1300" b="1" dirty="0">
+              <a:rPr lang="en-US" sz="1250" b="1" dirty="0">
                 <a:solidFill>
                   <a:srgbClr val="0068B7"/>
                 </a:solidFill>
@@ -4186,101 +4402,317 @@
                 <a:ea typeface="Aptos" pitchFamily="34" charset="-122"/>
                 <a:cs typeface="Aptos" pitchFamily="34" charset="-120"/>
               </a:rPr>
-              <a:t>Concept checkpoints</a:t>
-            </a:r>
-            <a:endParaRPr lang="en-US" sz="1300" dirty="0"/>
-          </a:p>
-        </p:txBody>
-      </p:sp>
-      <p:sp>
-        <p:nvSpPr>
-          <p:cNvPr id="15" name="Text 13"/>
-          <p:cNvSpPr/>
-          <p:nvPr/>
-        </p:nvSpPr>
-        <p:spPr>
-          <a:xfrm>
-            <a:off x="7818120" y="3300984"/>
-            <a:ext cx="3090672" cy="877824"/>
-          </a:xfrm>
-          <a:prstGeom prst="rect">
-            <a:avLst/>
-          </a:prstGeom>
-          <a:noFill/>
-          <a:ln/>
-        </p:spPr>
-        <p:txBody>
-          <a:bodyPr wrap="square" lIns="508" tIns="508" rIns="508" bIns="508" rtlCol="0" anchor="t">
+              <a:t>Risk control loop</a:t>
+            </a:r>
+            <a:endParaRPr lang="en-US" sz="1250" dirty="0"/>
+          </a:p>
+        </p:txBody>
+      </p:sp>
+      <p:sp>
+        <p:nvSpPr>
+          <p:cNvPr id="15" name="Shape 13"/>
+          <p:cNvSpPr/>
+          <p:nvPr/>
+        </p:nvSpPr>
+        <p:spPr>
+          <a:xfrm>
+            <a:off x="8763000" y="3351276"/>
+            <a:ext cx="164592" cy="0"/>
+          </a:xfrm>
+          <a:prstGeom prst="line">
+            <a:avLst/>
+          </a:prstGeom>
+          <a:noFill/>
+          <a:ln w="15240">
+            <a:solidFill>
+              <a:srgbClr val="8ABBD8"/>
+            </a:solidFill>
+            <a:prstDash val="solid"/>
+          </a:ln>
+        </p:spPr>
+      </p:sp>
+      <p:sp>
+        <p:nvSpPr>
+          <p:cNvPr id="16" name="Shape 14"/>
+          <p:cNvSpPr/>
+          <p:nvPr/>
+        </p:nvSpPr>
+        <p:spPr>
+          <a:xfrm>
+            <a:off x="7872984" y="3200400"/>
+            <a:ext cx="890016" cy="301752"/>
+          </a:xfrm>
+          <a:prstGeom prst="roundRect">
+            <a:avLst>
+              <a:gd name="adj" fmla="val 24242"/>
+            </a:avLst>
+          </a:prstGeom>
+          <a:solidFill>
+            <a:srgbClr val="0068B7"/>
+          </a:solidFill>
+          <a:ln w="12700">
+            <a:solidFill>
+              <a:srgbClr val="0068B7"/>
+            </a:solidFill>
+            <a:prstDash val="solid"/>
+          </a:ln>
+        </p:spPr>
+      </p:sp>
+      <p:sp>
+        <p:nvSpPr>
+          <p:cNvPr id="17" name="Text 15"/>
+          <p:cNvSpPr/>
+          <p:nvPr/>
+        </p:nvSpPr>
+        <p:spPr>
+          <a:xfrm>
+            <a:off x="7909560" y="3273552"/>
+            <a:ext cx="816864" cy="146304"/>
+          </a:xfrm>
+          <a:prstGeom prst="rect">
+            <a:avLst/>
+          </a:prstGeom>
+          <a:noFill/>
+          <a:ln/>
+        </p:spPr>
+        <p:txBody>
+          <a:bodyPr wrap="square" lIns="0" tIns="0" rIns="0" bIns="0" rtlCol="0" anchor="ctr">
             <a:normAutofit/>
           </a:bodyPr>
           <a:lstStyle/>
           <a:p>
-            <a:pPr indent="0" marL="0">
-              <a:buNone/>
-            </a:pPr>
-            <a:r>
-              <a:rPr lang="en-US" sz="1220" dirty="0">
-                <a:solidFill>
-                  <a:srgbClr val="17364A"/>
-                </a:solidFill>
-                <a:latin typeface="Aptos" pitchFamily="34" charset="0"/>
-                <a:ea typeface="Aptos" pitchFamily="34" charset="-122"/>
-                <a:cs typeface="Aptos" pitchFamily="34" charset="-120"/>
-              </a:rPr>
-              <a:t>Agencies may purchase an AI tool without funding integration,.</a:t>
-            </a:r>
-            <a:endParaRPr lang="en-US" sz="1220" dirty="0"/>
-          </a:p>
-          <a:p>
-            <a:pPr indent="0" marL="0">
-              <a:buNone/>
-            </a:pPr>
-            <a:r>
-              <a:rPr lang="en-US" sz="1220" dirty="0">
-                <a:solidFill>
-                  <a:srgbClr val="17364A"/>
-                </a:solidFill>
-                <a:latin typeface="Aptos" pitchFamily="34" charset="0"/>
-                <a:ea typeface="Aptos" pitchFamily="34" charset="-122"/>
-                <a:cs typeface="Aptos" pitchFamily="34" charset="-120"/>
-              </a:rPr>
-              <a:t>Another risk is benefits inflation.</a:t>
-            </a:r>
-            <a:endParaRPr lang="en-US" sz="1220" dirty="0"/>
-          </a:p>
-          <a:p>
-            <a:pPr indent="0" marL="0">
-              <a:buNone/>
-            </a:pPr>
-            <a:r>
-              <a:rPr lang="en-US" sz="1220" dirty="0">
-                <a:solidFill>
-                  <a:srgbClr val="17364A"/>
-                </a:solidFill>
-                <a:latin typeface="Aptos" pitchFamily="34" charset="0"/>
-                <a:ea typeface="Aptos" pitchFamily="34" charset="-122"/>
-                <a:cs typeface="Aptos" pitchFamily="34" charset="-120"/>
-              </a:rPr>
-              <a:t>Vendors or project champions may overstate time savings or.</a:t>
-            </a:r>
-            <a:endParaRPr lang="en-US" sz="1220" dirty="0"/>
-          </a:p>
-        </p:txBody>
-      </p:sp>
-      <p:sp>
-        <p:nvSpPr>
-          <p:cNvPr id="16" name="Shape 14"/>
-          <p:cNvSpPr/>
-          <p:nvPr/>
-        </p:nvSpPr>
-        <p:spPr>
-          <a:xfrm>
-            <a:off x="7635240" y="4498848"/>
-            <a:ext cx="3474720" cy="1143000"/>
+            <a:pPr algn="ctr" indent="0" marL="0">
+              <a:buNone/>
+            </a:pPr>
+            <a:r>
+              <a:rPr lang="en-US" sz="880" b="1" dirty="0">
+                <a:solidFill>
+                  <a:srgbClr val="FFFFFF"/>
+                </a:solidFill>
+                <a:latin typeface="Aptos" pitchFamily="34" charset="0"/>
+                <a:ea typeface="Aptos" pitchFamily="34" charset="-122"/>
+                <a:cs typeface="Aptos" pitchFamily="34" charset="-120"/>
+              </a:rPr>
+              <a:t>Identify</a:t>
+            </a:r>
+            <a:endParaRPr lang="en-US" sz="880" dirty="0"/>
+          </a:p>
+        </p:txBody>
+      </p:sp>
+      <p:sp>
+        <p:nvSpPr>
+          <p:cNvPr id="18" name="Shape 16"/>
+          <p:cNvSpPr/>
+          <p:nvPr/>
+        </p:nvSpPr>
+        <p:spPr>
+          <a:xfrm>
+            <a:off x="9817608" y="3351276"/>
+            <a:ext cx="164592" cy="0"/>
+          </a:xfrm>
+          <a:prstGeom prst="line">
+            <a:avLst/>
+          </a:prstGeom>
+          <a:noFill/>
+          <a:ln w="15240">
+            <a:solidFill>
+              <a:srgbClr val="8ABBD8"/>
+            </a:solidFill>
+            <a:prstDash val="solid"/>
+          </a:ln>
+        </p:spPr>
+      </p:sp>
+      <p:sp>
+        <p:nvSpPr>
+          <p:cNvPr id="19" name="Shape 17"/>
+          <p:cNvSpPr/>
+          <p:nvPr/>
+        </p:nvSpPr>
+        <p:spPr>
+          <a:xfrm>
+            <a:off x="8927592" y="3200400"/>
+            <a:ext cx="890016" cy="301752"/>
           </a:xfrm>
           <a:prstGeom prst="roundRect">
             <a:avLst>
-              <a:gd name="adj" fmla="val 9600"/>
+              <a:gd name="adj" fmla="val 24242"/>
+            </a:avLst>
+          </a:prstGeom>
+          <a:solidFill>
+            <a:srgbClr val="2F8A28"/>
+          </a:solidFill>
+          <a:ln w="12700">
+            <a:solidFill>
+              <a:srgbClr val="2F8A28"/>
+            </a:solidFill>
+            <a:prstDash val="solid"/>
+          </a:ln>
+        </p:spPr>
+      </p:sp>
+      <p:sp>
+        <p:nvSpPr>
+          <p:cNvPr id="20" name="Text 18"/>
+          <p:cNvSpPr/>
+          <p:nvPr/>
+        </p:nvSpPr>
+        <p:spPr>
+          <a:xfrm>
+            <a:off x="8964168" y="3273552"/>
+            <a:ext cx="816864" cy="146304"/>
+          </a:xfrm>
+          <a:prstGeom prst="rect">
+            <a:avLst/>
+          </a:prstGeom>
+          <a:noFill/>
+          <a:ln/>
+        </p:spPr>
+        <p:txBody>
+          <a:bodyPr wrap="square" lIns="0" tIns="0" rIns="0" bIns="0" rtlCol="0" anchor="ctr">
+            <a:normAutofit/>
+          </a:bodyPr>
+          <a:lstStyle/>
+          <a:p>
+            <a:pPr algn="ctr" indent="0" marL="0">
+              <a:buNone/>
+            </a:pPr>
+            <a:r>
+              <a:rPr lang="en-US" sz="880" b="1" dirty="0">
+                <a:solidFill>
+                  <a:srgbClr val="FFFFFF"/>
+                </a:solidFill>
+                <a:latin typeface="Aptos" pitchFamily="34" charset="0"/>
+                <a:ea typeface="Aptos" pitchFamily="34" charset="-122"/>
+                <a:cs typeface="Aptos" pitchFamily="34" charset="-120"/>
+              </a:rPr>
+              <a:t>Control</a:t>
+            </a:r>
+            <a:endParaRPr lang="en-US" sz="880" dirty="0"/>
+          </a:p>
+        </p:txBody>
+      </p:sp>
+      <p:sp>
+        <p:nvSpPr>
+          <p:cNvPr id="21" name="Shape 19"/>
+          <p:cNvSpPr/>
+          <p:nvPr/>
+        </p:nvSpPr>
+        <p:spPr>
+          <a:xfrm>
+            <a:off x="9982200" y="3200400"/>
+            <a:ext cx="890016" cy="301752"/>
+          </a:xfrm>
+          <a:prstGeom prst="roundRect">
+            <a:avLst>
+              <a:gd name="adj" fmla="val 24242"/>
+            </a:avLst>
+          </a:prstGeom>
+          <a:solidFill>
+            <a:srgbClr val="6A4CA3"/>
+          </a:solidFill>
+          <a:ln w="12700">
+            <a:solidFill>
+              <a:srgbClr val="6A4CA3"/>
+            </a:solidFill>
+            <a:prstDash val="solid"/>
+          </a:ln>
+        </p:spPr>
+      </p:sp>
+      <p:sp>
+        <p:nvSpPr>
+          <p:cNvPr id="22" name="Text 20"/>
+          <p:cNvSpPr/>
+          <p:nvPr/>
+        </p:nvSpPr>
+        <p:spPr>
+          <a:xfrm>
+            <a:off x="10018776" y="3273552"/>
+            <a:ext cx="816864" cy="146304"/>
+          </a:xfrm>
+          <a:prstGeom prst="rect">
+            <a:avLst/>
+          </a:prstGeom>
+          <a:noFill/>
+          <a:ln/>
+        </p:spPr>
+        <p:txBody>
+          <a:bodyPr wrap="square" lIns="0" tIns="0" rIns="0" bIns="0" rtlCol="0" anchor="ctr">
+            <a:normAutofit/>
+          </a:bodyPr>
+          <a:lstStyle/>
+          <a:p>
+            <a:pPr algn="ctr" indent="0" marL="0">
+              <a:buNone/>
+            </a:pPr>
+            <a:r>
+              <a:rPr lang="en-US" sz="880" b="1" dirty="0">
+                <a:solidFill>
+                  <a:srgbClr val="FFFFFF"/>
+                </a:solidFill>
+                <a:latin typeface="Aptos" pitchFamily="34" charset="0"/>
+                <a:ea typeface="Aptos" pitchFamily="34" charset="-122"/>
+                <a:cs typeface="Aptos" pitchFamily="34" charset="-120"/>
+              </a:rPr>
+              <a:t>Monitor</a:t>
+            </a:r>
+            <a:endParaRPr lang="en-US" sz="880" dirty="0"/>
+          </a:p>
+        </p:txBody>
+      </p:sp>
+      <p:sp>
+        <p:nvSpPr>
+          <p:cNvPr id="23" name="Text 21"/>
+          <p:cNvSpPr/>
+          <p:nvPr/>
+        </p:nvSpPr>
+        <p:spPr>
+          <a:xfrm>
+            <a:off x="7854696" y="3694176"/>
+            <a:ext cx="3035808" cy="365760"/>
+          </a:xfrm>
+          <a:prstGeom prst="rect">
+            <a:avLst/>
+          </a:prstGeom>
+          <a:noFill/>
+          <a:ln/>
+        </p:spPr>
+        <p:txBody>
+          <a:bodyPr wrap="square" lIns="254" tIns="254" rIns="254" bIns="254" rtlCol="0" anchor="t">
+            <a:normAutofit/>
+          </a:bodyPr>
+          <a:lstStyle/>
+          <a:p>
+            <a:pPr indent="0" marL="0">
+              <a:buNone/>
+            </a:pPr>
+            <a:r>
+              <a:rPr lang="en-US" sz="1120" dirty="0">
+                <a:solidFill>
+                  <a:srgbClr val="17364A"/>
+                </a:solidFill>
+                <a:latin typeface="Aptos" pitchFamily="34" charset="0"/>
+                <a:ea typeface="Aptos" pitchFamily="34" charset="-122"/>
+                <a:cs typeface="Aptos" pitchFamily="34" charset="-120"/>
+              </a:rPr>
+              <a:t>Responsible use depends on finding risks early, applying safeguards, and watching for drift or harm over time.</a:t>
+            </a:r>
+            <a:endParaRPr lang="en-US" sz="1120" dirty="0"/>
+          </a:p>
+        </p:txBody>
+      </p:sp>
+      <p:sp>
+        <p:nvSpPr>
+          <p:cNvPr id="24" name="Shape 22"/>
+          <p:cNvSpPr/>
+          <p:nvPr/>
+        </p:nvSpPr>
+        <p:spPr>
+          <a:xfrm>
+            <a:off x="7635240" y="4343400"/>
+            <a:ext cx="3474720" cy="1255471"/>
+          </a:xfrm>
+          <a:prstGeom prst="roundRect">
+            <a:avLst>
+              <a:gd name="adj" fmla="val 8740"/>
             </a:avLst>
           </a:prstGeom>
           <a:solidFill>
@@ -4296,13 +4728,13 @@
       </p:sp>
       <p:sp>
         <p:nvSpPr>
-          <p:cNvPr id="17" name="Text 15"/>
-          <p:cNvSpPr/>
-          <p:nvPr/>
-        </p:nvSpPr>
-        <p:spPr>
-          <a:xfrm>
-            <a:off x="7799832" y="4645152"/>
+          <p:cNvPr id="25" name="Text 23"/>
+          <p:cNvSpPr/>
+          <p:nvPr/>
+        </p:nvSpPr>
+        <p:spPr>
+          <a:xfrm>
+            <a:off x="7799832" y="4489704"/>
             <a:ext cx="3145536" cy="256032"/>
           </a:xfrm>
           <a:prstGeom prst="rect">
@@ -4335,14 +4767,14 @@
       </p:sp>
       <p:sp>
         <p:nvSpPr>
-          <p:cNvPr id="18" name="Text 16"/>
-          <p:cNvSpPr/>
-          <p:nvPr/>
-        </p:nvSpPr>
-        <p:spPr>
-          <a:xfrm>
-            <a:off x="7799832" y="4974336"/>
-            <a:ext cx="3145536" cy="576072"/>
+          <p:cNvPr id="26" name="Text 24"/>
+          <p:cNvSpPr/>
+          <p:nvPr/>
+        </p:nvSpPr>
+        <p:spPr>
+          <a:xfrm>
+            <a:off x="7799832" y="4818888"/>
+            <a:ext cx="3145536" cy="688543"/>
           </a:xfrm>
           <a:prstGeom prst="rect">
             <a:avLst/>
@@ -4368,7 +4800,7 @@
                 <a:ea typeface="Aptos" pitchFamily="34" charset="-122"/>
                 <a:cs typeface="Aptos" pitchFamily="34" charset="-120"/>
               </a:rPr>
-              <a:t>Identify what could go wrong, who could be affected, what safeguards are needed, and what evidence should be reviewed.</a:t>
+              <a:t>Identify what could go wrong, who could be affected, what safeguards are needed, and what evidence should be reviewed before use.</a:t>
             </a:r>
             <a:endParaRPr lang="en-US" sz="1320" dirty="0"/>
           </a:p>
@@ -4737,11 +5169,11 @@
         <p:spPr>
           <a:xfrm>
             <a:off x="7635240" y="1325880"/>
-            <a:ext cx="3474720" cy="1325880"/>
+            <a:ext cx="3474720" cy="1255471"/>
           </a:xfrm>
           <a:prstGeom prst="roundRect">
             <a:avLst>
-              <a:gd name="adj" fmla="val 8276"/>
+              <a:gd name="adj" fmla="val 8740"/>
             </a:avLst>
           </a:prstGeom>
           <a:solidFill>
@@ -4803,7 +5235,7 @@
         <p:spPr>
           <a:xfrm>
             <a:off x="7799832" y="1801368"/>
-            <a:ext cx="3145536" cy="758952"/>
+            <a:ext cx="3145536" cy="688543"/>
           </a:xfrm>
           <a:prstGeom prst="rect">
             <a:avLst/>
@@ -4843,12 +5275,12 @@
         </p:nvSpPr>
         <p:spPr>
           <a:xfrm>
-            <a:off x="7635240" y="2788920"/>
-            <a:ext cx="3474720" cy="1536192"/>
+            <a:off x="7635240" y="2718511"/>
+            <a:ext cx="3474720" cy="1328623"/>
           </a:xfrm>
           <a:prstGeom prst="roundRect">
             <a:avLst>
-              <a:gd name="adj" fmla="val 7143"/>
+              <a:gd name="adj" fmla="val 8259"/>
             </a:avLst>
           </a:prstGeom>
           <a:solidFill>
@@ -4870,7 +5302,7 @@
         </p:nvSpPr>
         <p:spPr>
           <a:xfrm>
-            <a:off x="7799832" y="2935224"/>
+            <a:off x="7799832" y="2864815"/>
             <a:ext cx="3145536" cy="256032"/>
           </a:xfrm>
           <a:prstGeom prst="rect">
@@ -4909,8 +5341,8 @@
         </p:nvSpPr>
         <p:spPr>
           <a:xfrm>
-            <a:off x="7818120" y="3300984"/>
-            <a:ext cx="3090672" cy="877824"/>
+            <a:off x="7818120" y="3230575"/>
+            <a:ext cx="3090672" cy="670255"/>
           </a:xfrm>
           <a:prstGeom prst="rect">
             <a:avLst/>
@@ -4984,12 +5416,12 @@
         </p:nvSpPr>
         <p:spPr>
           <a:xfrm>
-            <a:off x="7635240" y="4498848"/>
-            <a:ext cx="3474720" cy="1143000"/>
+            <a:off x="7635240" y="4184294"/>
+            <a:ext cx="3474720" cy="1466698"/>
           </a:xfrm>
           <a:prstGeom prst="roundRect">
             <a:avLst>
-              <a:gd name="adj" fmla="val 9600"/>
+              <a:gd name="adj" fmla="val 7481"/>
             </a:avLst>
           </a:prstGeom>
           <a:solidFill>
@@ -5011,7 +5443,7 @@
         </p:nvSpPr>
         <p:spPr>
           <a:xfrm>
-            <a:off x="7799832" y="4645152"/>
+            <a:off x="7799832" y="4330598"/>
             <a:ext cx="3145536" cy="256032"/>
           </a:xfrm>
           <a:prstGeom prst="rect">
@@ -5050,8 +5482,8 @@
         </p:nvSpPr>
         <p:spPr>
           <a:xfrm>
-            <a:off x="7799832" y="4974336"/>
-            <a:ext cx="3145536" cy="576072"/>
+            <a:off x="7799832" y="4659782"/>
+            <a:ext cx="3145536" cy="899770"/>
           </a:xfrm>
           <a:prstGeom prst="rect">
             <a:avLst/>
@@ -5077,7 +5509,7 @@
                 <a:ea typeface="Aptos" pitchFamily="34" charset="-122"/>
                 <a:cs typeface="Aptos" pitchFamily="34" charset="-120"/>
               </a:rPr>
-              <a:t>Use the concept to clarify workflow changes, dependencies, staffing, procurement requirements, training needs, and.</a:t>
+              <a:t>Use the concept to clarify workflow changes, dependencies, staffing, procurement requirements, training needs, and implementation checkpoints.</a:t>
             </a:r>
             <a:endParaRPr lang="en-US" sz="1320" dirty="0"/>
           </a:p>
@@ -5446,11 +5878,11 @@
         <p:spPr>
           <a:xfrm>
             <a:off x="7635240" y="1325880"/>
-            <a:ext cx="3474720" cy="1325880"/>
+            <a:ext cx="3474720" cy="1255471"/>
           </a:xfrm>
           <a:prstGeom prst="roundRect">
             <a:avLst>
-              <a:gd name="adj" fmla="val 8276"/>
+              <a:gd name="adj" fmla="val 8740"/>
             </a:avLst>
           </a:prstGeom>
           <a:solidFill>
@@ -5512,7 +5944,7 @@
         <p:spPr>
           <a:xfrm>
             <a:off x="7799832" y="1801368"/>
-            <a:ext cx="3145536" cy="758952"/>
+            <a:ext cx="3145536" cy="688543"/>
           </a:xfrm>
           <a:prstGeom prst="rect">
             <a:avLst/>
@@ -5552,12 +5984,12 @@
         </p:nvSpPr>
         <p:spPr>
           <a:xfrm>
-            <a:off x="7635240" y="2788920"/>
-            <a:ext cx="3474720" cy="1536192"/>
+            <a:off x="7635240" y="2718511"/>
+            <a:ext cx="3474720" cy="1328623"/>
           </a:xfrm>
           <a:prstGeom prst="roundRect">
             <a:avLst>
-              <a:gd name="adj" fmla="val 7143"/>
+              <a:gd name="adj" fmla="val 8259"/>
             </a:avLst>
           </a:prstGeom>
           <a:solidFill>
@@ -5579,7 +6011,7 @@
         </p:nvSpPr>
         <p:spPr>
           <a:xfrm>
-            <a:off x="7799832" y="2935224"/>
+            <a:off x="7799832" y="2864815"/>
             <a:ext cx="3145536" cy="256032"/>
           </a:xfrm>
           <a:prstGeom prst="rect">
@@ -5618,8 +6050,8 @@
         </p:nvSpPr>
         <p:spPr>
           <a:xfrm>
-            <a:off x="7818120" y="3300984"/>
-            <a:ext cx="3090672" cy="877824"/>
+            <a:off x="7818120" y="3230575"/>
+            <a:ext cx="3090672" cy="670255"/>
           </a:xfrm>
           <a:prstGeom prst="rect">
             <a:avLst/>
@@ -5693,12 +6125,12 @@
         </p:nvSpPr>
         <p:spPr>
           <a:xfrm>
-            <a:off x="7635240" y="4498848"/>
-            <a:ext cx="3474720" cy="1143000"/>
+            <a:off x="7635240" y="4184294"/>
+            <a:ext cx="3474720" cy="1466698"/>
           </a:xfrm>
           <a:prstGeom prst="roundRect">
             <a:avLst>
-              <a:gd name="adj" fmla="val 9600"/>
+              <a:gd name="adj" fmla="val 7481"/>
             </a:avLst>
           </a:prstGeom>
           <a:solidFill>
@@ -5720,7 +6152,7 @@
         </p:nvSpPr>
         <p:spPr>
           <a:xfrm>
-            <a:off x="7799832" y="4645152"/>
+            <a:off x="7799832" y="4330598"/>
             <a:ext cx="3145536" cy="256032"/>
           </a:xfrm>
           <a:prstGeom prst="rect">
@@ -5759,8 +6191,8 @@
         </p:nvSpPr>
         <p:spPr>
           <a:xfrm>
-            <a:off x="7799832" y="4974336"/>
-            <a:ext cx="3145536" cy="576072"/>
+            <a:off x="7799832" y="4659782"/>
+            <a:ext cx="3145536" cy="899770"/>
           </a:xfrm>
           <a:prstGeom prst="rect">
             <a:avLst/>
@@ -5786,7 +6218,7 @@
                 <a:ea typeface="Aptos" pitchFamily="34" charset="-122"/>
                 <a:cs typeface="Aptos" pitchFamily="34" charset="-120"/>
               </a:rPr>
-              <a:t>Connect the concept to public health purpose, responsible use, required safeguards, documentation, and the next action a.</a:t>
+              <a:t>Connect the concept to public health purpose, responsible use, required safeguards, documentation, and the next action a department should take.</a:t>
             </a:r>
             <a:endParaRPr lang="en-US" sz="1320" dirty="0"/>
           </a:p>
@@ -6138,11 +6570,11 @@
         <p:spPr>
           <a:xfrm>
             <a:off x="7635240" y="1325880"/>
-            <a:ext cx="3474720" cy="1325880"/>
+            <a:ext cx="3474720" cy="1207008"/>
           </a:xfrm>
           <a:prstGeom prst="roundRect">
             <a:avLst>
-              <a:gd name="adj" fmla="val 8276"/>
+              <a:gd name="adj" fmla="val 9091"/>
             </a:avLst>
           </a:prstGeom>
           <a:solidFill>
@@ -6204,7 +6636,7 @@
         <p:spPr>
           <a:xfrm>
             <a:off x="7799832" y="1801368"/>
-            <a:ext cx="3145536" cy="758952"/>
+            <a:ext cx="3145536" cy="640080"/>
           </a:xfrm>
           <a:prstGeom prst="rect">
             <a:avLst/>
@@ -6230,7 +6662,7 @@
                 <a:ea typeface="Aptos" pitchFamily="34" charset="-122"/>
                 <a:cs typeface="Aptos" pitchFamily="34" charset="-120"/>
               </a:rPr>
-              <a:t>Which staff, partners, or communities would be affected if this issue were handled poorly?</a:t>
+              <a:t>Which staff, partners, or communities would be affected if this issue were handled.</a:t>
             </a:r>
             <a:endParaRPr lang="en-US" sz="1320" dirty="0"/>
           </a:p>
@@ -6244,12 +6676,12 @@
         </p:nvSpPr>
         <p:spPr>
           <a:xfrm>
-            <a:off x="7635240" y="2788920"/>
-            <a:ext cx="3474720" cy="1536192"/>
+            <a:off x="7635240" y="2670048"/>
+            <a:ext cx="3474720" cy="1377086"/>
           </a:xfrm>
           <a:prstGeom prst="roundRect">
             <a:avLst>
-              <a:gd name="adj" fmla="val 7143"/>
+              <a:gd name="adj" fmla="val 7968"/>
             </a:avLst>
           </a:prstGeom>
           <a:solidFill>
@@ -6271,7 +6703,7 @@
         </p:nvSpPr>
         <p:spPr>
           <a:xfrm>
-            <a:off x="7799832" y="2935224"/>
+            <a:off x="7799832" y="2816352"/>
             <a:ext cx="3145536" cy="256032"/>
           </a:xfrm>
           <a:prstGeom prst="rect">
@@ -6310,8 +6742,8 @@
         </p:nvSpPr>
         <p:spPr>
           <a:xfrm>
-            <a:off x="7818120" y="3300984"/>
-            <a:ext cx="3090672" cy="877824"/>
+            <a:off x="7818120" y="3182112"/>
+            <a:ext cx="3090672" cy="718718"/>
           </a:xfrm>
           <a:prstGeom prst="rect">
             <a:avLst/>
@@ -6368,12 +6800,12 @@
         </p:nvSpPr>
         <p:spPr>
           <a:xfrm>
-            <a:off x="7635240" y="4498848"/>
-            <a:ext cx="3474720" cy="1143000"/>
+            <a:off x="7635240" y="4184294"/>
+            <a:ext cx="3474720" cy="1466698"/>
           </a:xfrm>
           <a:prstGeom prst="roundRect">
             <a:avLst>
-              <a:gd name="adj" fmla="val 9600"/>
+              <a:gd name="adj" fmla="val 7481"/>
             </a:avLst>
           </a:prstGeom>
           <a:solidFill>
@@ -6395,7 +6827,7 @@
         </p:nvSpPr>
         <p:spPr>
           <a:xfrm>
-            <a:off x="7799832" y="4645152"/>
+            <a:off x="7799832" y="4330598"/>
             <a:ext cx="3145536" cy="256032"/>
           </a:xfrm>
           <a:prstGeom prst="rect">
@@ -6434,8 +6866,8 @@
         </p:nvSpPr>
         <p:spPr>
           <a:xfrm>
-            <a:off x="7799832" y="4974336"/>
-            <a:ext cx="3145536" cy="576072"/>
+            <a:off x="7799832" y="4659782"/>
+            <a:ext cx="3145536" cy="899770"/>
           </a:xfrm>
           <a:prstGeom prst="rect">
             <a:avLst/>
@@ -6461,7 +6893,7 @@
                 <a:ea typeface="Aptos" pitchFamily="34" charset="-122"/>
                 <a:cs typeface="Aptos" pitchFamily="34" charset="-120"/>
               </a:rPr>
-              <a:t>Connect the concept to public health purpose, responsible use, required safeguards, documentation, and the next action a.</a:t>
+              <a:t>Connect the concept to public health purpose, responsible use, required safeguards, documentation, and the next action a department should take.</a:t>
             </a:r>
             <a:endParaRPr lang="en-US" sz="1320" dirty="0"/>
           </a:p>
@@ -6813,11 +7245,11 @@
         <p:spPr>
           <a:xfrm>
             <a:off x="7635240" y="1325880"/>
-            <a:ext cx="3474720" cy="1325880"/>
+            <a:ext cx="3474720" cy="1207008"/>
           </a:xfrm>
           <a:prstGeom prst="roundRect">
             <a:avLst>
-              <a:gd name="adj" fmla="val 8276"/>
+              <a:gd name="adj" fmla="val 9091"/>
             </a:avLst>
           </a:prstGeom>
           <a:solidFill>
@@ -6879,7 +7311,7 @@
         <p:spPr>
           <a:xfrm>
             <a:off x="7799832" y="1801368"/>
-            <a:ext cx="3145536" cy="758952"/>
+            <a:ext cx="3145536" cy="640080"/>
           </a:xfrm>
           <a:prstGeom prst="rect">
             <a:avLst/>
@@ -6919,12 +7351,12 @@
         </p:nvSpPr>
         <p:spPr>
           <a:xfrm>
-            <a:off x="7635240" y="2788920"/>
-            <a:ext cx="3474720" cy="1536192"/>
+            <a:off x="7635240" y="2670048"/>
+            <a:ext cx="3474720" cy="1377086"/>
           </a:xfrm>
           <a:prstGeom prst="roundRect">
             <a:avLst>
-              <a:gd name="adj" fmla="val 7143"/>
+              <a:gd name="adj" fmla="val 7968"/>
             </a:avLst>
           </a:prstGeom>
           <a:solidFill>
@@ -6946,7 +7378,7 @@
         </p:nvSpPr>
         <p:spPr>
           <a:xfrm>
-            <a:off x="7799832" y="2935224"/>
+            <a:off x="7799832" y="2816352"/>
             <a:ext cx="3145536" cy="256032"/>
           </a:xfrm>
           <a:prstGeom prst="rect">
@@ -6985,8 +7417,8 @@
         </p:nvSpPr>
         <p:spPr>
           <a:xfrm>
-            <a:off x="7818120" y="3300984"/>
-            <a:ext cx="3090672" cy="877824"/>
+            <a:off x="7818120" y="3182112"/>
+            <a:ext cx="3090672" cy="718718"/>
           </a:xfrm>
           <a:prstGeom prst="rect">
             <a:avLst/>
@@ -7043,12 +7475,12 @@
         </p:nvSpPr>
         <p:spPr>
           <a:xfrm>
-            <a:off x="7635240" y="4498848"/>
-            <a:ext cx="3474720" cy="1143000"/>
+            <a:off x="7635240" y="4184294"/>
+            <a:ext cx="3474720" cy="1466698"/>
           </a:xfrm>
           <a:prstGeom prst="roundRect">
             <a:avLst>
-              <a:gd name="adj" fmla="val 9600"/>
+              <a:gd name="adj" fmla="val 7481"/>
             </a:avLst>
           </a:prstGeom>
           <a:solidFill>
@@ -7070,7 +7502,7 @@
         </p:nvSpPr>
         <p:spPr>
           <a:xfrm>
-            <a:off x="7799832" y="4645152"/>
+            <a:off x="7799832" y="4330598"/>
             <a:ext cx="3145536" cy="256032"/>
           </a:xfrm>
           <a:prstGeom prst="rect">
@@ -7109,8 +7541,8 @@
         </p:nvSpPr>
         <p:spPr>
           <a:xfrm>
-            <a:off x="7799832" y="4974336"/>
-            <a:ext cx="3145536" cy="576072"/>
+            <a:off x="7799832" y="4659782"/>
+            <a:ext cx="3145536" cy="899770"/>
           </a:xfrm>
           <a:prstGeom prst="rect">
             <a:avLst/>
@@ -7136,7 +7568,7 @@
                 <a:ea typeface="Aptos" pitchFamily="34" charset="-122"/>
                 <a:cs typeface="Aptos" pitchFamily="34" charset="-120"/>
               </a:rPr>
-              <a:t>Use the assignment to test whether you can explain the concept, apply it to a realistic public health situation, and.</a:t>
+              <a:t>Use the assignment to test whether you can explain the concept, apply it to a realistic public health situation, and identify what would need review before the work moves forward.</a:t>
             </a:r>
             <a:endParaRPr lang="en-US" sz="1320" dirty="0"/>
           </a:p>
@@ -7505,11 +7937,11 @@
         <p:spPr>
           <a:xfrm>
             <a:off x="7635240" y="1325880"/>
-            <a:ext cx="3474720" cy="1325880"/>
+            <a:ext cx="3474720" cy="1207008"/>
           </a:xfrm>
           <a:prstGeom prst="roundRect">
             <a:avLst>
-              <a:gd name="adj" fmla="val 8276"/>
+              <a:gd name="adj" fmla="val 9091"/>
             </a:avLst>
           </a:prstGeom>
           <a:solidFill>
@@ -7571,7 +8003,7 @@
         <p:spPr>
           <a:xfrm>
             <a:off x="7799832" y="1801368"/>
-            <a:ext cx="3145536" cy="758952"/>
+            <a:ext cx="3145536" cy="640080"/>
           </a:xfrm>
           <a:prstGeom prst="rect">
             <a:avLst/>
@@ -7611,12 +8043,12 @@
         </p:nvSpPr>
         <p:spPr>
           <a:xfrm>
-            <a:off x="7635240" y="2788920"/>
-            <a:ext cx="3474720" cy="1536192"/>
+            <a:off x="7635240" y="2670048"/>
+            <a:ext cx="3474720" cy="1377086"/>
           </a:xfrm>
           <a:prstGeom prst="roundRect">
             <a:avLst>
-              <a:gd name="adj" fmla="val 7143"/>
+              <a:gd name="adj" fmla="val 7968"/>
             </a:avLst>
           </a:prstGeom>
           <a:solidFill>
@@ -7638,7 +8070,7 @@
         </p:nvSpPr>
         <p:spPr>
           <a:xfrm>
-            <a:off x="7799832" y="2935224"/>
+            <a:off x="7799832" y="2816352"/>
             <a:ext cx="3145536" cy="256032"/>
           </a:xfrm>
           <a:prstGeom prst="rect">
@@ -7677,8 +8109,8 @@
         </p:nvSpPr>
         <p:spPr>
           <a:xfrm>
-            <a:off x="7818120" y="3300984"/>
-            <a:ext cx="3090672" cy="877824"/>
+            <a:off x="7818120" y="3182112"/>
+            <a:ext cx="3090672" cy="718718"/>
           </a:xfrm>
           <a:prstGeom prst="rect">
             <a:avLst/>
@@ -7735,12 +8167,12 @@
         </p:nvSpPr>
         <p:spPr>
           <a:xfrm>
-            <a:off x="7635240" y="4498848"/>
-            <a:ext cx="3474720" cy="1143000"/>
+            <a:off x="7635240" y="4184294"/>
+            <a:ext cx="3474720" cy="1466698"/>
           </a:xfrm>
           <a:prstGeom prst="roundRect">
             <a:avLst>
-              <a:gd name="adj" fmla="val 9600"/>
+              <a:gd name="adj" fmla="val 7481"/>
             </a:avLst>
           </a:prstGeom>
           <a:solidFill>
@@ -7762,7 +8194,7 @@
         </p:nvSpPr>
         <p:spPr>
           <a:xfrm>
-            <a:off x="7799832" y="4645152"/>
+            <a:off x="7799832" y="4330598"/>
             <a:ext cx="3145536" cy="256032"/>
           </a:xfrm>
           <a:prstGeom prst="rect">
@@ -7801,8 +8233,8 @@
         </p:nvSpPr>
         <p:spPr>
           <a:xfrm>
-            <a:off x="7799832" y="4974336"/>
-            <a:ext cx="3145536" cy="576072"/>
+            <a:off x="7799832" y="4659782"/>
+            <a:ext cx="3145536" cy="899770"/>
           </a:xfrm>
           <a:prstGeom prst="rect">
             <a:avLst/>
@@ -7828,7 +8260,7 @@
                 <a:ea typeface="Aptos" pitchFamily="34" charset="-122"/>
                 <a:cs typeface="Aptos" pitchFamily="34" charset="-120"/>
               </a:rPr>
-              <a:t>Connect the concept to public health purpose, responsible use, required safeguards, documentation, and the next action a.</a:t>
+              <a:t>Connect the concept to public health purpose, responsible use, required safeguards, documentation, and the next action a department should take.</a:t>
             </a:r>
             <a:endParaRPr lang="en-US" sz="1320" dirty="0"/>
           </a:p>
@@ -8163,11 +8595,11 @@
         <p:spPr>
           <a:xfrm>
             <a:off x="7635240" y="1325880"/>
-            <a:ext cx="3474720" cy="1325880"/>
+            <a:ext cx="3474720" cy="1255471"/>
           </a:xfrm>
           <a:prstGeom prst="roundRect">
             <a:avLst>
-              <a:gd name="adj" fmla="val 8276"/>
+              <a:gd name="adj" fmla="val 8740"/>
             </a:avLst>
           </a:prstGeom>
           <a:solidFill>
@@ -8229,7 +8661,7 @@
         <p:spPr>
           <a:xfrm>
             <a:off x="7799832" y="1801368"/>
-            <a:ext cx="3145536" cy="758952"/>
+            <a:ext cx="3145536" cy="688543"/>
           </a:xfrm>
           <a:prstGeom prst="rect">
             <a:avLst/>
@@ -8269,12 +8701,12 @@
         </p:nvSpPr>
         <p:spPr>
           <a:xfrm>
-            <a:off x="7635240" y="2788920"/>
-            <a:ext cx="3474720" cy="1536192"/>
+            <a:off x="7635240" y="2718511"/>
+            <a:ext cx="3474720" cy="1328623"/>
           </a:xfrm>
           <a:prstGeom prst="roundRect">
             <a:avLst>
-              <a:gd name="adj" fmla="val 7143"/>
+              <a:gd name="adj" fmla="val 8259"/>
             </a:avLst>
           </a:prstGeom>
           <a:solidFill>
@@ -8296,7 +8728,7 @@
         </p:nvSpPr>
         <p:spPr>
           <a:xfrm>
-            <a:off x="7799832" y="2935224"/>
+            <a:off x="7799832" y="2864815"/>
             <a:ext cx="3145536" cy="256032"/>
           </a:xfrm>
           <a:prstGeom prst="rect">
@@ -8335,8 +8767,8 @@
         </p:nvSpPr>
         <p:spPr>
           <a:xfrm>
-            <a:off x="7818120" y="3300984"/>
-            <a:ext cx="3090672" cy="877824"/>
+            <a:off x="7818120" y="3230575"/>
+            <a:ext cx="3090672" cy="670255"/>
           </a:xfrm>
           <a:prstGeom prst="rect">
             <a:avLst/>
@@ -8376,12 +8808,12 @@
         </p:nvSpPr>
         <p:spPr>
           <a:xfrm>
-            <a:off x="7635240" y="4498848"/>
-            <a:ext cx="3474720" cy="1143000"/>
+            <a:off x="7635240" y="4184294"/>
+            <a:ext cx="3474720" cy="1466698"/>
           </a:xfrm>
           <a:prstGeom prst="roundRect">
             <a:avLst>
-              <a:gd name="adj" fmla="val 9600"/>
+              <a:gd name="adj" fmla="val 7481"/>
             </a:avLst>
           </a:prstGeom>
           <a:solidFill>
@@ -8403,7 +8835,7 @@
         </p:nvSpPr>
         <p:spPr>
           <a:xfrm>
-            <a:off x="7799832" y="4645152"/>
+            <a:off x="7799832" y="4330598"/>
             <a:ext cx="3145536" cy="256032"/>
           </a:xfrm>
           <a:prstGeom prst="rect">
@@ -8442,8 +8874,8 @@
         </p:nvSpPr>
         <p:spPr>
           <a:xfrm>
-            <a:off x="7799832" y="4974336"/>
-            <a:ext cx="3145536" cy="576072"/>
+            <a:off x="7799832" y="4659782"/>
+            <a:ext cx="3145536" cy="899770"/>
           </a:xfrm>
           <a:prstGeom prst="rect">
             <a:avLst/>
@@ -8469,7 +8901,7 @@
                 <a:ea typeface="Aptos" pitchFamily="34" charset="-122"/>
                 <a:cs typeface="Aptos" pitchFamily="34" charset="-120"/>
               </a:rPr>
-              <a:t>Connect the concept to public health purpose, responsible use, required safeguards, documentation, and the next action a.</a:t>
+              <a:t>Connect the concept to public health purpose, responsible use, required safeguards, documentation, and the next action a department should take.</a:t>
             </a:r>
             <a:endParaRPr lang="en-US" sz="1320" dirty="0"/>
           </a:p>
@@ -8804,11 +9236,11 @@
         <p:spPr>
           <a:xfrm>
             <a:off x="7635240" y="1325880"/>
-            <a:ext cx="3474720" cy="1325880"/>
+            <a:ext cx="3474720" cy="1255471"/>
           </a:xfrm>
           <a:prstGeom prst="roundRect">
             <a:avLst>
-              <a:gd name="adj" fmla="val 8276"/>
+              <a:gd name="adj" fmla="val 8740"/>
             </a:avLst>
           </a:prstGeom>
           <a:solidFill>
@@ -8870,7 +9302,7 @@
         <p:spPr>
           <a:xfrm>
             <a:off x="7799832" y="1801368"/>
-            <a:ext cx="3145536" cy="758952"/>
+            <a:ext cx="3145536" cy="688543"/>
           </a:xfrm>
           <a:prstGeom prst="rect">
             <a:avLst/>
@@ -8910,12 +9342,12 @@
         </p:nvSpPr>
         <p:spPr>
           <a:xfrm>
-            <a:off x="7635240" y="2788920"/>
-            <a:ext cx="3474720" cy="1536192"/>
+            <a:off x="7635240" y="2718511"/>
+            <a:ext cx="3474720" cy="1328623"/>
           </a:xfrm>
           <a:prstGeom prst="roundRect">
             <a:avLst>
-              <a:gd name="adj" fmla="val 7143"/>
+              <a:gd name="adj" fmla="val 8259"/>
             </a:avLst>
           </a:prstGeom>
           <a:solidFill>
@@ -8937,7 +9369,7 @@
         </p:nvSpPr>
         <p:spPr>
           <a:xfrm>
-            <a:off x="7799832" y="2935224"/>
+            <a:off x="7799832" y="2864815"/>
             <a:ext cx="3145536" cy="256032"/>
           </a:xfrm>
           <a:prstGeom prst="rect">
@@ -8976,8 +9408,8 @@
         </p:nvSpPr>
         <p:spPr>
           <a:xfrm>
-            <a:off x="7818120" y="3300984"/>
-            <a:ext cx="3090672" cy="877824"/>
+            <a:off x="7818120" y="3230575"/>
+            <a:ext cx="3090672" cy="670255"/>
           </a:xfrm>
           <a:prstGeom prst="rect">
             <a:avLst/>
@@ -9017,12 +9449,12 @@
         </p:nvSpPr>
         <p:spPr>
           <a:xfrm>
-            <a:off x="7635240" y="4498848"/>
-            <a:ext cx="3474720" cy="1143000"/>
+            <a:off x="7635240" y="4184294"/>
+            <a:ext cx="3474720" cy="1466698"/>
           </a:xfrm>
           <a:prstGeom prst="roundRect">
             <a:avLst>
-              <a:gd name="adj" fmla="val 9600"/>
+              <a:gd name="adj" fmla="val 7481"/>
             </a:avLst>
           </a:prstGeom>
           <a:solidFill>
@@ -9044,7 +9476,7 @@
         </p:nvSpPr>
         <p:spPr>
           <a:xfrm>
-            <a:off x="7799832" y="4645152"/>
+            <a:off x="7799832" y="4330598"/>
             <a:ext cx="3145536" cy="256032"/>
           </a:xfrm>
           <a:prstGeom prst="rect">
@@ -9083,8 +9515,8 @@
         </p:nvSpPr>
         <p:spPr>
           <a:xfrm>
-            <a:off x="7799832" y="4974336"/>
-            <a:ext cx="3145536" cy="576072"/>
+            <a:off x="7799832" y="4659782"/>
+            <a:ext cx="3145536" cy="899770"/>
           </a:xfrm>
           <a:prstGeom prst="rect">
             <a:avLst/>
@@ -9110,7 +9542,7 @@
                 <a:ea typeface="Aptos" pitchFamily="34" charset="-122"/>
                 <a:cs typeface="Aptos" pitchFamily="34" charset="-120"/>
               </a:rPr>
-              <a:t>Use the assignment to test whether you can explain the concept, apply it to a realistic public health situation, and.</a:t>
+              <a:t>Use the assignment to test whether you can explain the concept, apply it to a realistic public health situation, and identify what would need review before the work moves forward.</a:t>
             </a:r>
             <a:endParaRPr lang="en-US" sz="1320" dirty="0"/>
           </a:p>
@@ -9479,11 +9911,11 @@
         <p:spPr>
           <a:xfrm>
             <a:off x="7635240" y="1325880"/>
-            <a:ext cx="3474720" cy="1325880"/>
+            <a:ext cx="3474720" cy="1255471"/>
           </a:xfrm>
           <a:prstGeom prst="roundRect">
             <a:avLst>
-              <a:gd name="adj" fmla="val 8276"/>
+              <a:gd name="adj" fmla="val 8740"/>
             </a:avLst>
           </a:prstGeom>
           <a:solidFill>
@@ -9545,7 +9977,7 @@
         <p:spPr>
           <a:xfrm>
             <a:off x="7799832" y="1801368"/>
-            <a:ext cx="3145536" cy="758952"/>
+            <a:ext cx="3145536" cy="688543"/>
           </a:xfrm>
           <a:prstGeom prst="rect">
             <a:avLst/>
@@ -9585,12 +10017,12 @@
         </p:nvSpPr>
         <p:spPr>
           <a:xfrm>
-            <a:off x="7635240" y="2788920"/>
-            <a:ext cx="3474720" cy="1536192"/>
+            <a:off x="7635240" y="2718511"/>
+            <a:ext cx="3474720" cy="1328623"/>
           </a:xfrm>
           <a:prstGeom prst="roundRect">
             <a:avLst>
-              <a:gd name="adj" fmla="val 7143"/>
+              <a:gd name="adj" fmla="val 8259"/>
             </a:avLst>
           </a:prstGeom>
           <a:solidFill>
@@ -9612,7 +10044,7 @@
         </p:nvSpPr>
         <p:spPr>
           <a:xfrm>
-            <a:off x="7799832" y="2935224"/>
+            <a:off x="7799832" y="2864815"/>
             <a:ext cx="3145536" cy="256032"/>
           </a:xfrm>
           <a:prstGeom prst="rect">
@@ -9651,8 +10083,8 @@
         </p:nvSpPr>
         <p:spPr>
           <a:xfrm>
-            <a:off x="7818120" y="3300984"/>
-            <a:ext cx="3090672" cy="877824"/>
+            <a:off x="7818120" y="3230575"/>
+            <a:ext cx="3090672" cy="670255"/>
           </a:xfrm>
           <a:prstGeom prst="rect">
             <a:avLst/>
@@ -9726,12 +10158,12 @@
         </p:nvSpPr>
         <p:spPr>
           <a:xfrm>
-            <a:off x="7635240" y="4498848"/>
-            <a:ext cx="3474720" cy="1143000"/>
+            <a:off x="7635240" y="4184294"/>
+            <a:ext cx="3474720" cy="1466698"/>
           </a:xfrm>
           <a:prstGeom prst="roundRect">
             <a:avLst>
-              <a:gd name="adj" fmla="val 9600"/>
+              <a:gd name="adj" fmla="val 7481"/>
             </a:avLst>
           </a:prstGeom>
           <a:solidFill>
@@ -9753,7 +10185,7 @@
         </p:nvSpPr>
         <p:spPr>
           <a:xfrm>
-            <a:off x="7799832" y="4645152"/>
+            <a:off x="7799832" y="4330598"/>
             <a:ext cx="3145536" cy="256032"/>
           </a:xfrm>
           <a:prstGeom prst="rect">
@@ -9792,8 +10224,8 @@
         </p:nvSpPr>
         <p:spPr>
           <a:xfrm>
-            <a:off x="7799832" y="4974336"/>
-            <a:ext cx="3145536" cy="576072"/>
+            <a:off x="7799832" y="4659782"/>
+            <a:ext cx="3145536" cy="899770"/>
           </a:xfrm>
           <a:prstGeom prst="rect">
             <a:avLst/>
@@ -9819,7 +10251,7 @@
                 <a:ea typeface="Aptos" pitchFamily="34" charset="-122"/>
                 <a:cs typeface="Aptos" pitchFamily="34" charset="-120"/>
               </a:rPr>
-              <a:t>Use the assignment to test whether you can explain the concept, apply it to a realistic public health situation, and.</a:t>
+              <a:t>Use the assignment to test whether you can explain the concept, apply it to a realistic public health situation, and identify what would need review before the work moves forward.</a:t>
             </a:r>
             <a:endParaRPr lang="en-US" sz="1320" dirty="0"/>
           </a:p>
@@ -10790,11 +11222,11 @@
         <p:spPr>
           <a:xfrm>
             <a:off x="7635240" y="1325880"/>
-            <a:ext cx="3474720" cy="1325880"/>
+            <a:ext cx="3474720" cy="1207008"/>
           </a:xfrm>
           <a:prstGeom prst="roundRect">
             <a:avLst>
-              <a:gd name="adj" fmla="val 8276"/>
+              <a:gd name="adj" fmla="val 9091"/>
             </a:avLst>
           </a:prstGeom>
           <a:solidFill>
@@ -10856,7 +11288,7 @@
         <p:spPr>
           <a:xfrm>
             <a:off x="7799832" y="1801368"/>
-            <a:ext cx="3145536" cy="758952"/>
+            <a:ext cx="3145536" cy="640080"/>
           </a:xfrm>
           <a:prstGeom prst="rect">
             <a:avLst/>
@@ -10896,12 +11328,12 @@
         </p:nvSpPr>
         <p:spPr>
           <a:xfrm>
-            <a:off x="7635240" y="2788920"/>
-            <a:ext cx="3474720" cy="1536192"/>
+            <a:off x="7635240" y="2670048"/>
+            <a:ext cx="3474720" cy="1377086"/>
           </a:xfrm>
           <a:prstGeom prst="roundRect">
             <a:avLst>
-              <a:gd name="adj" fmla="val 7143"/>
+              <a:gd name="adj" fmla="val 7968"/>
             </a:avLst>
           </a:prstGeom>
           <a:solidFill>
@@ -10923,7 +11355,7 @@
         </p:nvSpPr>
         <p:spPr>
           <a:xfrm>
-            <a:off x="7799832" y="2935224"/>
+            <a:off x="7799832" y="2816352"/>
             <a:ext cx="3145536" cy="256032"/>
           </a:xfrm>
           <a:prstGeom prst="rect">
@@ -10962,8 +11394,8 @@
         </p:nvSpPr>
         <p:spPr>
           <a:xfrm>
-            <a:off x="7818120" y="3300984"/>
-            <a:ext cx="3090672" cy="877824"/>
+            <a:off x="7818120" y="3182112"/>
+            <a:ext cx="3090672" cy="718718"/>
           </a:xfrm>
           <a:prstGeom prst="rect">
             <a:avLst/>
@@ -11037,12 +11469,12 @@
         </p:nvSpPr>
         <p:spPr>
           <a:xfrm>
-            <a:off x="7635240" y="4498848"/>
-            <a:ext cx="3474720" cy="1143000"/>
+            <a:off x="7635240" y="4184294"/>
+            <a:ext cx="3474720" cy="1466698"/>
           </a:xfrm>
           <a:prstGeom prst="roundRect">
             <a:avLst>
-              <a:gd name="adj" fmla="val 9600"/>
+              <a:gd name="adj" fmla="val 7481"/>
             </a:avLst>
           </a:prstGeom>
           <a:solidFill>
@@ -11064,7 +11496,7 @@
         </p:nvSpPr>
         <p:spPr>
           <a:xfrm>
-            <a:off x="7799832" y="4645152"/>
+            <a:off x="7799832" y="4330598"/>
             <a:ext cx="3145536" cy="256032"/>
           </a:xfrm>
           <a:prstGeom prst="rect">
@@ -11103,8 +11535,8 @@
         </p:nvSpPr>
         <p:spPr>
           <a:xfrm>
-            <a:off x="7799832" y="4974336"/>
-            <a:ext cx="3145536" cy="576072"/>
+            <a:off x="7799832" y="4659782"/>
+            <a:ext cx="3145536" cy="899770"/>
           </a:xfrm>
           <a:prstGeom prst="rect">
             <a:avLst/>
@@ -11130,7 +11562,7 @@
                 <a:ea typeface="Aptos" pitchFamily="34" charset="-122"/>
                 <a:cs typeface="Aptos" pitchFamily="34" charset="-120"/>
               </a:rPr>
-              <a:t>Connect the concept to public health purpose, responsible use, required safeguards, documentation, and the next action a.</a:t>
+              <a:t>Connect the concept to public health purpose, responsible use, required safeguards, documentation, and the next action a department should take.</a:t>
             </a:r>
             <a:endParaRPr lang="en-US" sz="1320" dirty="0"/>
           </a:p>
@@ -11482,11 +11914,11 @@
         <p:spPr>
           <a:xfrm>
             <a:off x="7635240" y="1325880"/>
-            <a:ext cx="3474720" cy="1325880"/>
+            <a:ext cx="3474720" cy="1255471"/>
           </a:xfrm>
           <a:prstGeom prst="roundRect">
             <a:avLst>
-              <a:gd name="adj" fmla="val 8276"/>
+              <a:gd name="adj" fmla="val 8740"/>
             </a:avLst>
           </a:prstGeom>
           <a:solidFill>
@@ -11548,7 +11980,7 @@
         <p:spPr>
           <a:xfrm>
             <a:off x="7799832" y="1801368"/>
-            <a:ext cx="3145536" cy="758952"/>
+            <a:ext cx="3145536" cy="688543"/>
           </a:xfrm>
           <a:prstGeom prst="rect">
             <a:avLst/>
@@ -11588,12 +12020,12 @@
         </p:nvSpPr>
         <p:spPr>
           <a:xfrm>
-            <a:off x="7635240" y="2788920"/>
-            <a:ext cx="3474720" cy="1536192"/>
+            <a:off x="7635240" y="2718511"/>
+            <a:ext cx="3474720" cy="1328623"/>
           </a:xfrm>
           <a:prstGeom prst="roundRect">
             <a:avLst>
-              <a:gd name="adj" fmla="val 7143"/>
+              <a:gd name="adj" fmla="val 8259"/>
             </a:avLst>
           </a:prstGeom>
           <a:solidFill>
@@ -11615,7 +12047,7 @@
         </p:nvSpPr>
         <p:spPr>
           <a:xfrm>
-            <a:off x="7799832" y="2935224"/>
+            <a:off x="7799832" y="2864815"/>
             <a:ext cx="3145536" cy="256032"/>
           </a:xfrm>
           <a:prstGeom prst="rect">
@@ -11654,8 +12086,8 @@
         </p:nvSpPr>
         <p:spPr>
           <a:xfrm>
-            <a:off x="7818120" y="3300984"/>
-            <a:ext cx="3090672" cy="877824"/>
+            <a:off x="7818120" y="3230575"/>
+            <a:ext cx="3090672" cy="670255"/>
           </a:xfrm>
           <a:prstGeom prst="rect">
             <a:avLst/>
@@ -11712,12 +12144,12 @@
         </p:nvSpPr>
         <p:spPr>
           <a:xfrm>
-            <a:off x="7635240" y="4498848"/>
-            <a:ext cx="3474720" cy="1143000"/>
+            <a:off x="7635240" y="4184294"/>
+            <a:ext cx="3474720" cy="1466698"/>
           </a:xfrm>
           <a:prstGeom prst="roundRect">
             <a:avLst>
-              <a:gd name="adj" fmla="val 9600"/>
+              <a:gd name="adj" fmla="val 7481"/>
             </a:avLst>
           </a:prstGeom>
           <a:solidFill>
@@ -11739,7 +12171,7 @@
         </p:nvSpPr>
         <p:spPr>
           <a:xfrm>
-            <a:off x="7799832" y="4645152"/>
+            <a:off x="7799832" y="4330598"/>
             <a:ext cx="3145536" cy="256032"/>
           </a:xfrm>
           <a:prstGeom prst="rect">
@@ -11778,8 +12210,8 @@
         </p:nvSpPr>
         <p:spPr>
           <a:xfrm>
-            <a:off x="7799832" y="4974336"/>
-            <a:ext cx="3145536" cy="576072"/>
+            <a:off x="7799832" y="4659782"/>
+            <a:ext cx="3145536" cy="899770"/>
           </a:xfrm>
           <a:prstGeom prst="rect">
             <a:avLst/>
@@ -11805,7 +12237,7 @@
                 <a:ea typeface="Aptos" pitchFamily="34" charset="-122"/>
                 <a:cs typeface="Aptos" pitchFamily="34" charset="-120"/>
               </a:rPr>
-              <a:t>Connect the concept to public health purpose, responsible use, required safeguards, documentation, and the next action a.</a:t>
+              <a:t>Connect the concept to public health purpose, responsible use, required safeguards, documentation, and the next action a department should take.</a:t>
             </a:r>
             <a:endParaRPr lang="en-US" sz="1320" dirty="0"/>
           </a:p>
@@ -12283,7 +12715,7 @@
                 <a:ea typeface="Aptos" pitchFamily="34" charset="-122"/>
                 <a:cs typeface="Aptos" pitchFamily="34" charset="-120"/>
               </a:rPr>
-              <a:t>Use the related plays to identify decisions, participants, timing, approvals, and documentation needed for responsible.</a:t>
+              <a:t>Use the related plays to identify decisions, participants, timing, approvals, and documentation needed for responsible implementation.</a:t>
             </a:r>
             <a:endParaRPr lang="en-US" sz="1320" dirty="0"/>
           </a:p>
@@ -12902,7 +13334,7 @@
                 <a:ea typeface="Aptos" pitchFamily="34" charset="-122"/>
                 <a:cs typeface="Aptos" pitchFamily="34" charset="-120"/>
               </a:rPr>
-              <a:t>Use linked tools when your department needs a structured worksheet, template, checklist, review process, or.</a:t>
+              <a:t>Use linked tools when your department needs a structured worksheet, template, checklist, review process, or documentation artifact.</a:t>
             </a:r>
             <a:endParaRPr lang="en-US" sz="1320" dirty="0"/>
           </a:p>
@@ -13412,11 +13844,11 @@
         <p:spPr>
           <a:xfrm>
             <a:off x="7635240" y="1325880"/>
-            <a:ext cx="3474720" cy="1325880"/>
+            <a:ext cx="3474720" cy="1207008"/>
           </a:xfrm>
           <a:prstGeom prst="roundRect">
             <a:avLst>
-              <a:gd name="adj" fmla="val 8276"/>
+              <a:gd name="adj" fmla="val 9091"/>
             </a:avLst>
           </a:prstGeom>
           <a:solidFill>
@@ -13478,7 +13910,7 @@
         <p:spPr>
           <a:xfrm>
             <a:off x="7799832" y="1801368"/>
-            <a:ext cx="3145536" cy="758952"/>
+            <a:ext cx="3145536" cy="640080"/>
           </a:xfrm>
           <a:prstGeom prst="rect">
             <a:avLst/>
@@ -13518,12 +13950,12 @@
         </p:nvSpPr>
         <p:spPr>
           <a:xfrm>
-            <a:off x="7635240" y="2788920"/>
-            <a:ext cx="3474720" cy="1536192"/>
+            <a:off x="7635240" y="2670048"/>
+            <a:ext cx="3474720" cy="1377086"/>
           </a:xfrm>
           <a:prstGeom prst="roundRect">
             <a:avLst>
-              <a:gd name="adj" fmla="val 7143"/>
+              <a:gd name="adj" fmla="val 7968"/>
             </a:avLst>
           </a:prstGeom>
           <a:solidFill>
@@ -13545,7 +13977,7 @@
         </p:nvSpPr>
         <p:spPr>
           <a:xfrm>
-            <a:off x="7799832" y="2935224"/>
+            <a:off x="7799832" y="2816352"/>
             <a:ext cx="3145536" cy="256032"/>
           </a:xfrm>
           <a:prstGeom prst="rect">
@@ -13584,8 +14016,8 @@
         </p:nvSpPr>
         <p:spPr>
           <a:xfrm>
-            <a:off x="7818120" y="3300984"/>
-            <a:ext cx="3090672" cy="877824"/>
+            <a:off x="7818120" y="3182112"/>
+            <a:ext cx="3090672" cy="718718"/>
           </a:xfrm>
           <a:prstGeom prst="rect">
             <a:avLst/>
@@ -13659,12 +14091,12 @@
         </p:nvSpPr>
         <p:spPr>
           <a:xfrm>
-            <a:off x="7635240" y="4498848"/>
-            <a:ext cx="3474720" cy="1143000"/>
+            <a:off x="7635240" y="4184294"/>
+            <a:ext cx="3474720" cy="1466698"/>
           </a:xfrm>
           <a:prstGeom prst="roundRect">
             <a:avLst>
-              <a:gd name="adj" fmla="val 9600"/>
+              <a:gd name="adj" fmla="val 7481"/>
             </a:avLst>
           </a:prstGeom>
           <a:solidFill>
@@ -13686,7 +14118,7 @@
         </p:nvSpPr>
         <p:spPr>
           <a:xfrm>
-            <a:off x="7799832" y="4645152"/>
+            <a:off x="7799832" y="4330598"/>
             <a:ext cx="3145536" cy="256032"/>
           </a:xfrm>
           <a:prstGeom prst="rect">
@@ -13725,8 +14157,8 @@
         </p:nvSpPr>
         <p:spPr>
           <a:xfrm>
-            <a:off x="7799832" y="4974336"/>
-            <a:ext cx="3145536" cy="576072"/>
+            <a:off x="7799832" y="4659782"/>
+            <a:ext cx="3145536" cy="899770"/>
           </a:xfrm>
           <a:prstGeom prst="rect">
             <a:avLst/>
@@ -13752,7 +14184,7 @@
                 <a:ea typeface="Aptos" pitchFamily="34" charset="-122"/>
                 <a:cs typeface="Aptos" pitchFamily="34" charset="-120"/>
               </a:rPr>
-              <a:t>Use the assignment to test whether you can explain the concept, apply it to a realistic public health situation, and.</a:t>
+              <a:t>Use the assignment to test whether you can explain the concept, apply it to a realistic public health situation, and identify what would need review before the work moves forward.</a:t>
             </a:r>
             <a:endParaRPr lang="en-US" sz="1320" dirty="0"/>
           </a:p>
@@ -14121,11 +14553,11 @@
         <p:spPr>
           <a:xfrm>
             <a:off x="7635240" y="1325880"/>
-            <a:ext cx="3474720" cy="1325880"/>
+            <a:ext cx="3474720" cy="1207008"/>
           </a:xfrm>
           <a:prstGeom prst="roundRect">
             <a:avLst>
-              <a:gd name="adj" fmla="val 8276"/>
+              <a:gd name="adj" fmla="val 9091"/>
             </a:avLst>
           </a:prstGeom>
           <a:solidFill>
@@ -14187,7 +14619,7 @@
         <p:spPr>
           <a:xfrm>
             <a:off x="7799832" y="1801368"/>
-            <a:ext cx="3145536" cy="758952"/>
+            <a:ext cx="3145536" cy="640080"/>
           </a:xfrm>
           <a:prstGeom prst="rect">
             <a:avLst/>
@@ -14227,12 +14659,12 @@
         </p:nvSpPr>
         <p:spPr>
           <a:xfrm>
-            <a:off x="7635240" y="2788920"/>
-            <a:ext cx="3474720" cy="1536192"/>
+            <a:off x="7635240" y="2670048"/>
+            <a:ext cx="3474720" cy="1377086"/>
           </a:xfrm>
           <a:prstGeom prst="roundRect">
             <a:avLst>
-              <a:gd name="adj" fmla="val 7143"/>
+              <a:gd name="adj" fmla="val 7968"/>
             </a:avLst>
           </a:prstGeom>
           <a:solidFill>
@@ -14254,7 +14686,7 @@
         </p:nvSpPr>
         <p:spPr>
           <a:xfrm>
-            <a:off x="7799832" y="2935224"/>
+            <a:off x="7799832" y="2816352"/>
             <a:ext cx="3145536" cy="256032"/>
           </a:xfrm>
           <a:prstGeom prst="rect">
@@ -14293,8 +14725,8 @@
         </p:nvSpPr>
         <p:spPr>
           <a:xfrm>
-            <a:off x="7818120" y="3300984"/>
-            <a:ext cx="3090672" cy="877824"/>
+            <a:off x="7818120" y="3182112"/>
+            <a:ext cx="3090672" cy="718718"/>
           </a:xfrm>
           <a:prstGeom prst="rect">
             <a:avLst/>
@@ -14368,12 +14800,12 @@
         </p:nvSpPr>
         <p:spPr>
           <a:xfrm>
-            <a:off x="7635240" y="4498848"/>
-            <a:ext cx="3474720" cy="1143000"/>
+            <a:off x="7635240" y="4184294"/>
+            <a:ext cx="3474720" cy="1466698"/>
           </a:xfrm>
           <a:prstGeom prst="roundRect">
             <a:avLst>
-              <a:gd name="adj" fmla="val 9600"/>
+              <a:gd name="adj" fmla="val 7481"/>
             </a:avLst>
           </a:prstGeom>
           <a:solidFill>
@@ -14395,7 +14827,7 @@
         </p:nvSpPr>
         <p:spPr>
           <a:xfrm>
-            <a:off x="7799832" y="4645152"/>
+            <a:off x="7799832" y="4330598"/>
             <a:ext cx="3145536" cy="256032"/>
           </a:xfrm>
           <a:prstGeom prst="rect">
@@ -14434,8 +14866,8 @@
         </p:nvSpPr>
         <p:spPr>
           <a:xfrm>
-            <a:off x="7799832" y="4974336"/>
-            <a:ext cx="3145536" cy="576072"/>
+            <a:off x="7799832" y="4659782"/>
+            <a:ext cx="3145536" cy="899770"/>
           </a:xfrm>
           <a:prstGeom prst="rect">
             <a:avLst/>
@@ -14461,7 +14893,7 @@
                 <a:ea typeface="Aptos" pitchFamily="34" charset="-122"/>
                 <a:cs typeface="Aptos" pitchFamily="34" charset="-120"/>
               </a:rPr>
-              <a:t>Connect the concept to public health purpose, responsible use, required safeguards, documentation, and the next action a.</a:t>
+              <a:t>Connect the concept to public health purpose, responsible use, required safeguards, documentation, and the next action a department should take.</a:t>
             </a:r>
             <a:endParaRPr lang="en-US" sz="1320" dirty="0"/>
           </a:p>
@@ -14830,11 +15262,11 @@
         <p:spPr>
           <a:xfrm>
             <a:off x="7635240" y="1325880"/>
-            <a:ext cx="3474720" cy="1325880"/>
+            <a:ext cx="3474720" cy="1207008"/>
           </a:xfrm>
           <a:prstGeom prst="roundRect">
             <a:avLst>
-              <a:gd name="adj" fmla="val 8276"/>
+              <a:gd name="adj" fmla="val 9091"/>
             </a:avLst>
           </a:prstGeom>
           <a:solidFill>
@@ -14896,7 +15328,7 @@
         <p:spPr>
           <a:xfrm>
             <a:off x="7799832" y="1801368"/>
-            <a:ext cx="3145536" cy="758952"/>
+            <a:ext cx="3145536" cy="640080"/>
           </a:xfrm>
           <a:prstGeom prst="rect">
             <a:avLst/>
@@ -14936,12 +15368,12 @@
         </p:nvSpPr>
         <p:spPr>
           <a:xfrm>
-            <a:off x="7635240" y="2788920"/>
-            <a:ext cx="3474720" cy="1536192"/>
+            <a:off x="7635240" y="2670048"/>
+            <a:ext cx="3474720" cy="1377086"/>
           </a:xfrm>
           <a:prstGeom prst="roundRect">
             <a:avLst>
-              <a:gd name="adj" fmla="val 7143"/>
+              <a:gd name="adj" fmla="val 7968"/>
             </a:avLst>
           </a:prstGeom>
           <a:solidFill>
@@ -14963,8 +15395,8 @@
         </p:nvSpPr>
         <p:spPr>
           <a:xfrm>
-            <a:off x="7799832" y="2935224"/>
-            <a:ext cx="3145536" cy="256032"/>
+            <a:off x="7799832" y="2798064"/>
+            <a:ext cx="3145536" cy="237744"/>
           </a:xfrm>
           <a:prstGeom prst="rect">
             <a:avLst/>
@@ -14980,7 +15412,7 @@
               <a:buNone/>
             </a:pPr>
             <a:r>
-              <a:rPr lang="en-US" sz="1300" b="1" dirty="0">
+              <a:rPr lang="en-US" sz="1250" b="1" dirty="0">
                 <a:solidFill>
                   <a:srgbClr val="0068B7"/>
                 </a:solidFill>
@@ -14988,101 +15420,317 @@
                 <a:ea typeface="Aptos" pitchFamily="34" charset="-122"/>
                 <a:cs typeface="Aptos" pitchFamily="34" charset="-120"/>
               </a:rPr>
-              <a:t>Concept checkpoints</a:t>
-            </a:r>
-            <a:endParaRPr lang="en-US" sz="1300" dirty="0"/>
-          </a:p>
-        </p:txBody>
-      </p:sp>
-      <p:sp>
-        <p:nvSpPr>
-          <p:cNvPr id="15" name="Text 13"/>
-          <p:cNvSpPr/>
-          <p:nvPr/>
-        </p:nvSpPr>
-        <p:spPr>
-          <a:xfrm>
-            <a:off x="7818120" y="3300984"/>
-            <a:ext cx="3090672" cy="877824"/>
-          </a:xfrm>
-          <a:prstGeom prst="rect">
-            <a:avLst/>
-          </a:prstGeom>
-          <a:noFill/>
-          <a:ln/>
-        </p:spPr>
-        <p:txBody>
-          <a:bodyPr wrap="square" lIns="508" tIns="508" rIns="508" bIns="508" rtlCol="0" anchor="t">
+              <a:t>Governance pathway</a:t>
+            </a:r>
+            <a:endParaRPr lang="en-US" sz="1250" dirty="0"/>
+          </a:p>
+        </p:txBody>
+      </p:sp>
+      <p:sp>
+        <p:nvSpPr>
+          <p:cNvPr id="15" name="Shape 13"/>
+          <p:cNvSpPr/>
+          <p:nvPr/>
+        </p:nvSpPr>
+        <p:spPr>
+          <a:xfrm>
+            <a:off x="8763000" y="3351276"/>
+            <a:ext cx="164592" cy="0"/>
+          </a:xfrm>
+          <a:prstGeom prst="line">
+            <a:avLst/>
+          </a:prstGeom>
+          <a:noFill/>
+          <a:ln w="15240">
+            <a:solidFill>
+              <a:srgbClr val="8ABBD8"/>
+            </a:solidFill>
+            <a:prstDash val="solid"/>
+          </a:ln>
+        </p:spPr>
+      </p:sp>
+      <p:sp>
+        <p:nvSpPr>
+          <p:cNvPr id="16" name="Shape 14"/>
+          <p:cNvSpPr/>
+          <p:nvPr/>
+        </p:nvSpPr>
+        <p:spPr>
+          <a:xfrm>
+            <a:off x="7872984" y="3200400"/>
+            <a:ext cx="890016" cy="301752"/>
+          </a:xfrm>
+          <a:prstGeom prst="roundRect">
+            <a:avLst>
+              <a:gd name="adj" fmla="val 24242"/>
+            </a:avLst>
+          </a:prstGeom>
+          <a:solidFill>
+            <a:srgbClr val="0068B7"/>
+          </a:solidFill>
+          <a:ln w="12700">
+            <a:solidFill>
+              <a:srgbClr val="0068B7"/>
+            </a:solidFill>
+            <a:prstDash val="solid"/>
+          </a:ln>
+        </p:spPr>
+      </p:sp>
+      <p:sp>
+        <p:nvSpPr>
+          <p:cNvPr id="17" name="Text 15"/>
+          <p:cNvSpPr/>
+          <p:nvPr/>
+        </p:nvSpPr>
+        <p:spPr>
+          <a:xfrm>
+            <a:off x="7909560" y="3273552"/>
+            <a:ext cx="816864" cy="146304"/>
+          </a:xfrm>
+          <a:prstGeom prst="rect">
+            <a:avLst/>
+          </a:prstGeom>
+          <a:noFill/>
+          <a:ln/>
+        </p:spPr>
+        <p:txBody>
+          <a:bodyPr wrap="square" lIns="0" tIns="0" rIns="0" bIns="0" rtlCol="0" anchor="ctr">
             <a:normAutofit/>
           </a:bodyPr>
           <a:lstStyle/>
           <a:p>
-            <a:pPr indent="0" marL="0">
-              <a:buNone/>
-            </a:pPr>
-            <a:r>
-              <a:rPr lang="en-US" sz="1220" dirty="0">
-                <a:solidFill>
-                  <a:srgbClr val="17364A"/>
-                </a:solidFill>
-                <a:latin typeface="Aptos" pitchFamily="34" charset="0"/>
-                <a:ea typeface="Aptos" pitchFamily="34" charset="-122"/>
-                <a:cs typeface="Aptos" pitchFamily="34" charset="-120"/>
-              </a:rPr>
-              <a:t>This national-level module is intended for training and planning.</a:t>
-            </a:r>
-            <a:endParaRPr lang="en-US" sz="1220" dirty="0"/>
-          </a:p>
-          <a:p>
-            <a:pPr indent="0" marL="0">
-              <a:buNone/>
-            </a:pPr>
-            <a:r>
-              <a:rPr lang="en-US" sz="1220" dirty="0">
-                <a:solidFill>
-                  <a:srgbClr val="17364A"/>
-                </a:solidFill>
-                <a:latin typeface="Aptos" pitchFamily="34" charset="0"/>
-                <a:ea typeface="Aptos" pitchFamily="34" charset="-122"/>
-                <a:cs typeface="Aptos" pitchFamily="34" charset="-120"/>
-              </a:rPr>
-              <a:t>It does not replace legal, privacy, procurement, civil rights,.</a:t>
-            </a:r>
-            <a:endParaRPr lang="en-US" sz="1220" dirty="0"/>
-          </a:p>
-          <a:p>
-            <a:pPr indent="0" marL="0">
-              <a:buNone/>
-            </a:pPr>
-            <a:r>
-              <a:rPr lang="en-US" sz="1220" dirty="0">
-                <a:solidFill>
-                  <a:srgbClr val="17364A"/>
-                </a:solidFill>
-                <a:latin typeface="Aptos" pitchFamily="34" charset="0"/>
-                <a:ea typeface="Aptos" pitchFamily="34" charset="-122"/>
-                <a:cs typeface="Aptos" pitchFamily="34" charset="-120"/>
-              </a:rPr>
-              <a:t>Learners should confirm applicable requirements in their own.</a:t>
-            </a:r>
-            <a:endParaRPr lang="en-US" sz="1220" dirty="0"/>
-          </a:p>
-        </p:txBody>
-      </p:sp>
-      <p:sp>
-        <p:nvSpPr>
-          <p:cNvPr id="16" name="Shape 14"/>
-          <p:cNvSpPr/>
-          <p:nvPr/>
-        </p:nvSpPr>
-        <p:spPr>
-          <a:xfrm>
-            <a:off x="7635240" y="4498848"/>
-            <a:ext cx="3474720" cy="1143000"/>
+            <a:pPr algn="ctr" indent="0" marL="0">
+              <a:buNone/>
+            </a:pPr>
+            <a:r>
+              <a:rPr lang="en-US" sz="880" b="1" dirty="0">
+                <a:solidFill>
+                  <a:srgbClr val="FFFFFF"/>
+                </a:solidFill>
+                <a:latin typeface="Aptos" pitchFamily="34" charset="0"/>
+                <a:ea typeface="Aptos" pitchFamily="34" charset="-122"/>
+                <a:cs typeface="Aptos" pitchFamily="34" charset="-120"/>
+              </a:rPr>
+              <a:t>Submit</a:t>
+            </a:r>
+            <a:endParaRPr lang="en-US" sz="880" dirty="0"/>
+          </a:p>
+        </p:txBody>
+      </p:sp>
+      <p:sp>
+        <p:nvSpPr>
+          <p:cNvPr id="18" name="Shape 16"/>
+          <p:cNvSpPr/>
+          <p:nvPr/>
+        </p:nvSpPr>
+        <p:spPr>
+          <a:xfrm>
+            <a:off x="9817608" y="3351276"/>
+            <a:ext cx="164592" cy="0"/>
+          </a:xfrm>
+          <a:prstGeom prst="line">
+            <a:avLst/>
+          </a:prstGeom>
+          <a:noFill/>
+          <a:ln w="15240">
+            <a:solidFill>
+              <a:srgbClr val="8ABBD8"/>
+            </a:solidFill>
+            <a:prstDash val="solid"/>
+          </a:ln>
+        </p:spPr>
+      </p:sp>
+      <p:sp>
+        <p:nvSpPr>
+          <p:cNvPr id="19" name="Shape 17"/>
+          <p:cNvSpPr/>
+          <p:nvPr/>
+        </p:nvSpPr>
+        <p:spPr>
+          <a:xfrm>
+            <a:off x="8927592" y="3200400"/>
+            <a:ext cx="890016" cy="301752"/>
           </a:xfrm>
           <a:prstGeom prst="roundRect">
             <a:avLst>
-              <a:gd name="adj" fmla="val 9600"/>
+              <a:gd name="adj" fmla="val 24242"/>
+            </a:avLst>
+          </a:prstGeom>
+          <a:solidFill>
+            <a:srgbClr val="2F8A28"/>
+          </a:solidFill>
+          <a:ln w="12700">
+            <a:solidFill>
+              <a:srgbClr val="2F8A28"/>
+            </a:solidFill>
+            <a:prstDash val="solid"/>
+          </a:ln>
+        </p:spPr>
+      </p:sp>
+      <p:sp>
+        <p:nvSpPr>
+          <p:cNvPr id="20" name="Text 18"/>
+          <p:cNvSpPr/>
+          <p:nvPr/>
+        </p:nvSpPr>
+        <p:spPr>
+          <a:xfrm>
+            <a:off x="8964168" y="3273552"/>
+            <a:ext cx="816864" cy="146304"/>
+          </a:xfrm>
+          <a:prstGeom prst="rect">
+            <a:avLst/>
+          </a:prstGeom>
+          <a:noFill/>
+          <a:ln/>
+        </p:spPr>
+        <p:txBody>
+          <a:bodyPr wrap="square" lIns="0" tIns="0" rIns="0" bIns="0" rtlCol="0" anchor="ctr">
+            <a:normAutofit/>
+          </a:bodyPr>
+          <a:lstStyle/>
+          <a:p>
+            <a:pPr algn="ctr" indent="0" marL="0">
+              <a:buNone/>
+            </a:pPr>
+            <a:r>
+              <a:rPr lang="en-US" sz="880" b="1" dirty="0">
+                <a:solidFill>
+                  <a:srgbClr val="FFFFFF"/>
+                </a:solidFill>
+                <a:latin typeface="Aptos" pitchFamily="34" charset="0"/>
+                <a:ea typeface="Aptos" pitchFamily="34" charset="-122"/>
+                <a:cs typeface="Aptos" pitchFamily="34" charset="-120"/>
+              </a:rPr>
+              <a:t>Review</a:t>
+            </a:r>
+            <a:endParaRPr lang="en-US" sz="880" dirty="0"/>
+          </a:p>
+        </p:txBody>
+      </p:sp>
+      <p:sp>
+        <p:nvSpPr>
+          <p:cNvPr id="21" name="Shape 19"/>
+          <p:cNvSpPr/>
+          <p:nvPr/>
+        </p:nvSpPr>
+        <p:spPr>
+          <a:xfrm>
+            <a:off x="9982200" y="3200400"/>
+            <a:ext cx="890016" cy="301752"/>
+          </a:xfrm>
+          <a:prstGeom prst="roundRect">
+            <a:avLst>
+              <a:gd name="adj" fmla="val 24242"/>
+            </a:avLst>
+          </a:prstGeom>
+          <a:solidFill>
+            <a:srgbClr val="6A4CA3"/>
+          </a:solidFill>
+          <a:ln w="12700">
+            <a:solidFill>
+              <a:srgbClr val="6A4CA3"/>
+            </a:solidFill>
+            <a:prstDash val="solid"/>
+          </a:ln>
+        </p:spPr>
+      </p:sp>
+      <p:sp>
+        <p:nvSpPr>
+          <p:cNvPr id="22" name="Text 20"/>
+          <p:cNvSpPr/>
+          <p:nvPr/>
+        </p:nvSpPr>
+        <p:spPr>
+          <a:xfrm>
+            <a:off x="10018776" y="3273552"/>
+            <a:ext cx="816864" cy="146304"/>
+          </a:xfrm>
+          <a:prstGeom prst="rect">
+            <a:avLst/>
+          </a:prstGeom>
+          <a:noFill/>
+          <a:ln/>
+        </p:spPr>
+        <p:txBody>
+          <a:bodyPr wrap="square" lIns="0" tIns="0" rIns="0" bIns="0" rtlCol="0" anchor="ctr">
+            <a:normAutofit/>
+          </a:bodyPr>
+          <a:lstStyle/>
+          <a:p>
+            <a:pPr algn="ctr" indent="0" marL="0">
+              <a:buNone/>
+            </a:pPr>
+            <a:r>
+              <a:rPr lang="en-US" sz="880" b="1" dirty="0">
+                <a:solidFill>
+                  <a:srgbClr val="FFFFFF"/>
+                </a:solidFill>
+                <a:latin typeface="Aptos" pitchFamily="34" charset="0"/>
+                <a:ea typeface="Aptos" pitchFamily="34" charset="-122"/>
+                <a:cs typeface="Aptos" pitchFamily="34" charset="-120"/>
+              </a:rPr>
+              <a:t>Oversee</a:t>
+            </a:r>
+            <a:endParaRPr lang="en-US" sz="880" dirty="0"/>
+          </a:p>
+        </p:txBody>
+      </p:sp>
+      <p:sp>
+        <p:nvSpPr>
+          <p:cNvPr id="23" name="Text 21"/>
+          <p:cNvSpPr/>
+          <p:nvPr/>
+        </p:nvSpPr>
+        <p:spPr>
+          <a:xfrm>
+            <a:off x="7854696" y="3694176"/>
+            <a:ext cx="3035808" cy="206654"/>
+          </a:xfrm>
+          <a:prstGeom prst="rect">
+            <a:avLst/>
+          </a:prstGeom>
+          <a:noFill/>
+          <a:ln/>
+        </p:spPr>
+        <p:txBody>
+          <a:bodyPr wrap="square" lIns="254" tIns="254" rIns="254" bIns="254" rtlCol="0" anchor="t">
+            <a:normAutofit/>
+          </a:bodyPr>
+          <a:lstStyle/>
+          <a:p>
+            <a:pPr indent="0" marL="0">
+              <a:buNone/>
+            </a:pPr>
+            <a:r>
+              <a:rPr lang="en-US" sz="1120" dirty="0">
+                <a:solidFill>
+                  <a:srgbClr val="17364A"/>
+                </a:solidFill>
+                <a:latin typeface="Aptos" pitchFamily="34" charset="0"/>
+                <a:ea typeface="Aptos" pitchFamily="34" charset="-122"/>
+                <a:cs typeface="Aptos" pitchFamily="34" charset="-120"/>
+              </a:rPr>
+              <a:t>A proposed AI use should move through documented review before it becomes an operational workflow.</a:t>
+            </a:r>
+            <a:endParaRPr lang="en-US" sz="1120" dirty="0"/>
+          </a:p>
+        </p:txBody>
+      </p:sp>
+      <p:sp>
+        <p:nvSpPr>
+          <p:cNvPr id="24" name="Shape 22"/>
+          <p:cNvSpPr/>
+          <p:nvPr/>
+        </p:nvSpPr>
+        <p:spPr>
+          <a:xfrm>
+            <a:off x="7635240" y="4184294"/>
+            <a:ext cx="3474720" cy="1466698"/>
+          </a:xfrm>
+          <a:prstGeom prst="roundRect">
+            <a:avLst>
+              <a:gd name="adj" fmla="val 7481"/>
             </a:avLst>
           </a:prstGeom>
           <a:solidFill>
@@ -15098,13 +15746,13 @@
       </p:sp>
       <p:sp>
         <p:nvSpPr>
-          <p:cNvPr id="17" name="Text 15"/>
-          <p:cNvSpPr/>
-          <p:nvPr/>
-        </p:nvSpPr>
-        <p:spPr>
-          <a:xfrm>
-            <a:off x="7799832" y="4645152"/>
+          <p:cNvPr id="25" name="Text 23"/>
+          <p:cNvSpPr/>
+          <p:nvPr/>
+        </p:nvSpPr>
+        <p:spPr>
+          <a:xfrm>
+            <a:off x="7799832" y="4330598"/>
             <a:ext cx="3145536" cy="256032"/>
           </a:xfrm>
           <a:prstGeom prst="rect">
@@ -15137,14 +15785,14 @@
       </p:sp>
       <p:sp>
         <p:nvSpPr>
-          <p:cNvPr id="18" name="Text 16"/>
-          <p:cNvSpPr/>
-          <p:nvPr/>
-        </p:nvSpPr>
-        <p:spPr>
-          <a:xfrm>
-            <a:off x="7799832" y="4974336"/>
-            <a:ext cx="3145536" cy="576072"/>
+          <p:cNvPr id="26" name="Text 24"/>
+          <p:cNvSpPr/>
+          <p:nvPr/>
+        </p:nvSpPr>
+        <p:spPr>
+          <a:xfrm>
+            <a:off x="7799832" y="4659782"/>
+            <a:ext cx="3145536" cy="899770"/>
           </a:xfrm>
           <a:prstGeom prst="rect">
             <a:avLst/>
@@ -15170,7 +15818,7 @@
                 <a:ea typeface="Aptos" pitchFamily="34" charset="-122"/>
                 <a:cs typeface="Aptos" pitchFamily="34" charset="-120"/>
               </a:rPr>
-              <a:t>Translate this concept into clear decision rights, review steps, documentation expectations, and escalation paths before.</a:t>
+              <a:t>Translate this concept into clear decision rights, review steps, documentation expectations, and escalation paths before an AI-supported workflow is approved.</a:t>
             </a:r>
             <a:endParaRPr lang="en-US" sz="1320" dirty="0"/>
           </a:p>
@@ -15539,11 +16187,11 @@
         <p:spPr>
           <a:xfrm>
             <a:off x="7635240" y="1325880"/>
-            <a:ext cx="3474720" cy="1325880"/>
+            <a:ext cx="3474720" cy="1207008"/>
           </a:xfrm>
           <a:prstGeom prst="roundRect">
             <a:avLst>
-              <a:gd name="adj" fmla="val 8276"/>
+              <a:gd name="adj" fmla="val 9091"/>
             </a:avLst>
           </a:prstGeom>
           <a:solidFill>
@@ -15605,7 +16253,7 @@
         <p:spPr>
           <a:xfrm>
             <a:off x="7799832" y="1801368"/>
-            <a:ext cx="3145536" cy="758952"/>
+            <a:ext cx="3145536" cy="640080"/>
           </a:xfrm>
           <a:prstGeom prst="rect">
             <a:avLst/>
@@ -15631,7 +16279,7 @@
                 <a:ea typeface="Aptos" pitchFamily="34" charset="-122"/>
                 <a:cs typeface="Aptos" pitchFamily="34" charset="-120"/>
               </a:rPr>
-              <a:t>Public health agencies often face short-term funding cycles and urgent operational needs.</a:t>
+              <a:t>Public health agencies often face short-term funding cycles and urgent operational.</a:t>
             </a:r>
             <a:endParaRPr lang="en-US" sz="1320" dirty="0"/>
           </a:p>
@@ -15645,12 +16293,12 @@
         </p:nvSpPr>
         <p:spPr>
           <a:xfrm>
-            <a:off x="7635240" y="2788920"/>
-            <a:ext cx="3474720" cy="1536192"/>
+            <a:off x="7635240" y="2670048"/>
+            <a:ext cx="3474720" cy="1377086"/>
           </a:xfrm>
           <a:prstGeom prst="roundRect">
             <a:avLst>
-              <a:gd name="adj" fmla="val 7143"/>
+              <a:gd name="adj" fmla="val 7968"/>
             </a:avLst>
           </a:prstGeom>
           <a:solidFill>
@@ -15672,7 +16320,7 @@
         </p:nvSpPr>
         <p:spPr>
           <a:xfrm>
-            <a:off x="7799832" y="2935224"/>
+            <a:off x="7799832" y="2816352"/>
             <a:ext cx="3145536" cy="256032"/>
           </a:xfrm>
           <a:prstGeom prst="rect">
@@ -15711,8 +16359,8 @@
         </p:nvSpPr>
         <p:spPr>
           <a:xfrm>
-            <a:off x="7818120" y="3300984"/>
-            <a:ext cx="3090672" cy="877824"/>
+            <a:off x="7818120" y="3182112"/>
+            <a:ext cx="3090672" cy="718718"/>
           </a:xfrm>
           <a:prstGeom prst="rect">
             <a:avLst/>
@@ -15786,12 +16434,12 @@
         </p:nvSpPr>
         <p:spPr>
           <a:xfrm>
-            <a:off x="7635240" y="4498848"/>
-            <a:ext cx="3474720" cy="1143000"/>
+            <a:off x="7635240" y="4184294"/>
+            <a:ext cx="3474720" cy="1466698"/>
           </a:xfrm>
           <a:prstGeom prst="roundRect">
             <a:avLst>
-              <a:gd name="adj" fmla="val 9600"/>
+              <a:gd name="adj" fmla="val 7481"/>
             </a:avLst>
           </a:prstGeom>
           <a:solidFill>
@@ -15813,7 +16461,7 @@
         </p:nvSpPr>
         <p:spPr>
           <a:xfrm>
-            <a:off x="7799832" y="4645152"/>
+            <a:off x="7799832" y="4330598"/>
             <a:ext cx="3145536" cy="256032"/>
           </a:xfrm>
           <a:prstGeom prst="rect">
@@ -15852,8 +16500,8 @@
         </p:nvSpPr>
         <p:spPr>
           <a:xfrm>
-            <a:off x="7799832" y="4974336"/>
-            <a:ext cx="3145536" cy="576072"/>
+            <a:off x="7799832" y="4659782"/>
+            <a:ext cx="3145536" cy="899770"/>
           </a:xfrm>
           <a:prstGeom prst="rect">
             <a:avLst/>
@@ -15879,7 +16527,7 @@
                 <a:ea typeface="Aptos" pitchFamily="34" charset="-122"/>
                 <a:cs typeface="Aptos" pitchFamily="34" charset="-120"/>
               </a:rPr>
-              <a:t>Connect the concept to public health purpose, responsible use, required safeguards, documentation, and the next action a.</a:t>
+              <a:t>Connect the concept to public health purpose, responsible use, required safeguards, documentation, and the next action a department should take.</a:t>
             </a:r>
             <a:endParaRPr lang="en-US" sz="1320" dirty="0"/>
           </a:p>
@@ -16248,11 +16896,11 @@
         <p:spPr>
           <a:xfrm>
             <a:off x="7635240" y="1325880"/>
-            <a:ext cx="3474720" cy="1325880"/>
+            <a:ext cx="3474720" cy="1255471"/>
           </a:xfrm>
           <a:prstGeom prst="roundRect">
             <a:avLst>
-              <a:gd name="adj" fmla="val 8276"/>
+              <a:gd name="adj" fmla="val 8740"/>
             </a:avLst>
           </a:prstGeom>
           <a:solidFill>
@@ -16314,7 +16962,7 @@
         <p:spPr>
           <a:xfrm>
             <a:off x="7799832" y="1801368"/>
-            <a:ext cx="3145536" cy="758952"/>
+            <a:ext cx="3145536" cy="688543"/>
           </a:xfrm>
           <a:prstGeom prst="rect">
             <a:avLst/>
@@ -16354,12 +17002,12 @@
         </p:nvSpPr>
         <p:spPr>
           <a:xfrm>
-            <a:off x="7635240" y="2788920"/>
-            <a:ext cx="3474720" cy="1536192"/>
+            <a:off x="7635240" y="2718511"/>
+            <a:ext cx="3474720" cy="1328623"/>
           </a:xfrm>
           <a:prstGeom prst="roundRect">
             <a:avLst>
-              <a:gd name="adj" fmla="val 7143"/>
+              <a:gd name="adj" fmla="val 8259"/>
             </a:avLst>
           </a:prstGeom>
           <a:solidFill>
@@ -16381,7 +17029,7 @@
         </p:nvSpPr>
         <p:spPr>
           <a:xfrm>
-            <a:off x="7799832" y="2935224"/>
+            <a:off x="7799832" y="2864815"/>
             <a:ext cx="3145536" cy="256032"/>
           </a:xfrm>
           <a:prstGeom prst="rect">
@@ -16420,8 +17068,8 @@
         </p:nvSpPr>
         <p:spPr>
           <a:xfrm>
-            <a:off x="7818120" y="3300984"/>
-            <a:ext cx="3090672" cy="877824"/>
+            <a:off x="7818120" y="3230575"/>
+            <a:ext cx="3090672" cy="670255"/>
           </a:xfrm>
           <a:prstGeom prst="rect">
             <a:avLst/>
@@ -16495,12 +17143,12 @@
         </p:nvSpPr>
         <p:spPr>
           <a:xfrm>
-            <a:off x="7635240" y="4498848"/>
-            <a:ext cx="3474720" cy="1143000"/>
+            <a:off x="7635240" y="4184294"/>
+            <a:ext cx="3474720" cy="1466698"/>
           </a:xfrm>
           <a:prstGeom prst="roundRect">
             <a:avLst>
-              <a:gd name="adj" fmla="val 9600"/>
+              <a:gd name="adj" fmla="val 7481"/>
             </a:avLst>
           </a:prstGeom>
           <a:solidFill>
@@ -16522,7 +17170,7 @@
         </p:nvSpPr>
         <p:spPr>
           <a:xfrm>
-            <a:off x="7799832" y="4645152"/>
+            <a:off x="7799832" y="4330598"/>
             <a:ext cx="3145536" cy="256032"/>
           </a:xfrm>
           <a:prstGeom prst="rect">
@@ -16561,8 +17209,8 @@
         </p:nvSpPr>
         <p:spPr>
           <a:xfrm>
-            <a:off x="7799832" y="4974336"/>
-            <a:ext cx="3145536" cy="576072"/>
+            <a:off x="7799832" y="4659782"/>
+            <a:ext cx="3145536" cy="899770"/>
           </a:xfrm>
           <a:prstGeom prst="rect">
             <a:avLst/>
@@ -16588,7 +17236,7 @@
                 <a:ea typeface="Aptos" pitchFamily="34" charset="-122"/>
                 <a:cs typeface="Aptos" pitchFamily="34" charset="-120"/>
               </a:rPr>
-              <a:t>Connect the concept to public health purpose, responsible use, required safeguards, documentation, and the next action a.</a:t>
+              <a:t>Connect the concept to public health purpose, responsible use, required safeguards, documentation, and the next action a department should take.</a:t>
             </a:r>
             <a:endParaRPr lang="en-US" sz="1320" dirty="0"/>
           </a:p>

--- a/downloads/presentations/modules/exe-420.pptx
+++ b/downloads/presentations/modules/exe-420.pptx
@@ -3243,8 +3243,8 @@
         </p:nvSpPr>
         <p:spPr>
           <a:xfrm>
-            <a:off x="868680" y="1508760"/>
-            <a:ext cx="6309360" cy="4160520"/>
+            <a:off x="822960" y="1463040"/>
+            <a:ext cx="6565392" cy="4343400"/>
           </a:xfrm>
           <a:prstGeom prst="rect">
             <a:avLst/>
@@ -3262,7 +3262,7 @@
               <a:buNone/>
             </a:pPr>
             <a:r>
-              <a:rPr lang="en-US" sz="2100" dirty="0">
+              <a:rPr lang="en-US" sz="1920" dirty="0">
                 <a:solidFill>
                   <a:srgbClr val="003A63"/>
                 </a:solidFill>
@@ -3272,14 +3272,14 @@
               </a:rPr>
               <a:t>• An AI business case should begin with a problem statement.</a:t>
             </a:r>
-            <a:endParaRPr lang="en-US" sz="2100" dirty="0"/>
-          </a:p>
-          <a:p>
-            <a:pPr indent="0" marL="0">
-              <a:buNone/>
-            </a:pPr>
-            <a:r>
-              <a:rPr lang="en-US" sz="2100" dirty="0">
+            <a:endParaRPr lang="en-US" sz="1920" dirty="0"/>
+          </a:p>
+          <a:p>
+            <a:pPr indent="0" marL="0">
+              <a:buNone/>
+            </a:pPr>
+            <a:r>
+              <a:rPr lang="en-US" sz="1920" dirty="0">
                 <a:solidFill>
                   <a:srgbClr val="003A63"/>
                 </a:solidFill>
@@ -3287,16 +3287,16 @@
                 <a:ea typeface="Aptos" pitchFamily="34" charset="-122"/>
                 <a:cs typeface="Aptos" pitchFamily="34" charset="-120"/>
               </a:rPr>
-              <a:t>• The problem should be operational and measurable, such as delayed case review, inconsistent.</a:t>
-            </a:r>
-            <a:endParaRPr lang="en-US" sz="2100" dirty="0"/>
-          </a:p>
-          <a:p>
-            <a:pPr indent="0" marL="0">
-              <a:buNone/>
-            </a:pPr>
-            <a:r>
-              <a:rPr lang="en-US" sz="2100" dirty="0">
+              <a:t>• The problem should be operational and measurable, such as delayed case.</a:t>
+            </a:r>
+            <a:endParaRPr lang="en-US" sz="1920" dirty="0"/>
+          </a:p>
+          <a:p>
+            <a:pPr indent="0" marL="0">
+              <a:buNone/>
+            </a:pPr>
+            <a:r>
+              <a:rPr lang="en-US" sz="1920" dirty="0">
                 <a:solidFill>
                   <a:srgbClr val="003A63"/>
                 </a:solidFill>
@@ -3306,7 +3306,7 @@
               </a:rPr>
               <a:t>• A vague desire to 'use AI' is not a sufficient problem statement.</a:t>
             </a:r>
-            <a:endParaRPr lang="en-US" sz="2100" dirty="0"/>
+            <a:endParaRPr lang="en-US" sz="1920" dirty="0"/>
           </a:p>
         </p:txBody>
       </p:sp>
@@ -3318,12 +3318,12 @@
         </p:nvSpPr>
         <p:spPr>
           <a:xfrm>
-            <a:off x="7635240" y="1325880"/>
-            <a:ext cx="3474720" cy="1207008"/>
+            <a:off x="7543800" y="1325880"/>
+            <a:ext cx="3611880" cy="1261872"/>
           </a:xfrm>
           <a:prstGeom prst="roundRect">
             <a:avLst>
-              <a:gd name="adj" fmla="val 9091"/>
+              <a:gd name="adj" fmla="val 8696"/>
             </a:avLst>
           </a:prstGeom>
           <a:solidFill>
@@ -3345,8 +3345,8 @@
         </p:nvSpPr>
         <p:spPr>
           <a:xfrm>
-            <a:off x="7799832" y="1472184"/>
-            <a:ext cx="3145536" cy="256032"/>
+            <a:off x="7708392" y="1453896"/>
+            <a:ext cx="3282696" cy="228600"/>
           </a:xfrm>
           <a:prstGeom prst="rect">
             <a:avLst/>
@@ -3362,7 +3362,7 @@
               <a:buNone/>
             </a:pPr>
             <a:r>
-              <a:rPr lang="en-US" sz="1300" b="1" dirty="0">
+              <a:rPr lang="en-US" sz="1220" b="1" dirty="0">
                 <a:solidFill>
                   <a:srgbClr val="0068B7"/>
                 </a:solidFill>
@@ -3372,7 +3372,7 @@
               </a:rPr>
               <a:t>Governance lens</a:t>
             </a:r>
-            <a:endParaRPr lang="en-US" sz="1300" dirty="0"/>
+            <a:endParaRPr lang="en-US" sz="1220" dirty="0"/>
           </a:p>
         </p:txBody>
       </p:sp>
@@ -3384,8 +3384,8 @@
         </p:nvSpPr>
         <p:spPr>
           <a:xfrm>
-            <a:off x="7799832" y="1801368"/>
-            <a:ext cx="3145536" cy="640080"/>
+            <a:off x="7708392" y="1764792"/>
+            <a:ext cx="3282696" cy="749808"/>
           </a:xfrm>
           <a:prstGeom prst="rect">
             <a:avLst/>
@@ -3403,7 +3403,7 @@
               <a:buNone/>
             </a:pPr>
             <a:r>
-              <a:rPr lang="en-US" sz="1320" dirty="0">
+              <a:rPr lang="en-US" sz="1220" dirty="0">
                 <a:solidFill>
                   <a:srgbClr val="17364A"/>
                 </a:solidFill>
@@ -3413,7 +3413,7 @@
               </a:rPr>
               <a:t>An AI business case should begin with a problem statement.</a:t>
             </a:r>
-            <a:endParaRPr lang="en-US" sz="1320" dirty="0"/>
+            <a:endParaRPr lang="en-US" sz="1220" dirty="0"/>
           </a:p>
         </p:txBody>
       </p:sp>
@@ -3425,12 +3425,12 @@
         </p:nvSpPr>
         <p:spPr>
           <a:xfrm>
-            <a:off x="7635240" y="2670048"/>
-            <a:ext cx="3474720" cy="1377086"/>
+            <a:off x="7543800" y="2724912"/>
+            <a:ext cx="3611880" cy="1527048"/>
           </a:xfrm>
           <a:prstGeom prst="roundRect">
             <a:avLst>
-              <a:gd name="adj" fmla="val 7968"/>
+              <a:gd name="adj" fmla="val 7186"/>
             </a:avLst>
           </a:prstGeom>
           <a:solidFill>
@@ -3452,24 +3452,26 @@
         </p:nvSpPr>
         <p:spPr>
           <a:xfrm>
-            <a:off x="7799832" y="2798064"/>
-            <a:ext cx="3145536" cy="237744"/>
-          </a:xfrm>
-          <a:prstGeom prst="rect">
-            <a:avLst/>
-          </a:prstGeom>
-          <a:noFill/>
-          <a:ln/>
-        </p:spPr>
-        <p:txBody>
-          <a:bodyPr wrap="square" lIns="0" tIns="0" rIns="0" bIns="0" rtlCol="0" anchor="ctr"/>
-          <a:lstStyle/>
-          <a:p>
-            <a:pPr indent="0" marL="0">
-              <a:buNone/>
-            </a:pPr>
-            <a:r>
-              <a:rPr lang="en-US" sz="1250" b="1" dirty="0">
+            <a:off x="7708392" y="2852928"/>
+            <a:ext cx="3282696" cy="219456"/>
+          </a:xfrm>
+          <a:prstGeom prst="rect">
+            <a:avLst/>
+          </a:prstGeom>
+          <a:noFill/>
+          <a:ln/>
+        </p:spPr>
+        <p:txBody>
+          <a:bodyPr wrap="square" lIns="0" tIns="0" rIns="0" bIns="0" rtlCol="0" anchor="ctr">
+            <a:normAutofit/>
+          </a:bodyPr>
+          <a:lstStyle/>
+          <a:p>
+            <a:pPr indent="0" marL="0">
+              <a:buNone/>
+            </a:pPr>
+            <a:r>
+              <a:rPr lang="en-US" sz="1160" b="1" dirty="0">
                 <a:solidFill>
                   <a:srgbClr val="0068B7"/>
                 </a:solidFill>
@@ -3479,7 +3481,7 @@
               </a:rPr>
               <a:t>Governance pathway</a:t>
             </a:r>
-            <a:endParaRPr lang="en-US" sz="1250" dirty="0"/>
+            <a:endParaRPr lang="en-US" sz="1160" dirty="0"/>
           </a:p>
         </p:txBody>
       </p:sp>
@@ -3491,7 +3493,7 @@
         </p:nvSpPr>
         <p:spPr>
           <a:xfrm>
-            <a:off x="8763000" y="3351276"/>
+            <a:off x="8717280" y="3406140"/>
             <a:ext cx="164592" cy="0"/>
           </a:xfrm>
           <a:prstGeom prst="line">
@@ -3514,8 +3516,8 @@
         </p:nvSpPr>
         <p:spPr>
           <a:xfrm>
-            <a:off x="7872984" y="3200400"/>
-            <a:ext cx="890016" cy="301752"/>
+            <a:off x="7781544" y="3255264"/>
+            <a:ext cx="935736" cy="301752"/>
           </a:xfrm>
           <a:prstGeom prst="roundRect">
             <a:avLst>
@@ -3541,8 +3543,8 @@
         </p:nvSpPr>
         <p:spPr>
           <a:xfrm>
-            <a:off x="7909560" y="3273552"/>
-            <a:ext cx="816864" cy="146304"/>
+            <a:off x="7818120" y="3328416"/>
+            <a:ext cx="862584" cy="146304"/>
           </a:xfrm>
           <a:prstGeom prst="rect">
             <a:avLst/>
@@ -3582,7 +3584,7 @@
         </p:nvSpPr>
         <p:spPr>
           <a:xfrm>
-            <a:off x="9817608" y="3351276"/>
+            <a:off x="9817608" y="3406140"/>
             <a:ext cx="164592" cy="0"/>
           </a:xfrm>
           <a:prstGeom prst="line">
@@ -3605,8 +3607,8 @@
         </p:nvSpPr>
         <p:spPr>
           <a:xfrm>
-            <a:off x="8927592" y="3200400"/>
-            <a:ext cx="890016" cy="301752"/>
+            <a:off x="8881872" y="3255264"/>
+            <a:ext cx="935736" cy="301752"/>
           </a:xfrm>
           <a:prstGeom prst="roundRect">
             <a:avLst>
@@ -3632,8 +3634,8 @@
         </p:nvSpPr>
         <p:spPr>
           <a:xfrm>
-            <a:off x="8964168" y="3273552"/>
-            <a:ext cx="816864" cy="146304"/>
+            <a:off x="8918448" y="3328416"/>
+            <a:ext cx="862584" cy="146304"/>
           </a:xfrm>
           <a:prstGeom prst="rect">
             <a:avLst/>
@@ -3673,8 +3675,8 @@
         </p:nvSpPr>
         <p:spPr>
           <a:xfrm>
-            <a:off x="9982200" y="3200400"/>
-            <a:ext cx="890016" cy="301752"/>
+            <a:off x="9982200" y="3255264"/>
+            <a:ext cx="935736" cy="301752"/>
           </a:xfrm>
           <a:prstGeom prst="roundRect">
             <a:avLst>
@@ -3700,8 +3702,8 @@
         </p:nvSpPr>
         <p:spPr>
           <a:xfrm>
-            <a:off x="10018776" y="3273552"/>
-            <a:ext cx="816864" cy="146304"/>
+            <a:off x="10018776" y="3328416"/>
+            <a:ext cx="862584" cy="146304"/>
           </a:xfrm>
           <a:prstGeom prst="rect">
             <a:avLst/>
@@ -3741,8 +3743,8 @@
         </p:nvSpPr>
         <p:spPr>
           <a:xfrm>
-            <a:off x="7854696" y="3694176"/>
-            <a:ext cx="3035808" cy="206654"/>
+            <a:off x="7763256" y="3749040"/>
+            <a:ext cx="3172968" cy="356616"/>
           </a:xfrm>
           <a:prstGeom prst="rect">
             <a:avLst/>
@@ -3760,7 +3762,7 @@
               <a:buNone/>
             </a:pPr>
             <a:r>
-              <a:rPr lang="en-US" sz="1120" dirty="0">
+              <a:rPr lang="en-US" sz="1040" dirty="0">
                 <a:solidFill>
                   <a:srgbClr val="17364A"/>
                 </a:solidFill>
@@ -3768,9 +3770,9 @@
                 <a:ea typeface="Aptos" pitchFamily="34" charset="-122"/>
                 <a:cs typeface="Aptos" pitchFamily="34" charset="-120"/>
               </a:rPr>
-              <a:t>A proposed AI use should move through documented review before it becomes an operational workflow.</a:t>
-            </a:r>
-            <a:endParaRPr lang="en-US" sz="1120" dirty="0"/>
+              <a:t>A proposed AI use should move through documented review before it.</a:t>
+            </a:r>
+            <a:endParaRPr lang="en-US" sz="1040" dirty="0"/>
           </a:p>
         </p:txBody>
       </p:sp>
@@ -3782,12 +3784,12 @@
         </p:nvSpPr>
         <p:spPr>
           <a:xfrm>
-            <a:off x="7635240" y="4184294"/>
-            <a:ext cx="3474720" cy="1466698"/>
+            <a:off x="7543800" y="4389120"/>
+            <a:ext cx="3611880" cy="1261872"/>
           </a:xfrm>
           <a:prstGeom prst="roundRect">
             <a:avLst>
-              <a:gd name="adj" fmla="val 7481"/>
+              <a:gd name="adj" fmla="val 8696"/>
             </a:avLst>
           </a:prstGeom>
           <a:solidFill>
@@ -3809,8 +3811,8 @@
         </p:nvSpPr>
         <p:spPr>
           <a:xfrm>
-            <a:off x="7799832" y="4330598"/>
-            <a:ext cx="3145536" cy="256032"/>
+            <a:off x="7708392" y="4517136"/>
+            <a:ext cx="3282696" cy="228600"/>
           </a:xfrm>
           <a:prstGeom prst="rect">
             <a:avLst/>
@@ -3826,7 +3828,7 @@
               <a:buNone/>
             </a:pPr>
             <a:r>
-              <a:rPr lang="en-US" sz="1300" b="1" dirty="0">
+              <a:rPr lang="en-US" sz="1220" b="1" dirty="0">
                 <a:solidFill>
                   <a:srgbClr val="0068B7"/>
                 </a:solidFill>
@@ -3836,7 +3838,7 @@
               </a:rPr>
               <a:t>What to document</a:t>
             </a:r>
-            <a:endParaRPr lang="en-US" sz="1300" dirty="0"/>
+            <a:endParaRPr lang="en-US" sz="1220" dirty="0"/>
           </a:p>
         </p:txBody>
       </p:sp>
@@ -3848,8 +3850,8 @@
         </p:nvSpPr>
         <p:spPr>
           <a:xfrm>
-            <a:off x="7799832" y="4659782"/>
-            <a:ext cx="3145536" cy="899770"/>
+            <a:off x="7708392" y="4828032"/>
+            <a:ext cx="3282696" cy="749808"/>
           </a:xfrm>
           <a:prstGeom prst="rect">
             <a:avLst/>
@@ -3867,7 +3869,7 @@
               <a:buNone/>
             </a:pPr>
             <a:r>
-              <a:rPr lang="en-US" sz="1320" dirty="0">
+              <a:rPr lang="en-US" sz="1220" dirty="0">
                 <a:solidFill>
                   <a:srgbClr val="17364A"/>
                 </a:solidFill>
@@ -3875,9 +3877,9 @@
                 <a:ea typeface="Aptos" pitchFamily="34" charset="-122"/>
                 <a:cs typeface="Aptos" pitchFamily="34" charset="-120"/>
               </a:rPr>
-              <a:t>Translate this concept into clear decision rights, review steps, documentation expectations, and escalation paths before an AI-supported workflow is approved.</a:t>
-            </a:r>
-            <a:endParaRPr lang="en-US" sz="1320" dirty="0"/>
+              <a:t>Translate this concept into clear decision rights, review steps, documentation.</a:t>
+            </a:r>
+            <a:endParaRPr lang="en-US" sz="1220" dirty="0"/>
           </a:p>
         </p:txBody>
       </p:sp>
@@ -4168,8 +4170,8 @@
         </p:nvSpPr>
         <p:spPr>
           <a:xfrm>
-            <a:off x="868680" y="1508760"/>
-            <a:ext cx="6309360" cy="4160520"/>
+            <a:off x="822960" y="1463040"/>
+            <a:ext cx="6565392" cy="4343400"/>
           </a:xfrm>
           <a:prstGeom prst="rect">
             <a:avLst/>
@@ -4187,7 +4189,7 @@
               <a:buNone/>
             </a:pPr>
             <a:r>
-              <a:rPr lang="en-US" sz="2100" dirty="0">
+              <a:rPr lang="en-US" sz="1920" dirty="0">
                 <a:solidFill>
                   <a:srgbClr val="003A63"/>
                 </a:solidFill>
@@ -4197,14 +4199,14 @@
               </a:rPr>
               <a:t>• One risk is hidden cost.</a:t>
             </a:r>
-            <a:endParaRPr lang="en-US" sz="2100" dirty="0"/>
-          </a:p>
-          <a:p>
-            <a:pPr indent="0" marL="0">
-              <a:buNone/>
-            </a:pPr>
-            <a:r>
-              <a:rPr lang="en-US" sz="2100" dirty="0">
+            <a:endParaRPr lang="en-US" sz="1920" dirty="0"/>
+          </a:p>
+          <a:p>
+            <a:pPr indent="0" marL="0">
+              <a:buNone/>
+            </a:pPr>
+            <a:r>
+              <a:rPr lang="en-US" sz="1920" dirty="0">
                 <a:solidFill>
                   <a:srgbClr val="003A63"/>
                 </a:solidFill>
@@ -4212,16 +4214,16 @@
                 <a:ea typeface="Aptos" pitchFamily="34" charset="-122"/>
                 <a:cs typeface="Aptos" pitchFamily="34" charset="-120"/>
               </a:rPr>
-              <a:t>• Agencies may purchase an AI tool without funding integration, monitoring, validation, staff.</a:t>
-            </a:r>
-            <a:endParaRPr lang="en-US" sz="2100" dirty="0"/>
-          </a:p>
-          <a:p>
-            <a:pPr indent="0" marL="0">
-              <a:buNone/>
-            </a:pPr>
-            <a:r>
-              <a:rPr lang="en-US" sz="2100" dirty="0">
+              <a:t>• Agencies may purchase an AI tool without funding integration, monitoring,.</a:t>
+            </a:r>
+            <a:endParaRPr lang="en-US" sz="1920" dirty="0"/>
+          </a:p>
+          <a:p>
+            <a:pPr indent="0" marL="0">
+              <a:buNone/>
+            </a:pPr>
+            <a:r>
+              <a:rPr lang="en-US" sz="1920" dirty="0">
                 <a:solidFill>
                   <a:srgbClr val="003A63"/>
                 </a:solidFill>
@@ -4231,7 +4233,7 @@
               </a:rPr>
               <a:t>• A guardrail is to require total cost of ownership in every business case.</a:t>
             </a:r>
-            <a:endParaRPr lang="en-US" sz="2100" dirty="0"/>
+            <a:endParaRPr lang="en-US" sz="1920" dirty="0"/>
           </a:p>
         </p:txBody>
       </p:sp>
@@ -4243,12 +4245,12 @@
         </p:nvSpPr>
         <p:spPr>
           <a:xfrm>
-            <a:off x="7635240" y="1325880"/>
-            <a:ext cx="3474720" cy="1207008"/>
+            <a:off x="7543800" y="1325880"/>
+            <a:ext cx="3611880" cy="1261872"/>
           </a:xfrm>
           <a:prstGeom prst="roundRect">
             <a:avLst>
-              <a:gd name="adj" fmla="val 9091"/>
+              <a:gd name="adj" fmla="val 8696"/>
             </a:avLst>
           </a:prstGeom>
           <a:solidFill>
@@ -4270,8 +4272,8 @@
         </p:nvSpPr>
         <p:spPr>
           <a:xfrm>
-            <a:off x="7799832" y="1472184"/>
-            <a:ext cx="3145536" cy="256032"/>
+            <a:off x="7708392" y="1453896"/>
+            <a:ext cx="3282696" cy="228600"/>
           </a:xfrm>
           <a:prstGeom prst="rect">
             <a:avLst/>
@@ -4287,7 +4289,7 @@
               <a:buNone/>
             </a:pPr>
             <a:r>
-              <a:rPr lang="en-US" sz="1300" b="1" dirty="0">
+              <a:rPr lang="en-US" sz="1220" b="1" dirty="0">
                 <a:solidFill>
                   <a:srgbClr val="0068B7"/>
                 </a:solidFill>
@@ -4297,7 +4299,7 @@
               </a:rPr>
               <a:t>Risk check</a:t>
             </a:r>
-            <a:endParaRPr lang="en-US" sz="1300" dirty="0"/>
+            <a:endParaRPr lang="en-US" sz="1220" dirty="0"/>
           </a:p>
         </p:txBody>
       </p:sp>
@@ -4309,8 +4311,8 @@
         </p:nvSpPr>
         <p:spPr>
           <a:xfrm>
-            <a:off x="7799832" y="1801368"/>
-            <a:ext cx="3145536" cy="640080"/>
+            <a:off x="7708392" y="1764792"/>
+            <a:ext cx="3282696" cy="749808"/>
           </a:xfrm>
           <a:prstGeom prst="rect">
             <a:avLst/>
@@ -4328,7 +4330,7 @@
               <a:buNone/>
             </a:pPr>
             <a:r>
-              <a:rPr lang="en-US" sz="1320" dirty="0">
+              <a:rPr lang="en-US" sz="1220" dirty="0">
                 <a:solidFill>
                   <a:srgbClr val="17364A"/>
                 </a:solidFill>
@@ -4338,7 +4340,7 @@
               </a:rPr>
               <a:t>One risk is hidden cost.</a:t>
             </a:r>
-            <a:endParaRPr lang="en-US" sz="1320" dirty="0"/>
+            <a:endParaRPr lang="en-US" sz="1220" dirty="0"/>
           </a:p>
         </p:txBody>
       </p:sp>
@@ -4350,12 +4352,12 @@
         </p:nvSpPr>
         <p:spPr>
           <a:xfrm>
-            <a:off x="7635240" y="2670048"/>
-            <a:ext cx="3474720" cy="1536192"/>
+            <a:off x="7543800" y="2724912"/>
+            <a:ext cx="3611880" cy="1527048"/>
           </a:xfrm>
           <a:prstGeom prst="roundRect">
             <a:avLst>
-              <a:gd name="adj" fmla="val 7143"/>
+              <a:gd name="adj" fmla="val 7186"/>
             </a:avLst>
           </a:prstGeom>
           <a:solidFill>
@@ -4377,24 +4379,26 @@
         </p:nvSpPr>
         <p:spPr>
           <a:xfrm>
-            <a:off x="7799832" y="2798064"/>
-            <a:ext cx="3145536" cy="237744"/>
-          </a:xfrm>
-          <a:prstGeom prst="rect">
-            <a:avLst/>
-          </a:prstGeom>
-          <a:noFill/>
-          <a:ln/>
-        </p:spPr>
-        <p:txBody>
-          <a:bodyPr wrap="square" lIns="0" tIns="0" rIns="0" bIns="0" rtlCol="0" anchor="ctr"/>
-          <a:lstStyle/>
-          <a:p>
-            <a:pPr indent="0" marL="0">
-              <a:buNone/>
-            </a:pPr>
-            <a:r>
-              <a:rPr lang="en-US" sz="1250" b="1" dirty="0">
+            <a:off x="7708392" y="2852928"/>
+            <a:ext cx="3282696" cy="219456"/>
+          </a:xfrm>
+          <a:prstGeom prst="rect">
+            <a:avLst/>
+          </a:prstGeom>
+          <a:noFill/>
+          <a:ln/>
+        </p:spPr>
+        <p:txBody>
+          <a:bodyPr wrap="square" lIns="0" tIns="0" rIns="0" bIns="0" rtlCol="0" anchor="ctr">
+            <a:normAutofit/>
+          </a:bodyPr>
+          <a:lstStyle/>
+          <a:p>
+            <a:pPr indent="0" marL="0">
+              <a:buNone/>
+            </a:pPr>
+            <a:r>
+              <a:rPr lang="en-US" sz="1160" b="1" dirty="0">
                 <a:solidFill>
                   <a:srgbClr val="0068B7"/>
                 </a:solidFill>
@@ -4404,7 +4408,7 @@
               </a:rPr>
               <a:t>Risk control loop</a:t>
             </a:r>
-            <a:endParaRPr lang="en-US" sz="1250" dirty="0"/>
+            <a:endParaRPr lang="en-US" sz="1160" dirty="0"/>
           </a:p>
         </p:txBody>
       </p:sp>
@@ -4416,7 +4420,7 @@
         </p:nvSpPr>
         <p:spPr>
           <a:xfrm>
-            <a:off x="8763000" y="3351276"/>
+            <a:off x="8717280" y="3406140"/>
             <a:ext cx="164592" cy="0"/>
           </a:xfrm>
           <a:prstGeom prst="line">
@@ -4439,8 +4443,8 @@
         </p:nvSpPr>
         <p:spPr>
           <a:xfrm>
-            <a:off x="7872984" y="3200400"/>
-            <a:ext cx="890016" cy="301752"/>
+            <a:off x="7781544" y="3255264"/>
+            <a:ext cx="935736" cy="301752"/>
           </a:xfrm>
           <a:prstGeom prst="roundRect">
             <a:avLst>
@@ -4466,8 +4470,8 @@
         </p:nvSpPr>
         <p:spPr>
           <a:xfrm>
-            <a:off x="7909560" y="3273552"/>
-            <a:ext cx="816864" cy="146304"/>
+            <a:off x="7818120" y="3328416"/>
+            <a:ext cx="862584" cy="146304"/>
           </a:xfrm>
           <a:prstGeom prst="rect">
             <a:avLst/>
@@ -4507,7 +4511,7 @@
         </p:nvSpPr>
         <p:spPr>
           <a:xfrm>
-            <a:off x="9817608" y="3351276"/>
+            <a:off x="9817608" y="3406140"/>
             <a:ext cx="164592" cy="0"/>
           </a:xfrm>
           <a:prstGeom prst="line">
@@ -4530,8 +4534,8 @@
         </p:nvSpPr>
         <p:spPr>
           <a:xfrm>
-            <a:off x="8927592" y="3200400"/>
-            <a:ext cx="890016" cy="301752"/>
+            <a:off x="8881872" y="3255264"/>
+            <a:ext cx="935736" cy="301752"/>
           </a:xfrm>
           <a:prstGeom prst="roundRect">
             <a:avLst>
@@ -4557,8 +4561,8 @@
         </p:nvSpPr>
         <p:spPr>
           <a:xfrm>
-            <a:off x="8964168" y="3273552"/>
-            <a:ext cx="816864" cy="146304"/>
+            <a:off x="8918448" y="3328416"/>
+            <a:ext cx="862584" cy="146304"/>
           </a:xfrm>
           <a:prstGeom prst="rect">
             <a:avLst/>
@@ -4598,8 +4602,8 @@
         </p:nvSpPr>
         <p:spPr>
           <a:xfrm>
-            <a:off x="9982200" y="3200400"/>
-            <a:ext cx="890016" cy="301752"/>
+            <a:off x="9982200" y="3255264"/>
+            <a:ext cx="935736" cy="301752"/>
           </a:xfrm>
           <a:prstGeom prst="roundRect">
             <a:avLst>
@@ -4625,8 +4629,8 @@
         </p:nvSpPr>
         <p:spPr>
           <a:xfrm>
-            <a:off x="10018776" y="3273552"/>
-            <a:ext cx="816864" cy="146304"/>
+            <a:off x="10018776" y="3328416"/>
+            <a:ext cx="862584" cy="146304"/>
           </a:xfrm>
           <a:prstGeom prst="rect">
             <a:avLst/>
@@ -4666,8 +4670,8 @@
         </p:nvSpPr>
         <p:spPr>
           <a:xfrm>
-            <a:off x="7854696" y="3694176"/>
-            <a:ext cx="3035808" cy="365760"/>
+            <a:off x="7763256" y="3749040"/>
+            <a:ext cx="3172968" cy="356616"/>
           </a:xfrm>
           <a:prstGeom prst="rect">
             <a:avLst/>
@@ -4685,7 +4689,7 @@
               <a:buNone/>
             </a:pPr>
             <a:r>
-              <a:rPr lang="en-US" sz="1120" dirty="0">
+              <a:rPr lang="en-US" sz="1040" dirty="0">
                 <a:solidFill>
                   <a:srgbClr val="17364A"/>
                 </a:solidFill>
@@ -4693,9 +4697,9 @@
                 <a:ea typeface="Aptos" pitchFamily="34" charset="-122"/>
                 <a:cs typeface="Aptos" pitchFamily="34" charset="-120"/>
               </a:rPr>
-              <a:t>Responsible use depends on finding risks early, applying safeguards, and watching for drift or harm over time.</a:t>
-            </a:r>
-            <a:endParaRPr lang="en-US" sz="1120" dirty="0"/>
+              <a:t>Responsible use depends on finding risks early, applying safeguards,.</a:t>
+            </a:r>
+            <a:endParaRPr lang="en-US" sz="1040" dirty="0"/>
           </a:p>
         </p:txBody>
       </p:sp>
@@ -4707,12 +4711,12 @@
         </p:nvSpPr>
         <p:spPr>
           <a:xfrm>
-            <a:off x="7635240" y="4343400"/>
-            <a:ext cx="3474720" cy="1255471"/>
+            <a:off x="7543800" y="4389120"/>
+            <a:ext cx="3611880" cy="1261872"/>
           </a:xfrm>
           <a:prstGeom prst="roundRect">
             <a:avLst>
-              <a:gd name="adj" fmla="val 8740"/>
+              <a:gd name="adj" fmla="val 8696"/>
             </a:avLst>
           </a:prstGeom>
           <a:solidFill>
@@ -4734,8 +4738,8 @@
         </p:nvSpPr>
         <p:spPr>
           <a:xfrm>
-            <a:off x="7799832" y="4489704"/>
-            <a:ext cx="3145536" cy="256032"/>
+            <a:off x="7708392" y="4517136"/>
+            <a:ext cx="3282696" cy="228600"/>
           </a:xfrm>
           <a:prstGeom prst="rect">
             <a:avLst/>
@@ -4751,7 +4755,7 @@
               <a:buNone/>
             </a:pPr>
             <a:r>
-              <a:rPr lang="en-US" sz="1300" b="1" dirty="0">
+              <a:rPr lang="en-US" sz="1220" b="1" dirty="0">
                 <a:solidFill>
                   <a:srgbClr val="0068B7"/>
                 </a:solidFill>
@@ -4761,7 +4765,7 @@
               </a:rPr>
               <a:t>Safeguard to plan</a:t>
             </a:r>
-            <a:endParaRPr lang="en-US" sz="1300" dirty="0"/>
+            <a:endParaRPr lang="en-US" sz="1220" dirty="0"/>
           </a:p>
         </p:txBody>
       </p:sp>
@@ -4773,8 +4777,8 @@
         </p:nvSpPr>
         <p:spPr>
           <a:xfrm>
-            <a:off x="7799832" y="4818888"/>
-            <a:ext cx="3145536" cy="688543"/>
+            <a:off x="7708392" y="4828032"/>
+            <a:ext cx="3282696" cy="749808"/>
           </a:xfrm>
           <a:prstGeom prst="rect">
             <a:avLst/>
@@ -4792,7 +4796,7 @@
               <a:buNone/>
             </a:pPr>
             <a:r>
-              <a:rPr lang="en-US" sz="1320" dirty="0">
+              <a:rPr lang="en-US" sz="1220" dirty="0">
                 <a:solidFill>
                   <a:srgbClr val="17364A"/>
                 </a:solidFill>
@@ -4800,9 +4804,9 @@
                 <a:ea typeface="Aptos" pitchFamily="34" charset="-122"/>
                 <a:cs typeface="Aptos" pitchFamily="34" charset="-120"/>
               </a:rPr>
-              <a:t>Identify what could go wrong, who could be affected, what safeguards are needed, and what evidence should be reviewed before use.</a:t>
-            </a:r>
-            <a:endParaRPr lang="en-US" sz="1320" dirty="0"/>
+              <a:t>Identify what could go wrong, who could be affected, what safeguards are needed,.</a:t>
+            </a:r>
+            <a:endParaRPr lang="en-US" sz="1220" dirty="0"/>
           </a:p>
         </p:txBody>
       </p:sp>
@@ -5093,8 +5097,8 @@
         </p:nvSpPr>
         <p:spPr>
           <a:xfrm>
-            <a:off x="868680" y="1508760"/>
-            <a:ext cx="6309360" cy="4160520"/>
+            <a:off x="822960" y="1463040"/>
+            <a:ext cx="6565392" cy="4343400"/>
           </a:xfrm>
           <a:prstGeom prst="rect">
             <a:avLst/>
@@ -5112,7 +5116,7 @@
               <a:buNone/>
             </a:pPr>
             <a:r>
-              <a:rPr lang="en-US" sz="2100" dirty="0">
+              <a:rPr lang="en-US" sz="1920" dirty="0">
                 <a:solidFill>
                   <a:srgbClr val="003A63"/>
                 </a:solidFill>
@@ -5120,16 +5124,16 @@
                 <a:ea typeface="Aptos" pitchFamily="34" charset="-122"/>
                 <a:cs typeface="Aptos" pitchFamily="34" charset="-120"/>
               </a:rPr>
-              <a:t>• Generative AI business cases should include review time, source verification, and records.</a:t>
-            </a:r>
-            <a:endParaRPr lang="en-US" sz="2100" dirty="0"/>
-          </a:p>
-          <a:p>
-            <a:pPr indent="0" marL="0">
-              <a:buNone/>
-            </a:pPr>
-            <a:r>
-              <a:rPr lang="en-US" sz="2100" dirty="0">
+              <a:t>• Generative AI business cases should include review time, source.</a:t>
+            </a:r>
+            <a:endParaRPr lang="en-US" sz="1920" dirty="0"/>
+          </a:p>
+          <a:p>
+            <a:pPr indent="0" marL="0">
+              <a:buNone/>
+            </a:pPr>
+            <a:r>
+              <a:rPr lang="en-US" sz="1920" dirty="0">
                 <a:solidFill>
                   <a:srgbClr val="003A63"/>
                 </a:solidFill>
@@ -5137,16 +5141,16 @@
                 <a:ea typeface="Aptos" pitchFamily="34" charset="-122"/>
                 <a:cs typeface="Aptos" pitchFamily="34" charset="-120"/>
               </a:rPr>
-              <a:t>• Predictive analytics business cases should include validation data, subgroup testing, and.</a:t>
-            </a:r>
-            <a:endParaRPr lang="en-US" sz="2100" dirty="0"/>
-          </a:p>
-          <a:p>
-            <a:pPr indent="0" marL="0">
-              <a:buNone/>
-            </a:pPr>
-            <a:r>
-              <a:rPr lang="en-US" sz="2100" dirty="0">
+              <a:t>• Predictive analytics business cases should include validation data, subgroup.</a:t>
+            </a:r>
+            <a:endParaRPr lang="en-US" sz="1920" dirty="0"/>
+          </a:p>
+          <a:p>
+            <a:pPr indent="0" marL="0">
+              <a:buNone/>
+            </a:pPr>
+            <a:r>
+              <a:rPr lang="en-US" sz="1920" dirty="0">
                 <a:solidFill>
                   <a:srgbClr val="003A63"/>
                 </a:solidFill>
@@ -5154,9 +5158,9 @@
                 <a:ea typeface="Aptos" pitchFamily="34" charset="-122"/>
                 <a:cs typeface="Aptos" pitchFamily="34" charset="-120"/>
               </a:rPr>
-              <a:t>• Agentic AI business cases should include security architecture, approval workflows, rollback,.</a:t>
-            </a:r>
-            <a:endParaRPr lang="en-US" sz="2100" dirty="0"/>
+              <a:t>• Agentic AI business cases should include security architecture, approval.</a:t>
+            </a:r>
+            <a:endParaRPr lang="en-US" sz="1920" dirty="0"/>
           </a:p>
         </p:txBody>
       </p:sp>
@@ -5168,12 +5172,12 @@
         </p:nvSpPr>
         <p:spPr>
           <a:xfrm>
-            <a:off x="7635240" y="1325880"/>
-            <a:ext cx="3474720" cy="1255471"/>
+            <a:off x="7543800" y="1325880"/>
+            <a:ext cx="3611880" cy="1261872"/>
           </a:xfrm>
           <a:prstGeom prst="roundRect">
             <a:avLst>
-              <a:gd name="adj" fmla="val 8740"/>
+              <a:gd name="adj" fmla="val 8696"/>
             </a:avLst>
           </a:prstGeom>
           <a:solidFill>
@@ -5195,8 +5199,8 @@
         </p:nvSpPr>
         <p:spPr>
           <a:xfrm>
-            <a:off x="7799832" y="1472184"/>
-            <a:ext cx="3145536" cy="256032"/>
+            <a:off x="7708392" y="1453896"/>
+            <a:ext cx="3282696" cy="228600"/>
           </a:xfrm>
           <a:prstGeom prst="rect">
             <a:avLst/>
@@ -5212,7 +5216,7 @@
               <a:buNone/>
             </a:pPr>
             <a:r>
-              <a:rPr lang="en-US" sz="1300" b="1" dirty="0">
+              <a:rPr lang="en-US" sz="1220" b="1" dirty="0">
                 <a:solidFill>
                   <a:srgbClr val="0068B7"/>
                 </a:solidFill>
@@ -5222,7 +5226,7 @@
               </a:rPr>
               <a:t>Implementation cue</a:t>
             </a:r>
-            <a:endParaRPr lang="en-US" sz="1300" dirty="0"/>
+            <a:endParaRPr lang="en-US" sz="1220" dirty="0"/>
           </a:p>
         </p:txBody>
       </p:sp>
@@ -5234,8 +5238,8 @@
         </p:nvSpPr>
         <p:spPr>
           <a:xfrm>
-            <a:off x="7799832" y="1801368"/>
-            <a:ext cx="3145536" cy="688543"/>
+            <a:off x="7708392" y="1764792"/>
+            <a:ext cx="3282696" cy="749808"/>
           </a:xfrm>
           <a:prstGeom prst="rect">
             <a:avLst/>
@@ -5253,7 +5257,7 @@
               <a:buNone/>
             </a:pPr>
             <a:r>
-              <a:rPr lang="en-US" sz="1320" dirty="0">
+              <a:rPr lang="en-US" sz="1220" dirty="0">
                 <a:solidFill>
                   <a:srgbClr val="17364A"/>
                 </a:solidFill>
@@ -5261,9 +5265,9 @@
                 <a:ea typeface="Aptos" pitchFamily="34" charset="-122"/>
                 <a:cs typeface="Aptos" pitchFamily="34" charset="-120"/>
               </a:rPr>
-              <a:t>Generative AI business cases should include review time, source verification, and records considerations.</a:t>
-            </a:r>
-            <a:endParaRPr lang="en-US" sz="1320" dirty="0"/>
+              <a:t>Generative AI business cases should include review time, source verification,.</a:t>
+            </a:r>
+            <a:endParaRPr lang="en-US" sz="1220" dirty="0"/>
           </a:p>
         </p:txBody>
       </p:sp>
@@ -5275,12 +5279,12 @@
         </p:nvSpPr>
         <p:spPr>
           <a:xfrm>
-            <a:off x="7635240" y="2718511"/>
-            <a:ext cx="3474720" cy="1328623"/>
+            <a:off x="7543800" y="2724912"/>
+            <a:ext cx="3611880" cy="1527048"/>
           </a:xfrm>
           <a:prstGeom prst="roundRect">
             <a:avLst>
-              <a:gd name="adj" fmla="val 8259"/>
+              <a:gd name="adj" fmla="val 7186"/>
             </a:avLst>
           </a:prstGeom>
           <a:solidFill>
@@ -5302,8 +5306,8 @@
         </p:nvSpPr>
         <p:spPr>
           <a:xfrm>
-            <a:off x="7799832" y="2864815"/>
-            <a:ext cx="3145536" cy="256032"/>
+            <a:off x="7708392" y="2852928"/>
+            <a:ext cx="3282696" cy="228600"/>
           </a:xfrm>
           <a:prstGeom prst="rect">
             <a:avLst/>
@@ -5319,7 +5323,7 @@
               <a:buNone/>
             </a:pPr>
             <a:r>
-              <a:rPr lang="en-US" sz="1300" b="1" dirty="0">
+              <a:rPr lang="en-US" sz="1220" b="1" dirty="0">
                 <a:solidFill>
                   <a:srgbClr val="0068B7"/>
                 </a:solidFill>
@@ -5329,7 +5333,7 @@
               </a:rPr>
               <a:t>Concept checkpoints</a:t>
             </a:r>
-            <a:endParaRPr lang="en-US" sz="1300" dirty="0"/>
+            <a:endParaRPr lang="en-US" sz="1220" dirty="0"/>
           </a:p>
         </p:txBody>
       </p:sp>
@@ -5341,8 +5345,8 @@
         </p:nvSpPr>
         <p:spPr>
           <a:xfrm>
-            <a:off x="7818120" y="3230575"/>
-            <a:ext cx="3090672" cy="670255"/>
+            <a:off x="7726680" y="3182112"/>
+            <a:ext cx="3227832" cy="960120"/>
           </a:xfrm>
           <a:prstGeom prst="rect">
             <a:avLst/>
@@ -5360,7 +5364,7 @@
               <a:buNone/>
             </a:pPr>
             <a:r>
-              <a:rPr lang="en-US" sz="1220" dirty="0">
+              <a:rPr lang="en-US" sz="1140" dirty="0">
                 <a:solidFill>
                   <a:srgbClr val="17364A"/>
                 </a:solidFill>
@@ -5368,16 +5372,16 @@
                 <a:ea typeface="Aptos" pitchFamily="34" charset="-122"/>
                 <a:cs typeface="Aptos" pitchFamily="34" charset="-120"/>
               </a:rPr>
-              <a:t>Predictive analytics business cases should include validation.</a:t>
-            </a:r>
-            <a:endParaRPr lang="en-US" sz="1220" dirty="0"/>
-          </a:p>
-          <a:p>
-            <a:pPr indent="0" marL="0">
-              <a:buNone/>
-            </a:pPr>
-            <a:r>
-              <a:rPr lang="en-US" sz="1220" dirty="0">
+              <a:t>Predictive analytics business cases should include.</a:t>
+            </a:r>
+            <a:endParaRPr lang="en-US" sz="1140" dirty="0"/>
+          </a:p>
+          <a:p>
+            <a:pPr indent="0" marL="0">
+              <a:buNone/>
+            </a:pPr>
+            <a:r>
+              <a:rPr lang="en-US" sz="1140" dirty="0">
                 <a:solidFill>
                   <a:srgbClr val="17364A"/>
                 </a:solidFill>
@@ -5385,16 +5389,16 @@
                 <a:ea typeface="Aptos" pitchFamily="34" charset="-122"/>
                 <a:cs typeface="Aptos" pitchFamily="34" charset="-120"/>
               </a:rPr>
-              <a:t>Agentic AI business cases should include security architecture,.</a:t>
-            </a:r>
-            <a:endParaRPr lang="en-US" sz="1220" dirty="0"/>
-          </a:p>
-          <a:p>
-            <a:pPr indent="0" marL="0">
-              <a:buNone/>
-            </a:pPr>
-            <a:r>
-              <a:rPr lang="en-US" sz="1220" dirty="0">
+              <a:t>Agentic AI business cases should include security.</a:t>
+            </a:r>
+            <a:endParaRPr lang="en-US" sz="1140" dirty="0"/>
+          </a:p>
+          <a:p>
+            <a:pPr indent="0" marL="0">
+              <a:buNone/>
+            </a:pPr>
+            <a:r>
+              <a:rPr lang="en-US" sz="1140" dirty="0">
                 <a:solidFill>
                   <a:srgbClr val="17364A"/>
                 </a:solidFill>
@@ -5404,7 +5408,7 @@
               </a:rPr>
               <a:t>Cost and value must reflect responsible use.</a:t>
             </a:r>
-            <a:endParaRPr lang="en-US" sz="1220" dirty="0"/>
+            <a:endParaRPr lang="en-US" sz="1140" dirty="0"/>
           </a:p>
         </p:txBody>
       </p:sp>
@@ -5416,12 +5420,12 @@
         </p:nvSpPr>
         <p:spPr>
           <a:xfrm>
-            <a:off x="7635240" y="4184294"/>
-            <a:ext cx="3474720" cy="1466698"/>
+            <a:off x="7543800" y="4389120"/>
+            <a:ext cx="3611880" cy="1261872"/>
           </a:xfrm>
           <a:prstGeom prst="roundRect">
             <a:avLst>
-              <a:gd name="adj" fmla="val 7481"/>
+              <a:gd name="adj" fmla="val 8696"/>
             </a:avLst>
           </a:prstGeom>
           <a:solidFill>
@@ -5443,8 +5447,8 @@
         </p:nvSpPr>
         <p:spPr>
           <a:xfrm>
-            <a:off x="7799832" y="4330598"/>
-            <a:ext cx="3145536" cy="256032"/>
+            <a:off x="7708392" y="4517136"/>
+            <a:ext cx="3282696" cy="228600"/>
           </a:xfrm>
           <a:prstGeom prst="rect">
             <a:avLst/>
@@ -5460,7 +5464,7 @@
               <a:buNone/>
             </a:pPr>
             <a:r>
-              <a:rPr lang="en-US" sz="1300" b="1" dirty="0">
+              <a:rPr lang="en-US" sz="1220" b="1" dirty="0">
                 <a:solidFill>
                   <a:srgbClr val="0068B7"/>
                 </a:solidFill>
@@ -5470,7 +5474,7 @@
               </a:rPr>
               <a:t>Next action</a:t>
             </a:r>
-            <a:endParaRPr lang="en-US" sz="1300" dirty="0"/>
+            <a:endParaRPr lang="en-US" sz="1220" dirty="0"/>
           </a:p>
         </p:txBody>
       </p:sp>
@@ -5482,8 +5486,8 @@
         </p:nvSpPr>
         <p:spPr>
           <a:xfrm>
-            <a:off x="7799832" y="4659782"/>
-            <a:ext cx="3145536" cy="899770"/>
+            <a:off x="7708392" y="4828032"/>
+            <a:ext cx="3282696" cy="749808"/>
           </a:xfrm>
           <a:prstGeom prst="rect">
             <a:avLst/>
@@ -5501,7 +5505,7 @@
               <a:buNone/>
             </a:pPr>
             <a:r>
-              <a:rPr lang="en-US" sz="1320" dirty="0">
+              <a:rPr lang="en-US" sz="1220" dirty="0">
                 <a:solidFill>
                   <a:srgbClr val="17364A"/>
                 </a:solidFill>
@@ -5509,9 +5513,9 @@
                 <a:ea typeface="Aptos" pitchFamily="34" charset="-122"/>
                 <a:cs typeface="Aptos" pitchFamily="34" charset="-120"/>
               </a:rPr>
-              <a:t>Use the concept to clarify workflow changes, dependencies, staffing, procurement requirements, training needs, and implementation checkpoints.</a:t>
-            </a:r>
-            <a:endParaRPr lang="en-US" sz="1320" dirty="0"/>
+              <a:t>Use the concept to clarify workflow changes, dependencies, staffing, procurement.</a:t>
+            </a:r>
+            <a:endParaRPr lang="en-US" sz="1220" dirty="0"/>
           </a:p>
         </p:txBody>
       </p:sp>
@@ -5802,8 +5806,8 @@
         </p:nvSpPr>
         <p:spPr>
           <a:xfrm>
-            <a:off x="868680" y="1508760"/>
-            <a:ext cx="6309360" cy="4160520"/>
+            <a:off x="822960" y="1463040"/>
+            <a:ext cx="6565392" cy="4343400"/>
           </a:xfrm>
           <a:prstGeom prst="rect">
             <a:avLst/>
@@ -5821,7 +5825,7 @@
               <a:buNone/>
             </a:pPr>
             <a:r>
-              <a:rPr lang="en-US" sz="2100" dirty="0">
+              <a:rPr lang="en-US" sz="1920" dirty="0">
                 <a:solidFill>
                   <a:srgbClr val="003A63"/>
                 </a:solidFill>
@@ -5829,16 +5833,16 @@
                 <a:ea typeface="Aptos" pitchFamily="34" charset="-122"/>
                 <a:cs typeface="Aptos" pitchFamily="34" charset="-120"/>
               </a:rPr>
-              <a:t>• Which current or proposed AI use case in your agency raises this leadership or governance.</a:t>
-            </a:r>
-            <a:endParaRPr lang="en-US" sz="2100" dirty="0"/>
-          </a:p>
-          <a:p>
-            <a:pPr indent="0" marL="0">
-              <a:buNone/>
-            </a:pPr>
-            <a:r>
-              <a:rPr lang="en-US" sz="2100" dirty="0">
+              <a:t>• Which current or proposed AI use case in your agency raises this leadership.</a:t>
+            </a:r>
+            <a:endParaRPr lang="en-US" sz="1920" dirty="0"/>
+          </a:p>
+          <a:p>
+            <a:pPr indent="0" marL="0">
+              <a:buNone/>
+            </a:pPr>
+            <a:r>
+              <a:rPr lang="en-US" sz="1920" dirty="0">
                 <a:solidFill>
                   <a:srgbClr val="003A63"/>
                 </a:solidFill>
@@ -5846,16 +5850,16 @@
                 <a:ea typeface="Aptos" pitchFamily="34" charset="-122"/>
                 <a:cs typeface="Aptos" pitchFamily="34" charset="-120"/>
               </a:rPr>
-              <a:t>• Who currently has authority to make decisions about this issue, and is that authority.</a:t>
-            </a:r>
-            <a:endParaRPr lang="en-US" sz="2100" dirty="0"/>
-          </a:p>
-          <a:p>
-            <a:pPr indent="0" marL="0">
-              <a:buNone/>
-            </a:pPr>
-            <a:r>
-              <a:rPr lang="en-US" sz="2100" dirty="0">
+              <a:t>• Who currently has authority to make decisions about this issue, and is that.</a:t>
+            </a:r>
+            <a:endParaRPr lang="en-US" sz="1920" dirty="0"/>
+          </a:p>
+          <a:p>
+            <a:pPr indent="0" marL="0">
+              <a:buNone/>
+            </a:pPr>
+            <a:r>
+              <a:rPr lang="en-US" sz="1920" dirty="0">
                 <a:solidFill>
                   <a:srgbClr val="003A63"/>
                 </a:solidFill>
@@ -5863,9 +5867,9 @@
                 <a:ea typeface="Aptos" pitchFamily="34" charset="-122"/>
                 <a:cs typeface="Aptos" pitchFamily="34" charset="-120"/>
               </a:rPr>
-              <a:t>• What evidence would governance or leadership need before approving the use case?</a:t>
-            </a:r>
-            <a:endParaRPr lang="en-US" sz="2100" dirty="0"/>
+              <a:t>• What evidence would governance or leadership need before approving the use.</a:t>
+            </a:r>
+            <a:endParaRPr lang="en-US" sz="1920" dirty="0"/>
           </a:p>
         </p:txBody>
       </p:sp>
@@ -5877,12 +5881,12 @@
         </p:nvSpPr>
         <p:spPr>
           <a:xfrm>
-            <a:off x="7635240" y="1325880"/>
-            <a:ext cx="3474720" cy="1255471"/>
+            <a:off x="7543800" y="1325880"/>
+            <a:ext cx="3611880" cy="1261872"/>
           </a:xfrm>
           <a:prstGeom prst="roundRect">
             <a:avLst>
-              <a:gd name="adj" fmla="val 8740"/>
+              <a:gd name="adj" fmla="val 8696"/>
             </a:avLst>
           </a:prstGeom>
           <a:solidFill>
@@ -5904,8 +5908,8 @@
         </p:nvSpPr>
         <p:spPr>
           <a:xfrm>
-            <a:off x="7799832" y="1472184"/>
-            <a:ext cx="3145536" cy="256032"/>
+            <a:off x="7708392" y="1453896"/>
+            <a:ext cx="3282696" cy="228600"/>
           </a:xfrm>
           <a:prstGeom prst="rect">
             <a:avLst/>
@@ -5921,7 +5925,7 @@
               <a:buNone/>
             </a:pPr>
             <a:r>
-              <a:rPr lang="en-US" sz="1300" b="1" dirty="0">
+              <a:rPr lang="en-US" sz="1220" b="1" dirty="0">
                 <a:solidFill>
                   <a:srgbClr val="0068B7"/>
                 </a:solidFill>
@@ -5931,7 +5935,7 @@
               </a:rPr>
               <a:t>Core concept</a:t>
             </a:r>
-            <a:endParaRPr lang="en-US" sz="1300" dirty="0"/>
+            <a:endParaRPr lang="en-US" sz="1220" dirty="0"/>
           </a:p>
         </p:txBody>
       </p:sp>
@@ -5943,8 +5947,8 @@
         </p:nvSpPr>
         <p:spPr>
           <a:xfrm>
-            <a:off x="7799832" y="1801368"/>
-            <a:ext cx="3145536" cy="688543"/>
+            <a:off x="7708392" y="1764792"/>
+            <a:ext cx="3282696" cy="749808"/>
           </a:xfrm>
           <a:prstGeom prst="rect">
             <a:avLst/>
@@ -5962,7 +5966,7 @@
               <a:buNone/>
             </a:pPr>
             <a:r>
-              <a:rPr lang="en-US" sz="1320" dirty="0">
+              <a:rPr lang="en-US" sz="1220" dirty="0">
                 <a:solidFill>
                   <a:srgbClr val="17364A"/>
                 </a:solidFill>
@@ -5970,9 +5974,9 @@
                 <a:ea typeface="Aptos" pitchFamily="34" charset="-122"/>
                 <a:cs typeface="Aptos" pitchFamily="34" charset="-120"/>
               </a:rPr>
-              <a:t>Which current or proposed AI use case in your agency raises this leadership or governance issue most.</a:t>
-            </a:r>
-            <a:endParaRPr lang="en-US" sz="1320" dirty="0"/>
+              <a:t>Which current or proposed AI use case in your agency raises this leadership or.</a:t>
+            </a:r>
+            <a:endParaRPr lang="en-US" sz="1220" dirty="0"/>
           </a:p>
         </p:txBody>
       </p:sp>
@@ -5984,12 +5988,12 @@
         </p:nvSpPr>
         <p:spPr>
           <a:xfrm>
-            <a:off x="7635240" y="2718511"/>
-            <a:ext cx="3474720" cy="1328623"/>
+            <a:off x="7543800" y="2724912"/>
+            <a:ext cx="3611880" cy="1527048"/>
           </a:xfrm>
           <a:prstGeom prst="roundRect">
             <a:avLst>
-              <a:gd name="adj" fmla="val 8259"/>
+              <a:gd name="adj" fmla="val 7186"/>
             </a:avLst>
           </a:prstGeom>
           <a:solidFill>
@@ -6011,8 +6015,8 @@
         </p:nvSpPr>
         <p:spPr>
           <a:xfrm>
-            <a:off x="7799832" y="2864815"/>
-            <a:ext cx="3145536" cy="256032"/>
+            <a:off x="7708392" y="2852928"/>
+            <a:ext cx="3282696" cy="228600"/>
           </a:xfrm>
           <a:prstGeom prst="rect">
             <a:avLst/>
@@ -6028,7 +6032,7 @@
               <a:buNone/>
             </a:pPr>
             <a:r>
-              <a:rPr lang="en-US" sz="1300" b="1" dirty="0">
+              <a:rPr lang="en-US" sz="1220" b="1" dirty="0">
                 <a:solidFill>
                   <a:srgbClr val="0068B7"/>
                 </a:solidFill>
@@ -6038,7 +6042,7 @@
               </a:rPr>
               <a:t>Concept checkpoints</a:t>
             </a:r>
-            <a:endParaRPr lang="en-US" sz="1300" dirty="0"/>
+            <a:endParaRPr lang="en-US" sz="1220" dirty="0"/>
           </a:p>
         </p:txBody>
       </p:sp>
@@ -6050,8 +6054,8 @@
         </p:nvSpPr>
         <p:spPr>
           <a:xfrm>
-            <a:off x="7818120" y="3230575"/>
-            <a:ext cx="3090672" cy="670255"/>
+            <a:off x="7726680" y="3182112"/>
+            <a:ext cx="3227832" cy="960120"/>
           </a:xfrm>
           <a:prstGeom prst="rect">
             <a:avLst/>
@@ -6069,7 +6073,7 @@
               <a:buNone/>
             </a:pPr>
             <a:r>
-              <a:rPr lang="en-US" sz="1220" dirty="0">
+              <a:rPr lang="en-US" sz="1140" dirty="0">
                 <a:solidFill>
                   <a:srgbClr val="17364A"/>
                 </a:solidFill>
@@ -6077,16 +6081,16 @@
                 <a:ea typeface="Aptos" pitchFamily="34" charset="-122"/>
                 <a:cs typeface="Aptos" pitchFamily="34" charset="-120"/>
               </a:rPr>
-              <a:t>Which current or proposed AI use case in your agency raises this.</a:t>
-            </a:r>
-            <a:endParaRPr lang="en-US" sz="1220" dirty="0"/>
-          </a:p>
-          <a:p>
-            <a:pPr indent="0" marL="0">
-              <a:buNone/>
-            </a:pPr>
-            <a:r>
-              <a:rPr lang="en-US" sz="1220" dirty="0">
+              <a:t>Which current or proposed AI use case in your.</a:t>
+            </a:r>
+            <a:endParaRPr lang="en-US" sz="1140" dirty="0"/>
+          </a:p>
+          <a:p>
+            <a:pPr indent="0" marL="0">
+              <a:buNone/>
+            </a:pPr>
+            <a:r>
+              <a:rPr lang="en-US" sz="1140" dirty="0">
                 <a:solidFill>
                   <a:srgbClr val="17364A"/>
                 </a:solidFill>
@@ -6094,16 +6098,16 @@
                 <a:ea typeface="Aptos" pitchFamily="34" charset="-122"/>
                 <a:cs typeface="Aptos" pitchFamily="34" charset="-120"/>
               </a:rPr>
-              <a:t>Who currently has authority to make decisions about this issue,.</a:t>
-            </a:r>
-            <a:endParaRPr lang="en-US" sz="1220" dirty="0"/>
-          </a:p>
-          <a:p>
-            <a:pPr indent="0" marL="0">
-              <a:buNone/>
-            </a:pPr>
-            <a:r>
-              <a:rPr lang="en-US" sz="1220" dirty="0">
+              <a:t>Who currently has authority to make decisions.</a:t>
+            </a:r>
+            <a:endParaRPr lang="en-US" sz="1140" dirty="0"/>
+          </a:p>
+          <a:p>
+            <a:pPr indent="0" marL="0">
+              <a:buNone/>
+            </a:pPr>
+            <a:r>
+              <a:rPr lang="en-US" sz="1140" dirty="0">
                 <a:solidFill>
                   <a:srgbClr val="17364A"/>
                 </a:solidFill>
@@ -6111,9 +6115,9 @@
                 <a:ea typeface="Aptos" pitchFamily="34" charset="-122"/>
                 <a:cs typeface="Aptos" pitchFamily="34" charset="-120"/>
               </a:rPr>
-              <a:t>What evidence would governance or leadership need before approving.</a:t>
-            </a:r>
-            <a:endParaRPr lang="en-US" sz="1220" dirty="0"/>
+              <a:t>What evidence would governance or leadership need.</a:t>
+            </a:r>
+            <a:endParaRPr lang="en-US" sz="1140" dirty="0"/>
           </a:p>
         </p:txBody>
       </p:sp>
@@ -6125,12 +6129,12 @@
         </p:nvSpPr>
         <p:spPr>
           <a:xfrm>
-            <a:off x="7635240" y="4184294"/>
-            <a:ext cx="3474720" cy="1466698"/>
+            <a:off x="7543800" y="4389120"/>
+            <a:ext cx="3611880" cy="1261872"/>
           </a:xfrm>
           <a:prstGeom prst="roundRect">
             <a:avLst>
-              <a:gd name="adj" fmla="val 7481"/>
+              <a:gd name="adj" fmla="val 8696"/>
             </a:avLst>
           </a:prstGeom>
           <a:solidFill>
@@ -6152,8 +6156,8 @@
         </p:nvSpPr>
         <p:spPr>
           <a:xfrm>
-            <a:off x="7799832" y="4330598"/>
-            <a:ext cx="3145536" cy="256032"/>
+            <a:off x="7708392" y="4517136"/>
+            <a:ext cx="3282696" cy="228600"/>
           </a:xfrm>
           <a:prstGeom prst="rect">
             <a:avLst/>
@@ -6169,7 +6173,7 @@
               <a:buNone/>
             </a:pPr>
             <a:r>
-              <a:rPr lang="en-US" sz="1300" b="1" dirty="0">
+              <a:rPr lang="en-US" sz="1220" b="1" dirty="0">
                 <a:solidFill>
                   <a:srgbClr val="0068B7"/>
                 </a:solidFill>
@@ -6179,7 +6183,7 @@
               </a:rPr>
               <a:t>Apply it</a:t>
             </a:r>
-            <a:endParaRPr lang="en-US" sz="1300" dirty="0"/>
+            <a:endParaRPr lang="en-US" sz="1220" dirty="0"/>
           </a:p>
         </p:txBody>
       </p:sp>
@@ -6191,8 +6195,8 @@
         </p:nvSpPr>
         <p:spPr>
           <a:xfrm>
-            <a:off x="7799832" y="4659782"/>
-            <a:ext cx="3145536" cy="899770"/>
+            <a:off x="7708392" y="4828032"/>
+            <a:ext cx="3282696" cy="749808"/>
           </a:xfrm>
           <a:prstGeom prst="rect">
             <a:avLst/>
@@ -6210,7 +6214,7 @@
               <a:buNone/>
             </a:pPr>
             <a:r>
-              <a:rPr lang="en-US" sz="1320" dirty="0">
+              <a:rPr lang="en-US" sz="1220" dirty="0">
                 <a:solidFill>
                   <a:srgbClr val="17364A"/>
                 </a:solidFill>
@@ -6218,9 +6222,9 @@
                 <a:ea typeface="Aptos" pitchFamily="34" charset="-122"/>
                 <a:cs typeface="Aptos" pitchFamily="34" charset="-120"/>
               </a:rPr>
-              <a:t>Connect the concept to public health purpose, responsible use, required safeguards, documentation, and the next action a department should take.</a:t>
-            </a:r>
-            <a:endParaRPr lang="en-US" sz="1320" dirty="0"/>
+              <a:t>Connect the concept to public health purpose, responsible use, required.</a:t>
+            </a:r>
+            <a:endParaRPr lang="en-US" sz="1220" dirty="0"/>
           </a:p>
         </p:txBody>
       </p:sp>
@@ -6511,8 +6515,8 @@
         </p:nvSpPr>
         <p:spPr>
           <a:xfrm>
-            <a:off x="868680" y="1508760"/>
-            <a:ext cx="6309360" cy="4160520"/>
+            <a:off x="822960" y="1463040"/>
+            <a:ext cx="6565392" cy="4343400"/>
           </a:xfrm>
           <a:prstGeom prst="rect">
             <a:avLst/>
@@ -6530,7 +6534,7 @@
               <a:buNone/>
             </a:pPr>
             <a:r>
-              <a:rPr lang="en-US" sz="2100" dirty="0">
+              <a:rPr lang="en-US" sz="1920" dirty="0">
                 <a:solidFill>
                   <a:srgbClr val="003A63"/>
                 </a:solidFill>
@@ -6538,16 +6542,16 @@
                 <a:ea typeface="Aptos" pitchFamily="34" charset="-122"/>
                 <a:cs typeface="Aptos" pitchFamily="34" charset="-120"/>
               </a:rPr>
-              <a:t>• Which staff, partners, or communities would be affected if this issue were handled poorly?</a:t>
-            </a:r>
-            <a:endParaRPr lang="en-US" sz="2100" dirty="0"/>
-          </a:p>
-          <a:p>
-            <a:pPr indent="0" marL="0">
-              <a:buNone/>
-            </a:pPr>
-            <a:r>
-              <a:rPr lang="en-US" sz="2100" dirty="0">
+              <a:t>• Which staff, partners, or communities would be affected if this issue were.</a:t>
+            </a:r>
+            <a:endParaRPr lang="en-US" sz="1920" dirty="0"/>
+          </a:p>
+          <a:p>
+            <a:pPr indent="0" marL="0">
+              <a:buNone/>
+            </a:pPr>
+            <a:r>
+              <a:rPr lang="en-US" sz="1920" dirty="0">
                 <a:solidFill>
                   <a:srgbClr val="003A63"/>
                 </a:solidFill>
@@ -6555,9 +6559,9 @@
                 <a:ea typeface="Aptos" pitchFamily="34" charset="-122"/>
                 <a:cs typeface="Aptos" pitchFamily="34" charset="-120"/>
               </a:rPr>
-              <a:t>• What policy, process, or artifact should be created or updated after this module?</a:t>
-            </a:r>
-            <a:endParaRPr lang="en-US" sz="2100" dirty="0"/>
+              <a:t>• What policy, process, or artifact should be created or updated after this.</a:t>
+            </a:r>
+            <a:endParaRPr lang="en-US" sz="1920" dirty="0"/>
           </a:p>
         </p:txBody>
       </p:sp>
@@ -6569,12 +6573,12 @@
         </p:nvSpPr>
         <p:spPr>
           <a:xfrm>
-            <a:off x="7635240" y="1325880"/>
-            <a:ext cx="3474720" cy="1207008"/>
+            <a:off x="7543800" y="1325880"/>
+            <a:ext cx="3611880" cy="1261872"/>
           </a:xfrm>
           <a:prstGeom prst="roundRect">
             <a:avLst>
-              <a:gd name="adj" fmla="val 9091"/>
+              <a:gd name="adj" fmla="val 8696"/>
             </a:avLst>
           </a:prstGeom>
           <a:solidFill>
@@ -6596,8 +6600,8 @@
         </p:nvSpPr>
         <p:spPr>
           <a:xfrm>
-            <a:off x="7799832" y="1472184"/>
-            <a:ext cx="3145536" cy="256032"/>
+            <a:off x="7708392" y="1453896"/>
+            <a:ext cx="3282696" cy="228600"/>
           </a:xfrm>
           <a:prstGeom prst="rect">
             <a:avLst/>
@@ -6613,7 +6617,7 @@
               <a:buNone/>
             </a:pPr>
             <a:r>
-              <a:rPr lang="en-US" sz="1300" b="1" dirty="0">
+              <a:rPr lang="en-US" sz="1220" b="1" dirty="0">
                 <a:solidFill>
                   <a:srgbClr val="0068B7"/>
                 </a:solidFill>
@@ -6623,7 +6627,7 @@
               </a:rPr>
               <a:t>Core concept</a:t>
             </a:r>
-            <a:endParaRPr lang="en-US" sz="1300" dirty="0"/>
+            <a:endParaRPr lang="en-US" sz="1220" dirty="0"/>
           </a:p>
         </p:txBody>
       </p:sp>
@@ -6635,8 +6639,8 @@
         </p:nvSpPr>
         <p:spPr>
           <a:xfrm>
-            <a:off x="7799832" y="1801368"/>
-            <a:ext cx="3145536" cy="640080"/>
+            <a:off x="7708392" y="1764792"/>
+            <a:ext cx="3282696" cy="749808"/>
           </a:xfrm>
           <a:prstGeom prst="rect">
             <a:avLst/>
@@ -6654,7 +6658,7 @@
               <a:buNone/>
             </a:pPr>
             <a:r>
-              <a:rPr lang="en-US" sz="1320" dirty="0">
+              <a:rPr lang="en-US" sz="1220" dirty="0">
                 <a:solidFill>
                   <a:srgbClr val="17364A"/>
                 </a:solidFill>
@@ -6662,9 +6666,9 @@
                 <a:ea typeface="Aptos" pitchFamily="34" charset="-122"/>
                 <a:cs typeface="Aptos" pitchFamily="34" charset="-120"/>
               </a:rPr>
-              <a:t>Which staff, partners, or communities would be affected if this issue were handled.</a:t>
-            </a:r>
-            <a:endParaRPr lang="en-US" sz="1320" dirty="0"/>
+              <a:t>Which staff, partners, or communities would be affected if this issue were.</a:t>
+            </a:r>
+            <a:endParaRPr lang="en-US" sz="1220" dirty="0"/>
           </a:p>
         </p:txBody>
       </p:sp>
@@ -6676,12 +6680,12 @@
         </p:nvSpPr>
         <p:spPr>
           <a:xfrm>
-            <a:off x="7635240" y="2670048"/>
-            <a:ext cx="3474720" cy="1377086"/>
+            <a:off x="7543800" y="2724912"/>
+            <a:ext cx="3611880" cy="1527048"/>
           </a:xfrm>
           <a:prstGeom prst="roundRect">
             <a:avLst>
-              <a:gd name="adj" fmla="val 7968"/>
+              <a:gd name="adj" fmla="val 7186"/>
             </a:avLst>
           </a:prstGeom>
           <a:solidFill>
@@ -6703,8 +6707,8 @@
         </p:nvSpPr>
         <p:spPr>
           <a:xfrm>
-            <a:off x="7799832" y="2816352"/>
-            <a:ext cx="3145536" cy="256032"/>
+            <a:off x="7708392" y="2852928"/>
+            <a:ext cx="3282696" cy="228600"/>
           </a:xfrm>
           <a:prstGeom prst="rect">
             <a:avLst/>
@@ -6720,7 +6724,7 @@
               <a:buNone/>
             </a:pPr>
             <a:r>
-              <a:rPr lang="en-US" sz="1300" b="1" dirty="0">
+              <a:rPr lang="en-US" sz="1220" b="1" dirty="0">
                 <a:solidFill>
                   <a:srgbClr val="0068B7"/>
                 </a:solidFill>
@@ -6730,7 +6734,7 @@
               </a:rPr>
               <a:t>Concept checkpoints</a:t>
             </a:r>
-            <a:endParaRPr lang="en-US" sz="1300" dirty="0"/>
+            <a:endParaRPr lang="en-US" sz="1220" dirty="0"/>
           </a:p>
         </p:txBody>
       </p:sp>
@@ -6742,8 +6746,8 @@
         </p:nvSpPr>
         <p:spPr>
           <a:xfrm>
-            <a:off x="7818120" y="3182112"/>
-            <a:ext cx="3090672" cy="718718"/>
+            <a:off x="7726680" y="3182112"/>
+            <a:ext cx="3227832" cy="960120"/>
           </a:xfrm>
           <a:prstGeom prst="rect">
             <a:avLst/>
@@ -6761,7 +6765,7 @@
               <a:buNone/>
             </a:pPr>
             <a:r>
-              <a:rPr lang="en-US" sz="1220" dirty="0">
+              <a:rPr lang="en-US" sz="1140" dirty="0">
                 <a:solidFill>
                   <a:srgbClr val="17364A"/>
                 </a:solidFill>
@@ -6769,16 +6773,16 @@
                 <a:ea typeface="Aptos" pitchFamily="34" charset="-122"/>
                 <a:cs typeface="Aptos" pitchFamily="34" charset="-120"/>
               </a:rPr>
-              <a:t>Which staff, partners, or communities would be affected if this.</a:t>
-            </a:r>
-            <a:endParaRPr lang="en-US" sz="1220" dirty="0"/>
-          </a:p>
-          <a:p>
-            <a:pPr indent="0" marL="0">
-              <a:buNone/>
-            </a:pPr>
-            <a:r>
-              <a:rPr lang="en-US" sz="1220" dirty="0">
+              <a:t>Which staff, partners, or communities would be.</a:t>
+            </a:r>
+            <a:endParaRPr lang="en-US" sz="1140" dirty="0"/>
+          </a:p>
+          <a:p>
+            <a:pPr indent="0" marL="0">
+              <a:buNone/>
+            </a:pPr>
+            <a:r>
+              <a:rPr lang="en-US" sz="1140" dirty="0">
                 <a:solidFill>
                   <a:srgbClr val="17364A"/>
                 </a:solidFill>
@@ -6786,9 +6790,9 @@
                 <a:ea typeface="Aptos" pitchFamily="34" charset="-122"/>
                 <a:cs typeface="Aptos" pitchFamily="34" charset="-120"/>
               </a:rPr>
-              <a:t>What policy, process, or artifact should be created or updated.</a:t>
-            </a:r>
-            <a:endParaRPr lang="en-US" sz="1220" dirty="0"/>
+              <a:t>What policy, process, or artifact should be.</a:t>
+            </a:r>
+            <a:endParaRPr lang="en-US" sz="1140" dirty="0"/>
           </a:p>
         </p:txBody>
       </p:sp>
@@ -6800,12 +6804,12 @@
         </p:nvSpPr>
         <p:spPr>
           <a:xfrm>
-            <a:off x="7635240" y="4184294"/>
-            <a:ext cx="3474720" cy="1466698"/>
+            <a:off x="7543800" y="4389120"/>
+            <a:ext cx="3611880" cy="1261872"/>
           </a:xfrm>
           <a:prstGeom prst="roundRect">
             <a:avLst>
-              <a:gd name="adj" fmla="val 7481"/>
+              <a:gd name="adj" fmla="val 8696"/>
             </a:avLst>
           </a:prstGeom>
           <a:solidFill>
@@ -6827,8 +6831,8 @@
         </p:nvSpPr>
         <p:spPr>
           <a:xfrm>
-            <a:off x="7799832" y="4330598"/>
-            <a:ext cx="3145536" cy="256032"/>
+            <a:off x="7708392" y="4517136"/>
+            <a:ext cx="3282696" cy="228600"/>
           </a:xfrm>
           <a:prstGeom prst="rect">
             <a:avLst/>
@@ -6844,7 +6848,7 @@
               <a:buNone/>
             </a:pPr>
             <a:r>
-              <a:rPr lang="en-US" sz="1300" b="1" dirty="0">
+              <a:rPr lang="en-US" sz="1220" b="1" dirty="0">
                 <a:solidFill>
                   <a:srgbClr val="0068B7"/>
                 </a:solidFill>
@@ -6854,7 +6858,7 @@
               </a:rPr>
               <a:t>Apply it</a:t>
             </a:r>
-            <a:endParaRPr lang="en-US" sz="1300" dirty="0"/>
+            <a:endParaRPr lang="en-US" sz="1220" dirty="0"/>
           </a:p>
         </p:txBody>
       </p:sp>
@@ -6866,8 +6870,8 @@
         </p:nvSpPr>
         <p:spPr>
           <a:xfrm>
-            <a:off x="7799832" y="4659782"/>
-            <a:ext cx="3145536" cy="899770"/>
+            <a:off x="7708392" y="4828032"/>
+            <a:ext cx="3282696" cy="749808"/>
           </a:xfrm>
           <a:prstGeom prst="rect">
             <a:avLst/>
@@ -6885,7 +6889,7 @@
               <a:buNone/>
             </a:pPr>
             <a:r>
-              <a:rPr lang="en-US" sz="1320" dirty="0">
+              <a:rPr lang="en-US" sz="1220" dirty="0">
                 <a:solidFill>
                   <a:srgbClr val="17364A"/>
                 </a:solidFill>
@@ -6893,9 +6897,9 @@
                 <a:ea typeface="Aptos" pitchFamily="34" charset="-122"/>
                 <a:cs typeface="Aptos" pitchFamily="34" charset="-120"/>
               </a:rPr>
-              <a:t>Connect the concept to public health purpose, responsible use, required safeguards, documentation, and the next action a department should take.</a:t>
-            </a:r>
-            <a:endParaRPr lang="en-US" sz="1320" dirty="0"/>
+              <a:t>Connect the concept to public health purpose, responsible use, required.</a:t>
+            </a:r>
+            <a:endParaRPr lang="en-US" sz="1220" dirty="0"/>
           </a:p>
         </p:txBody>
       </p:sp>
@@ -7186,8 +7190,8 @@
         </p:nvSpPr>
         <p:spPr>
           <a:xfrm>
-            <a:off x="868680" y="1508760"/>
-            <a:ext cx="6309360" cy="4160520"/>
+            <a:off x="822960" y="1463040"/>
+            <a:ext cx="6565392" cy="4343400"/>
           </a:xfrm>
           <a:prstGeom prst="rect">
             <a:avLst/>
@@ -7205,7 +7209,7 @@
               <a:buNone/>
             </a:pPr>
             <a:r>
-              <a:rPr lang="en-US" sz="2100" dirty="0">
+              <a:rPr lang="en-US" sz="1920" dirty="0">
                 <a:solidFill>
                   <a:srgbClr val="003A63"/>
                 </a:solidFill>
@@ -7215,14 +7219,14 @@
               </a:rPr>
               <a:t>• Complete an AI business case review worksheet for one proposed investment.</a:t>
             </a:r>
-            <a:endParaRPr lang="en-US" sz="2100" dirty="0"/>
-          </a:p>
-          <a:p>
-            <a:pPr indent="0" marL="0">
-              <a:buNone/>
-            </a:pPr>
-            <a:r>
-              <a:rPr lang="en-US" sz="2100" dirty="0">
+            <a:endParaRPr lang="en-US" sz="1920" dirty="0"/>
+          </a:p>
+          <a:p>
+            <a:pPr indent="0" marL="0">
+              <a:buNone/>
+            </a:pPr>
+            <a:r>
+              <a:rPr lang="en-US" sz="1920" dirty="0">
                 <a:solidFill>
                   <a:srgbClr val="003A63"/>
                 </a:solidFill>
@@ -7230,9 +7234,9 @@
                 <a:ea typeface="Aptos" pitchFamily="34" charset="-122"/>
                 <a:cs typeface="Aptos" pitchFamily="34" charset="-120"/>
               </a:rPr>
-              <a:t>• Include problem, alternatives, expected benefits, total cost of ownership, risk, equity.</a:t>
-            </a:r>
-            <a:endParaRPr lang="en-US" sz="2100" dirty="0"/>
+              <a:t>• Include problem, alternatives, expected benefits, total cost of ownership,.</a:t>
+            </a:r>
+            <a:endParaRPr lang="en-US" sz="1920" dirty="0"/>
           </a:p>
         </p:txBody>
       </p:sp>
@@ -7244,12 +7248,12 @@
         </p:nvSpPr>
         <p:spPr>
           <a:xfrm>
-            <a:off x="7635240" y="1325880"/>
-            <a:ext cx="3474720" cy="1207008"/>
+            <a:off x="7543800" y="1325880"/>
+            <a:ext cx="3611880" cy="1261872"/>
           </a:xfrm>
           <a:prstGeom prst="roundRect">
             <a:avLst>
-              <a:gd name="adj" fmla="val 9091"/>
+              <a:gd name="adj" fmla="val 8696"/>
             </a:avLst>
           </a:prstGeom>
           <a:solidFill>
@@ -7271,8 +7275,8 @@
         </p:nvSpPr>
         <p:spPr>
           <a:xfrm>
-            <a:off x="7799832" y="1472184"/>
-            <a:ext cx="3145536" cy="256032"/>
+            <a:off x="7708392" y="1453896"/>
+            <a:ext cx="3282696" cy="228600"/>
           </a:xfrm>
           <a:prstGeom prst="rect">
             <a:avLst/>
@@ -7288,7 +7292,7 @@
               <a:buNone/>
             </a:pPr>
             <a:r>
-              <a:rPr lang="en-US" sz="1300" b="1" dirty="0">
+              <a:rPr lang="en-US" sz="1220" b="1" dirty="0">
                 <a:solidFill>
                   <a:srgbClr val="0068B7"/>
                 </a:solidFill>
@@ -7298,7 +7302,7 @@
               </a:rPr>
               <a:t>Practice focus</a:t>
             </a:r>
-            <a:endParaRPr lang="en-US" sz="1300" dirty="0"/>
+            <a:endParaRPr lang="en-US" sz="1220" dirty="0"/>
           </a:p>
         </p:txBody>
       </p:sp>
@@ -7310,8 +7314,8 @@
         </p:nvSpPr>
         <p:spPr>
           <a:xfrm>
-            <a:off x="7799832" y="1801368"/>
-            <a:ext cx="3145536" cy="640080"/>
+            <a:off x="7708392" y="1764792"/>
+            <a:ext cx="3282696" cy="749808"/>
           </a:xfrm>
           <a:prstGeom prst="rect">
             <a:avLst/>
@@ -7329,7 +7333,7 @@
               <a:buNone/>
             </a:pPr>
             <a:r>
-              <a:rPr lang="en-US" sz="1320" dirty="0">
+              <a:rPr lang="en-US" sz="1220" dirty="0">
                 <a:solidFill>
                   <a:srgbClr val="17364A"/>
                 </a:solidFill>
@@ -7339,7 +7343,7 @@
               </a:rPr>
               <a:t>Complete an AI business case review worksheet for one proposed investment.</a:t>
             </a:r>
-            <a:endParaRPr lang="en-US" sz="1320" dirty="0"/>
+            <a:endParaRPr lang="en-US" sz="1220" dirty="0"/>
           </a:p>
         </p:txBody>
       </p:sp>
@@ -7351,12 +7355,12 @@
         </p:nvSpPr>
         <p:spPr>
           <a:xfrm>
-            <a:off x="7635240" y="2670048"/>
-            <a:ext cx="3474720" cy="1377086"/>
+            <a:off x="7543800" y="2724912"/>
+            <a:ext cx="3611880" cy="1527048"/>
           </a:xfrm>
           <a:prstGeom prst="roundRect">
             <a:avLst>
-              <a:gd name="adj" fmla="val 7968"/>
+              <a:gd name="adj" fmla="val 7186"/>
             </a:avLst>
           </a:prstGeom>
           <a:solidFill>
@@ -7378,8 +7382,8 @@
         </p:nvSpPr>
         <p:spPr>
           <a:xfrm>
-            <a:off x="7799832" y="2816352"/>
-            <a:ext cx="3145536" cy="256032"/>
+            <a:off x="7708392" y="2852928"/>
+            <a:ext cx="3282696" cy="228600"/>
           </a:xfrm>
           <a:prstGeom prst="rect">
             <a:avLst/>
@@ -7395,7 +7399,7 @@
               <a:buNone/>
             </a:pPr>
             <a:r>
-              <a:rPr lang="en-US" sz="1300" b="1" dirty="0">
+              <a:rPr lang="en-US" sz="1220" b="1" dirty="0">
                 <a:solidFill>
                   <a:srgbClr val="0068B7"/>
                 </a:solidFill>
@@ -7405,7 +7409,7 @@
               </a:rPr>
               <a:t>Concept checkpoints</a:t>
             </a:r>
-            <a:endParaRPr lang="en-US" sz="1300" dirty="0"/>
+            <a:endParaRPr lang="en-US" sz="1220" dirty="0"/>
           </a:p>
         </p:txBody>
       </p:sp>
@@ -7417,8 +7421,8 @@
         </p:nvSpPr>
         <p:spPr>
           <a:xfrm>
-            <a:off x="7818120" y="3182112"/>
-            <a:ext cx="3090672" cy="718718"/>
+            <a:off x="7726680" y="3182112"/>
+            <a:ext cx="3227832" cy="960120"/>
           </a:xfrm>
           <a:prstGeom prst="rect">
             <a:avLst/>
@@ -7436,7 +7440,7 @@
               <a:buNone/>
             </a:pPr>
             <a:r>
-              <a:rPr lang="en-US" sz="1220" dirty="0">
+              <a:rPr lang="en-US" sz="1140" dirty="0">
                 <a:solidFill>
                   <a:srgbClr val="17364A"/>
                 </a:solidFill>
@@ -7444,16 +7448,16 @@
                 <a:ea typeface="Aptos" pitchFamily="34" charset="-122"/>
                 <a:cs typeface="Aptos" pitchFamily="34" charset="-120"/>
               </a:rPr>
-              <a:t>Complete an AI business case review worksheet for one proposed.</a:t>
-            </a:r>
-            <a:endParaRPr lang="en-US" sz="1220" dirty="0"/>
-          </a:p>
-          <a:p>
-            <a:pPr indent="0" marL="0">
-              <a:buNone/>
-            </a:pPr>
-            <a:r>
-              <a:rPr lang="en-US" sz="1220" dirty="0">
+              <a:t>Complete an AI business case review worksheet for.</a:t>
+            </a:r>
+            <a:endParaRPr lang="en-US" sz="1140" dirty="0"/>
+          </a:p>
+          <a:p>
+            <a:pPr indent="0" marL="0">
+              <a:buNone/>
+            </a:pPr>
+            <a:r>
+              <a:rPr lang="en-US" sz="1140" dirty="0">
                 <a:solidFill>
                   <a:srgbClr val="17364A"/>
                 </a:solidFill>
@@ -7461,9 +7465,9 @@
                 <a:ea typeface="Aptos" pitchFamily="34" charset="-122"/>
                 <a:cs typeface="Aptos" pitchFamily="34" charset="-120"/>
               </a:rPr>
-              <a:t>Include problem, alternatives, expected benefits, total cost of.</a:t>
-            </a:r>
-            <a:endParaRPr lang="en-US" sz="1220" dirty="0"/>
+              <a:t>Include problem, alternatives, expected benefits,.</a:t>
+            </a:r>
+            <a:endParaRPr lang="en-US" sz="1140" dirty="0"/>
           </a:p>
         </p:txBody>
       </p:sp>
@@ -7475,12 +7479,12 @@
         </p:nvSpPr>
         <p:spPr>
           <a:xfrm>
-            <a:off x="7635240" y="4184294"/>
-            <a:ext cx="3474720" cy="1466698"/>
+            <a:off x="7543800" y="4389120"/>
+            <a:ext cx="3611880" cy="1261872"/>
           </a:xfrm>
           <a:prstGeom prst="roundRect">
             <a:avLst>
-              <a:gd name="adj" fmla="val 7481"/>
+              <a:gd name="adj" fmla="val 8696"/>
             </a:avLst>
           </a:prstGeom>
           <a:solidFill>
@@ -7502,8 +7506,8 @@
         </p:nvSpPr>
         <p:spPr>
           <a:xfrm>
-            <a:off x="7799832" y="4330598"/>
-            <a:ext cx="3145536" cy="256032"/>
+            <a:off x="7708392" y="4517136"/>
+            <a:ext cx="3282696" cy="228600"/>
           </a:xfrm>
           <a:prstGeom prst="rect">
             <a:avLst/>
@@ -7519,7 +7523,7 @@
               <a:buNone/>
             </a:pPr>
             <a:r>
-              <a:rPr lang="en-US" sz="1300" b="1" dirty="0">
+              <a:rPr lang="en-US" sz="1220" b="1" dirty="0">
                 <a:solidFill>
                   <a:srgbClr val="0068B7"/>
                 </a:solidFill>
@@ -7529,7 +7533,7 @@
               </a:rPr>
               <a:t>What to produce</a:t>
             </a:r>
-            <a:endParaRPr lang="en-US" sz="1300" dirty="0"/>
+            <a:endParaRPr lang="en-US" sz="1220" dirty="0"/>
           </a:p>
         </p:txBody>
       </p:sp>
@@ -7541,8 +7545,8 @@
         </p:nvSpPr>
         <p:spPr>
           <a:xfrm>
-            <a:off x="7799832" y="4659782"/>
-            <a:ext cx="3145536" cy="899770"/>
+            <a:off x="7708392" y="4828032"/>
+            <a:ext cx="3282696" cy="749808"/>
           </a:xfrm>
           <a:prstGeom prst="rect">
             <a:avLst/>
@@ -7560,7 +7564,7 @@
               <a:buNone/>
             </a:pPr>
             <a:r>
-              <a:rPr lang="en-US" sz="1320" dirty="0">
+              <a:rPr lang="en-US" sz="1220" dirty="0">
                 <a:solidFill>
                   <a:srgbClr val="17364A"/>
                 </a:solidFill>
@@ -7568,9 +7572,9 @@
                 <a:ea typeface="Aptos" pitchFamily="34" charset="-122"/>
                 <a:cs typeface="Aptos" pitchFamily="34" charset="-120"/>
               </a:rPr>
-              <a:t>Use the assignment to test whether you can explain the concept, apply it to a realistic public health situation, and identify what would need review before the work moves forward.</a:t>
-            </a:r>
-            <a:endParaRPr lang="en-US" sz="1320" dirty="0"/>
+              <a:t>Use the assignment to test whether you can explain the concept, apply it to a.</a:t>
+            </a:r>
+            <a:endParaRPr lang="en-US" sz="1220" dirty="0"/>
           </a:p>
         </p:txBody>
       </p:sp>
@@ -7861,8 +7865,8 @@
         </p:nvSpPr>
         <p:spPr>
           <a:xfrm>
-            <a:off x="868680" y="1508760"/>
-            <a:ext cx="6309360" cy="4160520"/>
+            <a:off x="822960" y="1463040"/>
+            <a:ext cx="6565392" cy="4343400"/>
           </a:xfrm>
           <a:prstGeom prst="rect">
             <a:avLst/>
@@ -7880,7 +7884,7 @@
               <a:buNone/>
             </a:pPr>
             <a:r>
-              <a:rPr lang="en-US" sz="2100" dirty="0">
+              <a:rPr lang="en-US" sz="1920" dirty="0">
                 <a:solidFill>
                   <a:srgbClr val="003A63"/>
                 </a:solidFill>
@@ -7890,14 +7894,14 @@
               </a:rPr>
               <a:t>• Choose a real or realistic public health AI use case.</a:t>
             </a:r>
-            <a:endParaRPr lang="en-US" sz="2100" dirty="0"/>
-          </a:p>
-          <a:p>
-            <a:pPr indent="0" marL="0">
-              <a:buNone/>
-            </a:pPr>
-            <a:r>
-              <a:rPr lang="en-US" sz="2100" dirty="0">
+            <a:endParaRPr lang="en-US" sz="1920" dirty="0"/>
+          </a:p>
+          <a:p>
+            <a:pPr indent="0" marL="0">
+              <a:buNone/>
+            </a:pPr>
+            <a:r>
+              <a:rPr lang="en-US" sz="1920" dirty="0">
                 <a:solidFill>
                   <a:srgbClr val="003A63"/>
                 </a:solidFill>
@@ -7905,16 +7909,16 @@
                 <a:ea typeface="Aptos" pitchFamily="34" charset="-122"/>
                 <a:cs typeface="Aptos" pitchFamily="34" charset="-120"/>
               </a:rPr>
-              <a:t>• Document assumptions, unresolved questions, and which agency roles would need to review the.</a:t>
-            </a:r>
-            <a:endParaRPr lang="en-US" sz="2100" dirty="0"/>
-          </a:p>
-          <a:p>
-            <a:pPr indent="0" marL="0">
-              <a:buNone/>
-            </a:pPr>
-            <a:r>
-              <a:rPr lang="en-US" sz="2100" dirty="0">
+              <a:t>• Document assumptions, unresolved questions, and which agency roles would.</a:t>
+            </a:r>
+            <a:endParaRPr lang="en-US" sz="1920" dirty="0"/>
+          </a:p>
+          <a:p>
+            <a:pPr indent="0" marL="0">
+              <a:buNone/>
+            </a:pPr>
+            <a:r>
+              <a:rPr lang="en-US" sz="1920" dirty="0">
                 <a:solidFill>
                   <a:srgbClr val="003A63"/>
                 </a:solidFill>
@@ -7922,9 +7926,9 @@
                 <a:ea typeface="Aptos" pitchFamily="34" charset="-122"/>
                 <a:cs typeface="Aptos" pitchFamily="34" charset="-120"/>
               </a:rPr>
-              <a:t>• The exercise should produce a work product that could support governance review, leadership.</a:t>
-            </a:r>
-            <a:endParaRPr lang="en-US" sz="2100" dirty="0"/>
+              <a:t>• The exercise should produce a work product that could support governance.</a:t>
+            </a:r>
+            <a:endParaRPr lang="en-US" sz="1920" dirty="0"/>
           </a:p>
         </p:txBody>
       </p:sp>
@@ -7936,12 +7940,12 @@
         </p:nvSpPr>
         <p:spPr>
           <a:xfrm>
-            <a:off x="7635240" y="1325880"/>
-            <a:ext cx="3474720" cy="1207008"/>
+            <a:off x="7543800" y="1325880"/>
+            <a:ext cx="3611880" cy="1261872"/>
           </a:xfrm>
           <a:prstGeom prst="roundRect">
             <a:avLst>
-              <a:gd name="adj" fmla="val 9091"/>
+              <a:gd name="adj" fmla="val 8696"/>
             </a:avLst>
           </a:prstGeom>
           <a:solidFill>
@@ -7963,8 +7967,8 @@
         </p:nvSpPr>
         <p:spPr>
           <a:xfrm>
-            <a:off x="7799832" y="1472184"/>
-            <a:ext cx="3145536" cy="256032"/>
+            <a:off x="7708392" y="1453896"/>
+            <a:ext cx="3282696" cy="228600"/>
           </a:xfrm>
           <a:prstGeom prst="rect">
             <a:avLst/>
@@ -7980,7 +7984,7 @@
               <a:buNone/>
             </a:pPr>
             <a:r>
-              <a:rPr lang="en-US" sz="1300" b="1" dirty="0">
+              <a:rPr lang="en-US" sz="1220" b="1" dirty="0">
                 <a:solidFill>
                   <a:srgbClr val="0068B7"/>
                 </a:solidFill>
@@ -7990,7 +7994,7 @@
               </a:rPr>
               <a:t>Core concept</a:t>
             </a:r>
-            <a:endParaRPr lang="en-US" sz="1300" dirty="0"/>
+            <a:endParaRPr lang="en-US" sz="1220" dirty="0"/>
           </a:p>
         </p:txBody>
       </p:sp>
@@ -8002,8 +8006,8 @@
         </p:nvSpPr>
         <p:spPr>
           <a:xfrm>
-            <a:off x="7799832" y="1801368"/>
-            <a:ext cx="3145536" cy="640080"/>
+            <a:off x="7708392" y="1764792"/>
+            <a:ext cx="3282696" cy="749808"/>
           </a:xfrm>
           <a:prstGeom prst="rect">
             <a:avLst/>
@@ -8021,7 +8025,7 @@
               <a:buNone/>
             </a:pPr>
             <a:r>
-              <a:rPr lang="en-US" sz="1320" dirty="0">
+              <a:rPr lang="en-US" sz="1220" dirty="0">
                 <a:solidFill>
                   <a:srgbClr val="17364A"/>
                 </a:solidFill>
@@ -8031,7 +8035,7 @@
               </a:rPr>
               <a:t>Choose a real or realistic public health AI use case.</a:t>
             </a:r>
-            <a:endParaRPr lang="en-US" sz="1320" dirty="0"/>
+            <a:endParaRPr lang="en-US" sz="1220" dirty="0"/>
           </a:p>
         </p:txBody>
       </p:sp>
@@ -8043,12 +8047,12 @@
         </p:nvSpPr>
         <p:spPr>
           <a:xfrm>
-            <a:off x="7635240" y="2670048"/>
-            <a:ext cx="3474720" cy="1377086"/>
+            <a:off x="7543800" y="2724912"/>
+            <a:ext cx="3611880" cy="1527048"/>
           </a:xfrm>
           <a:prstGeom prst="roundRect">
             <a:avLst>
-              <a:gd name="adj" fmla="val 7968"/>
+              <a:gd name="adj" fmla="val 7186"/>
             </a:avLst>
           </a:prstGeom>
           <a:solidFill>
@@ -8070,8 +8074,8 @@
         </p:nvSpPr>
         <p:spPr>
           <a:xfrm>
-            <a:off x="7799832" y="2816352"/>
-            <a:ext cx="3145536" cy="256032"/>
+            <a:off x="7708392" y="2852928"/>
+            <a:ext cx="3282696" cy="228600"/>
           </a:xfrm>
           <a:prstGeom prst="rect">
             <a:avLst/>
@@ -8087,7 +8091,7 @@
               <a:buNone/>
             </a:pPr>
             <a:r>
-              <a:rPr lang="en-US" sz="1300" b="1" dirty="0">
+              <a:rPr lang="en-US" sz="1220" b="1" dirty="0">
                 <a:solidFill>
                   <a:srgbClr val="0068B7"/>
                 </a:solidFill>
@@ -8097,7 +8101,7 @@
               </a:rPr>
               <a:t>Concept checkpoints</a:t>
             </a:r>
-            <a:endParaRPr lang="en-US" sz="1300" dirty="0"/>
+            <a:endParaRPr lang="en-US" sz="1220" dirty="0"/>
           </a:p>
         </p:txBody>
       </p:sp>
@@ -8109,8 +8113,8 @@
         </p:nvSpPr>
         <p:spPr>
           <a:xfrm>
-            <a:off x="7818120" y="3182112"/>
-            <a:ext cx="3090672" cy="718718"/>
+            <a:off x="7726680" y="3182112"/>
+            <a:ext cx="3227832" cy="960120"/>
           </a:xfrm>
           <a:prstGeom prst="rect">
             <a:avLst/>
@@ -8128,7 +8132,7 @@
               <a:buNone/>
             </a:pPr>
             <a:r>
-              <a:rPr lang="en-US" sz="1220" dirty="0">
+              <a:rPr lang="en-US" sz="1140" dirty="0">
                 <a:solidFill>
                   <a:srgbClr val="17364A"/>
                 </a:solidFill>
@@ -8136,16 +8140,16 @@
                 <a:ea typeface="Aptos" pitchFamily="34" charset="-122"/>
                 <a:cs typeface="Aptos" pitchFamily="34" charset="-120"/>
               </a:rPr>
-              <a:t>Document assumptions, unresolved questions, and which agency roles.</a:t>
-            </a:r>
-            <a:endParaRPr lang="en-US" sz="1220" dirty="0"/>
-          </a:p>
-          <a:p>
-            <a:pPr indent="0" marL="0">
-              <a:buNone/>
-            </a:pPr>
-            <a:r>
-              <a:rPr lang="en-US" sz="1220" dirty="0">
+              <a:t>Document assumptions, unresolved questions, and.</a:t>
+            </a:r>
+            <a:endParaRPr lang="en-US" sz="1140" dirty="0"/>
+          </a:p>
+          <a:p>
+            <a:pPr indent="0" marL="0">
+              <a:buNone/>
+            </a:pPr>
+            <a:r>
+              <a:rPr lang="en-US" sz="1140" dirty="0">
                 <a:solidFill>
                   <a:srgbClr val="17364A"/>
                 </a:solidFill>
@@ -8153,9 +8157,9 @@
                 <a:ea typeface="Aptos" pitchFamily="34" charset="-122"/>
                 <a:cs typeface="Aptos" pitchFamily="34" charset="-120"/>
               </a:rPr>
-              <a:t>The exercise should produce a work product that could support.</a:t>
-            </a:r>
-            <a:endParaRPr lang="en-US" sz="1220" dirty="0"/>
+              <a:t>The exercise should produce a work product that.</a:t>
+            </a:r>
+            <a:endParaRPr lang="en-US" sz="1140" dirty="0"/>
           </a:p>
         </p:txBody>
       </p:sp>
@@ -8167,12 +8171,12 @@
         </p:nvSpPr>
         <p:spPr>
           <a:xfrm>
-            <a:off x="7635240" y="4184294"/>
-            <a:ext cx="3474720" cy="1466698"/>
+            <a:off x="7543800" y="4389120"/>
+            <a:ext cx="3611880" cy="1261872"/>
           </a:xfrm>
           <a:prstGeom prst="roundRect">
             <a:avLst>
-              <a:gd name="adj" fmla="val 7481"/>
+              <a:gd name="adj" fmla="val 8696"/>
             </a:avLst>
           </a:prstGeom>
           <a:solidFill>
@@ -8194,8 +8198,8 @@
         </p:nvSpPr>
         <p:spPr>
           <a:xfrm>
-            <a:off x="7799832" y="4330598"/>
-            <a:ext cx="3145536" cy="256032"/>
+            <a:off x="7708392" y="4517136"/>
+            <a:ext cx="3282696" cy="228600"/>
           </a:xfrm>
           <a:prstGeom prst="rect">
             <a:avLst/>
@@ -8211,7 +8215,7 @@
               <a:buNone/>
             </a:pPr>
             <a:r>
-              <a:rPr lang="en-US" sz="1300" b="1" dirty="0">
+              <a:rPr lang="en-US" sz="1220" b="1" dirty="0">
                 <a:solidFill>
                   <a:srgbClr val="0068B7"/>
                 </a:solidFill>
@@ -8221,7 +8225,7 @@
               </a:rPr>
               <a:t>Apply it</a:t>
             </a:r>
-            <a:endParaRPr lang="en-US" sz="1300" dirty="0"/>
+            <a:endParaRPr lang="en-US" sz="1220" dirty="0"/>
           </a:p>
         </p:txBody>
       </p:sp>
@@ -8233,8 +8237,8 @@
         </p:nvSpPr>
         <p:spPr>
           <a:xfrm>
-            <a:off x="7799832" y="4659782"/>
-            <a:ext cx="3145536" cy="899770"/>
+            <a:off x="7708392" y="4828032"/>
+            <a:ext cx="3282696" cy="749808"/>
           </a:xfrm>
           <a:prstGeom prst="rect">
             <a:avLst/>
@@ -8252,7 +8256,7 @@
               <a:buNone/>
             </a:pPr>
             <a:r>
-              <a:rPr lang="en-US" sz="1320" dirty="0">
+              <a:rPr lang="en-US" sz="1220" dirty="0">
                 <a:solidFill>
                   <a:srgbClr val="17364A"/>
                 </a:solidFill>
@@ -8260,9 +8264,9 @@
                 <a:ea typeface="Aptos" pitchFamily="34" charset="-122"/>
                 <a:cs typeface="Aptos" pitchFamily="34" charset="-120"/>
               </a:rPr>
-              <a:t>Connect the concept to public health purpose, responsible use, required safeguards, documentation, and the next action a department should take.</a:t>
-            </a:r>
-            <a:endParaRPr lang="en-US" sz="1320" dirty="0"/>
+              <a:t>Connect the concept to public health purpose, responsible use, required.</a:t>
+            </a:r>
+            <a:endParaRPr lang="en-US" sz="1220" dirty="0"/>
           </a:p>
         </p:txBody>
       </p:sp>
@@ -8553,8 +8557,8 @@
         </p:nvSpPr>
         <p:spPr>
           <a:xfrm>
-            <a:off x="868680" y="1508760"/>
-            <a:ext cx="6309360" cy="4160520"/>
+            <a:off x="822960" y="1463040"/>
+            <a:ext cx="6565392" cy="4343400"/>
           </a:xfrm>
           <a:prstGeom prst="rect">
             <a:avLst/>
@@ -8572,7 +8576,7 @@
               <a:buNone/>
             </a:pPr>
             <a:r>
-              <a:rPr lang="en-US" sz="2100" dirty="0">
+              <a:rPr lang="en-US" sz="1920" dirty="0">
                 <a:solidFill>
                   <a:srgbClr val="003A63"/>
                 </a:solidFill>
@@ -8580,9 +8584,9 @@
                 <a:ea typeface="Aptos" pitchFamily="34" charset="-122"/>
                 <a:cs typeface="Aptos" pitchFamily="34" charset="-120"/>
               </a:rPr>
-              <a:t>• AI business case worksheet; total cost of ownership estimate; benefits realization plan;.</a:t>
-            </a:r>
-            <a:endParaRPr lang="en-US" sz="2100" dirty="0"/>
+              <a:t>• AI business case worksheet; total cost of ownership estimate; benefits.</a:t>
+            </a:r>
+            <a:endParaRPr lang="en-US" sz="1920" dirty="0"/>
           </a:p>
         </p:txBody>
       </p:sp>
@@ -8594,12 +8598,12 @@
         </p:nvSpPr>
         <p:spPr>
           <a:xfrm>
-            <a:off x="7635240" y="1325880"/>
-            <a:ext cx="3474720" cy="1255471"/>
+            <a:off x="7543800" y="1325880"/>
+            <a:ext cx="3611880" cy="1261872"/>
           </a:xfrm>
           <a:prstGeom prst="roundRect">
             <a:avLst>
-              <a:gd name="adj" fmla="val 8740"/>
+              <a:gd name="adj" fmla="val 8696"/>
             </a:avLst>
           </a:prstGeom>
           <a:solidFill>
@@ -8621,8 +8625,8 @@
         </p:nvSpPr>
         <p:spPr>
           <a:xfrm>
-            <a:off x="7799832" y="1472184"/>
-            <a:ext cx="3145536" cy="256032"/>
+            <a:off x="7708392" y="1453896"/>
+            <a:ext cx="3282696" cy="228600"/>
           </a:xfrm>
           <a:prstGeom prst="rect">
             <a:avLst/>
@@ -8638,7 +8642,7 @@
               <a:buNone/>
             </a:pPr>
             <a:r>
-              <a:rPr lang="en-US" sz="1300" b="1" dirty="0">
+              <a:rPr lang="en-US" sz="1220" b="1" dirty="0">
                 <a:solidFill>
                   <a:srgbClr val="0068B7"/>
                 </a:solidFill>
@@ -8648,7 +8652,7 @@
               </a:rPr>
               <a:t>Core concept</a:t>
             </a:r>
-            <a:endParaRPr lang="en-US" sz="1300" dirty="0"/>
+            <a:endParaRPr lang="en-US" sz="1220" dirty="0"/>
           </a:p>
         </p:txBody>
       </p:sp>
@@ -8660,8 +8664,8 @@
         </p:nvSpPr>
         <p:spPr>
           <a:xfrm>
-            <a:off x="7799832" y="1801368"/>
-            <a:ext cx="3145536" cy="688543"/>
+            <a:off x="7708392" y="1764792"/>
+            <a:ext cx="3282696" cy="749808"/>
           </a:xfrm>
           <a:prstGeom prst="rect">
             <a:avLst/>
@@ -8679,7 +8683,7 @@
               <a:buNone/>
             </a:pPr>
             <a:r>
-              <a:rPr lang="en-US" sz="1320" dirty="0">
+              <a:rPr lang="en-US" sz="1220" dirty="0">
                 <a:solidFill>
                   <a:srgbClr val="17364A"/>
                 </a:solidFill>
@@ -8687,9 +8691,9 @@
                 <a:ea typeface="Aptos" pitchFamily="34" charset="-122"/>
                 <a:cs typeface="Aptos" pitchFamily="34" charset="-120"/>
               </a:rPr>
-              <a:t>AI business case worksheet; total cost of ownership estimate; benefits realization plan; alternatives.</a:t>
-            </a:r>
-            <a:endParaRPr lang="en-US" sz="1320" dirty="0"/>
+              <a:t>AI business case worksheet; total cost of ownership estimate; benefits.</a:t>
+            </a:r>
+            <a:endParaRPr lang="en-US" sz="1220" dirty="0"/>
           </a:p>
         </p:txBody>
       </p:sp>
@@ -8701,12 +8705,12 @@
         </p:nvSpPr>
         <p:spPr>
           <a:xfrm>
-            <a:off x="7635240" y="2718511"/>
-            <a:ext cx="3474720" cy="1328623"/>
+            <a:off x="7543800" y="2724912"/>
+            <a:ext cx="3611880" cy="1527048"/>
           </a:xfrm>
           <a:prstGeom prst="roundRect">
             <a:avLst>
-              <a:gd name="adj" fmla="val 8259"/>
+              <a:gd name="adj" fmla="val 7186"/>
             </a:avLst>
           </a:prstGeom>
           <a:solidFill>
@@ -8728,8 +8732,8 @@
         </p:nvSpPr>
         <p:spPr>
           <a:xfrm>
-            <a:off x="7799832" y="2864815"/>
-            <a:ext cx="3145536" cy="256032"/>
+            <a:off x="7708392" y="2852928"/>
+            <a:ext cx="3282696" cy="228600"/>
           </a:xfrm>
           <a:prstGeom prst="rect">
             <a:avLst/>
@@ -8745,7 +8749,7 @@
               <a:buNone/>
             </a:pPr>
             <a:r>
-              <a:rPr lang="en-US" sz="1300" b="1" dirty="0">
+              <a:rPr lang="en-US" sz="1220" b="1" dirty="0">
                 <a:solidFill>
                   <a:srgbClr val="0068B7"/>
                 </a:solidFill>
@@ -8755,7 +8759,7 @@
               </a:rPr>
               <a:t>Concept checkpoints</a:t>
             </a:r>
-            <a:endParaRPr lang="en-US" sz="1300" dirty="0"/>
+            <a:endParaRPr lang="en-US" sz="1220" dirty="0"/>
           </a:p>
         </p:txBody>
       </p:sp>
@@ -8767,8 +8771,8 @@
         </p:nvSpPr>
         <p:spPr>
           <a:xfrm>
-            <a:off x="7818120" y="3230575"/>
-            <a:ext cx="3090672" cy="670255"/>
+            <a:off x="7726680" y="3182112"/>
+            <a:ext cx="3227832" cy="960120"/>
           </a:xfrm>
           <a:prstGeom prst="rect">
             <a:avLst/>
@@ -8786,7 +8790,7 @@
               <a:buNone/>
             </a:pPr>
             <a:r>
-              <a:rPr lang="en-US" sz="1220" dirty="0">
+              <a:rPr lang="en-US" sz="1140" dirty="0">
                 <a:solidFill>
                   <a:srgbClr val="17364A"/>
                 </a:solidFill>
@@ -8794,9 +8798,9 @@
                 <a:ea typeface="Aptos" pitchFamily="34" charset="-122"/>
                 <a:cs typeface="Aptos" pitchFamily="34" charset="-120"/>
               </a:rPr>
-              <a:t>AI business case worksheet; total cost of ownership estimate;.</a:t>
-            </a:r>
-            <a:endParaRPr lang="en-US" sz="1220" dirty="0"/>
+              <a:t>AI business case worksheet; total cost of.</a:t>
+            </a:r>
+            <a:endParaRPr lang="en-US" sz="1140" dirty="0"/>
           </a:p>
         </p:txBody>
       </p:sp>
@@ -8808,12 +8812,12 @@
         </p:nvSpPr>
         <p:spPr>
           <a:xfrm>
-            <a:off x="7635240" y="4184294"/>
-            <a:ext cx="3474720" cy="1466698"/>
+            <a:off x="7543800" y="4389120"/>
+            <a:ext cx="3611880" cy="1261872"/>
           </a:xfrm>
           <a:prstGeom prst="roundRect">
             <a:avLst>
-              <a:gd name="adj" fmla="val 7481"/>
+              <a:gd name="adj" fmla="val 8696"/>
             </a:avLst>
           </a:prstGeom>
           <a:solidFill>
@@ -8835,8 +8839,8 @@
         </p:nvSpPr>
         <p:spPr>
           <a:xfrm>
-            <a:off x="7799832" y="4330598"/>
-            <a:ext cx="3145536" cy="256032"/>
+            <a:off x="7708392" y="4517136"/>
+            <a:ext cx="3282696" cy="228600"/>
           </a:xfrm>
           <a:prstGeom prst="rect">
             <a:avLst/>
@@ -8852,7 +8856,7 @@
               <a:buNone/>
             </a:pPr>
             <a:r>
-              <a:rPr lang="en-US" sz="1300" b="1" dirty="0">
+              <a:rPr lang="en-US" sz="1220" b="1" dirty="0">
                 <a:solidFill>
                   <a:srgbClr val="0068B7"/>
                 </a:solidFill>
@@ -8862,7 +8866,7 @@
               </a:rPr>
               <a:t>Apply it</a:t>
             </a:r>
-            <a:endParaRPr lang="en-US" sz="1300" dirty="0"/>
+            <a:endParaRPr lang="en-US" sz="1220" dirty="0"/>
           </a:p>
         </p:txBody>
       </p:sp>
@@ -8874,8 +8878,8 @@
         </p:nvSpPr>
         <p:spPr>
           <a:xfrm>
-            <a:off x="7799832" y="4659782"/>
-            <a:ext cx="3145536" cy="899770"/>
+            <a:off x="7708392" y="4828032"/>
+            <a:ext cx="3282696" cy="749808"/>
           </a:xfrm>
           <a:prstGeom prst="rect">
             <a:avLst/>
@@ -8893,7 +8897,7 @@
               <a:buNone/>
             </a:pPr>
             <a:r>
-              <a:rPr lang="en-US" sz="1320" dirty="0">
+              <a:rPr lang="en-US" sz="1220" dirty="0">
                 <a:solidFill>
                   <a:srgbClr val="17364A"/>
                 </a:solidFill>
@@ -8901,9 +8905,9 @@
                 <a:ea typeface="Aptos" pitchFamily="34" charset="-122"/>
                 <a:cs typeface="Aptos" pitchFamily="34" charset="-120"/>
               </a:rPr>
-              <a:t>Connect the concept to public health purpose, responsible use, required safeguards, documentation, and the next action a department should take.</a:t>
-            </a:r>
-            <a:endParaRPr lang="en-US" sz="1320" dirty="0"/>
+              <a:t>Connect the concept to public health purpose, responsible use, required.</a:t>
+            </a:r>
+            <a:endParaRPr lang="en-US" sz="1220" dirty="0"/>
           </a:p>
         </p:txBody>
       </p:sp>
@@ -9194,8 +9198,8 @@
         </p:nvSpPr>
         <p:spPr>
           <a:xfrm>
-            <a:off x="868680" y="1508760"/>
-            <a:ext cx="6309360" cy="4160520"/>
+            <a:off x="822960" y="1463040"/>
+            <a:ext cx="6565392" cy="4343400"/>
           </a:xfrm>
           <a:prstGeom prst="rect">
             <a:avLst/>
@@ -9213,7 +9217,7 @@
               <a:buNone/>
             </a:pPr>
             <a:r>
-              <a:rPr lang="en-US" sz="2100" dirty="0">
+              <a:rPr lang="en-US" sz="1920" dirty="0">
                 <a:solidFill>
                   <a:srgbClr val="003A63"/>
                 </a:solidFill>
@@ -9221,9 +9225,9 @@
                 <a:ea typeface="Aptos" pitchFamily="34" charset="-122"/>
                 <a:cs typeface="Aptos" pitchFamily="34" charset="-120"/>
               </a:rPr>
-              <a:t>• AI business case worksheet; total cost of ownership estimate; benefits realization plan;.</a:t>
-            </a:r>
-            <a:endParaRPr lang="en-US" sz="2100" dirty="0"/>
+              <a:t>• AI business case worksheet; total cost of ownership estimate; benefits.</a:t>
+            </a:r>
+            <a:endParaRPr lang="en-US" sz="1920" dirty="0"/>
           </a:p>
         </p:txBody>
       </p:sp>
@@ -9235,12 +9239,12 @@
         </p:nvSpPr>
         <p:spPr>
           <a:xfrm>
-            <a:off x="7635240" y="1325880"/>
-            <a:ext cx="3474720" cy="1255471"/>
+            <a:off x="7543800" y="1325880"/>
+            <a:ext cx="3611880" cy="1261872"/>
           </a:xfrm>
           <a:prstGeom prst="roundRect">
             <a:avLst>
-              <a:gd name="adj" fmla="val 8740"/>
+              <a:gd name="adj" fmla="val 8696"/>
             </a:avLst>
           </a:prstGeom>
           <a:solidFill>
@@ -9262,8 +9266,8 @@
         </p:nvSpPr>
         <p:spPr>
           <a:xfrm>
-            <a:off x="7799832" y="1472184"/>
-            <a:ext cx="3145536" cy="256032"/>
+            <a:off x="7708392" y="1453896"/>
+            <a:ext cx="3282696" cy="228600"/>
           </a:xfrm>
           <a:prstGeom prst="rect">
             <a:avLst/>
@@ -9279,7 +9283,7 @@
               <a:buNone/>
             </a:pPr>
             <a:r>
-              <a:rPr lang="en-US" sz="1300" b="1" dirty="0">
+              <a:rPr lang="en-US" sz="1220" b="1" dirty="0">
                 <a:solidFill>
                   <a:srgbClr val="0068B7"/>
                 </a:solidFill>
@@ -9289,7 +9293,7 @@
               </a:rPr>
               <a:t>Practice focus</a:t>
             </a:r>
-            <a:endParaRPr lang="en-US" sz="1300" dirty="0"/>
+            <a:endParaRPr lang="en-US" sz="1220" dirty="0"/>
           </a:p>
         </p:txBody>
       </p:sp>
@@ -9301,8 +9305,8 @@
         </p:nvSpPr>
         <p:spPr>
           <a:xfrm>
-            <a:off x="7799832" y="1801368"/>
-            <a:ext cx="3145536" cy="688543"/>
+            <a:off x="7708392" y="1764792"/>
+            <a:ext cx="3282696" cy="749808"/>
           </a:xfrm>
           <a:prstGeom prst="rect">
             <a:avLst/>
@@ -9320,7 +9324,7 @@
               <a:buNone/>
             </a:pPr>
             <a:r>
-              <a:rPr lang="en-US" sz="1320" dirty="0">
+              <a:rPr lang="en-US" sz="1220" dirty="0">
                 <a:solidFill>
                   <a:srgbClr val="17364A"/>
                 </a:solidFill>
@@ -9328,9 +9332,9 @@
                 <a:ea typeface="Aptos" pitchFamily="34" charset="-122"/>
                 <a:cs typeface="Aptos" pitchFamily="34" charset="-120"/>
               </a:rPr>
-              <a:t>AI business case worksheet; total cost of ownership estimate; benefits realization plan; alternatives.</a:t>
-            </a:r>
-            <a:endParaRPr lang="en-US" sz="1320" dirty="0"/>
+              <a:t>AI business case worksheet; total cost of ownership estimate; benefits.</a:t>
+            </a:r>
+            <a:endParaRPr lang="en-US" sz="1220" dirty="0"/>
           </a:p>
         </p:txBody>
       </p:sp>
@@ -9342,12 +9346,12 @@
         </p:nvSpPr>
         <p:spPr>
           <a:xfrm>
-            <a:off x="7635240" y="2718511"/>
-            <a:ext cx="3474720" cy="1328623"/>
+            <a:off x="7543800" y="2724912"/>
+            <a:ext cx="3611880" cy="1527048"/>
           </a:xfrm>
           <a:prstGeom prst="roundRect">
             <a:avLst>
-              <a:gd name="adj" fmla="val 8259"/>
+              <a:gd name="adj" fmla="val 7186"/>
             </a:avLst>
           </a:prstGeom>
           <a:solidFill>
@@ -9369,8 +9373,8 @@
         </p:nvSpPr>
         <p:spPr>
           <a:xfrm>
-            <a:off x="7799832" y="2864815"/>
-            <a:ext cx="3145536" cy="256032"/>
+            <a:off x="7708392" y="2852928"/>
+            <a:ext cx="3282696" cy="228600"/>
           </a:xfrm>
           <a:prstGeom prst="rect">
             <a:avLst/>
@@ -9386,7 +9390,7 @@
               <a:buNone/>
             </a:pPr>
             <a:r>
-              <a:rPr lang="en-US" sz="1300" b="1" dirty="0">
+              <a:rPr lang="en-US" sz="1220" b="1" dirty="0">
                 <a:solidFill>
                   <a:srgbClr val="0068B7"/>
                 </a:solidFill>
@@ -9396,7 +9400,7 @@
               </a:rPr>
               <a:t>Concept checkpoints</a:t>
             </a:r>
-            <a:endParaRPr lang="en-US" sz="1300" dirty="0"/>
+            <a:endParaRPr lang="en-US" sz="1220" dirty="0"/>
           </a:p>
         </p:txBody>
       </p:sp>
@@ -9408,8 +9412,8 @@
         </p:nvSpPr>
         <p:spPr>
           <a:xfrm>
-            <a:off x="7818120" y="3230575"/>
-            <a:ext cx="3090672" cy="670255"/>
+            <a:off x="7726680" y="3182112"/>
+            <a:ext cx="3227832" cy="960120"/>
           </a:xfrm>
           <a:prstGeom prst="rect">
             <a:avLst/>
@@ -9427,7 +9431,7 @@
               <a:buNone/>
             </a:pPr>
             <a:r>
-              <a:rPr lang="en-US" sz="1220" dirty="0">
+              <a:rPr lang="en-US" sz="1140" dirty="0">
                 <a:solidFill>
                   <a:srgbClr val="17364A"/>
                 </a:solidFill>
@@ -9435,9 +9439,9 @@
                 <a:ea typeface="Aptos" pitchFamily="34" charset="-122"/>
                 <a:cs typeface="Aptos" pitchFamily="34" charset="-120"/>
               </a:rPr>
-              <a:t>AI business case worksheet; total cost of ownership estimate;.</a:t>
-            </a:r>
-            <a:endParaRPr lang="en-US" sz="1220" dirty="0"/>
+              <a:t>AI business case worksheet; total cost of.</a:t>
+            </a:r>
+            <a:endParaRPr lang="en-US" sz="1140" dirty="0"/>
           </a:p>
         </p:txBody>
       </p:sp>
@@ -9449,12 +9453,12 @@
         </p:nvSpPr>
         <p:spPr>
           <a:xfrm>
-            <a:off x="7635240" y="4184294"/>
-            <a:ext cx="3474720" cy="1466698"/>
+            <a:off x="7543800" y="4389120"/>
+            <a:ext cx="3611880" cy="1261872"/>
           </a:xfrm>
           <a:prstGeom prst="roundRect">
             <a:avLst>
-              <a:gd name="adj" fmla="val 7481"/>
+              <a:gd name="adj" fmla="val 8696"/>
             </a:avLst>
           </a:prstGeom>
           <a:solidFill>
@@ -9476,8 +9480,8 @@
         </p:nvSpPr>
         <p:spPr>
           <a:xfrm>
-            <a:off x="7799832" y="4330598"/>
-            <a:ext cx="3145536" cy="256032"/>
+            <a:off x="7708392" y="4517136"/>
+            <a:ext cx="3282696" cy="228600"/>
           </a:xfrm>
           <a:prstGeom prst="rect">
             <a:avLst/>
@@ -9493,7 +9497,7 @@
               <a:buNone/>
             </a:pPr>
             <a:r>
-              <a:rPr lang="en-US" sz="1300" b="1" dirty="0">
+              <a:rPr lang="en-US" sz="1220" b="1" dirty="0">
                 <a:solidFill>
                   <a:srgbClr val="0068B7"/>
                 </a:solidFill>
@@ -9503,7 +9507,7 @@
               </a:rPr>
               <a:t>What to produce</a:t>
             </a:r>
-            <a:endParaRPr lang="en-US" sz="1300" dirty="0"/>
+            <a:endParaRPr lang="en-US" sz="1220" dirty="0"/>
           </a:p>
         </p:txBody>
       </p:sp>
@@ -9515,8 +9519,8 @@
         </p:nvSpPr>
         <p:spPr>
           <a:xfrm>
-            <a:off x="7799832" y="4659782"/>
-            <a:ext cx="3145536" cy="899770"/>
+            <a:off x="7708392" y="4828032"/>
+            <a:ext cx="3282696" cy="749808"/>
           </a:xfrm>
           <a:prstGeom prst="rect">
             <a:avLst/>
@@ -9534,7 +9538,7 @@
               <a:buNone/>
             </a:pPr>
             <a:r>
-              <a:rPr lang="en-US" sz="1320" dirty="0">
+              <a:rPr lang="en-US" sz="1220" dirty="0">
                 <a:solidFill>
                   <a:srgbClr val="17364A"/>
                 </a:solidFill>
@@ -9542,9 +9546,9 @@
                 <a:ea typeface="Aptos" pitchFamily="34" charset="-122"/>
                 <a:cs typeface="Aptos" pitchFamily="34" charset="-120"/>
               </a:rPr>
-              <a:t>Use the assignment to test whether you can explain the concept, apply it to a realistic public health situation, and identify what would need review before the work moves forward.</a:t>
-            </a:r>
-            <a:endParaRPr lang="en-US" sz="1320" dirty="0"/>
+              <a:t>Use the assignment to test whether you can explain the concept, apply it to a.</a:t>
+            </a:r>
+            <a:endParaRPr lang="en-US" sz="1220" dirty="0"/>
           </a:p>
         </p:txBody>
       </p:sp>
@@ -9835,8 +9839,8 @@
         </p:nvSpPr>
         <p:spPr>
           <a:xfrm>
-            <a:off x="868680" y="1508760"/>
-            <a:ext cx="6309360" cy="4160520"/>
+            <a:off x="822960" y="1463040"/>
+            <a:ext cx="6565392" cy="4343400"/>
           </a:xfrm>
           <a:prstGeom prst="rect">
             <a:avLst/>
@@ -9854,7 +9858,7 @@
               <a:buNone/>
             </a:pPr>
             <a:r>
-              <a:rPr lang="en-US" sz="2100" dirty="0">
+              <a:rPr lang="en-US" sz="1920" dirty="0">
                 <a:solidFill>
                   <a:srgbClr val="003A63"/>
                 </a:solidFill>
@@ -9862,16 +9866,16 @@
                 <a:ea typeface="Aptos" pitchFamily="34" charset="-122"/>
                 <a:cs typeface="Aptos" pitchFamily="34" charset="-120"/>
               </a:rPr>
-              <a:t>• 1. What is the strongest reason this module topic belongs in AI leadership and governance.</a:t>
-            </a:r>
-            <a:endParaRPr lang="en-US" sz="2100" dirty="0"/>
-          </a:p>
-          <a:p>
-            <a:pPr indent="0" marL="0">
-              <a:buNone/>
-            </a:pPr>
-            <a:r>
-              <a:rPr lang="en-US" sz="2100" dirty="0">
+              <a:t>• 1. What is the strongest reason this module topic belongs in AI leadership.</a:t>
+            </a:r>
+            <a:endParaRPr lang="en-US" sz="1920" dirty="0"/>
+          </a:p>
+          <a:p>
+            <a:pPr indent="0" marL="0">
+              <a:buNone/>
+            </a:pPr>
+            <a:r>
+              <a:rPr lang="en-US" sz="1920" dirty="0">
                 <a:solidFill>
                   <a:srgbClr val="003A63"/>
                 </a:solidFill>
@@ -9881,14 +9885,14 @@
               </a:rPr>
               <a:t>• 2. Which practice best supports accountable public health AI governance?</a:t>
             </a:r>
-            <a:endParaRPr lang="en-US" sz="2100" dirty="0"/>
-          </a:p>
-          <a:p>
-            <a:pPr indent="0" marL="0">
-              <a:buNone/>
-            </a:pPr>
-            <a:r>
-              <a:rPr lang="en-US" sz="2100" dirty="0">
+            <a:endParaRPr lang="en-US" sz="1920" dirty="0"/>
+          </a:p>
+          <a:p>
+            <a:pPr indent="0" marL="0">
+              <a:buNone/>
+            </a:pPr>
+            <a:r>
+              <a:rPr lang="en-US" sz="1920" dirty="0">
                 <a:solidFill>
                   <a:srgbClr val="003A63"/>
                 </a:solidFill>
@@ -9896,9 +9900,9 @@
                 <a:ea typeface="Aptos" pitchFamily="34" charset="-122"/>
                 <a:cs typeface="Aptos" pitchFamily="34" charset="-120"/>
               </a:rPr>
-              <a:t>• 3. When should an AI use case be escalated for leadership or governance review?</a:t>
-            </a:r>
-            <a:endParaRPr lang="en-US" sz="2100" dirty="0"/>
+              <a:t>• 3. When should an AI use case be escalated for leadership or governance.</a:t>
+            </a:r>
+            <a:endParaRPr lang="en-US" sz="1920" dirty="0"/>
           </a:p>
         </p:txBody>
       </p:sp>
@@ -9910,12 +9914,12 @@
         </p:nvSpPr>
         <p:spPr>
           <a:xfrm>
-            <a:off x="7635240" y="1325880"/>
-            <a:ext cx="3474720" cy="1255471"/>
+            <a:off x="7543800" y="1325880"/>
+            <a:ext cx="3611880" cy="1261872"/>
           </a:xfrm>
           <a:prstGeom prst="roundRect">
             <a:avLst>
-              <a:gd name="adj" fmla="val 8740"/>
+              <a:gd name="adj" fmla="val 8696"/>
             </a:avLst>
           </a:prstGeom>
           <a:solidFill>
@@ -9937,8 +9941,8 @@
         </p:nvSpPr>
         <p:spPr>
           <a:xfrm>
-            <a:off x="7799832" y="1472184"/>
-            <a:ext cx="3145536" cy="256032"/>
+            <a:off x="7708392" y="1453896"/>
+            <a:ext cx="3282696" cy="228600"/>
           </a:xfrm>
           <a:prstGeom prst="rect">
             <a:avLst/>
@@ -9954,7 +9958,7 @@
               <a:buNone/>
             </a:pPr>
             <a:r>
-              <a:rPr lang="en-US" sz="1300" b="1" dirty="0">
+              <a:rPr lang="en-US" sz="1220" b="1" dirty="0">
                 <a:solidFill>
                   <a:srgbClr val="0068B7"/>
                 </a:solidFill>
@@ -9964,7 +9968,7 @@
               </a:rPr>
               <a:t>Practice focus</a:t>
             </a:r>
-            <a:endParaRPr lang="en-US" sz="1300" dirty="0"/>
+            <a:endParaRPr lang="en-US" sz="1220" dirty="0"/>
           </a:p>
         </p:txBody>
       </p:sp>
@@ -9976,8 +9980,8 @@
         </p:nvSpPr>
         <p:spPr>
           <a:xfrm>
-            <a:off x="7799832" y="1801368"/>
-            <a:ext cx="3145536" cy="688543"/>
+            <a:off x="7708392" y="1764792"/>
+            <a:ext cx="3282696" cy="749808"/>
           </a:xfrm>
           <a:prstGeom prst="rect">
             <a:avLst/>
@@ -9995,7 +9999,7 @@
               <a:buNone/>
             </a:pPr>
             <a:r>
-              <a:rPr lang="en-US" sz="1320" dirty="0">
+              <a:rPr lang="en-US" sz="1220" dirty="0">
                 <a:solidFill>
                   <a:srgbClr val="17364A"/>
                 </a:solidFill>
@@ -10003,9 +10007,9 @@
                 <a:ea typeface="Aptos" pitchFamily="34" charset="-122"/>
                 <a:cs typeface="Aptos" pitchFamily="34" charset="-120"/>
               </a:rPr>
-              <a:t>1. What is the strongest reason this module topic belongs in AI leadership and governance training?</a:t>
-            </a:r>
-            <a:endParaRPr lang="en-US" sz="1320" dirty="0"/>
+              <a:t>1. What is the strongest reason this module topic belongs in AI leadership and.</a:t>
+            </a:r>
+            <a:endParaRPr lang="en-US" sz="1220" dirty="0"/>
           </a:p>
         </p:txBody>
       </p:sp>
@@ -10017,12 +10021,12 @@
         </p:nvSpPr>
         <p:spPr>
           <a:xfrm>
-            <a:off x="7635240" y="2718511"/>
-            <a:ext cx="3474720" cy="1328623"/>
+            <a:off x="7543800" y="2724912"/>
+            <a:ext cx="3611880" cy="1527048"/>
           </a:xfrm>
           <a:prstGeom prst="roundRect">
             <a:avLst>
-              <a:gd name="adj" fmla="val 8259"/>
+              <a:gd name="adj" fmla="val 7186"/>
             </a:avLst>
           </a:prstGeom>
           <a:solidFill>
@@ -10044,8 +10048,8 @@
         </p:nvSpPr>
         <p:spPr>
           <a:xfrm>
-            <a:off x="7799832" y="2864815"/>
-            <a:ext cx="3145536" cy="256032"/>
+            <a:off x="7708392" y="2852928"/>
+            <a:ext cx="3282696" cy="228600"/>
           </a:xfrm>
           <a:prstGeom prst="rect">
             <a:avLst/>
@@ -10061,7 +10065,7 @@
               <a:buNone/>
             </a:pPr>
             <a:r>
-              <a:rPr lang="en-US" sz="1300" b="1" dirty="0">
+              <a:rPr lang="en-US" sz="1220" b="1" dirty="0">
                 <a:solidFill>
                   <a:srgbClr val="0068B7"/>
                 </a:solidFill>
@@ -10071,7 +10075,7 @@
               </a:rPr>
               <a:t>Concept checkpoints</a:t>
             </a:r>
-            <a:endParaRPr lang="en-US" sz="1300" dirty="0"/>
+            <a:endParaRPr lang="en-US" sz="1220" dirty="0"/>
           </a:p>
         </p:txBody>
       </p:sp>
@@ -10083,8 +10087,8 @@
         </p:nvSpPr>
         <p:spPr>
           <a:xfrm>
-            <a:off x="7818120" y="3230575"/>
-            <a:ext cx="3090672" cy="670255"/>
+            <a:off x="7726680" y="3182112"/>
+            <a:ext cx="3227832" cy="960120"/>
           </a:xfrm>
           <a:prstGeom prst="rect">
             <a:avLst/>
@@ -10102,7 +10106,7 @@
               <a:buNone/>
             </a:pPr>
             <a:r>
-              <a:rPr lang="en-US" sz="1220" dirty="0">
+              <a:rPr lang="en-US" sz="1140" dirty="0">
                 <a:solidFill>
                   <a:srgbClr val="17364A"/>
                 </a:solidFill>
@@ -10112,14 +10116,14 @@
               </a:rPr>
               <a:t>1.</a:t>
             </a:r>
-            <a:endParaRPr lang="en-US" sz="1220" dirty="0"/>
-          </a:p>
-          <a:p>
-            <a:pPr indent="0" marL="0">
-              <a:buNone/>
-            </a:pPr>
-            <a:r>
-              <a:rPr lang="en-US" sz="1220" dirty="0">
+            <a:endParaRPr lang="en-US" sz="1140" dirty="0"/>
+          </a:p>
+          <a:p>
+            <a:pPr indent="0" marL="0">
+              <a:buNone/>
+            </a:pPr>
+            <a:r>
+              <a:rPr lang="en-US" sz="1140" dirty="0">
                 <a:solidFill>
                   <a:srgbClr val="17364A"/>
                 </a:solidFill>
@@ -10127,16 +10131,16 @@
                 <a:ea typeface="Aptos" pitchFamily="34" charset="-122"/>
                 <a:cs typeface="Aptos" pitchFamily="34" charset="-120"/>
               </a:rPr>
-              <a:t>What is the strongest reason this module topic belongs in AI.</a:t>
-            </a:r>
-            <a:endParaRPr lang="en-US" sz="1220" dirty="0"/>
-          </a:p>
-          <a:p>
-            <a:pPr indent="0" marL="0">
-              <a:buNone/>
-            </a:pPr>
-            <a:r>
-              <a:rPr lang="en-US" sz="1220" dirty="0">
+              <a:t>What is the strongest reason this module topic.</a:t>
+            </a:r>
+            <a:endParaRPr lang="en-US" sz="1140" dirty="0"/>
+          </a:p>
+          <a:p>
+            <a:pPr indent="0" marL="0">
+              <a:buNone/>
+            </a:pPr>
+            <a:r>
+              <a:rPr lang="en-US" sz="1140" dirty="0">
                 <a:solidFill>
                   <a:srgbClr val="17364A"/>
                 </a:solidFill>
@@ -10146,7 +10150,7 @@
               </a:rPr>
               <a:t>2.</a:t>
             </a:r>
-            <a:endParaRPr lang="en-US" sz="1220" dirty="0"/>
+            <a:endParaRPr lang="en-US" sz="1140" dirty="0"/>
           </a:p>
         </p:txBody>
       </p:sp>
@@ -10158,12 +10162,12 @@
         </p:nvSpPr>
         <p:spPr>
           <a:xfrm>
-            <a:off x="7635240" y="4184294"/>
-            <a:ext cx="3474720" cy="1466698"/>
+            <a:off x="7543800" y="4389120"/>
+            <a:ext cx="3611880" cy="1261872"/>
           </a:xfrm>
           <a:prstGeom prst="roundRect">
             <a:avLst>
-              <a:gd name="adj" fmla="val 7481"/>
+              <a:gd name="adj" fmla="val 8696"/>
             </a:avLst>
           </a:prstGeom>
           <a:solidFill>
@@ -10185,8 +10189,8 @@
         </p:nvSpPr>
         <p:spPr>
           <a:xfrm>
-            <a:off x="7799832" y="4330598"/>
-            <a:ext cx="3145536" cy="256032"/>
+            <a:off x="7708392" y="4517136"/>
+            <a:ext cx="3282696" cy="228600"/>
           </a:xfrm>
           <a:prstGeom prst="rect">
             <a:avLst/>
@@ -10202,7 +10206,7 @@
               <a:buNone/>
             </a:pPr>
             <a:r>
-              <a:rPr lang="en-US" sz="1300" b="1" dirty="0">
+              <a:rPr lang="en-US" sz="1220" b="1" dirty="0">
                 <a:solidFill>
                   <a:srgbClr val="0068B7"/>
                 </a:solidFill>
@@ -10212,7 +10216,7 @@
               </a:rPr>
               <a:t>What to produce</a:t>
             </a:r>
-            <a:endParaRPr lang="en-US" sz="1300" dirty="0"/>
+            <a:endParaRPr lang="en-US" sz="1220" dirty="0"/>
           </a:p>
         </p:txBody>
       </p:sp>
@@ -10224,8 +10228,8 @@
         </p:nvSpPr>
         <p:spPr>
           <a:xfrm>
-            <a:off x="7799832" y="4659782"/>
-            <a:ext cx="3145536" cy="899770"/>
+            <a:off x="7708392" y="4828032"/>
+            <a:ext cx="3282696" cy="749808"/>
           </a:xfrm>
           <a:prstGeom prst="rect">
             <a:avLst/>
@@ -10243,7 +10247,7 @@
               <a:buNone/>
             </a:pPr>
             <a:r>
-              <a:rPr lang="en-US" sz="1320" dirty="0">
+              <a:rPr lang="en-US" sz="1220" dirty="0">
                 <a:solidFill>
                   <a:srgbClr val="17364A"/>
                 </a:solidFill>
@@ -10251,9 +10255,9 @@
                 <a:ea typeface="Aptos" pitchFamily="34" charset="-122"/>
                 <a:cs typeface="Aptos" pitchFamily="34" charset="-120"/>
               </a:rPr>
-              <a:t>Use the assignment to test whether you can explain the concept, apply it to a realistic public health situation, and identify what would need review before the work moves forward.</a:t>
-            </a:r>
-            <a:endParaRPr lang="en-US" sz="1320" dirty="0"/>
+              <a:t>Use the assignment to test whether you can explain the concept, apply it to a.</a:t>
+            </a:r>
+            <a:endParaRPr lang="en-US" sz="1220" dirty="0"/>
           </a:p>
         </p:txBody>
       </p:sp>
@@ -10588,7 +10592,7 @@
                 <a:ea typeface="Aptos" pitchFamily="34" charset="-122"/>
                 <a:cs typeface="Aptos" pitchFamily="34" charset="-120"/>
               </a:rPr>
-              <a:t>• Leaders need a disciplined way to decide when AI is worth funding, what costs must be.</a:t>
+              <a:t>• Leaders need a disciplined way to decide when AI is worth funding, what.</a:t>
             </a:r>
             <a:endParaRPr lang="en-US" sz="2100" dirty="0"/>
           </a:p>
@@ -10605,7 +10609,7 @@
                 <a:ea typeface="Aptos" pitchFamily="34" charset="-122"/>
                 <a:cs typeface="Aptos" pitchFamily="34" charset="-120"/>
               </a:rPr>
-              <a:t>• A business case review helps agencies avoid buying tools that are impressive in demonstrations.</a:t>
+              <a:t>• A business case review helps agencies avoid buying tools that are impressive.</a:t>
             </a:r>
             <a:endParaRPr lang="en-US" sz="2100" dirty="0"/>
           </a:p>
@@ -10646,8 +10650,8 @@
         </p:nvSpPr>
         <p:spPr>
           <a:xfrm>
-            <a:off x="8074152" y="1563624"/>
-            <a:ext cx="2825496" cy="256032"/>
+            <a:off x="8074152" y="1545336"/>
+            <a:ext cx="2825496" cy="228600"/>
           </a:xfrm>
           <a:prstGeom prst="rect">
             <a:avLst/>
@@ -10663,7 +10667,7 @@
               <a:buNone/>
             </a:pPr>
             <a:r>
-              <a:rPr lang="en-US" sz="1300" b="1" dirty="0">
+              <a:rPr lang="en-US" sz="1220" b="1" dirty="0">
                 <a:solidFill>
                   <a:srgbClr val="0068B7"/>
                 </a:solidFill>
@@ -10673,7 +10677,7 @@
               </a:rPr>
               <a:t>Module details</a:t>
             </a:r>
-            <a:endParaRPr lang="en-US" sz="1300" dirty="0"/>
+            <a:endParaRPr lang="en-US" sz="1220" dirty="0"/>
           </a:p>
         </p:txBody>
       </p:sp>
@@ -10685,8 +10689,8 @@
         </p:nvSpPr>
         <p:spPr>
           <a:xfrm>
-            <a:off x="8074152" y="1892808"/>
-            <a:ext cx="2825496" cy="1353312"/>
+            <a:off x="8074152" y="1856232"/>
+            <a:ext cx="2825496" cy="1408176"/>
           </a:xfrm>
           <a:prstGeom prst="rect">
             <a:avLst/>
@@ -10704,7 +10708,7 @@
               <a:buNone/>
             </a:pPr>
             <a:r>
-              <a:rPr lang="en-US" sz="1320" dirty="0">
+              <a:rPr lang="en-US" sz="1220" dirty="0">
                 <a:solidFill>
                   <a:srgbClr val="17364A"/>
                 </a:solidFill>
@@ -10712,9 +10716,9 @@
                 <a:ea typeface="Aptos" pitchFamily="34" charset="-122"/>
                 <a:cs typeface="Aptos" pitchFamily="34" charset="-120"/>
               </a:rPr>
-              <a:t>Level: advanced/leadership Primary track: Public Health Executive Leadership Track Appears in tracks: governance-security</a:t>
-            </a:r>
-            <a:endParaRPr lang="en-US" sz="1320" dirty="0"/>
+              <a:t>Level: advanced/leadership Primary track: Public Health Executive Leadership.</a:t>
+            </a:r>
+            <a:endParaRPr lang="en-US" sz="1220" dirty="0"/>
           </a:p>
         </p:txBody>
       </p:sp>
@@ -10753,8 +10757,8 @@
         </p:nvSpPr>
         <p:spPr>
           <a:xfrm>
-            <a:off x="8074152" y="3822192"/>
-            <a:ext cx="2825496" cy="256032"/>
+            <a:off x="8074152" y="3803904"/>
+            <a:ext cx="2825496" cy="228600"/>
           </a:xfrm>
           <a:prstGeom prst="rect">
             <a:avLst/>
@@ -10770,7 +10774,7 @@
               <a:buNone/>
             </a:pPr>
             <a:r>
-              <a:rPr lang="en-US" sz="1300" b="1" dirty="0">
+              <a:rPr lang="en-US" sz="1220" b="1" dirty="0">
                 <a:solidFill>
                   <a:srgbClr val="0068B7"/>
                 </a:solidFill>
@@ -10780,7 +10784,7 @@
               </a:rPr>
               <a:t>Learning sequence</a:t>
             </a:r>
-            <a:endParaRPr lang="en-US" sz="1300" dirty="0"/>
+            <a:endParaRPr lang="en-US" sz="1220" dirty="0"/>
           </a:p>
         </p:txBody>
       </p:sp>
@@ -10792,8 +10796,8 @@
         </p:nvSpPr>
         <p:spPr>
           <a:xfrm>
-            <a:off x="8092440" y="4187952"/>
-            <a:ext cx="2770632" cy="1033272"/>
+            <a:off x="8092440" y="4133088"/>
+            <a:ext cx="2770632" cy="1124712"/>
           </a:xfrm>
           <a:prstGeom prst="rect">
             <a:avLst/>
@@ -10811,7 +10815,7 @@
               <a:buNone/>
             </a:pPr>
             <a:r>
-              <a:rPr lang="en-US" sz="1220" dirty="0">
+              <a:rPr lang="en-US" sz="1140" dirty="0">
                 <a:solidFill>
                   <a:srgbClr val="17364A"/>
                 </a:solidFill>
@@ -10821,14 +10825,14 @@
               </a:rPr>
               <a:t>Read the module for shared vocabulary and context.</a:t>
             </a:r>
-            <a:endParaRPr lang="en-US" sz="1220" dirty="0"/>
-          </a:p>
-          <a:p>
-            <a:pPr indent="0" marL="0">
-              <a:buNone/>
-            </a:pPr>
-            <a:r>
-              <a:rPr lang="en-US" sz="1220" dirty="0">
+            <a:endParaRPr lang="en-US" sz="1140" dirty="0"/>
+          </a:p>
+          <a:p>
+            <a:pPr indent="0" marL="0">
+              <a:buNone/>
+            </a:pPr>
+            <a:r>
+              <a:rPr lang="en-US" sz="1140" dirty="0">
                 <a:solidFill>
                   <a:srgbClr val="17364A"/>
                 </a:solidFill>
@@ -10836,16 +10840,16 @@
                 <a:ea typeface="Aptos" pitchFamily="34" charset="-122"/>
                 <a:cs typeface="Aptos" pitchFamily="34" charset="-120"/>
               </a:rPr>
-              <a:t>Complete the practical exercise to apply the concept.</a:t>
-            </a:r>
-            <a:endParaRPr lang="en-US" sz="1220" dirty="0"/>
-          </a:p>
-          <a:p>
-            <a:pPr indent="0" marL="0">
-              <a:buNone/>
-            </a:pPr>
-            <a:r>
-              <a:rPr lang="en-US" sz="1220" dirty="0">
+              <a:t>Complete the practical exercise to apply the.</a:t>
+            </a:r>
+            <a:endParaRPr lang="en-US" sz="1140" dirty="0"/>
+          </a:p>
+          <a:p>
+            <a:pPr indent="0" marL="0">
+              <a:buNone/>
+            </a:pPr>
+            <a:r>
+              <a:rPr lang="en-US" sz="1140" dirty="0">
                 <a:solidFill>
                   <a:srgbClr val="17364A"/>
                 </a:solidFill>
@@ -10855,7 +10859,7 @@
               </a:rPr>
               <a:t>Use the notes and references for deeper review.</a:t>
             </a:r>
-            <a:endParaRPr lang="en-US" sz="1220" dirty="0"/>
+            <a:endParaRPr lang="en-US" sz="1140" dirty="0"/>
           </a:p>
         </p:txBody>
       </p:sp>
@@ -11146,8 +11150,8 @@
         </p:nvSpPr>
         <p:spPr>
           <a:xfrm>
-            <a:off x="868680" y="1508760"/>
-            <a:ext cx="6309360" cy="4160520"/>
+            <a:off x="822960" y="1463040"/>
+            <a:ext cx="6565392" cy="4343400"/>
           </a:xfrm>
           <a:prstGeom prst="rect">
             <a:avLst/>
@@ -11165,7 +11169,7 @@
               <a:buNone/>
             </a:pPr>
             <a:r>
-              <a:rPr lang="en-US" sz="2100" dirty="0">
+              <a:rPr lang="en-US" sz="1920" dirty="0">
                 <a:solidFill>
                   <a:srgbClr val="003A63"/>
                 </a:solidFill>
@@ -11175,14 +11179,14 @@
               </a:rPr>
               <a:t>• NIST Artificial Intelligence Risk Management Framework (AI RMF 1.0):.</a:t>
             </a:r>
-            <a:endParaRPr lang="en-US" sz="2100" dirty="0"/>
-          </a:p>
-          <a:p>
-            <a:pPr indent="0" marL="0">
-              <a:buNone/>
-            </a:pPr>
-            <a:r>
-              <a:rPr lang="en-US" sz="2100" dirty="0">
+            <a:endParaRPr lang="en-US" sz="1920" dirty="0"/>
+          </a:p>
+          <a:p>
+            <a:pPr indent="0" marL="0">
+              <a:buNone/>
+            </a:pPr>
+            <a:r>
+              <a:rPr lang="en-US" sz="1920" dirty="0">
                 <a:solidFill>
                   <a:srgbClr val="003A63"/>
                 </a:solidFill>
@@ -11192,14 +11196,14 @@
               </a:rPr>
               <a:t>• NIST Generative AI Profile:.</a:t>
             </a:r>
-            <a:endParaRPr lang="en-US" sz="2100" dirty="0"/>
-          </a:p>
-          <a:p>
-            <a:pPr indent="0" marL="0">
-              <a:buNone/>
-            </a:pPr>
-            <a:r>
-              <a:rPr lang="en-US" sz="2100" dirty="0">
+            <a:endParaRPr lang="en-US" sz="1920" dirty="0"/>
+          </a:p>
+          <a:p>
+            <a:pPr indent="0" marL="0">
+              <a:buNone/>
+            </a:pPr>
+            <a:r>
+              <a:rPr lang="en-US" sz="1920" dirty="0">
                 <a:solidFill>
                   <a:srgbClr val="003A63"/>
                 </a:solidFill>
@@ -11209,7 +11213,7 @@
               </a:rPr>
               <a:t>• NIST Privacy Framework</a:t>
             </a:r>
-            <a:endParaRPr lang="en-US" sz="2100" dirty="0"/>
+            <a:endParaRPr lang="en-US" sz="1920" dirty="0"/>
           </a:p>
         </p:txBody>
       </p:sp>
@@ -11221,12 +11225,12 @@
         </p:nvSpPr>
         <p:spPr>
           <a:xfrm>
-            <a:off x="7635240" y="1325880"/>
-            <a:ext cx="3474720" cy="1207008"/>
+            <a:off x="7543800" y="1325880"/>
+            <a:ext cx="3611880" cy="1261872"/>
           </a:xfrm>
           <a:prstGeom prst="roundRect">
             <a:avLst>
-              <a:gd name="adj" fmla="val 9091"/>
+              <a:gd name="adj" fmla="val 8696"/>
             </a:avLst>
           </a:prstGeom>
           <a:solidFill>
@@ -11248,8 +11252,8 @@
         </p:nvSpPr>
         <p:spPr>
           <a:xfrm>
-            <a:off x="7799832" y="1472184"/>
-            <a:ext cx="3145536" cy="256032"/>
+            <a:off x="7708392" y="1453896"/>
+            <a:ext cx="3282696" cy="228600"/>
           </a:xfrm>
           <a:prstGeom prst="rect">
             <a:avLst/>
@@ -11265,7 +11269,7 @@
               <a:buNone/>
             </a:pPr>
             <a:r>
-              <a:rPr lang="en-US" sz="1300" b="1" dirty="0">
+              <a:rPr lang="en-US" sz="1220" b="1" dirty="0">
                 <a:solidFill>
                   <a:srgbClr val="0068B7"/>
                 </a:solidFill>
@@ -11275,7 +11279,7 @@
               </a:rPr>
               <a:t>Core concept</a:t>
             </a:r>
-            <a:endParaRPr lang="en-US" sz="1300" dirty="0"/>
+            <a:endParaRPr lang="en-US" sz="1220" dirty="0"/>
           </a:p>
         </p:txBody>
       </p:sp>
@@ -11287,8 +11291,8 @@
         </p:nvSpPr>
         <p:spPr>
           <a:xfrm>
-            <a:off x="7799832" y="1801368"/>
-            <a:ext cx="3145536" cy="640080"/>
+            <a:off x="7708392" y="1764792"/>
+            <a:ext cx="3282696" cy="749808"/>
           </a:xfrm>
           <a:prstGeom prst="rect">
             <a:avLst/>
@@ -11306,7 +11310,7 @@
               <a:buNone/>
             </a:pPr>
             <a:r>
-              <a:rPr lang="en-US" sz="1320" dirty="0">
+              <a:rPr lang="en-US" sz="1220" dirty="0">
                 <a:solidFill>
                   <a:srgbClr val="17364A"/>
                 </a:solidFill>
@@ -11316,7 +11320,7 @@
               </a:rPr>
               <a:t>NIST Artificial Intelligence Risk Management Framework (AI RMF 1.0):.</a:t>
             </a:r>
-            <a:endParaRPr lang="en-US" sz="1320" dirty="0"/>
+            <a:endParaRPr lang="en-US" sz="1220" dirty="0"/>
           </a:p>
         </p:txBody>
       </p:sp>
@@ -11328,12 +11332,12 @@
         </p:nvSpPr>
         <p:spPr>
           <a:xfrm>
-            <a:off x="7635240" y="2670048"/>
-            <a:ext cx="3474720" cy="1377086"/>
+            <a:off x="7543800" y="2724912"/>
+            <a:ext cx="3611880" cy="1527048"/>
           </a:xfrm>
           <a:prstGeom prst="roundRect">
             <a:avLst>
-              <a:gd name="adj" fmla="val 7968"/>
+              <a:gd name="adj" fmla="val 7186"/>
             </a:avLst>
           </a:prstGeom>
           <a:solidFill>
@@ -11355,8 +11359,8 @@
         </p:nvSpPr>
         <p:spPr>
           <a:xfrm>
-            <a:off x="7799832" y="2816352"/>
-            <a:ext cx="3145536" cy="256032"/>
+            <a:off x="7708392" y="2852928"/>
+            <a:ext cx="3282696" cy="228600"/>
           </a:xfrm>
           <a:prstGeom prst="rect">
             <a:avLst/>
@@ -11372,7 +11376,7 @@
               <a:buNone/>
             </a:pPr>
             <a:r>
-              <a:rPr lang="en-US" sz="1300" b="1" dirty="0">
+              <a:rPr lang="en-US" sz="1220" b="1" dirty="0">
                 <a:solidFill>
                   <a:srgbClr val="0068B7"/>
                 </a:solidFill>
@@ -11382,7 +11386,7 @@
               </a:rPr>
               <a:t>Concept checkpoints</a:t>
             </a:r>
-            <a:endParaRPr lang="en-US" sz="1300" dirty="0"/>
+            <a:endParaRPr lang="en-US" sz="1220" dirty="0"/>
           </a:p>
         </p:txBody>
       </p:sp>
@@ -11394,8 +11398,8 @@
         </p:nvSpPr>
         <p:spPr>
           <a:xfrm>
-            <a:off x="7818120" y="3182112"/>
-            <a:ext cx="3090672" cy="718718"/>
+            <a:off x="7726680" y="3182112"/>
+            <a:ext cx="3227832" cy="960120"/>
           </a:xfrm>
           <a:prstGeom prst="rect">
             <a:avLst/>
@@ -11413,7 +11417,7 @@
               <a:buNone/>
             </a:pPr>
             <a:r>
-              <a:rPr lang="en-US" sz="1220" dirty="0">
+              <a:rPr lang="en-US" sz="1140" dirty="0">
                 <a:solidFill>
                   <a:srgbClr val="17364A"/>
                 </a:solidFill>
@@ -11421,16 +11425,16 @@
                 <a:ea typeface="Aptos" pitchFamily="34" charset="-122"/>
                 <a:cs typeface="Aptos" pitchFamily="34" charset="-120"/>
               </a:rPr>
-              <a:t>NIST Artificial Intelligence Risk Management Framework (AI RMF.</a:t>
-            </a:r>
-            <a:endParaRPr lang="en-US" sz="1220" dirty="0"/>
-          </a:p>
-          <a:p>
-            <a:pPr indent="0" marL="0">
-              <a:buNone/>
-            </a:pPr>
-            <a:r>
-              <a:rPr lang="en-US" sz="1220" dirty="0">
+              <a:t>NIST Artificial Intelligence Risk Management.</a:t>
+            </a:r>
+            <a:endParaRPr lang="en-US" sz="1140" dirty="0"/>
+          </a:p>
+          <a:p>
+            <a:pPr indent="0" marL="0">
+              <a:buNone/>
+            </a:pPr>
+            <a:r>
+              <a:rPr lang="en-US" sz="1140" dirty="0">
                 <a:solidFill>
                   <a:srgbClr val="17364A"/>
                 </a:solidFill>
@@ -11438,16 +11442,16 @@
                 <a:ea typeface="Aptos" pitchFamily="34" charset="-122"/>
                 <a:cs typeface="Aptos" pitchFamily="34" charset="-120"/>
               </a:rPr>
-              <a:t>CDC Public Health Data Strategy and Data Modernization resources:.</a:t>
-            </a:r>
-            <a:endParaRPr lang="en-US" sz="1220" dirty="0"/>
-          </a:p>
-          <a:p>
-            <a:pPr indent="0" marL="0">
-              <a:buNone/>
-            </a:pPr>
-            <a:r>
-              <a:rPr lang="en-US" sz="1220" dirty="0">
+              <a:t>CDC Public Health Data Strategy and Data.</a:t>
+            </a:r>
+            <a:endParaRPr lang="en-US" sz="1140" dirty="0"/>
+          </a:p>
+          <a:p>
+            <a:pPr indent="0" marL="0">
+              <a:buNone/>
+            </a:pPr>
+            <a:r>
+              <a:rPr lang="en-US" sz="1140" dirty="0">
                 <a:solidFill>
                   <a:srgbClr val="17364A"/>
                 </a:solidFill>
@@ -11455,9 +11459,9 @@
                 <a:ea typeface="Aptos" pitchFamily="34" charset="-122"/>
                 <a:cs typeface="Aptos" pitchFamily="34" charset="-120"/>
               </a:rPr>
-              <a:t>WHO Ethics and Governance of Artificial Intelligence for Health:.</a:t>
-            </a:r>
-            <a:endParaRPr lang="en-US" sz="1220" dirty="0"/>
+              <a:t>WHO Ethics and Governance of Artificial.</a:t>
+            </a:r>
+            <a:endParaRPr lang="en-US" sz="1140" dirty="0"/>
           </a:p>
         </p:txBody>
       </p:sp>
@@ -11469,12 +11473,12 @@
         </p:nvSpPr>
         <p:spPr>
           <a:xfrm>
-            <a:off x="7635240" y="4184294"/>
-            <a:ext cx="3474720" cy="1466698"/>
+            <a:off x="7543800" y="4389120"/>
+            <a:ext cx="3611880" cy="1261872"/>
           </a:xfrm>
           <a:prstGeom prst="roundRect">
             <a:avLst>
-              <a:gd name="adj" fmla="val 7481"/>
+              <a:gd name="adj" fmla="val 8696"/>
             </a:avLst>
           </a:prstGeom>
           <a:solidFill>
@@ -11496,8 +11500,8 @@
         </p:nvSpPr>
         <p:spPr>
           <a:xfrm>
-            <a:off x="7799832" y="4330598"/>
-            <a:ext cx="3145536" cy="256032"/>
+            <a:off x="7708392" y="4517136"/>
+            <a:ext cx="3282696" cy="228600"/>
           </a:xfrm>
           <a:prstGeom prst="rect">
             <a:avLst/>
@@ -11513,7 +11517,7 @@
               <a:buNone/>
             </a:pPr>
             <a:r>
-              <a:rPr lang="en-US" sz="1300" b="1" dirty="0">
+              <a:rPr lang="en-US" sz="1220" b="1" dirty="0">
                 <a:solidFill>
                   <a:srgbClr val="0068B7"/>
                 </a:solidFill>
@@ -11523,7 +11527,7 @@
               </a:rPr>
               <a:t>Apply it</a:t>
             </a:r>
-            <a:endParaRPr lang="en-US" sz="1300" dirty="0"/>
+            <a:endParaRPr lang="en-US" sz="1220" dirty="0"/>
           </a:p>
         </p:txBody>
       </p:sp>
@@ -11535,8 +11539,8 @@
         </p:nvSpPr>
         <p:spPr>
           <a:xfrm>
-            <a:off x="7799832" y="4659782"/>
-            <a:ext cx="3145536" cy="899770"/>
+            <a:off x="7708392" y="4828032"/>
+            <a:ext cx="3282696" cy="749808"/>
           </a:xfrm>
           <a:prstGeom prst="rect">
             <a:avLst/>
@@ -11554,7 +11558,7 @@
               <a:buNone/>
             </a:pPr>
             <a:r>
-              <a:rPr lang="en-US" sz="1320" dirty="0">
+              <a:rPr lang="en-US" sz="1220" dirty="0">
                 <a:solidFill>
                   <a:srgbClr val="17364A"/>
                 </a:solidFill>
@@ -11562,9 +11566,9 @@
                 <a:ea typeface="Aptos" pitchFamily="34" charset="-122"/>
                 <a:cs typeface="Aptos" pitchFamily="34" charset="-120"/>
               </a:rPr>
-              <a:t>Connect the concept to public health purpose, responsible use, required safeguards, documentation, and the next action a department should take.</a:t>
-            </a:r>
-            <a:endParaRPr lang="en-US" sz="1320" dirty="0"/>
+              <a:t>Connect the concept to public health purpose, responsible use, required.</a:t>
+            </a:r>
+            <a:endParaRPr lang="en-US" sz="1220" dirty="0"/>
           </a:p>
         </p:txBody>
       </p:sp>
@@ -11855,8 +11859,8 @@
         </p:nvSpPr>
         <p:spPr>
           <a:xfrm>
-            <a:off x="868680" y="1508760"/>
-            <a:ext cx="6309360" cy="4160520"/>
+            <a:off x="822960" y="1463040"/>
+            <a:ext cx="6565392" cy="4343400"/>
           </a:xfrm>
           <a:prstGeom prst="rect">
             <a:avLst/>
@@ -11874,7 +11878,7 @@
               <a:buNone/>
             </a:pPr>
             <a:r>
-              <a:rPr lang="en-US" sz="2100" dirty="0">
+              <a:rPr lang="en-US" sz="1920" dirty="0">
                 <a:solidFill>
                   <a:srgbClr val="003A63"/>
                 </a:solidFill>
@@ -11882,16 +11886,16 @@
                 <a:ea typeface="Aptos" pitchFamily="34" charset="-122"/>
                 <a:cs typeface="Aptos" pitchFamily="34" charset="-120"/>
               </a:rPr>
-              <a:t>• OMB Memorandum M-24-10 on federal AI governance, risk management, and innovation, where.</a:t>
-            </a:r>
-            <a:endParaRPr lang="en-US" sz="2100" dirty="0"/>
-          </a:p>
-          <a:p>
-            <a:pPr indent="0" marL="0">
-              <a:buNone/>
-            </a:pPr>
-            <a:r>
-              <a:rPr lang="en-US" sz="2100" dirty="0">
+              <a:t>• OMB Memorandum M-24-10 on federal AI governance, risk management, and.</a:t>
+            </a:r>
+            <a:endParaRPr lang="en-US" sz="1920" dirty="0"/>
+          </a:p>
+          <a:p>
+            <a:pPr indent="0" marL="0">
+              <a:buNone/>
+            </a:pPr>
+            <a:r>
+              <a:rPr lang="en-US" sz="1920" dirty="0">
                 <a:solidFill>
                   <a:srgbClr val="003A63"/>
                 </a:solidFill>
@@ -11899,9 +11903,9 @@
                 <a:ea typeface="Aptos" pitchFamily="34" charset="-122"/>
                 <a:cs typeface="Aptos" pitchFamily="34" charset="-120"/>
               </a:rPr>
-              <a:t>• Agency strategic plans, procurement policies, privacy policies, cybersecurity policies, records.</a:t>
-            </a:r>
-            <a:endParaRPr lang="en-US" sz="2100" dirty="0"/>
+              <a:t>• Agency strategic plans, procurement policies, privacy policies,.</a:t>
+            </a:r>
+            <a:endParaRPr lang="en-US" sz="1920" dirty="0"/>
           </a:p>
         </p:txBody>
       </p:sp>
@@ -11913,12 +11917,12 @@
         </p:nvSpPr>
         <p:spPr>
           <a:xfrm>
-            <a:off x="7635240" y="1325880"/>
-            <a:ext cx="3474720" cy="1255471"/>
+            <a:off x="7543800" y="1325880"/>
+            <a:ext cx="3611880" cy="1261872"/>
           </a:xfrm>
           <a:prstGeom prst="roundRect">
             <a:avLst>
-              <a:gd name="adj" fmla="val 8740"/>
+              <a:gd name="adj" fmla="val 8696"/>
             </a:avLst>
           </a:prstGeom>
           <a:solidFill>
@@ -11940,8 +11944,8 @@
         </p:nvSpPr>
         <p:spPr>
           <a:xfrm>
-            <a:off x="7799832" y="1472184"/>
-            <a:ext cx="3145536" cy="256032"/>
+            <a:off x="7708392" y="1453896"/>
+            <a:ext cx="3282696" cy="228600"/>
           </a:xfrm>
           <a:prstGeom prst="rect">
             <a:avLst/>
@@ -11957,7 +11961,7 @@
               <a:buNone/>
             </a:pPr>
             <a:r>
-              <a:rPr lang="en-US" sz="1300" b="1" dirty="0">
+              <a:rPr lang="en-US" sz="1220" b="1" dirty="0">
                 <a:solidFill>
                   <a:srgbClr val="0068B7"/>
                 </a:solidFill>
@@ -11967,7 +11971,7 @@
               </a:rPr>
               <a:t>Core concept</a:t>
             </a:r>
-            <a:endParaRPr lang="en-US" sz="1300" dirty="0"/>
+            <a:endParaRPr lang="en-US" sz="1220" dirty="0"/>
           </a:p>
         </p:txBody>
       </p:sp>
@@ -11979,8 +11983,8 @@
         </p:nvSpPr>
         <p:spPr>
           <a:xfrm>
-            <a:off x="7799832" y="1801368"/>
-            <a:ext cx="3145536" cy="688543"/>
+            <a:off x="7708392" y="1764792"/>
+            <a:ext cx="3282696" cy="749808"/>
           </a:xfrm>
           <a:prstGeom prst="rect">
             <a:avLst/>
@@ -11998,7 +12002,7 @@
               <a:buNone/>
             </a:pPr>
             <a:r>
-              <a:rPr lang="en-US" sz="1320" dirty="0">
+              <a:rPr lang="en-US" sz="1220" dirty="0">
                 <a:solidFill>
                   <a:srgbClr val="17364A"/>
                 </a:solidFill>
@@ -12006,9 +12010,9 @@
                 <a:ea typeface="Aptos" pitchFamily="34" charset="-122"/>
                 <a:cs typeface="Aptos" pitchFamily="34" charset="-120"/>
               </a:rPr>
-              <a:t>OMB Memorandum M-24-10 on federal AI governance, risk management, and innovation, where relevant to.</a:t>
-            </a:r>
-            <a:endParaRPr lang="en-US" sz="1320" dirty="0"/>
+              <a:t>OMB Memorandum M-24-10 on federal AI governance, risk management, and.</a:t>
+            </a:r>
+            <a:endParaRPr lang="en-US" sz="1220" dirty="0"/>
           </a:p>
         </p:txBody>
       </p:sp>
@@ -12020,12 +12024,12 @@
         </p:nvSpPr>
         <p:spPr>
           <a:xfrm>
-            <a:off x="7635240" y="2718511"/>
-            <a:ext cx="3474720" cy="1328623"/>
+            <a:off x="7543800" y="2724912"/>
+            <a:ext cx="3611880" cy="1527048"/>
           </a:xfrm>
           <a:prstGeom prst="roundRect">
             <a:avLst>
-              <a:gd name="adj" fmla="val 8259"/>
+              <a:gd name="adj" fmla="val 7186"/>
             </a:avLst>
           </a:prstGeom>
           <a:solidFill>
@@ -12047,8 +12051,8 @@
         </p:nvSpPr>
         <p:spPr>
           <a:xfrm>
-            <a:off x="7799832" y="2864815"/>
-            <a:ext cx="3145536" cy="256032"/>
+            <a:off x="7708392" y="2852928"/>
+            <a:ext cx="3282696" cy="228600"/>
           </a:xfrm>
           <a:prstGeom prst="rect">
             <a:avLst/>
@@ -12064,7 +12068,7 @@
               <a:buNone/>
             </a:pPr>
             <a:r>
-              <a:rPr lang="en-US" sz="1300" b="1" dirty="0">
+              <a:rPr lang="en-US" sz="1220" b="1" dirty="0">
                 <a:solidFill>
                   <a:srgbClr val="0068B7"/>
                 </a:solidFill>
@@ -12074,7 +12078,7 @@
               </a:rPr>
               <a:t>Concept checkpoints</a:t>
             </a:r>
-            <a:endParaRPr lang="en-US" sz="1300" dirty="0"/>
+            <a:endParaRPr lang="en-US" sz="1220" dirty="0"/>
           </a:p>
         </p:txBody>
       </p:sp>
@@ -12086,8 +12090,8 @@
         </p:nvSpPr>
         <p:spPr>
           <a:xfrm>
-            <a:off x="7818120" y="3230575"/>
-            <a:ext cx="3090672" cy="670255"/>
+            <a:off x="7726680" y="3182112"/>
+            <a:ext cx="3227832" cy="960120"/>
           </a:xfrm>
           <a:prstGeom prst="rect">
             <a:avLst/>
@@ -12105,7 +12109,7 @@
               <a:buNone/>
             </a:pPr>
             <a:r>
-              <a:rPr lang="en-US" sz="1220" dirty="0">
+              <a:rPr lang="en-US" sz="1140" dirty="0">
                 <a:solidFill>
                   <a:srgbClr val="17364A"/>
                 </a:solidFill>
@@ -12113,16 +12117,16 @@
                 <a:ea typeface="Aptos" pitchFamily="34" charset="-122"/>
                 <a:cs typeface="Aptos" pitchFamily="34" charset="-120"/>
               </a:rPr>
-              <a:t>OMB Memorandum M-24-10 on federal AI governance, risk management,.</a:t>
-            </a:r>
-            <a:endParaRPr lang="en-US" sz="1220" dirty="0"/>
-          </a:p>
-          <a:p>
-            <a:pPr indent="0" marL="0">
-              <a:buNone/>
-            </a:pPr>
-            <a:r>
-              <a:rPr lang="en-US" sz="1220" dirty="0">
+              <a:t>OMB Memorandum M-24-10 on federal AI governance,.</a:t>
+            </a:r>
+            <a:endParaRPr lang="en-US" sz="1140" dirty="0"/>
+          </a:p>
+          <a:p>
+            <a:pPr indent="0" marL="0">
+              <a:buNone/>
+            </a:pPr>
+            <a:r>
+              <a:rPr lang="en-US" sz="1140" dirty="0">
                 <a:solidFill>
                   <a:srgbClr val="17364A"/>
                 </a:solidFill>
@@ -12130,9 +12134,9 @@
                 <a:ea typeface="Aptos" pitchFamily="34" charset="-122"/>
                 <a:cs typeface="Aptos" pitchFamily="34" charset="-120"/>
               </a:rPr>
-              <a:t>Agency strategic plans, procurement policies, privacy policies,.</a:t>
-            </a:r>
-            <a:endParaRPr lang="en-US" sz="1220" dirty="0"/>
+              <a:t>Agency strategic plans, procurement policies,.</a:t>
+            </a:r>
+            <a:endParaRPr lang="en-US" sz="1140" dirty="0"/>
           </a:p>
         </p:txBody>
       </p:sp>
@@ -12144,12 +12148,12 @@
         </p:nvSpPr>
         <p:spPr>
           <a:xfrm>
-            <a:off x="7635240" y="4184294"/>
-            <a:ext cx="3474720" cy="1466698"/>
+            <a:off x="7543800" y="4389120"/>
+            <a:ext cx="3611880" cy="1261872"/>
           </a:xfrm>
           <a:prstGeom prst="roundRect">
             <a:avLst>
-              <a:gd name="adj" fmla="val 7481"/>
+              <a:gd name="adj" fmla="val 8696"/>
             </a:avLst>
           </a:prstGeom>
           <a:solidFill>
@@ -12171,8 +12175,8 @@
         </p:nvSpPr>
         <p:spPr>
           <a:xfrm>
-            <a:off x="7799832" y="4330598"/>
-            <a:ext cx="3145536" cy="256032"/>
+            <a:off x="7708392" y="4517136"/>
+            <a:ext cx="3282696" cy="228600"/>
           </a:xfrm>
           <a:prstGeom prst="rect">
             <a:avLst/>
@@ -12188,7 +12192,7 @@
               <a:buNone/>
             </a:pPr>
             <a:r>
-              <a:rPr lang="en-US" sz="1300" b="1" dirty="0">
+              <a:rPr lang="en-US" sz="1220" b="1" dirty="0">
                 <a:solidFill>
                   <a:srgbClr val="0068B7"/>
                 </a:solidFill>
@@ -12198,7 +12202,7 @@
               </a:rPr>
               <a:t>Apply it</a:t>
             </a:r>
-            <a:endParaRPr lang="en-US" sz="1300" dirty="0"/>
+            <a:endParaRPr lang="en-US" sz="1220" dirty="0"/>
           </a:p>
         </p:txBody>
       </p:sp>
@@ -12210,8 +12214,8 @@
         </p:nvSpPr>
         <p:spPr>
           <a:xfrm>
-            <a:off x="7799832" y="4659782"/>
-            <a:ext cx="3145536" cy="899770"/>
+            <a:off x="7708392" y="4828032"/>
+            <a:ext cx="3282696" cy="749808"/>
           </a:xfrm>
           <a:prstGeom prst="rect">
             <a:avLst/>
@@ -12229,7 +12233,7 @@
               <a:buNone/>
             </a:pPr>
             <a:r>
-              <a:rPr lang="en-US" sz="1320" dirty="0">
+              <a:rPr lang="en-US" sz="1220" dirty="0">
                 <a:solidFill>
                   <a:srgbClr val="17364A"/>
                 </a:solidFill>
@@ -12237,9 +12241,9 @@
                 <a:ea typeface="Aptos" pitchFamily="34" charset="-122"/>
                 <a:cs typeface="Aptos" pitchFamily="34" charset="-120"/>
               </a:rPr>
-              <a:t>Connect the concept to public health purpose, responsible use, required safeguards, documentation, and the next action a department should take.</a:t>
-            </a:r>
-            <a:endParaRPr lang="en-US" sz="1320" dirty="0"/>
+              <a:t>Connect the concept to public health purpose, responsible use, required.</a:t>
+            </a:r>
+            <a:endParaRPr lang="en-US" sz="1220" dirty="0"/>
           </a:p>
         </p:txBody>
       </p:sp>
@@ -12557,7 +12561,7 @@
                 <a:ea typeface="Aptos" pitchFamily="34" charset="-122"/>
                 <a:cs typeface="Aptos" pitchFamily="34" charset="-120"/>
               </a:rPr>
-              <a:t>• Play 11: Build and Deploy AI Solutions - This lesson informs Play 11 by helping learners.</a:t>
+              <a:t>• Play 11: Build and Deploy AI Solutions - This lesson informs Play 11 by.</a:t>
             </a:r>
             <a:endParaRPr lang="en-US" sz="1900" dirty="0"/>
           </a:p>
@@ -12574,7 +12578,7 @@
                 <a:ea typeface="Aptos" pitchFamily="34" charset="-122"/>
                 <a:cs typeface="Aptos" pitchFamily="34" charset="-120"/>
               </a:rPr>
-              <a:t>• Play 2: Readiness Assessment - This lesson informs Play 2 by helping learners connect the.</a:t>
+              <a:t>• Play 2: Readiness Assessment - This lesson informs Play 2 by helping.</a:t>
             </a:r>
             <a:endParaRPr lang="en-US" sz="1900" dirty="0"/>
           </a:p>
@@ -12591,7 +12595,7 @@
                 <a:ea typeface="Aptos" pitchFamily="34" charset="-122"/>
                 <a:cs typeface="Aptos" pitchFamily="34" charset="-120"/>
               </a:rPr>
-              <a:t>• Play 3: Establish AI Governance - This lesson informs Play 3 by helping learners connect the.</a:t>
+              <a:t>• Play 3: Establish AI Governance - This lesson informs Play 3 by helping.</a:t>
             </a:r>
             <a:endParaRPr lang="en-US" sz="1900" dirty="0"/>
           </a:p>
@@ -12608,7 +12612,7 @@
                 <a:ea typeface="Aptos" pitchFamily="34" charset="-122"/>
                 <a:cs typeface="Aptos" pitchFamily="34" charset="-120"/>
               </a:rPr>
-              <a:t>• Play 1: Vision &amp; Guardrails - This lesson informs Play 1 by helping learners connect the.</a:t>
+              <a:t>• Play 1: Vision &amp; Guardrails - This lesson informs Play 1 by helping learners.</a:t>
             </a:r>
             <a:endParaRPr lang="en-US" sz="1900" dirty="0"/>
           </a:p>
@@ -12649,8 +12653,8 @@
         </p:nvSpPr>
         <p:spPr>
           <a:xfrm>
-            <a:off x="8211312" y="1563624"/>
-            <a:ext cx="2734056" cy="256032"/>
+            <a:off x="8211312" y="1545336"/>
+            <a:ext cx="2734056" cy="228600"/>
           </a:xfrm>
           <a:prstGeom prst="rect">
             <a:avLst/>
@@ -12666,7 +12670,7 @@
               <a:buNone/>
             </a:pPr>
             <a:r>
-              <a:rPr lang="en-US" sz="1300" b="1" dirty="0">
+              <a:rPr lang="en-US" sz="1220" b="1" dirty="0">
                 <a:solidFill>
                   <a:srgbClr val="0068B7"/>
                 </a:solidFill>
@@ -12676,7 +12680,7 @@
               </a:rPr>
               <a:t>Apply the lesson</a:t>
             </a:r>
-            <a:endParaRPr lang="en-US" sz="1300" dirty="0"/>
+            <a:endParaRPr lang="en-US" sz="1220" dirty="0"/>
           </a:p>
         </p:txBody>
       </p:sp>
@@ -12688,8 +12692,8 @@
         </p:nvSpPr>
         <p:spPr>
           <a:xfrm>
-            <a:off x="8211312" y="1892808"/>
-            <a:ext cx="2734056" cy="1536192"/>
+            <a:off x="8211312" y="1856232"/>
+            <a:ext cx="2734056" cy="1591056"/>
           </a:xfrm>
           <a:prstGeom prst="rect">
             <a:avLst/>
@@ -12707,7 +12711,7 @@
               <a:buNone/>
             </a:pPr>
             <a:r>
-              <a:rPr lang="en-US" sz="1320" dirty="0">
+              <a:rPr lang="en-US" sz="1220" dirty="0">
                 <a:solidFill>
                   <a:srgbClr val="17364A"/>
                 </a:solidFill>
@@ -12715,9 +12719,9 @@
                 <a:ea typeface="Aptos" pitchFamily="34" charset="-122"/>
                 <a:cs typeface="Aptos" pitchFamily="34" charset="-120"/>
               </a:rPr>
-              <a:t>Use the related plays to identify decisions, participants, timing, approvals, and documentation needed for responsible implementation.</a:t>
-            </a:r>
-            <a:endParaRPr lang="en-US" sz="1320" dirty="0"/>
+              <a:t>Use the related plays to identify decisions, participants, timing, approvals,.</a:t>
+            </a:r>
+            <a:endParaRPr lang="en-US" sz="1220" dirty="0"/>
           </a:p>
         </p:txBody>
       </p:sp>
@@ -12756,8 +12760,8 @@
         </p:nvSpPr>
         <p:spPr>
           <a:xfrm>
-            <a:off x="8211312" y="3941064"/>
-            <a:ext cx="2734056" cy="256032"/>
+            <a:off x="8211312" y="3922776"/>
+            <a:ext cx="2734056" cy="228600"/>
           </a:xfrm>
           <a:prstGeom prst="rect">
             <a:avLst/>
@@ -12773,7 +12777,7 @@
               <a:buNone/>
             </a:pPr>
             <a:r>
-              <a:rPr lang="en-US" sz="1300" b="1" dirty="0">
+              <a:rPr lang="en-US" sz="1220" b="1" dirty="0">
                 <a:solidFill>
                   <a:srgbClr val="0068B7"/>
                 </a:solidFill>
@@ -12783,7 +12787,7 @@
               </a:rPr>
               <a:t>Use the play links to</a:t>
             </a:r>
-            <a:endParaRPr lang="en-US" sz="1300" dirty="0"/>
+            <a:endParaRPr lang="en-US" sz="1220" dirty="0"/>
           </a:p>
         </p:txBody>
       </p:sp>
@@ -12795,8 +12799,8 @@
         </p:nvSpPr>
         <p:spPr>
           <a:xfrm>
-            <a:off x="8229600" y="4306824"/>
-            <a:ext cx="2679192" cy="941832"/>
+            <a:off x="8229600" y="4251960"/>
+            <a:ext cx="2679192" cy="1033272"/>
           </a:xfrm>
           <a:prstGeom prst="rect">
             <a:avLst/>
@@ -12814,7 +12818,7 @@
               <a:buNone/>
             </a:pPr>
             <a:r>
-              <a:rPr lang="en-US" sz="1220" dirty="0">
+              <a:rPr lang="en-US" sz="1140" dirty="0">
                 <a:solidFill>
                   <a:srgbClr val="17364A"/>
                 </a:solidFill>
@@ -12824,14 +12828,14 @@
               </a:rPr>
               <a:t>Locate the decision point in the playbook sequence.</a:t>
             </a:r>
-            <a:endParaRPr lang="en-US" sz="1220" dirty="0"/>
-          </a:p>
-          <a:p>
-            <a:pPr indent="0" marL="0">
-              <a:buNone/>
-            </a:pPr>
-            <a:r>
-              <a:rPr lang="en-US" sz="1220" dirty="0">
+            <a:endParaRPr lang="en-US" sz="1140" dirty="0"/>
+          </a:p>
+          <a:p>
+            <a:pPr indent="0" marL="0">
+              <a:buNone/>
+            </a:pPr>
+            <a:r>
+              <a:rPr lang="en-US" sz="1140" dirty="0">
                 <a:solidFill>
                   <a:srgbClr val="17364A"/>
                 </a:solidFill>
@@ -12841,14 +12845,14 @@
               </a:rPr>
               <a:t>Identify who should participate in the work.</a:t>
             </a:r>
-            <a:endParaRPr lang="en-US" sz="1220" dirty="0"/>
-          </a:p>
-          <a:p>
-            <a:pPr indent="0" marL="0">
-              <a:buNone/>
-            </a:pPr>
-            <a:r>
-              <a:rPr lang="en-US" sz="1220" dirty="0">
+            <a:endParaRPr lang="en-US" sz="1140" dirty="0"/>
+          </a:p>
+          <a:p>
+            <a:pPr indent="0" marL="0">
+              <a:buNone/>
+            </a:pPr>
+            <a:r>
+              <a:rPr lang="en-US" sz="1140" dirty="0">
                 <a:solidFill>
                   <a:srgbClr val="17364A"/>
                 </a:solidFill>
@@ -12856,9 +12860,9 @@
                 <a:ea typeface="Aptos" pitchFamily="34" charset="-122"/>
                 <a:cs typeface="Aptos" pitchFamily="34" charset="-120"/>
               </a:rPr>
-              <a:t>Document the review, approval, or implementation step.</a:t>
-            </a:r>
-            <a:endParaRPr lang="en-US" sz="1220" dirty="0"/>
+              <a:t>Document the review, approval, or implementation.</a:t>
+            </a:r>
+            <a:endParaRPr lang="en-US" sz="1140" dirty="0"/>
           </a:p>
         </p:txBody>
       </p:sp>
@@ -13176,7 +13180,7 @@
                 <a:ea typeface="Aptos" pitchFamily="34" charset="-122"/>
                 <a:cs typeface="Aptos" pitchFamily="34" charset="-120"/>
               </a:rPr>
-              <a:t>• Tool 4: AI Policy Landscape Scan (Worksheet) - Use AI Policy Landscape Scan to translate this.</a:t>
+              <a:t>• Tool 4: AI Policy Landscape Scan (Worksheet) - Use AI Policy Landscape Scan.</a:t>
             </a:r>
             <a:endParaRPr lang="en-US" sz="1850" dirty="0"/>
           </a:p>
@@ -13193,7 +13197,7 @@
                 <a:ea typeface="Aptos" pitchFamily="34" charset="-122"/>
                 <a:cs typeface="Aptos" pitchFamily="34" charset="-120"/>
               </a:rPr>
-              <a:t>• Tool 5: AI Environmental and Resource Impact Review (Checklist) - Use this tool to complete or.</a:t>
+              <a:t>• Tool 5: AI Environmental and Resource Impact Review (Checklist) - Use this.</a:t>
             </a:r>
             <a:endParaRPr lang="en-US" sz="1850" dirty="0"/>
           </a:p>
@@ -13210,7 +13214,7 @@
                 <a:ea typeface="Aptos" pitchFamily="34" charset="-122"/>
                 <a:cs typeface="Aptos" pitchFamily="34" charset="-120"/>
               </a:rPr>
-              <a:t>• Tool 6: Human-Centered AI Decision Rule Checklist (Checklist) - Use Human-Centered AI Decision.</a:t>
+              <a:t>• Tool 6: Human-Centered AI Decision Rule Checklist (Checklist) - Use.</a:t>
             </a:r>
             <a:endParaRPr lang="en-US" sz="1850" dirty="0"/>
           </a:p>
@@ -13227,7 +13231,7 @@
                 <a:ea typeface="Aptos" pitchFamily="34" charset="-122"/>
                 <a:cs typeface="Aptos" pitchFamily="34" charset="-120"/>
               </a:rPr>
-              <a:t>• Tool 8: AI Project Charter (Planning) - Use AI Project Charter to translate this lesson into a.</a:t>
+              <a:t>• Tool 8: AI Project Charter (Planning) - Use AI Project Charter to translate.</a:t>
             </a:r>
             <a:endParaRPr lang="en-US" sz="1850" dirty="0"/>
           </a:p>
@@ -13268,8 +13272,8 @@
         </p:nvSpPr>
         <p:spPr>
           <a:xfrm>
-            <a:off x="8211312" y="1563624"/>
-            <a:ext cx="2734056" cy="256032"/>
+            <a:off x="8211312" y="1545336"/>
+            <a:ext cx="2734056" cy="228600"/>
           </a:xfrm>
           <a:prstGeom prst="rect">
             <a:avLst/>
@@ -13285,7 +13289,7 @@
               <a:buNone/>
             </a:pPr>
             <a:r>
-              <a:rPr lang="en-US" sz="1300" b="1" dirty="0">
+              <a:rPr lang="en-US" sz="1220" b="1" dirty="0">
                 <a:solidFill>
                   <a:srgbClr val="0068B7"/>
                 </a:solidFill>
@@ -13295,7 +13299,7 @@
               </a:rPr>
               <a:t>Use the tools</a:t>
             </a:r>
-            <a:endParaRPr lang="en-US" sz="1300" dirty="0"/>
+            <a:endParaRPr lang="en-US" sz="1220" dirty="0"/>
           </a:p>
         </p:txBody>
       </p:sp>
@@ -13307,8 +13311,8 @@
         </p:nvSpPr>
         <p:spPr>
           <a:xfrm>
-            <a:off x="8211312" y="1892808"/>
-            <a:ext cx="2734056" cy="1536192"/>
+            <a:off x="8211312" y="1856232"/>
+            <a:ext cx="2734056" cy="1591056"/>
           </a:xfrm>
           <a:prstGeom prst="rect">
             <a:avLst/>
@@ -13326,7 +13330,7 @@
               <a:buNone/>
             </a:pPr>
             <a:r>
-              <a:rPr lang="en-US" sz="1320" dirty="0">
+              <a:rPr lang="en-US" sz="1220" dirty="0">
                 <a:solidFill>
                   <a:srgbClr val="17364A"/>
                 </a:solidFill>
@@ -13334,9 +13338,9 @@
                 <a:ea typeface="Aptos" pitchFamily="34" charset="-122"/>
                 <a:cs typeface="Aptos" pitchFamily="34" charset="-120"/>
               </a:rPr>
-              <a:t>Use linked tools when your department needs a structured worksheet, template, checklist, review process, or documentation artifact.</a:t>
-            </a:r>
-            <a:endParaRPr lang="en-US" sz="1320" dirty="0"/>
+              <a:t>Use linked tools when your department needs a structured worksheet, template,.</a:t>
+            </a:r>
+            <a:endParaRPr lang="en-US" sz="1220" dirty="0"/>
           </a:p>
         </p:txBody>
       </p:sp>
@@ -13375,8 +13379,8 @@
         </p:nvSpPr>
         <p:spPr>
           <a:xfrm>
-            <a:off x="8211312" y="3941064"/>
-            <a:ext cx="2734056" cy="256032"/>
+            <a:off x="8211312" y="3922776"/>
+            <a:ext cx="2734056" cy="228600"/>
           </a:xfrm>
           <a:prstGeom prst="rect">
             <a:avLst/>
@@ -13392,7 +13396,7 @@
               <a:buNone/>
             </a:pPr>
             <a:r>
-              <a:rPr lang="en-US" sz="1300" b="1" dirty="0">
+              <a:rPr lang="en-US" sz="1220" b="1" dirty="0">
                 <a:solidFill>
                   <a:srgbClr val="0068B7"/>
                 </a:solidFill>
@@ -13402,7 +13406,7 @@
               </a:rPr>
               <a:t>Tool selection cues</a:t>
             </a:r>
-            <a:endParaRPr lang="en-US" sz="1300" dirty="0"/>
+            <a:endParaRPr lang="en-US" sz="1220" dirty="0"/>
           </a:p>
         </p:txBody>
       </p:sp>
@@ -13414,8 +13418,8 @@
         </p:nvSpPr>
         <p:spPr>
           <a:xfrm>
-            <a:off x="8229600" y="4306824"/>
-            <a:ext cx="2679192" cy="941832"/>
+            <a:off x="8229600" y="4251960"/>
+            <a:ext cx="2679192" cy="1033272"/>
           </a:xfrm>
           <a:prstGeom prst="rect">
             <a:avLst/>
@@ -13433,7 +13437,7 @@
               <a:buNone/>
             </a:pPr>
             <a:r>
-              <a:rPr lang="en-US" sz="1220" dirty="0">
+              <a:rPr lang="en-US" sz="1140" dirty="0">
                 <a:solidFill>
                   <a:srgbClr val="17364A"/>
                 </a:solidFill>
@@ -13443,14 +13447,14 @@
               </a:rPr>
               <a:t>Use a tool when no comparable local process exists.</a:t>
             </a:r>
-            <a:endParaRPr lang="en-US" sz="1220" dirty="0"/>
-          </a:p>
-          <a:p>
-            <a:pPr indent="0" marL="0">
-              <a:buNone/>
-            </a:pPr>
-            <a:r>
-              <a:rPr lang="en-US" sz="1220" dirty="0">
+            <a:endParaRPr lang="en-US" sz="1140" dirty="0"/>
+          </a:p>
+          <a:p>
+            <a:pPr indent="0" marL="0">
+              <a:buNone/>
+            </a:pPr>
+            <a:r>
+              <a:rPr lang="en-US" sz="1140" dirty="0">
                 <a:solidFill>
                   <a:srgbClr val="17364A"/>
                 </a:solidFill>
@@ -13458,16 +13462,16 @@
                 <a:ea typeface="Aptos" pitchFamily="34" charset="-122"/>
                 <a:cs typeface="Aptos" pitchFamily="34" charset="-120"/>
               </a:rPr>
-              <a:t>Adapt existing department templates when they already fit the.</a:t>
-            </a:r>
-            <a:endParaRPr lang="en-US" sz="1220" dirty="0"/>
-          </a:p>
-          <a:p>
-            <a:pPr indent="0" marL="0">
-              <a:buNone/>
-            </a:pPr>
-            <a:r>
-              <a:rPr lang="en-US" sz="1220" dirty="0">
+              <a:t>Adapt existing department templates when they.</a:t>
+            </a:r>
+            <a:endParaRPr lang="en-US" sz="1140" dirty="0"/>
+          </a:p>
+          <a:p>
+            <a:pPr indent="0" marL="0">
+              <a:buNone/>
+            </a:pPr>
+            <a:r>
+              <a:rPr lang="en-US" sz="1140" dirty="0">
                 <a:solidFill>
                   <a:srgbClr val="17364A"/>
                 </a:solidFill>
@@ -13475,9 +13479,9 @@
                 <a:ea typeface="Aptos" pitchFamily="34" charset="-122"/>
                 <a:cs typeface="Aptos" pitchFamily="34" charset="-120"/>
               </a:rPr>
-              <a:t>Save the completed artifact as evidence of the decision.</a:t>
-            </a:r>
-            <a:endParaRPr lang="en-US" sz="1220" dirty="0"/>
+              <a:t>Save the completed artifact as evidence of the.</a:t>
+            </a:r>
+            <a:endParaRPr lang="en-US" sz="1140" dirty="0"/>
           </a:p>
         </p:txBody>
       </p:sp>
@@ -13768,8 +13772,8 @@
         </p:nvSpPr>
         <p:spPr>
           <a:xfrm>
-            <a:off x="868680" y="1508760"/>
-            <a:ext cx="6309360" cy="4160520"/>
+            <a:off x="822960" y="1463040"/>
+            <a:ext cx="6565392" cy="4343400"/>
           </a:xfrm>
           <a:prstGeom prst="rect">
             <a:avLst/>
@@ -13787,7 +13791,7 @@
               <a:buNone/>
             </a:pPr>
             <a:r>
-              <a:rPr lang="en-US" sz="2100" dirty="0">
+              <a:rPr lang="en-US" sz="1920" dirty="0">
                 <a:solidFill>
                   <a:srgbClr val="003A63"/>
                 </a:solidFill>
@@ -13797,14 +13801,14 @@
               </a:rPr>
               <a:t>• Identify the full cost components of AI implementation and operations.</a:t>
             </a:r>
-            <a:endParaRPr lang="en-US" sz="2100" dirty="0"/>
-          </a:p>
-          <a:p>
-            <a:pPr indent="0" marL="0">
-              <a:buNone/>
-            </a:pPr>
-            <a:r>
-              <a:rPr lang="en-US" sz="2100" dirty="0">
+            <a:endParaRPr lang="en-US" sz="1920" dirty="0"/>
+          </a:p>
+          <a:p>
+            <a:pPr indent="0" marL="0">
+              <a:buNone/>
+            </a:pPr>
+            <a:r>
+              <a:rPr lang="en-US" sz="1920" dirty="0">
                 <a:solidFill>
                   <a:srgbClr val="003A63"/>
                 </a:solidFill>
@@ -13812,16 +13816,16 @@
                 <a:ea typeface="Aptos" pitchFamily="34" charset="-122"/>
                 <a:cs typeface="Aptos" pitchFamily="34" charset="-120"/>
               </a:rPr>
-              <a:t>• Evaluate expected benefits in terms of public health value, workflow improvement, equity,.</a:t>
-            </a:r>
-            <a:endParaRPr lang="en-US" sz="2100" dirty="0"/>
-          </a:p>
-          <a:p>
-            <a:pPr indent="0" marL="0">
-              <a:buNone/>
-            </a:pPr>
-            <a:r>
-              <a:rPr lang="en-US" sz="2100" dirty="0">
+              <a:t>• Evaluate expected benefits in terms of public health value, workflow.</a:t>
+            </a:r>
+            <a:endParaRPr lang="en-US" sz="1920" dirty="0"/>
+          </a:p>
+          <a:p>
+            <a:pPr indent="0" marL="0">
+              <a:buNone/>
+            </a:pPr>
+            <a:r>
+              <a:rPr lang="en-US" sz="1920" dirty="0">
                 <a:solidFill>
                   <a:srgbClr val="003A63"/>
                 </a:solidFill>
@@ -13831,7 +13835,7 @@
               </a:rPr>
               <a:t>• Distinguish between a vendor demonstration and a credible business case.</a:t>
             </a:r>
-            <a:endParaRPr lang="en-US" sz="2100" dirty="0"/>
+            <a:endParaRPr lang="en-US" sz="1920" dirty="0"/>
           </a:p>
         </p:txBody>
       </p:sp>
@@ -13843,12 +13847,12 @@
         </p:nvSpPr>
         <p:spPr>
           <a:xfrm>
-            <a:off x="7635240" y="1325880"/>
-            <a:ext cx="3474720" cy="1207008"/>
+            <a:off x="7543800" y="1325880"/>
+            <a:ext cx="3611880" cy="1261872"/>
           </a:xfrm>
           <a:prstGeom prst="roundRect">
             <a:avLst>
-              <a:gd name="adj" fmla="val 9091"/>
+              <a:gd name="adj" fmla="val 8696"/>
             </a:avLst>
           </a:prstGeom>
           <a:solidFill>
@@ -13870,8 +13874,8 @@
         </p:nvSpPr>
         <p:spPr>
           <a:xfrm>
-            <a:off x="7799832" y="1472184"/>
-            <a:ext cx="3145536" cy="256032"/>
+            <a:off x="7708392" y="1453896"/>
+            <a:ext cx="3282696" cy="228600"/>
           </a:xfrm>
           <a:prstGeom prst="rect">
             <a:avLst/>
@@ -13887,7 +13891,7 @@
               <a:buNone/>
             </a:pPr>
             <a:r>
-              <a:rPr lang="en-US" sz="1300" b="1" dirty="0">
+              <a:rPr lang="en-US" sz="1220" b="1" dirty="0">
                 <a:solidFill>
                   <a:srgbClr val="0068B7"/>
                 </a:solidFill>
@@ -13897,7 +13901,7 @@
               </a:rPr>
               <a:t>Practice focus</a:t>
             </a:r>
-            <a:endParaRPr lang="en-US" sz="1300" dirty="0"/>
+            <a:endParaRPr lang="en-US" sz="1220" dirty="0"/>
           </a:p>
         </p:txBody>
       </p:sp>
@@ -13909,8 +13913,8 @@
         </p:nvSpPr>
         <p:spPr>
           <a:xfrm>
-            <a:off x="7799832" y="1801368"/>
-            <a:ext cx="3145536" cy="640080"/>
+            <a:off x="7708392" y="1764792"/>
+            <a:ext cx="3282696" cy="749808"/>
           </a:xfrm>
           <a:prstGeom prst="rect">
             <a:avLst/>
@@ -13928,7 +13932,7 @@
               <a:buNone/>
             </a:pPr>
             <a:r>
-              <a:rPr lang="en-US" sz="1320" dirty="0">
+              <a:rPr lang="en-US" sz="1220" dirty="0">
                 <a:solidFill>
                   <a:srgbClr val="17364A"/>
                 </a:solidFill>
@@ -13938,7 +13942,7 @@
               </a:rPr>
               <a:t>Identify the full cost components of AI implementation and operations.</a:t>
             </a:r>
-            <a:endParaRPr lang="en-US" sz="1320" dirty="0"/>
+            <a:endParaRPr lang="en-US" sz="1220" dirty="0"/>
           </a:p>
         </p:txBody>
       </p:sp>
@@ -13950,12 +13954,12 @@
         </p:nvSpPr>
         <p:spPr>
           <a:xfrm>
-            <a:off x="7635240" y="2670048"/>
-            <a:ext cx="3474720" cy="1377086"/>
+            <a:off x="7543800" y="2724912"/>
+            <a:ext cx="3611880" cy="1527048"/>
           </a:xfrm>
           <a:prstGeom prst="roundRect">
             <a:avLst>
-              <a:gd name="adj" fmla="val 7968"/>
+              <a:gd name="adj" fmla="val 7186"/>
             </a:avLst>
           </a:prstGeom>
           <a:solidFill>
@@ -13977,8 +13981,8 @@
         </p:nvSpPr>
         <p:spPr>
           <a:xfrm>
-            <a:off x="7799832" y="2816352"/>
-            <a:ext cx="3145536" cy="256032"/>
+            <a:off x="7708392" y="2852928"/>
+            <a:ext cx="3282696" cy="228600"/>
           </a:xfrm>
           <a:prstGeom prst="rect">
             <a:avLst/>
@@ -13994,7 +13998,7 @@
               <a:buNone/>
             </a:pPr>
             <a:r>
-              <a:rPr lang="en-US" sz="1300" b="1" dirty="0">
+              <a:rPr lang="en-US" sz="1220" b="1" dirty="0">
                 <a:solidFill>
                   <a:srgbClr val="0068B7"/>
                 </a:solidFill>
@@ -14004,7 +14008,7 @@
               </a:rPr>
               <a:t>Concept checkpoints</a:t>
             </a:r>
-            <a:endParaRPr lang="en-US" sz="1300" dirty="0"/>
+            <a:endParaRPr lang="en-US" sz="1220" dirty="0"/>
           </a:p>
         </p:txBody>
       </p:sp>
@@ -14016,8 +14020,8 @@
         </p:nvSpPr>
         <p:spPr>
           <a:xfrm>
-            <a:off x="7818120" y="3182112"/>
-            <a:ext cx="3090672" cy="718718"/>
+            <a:off x="7726680" y="3182112"/>
+            <a:ext cx="3227832" cy="960120"/>
           </a:xfrm>
           <a:prstGeom prst="rect">
             <a:avLst/>
@@ -14035,7 +14039,7 @@
               <a:buNone/>
             </a:pPr>
             <a:r>
-              <a:rPr lang="en-US" sz="1220" dirty="0">
+              <a:rPr lang="en-US" sz="1140" dirty="0">
                 <a:solidFill>
                   <a:srgbClr val="17364A"/>
                 </a:solidFill>
@@ -14043,16 +14047,16 @@
                 <a:ea typeface="Aptos" pitchFamily="34" charset="-122"/>
                 <a:cs typeface="Aptos" pitchFamily="34" charset="-120"/>
               </a:rPr>
-              <a:t>Evaluate expected benefits in terms of public health value,.</a:t>
-            </a:r>
-            <a:endParaRPr lang="en-US" sz="1220" dirty="0"/>
-          </a:p>
-          <a:p>
-            <a:pPr indent="0" marL="0">
-              <a:buNone/>
-            </a:pPr>
-            <a:r>
-              <a:rPr lang="en-US" sz="1220" dirty="0">
+              <a:t>Evaluate expected benefits in terms of public.</a:t>
+            </a:r>
+            <a:endParaRPr lang="en-US" sz="1140" dirty="0"/>
+          </a:p>
+          <a:p>
+            <a:pPr indent="0" marL="0">
+              <a:buNone/>
+            </a:pPr>
+            <a:r>
+              <a:rPr lang="en-US" sz="1140" dirty="0">
                 <a:solidFill>
                   <a:srgbClr val="17364A"/>
                 </a:solidFill>
@@ -14060,16 +14064,16 @@
                 <a:ea typeface="Aptos" pitchFamily="34" charset="-122"/>
                 <a:cs typeface="Aptos" pitchFamily="34" charset="-120"/>
               </a:rPr>
-              <a:t>Develop business case questions for AI procurement or internal.</a:t>
-            </a:r>
-            <a:endParaRPr lang="en-US" sz="1220" dirty="0"/>
-          </a:p>
-          <a:p>
-            <a:pPr indent="0" marL="0">
-              <a:buNone/>
-            </a:pPr>
-            <a:r>
-              <a:rPr lang="en-US" sz="1220" dirty="0">
+              <a:t>Develop business case questions for AI procurement.</a:t>
+            </a:r>
+            <a:endParaRPr lang="en-US" sz="1140" dirty="0"/>
+          </a:p>
+          <a:p>
+            <a:pPr indent="0" marL="0">
+              <a:buNone/>
+            </a:pPr>
+            <a:r>
+              <a:rPr lang="en-US" sz="1140" dirty="0">
                 <a:solidFill>
                   <a:srgbClr val="17364A"/>
                 </a:solidFill>
@@ -14079,7 +14083,7 @@
               </a:rPr>
               <a:t>Produce an AI business case review worksheet.</a:t>
             </a:r>
-            <a:endParaRPr lang="en-US" sz="1220" dirty="0"/>
+            <a:endParaRPr lang="en-US" sz="1140" dirty="0"/>
           </a:p>
         </p:txBody>
       </p:sp>
@@ -14091,12 +14095,12 @@
         </p:nvSpPr>
         <p:spPr>
           <a:xfrm>
-            <a:off x="7635240" y="4184294"/>
-            <a:ext cx="3474720" cy="1466698"/>
+            <a:off x="7543800" y="4389120"/>
+            <a:ext cx="3611880" cy="1261872"/>
           </a:xfrm>
           <a:prstGeom prst="roundRect">
             <a:avLst>
-              <a:gd name="adj" fmla="val 7481"/>
+              <a:gd name="adj" fmla="val 8696"/>
             </a:avLst>
           </a:prstGeom>
           <a:solidFill>
@@ -14118,8 +14122,8 @@
         </p:nvSpPr>
         <p:spPr>
           <a:xfrm>
-            <a:off x="7799832" y="4330598"/>
-            <a:ext cx="3145536" cy="256032"/>
+            <a:off x="7708392" y="4517136"/>
+            <a:ext cx="3282696" cy="228600"/>
           </a:xfrm>
           <a:prstGeom prst="rect">
             <a:avLst/>
@@ -14135,7 +14139,7 @@
               <a:buNone/>
             </a:pPr>
             <a:r>
-              <a:rPr lang="en-US" sz="1300" b="1" dirty="0">
+              <a:rPr lang="en-US" sz="1220" b="1" dirty="0">
                 <a:solidFill>
                   <a:srgbClr val="0068B7"/>
                 </a:solidFill>
@@ -14145,7 +14149,7 @@
               </a:rPr>
               <a:t>What to produce</a:t>
             </a:r>
-            <a:endParaRPr lang="en-US" sz="1300" dirty="0"/>
+            <a:endParaRPr lang="en-US" sz="1220" dirty="0"/>
           </a:p>
         </p:txBody>
       </p:sp>
@@ -14157,8 +14161,8 @@
         </p:nvSpPr>
         <p:spPr>
           <a:xfrm>
-            <a:off x="7799832" y="4659782"/>
-            <a:ext cx="3145536" cy="899770"/>
+            <a:off x="7708392" y="4828032"/>
+            <a:ext cx="3282696" cy="749808"/>
           </a:xfrm>
           <a:prstGeom prst="rect">
             <a:avLst/>
@@ -14176,7 +14180,7 @@
               <a:buNone/>
             </a:pPr>
             <a:r>
-              <a:rPr lang="en-US" sz="1320" dirty="0">
+              <a:rPr lang="en-US" sz="1220" dirty="0">
                 <a:solidFill>
                   <a:srgbClr val="17364A"/>
                 </a:solidFill>
@@ -14184,9 +14188,9 @@
                 <a:ea typeface="Aptos" pitchFamily="34" charset="-122"/>
                 <a:cs typeface="Aptos" pitchFamily="34" charset="-120"/>
               </a:rPr>
-              <a:t>Use the assignment to test whether you can explain the concept, apply it to a realistic public health situation, and identify what would need review before the work moves forward.</a:t>
-            </a:r>
-            <a:endParaRPr lang="en-US" sz="1320" dirty="0"/>
+              <a:t>Use the assignment to test whether you can explain the concept, apply it to a.</a:t>
+            </a:r>
+            <a:endParaRPr lang="en-US" sz="1220" dirty="0"/>
           </a:p>
         </p:txBody>
       </p:sp>
@@ -14477,8 +14481,8 @@
         </p:nvSpPr>
         <p:spPr>
           <a:xfrm>
-            <a:off x="868680" y="1508760"/>
-            <a:ext cx="6309360" cy="4160520"/>
+            <a:off x="822960" y="1463040"/>
+            <a:ext cx="6565392" cy="4343400"/>
           </a:xfrm>
           <a:prstGeom prst="rect">
             <a:avLst/>
@@ -14496,7 +14500,7 @@
               <a:buNone/>
             </a:pPr>
             <a:r>
-              <a:rPr lang="en-US" sz="2100" dirty="0">
+              <a:rPr lang="en-US" sz="1920" dirty="0">
                 <a:solidFill>
                   <a:srgbClr val="003A63"/>
                 </a:solidFill>
@@ -14506,14 +14510,14 @@
               </a:rPr>
               <a:t>• AI investments compete with many other public health priorities.</a:t>
             </a:r>
-            <a:endParaRPr lang="en-US" sz="2100" dirty="0"/>
-          </a:p>
-          <a:p>
-            <a:pPr indent="0" marL="0">
-              <a:buNone/>
-            </a:pPr>
-            <a:r>
-              <a:rPr lang="en-US" sz="2100" dirty="0">
+            <a:endParaRPr lang="en-US" sz="1920" dirty="0"/>
+          </a:p>
+          <a:p>
+            <a:pPr indent="0" marL="0">
+              <a:buNone/>
+            </a:pPr>
+            <a:r>
+              <a:rPr lang="en-US" sz="1920" dirty="0">
                 <a:solidFill>
                   <a:srgbClr val="003A63"/>
                 </a:solidFill>
@@ -14521,16 +14525,16 @@
                 <a:ea typeface="Aptos" pitchFamily="34" charset="-122"/>
                 <a:cs typeface="Aptos" pitchFamily="34" charset="-120"/>
               </a:rPr>
-              <a:t>• Leaders need a disciplined way to decide when AI is worth funding, what costs must be.</a:t>
-            </a:r>
-            <a:endParaRPr lang="en-US" sz="2100" dirty="0"/>
-          </a:p>
-          <a:p>
-            <a:pPr indent="0" marL="0">
-              <a:buNone/>
-            </a:pPr>
-            <a:r>
-              <a:rPr lang="en-US" sz="2100" dirty="0">
+              <a:t>• Leaders need a disciplined way to decide when AI is worth funding, what.</a:t>
+            </a:r>
+            <a:endParaRPr lang="en-US" sz="1920" dirty="0"/>
+          </a:p>
+          <a:p>
+            <a:pPr indent="0" marL="0">
+              <a:buNone/>
+            </a:pPr>
+            <a:r>
+              <a:rPr lang="en-US" sz="1920" dirty="0">
                 <a:solidFill>
                   <a:srgbClr val="003A63"/>
                 </a:solidFill>
@@ -14538,9 +14542,9 @@
                 <a:ea typeface="Aptos" pitchFamily="34" charset="-122"/>
                 <a:cs typeface="Aptos" pitchFamily="34" charset="-120"/>
               </a:rPr>
-              <a:t>• A business case review helps agencies avoid buying tools that are impressive in demonstrations.</a:t>
-            </a:r>
-            <a:endParaRPr lang="en-US" sz="2100" dirty="0"/>
+              <a:t>• A business case review helps agencies avoid buying tools that are impressive.</a:t>
+            </a:r>
+            <a:endParaRPr lang="en-US" sz="1920" dirty="0"/>
           </a:p>
         </p:txBody>
       </p:sp>
@@ -14552,12 +14556,12 @@
         </p:nvSpPr>
         <p:spPr>
           <a:xfrm>
-            <a:off x="7635240" y="1325880"/>
-            <a:ext cx="3474720" cy="1207008"/>
+            <a:off x="7543800" y="1325880"/>
+            <a:ext cx="3611880" cy="1261872"/>
           </a:xfrm>
           <a:prstGeom prst="roundRect">
             <a:avLst>
-              <a:gd name="adj" fmla="val 9091"/>
+              <a:gd name="adj" fmla="val 8696"/>
             </a:avLst>
           </a:prstGeom>
           <a:solidFill>
@@ -14579,8 +14583,8 @@
         </p:nvSpPr>
         <p:spPr>
           <a:xfrm>
-            <a:off x="7799832" y="1472184"/>
-            <a:ext cx="3145536" cy="256032"/>
+            <a:off x="7708392" y="1453896"/>
+            <a:ext cx="3282696" cy="228600"/>
           </a:xfrm>
           <a:prstGeom prst="rect">
             <a:avLst/>
@@ -14596,7 +14600,7 @@
               <a:buNone/>
             </a:pPr>
             <a:r>
-              <a:rPr lang="en-US" sz="1300" b="1" dirty="0">
+              <a:rPr lang="en-US" sz="1220" b="1" dirty="0">
                 <a:solidFill>
                   <a:srgbClr val="0068B7"/>
                 </a:solidFill>
@@ -14606,7 +14610,7 @@
               </a:rPr>
               <a:t>Core concept</a:t>
             </a:r>
-            <a:endParaRPr lang="en-US" sz="1300" dirty="0"/>
+            <a:endParaRPr lang="en-US" sz="1220" dirty="0"/>
           </a:p>
         </p:txBody>
       </p:sp>
@@ -14618,8 +14622,8 @@
         </p:nvSpPr>
         <p:spPr>
           <a:xfrm>
-            <a:off x="7799832" y="1801368"/>
-            <a:ext cx="3145536" cy="640080"/>
+            <a:off x="7708392" y="1764792"/>
+            <a:ext cx="3282696" cy="749808"/>
           </a:xfrm>
           <a:prstGeom prst="rect">
             <a:avLst/>
@@ -14637,7 +14641,7 @@
               <a:buNone/>
             </a:pPr>
             <a:r>
-              <a:rPr lang="en-US" sz="1320" dirty="0">
+              <a:rPr lang="en-US" sz="1220" dirty="0">
                 <a:solidFill>
                   <a:srgbClr val="17364A"/>
                 </a:solidFill>
@@ -14647,7 +14651,7 @@
               </a:rPr>
               <a:t>AI investments compete with many other public health priorities.</a:t>
             </a:r>
-            <a:endParaRPr lang="en-US" sz="1320" dirty="0"/>
+            <a:endParaRPr lang="en-US" sz="1220" dirty="0"/>
           </a:p>
         </p:txBody>
       </p:sp>
@@ -14659,12 +14663,12 @@
         </p:nvSpPr>
         <p:spPr>
           <a:xfrm>
-            <a:off x="7635240" y="2670048"/>
-            <a:ext cx="3474720" cy="1377086"/>
+            <a:off x="7543800" y="2724912"/>
+            <a:ext cx="3611880" cy="1527048"/>
           </a:xfrm>
           <a:prstGeom prst="roundRect">
             <a:avLst>
-              <a:gd name="adj" fmla="val 7968"/>
+              <a:gd name="adj" fmla="val 7186"/>
             </a:avLst>
           </a:prstGeom>
           <a:solidFill>
@@ -14686,8 +14690,8 @@
         </p:nvSpPr>
         <p:spPr>
           <a:xfrm>
-            <a:off x="7799832" y="2816352"/>
-            <a:ext cx="3145536" cy="256032"/>
+            <a:off x="7708392" y="2852928"/>
+            <a:ext cx="3282696" cy="228600"/>
           </a:xfrm>
           <a:prstGeom prst="rect">
             <a:avLst/>
@@ -14703,7 +14707,7 @@
               <a:buNone/>
             </a:pPr>
             <a:r>
-              <a:rPr lang="en-US" sz="1300" b="1" dirty="0">
+              <a:rPr lang="en-US" sz="1220" b="1" dirty="0">
                 <a:solidFill>
                   <a:srgbClr val="0068B7"/>
                 </a:solidFill>
@@ -14713,7 +14717,7 @@
               </a:rPr>
               <a:t>Concept checkpoints</a:t>
             </a:r>
-            <a:endParaRPr lang="en-US" sz="1300" dirty="0"/>
+            <a:endParaRPr lang="en-US" sz="1220" dirty="0"/>
           </a:p>
         </p:txBody>
       </p:sp>
@@ -14725,8 +14729,8 @@
         </p:nvSpPr>
         <p:spPr>
           <a:xfrm>
-            <a:off x="7818120" y="3182112"/>
-            <a:ext cx="3090672" cy="718718"/>
+            <a:off x="7726680" y="3182112"/>
+            <a:ext cx="3227832" cy="960120"/>
           </a:xfrm>
           <a:prstGeom prst="rect">
             <a:avLst/>
@@ -14744,7 +14748,7 @@
               <a:buNone/>
             </a:pPr>
             <a:r>
-              <a:rPr lang="en-US" sz="1220" dirty="0">
+              <a:rPr lang="en-US" sz="1140" dirty="0">
                 <a:solidFill>
                   <a:srgbClr val="17364A"/>
                 </a:solidFill>
@@ -14752,16 +14756,16 @@
                 <a:ea typeface="Aptos" pitchFamily="34" charset="-122"/>
                 <a:cs typeface="Aptos" pitchFamily="34" charset="-120"/>
               </a:rPr>
-              <a:t>Leaders need a disciplined way to decide when AI is worth funding,.</a:t>
-            </a:r>
-            <a:endParaRPr lang="en-US" sz="1220" dirty="0"/>
-          </a:p>
-          <a:p>
-            <a:pPr indent="0" marL="0">
-              <a:buNone/>
-            </a:pPr>
-            <a:r>
-              <a:rPr lang="en-US" sz="1220" dirty="0">
+              <a:t>Leaders need a disciplined way to decide when AI.</a:t>
+            </a:r>
+            <a:endParaRPr lang="en-US" sz="1140" dirty="0"/>
+          </a:p>
+          <a:p>
+            <a:pPr indent="0" marL="0">
+              <a:buNone/>
+            </a:pPr>
+            <a:r>
+              <a:rPr lang="en-US" sz="1140" dirty="0">
                 <a:solidFill>
                   <a:srgbClr val="17364A"/>
                 </a:solidFill>
@@ -14769,16 +14773,16 @@
                 <a:ea typeface="Aptos" pitchFamily="34" charset="-122"/>
                 <a:cs typeface="Aptos" pitchFamily="34" charset="-120"/>
               </a:rPr>
-              <a:t>A business case review helps agencies avoid buying tools that are.</a:t>
-            </a:r>
-            <a:endParaRPr lang="en-US" sz="1220" dirty="0"/>
-          </a:p>
-          <a:p>
-            <a:pPr indent="0" marL="0">
-              <a:buNone/>
-            </a:pPr>
-            <a:r>
-              <a:rPr lang="en-US" sz="1220" dirty="0">
+              <a:t>A business case review helps agencies avoid buying.</a:t>
+            </a:r>
+            <a:endParaRPr lang="en-US" sz="1140" dirty="0"/>
+          </a:p>
+          <a:p>
+            <a:pPr indent="0" marL="0">
+              <a:buNone/>
+            </a:pPr>
+            <a:r>
+              <a:rPr lang="en-US" sz="1140" dirty="0">
                 <a:solidFill>
                   <a:srgbClr val="17364A"/>
                 </a:solidFill>
@@ -14786,9 +14790,9 @@
                 <a:ea typeface="Aptos" pitchFamily="34" charset="-122"/>
                 <a:cs typeface="Aptos" pitchFamily="34" charset="-120"/>
               </a:rPr>
-              <a:t>This module teaches leaders to evaluate AI investments across.</a:t>
-            </a:r>
-            <a:endParaRPr lang="en-US" sz="1220" dirty="0"/>
+              <a:t>This module teaches leaders to evaluate AI.</a:t>
+            </a:r>
+            <a:endParaRPr lang="en-US" sz="1140" dirty="0"/>
           </a:p>
         </p:txBody>
       </p:sp>
@@ -14800,12 +14804,12 @@
         </p:nvSpPr>
         <p:spPr>
           <a:xfrm>
-            <a:off x="7635240" y="4184294"/>
-            <a:ext cx="3474720" cy="1466698"/>
+            <a:off x="7543800" y="4389120"/>
+            <a:ext cx="3611880" cy="1261872"/>
           </a:xfrm>
           <a:prstGeom prst="roundRect">
             <a:avLst>
-              <a:gd name="adj" fmla="val 7481"/>
+              <a:gd name="adj" fmla="val 8696"/>
             </a:avLst>
           </a:prstGeom>
           <a:solidFill>
@@ -14827,8 +14831,8 @@
         </p:nvSpPr>
         <p:spPr>
           <a:xfrm>
-            <a:off x="7799832" y="4330598"/>
-            <a:ext cx="3145536" cy="256032"/>
+            <a:off x="7708392" y="4517136"/>
+            <a:ext cx="3282696" cy="228600"/>
           </a:xfrm>
           <a:prstGeom prst="rect">
             <a:avLst/>
@@ -14844,7 +14848,7 @@
               <a:buNone/>
             </a:pPr>
             <a:r>
-              <a:rPr lang="en-US" sz="1300" b="1" dirty="0">
+              <a:rPr lang="en-US" sz="1220" b="1" dirty="0">
                 <a:solidFill>
                   <a:srgbClr val="0068B7"/>
                 </a:solidFill>
@@ -14854,7 +14858,7 @@
               </a:rPr>
               <a:t>Apply it</a:t>
             </a:r>
-            <a:endParaRPr lang="en-US" sz="1300" dirty="0"/>
+            <a:endParaRPr lang="en-US" sz="1220" dirty="0"/>
           </a:p>
         </p:txBody>
       </p:sp>
@@ -14866,8 +14870,8 @@
         </p:nvSpPr>
         <p:spPr>
           <a:xfrm>
-            <a:off x="7799832" y="4659782"/>
-            <a:ext cx="3145536" cy="899770"/>
+            <a:off x="7708392" y="4828032"/>
+            <a:ext cx="3282696" cy="749808"/>
           </a:xfrm>
           <a:prstGeom prst="rect">
             <a:avLst/>
@@ -14885,7 +14889,7 @@
               <a:buNone/>
             </a:pPr>
             <a:r>
-              <a:rPr lang="en-US" sz="1320" dirty="0">
+              <a:rPr lang="en-US" sz="1220" dirty="0">
                 <a:solidFill>
                   <a:srgbClr val="17364A"/>
                 </a:solidFill>
@@ -14893,9 +14897,9 @@
                 <a:ea typeface="Aptos" pitchFamily="34" charset="-122"/>
                 <a:cs typeface="Aptos" pitchFamily="34" charset="-120"/>
               </a:rPr>
-              <a:t>Connect the concept to public health purpose, responsible use, required safeguards, documentation, and the next action a department should take.</a:t>
-            </a:r>
-            <a:endParaRPr lang="en-US" sz="1320" dirty="0"/>
+              <a:t>Connect the concept to public health purpose, responsible use, required.</a:t>
+            </a:r>
+            <a:endParaRPr lang="en-US" sz="1220" dirty="0"/>
           </a:p>
         </p:txBody>
       </p:sp>
@@ -15186,8 +15190,8 @@
         </p:nvSpPr>
         <p:spPr>
           <a:xfrm>
-            <a:off x="868680" y="1508760"/>
-            <a:ext cx="6309360" cy="4160520"/>
+            <a:off x="822960" y="1463040"/>
+            <a:ext cx="6565392" cy="4343400"/>
           </a:xfrm>
           <a:prstGeom prst="rect">
             <a:avLst/>
@@ -15205,7 +15209,7 @@
               <a:buNone/>
             </a:pPr>
             <a:r>
-              <a:rPr lang="en-US" sz="2100" dirty="0">
+              <a:rPr lang="en-US" sz="1920" dirty="0">
                 <a:solidFill>
                   <a:srgbClr val="003A63"/>
                 </a:solidFill>
@@ -15215,14 +15219,14 @@
               </a:rPr>
               <a:t>• This national-level module is intended for training and planning purposes.</a:t>
             </a:r>
-            <a:endParaRPr lang="en-US" sz="2100" dirty="0"/>
-          </a:p>
-          <a:p>
-            <a:pPr indent="0" marL="0">
-              <a:buNone/>
-            </a:pPr>
-            <a:r>
-              <a:rPr lang="en-US" sz="2100" dirty="0">
+            <a:endParaRPr lang="en-US" sz="1920" dirty="0"/>
+          </a:p>
+          <a:p>
+            <a:pPr indent="0" marL="0">
+              <a:buNone/>
+            </a:pPr>
+            <a:r>
+              <a:rPr lang="en-US" sz="1920" dirty="0">
                 <a:solidFill>
                   <a:srgbClr val="003A63"/>
                 </a:solidFill>
@@ -15230,16 +15234,16 @@
                 <a:ea typeface="Aptos" pitchFamily="34" charset="-122"/>
                 <a:cs typeface="Aptos" pitchFamily="34" charset="-120"/>
               </a:rPr>
-              <a:t>• It does not replace legal, privacy, procurement, civil rights, records, or agency policy review.</a:t>
-            </a:r>
-            <a:endParaRPr lang="en-US" sz="2100" dirty="0"/>
-          </a:p>
-          <a:p>
-            <a:pPr indent="0" marL="0">
-              <a:buNone/>
-            </a:pPr>
-            <a:r>
-              <a:rPr lang="en-US" sz="2100" dirty="0">
+              <a:t>• It does not replace legal, privacy, procurement, civil rights, records, or.</a:t>
+            </a:r>
+            <a:endParaRPr lang="en-US" sz="1920" dirty="0"/>
+          </a:p>
+          <a:p>
+            <a:pPr indent="0" marL="0">
+              <a:buNone/>
+            </a:pPr>
+            <a:r>
+              <a:rPr lang="en-US" sz="1920" dirty="0">
                 <a:solidFill>
                   <a:srgbClr val="003A63"/>
                 </a:solidFill>
@@ -15247,9 +15251,9 @@
                 <a:ea typeface="Aptos" pitchFamily="34" charset="-122"/>
                 <a:cs typeface="Aptos" pitchFamily="34" charset="-120"/>
               </a:rPr>
-              <a:t>• Learners should confirm applicable requirements in their own jurisdiction and organization.</a:t>
-            </a:r>
-            <a:endParaRPr lang="en-US" sz="2100" dirty="0"/>
+              <a:t>• Learners should confirm applicable requirements in their own jurisdiction.</a:t>
+            </a:r>
+            <a:endParaRPr lang="en-US" sz="1920" dirty="0"/>
           </a:p>
         </p:txBody>
       </p:sp>
@@ -15261,12 +15265,12 @@
         </p:nvSpPr>
         <p:spPr>
           <a:xfrm>
-            <a:off x="7635240" y="1325880"/>
-            <a:ext cx="3474720" cy="1207008"/>
+            <a:off x="7543800" y="1325880"/>
+            <a:ext cx="3611880" cy="1261872"/>
           </a:xfrm>
           <a:prstGeom prst="roundRect">
             <a:avLst>
-              <a:gd name="adj" fmla="val 9091"/>
+              <a:gd name="adj" fmla="val 8696"/>
             </a:avLst>
           </a:prstGeom>
           <a:solidFill>
@@ -15288,8 +15292,8 @@
         </p:nvSpPr>
         <p:spPr>
           <a:xfrm>
-            <a:off x="7799832" y="1472184"/>
-            <a:ext cx="3145536" cy="256032"/>
+            <a:off x="7708392" y="1453896"/>
+            <a:ext cx="3282696" cy="228600"/>
           </a:xfrm>
           <a:prstGeom prst="rect">
             <a:avLst/>
@@ -15305,7 +15309,7 @@
               <a:buNone/>
             </a:pPr>
             <a:r>
-              <a:rPr lang="en-US" sz="1300" b="1" dirty="0">
+              <a:rPr lang="en-US" sz="1220" b="1" dirty="0">
                 <a:solidFill>
                   <a:srgbClr val="0068B7"/>
                 </a:solidFill>
@@ -15315,7 +15319,7 @@
               </a:rPr>
               <a:t>Governance lens</a:t>
             </a:r>
-            <a:endParaRPr lang="en-US" sz="1300" dirty="0"/>
+            <a:endParaRPr lang="en-US" sz="1220" dirty="0"/>
           </a:p>
         </p:txBody>
       </p:sp>
@@ -15327,8 +15331,8 @@
         </p:nvSpPr>
         <p:spPr>
           <a:xfrm>
-            <a:off x="7799832" y="1801368"/>
-            <a:ext cx="3145536" cy="640080"/>
+            <a:off x="7708392" y="1764792"/>
+            <a:ext cx="3282696" cy="749808"/>
           </a:xfrm>
           <a:prstGeom prst="rect">
             <a:avLst/>
@@ -15346,7 +15350,7 @@
               <a:buNone/>
             </a:pPr>
             <a:r>
-              <a:rPr lang="en-US" sz="1320" dirty="0">
+              <a:rPr lang="en-US" sz="1220" dirty="0">
                 <a:solidFill>
                   <a:srgbClr val="17364A"/>
                 </a:solidFill>
@@ -15356,7 +15360,7 @@
               </a:rPr>
               <a:t>This national-level module is intended for training and planning purposes.</a:t>
             </a:r>
-            <a:endParaRPr lang="en-US" sz="1320" dirty="0"/>
+            <a:endParaRPr lang="en-US" sz="1220" dirty="0"/>
           </a:p>
         </p:txBody>
       </p:sp>
@@ -15368,12 +15372,12 @@
         </p:nvSpPr>
         <p:spPr>
           <a:xfrm>
-            <a:off x="7635240" y="2670048"/>
-            <a:ext cx="3474720" cy="1377086"/>
+            <a:off x="7543800" y="2724912"/>
+            <a:ext cx="3611880" cy="1527048"/>
           </a:xfrm>
           <a:prstGeom prst="roundRect">
             <a:avLst>
-              <a:gd name="adj" fmla="val 7968"/>
+              <a:gd name="adj" fmla="val 7186"/>
             </a:avLst>
           </a:prstGeom>
           <a:solidFill>
@@ -15395,24 +15399,26 @@
         </p:nvSpPr>
         <p:spPr>
           <a:xfrm>
-            <a:off x="7799832" y="2798064"/>
-            <a:ext cx="3145536" cy="237744"/>
-          </a:xfrm>
-          <a:prstGeom prst="rect">
-            <a:avLst/>
-          </a:prstGeom>
-          <a:noFill/>
-          <a:ln/>
-        </p:spPr>
-        <p:txBody>
-          <a:bodyPr wrap="square" lIns="0" tIns="0" rIns="0" bIns="0" rtlCol="0" anchor="ctr"/>
-          <a:lstStyle/>
-          <a:p>
-            <a:pPr indent="0" marL="0">
-              <a:buNone/>
-            </a:pPr>
-            <a:r>
-              <a:rPr lang="en-US" sz="1250" b="1" dirty="0">
+            <a:off x="7708392" y="2852928"/>
+            <a:ext cx="3282696" cy="219456"/>
+          </a:xfrm>
+          <a:prstGeom prst="rect">
+            <a:avLst/>
+          </a:prstGeom>
+          <a:noFill/>
+          <a:ln/>
+        </p:spPr>
+        <p:txBody>
+          <a:bodyPr wrap="square" lIns="0" tIns="0" rIns="0" bIns="0" rtlCol="0" anchor="ctr">
+            <a:normAutofit/>
+          </a:bodyPr>
+          <a:lstStyle/>
+          <a:p>
+            <a:pPr indent="0" marL="0">
+              <a:buNone/>
+            </a:pPr>
+            <a:r>
+              <a:rPr lang="en-US" sz="1160" b="1" dirty="0">
                 <a:solidFill>
                   <a:srgbClr val="0068B7"/>
                 </a:solidFill>
@@ -15422,7 +15428,7 @@
               </a:rPr>
               <a:t>Governance pathway</a:t>
             </a:r>
-            <a:endParaRPr lang="en-US" sz="1250" dirty="0"/>
+            <a:endParaRPr lang="en-US" sz="1160" dirty="0"/>
           </a:p>
         </p:txBody>
       </p:sp>
@@ -15434,7 +15440,7 @@
         </p:nvSpPr>
         <p:spPr>
           <a:xfrm>
-            <a:off x="8763000" y="3351276"/>
+            <a:off x="8717280" y="3406140"/>
             <a:ext cx="164592" cy="0"/>
           </a:xfrm>
           <a:prstGeom prst="line">
@@ -15457,8 +15463,8 @@
         </p:nvSpPr>
         <p:spPr>
           <a:xfrm>
-            <a:off x="7872984" y="3200400"/>
-            <a:ext cx="890016" cy="301752"/>
+            <a:off x="7781544" y="3255264"/>
+            <a:ext cx="935736" cy="301752"/>
           </a:xfrm>
           <a:prstGeom prst="roundRect">
             <a:avLst>
@@ -15484,8 +15490,8 @@
         </p:nvSpPr>
         <p:spPr>
           <a:xfrm>
-            <a:off x="7909560" y="3273552"/>
-            <a:ext cx="816864" cy="146304"/>
+            <a:off x="7818120" y="3328416"/>
+            <a:ext cx="862584" cy="146304"/>
           </a:xfrm>
           <a:prstGeom prst="rect">
             <a:avLst/>
@@ -15525,7 +15531,7 @@
         </p:nvSpPr>
         <p:spPr>
           <a:xfrm>
-            <a:off x="9817608" y="3351276"/>
+            <a:off x="9817608" y="3406140"/>
             <a:ext cx="164592" cy="0"/>
           </a:xfrm>
           <a:prstGeom prst="line">
@@ -15548,8 +15554,8 @@
         </p:nvSpPr>
         <p:spPr>
           <a:xfrm>
-            <a:off x="8927592" y="3200400"/>
-            <a:ext cx="890016" cy="301752"/>
+            <a:off x="8881872" y="3255264"/>
+            <a:ext cx="935736" cy="301752"/>
           </a:xfrm>
           <a:prstGeom prst="roundRect">
             <a:avLst>
@@ -15575,8 +15581,8 @@
         </p:nvSpPr>
         <p:spPr>
           <a:xfrm>
-            <a:off x="8964168" y="3273552"/>
-            <a:ext cx="816864" cy="146304"/>
+            <a:off x="8918448" y="3328416"/>
+            <a:ext cx="862584" cy="146304"/>
           </a:xfrm>
           <a:prstGeom prst="rect">
             <a:avLst/>
@@ -15616,8 +15622,8 @@
         </p:nvSpPr>
         <p:spPr>
           <a:xfrm>
-            <a:off x="9982200" y="3200400"/>
-            <a:ext cx="890016" cy="301752"/>
+            <a:off x="9982200" y="3255264"/>
+            <a:ext cx="935736" cy="301752"/>
           </a:xfrm>
           <a:prstGeom prst="roundRect">
             <a:avLst>
@@ -15643,8 +15649,8 @@
         </p:nvSpPr>
         <p:spPr>
           <a:xfrm>
-            <a:off x="10018776" y="3273552"/>
-            <a:ext cx="816864" cy="146304"/>
+            <a:off x="10018776" y="3328416"/>
+            <a:ext cx="862584" cy="146304"/>
           </a:xfrm>
           <a:prstGeom prst="rect">
             <a:avLst/>
@@ -15684,8 +15690,8 @@
         </p:nvSpPr>
         <p:spPr>
           <a:xfrm>
-            <a:off x="7854696" y="3694176"/>
-            <a:ext cx="3035808" cy="206654"/>
+            <a:off x="7763256" y="3749040"/>
+            <a:ext cx="3172968" cy="356616"/>
           </a:xfrm>
           <a:prstGeom prst="rect">
             <a:avLst/>
@@ -15703,7 +15709,7 @@
               <a:buNone/>
             </a:pPr>
             <a:r>
-              <a:rPr lang="en-US" sz="1120" dirty="0">
+              <a:rPr lang="en-US" sz="1040" dirty="0">
                 <a:solidFill>
                   <a:srgbClr val="17364A"/>
                 </a:solidFill>
@@ -15711,9 +15717,9 @@
                 <a:ea typeface="Aptos" pitchFamily="34" charset="-122"/>
                 <a:cs typeface="Aptos" pitchFamily="34" charset="-120"/>
               </a:rPr>
-              <a:t>A proposed AI use should move through documented review before it becomes an operational workflow.</a:t>
-            </a:r>
-            <a:endParaRPr lang="en-US" sz="1120" dirty="0"/>
+              <a:t>A proposed AI use should move through documented review before it.</a:t>
+            </a:r>
+            <a:endParaRPr lang="en-US" sz="1040" dirty="0"/>
           </a:p>
         </p:txBody>
       </p:sp>
@@ -15725,12 +15731,12 @@
         </p:nvSpPr>
         <p:spPr>
           <a:xfrm>
-            <a:off x="7635240" y="4184294"/>
-            <a:ext cx="3474720" cy="1466698"/>
+            <a:off x="7543800" y="4389120"/>
+            <a:ext cx="3611880" cy="1261872"/>
           </a:xfrm>
           <a:prstGeom prst="roundRect">
             <a:avLst>
-              <a:gd name="adj" fmla="val 7481"/>
+              <a:gd name="adj" fmla="val 8696"/>
             </a:avLst>
           </a:prstGeom>
           <a:solidFill>
@@ -15752,8 +15758,8 @@
         </p:nvSpPr>
         <p:spPr>
           <a:xfrm>
-            <a:off x="7799832" y="4330598"/>
-            <a:ext cx="3145536" cy="256032"/>
+            <a:off x="7708392" y="4517136"/>
+            <a:ext cx="3282696" cy="228600"/>
           </a:xfrm>
           <a:prstGeom prst="rect">
             <a:avLst/>
@@ -15769,7 +15775,7 @@
               <a:buNone/>
             </a:pPr>
             <a:r>
-              <a:rPr lang="en-US" sz="1300" b="1" dirty="0">
+              <a:rPr lang="en-US" sz="1220" b="1" dirty="0">
                 <a:solidFill>
                   <a:srgbClr val="0068B7"/>
                 </a:solidFill>
@@ -15779,7 +15785,7 @@
               </a:rPr>
               <a:t>What to document</a:t>
             </a:r>
-            <a:endParaRPr lang="en-US" sz="1300" dirty="0"/>
+            <a:endParaRPr lang="en-US" sz="1220" dirty="0"/>
           </a:p>
         </p:txBody>
       </p:sp>
@@ -15791,8 +15797,8 @@
         </p:nvSpPr>
         <p:spPr>
           <a:xfrm>
-            <a:off x="7799832" y="4659782"/>
-            <a:ext cx="3145536" cy="899770"/>
+            <a:off x="7708392" y="4828032"/>
+            <a:ext cx="3282696" cy="749808"/>
           </a:xfrm>
           <a:prstGeom prst="rect">
             <a:avLst/>
@@ -15810,7 +15816,7 @@
               <a:buNone/>
             </a:pPr>
             <a:r>
-              <a:rPr lang="en-US" sz="1320" dirty="0">
+              <a:rPr lang="en-US" sz="1220" dirty="0">
                 <a:solidFill>
                   <a:srgbClr val="17364A"/>
                 </a:solidFill>
@@ -15818,9 +15824,9 @@
                 <a:ea typeface="Aptos" pitchFamily="34" charset="-122"/>
                 <a:cs typeface="Aptos" pitchFamily="34" charset="-120"/>
               </a:rPr>
-              <a:t>Translate this concept into clear decision rights, review steps, documentation expectations, and escalation paths before an AI-supported workflow is approved.</a:t>
-            </a:r>
-            <a:endParaRPr lang="en-US" sz="1320" dirty="0"/>
+              <a:t>Translate this concept into clear decision rights, review steps, documentation.</a:t>
+            </a:r>
+            <a:endParaRPr lang="en-US" sz="1220" dirty="0"/>
           </a:p>
         </p:txBody>
       </p:sp>
@@ -16111,8 +16117,8 @@
         </p:nvSpPr>
         <p:spPr>
           <a:xfrm>
-            <a:off x="868680" y="1508760"/>
-            <a:ext cx="6309360" cy="4160520"/>
+            <a:off x="822960" y="1463040"/>
+            <a:ext cx="6565392" cy="4343400"/>
           </a:xfrm>
           <a:prstGeom prst="rect">
             <a:avLst/>
@@ -16130,7 +16136,7 @@
               <a:buNone/>
             </a:pPr>
             <a:r>
-              <a:rPr lang="en-US" sz="2100" dirty="0">
+              <a:rPr lang="en-US" sz="1920" dirty="0">
                 <a:solidFill>
                   <a:srgbClr val="003A63"/>
                 </a:solidFill>
@@ -16138,16 +16144,16 @@
                 <a:ea typeface="Aptos" pitchFamily="34" charset="-122"/>
                 <a:cs typeface="Aptos" pitchFamily="34" charset="-120"/>
               </a:rPr>
-              <a:t>• Public health agencies often face short-term funding cycles and urgent operational needs.</a:t>
-            </a:r>
-            <a:endParaRPr lang="en-US" sz="2100" dirty="0"/>
-          </a:p>
-          <a:p>
-            <a:pPr indent="0" marL="0">
-              <a:buNone/>
-            </a:pPr>
-            <a:r>
-              <a:rPr lang="en-US" sz="2100" dirty="0">
+              <a:t>• Public health agencies often face short-term funding cycles and urgent.</a:t>
+            </a:r>
+            <a:endParaRPr lang="en-US" sz="1920" dirty="0"/>
+          </a:p>
+          <a:p>
+            <a:pPr indent="0" marL="0">
+              <a:buNone/>
+            </a:pPr>
+            <a:r>
+              <a:rPr lang="en-US" sz="1920" dirty="0">
                 <a:solidFill>
                   <a:srgbClr val="003A63"/>
                 </a:solidFill>
@@ -16155,16 +16161,16 @@
                 <a:ea typeface="Aptos" pitchFamily="34" charset="-122"/>
                 <a:cs typeface="Aptos" pitchFamily="34" charset="-120"/>
               </a:rPr>
-              <a:t>• AI products may be marketed as quick solutions, but the true cost of responsible.</a:t>
-            </a:r>
-            <a:endParaRPr lang="en-US" sz="2100" dirty="0"/>
-          </a:p>
-          <a:p>
-            <a:pPr indent="0" marL="0">
-              <a:buNone/>
-            </a:pPr>
-            <a:r>
-              <a:rPr lang="en-US" sz="2100" dirty="0">
+              <a:t>• AI products may be marketed as quick solutions, but the true cost of.</a:t>
+            </a:r>
+            <a:endParaRPr lang="en-US" sz="1920" dirty="0"/>
+          </a:p>
+          <a:p>
+            <a:pPr indent="0" marL="0">
+              <a:buNone/>
+            </a:pPr>
+            <a:r>
+              <a:rPr lang="en-US" sz="1920" dirty="0">
                 <a:solidFill>
                   <a:srgbClr val="003A63"/>
                 </a:solidFill>
@@ -16172,9 +16178,9 @@
                 <a:ea typeface="Aptos" pitchFamily="34" charset="-122"/>
                 <a:cs typeface="Aptos" pitchFamily="34" charset="-120"/>
               </a:rPr>
-              <a:t>• Agencies may need to update data pipelines, configure security controls, develop validation.</a:t>
-            </a:r>
-            <a:endParaRPr lang="en-US" sz="2100" dirty="0"/>
+              <a:t>• Agencies may need to update data pipelines, configure security controls,.</a:t>
+            </a:r>
+            <a:endParaRPr lang="en-US" sz="1920" dirty="0"/>
           </a:p>
         </p:txBody>
       </p:sp>
@@ -16186,12 +16192,12 @@
         </p:nvSpPr>
         <p:spPr>
           <a:xfrm>
-            <a:off x="7635240" y="1325880"/>
-            <a:ext cx="3474720" cy="1207008"/>
+            <a:off x="7543800" y="1325880"/>
+            <a:ext cx="3611880" cy="1261872"/>
           </a:xfrm>
           <a:prstGeom prst="roundRect">
             <a:avLst>
-              <a:gd name="adj" fmla="val 9091"/>
+              <a:gd name="adj" fmla="val 8696"/>
             </a:avLst>
           </a:prstGeom>
           <a:solidFill>
@@ -16213,8 +16219,8 @@
         </p:nvSpPr>
         <p:spPr>
           <a:xfrm>
-            <a:off x="7799832" y="1472184"/>
-            <a:ext cx="3145536" cy="256032"/>
+            <a:off x="7708392" y="1453896"/>
+            <a:ext cx="3282696" cy="228600"/>
           </a:xfrm>
           <a:prstGeom prst="rect">
             <a:avLst/>
@@ -16230,7 +16236,7 @@
               <a:buNone/>
             </a:pPr>
             <a:r>
-              <a:rPr lang="en-US" sz="1300" b="1" dirty="0">
+              <a:rPr lang="en-US" sz="1220" b="1" dirty="0">
                 <a:solidFill>
                   <a:srgbClr val="0068B7"/>
                 </a:solidFill>
@@ -16240,7 +16246,7 @@
               </a:rPr>
               <a:t>Core concept</a:t>
             </a:r>
-            <a:endParaRPr lang="en-US" sz="1300" dirty="0"/>
+            <a:endParaRPr lang="en-US" sz="1220" dirty="0"/>
           </a:p>
         </p:txBody>
       </p:sp>
@@ -16252,8 +16258,8 @@
         </p:nvSpPr>
         <p:spPr>
           <a:xfrm>
-            <a:off x="7799832" y="1801368"/>
-            <a:ext cx="3145536" cy="640080"/>
+            <a:off x="7708392" y="1764792"/>
+            <a:ext cx="3282696" cy="749808"/>
           </a:xfrm>
           <a:prstGeom prst="rect">
             <a:avLst/>
@@ -16271,7 +16277,7 @@
               <a:buNone/>
             </a:pPr>
             <a:r>
-              <a:rPr lang="en-US" sz="1320" dirty="0">
+              <a:rPr lang="en-US" sz="1220" dirty="0">
                 <a:solidFill>
                   <a:srgbClr val="17364A"/>
                 </a:solidFill>
@@ -16279,9 +16285,9 @@
                 <a:ea typeface="Aptos" pitchFamily="34" charset="-122"/>
                 <a:cs typeface="Aptos" pitchFamily="34" charset="-120"/>
               </a:rPr>
-              <a:t>Public health agencies often face short-term funding cycles and urgent operational.</a:t>
-            </a:r>
-            <a:endParaRPr lang="en-US" sz="1320" dirty="0"/>
+              <a:t>Public health agencies often face short-term funding cycles and urgent.</a:t>
+            </a:r>
+            <a:endParaRPr lang="en-US" sz="1220" dirty="0"/>
           </a:p>
         </p:txBody>
       </p:sp>
@@ -16293,12 +16299,12 @@
         </p:nvSpPr>
         <p:spPr>
           <a:xfrm>
-            <a:off x="7635240" y="2670048"/>
-            <a:ext cx="3474720" cy="1377086"/>
+            <a:off x="7543800" y="2724912"/>
+            <a:ext cx="3611880" cy="1527048"/>
           </a:xfrm>
           <a:prstGeom prst="roundRect">
             <a:avLst>
-              <a:gd name="adj" fmla="val 7968"/>
+              <a:gd name="adj" fmla="val 7186"/>
             </a:avLst>
           </a:prstGeom>
           <a:solidFill>
@@ -16320,8 +16326,8 @@
         </p:nvSpPr>
         <p:spPr>
           <a:xfrm>
-            <a:off x="7799832" y="2816352"/>
-            <a:ext cx="3145536" cy="256032"/>
+            <a:off x="7708392" y="2852928"/>
+            <a:ext cx="3282696" cy="228600"/>
           </a:xfrm>
           <a:prstGeom prst="rect">
             <a:avLst/>
@@ -16337,7 +16343,7 @@
               <a:buNone/>
             </a:pPr>
             <a:r>
-              <a:rPr lang="en-US" sz="1300" b="1" dirty="0">
+              <a:rPr lang="en-US" sz="1220" b="1" dirty="0">
                 <a:solidFill>
                   <a:srgbClr val="0068B7"/>
                 </a:solidFill>
@@ -16347,7 +16353,7 @@
               </a:rPr>
               <a:t>Concept checkpoints</a:t>
             </a:r>
-            <a:endParaRPr lang="en-US" sz="1300" dirty="0"/>
+            <a:endParaRPr lang="en-US" sz="1220" dirty="0"/>
           </a:p>
         </p:txBody>
       </p:sp>
@@ -16359,8 +16365,8 @@
         </p:nvSpPr>
         <p:spPr>
           <a:xfrm>
-            <a:off x="7818120" y="3182112"/>
-            <a:ext cx="3090672" cy="718718"/>
+            <a:off x="7726680" y="3182112"/>
+            <a:ext cx="3227832" cy="960120"/>
           </a:xfrm>
           <a:prstGeom prst="rect">
             <a:avLst/>
@@ -16378,7 +16384,7 @@
               <a:buNone/>
             </a:pPr>
             <a:r>
-              <a:rPr lang="en-US" sz="1220" dirty="0">
+              <a:rPr lang="en-US" sz="1140" dirty="0">
                 <a:solidFill>
                   <a:srgbClr val="17364A"/>
                 </a:solidFill>
@@ -16386,16 +16392,16 @@
                 <a:ea typeface="Aptos" pitchFamily="34" charset="-122"/>
                 <a:cs typeface="Aptos" pitchFamily="34" charset="-120"/>
               </a:rPr>
-              <a:t>AI products may be marketed as quick solutions, but the true cost.</a:t>
-            </a:r>
-            <a:endParaRPr lang="en-US" sz="1220" dirty="0"/>
-          </a:p>
-          <a:p>
-            <a:pPr indent="0" marL="0">
-              <a:buNone/>
-            </a:pPr>
-            <a:r>
-              <a:rPr lang="en-US" sz="1220" dirty="0">
+              <a:t>AI products may be marketed as quick solutions,.</a:t>
+            </a:r>
+            <a:endParaRPr lang="en-US" sz="1140" dirty="0"/>
+          </a:p>
+          <a:p>
+            <a:pPr indent="0" marL="0">
+              <a:buNone/>
+            </a:pPr>
+            <a:r>
+              <a:rPr lang="en-US" sz="1140" dirty="0">
                 <a:solidFill>
                   <a:srgbClr val="17364A"/>
                 </a:solidFill>
@@ -16403,16 +16409,16 @@
                 <a:ea typeface="Aptos" pitchFamily="34" charset="-122"/>
                 <a:cs typeface="Aptos" pitchFamily="34" charset="-120"/>
               </a:rPr>
-              <a:t>Agencies may need to update data pipelines, configure security.</a:t>
-            </a:r>
-            <a:endParaRPr lang="en-US" sz="1220" dirty="0"/>
-          </a:p>
-          <a:p>
-            <a:pPr indent="0" marL="0">
-              <a:buNone/>
-            </a:pPr>
-            <a:r>
-              <a:rPr lang="en-US" sz="1220" dirty="0">
+              <a:t>Agencies may need to update data pipelines,.</a:t>
+            </a:r>
+            <a:endParaRPr lang="en-US" sz="1140" dirty="0"/>
+          </a:p>
+          <a:p>
+            <a:pPr indent="0" marL="0">
+              <a:buNone/>
+            </a:pPr>
+            <a:r>
+              <a:rPr lang="en-US" sz="1140" dirty="0">
                 <a:solidFill>
                   <a:srgbClr val="17364A"/>
                 </a:solidFill>
@@ -16422,7 +16428,7 @@
               </a:rPr>
               <a:t>A strong business case also protects mission focus.</a:t>
             </a:r>
-            <a:endParaRPr lang="en-US" sz="1220" dirty="0"/>
+            <a:endParaRPr lang="en-US" sz="1140" dirty="0"/>
           </a:p>
         </p:txBody>
       </p:sp>
@@ -16434,12 +16440,12 @@
         </p:nvSpPr>
         <p:spPr>
           <a:xfrm>
-            <a:off x="7635240" y="4184294"/>
-            <a:ext cx="3474720" cy="1466698"/>
+            <a:off x="7543800" y="4389120"/>
+            <a:ext cx="3611880" cy="1261872"/>
           </a:xfrm>
           <a:prstGeom prst="roundRect">
             <a:avLst>
-              <a:gd name="adj" fmla="val 7481"/>
+              <a:gd name="adj" fmla="val 8696"/>
             </a:avLst>
           </a:prstGeom>
           <a:solidFill>
@@ -16461,8 +16467,8 @@
         </p:nvSpPr>
         <p:spPr>
           <a:xfrm>
-            <a:off x="7799832" y="4330598"/>
-            <a:ext cx="3145536" cy="256032"/>
+            <a:off x="7708392" y="4517136"/>
+            <a:ext cx="3282696" cy="228600"/>
           </a:xfrm>
           <a:prstGeom prst="rect">
             <a:avLst/>
@@ -16478,7 +16484,7 @@
               <a:buNone/>
             </a:pPr>
             <a:r>
-              <a:rPr lang="en-US" sz="1300" b="1" dirty="0">
+              <a:rPr lang="en-US" sz="1220" b="1" dirty="0">
                 <a:solidFill>
                   <a:srgbClr val="0068B7"/>
                 </a:solidFill>
@@ -16488,7 +16494,7 @@
               </a:rPr>
               <a:t>Apply it</a:t>
             </a:r>
-            <a:endParaRPr lang="en-US" sz="1300" dirty="0"/>
+            <a:endParaRPr lang="en-US" sz="1220" dirty="0"/>
           </a:p>
         </p:txBody>
       </p:sp>
@@ -16500,8 +16506,8 @@
         </p:nvSpPr>
         <p:spPr>
           <a:xfrm>
-            <a:off x="7799832" y="4659782"/>
-            <a:ext cx="3145536" cy="899770"/>
+            <a:off x="7708392" y="4828032"/>
+            <a:ext cx="3282696" cy="749808"/>
           </a:xfrm>
           <a:prstGeom prst="rect">
             <a:avLst/>
@@ -16519,7 +16525,7 @@
               <a:buNone/>
             </a:pPr>
             <a:r>
-              <a:rPr lang="en-US" sz="1320" dirty="0">
+              <a:rPr lang="en-US" sz="1220" dirty="0">
                 <a:solidFill>
                   <a:srgbClr val="17364A"/>
                 </a:solidFill>
@@ -16527,9 +16533,9 @@
                 <a:ea typeface="Aptos" pitchFamily="34" charset="-122"/>
                 <a:cs typeface="Aptos" pitchFamily="34" charset="-120"/>
               </a:rPr>
-              <a:t>Connect the concept to public health purpose, responsible use, required safeguards, documentation, and the next action a department should take.</a:t>
-            </a:r>
-            <a:endParaRPr lang="en-US" sz="1320" dirty="0"/>
+              <a:t>Connect the concept to public health purpose, responsible use, required.</a:t>
+            </a:r>
+            <a:endParaRPr lang="en-US" sz="1220" dirty="0"/>
           </a:p>
         </p:txBody>
       </p:sp>
@@ -16820,8 +16826,8 @@
         </p:nvSpPr>
         <p:spPr>
           <a:xfrm>
-            <a:off x="868680" y="1508760"/>
-            <a:ext cx="6309360" cy="4160520"/>
+            <a:off x="822960" y="1463040"/>
+            <a:ext cx="6565392" cy="4343400"/>
           </a:xfrm>
           <a:prstGeom prst="rect">
             <a:avLst/>
@@ -16839,7 +16845,7 @@
               <a:buNone/>
             </a:pPr>
             <a:r>
-              <a:rPr lang="en-US" sz="2100" dirty="0">
+              <a:rPr lang="en-US" sz="1920" dirty="0">
                 <a:solidFill>
                   <a:srgbClr val="003A63"/>
                 </a:solidFill>
@@ -16847,16 +16853,16 @@
                 <a:ea typeface="Aptos" pitchFamily="34" charset="-122"/>
                 <a:cs typeface="Aptos" pitchFamily="34" charset="-120"/>
               </a:rPr>
-              <a:t>• A vendor offers an AI tool that promises to reduce disease investigator workload by.</a:t>
-            </a:r>
-            <a:endParaRPr lang="en-US" sz="2100" dirty="0"/>
-          </a:p>
-          <a:p>
-            <a:pPr indent="0" marL="0">
-              <a:buNone/>
-            </a:pPr>
-            <a:r>
-              <a:rPr lang="en-US" sz="2100" dirty="0">
+              <a:t>• A vendor offers an AI tool that promises to reduce disease investigator.</a:t>
+            </a:r>
+            <a:endParaRPr lang="en-US" sz="1920" dirty="0"/>
+          </a:p>
+          <a:p>
+            <a:pPr indent="0" marL="0">
+              <a:buNone/>
+            </a:pPr>
+            <a:r>
+              <a:rPr lang="en-US" sz="1920" dirty="0">
                 <a:solidFill>
                   <a:srgbClr val="003A63"/>
                 </a:solidFill>
@@ -16864,16 +16870,16 @@
                 <a:ea typeface="Aptos" pitchFamily="34" charset="-122"/>
                 <a:cs typeface="Aptos" pitchFamily="34" charset="-120"/>
               </a:rPr>
-              <a:t>• The annual license appears affordable, but the agency must also pay for integration with the.</a:t>
-            </a:r>
-            <a:endParaRPr lang="en-US" sz="2100" dirty="0"/>
-          </a:p>
-          <a:p>
-            <a:pPr indent="0" marL="0">
-              <a:buNone/>
-            </a:pPr>
-            <a:r>
-              <a:rPr lang="en-US" sz="2100" dirty="0">
+              <a:t>• The annual license appears affordable, but the agency must also pay for.</a:t>
+            </a:r>
+            <a:endParaRPr lang="en-US" sz="1920" dirty="0"/>
+          </a:p>
+          <a:p>
+            <a:pPr indent="0" marL="0">
+              <a:buNone/>
+            </a:pPr>
+            <a:r>
+              <a:rPr lang="en-US" sz="1920" dirty="0">
                 <a:solidFill>
                   <a:srgbClr val="003A63"/>
                 </a:solidFill>
@@ -16881,9 +16887,9 @@
                 <a:ea typeface="Aptos" pitchFamily="34" charset="-122"/>
                 <a:cs typeface="Aptos" pitchFamily="34" charset="-120"/>
               </a:rPr>
-              <a:t>• If those costs are not considered, leadership may underestimate the investment required.</a:t>
-            </a:r>
-            <a:endParaRPr lang="en-US" sz="2100" dirty="0"/>
+              <a:t>• If those costs are not considered, leadership may underestimate the.</a:t>
+            </a:r>
+            <a:endParaRPr lang="en-US" sz="1920" dirty="0"/>
           </a:p>
         </p:txBody>
       </p:sp>
@@ -16895,12 +16901,12 @@
         </p:nvSpPr>
         <p:spPr>
           <a:xfrm>
-            <a:off x="7635240" y="1325880"/>
-            <a:ext cx="3474720" cy="1255471"/>
+            <a:off x="7543800" y="1325880"/>
+            <a:ext cx="3611880" cy="1261872"/>
           </a:xfrm>
           <a:prstGeom prst="roundRect">
             <a:avLst>
-              <a:gd name="adj" fmla="val 8740"/>
+              <a:gd name="adj" fmla="val 8696"/>
             </a:avLst>
           </a:prstGeom>
           <a:solidFill>
@@ -16922,8 +16928,8 @@
         </p:nvSpPr>
         <p:spPr>
           <a:xfrm>
-            <a:off x="7799832" y="1472184"/>
-            <a:ext cx="3145536" cy="256032"/>
+            <a:off x="7708392" y="1453896"/>
+            <a:ext cx="3282696" cy="228600"/>
           </a:xfrm>
           <a:prstGeom prst="rect">
             <a:avLst/>
@@ -16939,7 +16945,7 @@
               <a:buNone/>
             </a:pPr>
             <a:r>
-              <a:rPr lang="en-US" sz="1300" b="1" dirty="0">
+              <a:rPr lang="en-US" sz="1220" b="1" dirty="0">
                 <a:solidFill>
                   <a:srgbClr val="0068B7"/>
                 </a:solidFill>
@@ -16949,7 +16955,7 @@
               </a:rPr>
               <a:t>Core concept</a:t>
             </a:r>
-            <a:endParaRPr lang="en-US" sz="1300" dirty="0"/>
+            <a:endParaRPr lang="en-US" sz="1220" dirty="0"/>
           </a:p>
         </p:txBody>
       </p:sp>
@@ -16961,8 +16967,8 @@
         </p:nvSpPr>
         <p:spPr>
           <a:xfrm>
-            <a:off x="7799832" y="1801368"/>
-            <a:ext cx="3145536" cy="688543"/>
+            <a:off x="7708392" y="1764792"/>
+            <a:ext cx="3282696" cy="749808"/>
           </a:xfrm>
           <a:prstGeom prst="rect">
             <a:avLst/>
@@ -16980,7 +16986,7 @@
               <a:buNone/>
             </a:pPr>
             <a:r>
-              <a:rPr lang="en-US" sz="1320" dirty="0">
+              <a:rPr lang="en-US" sz="1220" dirty="0">
                 <a:solidFill>
                   <a:srgbClr val="17364A"/>
                 </a:solidFill>
@@ -16988,9 +16994,9 @@
                 <a:ea typeface="Aptos" pitchFamily="34" charset="-122"/>
                 <a:cs typeface="Aptos" pitchFamily="34" charset="-120"/>
               </a:rPr>
-              <a:t>A vendor offers an AI tool that promises to reduce disease investigator workload by summarizing case.</a:t>
-            </a:r>
-            <a:endParaRPr lang="en-US" sz="1320" dirty="0"/>
+              <a:t>A vendor offers an AI tool that promises to reduce disease investigator workload.</a:t>
+            </a:r>
+            <a:endParaRPr lang="en-US" sz="1220" dirty="0"/>
           </a:p>
         </p:txBody>
       </p:sp>
@@ -17002,12 +17008,12 @@
         </p:nvSpPr>
         <p:spPr>
           <a:xfrm>
-            <a:off x="7635240" y="2718511"/>
-            <a:ext cx="3474720" cy="1328623"/>
+            <a:off x="7543800" y="2724912"/>
+            <a:ext cx="3611880" cy="1527048"/>
           </a:xfrm>
           <a:prstGeom prst="roundRect">
             <a:avLst>
-              <a:gd name="adj" fmla="val 8259"/>
+              <a:gd name="adj" fmla="val 7186"/>
             </a:avLst>
           </a:prstGeom>
           <a:solidFill>
@@ -17029,8 +17035,8 @@
         </p:nvSpPr>
         <p:spPr>
           <a:xfrm>
-            <a:off x="7799832" y="2864815"/>
-            <a:ext cx="3145536" cy="256032"/>
+            <a:off x="7708392" y="2852928"/>
+            <a:ext cx="3282696" cy="228600"/>
           </a:xfrm>
           <a:prstGeom prst="rect">
             <a:avLst/>
@@ -17046,7 +17052,7 @@
               <a:buNone/>
             </a:pPr>
             <a:r>
-              <a:rPr lang="en-US" sz="1300" b="1" dirty="0">
+              <a:rPr lang="en-US" sz="1220" b="1" dirty="0">
                 <a:solidFill>
                   <a:srgbClr val="0068B7"/>
                 </a:solidFill>
@@ -17056,7 +17062,7 @@
               </a:rPr>
               <a:t>Concept checkpoints</a:t>
             </a:r>
-            <a:endParaRPr lang="en-US" sz="1300" dirty="0"/>
+            <a:endParaRPr lang="en-US" sz="1220" dirty="0"/>
           </a:p>
         </p:txBody>
       </p:sp>
@@ -17068,8 +17074,8 @@
         </p:nvSpPr>
         <p:spPr>
           <a:xfrm>
-            <a:off x="7818120" y="3230575"/>
-            <a:ext cx="3090672" cy="670255"/>
+            <a:off x="7726680" y="3182112"/>
+            <a:ext cx="3227832" cy="960120"/>
           </a:xfrm>
           <a:prstGeom prst="rect">
             <a:avLst/>
@@ -17087,7 +17093,7 @@
               <a:buNone/>
             </a:pPr>
             <a:r>
-              <a:rPr lang="en-US" sz="1220" dirty="0">
+              <a:rPr lang="en-US" sz="1140" dirty="0">
                 <a:solidFill>
                   <a:srgbClr val="17364A"/>
                 </a:solidFill>
@@ -17095,16 +17101,16 @@
                 <a:ea typeface="Aptos" pitchFamily="34" charset="-122"/>
                 <a:cs typeface="Aptos" pitchFamily="34" charset="-120"/>
               </a:rPr>
-              <a:t>A vendor offers an AI tool that promises to reduce disease.</a:t>
-            </a:r>
-            <a:endParaRPr lang="en-US" sz="1220" dirty="0"/>
-          </a:p>
-          <a:p>
-            <a:pPr indent="0" marL="0">
-              <a:buNone/>
-            </a:pPr>
-            <a:r>
-              <a:rPr lang="en-US" sz="1220" dirty="0">
+              <a:t>A vendor offers an AI tool that promises to reduce.</a:t>
+            </a:r>
+            <a:endParaRPr lang="en-US" sz="1140" dirty="0"/>
+          </a:p>
+          <a:p>
+            <a:pPr indent="0" marL="0">
+              <a:buNone/>
+            </a:pPr>
+            <a:r>
+              <a:rPr lang="en-US" sz="1140" dirty="0">
                 <a:solidFill>
                   <a:srgbClr val="17364A"/>
                 </a:solidFill>
@@ -17112,16 +17118,16 @@
                 <a:ea typeface="Aptos" pitchFamily="34" charset="-122"/>
                 <a:cs typeface="Aptos" pitchFamily="34" charset="-120"/>
               </a:rPr>
-              <a:t>The annual license appears affordable, but the agency must also.</a:t>
-            </a:r>
-            <a:endParaRPr lang="en-US" sz="1220" dirty="0"/>
-          </a:p>
-          <a:p>
-            <a:pPr indent="0" marL="0">
-              <a:buNone/>
-            </a:pPr>
-            <a:r>
-              <a:rPr lang="en-US" sz="1220" dirty="0">
+              <a:t>The annual license appears affordable, but the.</a:t>
+            </a:r>
+            <a:endParaRPr lang="en-US" sz="1140" dirty="0"/>
+          </a:p>
+          <a:p>
+            <a:pPr indent="0" marL="0">
+              <a:buNone/>
+            </a:pPr>
+            <a:r>
+              <a:rPr lang="en-US" sz="1140" dirty="0">
                 <a:solidFill>
                   <a:srgbClr val="17364A"/>
                 </a:solidFill>
@@ -17129,9 +17135,9 @@
                 <a:ea typeface="Aptos" pitchFamily="34" charset="-122"/>
                 <a:cs typeface="Aptos" pitchFamily="34" charset="-120"/>
               </a:rPr>
-              <a:t>A business case review asks whether the tool will meaningfully.</a:t>
-            </a:r>
-            <a:endParaRPr lang="en-US" sz="1220" dirty="0"/>
+              <a:t>A business case review asks whether the tool will.</a:t>
+            </a:r>
+            <a:endParaRPr lang="en-US" sz="1140" dirty="0"/>
           </a:p>
         </p:txBody>
       </p:sp>
@@ -17143,12 +17149,12 @@
         </p:nvSpPr>
         <p:spPr>
           <a:xfrm>
-            <a:off x="7635240" y="4184294"/>
-            <a:ext cx="3474720" cy="1466698"/>
+            <a:off x="7543800" y="4389120"/>
+            <a:ext cx="3611880" cy="1261872"/>
           </a:xfrm>
           <a:prstGeom prst="roundRect">
             <a:avLst>
-              <a:gd name="adj" fmla="val 7481"/>
+              <a:gd name="adj" fmla="val 8696"/>
             </a:avLst>
           </a:prstGeom>
           <a:solidFill>
@@ -17170,8 +17176,8 @@
         </p:nvSpPr>
         <p:spPr>
           <a:xfrm>
-            <a:off x="7799832" y="4330598"/>
-            <a:ext cx="3145536" cy="256032"/>
+            <a:off x="7708392" y="4517136"/>
+            <a:ext cx="3282696" cy="228600"/>
           </a:xfrm>
           <a:prstGeom prst="rect">
             <a:avLst/>
@@ -17187,7 +17193,7 @@
               <a:buNone/>
             </a:pPr>
             <a:r>
-              <a:rPr lang="en-US" sz="1300" b="1" dirty="0">
+              <a:rPr lang="en-US" sz="1220" b="1" dirty="0">
                 <a:solidFill>
                   <a:srgbClr val="0068B7"/>
                 </a:solidFill>
@@ -17197,7 +17203,7 @@
               </a:rPr>
               <a:t>Apply it</a:t>
             </a:r>
-            <a:endParaRPr lang="en-US" sz="1300" dirty="0"/>
+            <a:endParaRPr lang="en-US" sz="1220" dirty="0"/>
           </a:p>
         </p:txBody>
       </p:sp>
@@ -17209,8 +17215,8 @@
         </p:nvSpPr>
         <p:spPr>
           <a:xfrm>
-            <a:off x="7799832" y="4659782"/>
-            <a:ext cx="3145536" cy="899770"/>
+            <a:off x="7708392" y="4828032"/>
+            <a:ext cx="3282696" cy="749808"/>
           </a:xfrm>
           <a:prstGeom prst="rect">
             <a:avLst/>
@@ -17228,7 +17234,7 @@
               <a:buNone/>
             </a:pPr>
             <a:r>
-              <a:rPr lang="en-US" sz="1320" dirty="0">
+              <a:rPr lang="en-US" sz="1220" dirty="0">
                 <a:solidFill>
                   <a:srgbClr val="17364A"/>
                 </a:solidFill>
@@ -17236,9 +17242,9 @@
                 <a:ea typeface="Aptos" pitchFamily="34" charset="-122"/>
                 <a:cs typeface="Aptos" pitchFamily="34" charset="-120"/>
               </a:rPr>
-              <a:t>Connect the concept to public health purpose, responsible use, required safeguards, documentation, and the next action a department should take.</a:t>
-            </a:r>
-            <a:endParaRPr lang="en-US" sz="1320" dirty="0"/>
+              <a:t>Connect the concept to public health purpose, responsible use, required.</a:t>
+            </a:r>
+            <a:endParaRPr lang="en-US" sz="1220" dirty="0"/>
           </a:p>
         </p:txBody>
       </p:sp>

--- a/downloads/presentations/modules/exe-420.pptx
+++ b/downloads/presentations/modules/exe-420.pptx
@@ -9866,7 +9866,7 @@
                 <a:ea typeface="Aptos" pitchFamily="34" charset="-122"/>
                 <a:cs typeface="Aptos" pitchFamily="34" charset="-120"/>
               </a:rPr>
-              <a:t>• 1. What is the strongest reason this module topic belongs in AI leadership.</a:t>
+              <a:t>1. What is the strongest reason this module topic belongs in AI leadership.</a:t>
             </a:r>
             <a:endParaRPr lang="en-US" sz="1920" dirty="0"/>
           </a:p>
@@ -9883,7 +9883,7 @@
                 <a:ea typeface="Aptos" pitchFamily="34" charset="-122"/>
                 <a:cs typeface="Aptos" pitchFamily="34" charset="-120"/>
               </a:rPr>
-              <a:t>• 2. Which practice best supports accountable public health AI governance?</a:t>
+              <a:t>2. Which practice best supports accountable public health AI governance?</a:t>
             </a:r>
             <a:endParaRPr lang="en-US" sz="1920" dirty="0"/>
           </a:p>
@@ -9900,7 +9900,7 @@
                 <a:ea typeface="Aptos" pitchFamily="34" charset="-122"/>
                 <a:cs typeface="Aptos" pitchFamily="34" charset="-120"/>
               </a:rPr>
-              <a:t>• 3. When should an AI use case be escalated for leadership or governance.</a:t>
+              <a:t>3. When should an AI use case be escalated for leadership or governance.</a:t>
             </a:r>
             <a:endParaRPr lang="en-US" sz="1920" dirty="0"/>
           </a:p>
@@ -10007,7 +10007,7 @@
                 <a:ea typeface="Aptos" pitchFamily="34" charset="-122"/>
                 <a:cs typeface="Aptos" pitchFamily="34" charset="-120"/>
               </a:rPr>
-              <a:t>1. What is the strongest reason this module topic belongs in AI leadership and.</a:t>
+              <a:t>What is the strongest reason this module topic belongs in AI leadership and.</a:t>
             </a:r>
             <a:endParaRPr lang="en-US" sz="1220" dirty="0"/>
           </a:p>
@@ -10114,41 +10114,7 @@
                 <a:ea typeface="Aptos" pitchFamily="34" charset="-122"/>
                 <a:cs typeface="Aptos" pitchFamily="34" charset="-120"/>
               </a:rPr>
-              <a:t>1.</a:t>
-            </a:r>
-            <a:endParaRPr lang="en-US" sz="1140" dirty="0"/>
-          </a:p>
-          <a:p>
-            <a:pPr indent="0" marL="0">
-              <a:buNone/>
-            </a:pPr>
-            <a:r>
-              <a:rPr lang="en-US" sz="1140" dirty="0">
-                <a:solidFill>
-                  <a:srgbClr val="17364A"/>
-                </a:solidFill>
-                <a:latin typeface="Aptos" pitchFamily="34" charset="0"/>
-                <a:ea typeface="Aptos" pitchFamily="34" charset="-122"/>
-                <a:cs typeface="Aptos" pitchFamily="34" charset="-120"/>
-              </a:rPr>
               <a:t>What is the strongest reason this module topic.</a:t>
-            </a:r>
-            <a:endParaRPr lang="en-US" sz="1140" dirty="0"/>
-          </a:p>
-          <a:p>
-            <a:pPr indent="0" marL="0">
-              <a:buNone/>
-            </a:pPr>
-            <a:r>
-              <a:rPr lang="en-US" sz="1140" dirty="0">
-                <a:solidFill>
-                  <a:srgbClr val="17364A"/>
-                </a:solidFill>
-                <a:latin typeface="Aptos" pitchFamily="34" charset="0"/>
-                <a:ea typeface="Aptos" pitchFamily="34" charset="-122"/>
-                <a:cs typeface="Aptos" pitchFamily="34" charset="-120"/>
-              </a:rPr>
-              <a:t>2.</a:t>
             </a:r>
             <a:endParaRPr lang="en-US" sz="1140" dirty="0"/>
           </a:p>
